--- a/docs/presentation/NetraJyoti_AI_Capstone_Demo_Deck.pptx
+++ b/docs/presentation/NetraJyoti_AI_Capstone_Demo_Deck.pptx
@@ -2,23 +2,25 @@
 <file path=ppt/presentation.xml><?xml version="1.0" encoding="utf-8"?>
 <p:presentation xmlns:p="http://schemas.openxmlformats.org/presentationml/2006/main">
   <p:sldMasterIdLst>
-    <p:sldMasterId xmlns:r="http://schemas.openxmlformats.org/officeDocument/2006/relationships" id="2147483648" r:id="Rb9d2bb8176674198"/>
+    <p:sldMasterId xmlns:r="http://schemas.openxmlformats.org/officeDocument/2006/relationships" id="2147483648" r:id="Rf75708d4ee7c40b0"/>
   </p:sldMasterIdLst>
   <p:notesMasterIdLst>
-    <p:notesMasterId xmlns:r="http://schemas.openxmlformats.org/officeDocument/2006/relationships" r:id="R5121620b9b3c4e22"/>
+    <p:notesMasterId xmlns:r="http://schemas.openxmlformats.org/officeDocument/2006/relationships" r:id="R2aaa831b0ee548f1"/>
   </p:notesMasterIdLst>
   <p:sldIdLst>
-    <p:sldId xmlns:r="http://schemas.openxmlformats.org/officeDocument/2006/relationships" id="256" r:id="R6b68776f6d9a43c2"/>
-    <p:sldId xmlns:r="http://schemas.openxmlformats.org/officeDocument/2006/relationships" id="257" r:id="R39728e42a8d14dae"/>
-    <p:sldId xmlns:r="http://schemas.openxmlformats.org/officeDocument/2006/relationships" id="258" r:id="R26bfcb9bdbd046b7"/>
-    <p:sldId xmlns:r="http://schemas.openxmlformats.org/officeDocument/2006/relationships" id="259" r:id="Ra51ccd59ce414b50"/>
-    <p:sldId xmlns:r="http://schemas.openxmlformats.org/officeDocument/2006/relationships" id="260" r:id="Rfa7bffa9910945b6"/>
-    <p:sldId xmlns:r="http://schemas.openxmlformats.org/officeDocument/2006/relationships" id="261" r:id="Red10757078f9493f"/>
-    <p:sldId xmlns:r="http://schemas.openxmlformats.org/officeDocument/2006/relationships" id="262" r:id="R164cfa7b256f4daf"/>
-    <p:sldId xmlns:r="http://schemas.openxmlformats.org/officeDocument/2006/relationships" id="263" r:id="R512787f3857f4d3f"/>
-    <p:sldId xmlns:r="http://schemas.openxmlformats.org/officeDocument/2006/relationships" id="264" r:id="R40d3183feefc443a"/>
-    <p:sldId xmlns:r="http://schemas.openxmlformats.org/officeDocument/2006/relationships" id="265" r:id="Rf06a6e805a5547f7"/>
-    <p:sldId xmlns:r="http://schemas.openxmlformats.org/officeDocument/2006/relationships" id="266" r:id="Rf2b281d688a945f2"/>
+    <p:sldId xmlns:r="http://schemas.openxmlformats.org/officeDocument/2006/relationships" id="256" r:id="R1d85e9daa84f4402"/>
+    <p:sldId xmlns:r="http://schemas.openxmlformats.org/officeDocument/2006/relationships" id="257" r:id="Rfa1277a1dff34b05"/>
+    <p:sldId xmlns:r="http://schemas.openxmlformats.org/officeDocument/2006/relationships" id="258" r:id="R381cd9b12f6d45f2"/>
+    <p:sldId xmlns:r="http://schemas.openxmlformats.org/officeDocument/2006/relationships" id="259" r:id="Rb109f643c1d04018"/>
+    <p:sldId xmlns:r="http://schemas.openxmlformats.org/officeDocument/2006/relationships" id="260" r:id="R0ed5b814fd6248c1"/>
+    <p:sldId xmlns:r="http://schemas.openxmlformats.org/officeDocument/2006/relationships" id="261" r:id="R0a73cb2175884d47"/>
+    <p:sldId xmlns:r="http://schemas.openxmlformats.org/officeDocument/2006/relationships" id="262" r:id="Rb58e79eec0df43b0"/>
+    <p:sldId xmlns:r="http://schemas.openxmlformats.org/officeDocument/2006/relationships" id="263" r:id="R42c8ca5eeb2341a1"/>
+    <p:sldId xmlns:r="http://schemas.openxmlformats.org/officeDocument/2006/relationships" id="264" r:id="R2f6c2a407c6e4abb"/>
+    <p:sldId xmlns:r="http://schemas.openxmlformats.org/officeDocument/2006/relationships" id="265" r:id="Rbf5e19ddc8174c33"/>
+    <p:sldId xmlns:r="http://schemas.openxmlformats.org/officeDocument/2006/relationships" id="266" r:id="R32051bcea67b468a"/>
+    <p:sldId xmlns:r="http://schemas.openxmlformats.org/officeDocument/2006/relationships" id="267" r:id="R8b8fe513eb504769"/>
+    <p:sldId xmlns:r="http://schemas.openxmlformats.org/officeDocument/2006/relationships" id="268" r:id="R619865c3b3e748da"/>
   </p:sldIdLst>
   <p:sldSz cx="12192000" cy="6858000"/>
   <p:notesSz cx="6858000" cy="9144000"/>
@@ -614,6 +616,138 @@
 </p:notes>
 </file>
 
+<file path=ppt/notesSlides/notesSlide12.xml><?xml version="1.0" encoding="utf-8"?>
+<p:notes xmlns:p="http://schemas.openxmlformats.org/presentationml/2006/main">
+  <p:cSld>
+    <p:spTree>
+      <p:nvGrpSpPr>
+        <p:cNvPr id="1" name=""/>
+        <p:cNvGrpSpPr/>
+        <p:nvPr/>
+      </p:nvGrpSpPr>
+      <p:grpSpPr>
+        <a:xfrm xmlns:a="http://schemas.openxmlformats.org/drawingml/2006/main"/>
+      </p:grpSpPr>
+      <p:sp>
+        <p:nvSpPr>
+          <p:cNvPr id="2" name="Slide Image Placeholder 1"/>
+          <p:cNvSpPr>
+            <a:spLocks xmlns:a="http://schemas.openxmlformats.org/drawingml/2006/main" noGrp="1"/>
+          </p:cNvSpPr>
+          <p:nvPr>
+            <p:ph type="sldImg" idx="0"/>
+          </p:nvPr>
+        </p:nvSpPr>
+        <p:spPr/>
+      </p:sp>
+      <p:sp>
+        <p:nvSpPr>
+          <p:cNvPr id="3" name="Notes Placeholder 2"/>
+          <p:cNvSpPr>
+            <a:spLocks xmlns:a="http://schemas.openxmlformats.org/drawingml/2006/main" noGrp="1"/>
+          </p:cNvSpPr>
+          <p:nvPr>
+            <p:ph type="body" idx="1"/>
+          </p:nvPr>
+        </p:nvSpPr>
+        <p:spPr/>
+        <p:txBody>
+          <a:bodyPr xmlns:a="http://schemas.openxmlformats.org/drawingml/2006/main"/>
+          <a:lstStyle xmlns:a="http://schemas.openxmlformats.org/drawingml/2006/main"/>
+          <a:p xmlns:a="http://schemas.openxmlformats.org/drawingml/2006/main"/>
+        </p:txBody>
+      </p:sp>
+      <p:sp>
+        <p:nvSpPr>
+          <p:cNvPr id="4" name="Slide Number Placeholder 3"/>
+          <p:cNvSpPr>
+            <a:spLocks xmlns:a="http://schemas.openxmlformats.org/drawingml/2006/main" noGrp="1"/>
+          </p:cNvSpPr>
+          <p:nvPr>
+            <p:ph type="sldNum" idx="5"/>
+          </p:nvPr>
+        </p:nvSpPr>
+        <p:spPr/>
+        <p:txBody>
+          <a:bodyPr xmlns:a="http://schemas.openxmlformats.org/drawingml/2006/main"/>
+          <a:lstStyle xmlns:a="http://schemas.openxmlformats.org/drawingml/2006/main"/>
+          <a:p xmlns:a="http://schemas.openxmlformats.org/drawingml/2006/main"/>
+        </p:txBody>
+      </p:sp>
+    </p:spTree>
+  </p:cSld>
+  <p:clrMapOvr>
+    <a:masterClrMapping xmlns:a="http://schemas.openxmlformats.org/drawingml/2006/main"/>
+  </p:clrMapOvr>
+</p:notes>
+</file>
+
+<file path=ppt/notesSlides/notesSlide13.xml><?xml version="1.0" encoding="utf-8"?>
+<p:notes xmlns:p="http://schemas.openxmlformats.org/presentationml/2006/main">
+  <p:cSld>
+    <p:spTree>
+      <p:nvGrpSpPr>
+        <p:cNvPr id="1" name=""/>
+        <p:cNvGrpSpPr/>
+        <p:nvPr/>
+      </p:nvGrpSpPr>
+      <p:grpSpPr>
+        <a:xfrm xmlns:a="http://schemas.openxmlformats.org/drawingml/2006/main"/>
+      </p:grpSpPr>
+      <p:sp>
+        <p:nvSpPr>
+          <p:cNvPr id="2" name="Slide Image Placeholder 1"/>
+          <p:cNvSpPr>
+            <a:spLocks xmlns:a="http://schemas.openxmlformats.org/drawingml/2006/main" noGrp="1"/>
+          </p:cNvSpPr>
+          <p:nvPr>
+            <p:ph type="sldImg" idx="0"/>
+          </p:nvPr>
+        </p:nvSpPr>
+        <p:spPr/>
+      </p:sp>
+      <p:sp>
+        <p:nvSpPr>
+          <p:cNvPr id="3" name="Notes Placeholder 2"/>
+          <p:cNvSpPr>
+            <a:spLocks xmlns:a="http://schemas.openxmlformats.org/drawingml/2006/main" noGrp="1"/>
+          </p:cNvSpPr>
+          <p:nvPr>
+            <p:ph type="body" idx="1"/>
+          </p:nvPr>
+        </p:nvSpPr>
+        <p:spPr/>
+        <p:txBody>
+          <a:bodyPr xmlns:a="http://schemas.openxmlformats.org/drawingml/2006/main"/>
+          <a:lstStyle xmlns:a="http://schemas.openxmlformats.org/drawingml/2006/main"/>
+          <a:p xmlns:a="http://schemas.openxmlformats.org/drawingml/2006/main"/>
+        </p:txBody>
+      </p:sp>
+      <p:sp>
+        <p:nvSpPr>
+          <p:cNvPr id="4" name="Slide Number Placeholder 3"/>
+          <p:cNvSpPr>
+            <a:spLocks xmlns:a="http://schemas.openxmlformats.org/drawingml/2006/main" noGrp="1"/>
+          </p:cNvSpPr>
+          <p:nvPr>
+            <p:ph type="sldNum" idx="5"/>
+          </p:nvPr>
+        </p:nvSpPr>
+        <p:spPr/>
+        <p:txBody>
+          <a:bodyPr xmlns:a="http://schemas.openxmlformats.org/drawingml/2006/main"/>
+          <a:lstStyle xmlns:a="http://schemas.openxmlformats.org/drawingml/2006/main"/>
+          <a:p xmlns:a="http://schemas.openxmlformats.org/drawingml/2006/main"/>
+        </p:txBody>
+      </p:sp>
+    </p:spTree>
+  </p:cSld>
+  <p:clrMapOvr>
+    <a:masterClrMapping xmlns:a="http://schemas.openxmlformats.org/drawingml/2006/main"/>
+  </p:clrMapOvr>
+</p:notes>
+</file>
+
 <file path=ppt/notesSlides/notesSlide2.xml><?xml version="1.0" encoding="utf-8"?>
 <p:notes xmlns:p="http://schemas.openxmlformats.org/presentationml/2006/main">
   <p:cSld>
@@ -1200,7 +1334,7 @@
   </p:cSld>
   <p:clrMap bg1="lt1" tx1="dk1" bg2="lt2" tx2="dk2" accent1="accent1" accent2="accent2" accent3="accent3" accent4="accent4" accent5="accent5" accent6="accent6" hlink="hlink" folHlink="folHlink"/>
   <p:sldLayoutIdLst>
-    <p:sldLayoutId xmlns:r="http://schemas.openxmlformats.org/officeDocument/2006/relationships" id="2147483649" r:id="R357a1ec4b9c044af"/>
+    <p:sldLayoutId xmlns:r="http://schemas.openxmlformats.org/officeDocument/2006/relationships" id="2147483649" r:id="R0c1f2f9357024e49"/>
   </p:sldLayoutIdLst>
   <p:txStyles>
     <p:titleStyle>
@@ -2303,7 +2437,7 @@
           <p:cNvPr id="12" name="">
             <a:extLst xmlns:a="http://schemas.openxmlformats.org/drawingml/2006/main">
               <a:ext uri="{FF2B5EF4-FFF2-40B4-BE49-F238E27FC236}">
-                <a16:creationId xmlns:a16="http://schemas.microsoft.com/office/drawing/2014/main" id="{DF28933A-A4D4-45B4-A47A-D78134DFCD49}"/>
+                <a16:creationId xmlns:a16="http://schemas.microsoft.com/office/drawing/2014/main" id="{3EC45FE9-929E-4369-BC72-E13F633B42F7}"/>
               </a:ext>
             </a:extLst>
           </p:cNvPr>
@@ -2333,7 +2467,7 @@
           <p:cNvPr id="13" name="">
             <a:extLst xmlns:a="http://schemas.openxmlformats.org/drawingml/2006/main">
               <a:ext uri="{FF2B5EF4-FFF2-40B4-BE49-F238E27FC236}">
-                <a16:creationId xmlns:a16="http://schemas.microsoft.com/office/drawing/2014/main" id="{57809CAC-37C8-4F36-A54B-3A20E0FAB02E}"/>
+                <a16:creationId xmlns:a16="http://schemas.microsoft.com/office/drawing/2014/main" id="{B733FBF3-6E07-4412-B202-6E884FD0EC64}"/>
               </a:ext>
             </a:extLst>
           </p:cNvPr>
@@ -2363,7 +2497,7 @@
           <p:cNvPr id="14" name="">
             <a:extLst xmlns:a="http://schemas.openxmlformats.org/drawingml/2006/main">
               <a:ext uri="{FF2B5EF4-FFF2-40B4-BE49-F238E27FC236}">
-                <a16:creationId xmlns:a16="http://schemas.microsoft.com/office/drawing/2014/main" id="{7DEB110C-0B13-4FB0-A8B9-D6E9070C93FA}"/>
+                <a16:creationId xmlns:a16="http://schemas.microsoft.com/office/drawing/2014/main" id="{B2DD5855-FE6D-4166-8F8A-0A5B7E4CC85E}"/>
               </a:ext>
             </a:extLst>
           </p:cNvPr>
@@ -2393,7 +2527,7 @@
           <p:cNvPr id="15" name="">
             <a:extLst xmlns:a="http://schemas.openxmlformats.org/drawingml/2006/main">
               <a:ext uri="{FF2B5EF4-FFF2-40B4-BE49-F238E27FC236}">
-                <a16:creationId xmlns:a16="http://schemas.microsoft.com/office/drawing/2014/main" id="{BCD0DF2D-5338-4144-A179-876F113374E5}"/>
+                <a16:creationId xmlns:a16="http://schemas.microsoft.com/office/drawing/2014/main" id="{8E45BAFA-1F15-45B2-A800-3A948E5B5722}"/>
               </a:ext>
             </a:extLst>
           </p:cNvPr>
@@ -2450,7 +2584,7 @@
           <p:cNvPr id="16" name="">
             <a:extLst xmlns:a="http://schemas.openxmlformats.org/drawingml/2006/main">
               <a:ext uri="{FF2B5EF4-FFF2-40B4-BE49-F238E27FC236}">
-                <a16:creationId xmlns:a16="http://schemas.microsoft.com/office/drawing/2014/main" id="{5A70FE30-273F-4939-8DCC-58C826849BD0}"/>
+                <a16:creationId xmlns:a16="http://schemas.microsoft.com/office/drawing/2014/main" id="{43C2B640-615D-4B55-88EA-E64A9E0B736C}"/>
               </a:ext>
             </a:extLst>
           </p:cNvPr>
@@ -2530,7 +2664,7 @@
           <p:cNvPr id="17" name="">
             <a:extLst xmlns:a="http://schemas.openxmlformats.org/drawingml/2006/main">
               <a:ext uri="{FF2B5EF4-FFF2-40B4-BE49-F238E27FC236}">
-                <a16:creationId xmlns:a16="http://schemas.microsoft.com/office/drawing/2014/main" id="{D5FB369E-E20C-4FE5-8A4B-588CB8DE7DC1}"/>
+                <a16:creationId xmlns:a16="http://schemas.microsoft.com/office/drawing/2014/main" id="{82A9AB05-00EB-4167-A9DD-0D01E974FA04}"/>
               </a:ext>
             </a:extLst>
           </p:cNvPr>
@@ -2560,7 +2694,7 @@
           <p:cNvPr id="18" name="">
             <a:extLst xmlns:a="http://schemas.openxmlformats.org/drawingml/2006/main">
               <a:ext uri="{FF2B5EF4-FFF2-40B4-BE49-F238E27FC236}">
-                <a16:creationId xmlns:a16="http://schemas.microsoft.com/office/drawing/2014/main" id="{23C623C6-9B87-4D8E-8804-59834B47E2C3}"/>
+                <a16:creationId xmlns:a16="http://schemas.microsoft.com/office/drawing/2014/main" id="{E47D6B2A-0413-48E1-AFFB-C08918341641}"/>
               </a:ext>
             </a:extLst>
           </p:cNvPr>
@@ -2640,7 +2774,7 @@
           <p:cNvPr id="19" name="">
             <a:extLst xmlns:a="http://schemas.openxmlformats.org/drawingml/2006/main">
               <a:ext uri="{FF2B5EF4-FFF2-40B4-BE49-F238E27FC236}">
-                <a16:creationId xmlns:a16="http://schemas.microsoft.com/office/drawing/2014/main" id="{5000B94F-A5BB-40A3-8E38-32CEE370182C}"/>
+                <a16:creationId xmlns:a16="http://schemas.microsoft.com/office/drawing/2014/main" id="{53764A19-B9E1-4404-9E62-22AF753EE05F}"/>
               </a:ext>
             </a:extLst>
           </p:cNvPr>
@@ -2720,7 +2854,7 @@
           <p:cNvPr id="20" name="">
             <a:extLst xmlns:a="http://schemas.openxmlformats.org/drawingml/2006/main">
               <a:ext uri="{FF2B5EF4-FFF2-40B4-BE49-F238E27FC236}">
-                <a16:creationId xmlns:a16="http://schemas.microsoft.com/office/drawing/2014/main" id="{F10CB5A1-0630-44BD-AF74-F801F4A8F398}"/>
+                <a16:creationId xmlns:a16="http://schemas.microsoft.com/office/drawing/2014/main" id="{39FB8633-CFF7-41C0-AC7A-C7698BBA9F95}"/>
               </a:ext>
             </a:extLst>
           </p:cNvPr>
@@ -2777,7 +2911,7 @@
           <p:cNvPr id="21" name="">
             <a:extLst xmlns:a="http://schemas.openxmlformats.org/drawingml/2006/main">
               <a:ext uri="{FF2B5EF4-FFF2-40B4-BE49-F238E27FC236}">
-                <a16:creationId xmlns:a16="http://schemas.microsoft.com/office/drawing/2014/main" id="{4F2F6D2F-C184-4BCC-A253-8F7F980D19F9}"/>
+                <a16:creationId xmlns:a16="http://schemas.microsoft.com/office/drawing/2014/main" id="{07A4D393-200C-486E-8BEF-6D329C3AD57D}"/>
               </a:ext>
             </a:extLst>
           </p:cNvPr>
@@ -2834,7 +2968,7 @@
           <p:cNvPr id="22" name="">
             <a:extLst xmlns:a="http://schemas.openxmlformats.org/drawingml/2006/main">
               <a:ext uri="{FF2B5EF4-FFF2-40B4-BE49-F238E27FC236}">
-                <a16:creationId xmlns:a16="http://schemas.microsoft.com/office/drawing/2014/main" id="{4D4D0619-6004-4E74-8D06-DD96A6F11EFF}"/>
+                <a16:creationId xmlns:a16="http://schemas.microsoft.com/office/drawing/2014/main" id="{589D2D31-11F1-4568-A40B-C1AF6963E729}"/>
               </a:ext>
             </a:extLst>
           </p:cNvPr>
@@ -2891,7 +3025,7 @@
           <p:cNvPr id="23" name="">
             <a:extLst xmlns:a="http://schemas.openxmlformats.org/drawingml/2006/main">
               <a:ext uri="{FF2B5EF4-FFF2-40B4-BE49-F238E27FC236}">
-                <a16:creationId xmlns:a16="http://schemas.microsoft.com/office/drawing/2014/main" id="{AFCE4D4F-D700-42DA-AEA3-628093403A4A}"/>
+                <a16:creationId xmlns:a16="http://schemas.microsoft.com/office/drawing/2014/main" id="{CBEE1D33-BF5D-4CAA-A035-0AAEAA7C3EFA}"/>
               </a:ext>
             </a:extLst>
           </p:cNvPr>
@@ -2921,7 +3055,7 @@
           <p:cNvPr id="24" name="">
             <a:extLst xmlns:a="http://schemas.openxmlformats.org/drawingml/2006/main">
               <a:ext uri="{FF2B5EF4-FFF2-40B4-BE49-F238E27FC236}">
-                <a16:creationId xmlns:a16="http://schemas.microsoft.com/office/drawing/2014/main" id="{6E985843-4258-41A9-8942-C9F2B243A504}"/>
+                <a16:creationId xmlns:a16="http://schemas.microsoft.com/office/drawing/2014/main" id="{AF4D1115-108B-4A13-A4A2-644416BA2173}"/>
               </a:ext>
             </a:extLst>
           </p:cNvPr>
@@ -2978,7 +3112,7 @@
           <p:cNvPr id="25" name="">
             <a:extLst xmlns:a="http://schemas.openxmlformats.org/drawingml/2006/main">
               <a:ext uri="{FF2B5EF4-FFF2-40B4-BE49-F238E27FC236}">
-                <a16:creationId xmlns:a16="http://schemas.microsoft.com/office/drawing/2014/main" id="{601B3A92-902D-44F5-BF13-31AC4EB23203}"/>
+                <a16:creationId xmlns:a16="http://schemas.microsoft.com/office/drawing/2014/main" id="{684A5E74-13C4-483E-B1A8-09E2C98BAF22}"/>
               </a:ext>
             </a:extLst>
           </p:cNvPr>
@@ -3008,7 +3142,7 @@
           <p:cNvPr id="26" name="">
             <a:extLst xmlns:a="http://schemas.openxmlformats.org/drawingml/2006/main">
               <a:ext uri="{FF2B5EF4-FFF2-40B4-BE49-F238E27FC236}">
-                <a16:creationId xmlns:a16="http://schemas.microsoft.com/office/drawing/2014/main" id="{C6C90D46-DAF6-4091-B8B4-2DD3DCDB6ECA}"/>
+                <a16:creationId xmlns:a16="http://schemas.microsoft.com/office/drawing/2014/main" id="{0C778DD6-3F2C-4CDE-BB63-7B117307920A}"/>
               </a:ext>
             </a:extLst>
           </p:cNvPr>
@@ -3087,7 +3221,7 @@
           <p:cNvPr id="29" name="">
             <a:extLst xmlns:a="http://schemas.openxmlformats.org/drawingml/2006/main">
               <a:ext uri="{FF2B5EF4-FFF2-40B4-BE49-F238E27FC236}">
-                <a16:creationId xmlns:a16="http://schemas.microsoft.com/office/drawing/2014/main" id="{B9BA1084-8C5A-43A8-9131-A0B012E50D9F}"/>
+                <a16:creationId xmlns:a16="http://schemas.microsoft.com/office/drawing/2014/main" id="{F5F5C9FF-8B10-4C16-B0EC-E6805985CC91}"/>
               </a:ext>
             </a:extLst>
           </p:cNvPr>
@@ -3117,7 +3251,7 @@
           <p:cNvPr id="2" name="">
             <a:extLst xmlns:a="http://schemas.openxmlformats.org/drawingml/2006/main">
               <a:ext uri="{FF2B5EF4-FFF2-40B4-BE49-F238E27FC236}">
-                <a16:creationId xmlns:a16="http://schemas.microsoft.com/office/drawing/2014/main" id="{95EA1C69-BEEC-4BAB-9920-DFF9287B3CAE}"/>
+                <a16:creationId xmlns:a16="http://schemas.microsoft.com/office/drawing/2014/main" id="{C35AF737-13EC-4FB1-BD52-B3DB7D474482}"/>
               </a:ext>
             </a:extLst>
           </p:cNvPr>
@@ -3174,7 +3308,7 @@
           <p:cNvPr id="3" name="">
             <a:extLst xmlns:a="http://schemas.openxmlformats.org/drawingml/2006/main">
               <a:ext uri="{FF2B5EF4-FFF2-40B4-BE49-F238E27FC236}">
-                <a16:creationId xmlns:a16="http://schemas.microsoft.com/office/drawing/2014/main" id="{F16C0A9C-0631-43DD-B3EA-D7D536314C71}"/>
+                <a16:creationId xmlns:a16="http://schemas.microsoft.com/office/drawing/2014/main" id="{08ADA32A-B9D9-4CA3-B56C-207524321E03}"/>
               </a:ext>
             </a:extLst>
           </p:cNvPr>
@@ -3231,7 +3365,7 @@
           <p:cNvPr id="4" name="">
             <a:extLst xmlns:a="http://schemas.openxmlformats.org/drawingml/2006/main">
               <a:ext uri="{FF2B5EF4-FFF2-40B4-BE49-F238E27FC236}">
-                <a16:creationId xmlns:a16="http://schemas.microsoft.com/office/drawing/2014/main" id="{FE491DE4-D601-4BE7-B729-AA04055A3C76}"/>
+                <a16:creationId xmlns:a16="http://schemas.microsoft.com/office/drawing/2014/main" id="{A19C072D-FFB0-4024-8714-F3F5A1F08D28}"/>
               </a:ext>
             </a:extLst>
           </p:cNvPr>
@@ -3288,7 +3422,7 @@
           <p:cNvPr id="5" name="">
             <a:extLst xmlns:a="http://schemas.openxmlformats.org/drawingml/2006/main">
               <a:ext uri="{FF2B5EF4-FFF2-40B4-BE49-F238E27FC236}">
-                <a16:creationId xmlns:a16="http://schemas.microsoft.com/office/drawing/2014/main" id="{4207355F-1AD7-44F0-B6CC-164E72EE7F29}"/>
+                <a16:creationId xmlns:a16="http://schemas.microsoft.com/office/drawing/2014/main" id="{E9ED07BD-9BC1-4C8B-B704-BF5D9F3DDFA5}"/>
               </a:ext>
             </a:extLst>
           </p:cNvPr>
@@ -3345,7 +3479,7 @@
           <p:cNvPr id="6" name="">
             <a:extLst xmlns:a="http://schemas.openxmlformats.org/drawingml/2006/main">
               <a:ext uri="{FF2B5EF4-FFF2-40B4-BE49-F238E27FC236}">
-                <a16:creationId xmlns:a16="http://schemas.microsoft.com/office/drawing/2014/main" id="{225747B6-77A6-426C-A621-33DEC4E148D2}"/>
+                <a16:creationId xmlns:a16="http://schemas.microsoft.com/office/drawing/2014/main" id="{72247874-A5A8-4E98-B9E3-4725AAF9787F}"/>
               </a:ext>
             </a:extLst>
           </p:cNvPr>
@@ -3375,7 +3509,7 @@
           <p:cNvPr id="7" name="">
             <a:extLst xmlns:a="http://schemas.openxmlformats.org/drawingml/2006/main">
               <a:ext uri="{FF2B5EF4-FFF2-40B4-BE49-F238E27FC236}">
-                <a16:creationId xmlns:a16="http://schemas.microsoft.com/office/drawing/2014/main" id="{D9B1C3A3-A6CC-45E2-BD36-330C98614985}"/>
+                <a16:creationId xmlns:a16="http://schemas.microsoft.com/office/drawing/2014/main" id="{2E22E02B-D2D9-496E-916F-7887477AB85D}"/>
               </a:ext>
             </a:extLst>
           </p:cNvPr>
@@ -3409,7 +3543,7 @@
           <p:cNvPr id="8" name="">
             <a:extLst xmlns:a="http://schemas.openxmlformats.org/drawingml/2006/main">
               <a:ext uri="{FF2B5EF4-FFF2-40B4-BE49-F238E27FC236}">
-                <a16:creationId xmlns:a16="http://schemas.microsoft.com/office/drawing/2014/main" id="{5E28D383-48F6-4B66-A745-87AAB4956D10}"/>
+                <a16:creationId xmlns:a16="http://schemas.microsoft.com/office/drawing/2014/main" id="{58B39B4D-27D5-43DB-AB17-A838C603960D}"/>
               </a:ext>
             </a:extLst>
           </p:cNvPr>
@@ -3441,7 +3575,7 @@
           <p:cNvPr id="9" name="">
             <a:extLst xmlns:a="http://schemas.openxmlformats.org/drawingml/2006/main">
               <a:ext uri="{FF2B5EF4-FFF2-40B4-BE49-F238E27FC236}">
-                <a16:creationId xmlns:a16="http://schemas.microsoft.com/office/drawing/2014/main" id="{E65F2459-0594-40BC-9C75-322FFFE1C187}"/>
+                <a16:creationId xmlns:a16="http://schemas.microsoft.com/office/drawing/2014/main" id="{1A7127CF-3163-4A20-BEB7-BC6DDEBA7827}"/>
               </a:ext>
             </a:extLst>
           </p:cNvPr>
@@ -3498,7 +3632,7 @@
           <p:cNvPr id="10" name="">
             <a:extLst xmlns:a="http://schemas.openxmlformats.org/drawingml/2006/main">
               <a:ext uri="{FF2B5EF4-FFF2-40B4-BE49-F238E27FC236}">
-                <a16:creationId xmlns:a16="http://schemas.microsoft.com/office/drawing/2014/main" id="{8B993937-06B6-4527-B208-D75A6E381E55}"/>
+                <a16:creationId xmlns:a16="http://schemas.microsoft.com/office/drawing/2014/main" id="{63E5101E-96E8-416F-A6AD-85CB0324BAF0}"/>
               </a:ext>
             </a:extLst>
           </p:cNvPr>
@@ -3555,7 +3689,7 @@
           <p:cNvPr id="11" name="">
             <a:extLst xmlns:a="http://schemas.openxmlformats.org/drawingml/2006/main">
               <a:ext uri="{FF2B5EF4-FFF2-40B4-BE49-F238E27FC236}">
-                <a16:creationId xmlns:a16="http://schemas.microsoft.com/office/drawing/2014/main" id="{F4D654A1-AC03-441E-B0DA-3D273EE92658}"/>
+                <a16:creationId xmlns:a16="http://schemas.microsoft.com/office/drawing/2014/main" id="{3EFBF571-659C-47E7-AF8C-95C4A2B653F5}"/>
               </a:ext>
             </a:extLst>
           </p:cNvPr>
@@ -3612,7 +3746,7 @@
           <p:cNvPr id="12" name="">
             <a:extLst xmlns:a="http://schemas.openxmlformats.org/drawingml/2006/main">
               <a:ext uri="{FF2B5EF4-FFF2-40B4-BE49-F238E27FC236}">
-                <a16:creationId xmlns:a16="http://schemas.microsoft.com/office/drawing/2014/main" id="{E7C1C2FB-2E7B-4B09-9DE6-DAACF8C14C2C}"/>
+                <a16:creationId xmlns:a16="http://schemas.microsoft.com/office/drawing/2014/main" id="{B56A4123-4C31-4D45-BA77-4F56A86C2436}"/>
               </a:ext>
             </a:extLst>
           </p:cNvPr>
@@ -3669,7 +3803,7 @@
           <p:cNvPr id="13" name="">
             <a:extLst xmlns:a="http://schemas.openxmlformats.org/drawingml/2006/main">
               <a:ext uri="{FF2B5EF4-FFF2-40B4-BE49-F238E27FC236}">
-                <a16:creationId xmlns:a16="http://schemas.microsoft.com/office/drawing/2014/main" id="{F15A28CB-E05A-4311-BBE6-365BB537C85E}"/>
+                <a16:creationId xmlns:a16="http://schemas.microsoft.com/office/drawing/2014/main" id="{76BA06DD-57C7-4EF4-8362-2CA709632DEC}"/>
               </a:ext>
             </a:extLst>
           </p:cNvPr>
@@ -3703,7 +3837,7 @@
           <p:cNvPr id="14" name="">
             <a:extLst xmlns:a="http://schemas.openxmlformats.org/drawingml/2006/main">
               <a:ext uri="{FF2B5EF4-FFF2-40B4-BE49-F238E27FC236}">
-                <a16:creationId xmlns:a16="http://schemas.microsoft.com/office/drawing/2014/main" id="{742CDC0F-44A3-43F1-9130-26BA2955E5AC}"/>
+                <a16:creationId xmlns:a16="http://schemas.microsoft.com/office/drawing/2014/main" id="{7BF4832C-3EC7-4C63-A78A-9F96917AD0FC}"/>
               </a:ext>
             </a:extLst>
           </p:cNvPr>
@@ -3735,7 +3869,7 @@
           <p:cNvPr id="15" name="">
             <a:extLst xmlns:a="http://schemas.openxmlformats.org/drawingml/2006/main">
               <a:ext uri="{FF2B5EF4-FFF2-40B4-BE49-F238E27FC236}">
-                <a16:creationId xmlns:a16="http://schemas.microsoft.com/office/drawing/2014/main" id="{AF5276E6-BF2D-4C44-AC5C-FA7566E5018B}"/>
+                <a16:creationId xmlns:a16="http://schemas.microsoft.com/office/drawing/2014/main" id="{ACC62658-BBC3-40F9-8F66-F23BFFD32E1C}"/>
               </a:ext>
             </a:extLst>
           </p:cNvPr>
@@ -3792,7 +3926,7 @@
           <p:cNvPr id="16" name="">
             <a:extLst xmlns:a="http://schemas.openxmlformats.org/drawingml/2006/main">
               <a:ext uri="{FF2B5EF4-FFF2-40B4-BE49-F238E27FC236}">
-                <a16:creationId xmlns:a16="http://schemas.microsoft.com/office/drawing/2014/main" id="{7C910F13-781E-4C6F-A41A-7521323F95A9}"/>
+                <a16:creationId xmlns:a16="http://schemas.microsoft.com/office/drawing/2014/main" id="{FA48AC3A-7C4C-4DCA-9467-7758430F08D3}"/>
               </a:ext>
             </a:extLst>
           </p:cNvPr>
@@ -3849,7 +3983,7 @@
           <p:cNvPr id="17" name="">
             <a:extLst xmlns:a="http://schemas.openxmlformats.org/drawingml/2006/main">
               <a:ext uri="{FF2B5EF4-FFF2-40B4-BE49-F238E27FC236}">
-                <a16:creationId xmlns:a16="http://schemas.microsoft.com/office/drawing/2014/main" id="{F4C0130E-AA48-440A-AA90-E1025C1DDE71}"/>
+                <a16:creationId xmlns:a16="http://schemas.microsoft.com/office/drawing/2014/main" id="{8BBCF0BF-A7E2-48BF-86FA-270137CA492D}"/>
               </a:ext>
             </a:extLst>
           </p:cNvPr>
@@ -3906,7 +4040,7 @@
           <p:cNvPr id="18" name="">
             <a:extLst xmlns:a="http://schemas.openxmlformats.org/drawingml/2006/main">
               <a:ext uri="{FF2B5EF4-FFF2-40B4-BE49-F238E27FC236}">
-                <a16:creationId xmlns:a16="http://schemas.microsoft.com/office/drawing/2014/main" id="{9F95E0F4-6EF8-4B50-AB25-8992BE896937}"/>
+                <a16:creationId xmlns:a16="http://schemas.microsoft.com/office/drawing/2014/main" id="{4F4130B3-2ABC-41C3-A0E5-B2DFA7C7F477}"/>
               </a:ext>
             </a:extLst>
           </p:cNvPr>
@@ -3963,7 +4097,7 @@
           <p:cNvPr id="19" name="">
             <a:extLst xmlns:a="http://schemas.openxmlformats.org/drawingml/2006/main">
               <a:ext uri="{FF2B5EF4-FFF2-40B4-BE49-F238E27FC236}">
-                <a16:creationId xmlns:a16="http://schemas.microsoft.com/office/drawing/2014/main" id="{D7CF30D9-C6FC-4B64-B9EF-976A0E3DF138}"/>
+                <a16:creationId xmlns:a16="http://schemas.microsoft.com/office/drawing/2014/main" id="{E7B42ACA-219C-4917-9B25-6A20F83D2BC6}"/>
               </a:ext>
             </a:extLst>
           </p:cNvPr>
@@ -3997,7 +4131,7 @@
           <p:cNvPr id="20" name="">
             <a:extLst xmlns:a="http://schemas.openxmlformats.org/drawingml/2006/main">
               <a:ext uri="{FF2B5EF4-FFF2-40B4-BE49-F238E27FC236}">
-                <a16:creationId xmlns:a16="http://schemas.microsoft.com/office/drawing/2014/main" id="{88D6F87E-E913-48D9-A36C-1E10E8A21E1F}"/>
+                <a16:creationId xmlns:a16="http://schemas.microsoft.com/office/drawing/2014/main" id="{346FC3ED-7C18-44B3-8C70-CF49328BE00B}"/>
               </a:ext>
             </a:extLst>
           </p:cNvPr>
@@ -4029,7 +4163,7 @@
           <p:cNvPr id="21" name="">
             <a:extLst xmlns:a="http://schemas.openxmlformats.org/drawingml/2006/main">
               <a:ext uri="{FF2B5EF4-FFF2-40B4-BE49-F238E27FC236}">
-                <a16:creationId xmlns:a16="http://schemas.microsoft.com/office/drawing/2014/main" id="{992CADCE-8489-4320-A50B-430D2CF3F033}"/>
+                <a16:creationId xmlns:a16="http://schemas.microsoft.com/office/drawing/2014/main" id="{65D27B71-DE06-4A3E-906C-0050DB0E5869}"/>
               </a:ext>
             </a:extLst>
           </p:cNvPr>
@@ -4086,7 +4220,7 @@
           <p:cNvPr id="22" name="">
             <a:extLst xmlns:a="http://schemas.openxmlformats.org/drawingml/2006/main">
               <a:ext uri="{FF2B5EF4-FFF2-40B4-BE49-F238E27FC236}">
-                <a16:creationId xmlns:a16="http://schemas.microsoft.com/office/drawing/2014/main" id="{978B525C-4F85-4A22-891D-9A4FBA55CB2A}"/>
+                <a16:creationId xmlns:a16="http://schemas.microsoft.com/office/drawing/2014/main" id="{AD2571AD-BEEA-4DA3-A41C-484CE0ED601D}"/>
               </a:ext>
             </a:extLst>
           </p:cNvPr>
@@ -4143,7 +4277,7 @@
           <p:cNvPr id="23" name="">
             <a:extLst xmlns:a="http://schemas.openxmlformats.org/drawingml/2006/main">
               <a:ext uri="{FF2B5EF4-FFF2-40B4-BE49-F238E27FC236}">
-                <a16:creationId xmlns:a16="http://schemas.microsoft.com/office/drawing/2014/main" id="{CE2316F7-A700-4AAB-9D6F-77078FEB310E}"/>
+                <a16:creationId xmlns:a16="http://schemas.microsoft.com/office/drawing/2014/main" id="{8E35905E-1765-4EB3-8027-C8780788702B}"/>
               </a:ext>
             </a:extLst>
           </p:cNvPr>
@@ -4200,7 +4334,7 @@
           <p:cNvPr id="24" name="">
             <a:extLst xmlns:a="http://schemas.openxmlformats.org/drawingml/2006/main">
               <a:ext uri="{FF2B5EF4-FFF2-40B4-BE49-F238E27FC236}">
-                <a16:creationId xmlns:a16="http://schemas.microsoft.com/office/drawing/2014/main" id="{E3D4EB02-623F-49B7-84C0-D8E13CFA05F1}"/>
+                <a16:creationId xmlns:a16="http://schemas.microsoft.com/office/drawing/2014/main" id="{5ED6821C-1675-45AD-88EC-7257C39459C7}"/>
               </a:ext>
             </a:extLst>
           </p:cNvPr>
@@ -4257,7 +4391,7 @@
           <p:cNvPr id="25" name="">
             <a:extLst xmlns:a="http://schemas.openxmlformats.org/drawingml/2006/main">
               <a:ext uri="{FF2B5EF4-FFF2-40B4-BE49-F238E27FC236}">
-                <a16:creationId xmlns:a16="http://schemas.microsoft.com/office/drawing/2014/main" id="{B6222794-76BE-434F-90F6-40FF1A40385C}"/>
+                <a16:creationId xmlns:a16="http://schemas.microsoft.com/office/drawing/2014/main" id="{32700AB2-7DD9-4C95-9F08-7E50AE09F23F}"/>
               </a:ext>
             </a:extLst>
           </p:cNvPr>
@@ -4289,7 +4423,7 @@
           <p:cNvPr id="26" name="">
             <a:extLst xmlns:a="http://schemas.openxmlformats.org/drawingml/2006/main">
               <a:ext uri="{FF2B5EF4-FFF2-40B4-BE49-F238E27FC236}">
-                <a16:creationId xmlns:a16="http://schemas.microsoft.com/office/drawing/2014/main" id="{D7C0C576-87AC-4603-A4B1-819A0FD7E77F}"/>
+                <a16:creationId xmlns:a16="http://schemas.microsoft.com/office/drawing/2014/main" id="{082C6631-162B-406F-BF50-2519975816C1}"/>
               </a:ext>
             </a:extLst>
           </p:cNvPr>
@@ -4346,7 +4480,7 @@
           <p:cNvPr id="27" name="">
             <a:extLst xmlns:a="http://schemas.openxmlformats.org/drawingml/2006/main">
               <a:ext uri="{FF2B5EF4-FFF2-40B4-BE49-F238E27FC236}">
-                <a16:creationId xmlns:a16="http://schemas.microsoft.com/office/drawing/2014/main" id="{6FB9129D-05C2-4EA4-9C1B-8D56F01EEBBF}"/>
+                <a16:creationId xmlns:a16="http://schemas.microsoft.com/office/drawing/2014/main" id="{494C142E-FB2D-4127-B5B6-5F0BF17AE02C}"/>
               </a:ext>
             </a:extLst>
           </p:cNvPr>
@@ -4403,7 +4537,7 @@
           <p:cNvPr id="28" name="">
             <a:extLst xmlns:a="http://schemas.openxmlformats.org/drawingml/2006/main">
               <a:ext uri="{FF2B5EF4-FFF2-40B4-BE49-F238E27FC236}">
-                <a16:creationId xmlns:a16="http://schemas.microsoft.com/office/drawing/2014/main" id="{D0677020-D5EF-4F6C-ACB7-D86A1FDA2DC3}"/>
+                <a16:creationId xmlns:a16="http://schemas.microsoft.com/office/drawing/2014/main" id="{68FEBAF1-D49E-4C67-874A-5F8977FF4397}"/>
               </a:ext>
             </a:extLst>
           </p:cNvPr>
@@ -4458,7 +4592,7 @@
     </p:spTree>
     <p:extLst>
       <p:ext uri="{BB962C8B-B14F-4D97-AF65-F5344CB8AC3E}">
-        <p14:creationId xmlns:p14="http://schemas.microsoft.com/office/powerpoint/2010/main" val="834058474"/>
+        <p14:creationId xmlns:p14="http://schemas.microsoft.com/office/powerpoint/2010/main" val="10996520"/>
       </p:ext>
     </p:extLst>
   </p:cSld>
@@ -4482,7 +4616,7 @@
           <p:cNvPr id="23" name="">
             <a:extLst xmlns:a="http://schemas.openxmlformats.org/drawingml/2006/main">
               <a:ext uri="{FF2B5EF4-FFF2-40B4-BE49-F238E27FC236}">
-                <a16:creationId xmlns:a16="http://schemas.microsoft.com/office/drawing/2014/main" id="{149F3221-EFF5-4E72-8181-BBF925E2E234}"/>
+                <a16:creationId xmlns:a16="http://schemas.microsoft.com/office/drawing/2014/main" id="{CE3210AA-2902-447B-8CDE-E1FD6E0EC0A5}"/>
               </a:ext>
             </a:extLst>
           </p:cNvPr>
@@ -4512,7 +4646,7 @@
           <p:cNvPr id="2" name="">
             <a:extLst xmlns:a="http://schemas.openxmlformats.org/drawingml/2006/main">
               <a:ext uri="{FF2B5EF4-FFF2-40B4-BE49-F238E27FC236}">
-                <a16:creationId xmlns:a16="http://schemas.microsoft.com/office/drawing/2014/main" id="{70EED1D1-8FC0-495B-AC2A-898062C99A7E}"/>
+                <a16:creationId xmlns:a16="http://schemas.microsoft.com/office/drawing/2014/main" id="{10915634-A6CB-4417-B2BB-44721772C712}"/>
               </a:ext>
             </a:extLst>
           </p:cNvPr>
@@ -4569,7 +4703,7 @@
           <p:cNvPr id="3" name="">
             <a:extLst xmlns:a="http://schemas.openxmlformats.org/drawingml/2006/main">
               <a:ext uri="{FF2B5EF4-FFF2-40B4-BE49-F238E27FC236}">
-                <a16:creationId xmlns:a16="http://schemas.microsoft.com/office/drawing/2014/main" id="{A4E6E5DF-FF4A-48AB-A8A4-C19C17E56EAD}"/>
+                <a16:creationId xmlns:a16="http://schemas.microsoft.com/office/drawing/2014/main" id="{B9DFA4FE-8155-48DE-B31C-E288815B4F0E}"/>
               </a:ext>
             </a:extLst>
           </p:cNvPr>
@@ -4626,7 +4760,7 @@
           <p:cNvPr id="4" name="">
             <a:extLst xmlns:a="http://schemas.openxmlformats.org/drawingml/2006/main">
               <a:ext uri="{FF2B5EF4-FFF2-40B4-BE49-F238E27FC236}">
-                <a16:creationId xmlns:a16="http://schemas.microsoft.com/office/drawing/2014/main" id="{F9A43B23-F7EE-4BBF-A44D-26DA3F949700}"/>
+                <a16:creationId xmlns:a16="http://schemas.microsoft.com/office/drawing/2014/main" id="{7B499BFA-43E6-41E4-B410-E3F36769011A}"/>
               </a:ext>
             </a:extLst>
           </p:cNvPr>
@@ -4683,7 +4817,7 @@
           <p:cNvPr id="5" name="">
             <a:extLst xmlns:a="http://schemas.openxmlformats.org/drawingml/2006/main">
               <a:ext uri="{FF2B5EF4-FFF2-40B4-BE49-F238E27FC236}">
-                <a16:creationId xmlns:a16="http://schemas.microsoft.com/office/drawing/2014/main" id="{B82F519D-474E-4740-ABC6-9E054717E812}"/>
+                <a16:creationId xmlns:a16="http://schemas.microsoft.com/office/drawing/2014/main" id="{ADD949DB-61DF-4576-A37E-35370D2F3927}"/>
               </a:ext>
             </a:extLst>
           </p:cNvPr>
@@ -4740,7 +4874,7 @@
           <p:cNvPr id="6" name="">
             <a:extLst xmlns:a="http://schemas.openxmlformats.org/drawingml/2006/main">
               <a:ext uri="{FF2B5EF4-FFF2-40B4-BE49-F238E27FC236}">
-                <a16:creationId xmlns:a16="http://schemas.microsoft.com/office/drawing/2014/main" id="{C0181C35-F3B8-4A85-915B-2E4AD5B365E1}"/>
+                <a16:creationId xmlns:a16="http://schemas.microsoft.com/office/drawing/2014/main" id="{FA102D37-BF07-4993-A3A2-66DC019CC64E}"/>
               </a:ext>
             </a:extLst>
           </p:cNvPr>
@@ -4770,7 +4904,7 @@
           <p:cNvPr id="7" name="">
             <a:extLst xmlns:a="http://schemas.openxmlformats.org/drawingml/2006/main">
               <a:ext uri="{FF2B5EF4-FFF2-40B4-BE49-F238E27FC236}">
-                <a16:creationId xmlns:a16="http://schemas.microsoft.com/office/drawing/2014/main" id="{B19B7DA6-08E1-43CE-A4C8-767A5203A7AB}"/>
+                <a16:creationId xmlns:a16="http://schemas.microsoft.com/office/drawing/2014/main" id="{CA7A335F-EDE4-472F-9AED-DF0CB8660DEB}"/>
               </a:ext>
             </a:extLst>
           </p:cNvPr>
@@ -4800,7 +4934,7 @@
           <p:cNvPr id="8" name="">
             <a:extLst xmlns:a="http://schemas.openxmlformats.org/drawingml/2006/main">
               <a:ext uri="{FF2B5EF4-FFF2-40B4-BE49-F238E27FC236}">
-                <a16:creationId xmlns:a16="http://schemas.microsoft.com/office/drawing/2014/main" id="{36A66222-066E-4CF7-BEFB-A6B700AB9897}"/>
+                <a16:creationId xmlns:a16="http://schemas.microsoft.com/office/drawing/2014/main" id="{DD778004-5755-4676-966C-F61D3719A4E9}"/>
               </a:ext>
             </a:extLst>
           </p:cNvPr>
@@ -4834,7 +4968,7 @@
           <p:cNvPr id="9" name="">
             <a:extLst xmlns:a="http://schemas.openxmlformats.org/drawingml/2006/main">
               <a:ext uri="{FF2B5EF4-FFF2-40B4-BE49-F238E27FC236}">
-                <a16:creationId xmlns:a16="http://schemas.microsoft.com/office/drawing/2014/main" id="{84922D67-AB2B-46C0-A061-035729A1E344}"/>
+                <a16:creationId xmlns:a16="http://schemas.microsoft.com/office/drawing/2014/main" id="{5E0C9C77-C8E5-4501-9867-778BC6AEE359}"/>
               </a:ext>
             </a:extLst>
           </p:cNvPr>
@@ -4866,7 +5000,7 @@
           <p:cNvPr id="10" name="">
             <a:extLst xmlns:a="http://schemas.openxmlformats.org/drawingml/2006/main">
               <a:ext uri="{FF2B5EF4-FFF2-40B4-BE49-F238E27FC236}">
-                <a16:creationId xmlns:a16="http://schemas.microsoft.com/office/drawing/2014/main" id="{B93A35D3-DC51-402E-A7B4-82B2334959EE}"/>
+                <a16:creationId xmlns:a16="http://schemas.microsoft.com/office/drawing/2014/main" id="{F109EE29-2449-4050-BC3C-C0147FAB6843}"/>
               </a:ext>
             </a:extLst>
           </p:cNvPr>
@@ -4923,7 +5057,7 @@
           <p:cNvPr id="11" name="">
             <a:extLst xmlns:a="http://schemas.openxmlformats.org/drawingml/2006/main">
               <a:ext uri="{FF2B5EF4-FFF2-40B4-BE49-F238E27FC236}">
-                <a16:creationId xmlns:a16="http://schemas.microsoft.com/office/drawing/2014/main" id="{29A4AF9B-935A-491D-96B6-A93AE494AA84}"/>
+                <a16:creationId xmlns:a16="http://schemas.microsoft.com/office/drawing/2014/main" id="{4FA68A43-1FA8-4586-8F3C-484E3F812EC1}"/>
               </a:ext>
             </a:extLst>
           </p:cNvPr>
@@ -5003,7 +5137,7 @@
           <p:cNvPr id="12" name="">
             <a:extLst xmlns:a="http://schemas.openxmlformats.org/drawingml/2006/main">
               <a:ext uri="{FF2B5EF4-FFF2-40B4-BE49-F238E27FC236}">
-                <a16:creationId xmlns:a16="http://schemas.microsoft.com/office/drawing/2014/main" id="{E20F883C-60F4-4EAE-AED9-52799DEEA06A}"/>
+                <a16:creationId xmlns:a16="http://schemas.microsoft.com/office/drawing/2014/main" id="{FC969F34-1C30-48DA-9D58-2B17569B5FA8}"/>
               </a:ext>
             </a:extLst>
           </p:cNvPr>
@@ -5037,7 +5171,7 @@
           <p:cNvPr id="13" name="">
             <a:extLst xmlns:a="http://schemas.openxmlformats.org/drawingml/2006/main">
               <a:ext uri="{FF2B5EF4-FFF2-40B4-BE49-F238E27FC236}">
-                <a16:creationId xmlns:a16="http://schemas.microsoft.com/office/drawing/2014/main" id="{A4D8EAE9-F7FA-442C-9FF8-067E166753BF}"/>
+                <a16:creationId xmlns:a16="http://schemas.microsoft.com/office/drawing/2014/main" id="{A26F0EAA-0C8A-47EB-8206-4E0346952D9F}"/>
               </a:ext>
             </a:extLst>
           </p:cNvPr>
@@ -5069,7 +5203,7 @@
           <p:cNvPr id="14" name="">
             <a:extLst xmlns:a="http://schemas.openxmlformats.org/drawingml/2006/main">
               <a:ext uri="{FF2B5EF4-FFF2-40B4-BE49-F238E27FC236}">
-                <a16:creationId xmlns:a16="http://schemas.microsoft.com/office/drawing/2014/main" id="{A969DC18-F3E5-4005-A829-9DA57830E70A}"/>
+                <a16:creationId xmlns:a16="http://schemas.microsoft.com/office/drawing/2014/main" id="{381D84C4-F1CE-4D1E-B341-5B10E700DDC9}"/>
               </a:ext>
             </a:extLst>
           </p:cNvPr>
@@ -5126,7 +5260,7 @@
           <p:cNvPr id="15" name="">
             <a:extLst xmlns:a="http://schemas.openxmlformats.org/drawingml/2006/main">
               <a:ext uri="{FF2B5EF4-FFF2-40B4-BE49-F238E27FC236}">
-                <a16:creationId xmlns:a16="http://schemas.microsoft.com/office/drawing/2014/main" id="{76E8FFF2-F883-4538-9315-90F24907C541}"/>
+                <a16:creationId xmlns:a16="http://schemas.microsoft.com/office/drawing/2014/main" id="{67DDE95F-9DAC-4577-A600-728A12ACA75E}"/>
               </a:ext>
             </a:extLst>
           </p:cNvPr>
@@ -5206,7 +5340,7 @@
           <p:cNvPr id="16" name="">
             <a:extLst xmlns:a="http://schemas.openxmlformats.org/drawingml/2006/main">
               <a:ext uri="{FF2B5EF4-FFF2-40B4-BE49-F238E27FC236}">
-                <a16:creationId xmlns:a16="http://schemas.microsoft.com/office/drawing/2014/main" id="{7586CCD1-6EE7-4CEB-AEF0-414A7E87CB62}"/>
+                <a16:creationId xmlns:a16="http://schemas.microsoft.com/office/drawing/2014/main" id="{07EE7B8A-857E-4160-AC3B-583856FC85CB}"/>
               </a:ext>
             </a:extLst>
           </p:cNvPr>
@@ -5240,7 +5374,7 @@
           <p:cNvPr id="17" name="">
             <a:extLst xmlns:a="http://schemas.openxmlformats.org/drawingml/2006/main">
               <a:ext uri="{FF2B5EF4-FFF2-40B4-BE49-F238E27FC236}">
-                <a16:creationId xmlns:a16="http://schemas.microsoft.com/office/drawing/2014/main" id="{CDD3FDDE-CD20-4DE8-BD5D-C98332A054B9}"/>
+                <a16:creationId xmlns:a16="http://schemas.microsoft.com/office/drawing/2014/main" id="{96844FA9-9F61-47C8-97FF-5A0CEF64B7B9}"/>
               </a:ext>
             </a:extLst>
           </p:cNvPr>
@@ -5272,7 +5406,7 @@
           <p:cNvPr id="18" name="">
             <a:extLst xmlns:a="http://schemas.openxmlformats.org/drawingml/2006/main">
               <a:ext uri="{FF2B5EF4-FFF2-40B4-BE49-F238E27FC236}">
-                <a16:creationId xmlns:a16="http://schemas.microsoft.com/office/drawing/2014/main" id="{10C75CD6-53D8-4EAF-912B-35EC511CCEB9}"/>
+                <a16:creationId xmlns:a16="http://schemas.microsoft.com/office/drawing/2014/main" id="{18EC2F2F-5345-4024-92F6-D26693A28630}"/>
               </a:ext>
             </a:extLst>
           </p:cNvPr>
@@ -5329,7 +5463,7 @@
           <p:cNvPr id="19" name="">
             <a:extLst xmlns:a="http://schemas.openxmlformats.org/drawingml/2006/main">
               <a:ext uri="{FF2B5EF4-FFF2-40B4-BE49-F238E27FC236}">
-                <a16:creationId xmlns:a16="http://schemas.microsoft.com/office/drawing/2014/main" id="{3AB5CE7A-7A06-46B3-9602-AF75B2AA2AC3}"/>
+                <a16:creationId xmlns:a16="http://schemas.microsoft.com/office/drawing/2014/main" id="{583C2BBD-8BEF-40A7-8071-5EB3AD88FEFC}"/>
               </a:ext>
             </a:extLst>
           </p:cNvPr>
@@ -5409,7 +5543,7 @@
           <p:cNvPr id="20" name="">
             <a:extLst xmlns:a="http://schemas.openxmlformats.org/drawingml/2006/main">
               <a:ext uri="{FF2B5EF4-FFF2-40B4-BE49-F238E27FC236}">
-                <a16:creationId xmlns:a16="http://schemas.microsoft.com/office/drawing/2014/main" id="{875771E9-FACB-4695-9D9B-FED46D16A22C}"/>
+                <a16:creationId xmlns:a16="http://schemas.microsoft.com/office/drawing/2014/main" id="{54C6E585-30E4-41D0-91A1-C5806B49AD06}"/>
               </a:ext>
             </a:extLst>
           </p:cNvPr>
@@ -5466,7 +5600,7 @@
           <p:cNvPr id="21" name="">
             <a:extLst xmlns:a="http://schemas.openxmlformats.org/drawingml/2006/main">
               <a:ext uri="{FF2B5EF4-FFF2-40B4-BE49-F238E27FC236}">
-                <a16:creationId xmlns:a16="http://schemas.microsoft.com/office/drawing/2014/main" id="{93CEF16E-17EB-4274-8A9E-3E3EC57B480D}"/>
+                <a16:creationId xmlns:a16="http://schemas.microsoft.com/office/drawing/2014/main" id="{3A6E89C9-F6BE-46D8-810C-2E768043555A}"/>
               </a:ext>
             </a:extLst>
           </p:cNvPr>
@@ -5523,7 +5657,7 @@
           <p:cNvPr id="22" name="">
             <a:extLst xmlns:a="http://schemas.openxmlformats.org/drawingml/2006/main">
               <a:ext uri="{FF2B5EF4-FFF2-40B4-BE49-F238E27FC236}">
-                <a16:creationId xmlns:a16="http://schemas.microsoft.com/office/drawing/2014/main" id="{591BED53-FC78-4E32-B9F3-8356D001F3FC}"/>
+                <a16:creationId xmlns:a16="http://schemas.microsoft.com/office/drawing/2014/main" id="{BA612B66-CDAD-438C-A7E1-4FB9A1D268A5}"/>
               </a:ext>
             </a:extLst>
           </p:cNvPr>
@@ -5578,7 +5712,1736 @@
     </p:spTree>
     <p:extLst>
       <p:ext uri="{BB962C8B-B14F-4D97-AF65-F5344CB8AC3E}">
-        <p14:creationId xmlns:p14="http://schemas.microsoft.com/office/powerpoint/2010/main" val="1883962070"/>
+        <p14:creationId xmlns:p14="http://schemas.microsoft.com/office/powerpoint/2010/main" val="1805129058"/>
+      </p:ext>
+    </p:extLst>
+  </p:cSld>
+</p:sld>
+</file>
+
+<file path=ppt/slides/slide12.xml><?xml version="1.0" encoding="utf-8"?>
+<p:sld xmlns:p="http://schemas.openxmlformats.org/presentationml/2006/main">
+  <p:cSld>
+    <p:spTree>
+      <p:nvGrpSpPr>
+        <p:cNvPr id="1" name=""/>
+        <p:cNvGrpSpPr/>
+        <p:nvPr/>
+      </p:nvGrpSpPr>
+      <p:grpSpPr>
+        <a:xfrm xmlns:a="http://schemas.openxmlformats.org/drawingml/2006/main"/>
+      </p:grpSpPr>
+      <p:sp>
+        <p:nvSpPr>
+          <p:cNvPr id="26" name="">
+            <a:extLst xmlns:a="http://schemas.openxmlformats.org/drawingml/2006/main">
+              <a:ext uri="{FF2B5EF4-FFF2-40B4-BE49-F238E27FC236}">
+                <a16:creationId xmlns:a16="http://schemas.microsoft.com/office/drawing/2014/main" id="{4F0E697E-754C-47C4-A0E2-E627211B6A80}"/>
+              </a:ext>
+            </a:extLst>
+          </p:cNvPr>
+          <p:cNvSpPr>
+            <a:spLocks xmlns:a="http://schemas.openxmlformats.org/drawingml/2006/main" noGrp="1"/>
+          </p:cNvSpPr>
+          <p:nvPr/>
+        </p:nvSpPr>
+        <p:spPr>
+          <a:xfrm xmlns:a="http://schemas.openxmlformats.org/drawingml/2006/main">
+            <a:off x="0" y="0"/>
+            <a:ext cx="12192000" cy="6858000"/>
+          </a:xfrm>
+          <a:prstGeom xmlns:a="http://schemas.openxmlformats.org/drawingml/2006/main" prst="rect">
+            <a:avLst/>
+          </a:prstGeom>
+          <a:solidFill xmlns:a="http://schemas.openxmlformats.org/drawingml/2006/main">
+            <a:srgbClr val="DDE8F6"/>
+          </a:solidFill>
+          <a:ln xmlns:a="http://schemas.openxmlformats.org/drawingml/2006/main" w="0">
+            <a:noFill/>
+          </a:ln>
+        </p:spPr>
+      </p:sp>
+      <p:sp>
+        <p:nvSpPr>
+          <p:cNvPr id="2" name="">
+            <a:extLst xmlns:a="http://schemas.openxmlformats.org/drawingml/2006/main">
+              <a:ext uri="{FF2B5EF4-FFF2-40B4-BE49-F238E27FC236}">
+                <a16:creationId xmlns:a16="http://schemas.microsoft.com/office/drawing/2014/main" id="{720EA545-27DA-4A6E-B2A2-4F3EB1AE6F9C}"/>
+              </a:ext>
+            </a:extLst>
+          </p:cNvPr>
+          <p:cNvSpPr>
+            <a:spLocks xmlns:a="http://schemas.openxmlformats.org/drawingml/2006/main" noGrp="1"/>
+          </p:cNvSpPr>
+          <p:nvPr/>
+        </p:nvSpPr>
+        <p:spPr>
+          <a:xfrm xmlns:a="http://schemas.openxmlformats.org/drawingml/2006/main">
+            <a:off x="685800" y="419100"/>
+            <a:ext cx="666750" cy="209550"/>
+          </a:xfrm>
+          <a:prstGeom xmlns:a="http://schemas.openxmlformats.org/drawingml/2006/main" prst="rect">
+            <a:avLst/>
+          </a:prstGeom>
+          <a:noFill xmlns:a="http://schemas.openxmlformats.org/drawingml/2006/main"/>
+          <a:ln xmlns:a="http://schemas.openxmlformats.org/drawingml/2006/main" w="0">
+            <a:noFill/>
+          </a:ln>
+        </p:spPr>
+        <p:txBody>
+          <a:bodyPr xmlns:a="http://schemas.openxmlformats.org/drawingml/2006/main">
+            <a:noAutofit/>
+          </a:bodyPr>
+          <a:lstStyle xmlns:a="http://schemas.openxmlformats.org/drawingml/2006/main"/>
+          <a:p xmlns:a="http://schemas.openxmlformats.org/drawingml/2006/main">
+            <a:pPr>
+              <a:defRPr sz="1200" b="1">
+                <a:solidFill>
+                  <a:srgbClr val="E7A048"/>
+                </a:solidFill>
+                <a:latin typeface="Arial"/>
+                <a:ea typeface="Arial"/>
+                <a:cs typeface="Arial"/>
+              </a:defRPr>
+            </a:pPr>
+            <a:r>
+              <a:rPr sz="1200" b="1">
+                <a:solidFill>
+                  <a:srgbClr val="E7A048"/>
+                </a:solidFill>
+                <a:latin typeface="Arial"/>
+                <a:ea typeface="Arial"/>
+                <a:cs typeface="Arial"/>
+              </a:rPr>
+              <a:t>12</a:t>
+            </a:r>
+          </a:p>
+        </p:txBody>
+      </p:sp>
+      <p:sp>
+        <p:nvSpPr>
+          <p:cNvPr id="3" name="">
+            <a:extLst xmlns:a="http://schemas.openxmlformats.org/drawingml/2006/main">
+              <a:ext uri="{FF2B5EF4-FFF2-40B4-BE49-F238E27FC236}">
+                <a16:creationId xmlns:a16="http://schemas.microsoft.com/office/drawing/2014/main" id="{BC752B34-FF07-4259-8E84-21B22739D155}"/>
+              </a:ext>
+            </a:extLst>
+          </p:cNvPr>
+          <p:cNvSpPr>
+            <a:spLocks xmlns:a="http://schemas.openxmlformats.org/drawingml/2006/main" noGrp="1"/>
+          </p:cNvSpPr>
+          <p:nvPr/>
+        </p:nvSpPr>
+        <p:spPr>
+          <a:xfrm xmlns:a="http://schemas.openxmlformats.org/drawingml/2006/main">
+            <a:off x="9810750" y="428625"/>
+            <a:ext cx="1695450" cy="190500"/>
+          </a:xfrm>
+          <a:prstGeom xmlns:a="http://schemas.openxmlformats.org/drawingml/2006/main" prst="rect">
+            <a:avLst/>
+          </a:prstGeom>
+          <a:noFill xmlns:a="http://schemas.openxmlformats.org/drawingml/2006/main"/>
+          <a:ln xmlns:a="http://schemas.openxmlformats.org/drawingml/2006/main" w="0">
+            <a:noFill/>
+          </a:ln>
+        </p:spPr>
+        <p:txBody>
+          <a:bodyPr xmlns:a="http://schemas.openxmlformats.org/drawingml/2006/main">
+            <a:noAutofit/>
+          </a:bodyPr>
+          <a:lstStyle xmlns:a="http://schemas.openxmlformats.org/drawingml/2006/main"/>
+          <a:p xmlns:a="http://schemas.openxmlformats.org/drawingml/2006/main">
+            <a:pPr algn="r">
+              <a:defRPr sz="975" b="1">
+                <a:solidFill>
+                  <a:srgbClr val="4656A8"/>
+                </a:solidFill>
+                <a:latin typeface="Arial"/>
+                <a:ea typeface="Arial"/>
+                <a:cs typeface="Arial"/>
+              </a:defRPr>
+            </a:pPr>
+            <a:r>
+              <a:rPr sz="975" b="1">
+                <a:solidFill>
+                  <a:srgbClr val="4656A8"/>
+                </a:solidFill>
+                <a:latin typeface="Arial"/>
+                <a:ea typeface="Arial"/>
+                <a:cs typeface="Arial"/>
+              </a:rPr>
+              <a:t>NETRAJYOTI AI</a:t>
+            </a:r>
+          </a:p>
+        </p:txBody>
+      </p:sp>
+      <p:sp>
+        <p:nvSpPr>
+          <p:cNvPr id="4" name="">
+            <a:extLst xmlns:a="http://schemas.openxmlformats.org/drawingml/2006/main">
+              <a:ext uri="{FF2B5EF4-FFF2-40B4-BE49-F238E27FC236}">
+                <a16:creationId xmlns:a16="http://schemas.microsoft.com/office/drawing/2014/main" id="{9BEC4659-FBBA-4175-819D-AEA48668BCA1}"/>
+              </a:ext>
+            </a:extLst>
+          </p:cNvPr>
+          <p:cNvSpPr>
+            <a:spLocks xmlns:a="http://schemas.openxmlformats.org/drawingml/2006/main" noGrp="1"/>
+          </p:cNvSpPr>
+          <p:nvPr/>
+        </p:nvSpPr>
+        <p:spPr>
+          <a:xfrm xmlns:a="http://schemas.openxmlformats.org/drawingml/2006/main">
+            <a:off x="685800" y="762000"/>
+            <a:ext cx="10287000" cy="457200"/>
+          </a:xfrm>
+          <a:prstGeom xmlns:a="http://schemas.openxmlformats.org/drawingml/2006/main" prst="rect">
+            <a:avLst/>
+          </a:prstGeom>
+          <a:noFill xmlns:a="http://schemas.openxmlformats.org/drawingml/2006/main"/>
+          <a:ln xmlns:a="http://schemas.openxmlformats.org/drawingml/2006/main" w="0">
+            <a:noFill/>
+          </a:ln>
+        </p:spPr>
+        <p:txBody>
+          <a:bodyPr xmlns:a="http://schemas.openxmlformats.org/drawingml/2006/main">
+            <a:noAutofit/>
+          </a:bodyPr>
+          <a:lstStyle xmlns:a="http://schemas.openxmlformats.org/drawingml/2006/main"/>
+          <a:p xmlns:a="http://schemas.openxmlformats.org/drawingml/2006/main">
+            <a:pPr>
+              <a:defRPr sz="2550" b="1">
+                <a:solidFill>
+                  <a:srgbClr val="202A44"/>
+                </a:solidFill>
+                <a:latin typeface="Arial"/>
+                <a:ea typeface="Arial"/>
+                <a:cs typeface="Arial"/>
+              </a:defRPr>
+            </a:pPr>
+            <a:r>
+              <a:rPr sz="2550" b="1">
+                <a:solidFill>
+                  <a:srgbClr val="202A44"/>
+                </a:solidFill>
+                <a:latin typeface="Arial"/>
+                <a:ea typeface="Arial"/>
+                <a:cs typeface="Arial"/>
+              </a:rPr>
+              <a:t>Live demonstration</a:t>
+            </a:r>
+          </a:p>
+        </p:txBody>
+      </p:sp>
+      <p:sp>
+        <p:nvSpPr>
+          <p:cNvPr id="5" name="">
+            <a:extLst xmlns:a="http://schemas.openxmlformats.org/drawingml/2006/main">
+              <a:ext uri="{FF2B5EF4-FFF2-40B4-BE49-F238E27FC236}">
+                <a16:creationId xmlns:a16="http://schemas.microsoft.com/office/drawing/2014/main" id="{3A841A6A-EC76-40FC-B5AE-F09837975FB8}"/>
+              </a:ext>
+            </a:extLst>
+          </p:cNvPr>
+          <p:cNvSpPr>
+            <a:spLocks xmlns:a="http://schemas.openxmlformats.org/drawingml/2006/main" noGrp="1"/>
+          </p:cNvSpPr>
+          <p:nvPr/>
+        </p:nvSpPr>
+        <p:spPr>
+          <a:xfrm xmlns:a="http://schemas.openxmlformats.org/drawingml/2006/main">
+            <a:off x="704850" y="1343025"/>
+            <a:ext cx="10287000" cy="266700"/>
+          </a:xfrm>
+          <a:prstGeom xmlns:a="http://schemas.openxmlformats.org/drawingml/2006/main" prst="rect">
+            <a:avLst/>
+          </a:prstGeom>
+          <a:noFill xmlns:a="http://schemas.openxmlformats.org/drawingml/2006/main"/>
+          <a:ln xmlns:a="http://schemas.openxmlformats.org/drawingml/2006/main" w="0">
+            <a:noFill/>
+          </a:ln>
+        </p:spPr>
+        <p:txBody>
+          <a:bodyPr xmlns:a="http://schemas.openxmlformats.org/drawingml/2006/main">
+            <a:noAutofit/>
+          </a:bodyPr>
+          <a:lstStyle xmlns:a="http://schemas.openxmlformats.org/drawingml/2006/main"/>
+          <a:p xmlns:a="http://schemas.openxmlformats.org/drawingml/2006/main">
+            <a:pPr>
+              <a:defRPr sz="1275">
+                <a:solidFill>
+                  <a:srgbClr val="56647A"/>
+                </a:solidFill>
+                <a:latin typeface="Arial"/>
+                <a:ea typeface="Arial"/>
+                <a:cs typeface="Arial"/>
+              </a:defRPr>
+            </a:pPr>
+            <a:r>
+              <a:rPr sz="1275">
+                <a:solidFill>
+                  <a:srgbClr val="56647A"/>
+                </a:solidFill>
+                <a:latin typeface="Arial"/>
+                <a:ea typeface="Arial"/>
+                <a:cs typeface="Arial"/>
+              </a:rPr>
+              <a:t>A short walkthrough of the user journey and the locked safety-route decision</a:t>
+            </a:r>
+          </a:p>
+        </p:txBody>
+      </p:sp>
+      <p:sp>
+        <p:nvSpPr>
+          <p:cNvPr id="6" name="">
+            <a:extLst xmlns:a="http://schemas.openxmlformats.org/drawingml/2006/main">
+              <a:ext uri="{FF2B5EF4-FFF2-40B4-BE49-F238E27FC236}">
+                <a16:creationId xmlns:a16="http://schemas.microsoft.com/office/drawing/2014/main" id="{E33EAA7A-4905-4827-B158-36F7AE6A86FD}"/>
+              </a:ext>
+            </a:extLst>
+          </p:cNvPr>
+          <p:cNvSpPr>
+            <a:spLocks xmlns:a="http://schemas.openxmlformats.org/drawingml/2006/main" noGrp="1"/>
+          </p:cNvSpPr>
+          <p:nvPr/>
+        </p:nvSpPr>
+        <p:spPr>
+          <a:xfrm xmlns:a="http://schemas.openxmlformats.org/drawingml/2006/main">
+            <a:off x="685800" y="1752600"/>
+            <a:ext cx="10820400" cy="19050"/>
+          </a:xfrm>
+          <a:prstGeom xmlns:a="http://schemas.openxmlformats.org/drawingml/2006/main" prst="rect">
+            <a:avLst/>
+          </a:prstGeom>
+          <a:solidFill xmlns:a="http://schemas.openxmlformats.org/drawingml/2006/main">
+            <a:srgbClr val="D7D0C7"/>
+          </a:solidFill>
+          <a:ln xmlns:a="http://schemas.openxmlformats.org/drawingml/2006/main" w="0">
+            <a:noFill/>
+          </a:ln>
+        </p:spPr>
+      </p:sp>
+      <p:sp>
+        <p:nvSpPr>
+          <p:cNvPr id="7" name="">
+            <a:extLst xmlns:a="http://schemas.openxmlformats.org/drawingml/2006/main">
+              <a:ext uri="{FF2B5EF4-FFF2-40B4-BE49-F238E27FC236}">
+                <a16:creationId xmlns:a16="http://schemas.microsoft.com/office/drawing/2014/main" id="{211EE4B8-4581-448A-A05A-F7D17713EB39}"/>
+              </a:ext>
+            </a:extLst>
+          </p:cNvPr>
+          <p:cNvSpPr>
+            <a:spLocks xmlns:a="http://schemas.openxmlformats.org/drawingml/2006/main" noGrp="1"/>
+          </p:cNvSpPr>
+          <p:nvPr/>
+        </p:nvSpPr>
+        <p:spPr>
+          <a:xfrm xmlns:a="http://schemas.openxmlformats.org/drawingml/2006/main">
+            <a:off x="952500" y="2667000"/>
+            <a:ext cx="1524000" cy="171450"/>
+          </a:xfrm>
+          <a:prstGeom xmlns:a="http://schemas.openxmlformats.org/drawingml/2006/main" prst="rect">
+            <a:avLst/>
+          </a:prstGeom>
+          <a:noFill xmlns:a="http://schemas.openxmlformats.org/drawingml/2006/main"/>
+          <a:ln xmlns:a="http://schemas.openxmlformats.org/drawingml/2006/main" w="0">
+            <a:noFill/>
+          </a:ln>
+        </p:spPr>
+        <p:txBody>
+          <a:bodyPr xmlns:a="http://schemas.openxmlformats.org/drawingml/2006/main">
+            <a:noAutofit/>
+          </a:bodyPr>
+          <a:lstStyle xmlns:a="http://schemas.openxmlformats.org/drawingml/2006/main"/>
+          <a:p xmlns:a="http://schemas.openxmlformats.org/drawingml/2006/main">
+            <a:pPr>
+              <a:defRPr sz="1050" b="1">
+                <a:solidFill>
+                  <a:srgbClr val="4656A8"/>
+                </a:solidFill>
+                <a:latin typeface="Arial"/>
+                <a:ea typeface="Arial"/>
+                <a:cs typeface="Arial"/>
+              </a:defRPr>
+            </a:pPr>
+            <a:r>
+              <a:rPr sz="1050" b="1">
+                <a:solidFill>
+                  <a:srgbClr val="4656A8"/>
+                </a:solidFill>
+                <a:latin typeface="Arial"/>
+                <a:ea typeface="Arial"/>
+                <a:cs typeface="Arial"/>
+              </a:rPr>
+              <a:t>DEMO FLOW</a:t>
+            </a:r>
+          </a:p>
+        </p:txBody>
+      </p:sp>
+      <p:sp>
+        <p:nvSpPr>
+          <p:cNvPr id="8" name="">
+            <a:extLst xmlns:a="http://schemas.openxmlformats.org/drawingml/2006/main">
+              <a:ext uri="{FF2B5EF4-FFF2-40B4-BE49-F238E27FC236}">
+                <a16:creationId xmlns:a16="http://schemas.microsoft.com/office/drawing/2014/main" id="{00FC1634-FBA3-4C15-9B2E-3EDF9E22FFB6}"/>
+              </a:ext>
+            </a:extLst>
+          </p:cNvPr>
+          <p:cNvSpPr>
+            <a:spLocks xmlns:a="http://schemas.openxmlformats.org/drawingml/2006/main" noGrp="1"/>
+          </p:cNvSpPr>
+          <p:nvPr/>
+        </p:nvSpPr>
+        <p:spPr>
+          <a:xfrm xmlns:a="http://schemas.openxmlformats.org/drawingml/2006/main">
+            <a:off x="952500" y="3143250"/>
+            <a:ext cx="2857500" cy="1809750"/>
+          </a:xfrm>
+          <a:prstGeom xmlns:a="http://schemas.openxmlformats.org/drawingml/2006/main" prst="roundRect">
+            <a:avLst>
+              <a:gd name="adj" fmla="val 4211"/>
+            </a:avLst>
+          </a:prstGeom>
+          <a:solidFill xmlns:a="http://schemas.openxmlformats.org/drawingml/2006/main">
+            <a:srgbClr val="FFFFFF"/>
+          </a:solidFill>
+          <a:ln xmlns:a="http://schemas.openxmlformats.org/drawingml/2006/main" w="9525">
+            <a:solidFill>
+              <a:srgbClr val="D7D0C7"/>
+            </a:solidFill>
+          </a:ln>
+        </p:spPr>
+      </p:sp>
+      <p:sp>
+        <p:nvSpPr>
+          <p:cNvPr id="9" name="">
+            <a:extLst xmlns:a="http://schemas.openxmlformats.org/drawingml/2006/main">
+              <a:ext uri="{FF2B5EF4-FFF2-40B4-BE49-F238E27FC236}">
+                <a16:creationId xmlns:a16="http://schemas.microsoft.com/office/drawing/2014/main" id="{DC6D74A0-FF8D-4EEC-8146-3E5EF6D6DE64}"/>
+              </a:ext>
+            </a:extLst>
+          </p:cNvPr>
+          <p:cNvSpPr>
+            <a:spLocks xmlns:a="http://schemas.openxmlformats.org/drawingml/2006/main" noGrp="1"/>
+          </p:cNvSpPr>
+          <p:nvPr/>
+        </p:nvSpPr>
+        <p:spPr>
+          <a:xfrm xmlns:a="http://schemas.openxmlformats.org/drawingml/2006/main">
+            <a:off x="1219200" y="3429000"/>
+            <a:ext cx="457200" cy="457200"/>
+          </a:xfrm>
+          <a:prstGeom xmlns:a="http://schemas.openxmlformats.org/drawingml/2006/main" prst="ellipse">
+            <a:avLst/>
+          </a:prstGeom>
+          <a:solidFill xmlns:a="http://schemas.openxmlformats.org/drawingml/2006/main">
+            <a:srgbClr val="237A7A"/>
+          </a:solidFill>
+          <a:ln xmlns:a="http://schemas.openxmlformats.org/drawingml/2006/main" w="0">
+            <a:noFill/>
+          </a:ln>
+        </p:spPr>
+      </p:sp>
+      <p:sp>
+        <p:nvSpPr>
+          <p:cNvPr id="10" name="">
+            <a:extLst xmlns:a="http://schemas.openxmlformats.org/drawingml/2006/main">
+              <a:ext uri="{FF2B5EF4-FFF2-40B4-BE49-F238E27FC236}">
+                <a16:creationId xmlns:a16="http://schemas.microsoft.com/office/drawing/2014/main" id="{7B3A0C1A-0ED5-4721-A0D9-A912C4380BDD}"/>
+              </a:ext>
+            </a:extLst>
+          </p:cNvPr>
+          <p:cNvSpPr>
+            <a:spLocks xmlns:a="http://schemas.openxmlformats.org/drawingml/2006/main" noGrp="1"/>
+          </p:cNvSpPr>
+          <p:nvPr/>
+        </p:nvSpPr>
+        <p:spPr>
+          <a:xfrm xmlns:a="http://schemas.openxmlformats.org/drawingml/2006/main">
+            <a:off x="1219200" y="3524250"/>
+            <a:ext cx="457200" cy="209550"/>
+          </a:xfrm>
+          <a:prstGeom xmlns:a="http://schemas.openxmlformats.org/drawingml/2006/main" prst="rect">
+            <a:avLst/>
+          </a:prstGeom>
+          <a:noFill xmlns:a="http://schemas.openxmlformats.org/drawingml/2006/main"/>
+          <a:ln xmlns:a="http://schemas.openxmlformats.org/drawingml/2006/main" w="0">
+            <a:noFill/>
+          </a:ln>
+        </p:spPr>
+        <p:txBody>
+          <a:bodyPr xmlns:a="http://schemas.openxmlformats.org/drawingml/2006/main">
+            <a:noAutofit/>
+          </a:bodyPr>
+          <a:lstStyle xmlns:a="http://schemas.openxmlformats.org/drawingml/2006/main"/>
+          <a:p xmlns:a="http://schemas.openxmlformats.org/drawingml/2006/main">
+            <a:pPr algn="ctr">
+              <a:defRPr sz="1425" b="1">
+                <a:solidFill>
+                  <a:srgbClr val="FFFFFF"/>
+                </a:solidFill>
+                <a:latin typeface="Arial"/>
+                <a:ea typeface="Arial"/>
+                <a:cs typeface="Arial"/>
+              </a:defRPr>
+            </a:pPr>
+            <a:r>
+              <a:rPr sz="1425" b="1">
+                <a:solidFill>
+                  <a:srgbClr val="FFFFFF"/>
+                </a:solidFill>
+                <a:latin typeface="Arial"/>
+                <a:ea typeface="Arial"/>
+                <a:cs typeface="Arial"/>
+              </a:rPr>
+              <a:t>1</a:t>
+            </a:r>
+          </a:p>
+        </p:txBody>
+      </p:sp>
+      <p:sp>
+        <p:nvSpPr>
+          <p:cNvPr id="11" name="">
+            <a:extLst xmlns:a="http://schemas.openxmlformats.org/drawingml/2006/main">
+              <a:ext uri="{FF2B5EF4-FFF2-40B4-BE49-F238E27FC236}">
+                <a16:creationId xmlns:a16="http://schemas.microsoft.com/office/drawing/2014/main" id="{201139BA-8712-4F70-8909-021870918B29}"/>
+              </a:ext>
+            </a:extLst>
+          </p:cNvPr>
+          <p:cNvSpPr>
+            <a:spLocks xmlns:a="http://schemas.openxmlformats.org/drawingml/2006/main" noGrp="1"/>
+          </p:cNvSpPr>
+          <p:nvPr/>
+        </p:nvSpPr>
+        <p:spPr>
+          <a:xfrm xmlns:a="http://schemas.openxmlformats.org/drawingml/2006/main">
+            <a:off x="1219200" y="4095750"/>
+            <a:ext cx="2324100" cy="266700"/>
+          </a:xfrm>
+          <a:prstGeom xmlns:a="http://schemas.openxmlformats.org/drawingml/2006/main" prst="rect">
+            <a:avLst/>
+          </a:prstGeom>
+          <a:noFill xmlns:a="http://schemas.openxmlformats.org/drawingml/2006/main"/>
+          <a:ln xmlns:a="http://schemas.openxmlformats.org/drawingml/2006/main" w="0">
+            <a:noFill/>
+          </a:ln>
+        </p:spPr>
+        <p:txBody>
+          <a:bodyPr xmlns:a="http://schemas.openxmlformats.org/drawingml/2006/main">
+            <a:noAutofit/>
+          </a:bodyPr>
+          <a:lstStyle xmlns:a="http://schemas.openxmlformats.org/drawingml/2006/main"/>
+          <a:p xmlns:a="http://schemas.openxmlformats.org/drawingml/2006/main">
+            <a:pPr>
+              <a:defRPr sz="1350" b="1">
+                <a:solidFill>
+                  <a:srgbClr val="202A44"/>
+                </a:solidFill>
+                <a:latin typeface="Arial"/>
+                <a:ea typeface="Arial"/>
+                <a:cs typeface="Arial"/>
+              </a:defRPr>
+            </a:pPr>
+            <a:r>
+              <a:rPr sz="1350" b="1">
+                <a:solidFill>
+                  <a:srgbClr val="202A44"/>
+                </a:solidFill>
+                <a:latin typeface="Arial"/>
+                <a:ea typeface="Arial"/>
+                <a:cs typeface="Arial"/>
+              </a:rPr>
+              <a:t>Start the Bengali journey</a:t>
+            </a:r>
+          </a:p>
+        </p:txBody>
+      </p:sp>
+      <p:sp>
+        <p:nvSpPr>
+          <p:cNvPr id="12" name="">
+            <a:extLst xmlns:a="http://schemas.openxmlformats.org/drawingml/2006/main">
+              <a:ext uri="{FF2B5EF4-FFF2-40B4-BE49-F238E27FC236}">
+                <a16:creationId xmlns:a16="http://schemas.microsoft.com/office/drawing/2014/main" id="{00FD03B9-F1B5-41B6-AB95-8EBB68316011}"/>
+              </a:ext>
+            </a:extLst>
+          </p:cNvPr>
+          <p:cNvSpPr>
+            <a:spLocks xmlns:a="http://schemas.openxmlformats.org/drawingml/2006/main" noGrp="1"/>
+          </p:cNvSpPr>
+          <p:nvPr/>
+        </p:nvSpPr>
+        <p:spPr>
+          <a:xfrm xmlns:a="http://schemas.openxmlformats.org/drawingml/2006/main">
+            <a:off x="1219200" y="4476750"/>
+            <a:ext cx="2324100" cy="266700"/>
+          </a:xfrm>
+          <a:prstGeom xmlns:a="http://schemas.openxmlformats.org/drawingml/2006/main" prst="rect">
+            <a:avLst/>
+          </a:prstGeom>
+          <a:noFill xmlns:a="http://schemas.openxmlformats.org/drawingml/2006/main"/>
+          <a:ln xmlns:a="http://schemas.openxmlformats.org/drawingml/2006/main" w="0">
+            <a:noFill/>
+          </a:ln>
+        </p:spPr>
+        <p:txBody>
+          <a:bodyPr xmlns:a="http://schemas.openxmlformats.org/drawingml/2006/main">
+            <a:noAutofit/>
+          </a:bodyPr>
+          <a:lstStyle xmlns:a="http://schemas.openxmlformats.org/drawingml/2006/main"/>
+          <a:p xmlns:a="http://schemas.openxmlformats.org/drawingml/2006/main">
+            <a:pPr>
+              <a:defRPr sz="1050">
+                <a:solidFill>
+                  <a:srgbClr val="56647A"/>
+                </a:solidFill>
+                <a:latin typeface="Arial"/>
+                <a:ea typeface="Arial"/>
+                <a:cs typeface="Arial"/>
+              </a:defRPr>
+            </a:pPr>
+            <a:r>
+              <a:rPr sz="1050">
+                <a:solidFill>
+                  <a:srgbClr val="56647A"/>
+                </a:solidFill>
+                <a:latin typeface="Arial"/>
+                <a:ea typeface="Arial"/>
+                <a:cs typeface="Arial"/>
+              </a:rPr>
+              <a:t>Choose voice or text input</a:t>
+            </a:r>
+          </a:p>
+        </p:txBody>
+      </p:sp>
+      <p:sp>
+        <p:nvSpPr>
+          <p:cNvPr id="13" name="">
+            <a:extLst xmlns:a="http://schemas.openxmlformats.org/drawingml/2006/main">
+              <a:ext uri="{FF2B5EF4-FFF2-40B4-BE49-F238E27FC236}">
+                <a16:creationId xmlns:a16="http://schemas.microsoft.com/office/drawing/2014/main" id="{F1B68324-3409-4414-83D2-DB5FAFAB97DB}"/>
+              </a:ext>
+            </a:extLst>
+          </p:cNvPr>
+          <p:cNvSpPr>
+            <a:spLocks xmlns:a="http://schemas.openxmlformats.org/drawingml/2006/main" noGrp="1"/>
+          </p:cNvSpPr>
+          <p:nvPr/>
+        </p:nvSpPr>
+        <p:spPr>
+          <a:xfrm xmlns:a="http://schemas.openxmlformats.org/drawingml/2006/main">
+            <a:off x="4381500" y="3143250"/>
+            <a:ext cx="2857500" cy="1809750"/>
+          </a:xfrm>
+          <a:prstGeom xmlns:a="http://schemas.openxmlformats.org/drawingml/2006/main" prst="roundRect">
+            <a:avLst>
+              <a:gd name="adj" fmla="val 4211"/>
+            </a:avLst>
+          </a:prstGeom>
+          <a:solidFill xmlns:a="http://schemas.openxmlformats.org/drawingml/2006/main">
+            <a:srgbClr val="FFFFFF"/>
+          </a:solidFill>
+          <a:ln xmlns:a="http://schemas.openxmlformats.org/drawingml/2006/main" w="9525">
+            <a:solidFill>
+              <a:srgbClr val="D7D0C7"/>
+            </a:solidFill>
+          </a:ln>
+        </p:spPr>
+      </p:sp>
+      <p:sp>
+        <p:nvSpPr>
+          <p:cNvPr id="14" name="">
+            <a:extLst xmlns:a="http://schemas.openxmlformats.org/drawingml/2006/main">
+              <a:ext uri="{FF2B5EF4-FFF2-40B4-BE49-F238E27FC236}">
+                <a16:creationId xmlns:a16="http://schemas.microsoft.com/office/drawing/2014/main" id="{CCD1B659-2D31-4E4E-9233-A59069F53318}"/>
+              </a:ext>
+            </a:extLst>
+          </p:cNvPr>
+          <p:cNvSpPr>
+            <a:spLocks xmlns:a="http://schemas.openxmlformats.org/drawingml/2006/main" noGrp="1"/>
+          </p:cNvSpPr>
+          <p:nvPr/>
+        </p:nvSpPr>
+        <p:spPr>
+          <a:xfrm xmlns:a="http://schemas.openxmlformats.org/drawingml/2006/main">
+            <a:off x="4648200" y="3429000"/>
+            <a:ext cx="457200" cy="457200"/>
+          </a:xfrm>
+          <a:prstGeom xmlns:a="http://schemas.openxmlformats.org/drawingml/2006/main" prst="ellipse">
+            <a:avLst/>
+          </a:prstGeom>
+          <a:solidFill xmlns:a="http://schemas.openxmlformats.org/drawingml/2006/main">
+            <a:srgbClr val="4656A8"/>
+          </a:solidFill>
+          <a:ln xmlns:a="http://schemas.openxmlformats.org/drawingml/2006/main" w="0">
+            <a:noFill/>
+          </a:ln>
+        </p:spPr>
+      </p:sp>
+      <p:sp>
+        <p:nvSpPr>
+          <p:cNvPr id="15" name="">
+            <a:extLst xmlns:a="http://schemas.openxmlformats.org/drawingml/2006/main">
+              <a:ext uri="{FF2B5EF4-FFF2-40B4-BE49-F238E27FC236}">
+                <a16:creationId xmlns:a16="http://schemas.microsoft.com/office/drawing/2014/main" id="{4FA4FB7A-AC2F-498B-850A-E6A27E5A4602}"/>
+              </a:ext>
+            </a:extLst>
+          </p:cNvPr>
+          <p:cNvSpPr>
+            <a:spLocks xmlns:a="http://schemas.openxmlformats.org/drawingml/2006/main" noGrp="1"/>
+          </p:cNvSpPr>
+          <p:nvPr/>
+        </p:nvSpPr>
+        <p:spPr>
+          <a:xfrm xmlns:a="http://schemas.openxmlformats.org/drawingml/2006/main">
+            <a:off x="4648200" y="3524250"/>
+            <a:ext cx="457200" cy="209550"/>
+          </a:xfrm>
+          <a:prstGeom xmlns:a="http://schemas.openxmlformats.org/drawingml/2006/main" prst="rect">
+            <a:avLst/>
+          </a:prstGeom>
+          <a:noFill xmlns:a="http://schemas.openxmlformats.org/drawingml/2006/main"/>
+          <a:ln xmlns:a="http://schemas.openxmlformats.org/drawingml/2006/main" w="0">
+            <a:noFill/>
+          </a:ln>
+        </p:spPr>
+        <p:txBody>
+          <a:bodyPr xmlns:a="http://schemas.openxmlformats.org/drawingml/2006/main">
+            <a:noAutofit/>
+          </a:bodyPr>
+          <a:lstStyle xmlns:a="http://schemas.openxmlformats.org/drawingml/2006/main"/>
+          <a:p xmlns:a="http://schemas.openxmlformats.org/drawingml/2006/main">
+            <a:pPr algn="ctr">
+              <a:defRPr sz="1425" b="1">
+                <a:solidFill>
+                  <a:srgbClr val="FFFFFF"/>
+                </a:solidFill>
+                <a:latin typeface="Arial"/>
+                <a:ea typeface="Arial"/>
+                <a:cs typeface="Arial"/>
+              </a:defRPr>
+            </a:pPr>
+            <a:r>
+              <a:rPr sz="1425" b="1">
+                <a:solidFill>
+                  <a:srgbClr val="FFFFFF"/>
+                </a:solidFill>
+                <a:latin typeface="Arial"/>
+                <a:ea typeface="Arial"/>
+                <a:cs typeface="Arial"/>
+              </a:rPr>
+              <a:t>2</a:t>
+            </a:r>
+          </a:p>
+        </p:txBody>
+      </p:sp>
+      <p:sp>
+        <p:nvSpPr>
+          <p:cNvPr id="16" name="">
+            <a:extLst xmlns:a="http://schemas.openxmlformats.org/drawingml/2006/main">
+              <a:ext uri="{FF2B5EF4-FFF2-40B4-BE49-F238E27FC236}">
+                <a16:creationId xmlns:a16="http://schemas.microsoft.com/office/drawing/2014/main" id="{C5F77B76-FAB4-4340-BEB5-734999411E7F}"/>
+              </a:ext>
+            </a:extLst>
+          </p:cNvPr>
+          <p:cNvSpPr>
+            <a:spLocks xmlns:a="http://schemas.openxmlformats.org/drawingml/2006/main" noGrp="1"/>
+          </p:cNvSpPr>
+          <p:nvPr/>
+        </p:nvSpPr>
+        <p:spPr>
+          <a:xfrm xmlns:a="http://schemas.openxmlformats.org/drawingml/2006/main">
+            <a:off x="4648200" y="4095750"/>
+            <a:ext cx="2324100" cy="266700"/>
+          </a:xfrm>
+          <a:prstGeom xmlns:a="http://schemas.openxmlformats.org/drawingml/2006/main" prst="rect">
+            <a:avLst/>
+          </a:prstGeom>
+          <a:noFill xmlns:a="http://schemas.openxmlformats.org/drawingml/2006/main"/>
+          <a:ln xmlns:a="http://schemas.openxmlformats.org/drawingml/2006/main" w="0">
+            <a:noFill/>
+          </a:ln>
+        </p:spPr>
+        <p:txBody>
+          <a:bodyPr xmlns:a="http://schemas.openxmlformats.org/drawingml/2006/main">
+            <a:noAutofit/>
+          </a:bodyPr>
+          <a:lstStyle xmlns:a="http://schemas.openxmlformats.org/drawingml/2006/main"/>
+          <a:p xmlns:a="http://schemas.openxmlformats.org/drawingml/2006/main">
+            <a:pPr>
+              <a:defRPr sz="1350" b="1">
+                <a:solidFill>
+                  <a:srgbClr val="202A44"/>
+                </a:solidFill>
+                <a:latin typeface="Arial"/>
+                <a:ea typeface="Arial"/>
+                <a:cs typeface="Arial"/>
+              </a:defRPr>
+            </a:pPr>
+            <a:r>
+              <a:rPr sz="1350" b="1">
+                <a:solidFill>
+                  <a:srgbClr val="202A44"/>
+                </a:solidFill>
+                <a:latin typeface="Arial"/>
+                <a:ea typeface="Arial"/>
+                <a:cs typeface="Arial"/>
+              </a:rPr>
+              <a:t>Select eye symptoms</a:t>
+            </a:r>
+          </a:p>
+        </p:txBody>
+      </p:sp>
+      <p:sp>
+        <p:nvSpPr>
+          <p:cNvPr id="17" name="">
+            <a:extLst xmlns:a="http://schemas.openxmlformats.org/drawingml/2006/main">
+              <a:ext uri="{FF2B5EF4-FFF2-40B4-BE49-F238E27FC236}">
+                <a16:creationId xmlns:a16="http://schemas.microsoft.com/office/drawing/2014/main" id="{E21567ED-89FA-4823-ABD7-EE7C54C99846}"/>
+              </a:ext>
+            </a:extLst>
+          </p:cNvPr>
+          <p:cNvSpPr>
+            <a:spLocks xmlns:a="http://schemas.openxmlformats.org/drawingml/2006/main" noGrp="1"/>
+          </p:cNvSpPr>
+          <p:nvPr/>
+        </p:nvSpPr>
+        <p:spPr>
+          <a:xfrm xmlns:a="http://schemas.openxmlformats.org/drawingml/2006/main">
+            <a:off x="4648200" y="4476750"/>
+            <a:ext cx="2324100" cy="266700"/>
+          </a:xfrm>
+          <a:prstGeom xmlns:a="http://schemas.openxmlformats.org/drawingml/2006/main" prst="rect">
+            <a:avLst/>
+          </a:prstGeom>
+          <a:noFill xmlns:a="http://schemas.openxmlformats.org/drawingml/2006/main"/>
+          <a:ln xmlns:a="http://schemas.openxmlformats.org/drawingml/2006/main" w="0">
+            <a:noFill/>
+          </a:ln>
+        </p:spPr>
+        <p:txBody>
+          <a:bodyPr xmlns:a="http://schemas.openxmlformats.org/drawingml/2006/main">
+            <a:noAutofit/>
+          </a:bodyPr>
+          <a:lstStyle xmlns:a="http://schemas.openxmlformats.org/drawingml/2006/main"/>
+          <a:p xmlns:a="http://schemas.openxmlformats.org/drawingml/2006/main">
+            <a:pPr>
+              <a:defRPr sz="1050">
+                <a:solidFill>
+                  <a:srgbClr val="56647A"/>
+                </a:solidFill>
+                <a:latin typeface="Arial"/>
+                <a:ea typeface="Arial"/>
+                <a:cs typeface="Arial"/>
+              </a:defRPr>
+            </a:pPr>
+            <a:r>
+              <a:rPr sz="1050">
+                <a:solidFill>
+                  <a:srgbClr val="56647A"/>
+                </a:solidFill>
+                <a:latin typeface="Arial"/>
+                <a:ea typeface="Arial"/>
+                <a:cs typeface="Arial"/>
+              </a:rPr>
+              <a:t>Use fixed, Bengali-first options</a:t>
+            </a:r>
+          </a:p>
+        </p:txBody>
+      </p:sp>
+      <p:sp>
+        <p:nvSpPr>
+          <p:cNvPr id="18" name="">
+            <a:extLst xmlns:a="http://schemas.openxmlformats.org/drawingml/2006/main">
+              <a:ext uri="{FF2B5EF4-FFF2-40B4-BE49-F238E27FC236}">
+                <a16:creationId xmlns:a16="http://schemas.microsoft.com/office/drawing/2014/main" id="{5BD90F13-FDAD-456B-AA0E-7D7C528CCCF7}"/>
+              </a:ext>
+            </a:extLst>
+          </p:cNvPr>
+          <p:cNvSpPr>
+            <a:spLocks xmlns:a="http://schemas.openxmlformats.org/drawingml/2006/main" noGrp="1"/>
+          </p:cNvSpPr>
+          <p:nvPr/>
+        </p:nvSpPr>
+        <p:spPr>
+          <a:xfrm xmlns:a="http://schemas.openxmlformats.org/drawingml/2006/main">
+            <a:off x="7810500" y="3143250"/>
+            <a:ext cx="2857500" cy="1809750"/>
+          </a:xfrm>
+          <a:prstGeom xmlns:a="http://schemas.openxmlformats.org/drawingml/2006/main" prst="roundRect">
+            <a:avLst>
+              <a:gd name="adj" fmla="val 4211"/>
+            </a:avLst>
+          </a:prstGeom>
+          <a:solidFill xmlns:a="http://schemas.openxmlformats.org/drawingml/2006/main">
+            <a:srgbClr val="FFFFFF"/>
+          </a:solidFill>
+          <a:ln xmlns:a="http://schemas.openxmlformats.org/drawingml/2006/main" w="9525">
+            <a:solidFill>
+              <a:srgbClr val="D7D0C7"/>
+            </a:solidFill>
+          </a:ln>
+        </p:spPr>
+      </p:sp>
+      <p:sp>
+        <p:nvSpPr>
+          <p:cNvPr id="19" name="">
+            <a:extLst xmlns:a="http://schemas.openxmlformats.org/drawingml/2006/main">
+              <a:ext uri="{FF2B5EF4-FFF2-40B4-BE49-F238E27FC236}">
+                <a16:creationId xmlns:a16="http://schemas.microsoft.com/office/drawing/2014/main" id="{0AC7620D-65EE-4405-B6E2-2294C718078E}"/>
+              </a:ext>
+            </a:extLst>
+          </p:cNvPr>
+          <p:cNvSpPr>
+            <a:spLocks xmlns:a="http://schemas.openxmlformats.org/drawingml/2006/main" noGrp="1"/>
+          </p:cNvSpPr>
+          <p:nvPr/>
+        </p:nvSpPr>
+        <p:spPr>
+          <a:xfrm xmlns:a="http://schemas.openxmlformats.org/drawingml/2006/main">
+            <a:off x="8077200" y="3429000"/>
+            <a:ext cx="457200" cy="457200"/>
+          </a:xfrm>
+          <a:prstGeom xmlns:a="http://schemas.openxmlformats.org/drawingml/2006/main" prst="ellipse">
+            <a:avLst/>
+          </a:prstGeom>
+          <a:solidFill xmlns:a="http://schemas.openxmlformats.org/drawingml/2006/main">
+            <a:srgbClr val="DE664C"/>
+          </a:solidFill>
+          <a:ln xmlns:a="http://schemas.openxmlformats.org/drawingml/2006/main" w="0">
+            <a:noFill/>
+          </a:ln>
+        </p:spPr>
+      </p:sp>
+      <p:sp>
+        <p:nvSpPr>
+          <p:cNvPr id="20" name="">
+            <a:extLst xmlns:a="http://schemas.openxmlformats.org/drawingml/2006/main">
+              <a:ext uri="{FF2B5EF4-FFF2-40B4-BE49-F238E27FC236}">
+                <a16:creationId xmlns:a16="http://schemas.microsoft.com/office/drawing/2014/main" id="{0207001C-5BC3-4073-9964-2378F25A823A}"/>
+              </a:ext>
+            </a:extLst>
+          </p:cNvPr>
+          <p:cNvSpPr>
+            <a:spLocks xmlns:a="http://schemas.openxmlformats.org/drawingml/2006/main" noGrp="1"/>
+          </p:cNvSpPr>
+          <p:nvPr/>
+        </p:nvSpPr>
+        <p:spPr>
+          <a:xfrm xmlns:a="http://schemas.openxmlformats.org/drawingml/2006/main">
+            <a:off x="8077200" y="3524250"/>
+            <a:ext cx="457200" cy="209550"/>
+          </a:xfrm>
+          <a:prstGeom xmlns:a="http://schemas.openxmlformats.org/drawingml/2006/main" prst="rect">
+            <a:avLst/>
+          </a:prstGeom>
+          <a:noFill xmlns:a="http://schemas.openxmlformats.org/drawingml/2006/main"/>
+          <a:ln xmlns:a="http://schemas.openxmlformats.org/drawingml/2006/main" w="0">
+            <a:noFill/>
+          </a:ln>
+        </p:spPr>
+        <p:txBody>
+          <a:bodyPr xmlns:a="http://schemas.openxmlformats.org/drawingml/2006/main">
+            <a:noAutofit/>
+          </a:bodyPr>
+          <a:lstStyle xmlns:a="http://schemas.openxmlformats.org/drawingml/2006/main"/>
+          <a:p xmlns:a="http://schemas.openxmlformats.org/drawingml/2006/main">
+            <a:pPr algn="ctr">
+              <a:defRPr sz="1425" b="1">
+                <a:solidFill>
+                  <a:srgbClr val="FFFFFF"/>
+                </a:solidFill>
+                <a:latin typeface="Arial"/>
+                <a:ea typeface="Arial"/>
+                <a:cs typeface="Arial"/>
+              </a:defRPr>
+            </a:pPr>
+            <a:r>
+              <a:rPr sz="1425" b="1">
+                <a:solidFill>
+                  <a:srgbClr val="FFFFFF"/>
+                </a:solidFill>
+                <a:latin typeface="Arial"/>
+                <a:ea typeface="Arial"/>
+                <a:cs typeface="Arial"/>
+              </a:rPr>
+              <a:t>3</a:t>
+            </a:r>
+          </a:p>
+        </p:txBody>
+      </p:sp>
+      <p:sp>
+        <p:nvSpPr>
+          <p:cNvPr id="21" name="">
+            <a:extLst xmlns:a="http://schemas.openxmlformats.org/drawingml/2006/main">
+              <a:ext uri="{FF2B5EF4-FFF2-40B4-BE49-F238E27FC236}">
+                <a16:creationId xmlns:a16="http://schemas.microsoft.com/office/drawing/2014/main" id="{A2ADBB6B-C8AE-41C4-90CE-07104FD7FABE}"/>
+              </a:ext>
+            </a:extLst>
+          </p:cNvPr>
+          <p:cNvSpPr>
+            <a:spLocks xmlns:a="http://schemas.openxmlformats.org/drawingml/2006/main" noGrp="1"/>
+          </p:cNvSpPr>
+          <p:nvPr/>
+        </p:nvSpPr>
+        <p:spPr>
+          <a:xfrm xmlns:a="http://schemas.openxmlformats.org/drawingml/2006/main">
+            <a:off x="8077200" y="4095750"/>
+            <a:ext cx="2324100" cy="266700"/>
+          </a:xfrm>
+          <a:prstGeom xmlns:a="http://schemas.openxmlformats.org/drawingml/2006/main" prst="rect">
+            <a:avLst/>
+          </a:prstGeom>
+          <a:noFill xmlns:a="http://schemas.openxmlformats.org/drawingml/2006/main"/>
+          <a:ln xmlns:a="http://schemas.openxmlformats.org/drawingml/2006/main" w="0">
+            <a:noFill/>
+          </a:ln>
+        </p:spPr>
+        <p:txBody>
+          <a:bodyPr xmlns:a="http://schemas.openxmlformats.org/drawingml/2006/main">
+            <a:noAutofit/>
+          </a:bodyPr>
+          <a:lstStyle xmlns:a="http://schemas.openxmlformats.org/drawingml/2006/main"/>
+          <a:p xmlns:a="http://schemas.openxmlformats.org/drawingml/2006/main">
+            <a:pPr>
+              <a:defRPr sz="1350" b="1">
+                <a:solidFill>
+                  <a:srgbClr val="202A44"/>
+                </a:solidFill>
+                <a:latin typeface="Arial"/>
+                <a:ea typeface="Arial"/>
+                <a:cs typeface="Arial"/>
+              </a:defRPr>
+            </a:pPr>
+            <a:r>
+              <a:rPr sz="1350" b="1">
+                <a:solidFill>
+                  <a:srgbClr val="202A44"/>
+                </a:solidFill>
+                <a:latin typeface="Arial"/>
+                <a:ea typeface="Arial"/>
+                <a:cs typeface="Arial"/>
+              </a:rPr>
+              <a:t>View the safe result</a:t>
+            </a:r>
+          </a:p>
+        </p:txBody>
+      </p:sp>
+      <p:sp>
+        <p:nvSpPr>
+          <p:cNvPr id="22" name="">
+            <a:extLst xmlns:a="http://schemas.openxmlformats.org/drawingml/2006/main">
+              <a:ext uri="{FF2B5EF4-FFF2-40B4-BE49-F238E27FC236}">
+                <a16:creationId xmlns:a16="http://schemas.microsoft.com/office/drawing/2014/main" id="{E2D73620-BEDB-4B1C-8683-9B37D817A76C}"/>
+              </a:ext>
+            </a:extLst>
+          </p:cNvPr>
+          <p:cNvSpPr>
+            <a:spLocks xmlns:a="http://schemas.openxmlformats.org/drawingml/2006/main" noGrp="1"/>
+          </p:cNvSpPr>
+          <p:nvPr/>
+        </p:nvSpPr>
+        <p:spPr>
+          <a:xfrm xmlns:a="http://schemas.openxmlformats.org/drawingml/2006/main">
+            <a:off x="8077200" y="4476750"/>
+            <a:ext cx="2324100" cy="266700"/>
+          </a:xfrm>
+          <a:prstGeom xmlns:a="http://schemas.openxmlformats.org/drawingml/2006/main" prst="rect">
+            <a:avLst/>
+          </a:prstGeom>
+          <a:noFill xmlns:a="http://schemas.openxmlformats.org/drawingml/2006/main"/>
+          <a:ln xmlns:a="http://schemas.openxmlformats.org/drawingml/2006/main" w="0">
+            <a:noFill/>
+          </a:ln>
+        </p:spPr>
+        <p:txBody>
+          <a:bodyPr xmlns:a="http://schemas.openxmlformats.org/drawingml/2006/main">
+            <a:noAutofit/>
+          </a:bodyPr>
+          <a:lstStyle xmlns:a="http://schemas.openxmlformats.org/drawingml/2006/main"/>
+          <a:p xmlns:a="http://schemas.openxmlformats.org/drawingml/2006/main">
+            <a:pPr>
+              <a:defRPr sz="1050">
+                <a:solidFill>
+                  <a:srgbClr val="56647A"/>
+                </a:solidFill>
+                <a:latin typeface="Arial"/>
+                <a:ea typeface="Arial"/>
+                <a:cs typeface="Arial"/>
+              </a:defRPr>
+            </a:pPr>
+            <a:r>
+              <a:rPr sz="1050">
+                <a:solidFill>
+                  <a:srgbClr val="56647A"/>
+                </a:solidFill>
+                <a:latin typeface="Arial"/>
+                <a:ea typeface="Arial"/>
+                <a:cs typeface="Arial"/>
+              </a:rPr>
+              <a:t>Show route, guidance, and next action</a:t>
+            </a:r>
+          </a:p>
+        </p:txBody>
+      </p:sp>
+      <p:sp>
+        <p:nvSpPr>
+          <p:cNvPr id="23" name="">
+            <a:extLst xmlns:a="http://schemas.openxmlformats.org/drawingml/2006/main">
+              <a:ext uri="{FF2B5EF4-FFF2-40B4-BE49-F238E27FC236}">
+                <a16:creationId xmlns:a16="http://schemas.microsoft.com/office/drawing/2014/main" id="{C918394C-8C5B-41E9-90D1-86111E30DA6B}"/>
+              </a:ext>
+            </a:extLst>
+          </p:cNvPr>
+          <p:cNvSpPr>
+            <a:spLocks xmlns:a="http://schemas.openxmlformats.org/drawingml/2006/main" noGrp="1"/>
+          </p:cNvSpPr>
+          <p:nvPr/>
+        </p:nvSpPr>
+        <p:spPr>
+          <a:xfrm xmlns:a="http://schemas.openxmlformats.org/drawingml/2006/main">
+            <a:off x="1657350" y="5543550"/>
+            <a:ext cx="8877300" cy="552450"/>
+          </a:xfrm>
+          <a:prstGeom xmlns:a="http://schemas.openxmlformats.org/drawingml/2006/main" prst="roundRect">
+            <a:avLst>
+              <a:gd name="adj" fmla="val 13793"/>
+            </a:avLst>
+          </a:prstGeom>
+          <a:solidFill xmlns:a="http://schemas.openxmlformats.org/drawingml/2006/main">
+            <a:srgbClr val="E9E7F5"/>
+          </a:solidFill>
+          <a:ln xmlns:a="http://schemas.openxmlformats.org/drawingml/2006/main" w="0">
+            <a:noFill/>
+          </a:ln>
+        </p:spPr>
+      </p:sp>
+      <p:sp>
+        <p:nvSpPr>
+          <p:cNvPr id="24" name="">
+            <a:extLst xmlns:a="http://schemas.openxmlformats.org/drawingml/2006/main">
+              <a:ext uri="{FF2B5EF4-FFF2-40B4-BE49-F238E27FC236}">
+                <a16:creationId xmlns:a16="http://schemas.microsoft.com/office/drawing/2014/main" id="{1814A6B4-270F-4151-9248-6BF577B036CD}"/>
+              </a:ext>
+            </a:extLst>
+          </p:cNvPr>
+          <p:cNvSpPr>
+            <a:spLocks xmlns:a="http://schemas.openxmlformats.org/drawingml/2006/main" noGrp="1"/>
+          </p:cNvSpPr>
+          <p:nvPr/>
+        </p:nvSpPr>
+        <p:spPr>
+          <a:xfrm xmlns:a="http://schemas.openxmlformats.org/drawingml/2006/main">
+            <a:off x="1962150" y="5715000"/>
+            <a:ext cx="8267700" cy="190500"/>
+          </a:xfrm>
+          <a:prstGeom xmlns:a="http://schemas.openxmlformats.org/drawingml/2006/main" prst="rect">
+            <a:avLst/>
+          </a:prstGeom>
+          <a:noFill xmlns:a="http://schemas.openxmlformats.org/drawingml/2006/main"/>
+          <a:ln xmlns:a="http://schemas.openxmlformats.org/drawingml/2006/main" w="0">
+            <a:noFill/>
+          </a:ln>
+        </p:spPr>
+        <p:txBody>
+          <a:bodyPr xmlns:a="http://schemas.openxmlformats.org/drawingml/2006/main">
+            <a:noAutofit/>
+          </a:bodyPr>
+          <a:lstStyle xmlns:a="http://schemas.openxmlformats.org/drawingml/2006/main"/>
+          <a:p xmlns:a="http://schemas.openxmlformats.org/drawingml/2006/main">
+            <a:pPr algn="ctr">
+              <a:defRPr sz="1050" b="1">
+                <a:solidFill>
+                  <a:srgbClr val="202A44"/>
+                </a:solidFill>
+                <a:latin typeface="Arial"/>
+                <a:ea typeface="Arial"/>
+                <a:cs typeface="Arial"/>
+              </a:defRPr>
+            </a:pPr>
+            <a:r>
+              <a:rPr sz="1050" b="1">
+                <a:solidFill>
+                  <a:srgbClr val="202A44"/>
+                </a:solidFill>
+                <a:latin typeface="Arial"/>
+                <a:ea typeface="Arial"/>
+                <a:cs typeface="Arial"/>
+              </a:rPr>
+              <a:t>Demo check: the Java deterministic engine fixes the route before PostgreSQL RAG and Local Ollama provide the explanation.</a:t>
+            </a:r>
+          </a:p>
+        </p:txBody>
+      </p:sp>
+      <p:sp>
+        <p:nvSpPr>
+          <p:cNvPr id="25" name="">
+            <a:extLst xmlns:a="http://schemas.openxmlformats.org/drawingml/2006/main">
+              <a:ext uri="{FF2B5EF4-FFF2-40B4-BE49-F238E27FC236}">
+                <a16:creationId xmlns:a16="http://schemas.microsoft.com/office/drawing/2014/main" id="{07486BA9-0D2F-4EB5-935E-96FC0272881D}"/>
+              </a:ext>
+            </a:extLst>
+          </p:cNvPr>
+          <p:cNvSpPr>
+            <a:spLocks xmlns:a="http://schemas.openxmlformats.org/drawingml/2006/main" noGrp="1"/>
+          </p:cNvSpPr>
+          <p:nvPr/>
+        </p:nvSpPr>
+        <p:spPr>
+          <a:xfrm xmlns:a="http://schemas.openxmlformats.org/drawingml/2006/main">
+            <a:off x="11049000" y="6438900"/>
+            <a:ext cx="457200" cy="171450"/>
+          </a:xfrm>
+          <a:prstGeom xmlns:a="http://schemas.openxmlformats.org/drawingml/2006/main" prst="rect">
+            <a:avLst/>
+          </a:prstGeom>
+          <a:noFill xmlns:a="http://schemas.openxmlformats.org/drawingml/2006/main"/>
+          <a:ln xmlns:a="http://schemas.openxmlformats.org/drawingml/2006/main" w="0">
+            <a:noFill/>
+          </a:ln>
+        </p:spPr>
+        <p:txBody>
+          <a:bodyPr xmlns:a="http://schemas.openxmlformats.org/drawingml/2006/main">
+            <a:noAutofit/>
+          </a:bodyPr>
+          <a:lstStyle xmlns:a="http://schemas.openxmlformats.org/drawingml/2006/main"/>
+          <a:p xmlns:a="http://schemas.openxmlformats.org/drawingml/2006/main">
+            <a:pPr algn="r">
+              <a:defRPr sz="900">
+                <a:solidFill>
+                  <a:srgbClr val="56647A"/>
+                </a:solidFill>
+                <a:latin typeface="Arial"/>
+                <a:ea typeface="Arial"/>
+                <a:cs typeface="Arial"/>
+              </a:defRPr>
+            </a:pPr>
+            <a:r>
+              <a:rPr sz="900">
+                <a:solidFill>
+                  <a:srgbClr val="56647A"/>
+                </a:solidFill>
+                <a:latin typeface="Arial"/>
+                <a:ea typeface="Arial"/>
+                <a:cs typeface="Arial"/>
+              </a:rPr>
+              <a:t>12</a:t>
+            </a:r>
+          </a:p>
+        </p:txBody>
+      </p:sp>
+    </p:spTree>
+    <p:extLst>
+      <p:ext uri="{BB962C8B-B14F-4D97-AF65-F5344CB8AC3E}">
+        <p14:creationId xmlns:p14="http://schemas.microsoft.com/office/powerpoint/2010/main" val="863634096"/>
+      </p:ext>
+    </p:extLst>
+  </p:cSld>
+</p:sld>
+</file>
+
+<file path=ppt/slides/slide13.xml><?xml version="1.0" encoding="utf-8"?>
+<p:sld xmlns:p="http://schemas.openxmlformats.org/presentationml/2006/main">
+  <p:cSld>
+    <p:spTree>
+      <p:nvGrpSpPr>
+        <p:cNvPr id="1" name=""/>
+        <p:cNvGrpSpPr/>
+        <p:nvPr/>
+      </p:nvGrpSpPr>
+      <p:grpSpPr>
+        <a:xfrm xmlns:a="http://schemas.openxmlformats.org/drawingml/2006/main"/>
+      </p:grpSpPr>
+      <p:sp>
+        <p:nvSpPr>
+          <p:cNvPr id="11" name="">
+            <a:extLst xmlns:a="http://schemas.openxmlformats.org/drawingml/2006/main">
+              <a:ext uri="{FF2B5EF4-FFF2-40B4-BE49-F238E27FC236}">
+                <a16:creationId xmlns:a16="http://schemas.microsoft.com/office/drawing/2014/main" id="{33279760-B390-488A-B7E9-D50332061FAF}"/>
+              </a:ext>
+            </a:extLst>
+          </p:cNvPr>
+          <p:cNvSpPr>
+            <a:spLocks xmlns:a="http://schemas.openxmlformats.org/drawingml/2006/main" noGrp="1"/>
+          </p:cNvSpPr>
+          <p:nvPr/>
+        </p:nvSpPr>
+        <p:spPr>
+          <a:xfrm xmlns:a="http://schemas.openxmlformats.org/drawingml/2006/main">
+            <a:off x="0" y="0"/>
+            <a:ext cx="12192000" cy="6858000"/>
+          </a:xfrm>
+          <a:prstGeom xmlns:a="http://schemas.openxmlformats.org/drawingml/2006/main" prst="rect">
+            <a:avLst/>
+          </a:prstGeom>
+          <a:solidFill xmlns:a="http://schemas.openxmlformats.org/drawingml/2006/main">
+            <a:srgbClr val="202A44"/>
+          </a:solidFill>
+          <a:ln xmlns:a="http://schemas.openxmlformats.org/drawingml/2006/main" w="0">
+            <a:noFill/>
+          </a:ln>
+        </p:spPr>
+      </p:sp>
+      <p:sp>
+        <p:nvSpPr>
+          <p:cNvPr id="2" name="">
+            <a:extLst xmlns:a="http://schemas.openxmlformats.org/drawingml/2006/main">
+              <a:ext uri="{FF2B5EF4-FFF2-40B4-BE49-F238E27FC236}">
+                <a16:creationId xmlns:a16="http://schemas.microsoft.com/office/drawing/2014/main" id="{76445375-8A88-4350-A90F-2B2CA10F8030}"/>
+              </a:ext>
+            </a:extLst>
+          </p:cNvPr>
+          <p:cNvSpPr>
+            <a:spLocks xmlns:a="http://schemas.openxmlformats.org/drawingml/2006/main" noGrp="1"/>
+          </p:cNvSpPr>
+          <p:nvPr/>
+        </p:nvSpPr>
+        <p:spPr>
+          <a:xfrm xmlns:a="http://schemas.openxmlformats.org/drawingml/2006/main">
+            <a:off x="990600" y="819150"/>
+            <a:ext cx="2476500" cy="190500"/>
+          </a:xfrm>
+          <a:prstGeom xmlns:a="http://schemas.openxmlformats.org/drawingml/2006/main" prst="rect">
+            <a:avLst/>
+          </a:prstGeom>
+          <a:noFill xmlns:a="http://schemas.openxmlformats.org/drawingml/2006/main"/>
+          <a:ln xmlns:a="http://schemas.openxmlformats.org/drawingml/2006/main" w="0">
+            <a:noFill/>
+          </a:ln>
+        </p:spPr>
+        <p:txBody>
+          <a:bodyPr xmlns:a="http://schemas.openxmlformats.org/drawingml/2006/main">
+            <a:noAutofit/>
+          </a:bodyPr>
+          <a:lstStyle xmlns:a="http://schemas.openxmlformats.org/drawingml/2006/main"/>
+          <a:p xmlns:a="http://schemas.openxmlformats.org/drawingml/2006/main">
+            <a:pPr>
+              <a:defRPr sz="1200" b="1">
+                <a:solidFill>
+                  <a:srgbClr val="E7A048"/>
+                </a:solidFill>
+                <a:latin typeface="Arial"/>
+                <a:ea typeface="Arial"/>
+                <a:cs typeface="Arial"/>
+              </a:defRPr>
+            </a:pPr>
+            <a:r>
+              <a:rPr sz="1200" b="1">
+                <a:solidFill>
+                  <a:srgbClr val="E7A048"/>
+                </a:solidFill>
+                <a:latin typeface="Arial"/>
+                <a:ea typeface="Arial"/>
+                <a:cs typeface="Arial"/>
+              </a:rPr>
+              <a:t>NETRAJYOTI AI</a:t>
+            </a:r>
+          </a:p>
+        </p:txBody>
+      </p:sp>
+      <p:sp>
+        <p:nvSpPr>
+          <p:cNvPr id="3" name="">
+            <a:extLst xmlns:a="http://schemas.openxmlformats.org/drawingml/2006/main">
+              <a:ext uri="{FF2B5EF4-FFF2-40B4-BE49-F238E27FC236}">
+                <a16:creationId xmlns:a16="http://schemas.microsoft.com/office/drawing/2014/main" id="{A599CC87-C68D-41B1-9801-E4A44BFB29A3}"/>
+              </a:ext>
+            </a:extLst>
+          </p:cNvPr>
+          <p:cNvSpPr>
+            <a:spLocks xmlns:a="http://schemas.openxmlformats.org/drawingml/2006/main" noGrp="1"/>
+          </p:cNvSpPr>
+          <p:nvPr/>
+        </p:nvSpPr>
+        <p:spPr>
+          <a:xfrm xmlns:a="http://schemas.openxmlformats.org/drawingml/2006/main">
+            <a:off x="990600" y="1381125"/>
+            <a:ext cx="1809750" cy="47625"/>
+          </a:xfrm>
+          <a:prstGeom xmlns:a="http://schemas.openxmlformats.org/drawingml/2006/main" prst="rect">
+            <a:avLst/>
+          </a:prstGeom>
+          <a:solidFill xmlns:a="http://schemas.openxmlformats.org/drawingml/2006/main">
+            <a:srgbClr val="237A7A"/>
+          </a:solidFill>
+          <a:ln xmlns:a="http://schemas.openxmlformats.org/drawingml/2006/main" w="0">
+            <a:noFill/>
+          </a:ln>
+        </p:spPr>
+      </p:sp>
+      <p:sp>
+        <p:nvSpPr>
+          <p:cNvPr id="4" name="">
+            <a:extLst xmlns:a="http://schemas.openxmlformats.org/drawingml/2006/main">
+              <a:ext uri="{FF2B5EF4-FFF2-40B4-BE49-F238E27FC236}">
+                <a16:creationId xmlns:a16="http://schemas.microsoft.com/office/drawing/2014/main" id="{BCBCBE3A-B580-4276-A427-E7AE623208F2}"/>
+              </a:ext>
+            </a:extLst>
+          </p:cNvPr>
+          <p:cNvSpPr>
+            <a:spLocks xmlns:a="http://schemas.openxmlformats.org/drawingml/2006/main" noGrp="1"/>
+          </p:cNvSpPr>
+          <p:nvPr/>
+        </p:nvSpPr>
+        <p:spPr>
+          <a:xfrm xmlns:a="http://schemas.openxmlformats.org/drawingml/2006/main">
+            <a:off x="990600" y="2238375"/>
+            <a:ext cx="6477000" cy="609600"/>
+          </a:xfrm>
+          <a:prstGeom xmlns:a="http://schemas.openxmlformats.org/drawingml/2006/main" prst="rect">
+            <a:avLst/>
+          </a:prstGeom>
+          <a:noFill xmlns:a="http://schemas.openxmlformats.org/drawingml/2006/main"/>
+          <a:ln xmlns:a="http://schemas.openxmlformats.org/drawingml/2006/main" w="0">
+            <a:noFill/>
+          </a:ln>
+        </p:spPr>
+        <p:txBody>
+          <a:bodyPr xmlns:a="http://schemas.openxmlformats.org/drawingml/2006/main">
+            <a:noAutofit/>
+          </a:bodyPr>
+          <a:lstStyle xmlns:a="http://schemas.openxmlformats.org/drawingml/2006/main"/>
+          <a:p xmlns:a="http://schemas.openxmlformats.org/drawingml/2006/main">
+            <a:pPr>
+              <a:defRPr sz="3450" b="1">
+                <a:solidFill>
+                  <a:srgbClr val="FFFFFF"/>
+                </a:solidFill>
+                <a:latin typeface="Arial"/>
+                <a:ea typeface="Arial"/>
+                <a:cs typeface="Arial"/>
+              </a:defRPr>
+            </a:pPr>
+            <a:r>
+              <a:rPr sz="3450" b="1">
+                <a:solidFill>
+                  <a:srgbClr val="FFFFFF"/>
+                </a:solidFill>
+                <a:latin typeface="Arial"/>
+                <a:ea typeface="Arial"/>
+                <a:cs typeface="Arial"/>
+              </a:rPr>
+              <a:t>Thank you</a:t>
+            </a:r>
+          </a:p>
+        </p:txBody>
+      </p:sp>
+      <p:sp>
+        <p:nvSpPr>
+          <p:cNvPr id="5" name="">
+            <a:extLst xmlns:a="http://schemas.openxmlformats.org/drawingml/2006/main">
+              <a:ext uri="{FF2B5EF4-FFF2-40B4-BE49-F238E27FC236}">
+                <a16:creationId xmlns:a16="http://schemas.microsoft.com/office/drawing/2014/main" id="{7F04372B-E69E-451A-84F0-8F21C83D5B57}"/>
+              </a:ext>
+            </a:extLst>
+          </p:cNvPr>
+          <p:cNvSpPr>
+            <a:spLocks xmlns:a="http://schemas.openxmlformats.org/drawingml/2006/main" noGrp="1"/>
+          </p:cNvSpPr>
+          <p:nvPr/>
+        </p:nvSpPr>
+        <p:spPr>
+          <a:xfrm xmlns:a="http://schemas.openxmlformats.org/drawingml/2006/main">
+            <a:off x="990600" y="3067050"/>
+            <a:ext cx="5810250" cy="304800"/>
+          </a:xfrm>
+          <a:prstGeom xmlns:a="http://schemas.openxmlformats.org/drawingml/2006/main" prst="rect">
+            <a:avLst/>
+          </a:prstGeom>
+          <a:noFill xmlns:a="http://schemas.openxmlformats.org/drawingml/2006/main"/>
+          <a:ln xmlns:a="http://schemas.openxmlformats.org/drawingml/2006/main" w="0">
+            <a:noFill/>
+          </a:ln>
+        </p:spPr>
+        <p:txBody>
+          <a:bodyPr xmlns:a="http://schemas.openxmlformats.org/drawingml/2006/main">
+            <a:noAutofit/>
+          </a:bodyPr>
+          <a:lstStyle xmlns:a="http://schemas.openxmlformats.org/drawingml/2006/main"/>
+          <a:p xmlns:a="http://schemas.openxmlformats.org/drawingml/2006/main">
+            <a:pPr>
+              <a:defRPr sz="1650">
+                <a:solidFill>
+                  <a:srgbClr val="DDE8F6"/>
+                </a:solidFill>
+                <a:latin typeface="Arial"/>
+                <a:ea typeface="Arial"/>
+                <a:cs typeface="Arial"/>
+              </a:defRPr>
+            </a:pPr>
+            <a:r>
+              <a:rPr sz="1650">
+                <a:solidFill>
+                  <a:srgbClr val="DDE8F6"/>
+                </a:solidFill>
+                <a:latin typeface="Arial"/>
+                <a:ea typeface="Arial"/>
+                <a:cs typeface="Arial"/>
+              </a:rPr>
+              <a:t>Questions and discussion</a:t>
+            </a:r>
+          </a:p>
+        </p:txBody>
+      </p:sp>
+      <p:sp>
+        <p:nvSpPr>
+          <p:cNvPr id="6" name="">
+            <a:extLst xmlns:a="http://schemas.openxmlformats.org/drawingml/2006/main">
+              <a:ext uri="{FF2B5EF4-FFF2-40B4-BE49-F238E27FC236}">
+                <a16:creationId xmlns:a16="http://schemas.microsoft.com/office/drawing/2014/main" id="{7A7215BD-1577-4A16-A1E6-C497889D3C33}"/>
+              </a:ext>
+            </a:extLst>
+          </p:cNvPr>
+          <p:cNvSpPr>
+            <a:spLocks xmlns:a="http://schemas.openxmlformats.org/drawingml/2006/main" noGrp="1"/>
+          </p:cNvSpPr>
+          <p:nvPr/>
+        </p:nvSpPr>
+        <p:spPr>
+          <a:xfrm xmlns:a="http://schemas.openxmlformats.org/drawingml/2006/main">
+            <a:off x="990600" y="5105400"/>
+            <a:ext cx="6191250" cy="247650"/>
+          </a:xfrm>
+          <a:prstGeom xmlns:a="http://schemas.openxmlformats.org/drawingml/2006/main" prst="rect">
+            <a:avLst/>
+          </a:prstGeom>
+          <a:noFill xmlns:a="http://schemas.openxmlformats.org/drawingml/2006/main"/>
+          <a:ln xmlns:a="http://schemas.openxmlformats.org/drawingml/2006/main" w="0">
+            <a:noFill/>
+          </a:ln>
+        </p:spPr>
+        <p:txBody>
+          <a:bodyPr xmlns:a="http://schemas.openxmlformats.org/drawingml/2006/main">
+            <a:noAutofit/>
+          </a:bodyPr>
+          <a:lstStyle xmlns:a="http://schemas.openxmlformats.org/drawingml/2006/main"/>
+          <a:p xmlns:a="http://schemas.openxmlformats.org/drawingml/2006/main">
+            <a:pPr>
+              <a:defRPr sz="1350">
+                <a:solidFill>
+                  <a:srgbClr val="FFFFFF"/>
+                </a:solidFill>
+                <a:latin typeface="Arial"/>
+                <a:ea typeface="Arial"/>
+                <a:cs typeface="Arial"/>
+              </a:defRPr>
+            </a:pPr>
+            <a:r>
+              <a:rPr sz="1350">
+                <a:solidFill>
+                  <a:srgbClr val="FFFFFF"/>
+                </a:solidFill>
+                <a:latin typeface="Arial"/>
+                <a:ea typeface="Arial"/>
+                <a:cs typeface="Arial"/>
+              </a:rPr>
+              <a:t>Reliable Bengali eye-care guidance with a fixed safety route</a:t>
+            </a:r>
+          </a:p>
+        </p:txBody>
+      </p:sp>
+      <p:sp>
+        <p:nvSpPr>
+          <p:cNvPr id="7" name="">
+            <a:extLst xmlns:a="http://schemas.openxmlformats.org/drawingml/2006/main">
+              <a:ext uri="{FF2B5EF4-FFF2-40B4-BE49-F238E27FC236}">
+                <a16:creationId xmlns:a16="http://schemas.microsoft.com/office/drawing/2014/main" id="{BB619EFA-9B7F-43D0-A2C2-DE42286911D6}"/>
+              </a:ext>
+            </a:extLst>
+          </p:cNvPr>
+          <p:cNvSpPr>
+            <a:spLocks xmlns:a="http://schemas.openxmlformats.org/drawingml/2006/main" noGrp="1"/>
+          </p:cNvSpPr>
+          <p:nvPr/>
+        </p:nvSpPr>
+        <p:spPr>
+          <a:xfrm xmlns:a="http://schemas.openxmlformats.org/drawingml/2006/main">
+            <a:off x="990600" y="5524500"/>
+            <a:ext cx="7143750" cy="209550"/>
+          </a:xfrm>
+          <a:prstGeom xmlns:a="http://schemas.openxmlformats.org/drawingml/2006/main" prst="rect">
+            <a:avLst/>
+          </a:prstGeom>
+          <a:noFill xmlns:a="http://schemas.openxmlformats.org/drawingml/2006/main"/>
+          <a:ln xmlns:a="http://schemas.openxmlformats.org/drawingml/2006/main" w="0">
+            <a:noFill/>
+          </a:ln>
+        </p:spPr>
+        <p:txBody>
+          <a:bodyPr xmlns:a="http://schemas.openxmlformats.org/drawingml/2006/main">
+            <a:noAutofit/>
+          </a:bodyPr>
+          <a:lstStyle xmlns:a="http://schemas.openxmlformats.org/drawingml/2006/main"/>
+          <a:p xmlns:a="http://schemas.openxmlformats.org/drawingml/2006/main">
+            <a:pPr>
+              <a:defRPr sz="1125">
+                <a:solidFill>
+                  <a:srgbClr val="DDE8F6"/>
+                </a:solidFill>
+                <a:latin typeface="Arial"/>
+                <a:ea typeface="Arial"/>
+                <a:cs typeface="Arial"/>
+              </a:defRPr>
+            </a:pPr>
+            <a:r>
+              <a:rPr sz="1125">
+                <a:solidFill>
+                  <a:srgbClr val="DDE8F6"/>
+                </a:solidFill>
+                <a:latin typeface="Arial"/>
+                <a:ea typeface="Arial"/>
+                <a:cs typeface="Arial"/>
+              </a:rPr>
+              <a:t>Voice and text access · approved clinical content · clear next action</a:t>
+            </a:r>
+          </a:p>
+        </p:txBody>
+      </p:sp>
+      <p:sp>
+        <p:nvSpPr>
+          <p:cNvPr id="8" name="">
+            <a:extLst xmlns:a="http://schemas.openxmlformats.org/drawingml/2006/main">
+              <a:ext uri="{FF2B5EF4-FFF2-40B4-BE49-F238E27FC236}">
+                <a16:creationId xmlns:a16="http://schemas.microsoft.com/office/drawing/2014/main" id="{6FED4DD0-BFF1-40AD-B312-D5A501AA5E05}"/>
+              </a:ext>
+            </a:extLst>
+          </p:cNvPr>
+          <p:cNvSpPr>
+            <a:spLocks xmlns:a="http://schemas.openxmlformats.org/drawingml/2006/main" noGrp="1"/>
+          </p:cNvSpPr>
+          <p:nvPr/>
+        </p:nvSpPr>
+        <p:spPr>
+          <a:xfrm xmlns:a="http://schemas.openxmlformats.org/drawingml/2006/main">
+            <a:off x="990600" y="6153150"/>
+            <a:ext cx="10210800" cy="28575"/>
+          </a:xfrm>
+          <a:prstGeom xmlns:a="http://schemas.openxmlformats.org/drawingml/2006/main" prst="rect">
+            <a:avLst/>
+          </a:prstGeom>
+          <a:solidFill xmlns:a="http://schemas.openxmlformats.org/drawingml/2006/main">
+            <a:srgbClr val="E7A048"/>
+          </a:solidFill>
+          <a:ln xmlns:a="http://schemas.openxmlformats.org/drawingml/2006/main" w="0">
+            <a:noFill/>
+          </a:ln>
+        </p:spPr>
+      </p:sp>
+      <p:sp>
+        <p:nvSpPr>
+          <p:cNvPr id="9" name="">
+            <a:extLst xmlns:a="http://schemas.openxmlformats.org/drawingml/2006/main">
+              <a:ext uri="{FF2B5EF4-FFF2-40B4-BE49-F238E27FC236}">
+                <a16:creationId xmlns:a16="http://schemas.microsoft.com/office/drawing/2014/main" id="{D5EDF10E-4D21-4CD3-B527-586A1BC6A839}"/>
+              </a:ext>
+            </a:extLst>
+          </p:cNvPr>
+          <p:cNvSpPr>
+            <a:spLocks xmlns:a="http://schemas.openxmlformats.org/drawingml/2006/main" noGrp="1"/>
+          </p:cNvSpPr>
+          <p:nvPr/>
+        </p:nvSpPr>
+        <p:spPr>
+          <a:xfrm xmlns:a="http://schemas.openxmlformats.org/drawingml/2006/main">
+            <a:off x="990600" y="6343650"/>
+            <a:ext cx="2381250" cy="171450"/>
+          </a:xfrm>
+          <a:prstGeom xmlns:a="http://schemas.openxmlformats.org/drawingml/2006/main" prst="rect">
+            <a:avLst/>
+          </a:prstGeom>
+          <a:noFill xmlns:a="http://schemas.openxmlformats.org/drawingml/2006/main"/>
+          <a:ln xmlns:a="http://schemas.openxmlformats.org/drawingml/2006/main" w="0">
+            <a:noFill/>
+          </a:ln>
+        </p:spPr>
+        <p:txBody>
+          <a:bodyPr xmlns:a="http://schemas.openxmlformats.org/drawingml/2006/main">
+            <a:noAutofit/>
+          </a:bodyPr>
+          <a:lstStyle xmlns:a="http://schemas.openxmlformats.org/drawingml/2006/main"/>
+          <a:p xmlns:a="http://schemas.openxmlformats.org/drawingml/2006/main">
+            <a:pPr>
+              <a:defRPr sz="975" b="1">
+                <a:solidFill>
+                  <a:srgbClr val="E7A048"/>
+                </a:solidFill>
+                <a:latin typeface="Arial"/>
+                <a:ea typeface="Arial"/>
+                <a:cs typeface="Arial"/>
+              </a:defRPr>
+            </a:pPr>
+            <a:r>
+              <a:rPr sz="975" b="1">
+                <a:solidFill>
+                  <a:srgbClr val="E7A048"/>
+                </a:solidFill>
+                <a:latin typeface="Arial"/>
+                <a:ea typeface="Arial"/>
+                <a:cs typeface="Arial"/>
+              </a:rPr>
+              <a:t>NetraJyoti AI</a:t>
+            </a:r>
+          </a:p>
+        </p:txBody>
+      </p:sp>
+      <p:sp>
+        <p:nvSpPr>
+          <p:cNvPr id="10" name="">
+            <a:extLst xmlns:a="http://schemas.openxmlformats.org/drawingml/2006/main">
+              <a:ext uri="{FF2B5EF4-FFF2-40B4-BE49-F238E27FC236}">
+                <a16:creationId xmlns:a16="http://schemas.microsoft.com/office/drawing/2014/main" id="{3D8A0D5E-60A7-462B-8072-1D40BFB1F8BB}"/>
+              </a:ext>
+            </a:extLst>
+          </p:cNvPr>
+          <p:cNvSpPr>
+            <a:spLocks xmlns:a="http://schemas.openxmlformats.org/drawingml/2006/main" noGrp="1"/>
+          </p:cNvSpPr>
+          <p:nvPr/>
+        </p:nvSpPr>
+        <p:spPr>
+          <a:xfrm xmlns:a="http://schemas.openxmlformats.org/drawingml/2006/main">
+            <a:off x="11049000" y="6438900"/>
+            <a:ext cx="457200" cy="171450"/>
+          </a:xfrm>
+          <a:prstGeom xmlns:a="http://schemas.openxmlformats.org/drawingml/2006/main" prst="rect">
+            <a:avLst/>
+          </a:prstGeom>
+          <a:noFill xmlns:a="http://schemas.openxmlformats.org/drawingml/2006/main"/>
+          <a:ln xmlns:a="http://schemas.openxmlformats.org/drawingml/2006/main" w="0">
+            <a:noFill/>
+          </a:ln>
+        </p:spPr>
+        <p:txBody>
+          <a:bodyPr xmlns:a="http://schemas.openxmlformats.org/drawingml/2006/main">
+            <a:noAutofit/>
+          </a:bodyPr>
+          <a:lstStyle xmlns:a="http://schemas.openxmlformats.org/drawingml/2006/main"/>
+          <a:p xmlns:a="http://schemas.openxmlformats.org/drawingml/2006/main">
+            <a:pPr algn="r">
+              <a:defRPr sz="900">
+                <a:solidFill>
+                  <a:srgbClr val="56647A"/>
+                </a:solidFill>
+                <a:latin typeface="Arial"/>
+                <a:ea typeface="Arial"/>
+                <a:cs typeface="Arial"/>
+              </a:defRPr>
+            </a:pPr>
+            <a:r>
+              <a:rPr sz="900">
+                <a:solidFill>
+                  <a:srgbClr val="56647A"/>
+                </a:solidFill>
+                <a:latin typeface="Arial"/>
+                <a:ea typeface="Arial"/>
+                <a:cs typeface="Arial"/>
+              </a:rPr>
+              <a:t>13</a:t>
+            </a:r>
+          </a:p>
+        </p:txBody>
+      </p:sp>
+    </p:spTree>
+    <p:extLst>
+      <p:ext uri="{BB962C8B-B14F-4D97-AF65-F5344CB8AC3E}">
+        <p14:creationId xmlns:p14="http://schemas.microsoft.com/office/powerpoint/2010/main" val="2139598413"/>
       </p:ext>
     </p:extLst>
   </p:cSld>
@@ -6755,7 +8618,7 @@
           <p:cNvPr id="24" name="">
             <a:extLst xmlns:a="http://schemas.openxmlformats.org/drawingml/2006/main">
               <a:ext uri="{FF2B5EF4-FFF2-40B4-BE49-F238E27FC236}">
-                <a16:creationId xmlns:a16="http://schemas.microsoft.com/office/drawing/2014/main" id="{603C6DBF-F581-4CD2-8EA4-BEC252D431A0}"/>
+                <a16:creationId xmlns:a16="http://schemas.microsoft.com/office/drawing/2014/main" id="{8D85BB84-1C1C-48DD-8AF9-6BF5FA68DE9D}"/>
               </a:ext>
             </a:extLst>
           </p:cNvPr>
@@ -6785,7 +8648,7 @@
           <p:cNvPr id="25" name="">
             <a:extLst xmlns:a="http://schemas.openxmlformats.org/drawingml/2006/main">
               <a:ext uri="{FF2B5EF4-FFF2-40B4-BE49-F238E27FC236}">
-                <a16:creationId xmlns:a16="http://schemas.microsoft.com/office/drawing/2014/main" id="{DAB804A9-195B-4F16-A091-3781FEB2F97E}"/>
+                <a16:creationId xmlns:a16="http://schemas.microsoft.com/office/drawing/2014/main" id="{A60B646C-0FB1-4E91-8443-4E023C80B1B5}"/>
               </a:ext>
             </a:extLst>
           </p:cNvPr>
@@ -6842,7 +8705,7 @@
           <p:cNvPr id="26" name="">
             <a:extLst xmlns:a="http://schemas.openxmlformats.org/drawingml/2006/main">
               <a:ext uri="{FF2B5EF4-FFF2-40B4-BE49-F238E27FC236}">
-                <a16:creationId xmlns:a16="http://schemas.microsoft.com/office/drawing/2014/main" id="{3DC04F79-F8DC-4291-96BA-986431FF94EB}"/>
+                <a16:creationId xmlns:a16="http://schemas.microsoft.com/office/drawing/2014/main" id="{9C03CE6D-A554-4FFD-A38F-8610CFEA3344}"/>
               </a:ext>
             </a:extLst>
           </p:cNvPr>
@@ -6899,7 +8762,7 @@
           <p:cNvPr id="27" name="">
             <a:extLst xmlns:a="http://schemas.openxmlformats.org/drawingml/2006/main">
               <a:ext uri="{FF2B5EF4-FFF2-40B4-BE49-F238E27FC236}">
-                <a16:creationId xmlns:a16="http://schemas.microsoft.com/office/drawing/2014/main" id="{E5322F39-A57C-4A0B-9C76-18E04A3DA9D0}"/>
+                <a16:creationId xmlns:a16="http://schemas.microsoft.com/office/drawing/2014/main" id="{CC08DA37-D4CB-4CD9-82DF-E51ECE7FD2C9}"/>
               </a:ext>
             </a:extLst>
           </p:cNvPr>
@@ -6956,7 +8819,7 @@
           <p:cNvPr id="28" name="">
             <a:extLst xmlns:a="http://schemas.openxmlformats.org/drawingml/2006/main">
               <a:ext uri="{FF2B5EF4-FFF2-40B4-BE49-F238E27FC236}">
-                <a16:creationId xmlns:a16="http://schemas.microsoft.com/office/drawing/2014/main" id="{628260B5-ADBC-4297-B57F-1FF5D8C3639E}"/>
+                <a16:creationId xmlns:a16="http://schemas.microsoft.com/office/drawing/2014/main" id="{77543633-B5C5-4081-8948-9F5B1C4E725C}"/>
               </a:ext>
             </a:extLst>
           </p:cNvPr>
@@ -7013,7 +8876,7 @@
           <p:cNvPr id="29" name="">
             <a:extLst xmlns:a="http://schemas.openxmlformats.org/drawingml/2006/main">
               <a:ext uri="{FF2B5EF4-FFF2-40B4-BE49-F238E27FC236}">
-                <a16:creationId xmlns:a16="http://schemas.microsoft.com/office/drawing/2014/main" id="{AF797C27-1584-4547-AE52-16F2DBF4861E}"/>
+                <a16:creationId xmlns:a16="http://schemas.microsoft.com/office/drawing/2014/main" id="{94BBEF13-56C7-45A5-AF87-0B167B50CC6B}"/>
               </a:ext>
             </a:extLst>
           </p:cNvPr>
@@ -7043,7 +8906,7 @@
           <p:cNvPr id="30" name="">
             <a:extLst xmlns:a="http://schemas.openxmlformats.org/drawingml/2006/main">
               <a:ext uri="{FF2B5EF4-FFF2-40B4-BE49-F238E27FC236}">
-                <a16:creationId xmlns:a16="http://schemas.microsoft.com/office/drawing/2014/main" id="{A2CB6C15-DDC4-4A01-89CE-939F754ADFE6}"/>
+                <a16:creationId xmlns:a16="http://schemas.microsoft.com/office/drawing/2014/main" id="{A1416715-A47E-4A18-A5BF-FEC2019F0091}"/>
               </a:ext>
             </a:extLst>
           </p:cNvPr>
@@ -7100,7 +8963,7 @@
           <p:cNvPr id="31" name="">
             <a:extLst xmlns:a="http://schemas.openxmlformats.org/drawingml/2006/main">
               <a:ext uri="{FF2B5EF4-FFF2-40B4-BE49-F238E27FC236}">
-                <a16:creationId xmlns:a16="http://schemas.microsoft.com/office/drawing/2014/main" id="{4C238EAD-1716-4D8A-9625-F52127948996}"/>
+                <a16:creationId xmlns:a16="http://schemas.microsoft.com/office/drawing/2014/main" id="{DDBA980C-2F61-4993-9965-462218B14DA6}"/>
               </a:ext>
             </a:extLst>
           </p:cNvPr>
@@ -7180,7 +9043,7 @@
           <p:cNvPr id="32" name="">
             <a:extLst xmlns:a="http://schemas.openxmlformats.org/drawingml/2006/main">
               <a:ext uri="{FF2B5EF4-FFF2-40B4-BE49-F238E27FC236}">
-                <a16:creationId xmlns:a16="http://schemas.microsoft.com/office/drawing/2014/main" id="{E87C169A-A372-4532-8B97-9F682D11EA39}"/>
+                <a16:creationId xmlns:a16="http://schemas.microsoft.com/office/drawing/2014/main" id="{BB48A905-AB85-40D0-95B4-1FB5EBBE37F6}"/>
               </a:ext>
             </a:extLst>
           </p:cNvPr>
@@ -7237,7 +9100,7 @@
           <p:cNvPr id="33" name="">
             <a:extLst xmlns:a="http://schemas.openxmlformats.org/drawingml/2006/main">
               <a:ext uri="{FF2B5EF4-FFF2-40B4-BE49-F238E27FC236}">
-                <a16:creationId xmlns:a16="http://schemas.microsoft.com/office/drawing/2014/main" id="{29A995D1-18D4-4237-9EE1-1F74776554EB}"/>
+                <a16:creationId xmlns:a16="http://schemas.microsoft.com/office/drawing/2014/main" id="{171EED52-F918-4547-B3A8-328CB6272780}"/>
               </a:ext>
             </a:extLst>
           </p:cNvPr>
@@ -7267,7 +9130,7 @@
           <p:cNvPr id="34" name="">
             <a:extLst xmlns:a="http://schemas.openxmlformats.org/drawingml/2006/main">
               <a:ext uri="{FF2B5EF4-FFF2-40B4-BE49-F238E27FC236}">
-                <a16:creationId xmlns:a16="http://schemas.microsoft.com/office/drawing/2014/main" id="{446A555F-2825-4EDA-B1CC-27FB758AE89C}"/>
+                <a16:creationId xmlns:a16="http://schemas.microsoft.com/office/drawing/2014/main" id="{9D91DA50-59A9-4980-A637-1796077D70B7}"/>
               </a:ext>
             </a:extLst>
           </p:cNvPr>
@@ -7297,7 +9160,7 @@
           <p:cNvPr id="35" name="">
             <a:extLst xmlns:a="http://schemas.openxmlformats.org/drawingml/2006/main">
               <a:ext uri="{FF2B5EF4-FFF2-40B4-BE49-F238E27FC236}">
-                <a16:creationId xmlns:a16="http://schemas.microsoft.com/office/drawing/2014/main" id="{E01AB28F-FBED-4976-8D0A-447480C0564E}"/>
+                <a16:creationId xmlns:a16="http://schemas.microsoft.com/office/drawing/2014/main" id="{BC50F81E-19B3-47F1-85EF-29A576F7B216}"/>
               </a:ext>
             </a:extLst>
           </p:cNvPr>
@@ -7354,7 +9217,7 @@
           <p:cNvPr id="36" name="">
             <a:extLst xmlns:a="http://schemas.openxmlformats.org/drawingml/2006/main">
               <a:ext uri="{FF2B5EF4-FFF2-40B4-BE49-F238E27FC236}">
-                <a16:creationId xmlns:a16="http://schemas.microsoft.com/office/drawing/2014/main" id="{AC030863-B872-45F1-BA2A-D17A54D08287}"/>
+                <a16:creationId xmlns:a16="http://schemas.microsoft.com/office/drawing/2014/main" id="{B3331B13-DCF7-42D6-8DA2-DDC3EE4AF319}"/>
               </a:ext>
             </a:extLst>
           </p:cNvPr>
@@ -7411,7 +9274,7 @@
           <p:cNvPr id="37" name="">
             <a:extLst xmlns:a="http://schemas.openxmlformats.org/drawingml/2006/main">
               <a:ext uri="{FF2B5EF4-FFF2-40B4-BE49-F238E27FC236}">
-                <a16:creationId xmlns:a16="http://schemas.microsoft.com/office/drawing/2014/main" id="{C2CFE3AB-C43B-4A7E-B705-837BE58FE0A1}"/>
+                <a16:creationId xmlns:a16="http://schemas.microsoft.com/office/drawing/2014/main" id="{403A5069-9CBE-4C05-AF33-47A1C2487550}"/>
               </a:ext>
             </a:extLst>
           </p:cNvPr>
@@ -7468,7 +9331,7 @@
           <p:cNvPr id="38" name="">
             <a:extLst xmlns:a="http://schemas.openxmlformats.org/drawingml/2006/main">
               <a:ext uri="{FF2B5EF4-FFF2-40B4-BE49-F238E27FC236}">
-                <a16:creationId xmlns:a16="http://schemas.microsoft.com/office/drawing/2014/main" id="{F3092A3A-6F7A-4212-83C5-D1D544D49B4C}"/>
+                <a16:creationId xmlns:a16="http://schemas.microsoft.com/office/drawing/2014/main" id="{4D7A409B-0845-434D-8AE1-E552D528798E}"/>
               </a:ext>
             </a:extLst>
           </p:cNvPr>
@@ -7498,7 +9361,7 @@
           <p:cNvPr id="39" name="">
             <a:extLst xmlns:a="http://schemas.openxmlformats.org/drawingml/2006/main">
               <a:ext uri="{FF2B5EF4-FFF2-40B4-BE49-F238E27FC236}">
-                <a16:creationId xmlns:a16="http://schemas.microsoft.com/office/drawing/2014/main" id="{5356A950-E3A9-47CB-B307-1EBF0C5AC634}"/>
+                <a16:creationId xmlns:a16="http://schemas.microsoft.com/office/drawing/2014/main" id="{65D0BC3B-443F-4F86-9872-0D1FB8C78752}"/>
               </a:ext>
             </a:extLst>
           </p:cNvPr>
@@ -7555,7 +9418,7 @@
           <p:cNvPr id="40" name="">
             <a:extLst xmlns:a="http://schemas.openxmlformats.org/drawingml/2006/main">
               <a:ext uri="{FF2B5EF4-FFF2-40B4-BE49-F238E27FC236}">
-                <a16:creationId xmlns:a16="http://schemas.microsoft.com/office/drawing/2014/main" id="{211DCEB6-C22A-4171-B97C-9D916E76C2F9}"/>
+                <a16:creationId xmlns:a16="http://schemas.microsoft.com/office/drawing/2014/main" id="{85A6EF2B-7AF2-4786-83A3-4820C80E1C07}"/>
               </a:ext>
             </a:extLst>
           </p:cNvPr>
@@ -7612,7 +9475,7 @@
           <p:cNvPr id="41" name="">
             <a:extLst xmlns:a="http://schemas.openxmlformats.org/drawingml/2006/main">
               <a:ext uri="{FF2B5EF4-FFF2-40B4-BE49-F238E27FC236}">
-                <a16:creationId xmlns:a16="http://schemas.microsoft.com/office/drawing/2014/main" id="{D0DA7FAB-9A43-46A3-9839-6FF95CB029F2}"/>
+                <a16:creationId xmlns:a16="http://schemas.microsoft.com/office/drawing/2014/main" id="{2A879C0F-E071-47EF-96F8-3C111BFE54CB}"/>
               </a:ext>
             </a:extLst>
           </p:cNvPr>
@@ -7669,7 +9532,7 @@
           <p:cNvPr id="42" name="">
             <a:extLst xmlns:a="http://schemas.openxmlformats.org/drawingml/2006/main">
               <a:ext uri="{FF2B5EF4-FFF2-40B4-BE49-F238E27FC236}">
-                <a16:creationId xmlns:a16="http://schemas.microsoft.com/office/drawing/2014/main" id="{D7826C3E-0890-4CD4-9128-CB43A681A7B4}"/>
+                <a16:creationId xmlns:a16="http://schemas.microsoft.com/office/drawing/2014/main" id="{D031A442-CB90-46A3-89D8-265BA3AF8403}"/>
               </a:ext>
             </a:extLst>
           </p:cNvPr>
@@ -7699,7 +9562,7 @@
           <p:cNvPr id="43" name="">
             <a:extLst xmlns:a="http://schemas.openxmlformats.org/drawingml/2006/main">
               <a:ext uri="{FF2B5EF4-FFF2-40B4-BE49-F238E27FC236}">
-                <a16:creationId xmlns:a16="http://schemas.microsoft.com/office/drawing/2014/main" id="{EAE6C639-A796-4D23-A3ED-FB4A3E61436F}"/>
+                <a16:creationId xmlns:a16="http://schemas.microsoft.com/office/drawing/2014/main" id="{B9676435-6B17-45C8-AD22-CAC78FEAF51F}"/>
               </a:ext>
             </a:extLst>
           </p:cNvPr>
@@ -7756,7 +9619,7 @@
           <p:cNvPr id="44" name="">
             <a:extLst xmlns:a="http://schemas.openxmlformats.org/drawingml/2006/main">
               <a:ext uri="{FF2B5EF4-FFF2-40B4-BE49-F238E27FC236}">
-                <a16:creationId xmlns:a16="http://schemas.microsoft.com/office/drawing/2014/main" id="{DEAE9BA6-1C35-437B-BF38-4ACAAD530FFA}"/>
+                <a16:creationId xmlns:a16="http://schemas.microsoft.com/office/drawing/2014/main" id="{2AAB7ECB-F1A9-4D01-A297-D6F13A8C0BF9}"/>
               </a:ext>
             </a:extLst>
           </p:cNvPr>
@@ -7813,7 +9676,7 @@
           <p:cNvPr id="45" name="">
             <a:extLst xmlns:a="http://schemas.openxmlformats.org/drawingml/2006/main">
               <a:ext uri="{FF2B5EF4-FFF2-40B4-BE49-F238E27FC236}">
-                <a16:creationId xmlns:a16="http://schemas.microsoft.com/office/drawing/2014/main" id="{62E4B28D-9BB6-4770-94BB-4DD226C2BE5A}"/>
+                <a16:creationId xmlns:a16="http://schemas.microsoft.com/office/drawing/2014/main" id="{3CBA472B-8D97-4A15-978E-113BBC27B06B}"/>
               </a:ext>
             </a:extLst>
           </p:cNvPr>
@@ -7870,7 +9733,7 @@
           <p:cNvPr id="46" name="">
             <a:extLst xmlns:a="http://schemas.openxmlformats.org/drawingml/2006/main">
               <a:ext uri="{FF2B5EF4-FFF2-40B4-BE49-F238E27FC236}">
-                <a16:creationId xmlns:a16="http://schemas.microsoft.com/office/drawing/2014/main" id="{C6DE9EC6-2997-4133-8B6F-21A61D43ECD8}"/>
+                <a16:creationId xmlns:a16="http://schemas.microsoft.com/office/drawing/2014/main" id="{53320DA8-1EFC-406B-B6C1-F88F77F20039}"/>
               </a:ext>
             </a:extLst>
           </p:cNvPr>
@@ -7902,7 +9765,7 @@
           <p:cNvPr id="47" name="">
             <a:extLst xmlns:a="http://schemas.openxmlformats.org/drawingml/2006/main">
               <a:ext uri="{FF2B5EF4-FFF2-40B4-BE49-F238E27FC236}">
-                <a16:creationId xmlns:a16="http://schemas.microsoft.com/office/drawing/2014/main" id="{D11B9C62-1CCA-4335-B3A5-BEEC81BDBE14}"/>
+                <a16:creationId xmlns:a16="http://schemas.microsoft.com/office/drawing/2014/main" id="{092A23C4-D89C-48EB-93FE-4B395618E26C}"/>
               </a:ext>
             </a:extLst>
           </p:cNvPr>
@@ -7959,7 +9822,7 @@
           <p:cNvPr id="48" name="">
             <a:extLst xmlns:a="http://schemas.openxmlformats.org/drawingml/2006/main">
               <a:ext uri="{FF2B5EF4-FFF2-40B4-BE49-F238E27FC236}">
-                <a16:creationId xmlns:a16="http://schemas.microsoft.com/office/drawing/2014/main" id="{D4C806E4-D1AC-4D9A-AE3D-D203BF41778C}"/>
+                <a16:creationId xmlns:a16="http://schemas.microsoft.com/office/drawing/2014/main" id="{CCB46666-E96A-4D44-98DB-9E4448AC60C9}"/>
               </a:ext>
             </a:extLst>
           </p:cNvPr>
@@ -9557,7 +11420,7 @@
           <p:cNvPr id="29" name="">
             <a:extLst xmlns:a="http://schemas.openxmlformats.org/drawingml/2006/main">
               <a:ext uri="{FF2B5EF4-FFF2-40B4-BE49-F238E27FC236}">
-                <a16:creationId xmlns:a16="http://schemas.microsoft.com/office/drawing/2014/main" id="{5B3C2782-EEF9-4C67-854A-A1EFD800E426}"/>
+                <a16:creationId xmlns:a16="http://schemas.microsoft.com/office/drawing/2014/main" id="{83B1E89E-CD29-41A0-91B0-2DBE02268B6F}"/>
               </a:ext>
             </a:extLst>
           </p:cNvPr>
@@ -9587,7 +11450,7 @@
           <p:cNvPr id="30" name="">
             <a:extLst xmlns:a="http://schemas.openxmlformats.org/drawingml/2006/main">
               <a:ext uri="{FF2B5EF4-FFF2-40B4-BE49-F238E27FC236}">
-                <a16:creationId xmlns:a16="http://schemas.microsoft.com/office/drawing/2014/main" id="{CDE94F49-07E9-42DD-BEC6-FA937031D169}"/>
+                <a16:creationId xmlns:a16="http://schemas.microsoft.com/office/drawing/2014/main" id="{D7F704E7-CEFB-4D75-AC2E-04E67637378D}"/>
               </a:ext>
             </a:extLst>
           </p:cNvPr>
@@ -9644,7 +11507,7 @@
           <p:cNvPr id="31" name="">
             <a:extLst xmlns:a="http://schemas.openxmlformats.org/drawingml/2006/main">
               <a:ext uri="{FF2B5EF4-FFF2-40B4-BE49-F238E27FC236}">
-                <a16:creationId xmlns:a16="http://schemas.microsoft.com/office/drawing/2014/main" id="{1ECB6EF7-C338-486F-8127-E4160CD6058F}"/>
+                <a16:creationId xmlns:a16="http://schemas.microsoft.com/office/drawing/2014/main" id="{6D3CEF02-D8BA-4B25-99AE-07167BC4FEAE}"/>
               </a:ext>
             </a:extLst>
           </p:cNvPr>
@@ -9701,7 +11564,7 @@
           <p:cNvPr id="32" name="">
             <a:extLst xmlns:a="http://schemas.openxmlformats.org/drawingml/2006/main">
               <a:ext uri="{FF2B5EF4-FFF2-40B4-BE49-F238E27FC236}">
-                <a16:creationId xmlns:a16="http://schemas.microsoft.com/office/drawing/2014/main" id="{30C286AA-2BF2-41FC-9CB1-FEAF3CA4E691}"/>
+                <a16:creationId xmlns:a16="http://schemas.microsoft.com/office/drawing/2014/main" id="{DED72694-6430-4840-B2B9-B262090846E1}"/>
               </a:ext>
             </a:extLst>
           </p:cNvPr>
@@ -9758,7 +11621,7 @@
           <p:cNvPr id="33" name="">
             <a:extLst xmlns:a="http://schemas.openxmlformats.org/drawingml/2006/main">
               <a:ext uri="{FF2B5EF4-FFF2-40B4-BE49-F238E27FC236}">
-                <a16:creationId xmlns:a16="http://schemas.microsoft.com/office/drawing/2014/main" id="{D942D98A-0560-49AE-A76D-F8BAE40801CA}"/>
+                <a16:creationId xmlns:a16="http://schemas.microsoft.com/office/drawing/2014/main" id="{00929C0A-836A-4730-A0EE-A3435A5CB8E5}"/>
               </a:ext>
             </a:extLst>
           </p:cNvPr>
@@ -9815,7 +11678,7 @@
           <p:cNvPr id="34" name="">
             <a:extLst xmlns:a="http://schemas.openxmlformats.org/drawingml/2006/main">
               <a:ext uri="{FF2B5EF4-FFF2-40B4-BE49-F238E27FC236}">
-                <a16:creationId xmlns:a16="http://schemas.microsoft.com/office/drawing/2014/main" id="{9C675826-B9F1-4FC7-8DB2-53E73215C4F3}"/>
+                <a16:creationId xmlns:a16="http://schemas.microsoft.com/office/drawing/2014/main" id="{EF0210E1-0951-4854-B7D8-06A3578840D7}"/>
               </a:ext>
             </a:extLst>
           </p:cNvPr>
@@ -9845,7 +11708,7 @@
           <p:cNvPr id="35" name="">
             <a:extLst xmlns:a="http://schemas.openxmlformats.org/drawingml/2006/main">
               <a:ext uri="{FF2B5EF4-FFF2-40B4-BE49-F238E27FC236}">
-                <a16:creationId xmlns:a16="http://schemas.microsoft.com/office/drawing/2014/main" id="{ED22C848-265C-425C-98E4-A50FA8F53EEA}"/>
+                <a16:creationId xmlns:a16="http://schemas.microsoft.com/office/drawing/2014/main" id="{4092867C-328C-4B59-A9D8-CABABD4B622E}"/>
               </a:ext>
             </a:extLst>
           </p:cNvPr>
@@ -9902,7 +11765,7 @@
           <p:cNvPr id="36" name="">
             <a:extLst xmlns:a="http://schemas.openxmlformats.org/drawingml/2006/main">
               <a:ext uri="{FF2B5EF4-FFF2-40B4-BE49-F238E27FC236}">
-                <a16:creationId xmlns:a16="http://schemas.microsoft.com/office/drawing/2014/main" id="{DD807B1E-6B3B-4ED4-A811-7A22F4E2F355}"/>
+                <a16:creationId xmlns:a16="http://schemas.microsoft.com/office/drawing/2014/main" id="{1F91E083-3B1A-415B-9665-881AA30ACFEA}"/>
               </a:ext>
             </a:extLst>
           </p:cNvPr>
@@ -9934,7 +11797,7 @@
           <p:cNvPr id="37" name="">
             <a:extLst xmlns:a="http://schemas.openxmlformats.org/drawingml/2006/main">
               <a:ext uri="{FF2B5EF4-FFF2-40B4-BE49-F238E27FC236}">
-                <a16:creationId xmlns:a16="http://schemas.microsoft.com/office/drawing/2014/main" id="{982ACF58-D4B4-43DC-ACBE-C1CE4C7A0820}"/>
+                <a16:creationId xmlns:a16="http://schemas.microsoft.com/office/drawing/2014/main" id="{C063A936-5116-434B-AF0E-FCE225CC2E81}"/>
               </a:ext>
             </a:extLst>
           </p:cNvPr>
@@ -9991,7 +11854,7 @@
           <p:cNvPr id="38" name="">
             <a:extLst xmlns:a="http://schemas.openxmlformats.org/drawingml/2006/main">
               <a:ext uri="{FF2B5EF4-FFF2-40B4-BE49-F238E27FC236}">
-                <a16:creationId xmlns:a16="http://schemas.microsoft.com/office/drawing/2014/main" id="{F9DFD865-E48B-44F1-94E2-A629BD6E96AE}"/>
+                <a16:creationId xmlns:a16="http://schemas.microsoft.com/office/drawing/2014/main" id="{CA5EAC38-B612-405C-990C-D0C3EFFF881D}"/>
               </a:ext>
             </a:extLst>
           </p:cNvPr>
@@ -10048,7 +11911,7 @@
           <p:cNvPr id="39" name="">
             <a:extLst xmlns:a="http://schemas.openxmlformats.org/drawingml/2006/main">
               <a:ext uri="{FF2B5EF4-FFF2-40B4-BE49-F238E27FC236}">
-                <a16:creationId xmlns:a16="http://schemas.microsoft.com/office/drawing/2014/main" id="{9DCADFAF-8725-476D-8329-CEA8AEA74877}"/>
+                <a16:creationId xmlns:a16="http://schemas.microsoft.com/office/drawing/2014/main" id="{5019003D-58BD-420D-8251-B12BBA6249A5}"/>
               </a:ext>
             </a:extLst>
           </p:cNvPr>
@@ -10078,7 +11941,7 @@
           <p:cNvPr id="40" name="">
             <a:extLst xmlns:a="http://schemas.openxmlformats.org/drawingml/2006/main">
               <a:ext uri="{FF2B5EF4-FFF2-40B4-BE49-F238E27FC236}">
-                <a16:creationId xmlns:a16="http://schemas.microsoft.com/office/drawing/2014/main" id="{66781CCB-D0E3-40A5-BC1B-C68F5FFFF170}"/>
+                <a16:creationId xmlns:a16="http://schemas.microsoft.com/office/drawing/2014/main" id="{C652051E-9238-47FD-8FAE-05E71D5D81CD}"/>
               </a:ext>
             </a:extLst>
           </p:cNvPr>
@@ -10110,7 +11973,7 @@
           <p:cNvPr id="41" name="">
             <a:extLst xmlns:a="http://schemas.openxmlformats.org/drawingml/2006/main">
               <a:ext uri="{FF2B5EF4-FFF2-40B4-BE49-F238E27FC236}">
-                <a16:creationId xmlns:a16="http://schemas.microsoft.com/office/drawing/2014/main" id="{DBA1098F-7AF7-46EF-8192-D6A5B616240C}"/>
+                <a16:creationId xmlns:a16="http://schemas.microsoft.com/office/drawing/2014/main" id="{B34E1AFA-6FD2-4B88-BF18-E9EDEF5FBE34}"/>
               </a:ext>
             </a:extLst>
           </p:cNvPr>
@@ -10190,7 +12053,7 @@
           <p:cNvPr id="42" name="">
             <a:extLst xmlns:a="http://schemas.openxmlformats.org/drawingml/2006/main">
               <a:ext uri="{FF2B5EF4-FFF2-40B4-BE49-F238E27FC236}">
-                <a16:creationId xmlns:a16="http://schemas.microsoft.com/office/drawing/2014/main" id="{FBF9233C-E6CD-4452-A6BF-B2D6BB29C7FF}"/>
+                <a16:creationId xmlns:a16="http://schemas.microsoft.com/office/drawing/2014/main" id="{3CFFDAF4-6250-4012-9219-0651A90A0308}"/>
               </a:ext>
             </a:extLst>
           </p:cNvPr>
@@ -10247,7 +12110,7 @@
           <p:cNvPr id="43" name="">
             <a:extLst xmlns:a="http://schemas.openxmlformats.org/drawingml/2006/main">
               <a:ext uri="{FF2B5EF4-FFF2-40B4-BE49-F238E27FC236}">
-                <a16:creationId xmlns:a16="http://schemas.microsoft.com/office/drawing/2014/main" id="{99C7B795-560E-4331-BE87-22ECF6E5E75C}"/>
+                <a16:creationId xmlns:a16="http://schemas.microsoft.com/office/drawing/2014/main" id="{A7483D9A-F24A-4F0A-A130-7144D3F3F365}"/>
               </a:ext>
             </a:extLst>
           </p:cNvPr>
@@ -10277,7 +12140,7 @@
           <p:cNvPr id="44" name="">
             <a:extLst xmlns:a="http://schemas.openxmlformats.org/drawingml/2006/main">
               <a:ext uri="{FF2B5EF4-FFF2-40B4-BE49-F238E27FC236}">
-                <a16:creationId xmlns:a16="http://schemas.microsoft.com/office/drawing/2014/main" id="{4DD76D53-2DFC-4106-A37F-B9C7BF6CA4EA}"/>
+                <a16:creationId xmlns:a16="http://schemas.microsoft.com/office/drawing/2014/main" id="{25574400-EB29-490A-8DF9-A2C7A41B216B}"/>
               </a:ext>
             </a:extLst>
           </p:cNvPr>
@@ -10309,7 +12172,7 @@
           <p:cNvPr id="45" name="">
             <a:extLst xmlns:a="http://schemas.openxmlformats.org/drawingml/2006/main">
               <a:ext uri="{FF2B5EF4-FFF2-40B4-BE49-F238E27FC236}">
-                <a16:creationId xmlns:a16="http://schemas.microsoft.com/office/drawing/2014/main" id="{BA82D76E-500F-466B-946E-AA7BDADF11E3}"/>
+                <a16:creationId xmlns:a16="http://schemas.microsoft.com/office/drawing/2014/main" id="{1EEFD2D4-27D2-46BE-98E7-7A87FDE68246}"/>
               </a:ext>
             </a:extLst>
           </p:cNvPr>
@@ -10366,7 +12229,7 @@
           <p:cNvPr id="46" name="">
             <a:extLst xmlns:a="http://schemas.openxmlformats.org/drawingml/2006/main">
               <a:ext uri="{FF2B5EF4-FFF2-40B4-BE49-F238E27FC236}">
-                <a16:creationId xmlns:a16="http://schemas.microsoft.com/office/drawing/2014/main" id="{02328BD6-397E-427D-B954-4D691DBE52C8}"/>
+                <a16:creationId xmlns:a16="http://schemas.microsoft.com/office/drawing/2014/main" id="{8428BCC8-85FA-4337-AFE8-F78C8C51B979}"/>
               </a:ext>
             </a:extLst>
           </p:cNvPr>
@@ -10423,7 +12286,7 @@
           <p:cNvPr id="47" name="">
             <a:extLst xmlns:a="http://schemas.openxmlformats.org/drawingml/2006/main">
               <a:ext uri="{FF2B5EF4-FFF2-40B4-BE49-F238E27FC236}">
-                <a16:creationId xmlns:a16="http://schemas.microsoft.com/office/drawing/2014/main" id="{F477EB51-71B6-4988-ABB0-3BC381660A0E}"/>
+                <a16:creationId xmlns:a16="http://schemas.microsoft.com/office/drawing/2014/main" id="{BA670724-3D79-42AB-8620-E197B34E98DD}"/>
               </a:ext>
             </a:extLst>
           </p:cNvPr>
@@ -10453,7 +12316,7 @@
           <p:cNvPr id="48" name="">
             <a:extLst xmlns:a="http://schemas.openxmlformats.org/drawingml/2006/main">
               <a:ext uri="{FF2B5EF4-FFF2-40B4-BE49-F238E27FC236}">
-                <a16:creationId xmlns:a16="http://schemas.microsoft.com/office/drawing/2014/main" id="{059034EA-560A-43CF-8FC4-BF05B30A479C}"/>
+                <a16:creationId xmlns:a16="http://schemas.microsoft.com/office/drawing/2014/main" id="{158A0721-8F7F-483B-BA4C-078FD9489AEA}"/>
               </a:ext>
             </a:extLst>
           </p:cNvPr>
@@ -10485,7 +12348,7 @@
           <p:cNvPr id="49" name="">
             <a:extLst xmlns:a="http://schemas.openxmlformats.org/drawingml/2006/main">
               <a:ext uri="{FF2B5EF4-FFF2-40B4-BE49-F238E27FC236}">
-                <a16:creationId xmlns:a16="http://schemas.microsoft.com/office/drawing/2014/main" id="{7A637BE3-ACDC-4C37-822E-90F3E7491AAA}"/>
+                <a16:creationId xmlns:a16="http://schemas.microsoft.com/office/drawing/2014/main" id="{61CF34A7-8AA0-4770-9401-0615D075D50C}"/>
               </a:ext>
             </a:extLst>
           </p:cNvPr>
@@ -10542,7 +12405,7 @@
           <p:cNvPr id="50" name="">
             <a:extLst xmlns:a="http://schemas.openxmlformats.org/drawingml/2006/main">
               <a:ext uri="{FF2B5EF4-FFF2-40B4-BE49-F238E27FC236}">
-                <a16:creationId xmlns:a16="http://schemas.microsoft.com/office/drawing/2014/main" id="{1E17B823-E519-4F5E-8425-110E1421105D}"/>
+                <a16:creationId xmlns:a16="http://schemas.microsoft.com/office/drawing/2014/main" id="{17146716-4BED-47C7-87A3-6CA2F46F558D}"/>
               </a:ext>
             </a:extLst>
           </p:cNvPr>
@@ -10599,7 +12462,7 @@
           <p:cNvPr id="51" name="">
             <a:extLst xmlns:a="http://schemas.openxmlformats.org/drawingml/2006/main">
               <a:ext uri="{FF2B5EF4-FFF2-40B4-BE49-F238E27FC236}">
-                <a16:creationId xmlns:a16="http://schemas.microsoft.com/office/drawing/2014/main" id="{70FD3F5B-9DA0-49AD-B871-D63FA09FDFB2}"/>
+                <a16:creationId xmlns:a16="http://schemas.microsoft.com/office/drawing/2014/main" id="{F843CD03-563D-43C2-8158-18476BA215A3}"/>
               </a:ext>
             </a:extLst>
           </p:cNvPr>
@@ -10631,7 +12494,7 @@
           <p:cNvPr id="52" name="">
             <a:extLst xmlns:a="http://schemas.openxmlformats.org/drawingml/2006/main">
               <a:ext uri="{FF2B5EF4-FFF2-40B4-BE49-F238E27FC236}">
-                <a16:creationId xmlns:a16="http://schemas.microsoft.com/office/drawing/2014/main" id="{4296874D-A4F8-486D-A243-8C493119493B}"/>
+                <a16:creationId xmlns:a16="http://schemas.microsoft.com/office/drawing/2014/main" id="{37F2C559-B056-41EA-B2FD-BEEEFA19F480}"/>
               </a:ext>
             </a:extLst>
           </p:cNvPr>
@@ -10688,7 +12551,7 @@
           <p:cNvPr id="53" name="">
             <a:extLst xmlns:a="http://schemas.openxmlformats.org/drawingml/2006/main">
               <a:ext uri="{FF2B5EF4-FFF2-40B4-BE49-F238E27FC236}">
-                <a16:creationId xmlns:a16="http://schemas.microsoft.com/office/drawing/2014/main" id="{07E877E3-3AD4-43D3-ADD7-4F90BFDF8BC3}"/>
+                <a16:creationId xmlns:a16="http://schemas.microsoft.com/office/drawing/2014/main" id="{34EE8E1E-F950-4B0B-8121-69A60195F911}"/>
               </a:ext>
             </a:extLst>
           </p:cNvPr>
@@ -10745,7 +12608,7 @@
           <p:cNvPr id="54" name="">
             <a:extLst xmlns:a="http://schemas.openxmlformats.org/drawingml/2006/main">
               <a:ext uri="{FF2B5EF4-FFF2-40B4-BE49-F238E27FC236}">
-                <a16:creationId xmlns:a16="http://schemas.microsoft.com/office/drawing/2014/main" id="{5B453E28-6DF9-4D62-9766-135F3631917E}"/>
+                <a16:creationId xmlns:a16="http://schemas.microsoft.com/office/drawing/2014/main" id="{A8B3EC93-6066-4382-9A44-32DE56F0B011}"/>
               </a:ext>
             </a:extLst>
           </p:cNvPr>
@@ -10777,7 +12640,7 @@
           <p:cNvPr id="55" name="">
             <a:extLst xmlns:a="http://schemas.openxmlformats.org/drawingml/2006/main">
               <a:ext uri="{FF2B5EF4-FFF2-40B4-BE49-F238E27FC236}">
-                <a16:creationId xmlns:a16="http://schemas.microsoft.com/office/drawing/2014/main" id="{B7A67172-6B72-4394-8D43-C3C98BB2E4E6}"/>
+                <a16:creationId xmlns:a16="http://schemas.microsoft.com/office/drawing/2014/main" id="{25F76C5A-ABF3-4F2F-85FE-A677DBCF125D}"/>
               </a:ext>
             </a:extLst>
           </p:cNvPr>
@@ -10834,7 +12697,7 @@
           <p:cNvPr id="56" name="">
             <a:extLst xmlns:a="http://schemas.openxmlformats.org/drawingml/2006/main">
               <a:ext uri="{FF2B5EF4-FFF2-40B4-BE49-F238E27FC236}">
-                <a16:creationId xmlns:a16="http://schemas.microsoft.com/office/drawing/2014/main" id="{BD4E2DBC-39AC-46A5-ACD5-73C45E76EBD6}"/>
+                <a16:creationId xmlns:a16="http://schemas.microsoft.com/office/drawing/2014/main" id="{AA75B2B0-F0B1-4EDB-8CEE-77C5D200536A}"/>
               </a:ext>
             </a:extLst>
           </p:cNvPr>
@@ -10914,7 +12777,7 @@
           <p:cNvPr id="57" name="">
             <a:extLst xmlns:a="http://schemas.openxmlformats.org/drawingml/2006/main">
               <a:ext uri="{FF2B5EF4-FFF2-40B4-BE49-F238E27FC236}">
-                <a16:creationId xmlns:a16="http://schemas.microsoft.com/office/drawing/2014/main" id="{FF173A80-DC28-4E8D-BE7A-0948C59F62A1}"/>
+                <a16:creationId xmlns:a16="http://schemas.microsoft.com/office/drawing/2014/main" id="{3E33E262-109D-4097-AA24-4DC77A69299A}"/>
               </a:ext>
             </a:extLst>
           </p:cNvPr>
@@ -10944,7 +12807,7 @@
           <p:cNvPr id="58" name="">
             <a:extLst xmlns:a="http://schemas.openxmlformats.org/drawingml/2006/main">
               <a:ext uri="{FF2B5EF4-FFF2-40B4-BE49-F238E27FC236}">
-                <a16:creationId xmlns:a16="http://schemas.microsoft.com/office/drawing/2014/main" id="{561940C7-D975-4AA9-8803-DE69A3BE1D1D}"/>
+                <a16:creationId xmlns:a16="http://schemas.microsoft.com/office/drawing/2014/main" id="{1455884A-04E3-48A1-83F9-9A8B74D79B92}"/>
               </a:ext>
             </a:extLst>
           </p:cNvPr>
@@ -10976,7 +12839,7 @@
           <p:cNvPr id="59" name="">
             <a:extLst xmlns:a="http://schemas.openxmlformats.org/drawingml/2006/main">
               <a:ext uri="{FF2B5EF4-FFF2-40B4-BE49-F238E27FC236}">
-                <a16:creationId xmlns:a16="http://schemas.microsoft.com/office/drawing/2014/main" id="{F5B3A212-FA3D-4D40-A9B4-C569EDA22E4C}"/>
+                <a16:creationId xmlns:a16="http://schemas.microsoft.com/office/drawing/2014/main" id="{D049A514-4036-4171-B7EE-E5C26C4697D3}"/>
               </a:ext>
             </a:extLst>
           </p:cNvPr>
@@ -11033,7 +12896,7 @@
           <p:cNvPr id="60" name="">
             <a:extLst xmlns:a="http://schemas.openxmlformats.org/drawingml/2006/main">
               <a:ext uri="{FF2B5EF4-FFF2-40B4-BE49-F238E27FC236}">
-                <a16:creationId xmlns:a16="http://schemas.microsoft.com/office/drawing/2014/main" id="{12670197-4C95-409D-A55E-75E70BAE1CFF}"/>
+                <a16:creationId xmlns:a16="http://schemas.microsoft.com/office/drawing/2014/main" id="{47C19ACC-A01F-4895-9E9A-89DF6B7455A5}"/>
               </a:ext>
             </a:extLst>
           </p:cNvPr>
@@ -11113,7 +12976,7 @@
           <p:cNvPr id="61" name="">
             <a:extLst xmlns:a="http://schemas.openxmlformats.org/drawingml/2006/main">
               <a:ext uri="{FF2B5EF4-FFF2-40B4-BE49-F238E27FC236}">
-                <a16:creationId xmlns:a16="http://schemas.microsoft.com/office/drawing/2014/main" id="{97DCE435-89F8-4D7A-8953-15F7D8F6FB39}"/>
+                <a16:creationId xmlns:a16="http://schemas.microsoft.com/office/drawing/2014/main" id="{2EA59DF8-75DB-43E8-92AF-5BEBB42DB3EF}"/>
               </a:ext>
             </a:extLst>
           </p:cNvPr>
@@ -11143,7 +13006,7 @@
           <p:cNvPr id="62" name="">
             <a:extLst xmlns:a="http://schemas.openxmlformats.org/drawingml/2006/main">
               <a:ext uri="{FF2B5EF4-FFF2-40B4-BE49-F238E27FC236}">
-                <a16:creationId xmlns:a16="http://schemas.microsoft.com/office/drawing/2014/main" id="{6C334097-32D0-4F4B-ABBA-F5414E106827}"/>
+                <a16:creationId xmlns:a16="http://schemas.microsoft.com/office/drawing/2014/main" id="{95B9EA50-3F69-4847-ADD8-0ABFE322A0F6}"/>
               </a:ext>
             </a:extLst>
           </p:cNvPr>
@@ -11175,7 +13038,7 @@
           <p:cNvPr id="63" name="">
             <a:extLst xmlns:a="http://schemas.openxmlformats.org/drawingml/2006/main">
               <a:ext uri="{FF2B5EF4-FFF2-40B4-BE49-F238E27FC236}">
-                <a16:creationId xmlns:a16="http://schemas.microsoft.com/office/drawing/2014/main" id="{67DC1503-73E8-4542-8E15-9390FA80B4D9}"/>
+                <a16:creationId xmlns:a16="http://schemas.microsoft.com/office/drawing/2014/main" id="{017E0BAB-DE79-4282-A007-C0F2C41E07BB}"/>
               </a:ext>
             </a:extLst>
           </p:cNvPr>
@@ -11232,7 +13095,7 @@
           <p:cNvPr id="64" name="">
             <a:extLst xmlns:a="http://schemas.openxmlformats.org/drawingml/2006/main">
               <a:ext uri="{FF2B5EF4-FFF2-40B4-BE49-F238E27FC236}">
-                <a16:creationId xmlns:a16="http://schemas.microsoft.com/office/drawing/2014/main" id="{1552BE53-3216-4B84-895E-EA11A6760F15}"/>
+                <a16:creationId xmlns:a16="http://schemas.microsoft.com/office/drawing/2014/main" id="{88C24DE4-7E7F-4625-A8A4-13A3A58507F5}"/>
               </a:ext>
             </a:extLst>
           </p:cNvPr>
@@ -11289,7 +13152,7 @@
           <p:cNvPr id="65" name="">
             <a:extLst xmlns:a="http://schemas.openxmlformats.org/drawingml/2006/main">
               <a:ext uri="{FF2B5EF4-FFF2-40B4-BE49-F238E27FC236}">
-                <a16:creationId xmlns:a16="http://schemas.microsoft.com/office/drawing/2014/main" id="{E8FEC74E-2139-4936-B118-880560403872}"/>
+                <a16:creationId xmlns:a16="http://schemas.microsoft.com/office/drawing/2014/main" id="{1B8DDF0D-9929-43AE-A44D-8596A867638F}"/>
               </a:ext>
             </a:extLst>
           </p:cNvPr>
@@ -11346,7 +13209,7 @@
           <p:cNvPr id="66" name="">
             <a:extLst xmlns:a="http://schemas.openxmlformats.org/drawingml/2006/main">
               <a:ext uri="{FF2B5EF4-FFF2-40B4-BE49-F238E27FC236}">
-                <a16:creationId xmlns:a16="http://schemas.microsoft.com/office/drawing/2014/main" id="{FB57C87D-15F4-467D-A46F-B074F965D899}"/>
+                <a16:creationId xmlns:a16="http://schemas.microsoft.com/office/drawing/2014/main" id="{FCA94C60-BEB0-404A-B2A5-71D7244726E4}"/>
               </a:ext>
             </a:extLst>
           </p:cNvPr>
@@ -13492,7 +15355,7 @@
           <p:cNvPr id="41" name="">
             <a:extLst xmlns:a="http://schemas.openxmlformats.org/drawingml/2006/main">
               <a:ext uri="{FF2B5EF4-FFF2-40B4-BE49-F238E27FC236}">
-                <a16:creationId xmlns:a16="http://schemas.microsoft.com/office/drawing/2014/main" id="{2B5039E2-BE97-40C3-86C2-FA3175E9752B}"/>
+                <a16:creationId xmlns:a16="http://schemas.microsoft.com/office/drawing/2014/main" id="{E3A693FD-74AB-4CF9-8EBF-65A0DF3C969F}"/>
               </a:ext>
             </a:extLst>
           </p:cNvPr>
@@ -13522,7 +15385,7 @@
           <p:cNvPr id="42" name="">
             <a:extLst xmlns:a="http://schemas.openxmlformats.org/drawingml/2006/main">
               <a:ext uri="{FF2B5EF4-FFF2-40B4-BE49-F238E27FC236}">
-                <a16:creationId xmlns:a16="http://schemas.microsoft.com/office/drawing/2014/main" id="{F8FCD2AE-2563-4E05-B326-2546EA14C774}"/>
+                <a16:creationId xmlns:a16="http://schemas.microsoft.com/office/drawing/2014/main" id="{9FC56A02-F138-4E31-92E4-D0F5A795F143}"/>
               </a:ext>
             </a:extLst>
           </p:cNvPr>
@@ -13579,7 +15442,7 @@
           <p:cNvPr id="43" name="">
             <a:extLst xmlns:a="http://schemas.openxmlformats.org/drawingml/2006/main">
               <a:ext uri="{FF2B5EF4-FFF2-40B4-BE49-F238E27FC236}">
-                <a16:creationId xmlns:a16="http://schemas.microsoft.com/office/drawing/2014/main" id="{17B27F92-AB42-4550-9CDC-182186A9A86F}"/>
+                <a16:creationId xmlns:a16="http://schemas.microsoft.com/office/drawing/2014/main" id="{EAEF0BF3-988E-416F-B2C9-E317716FC549}"/>
               </a:ext>
             </a:extLst>
           </p:cNvPr>
@@ -13636,7 +15499,7 @@
           <p:cNvPr id="44" name="">
             <a:extLst xmlns:a="http://schemas.openxmlformats.org/drawingml/2006/main">
               <a:ext uri="{FF2B5EF4-FFF2-40B4-BE49-F238E27FC236}">
-                <a16:creationId xmlns:a16="http://schemas.microsoft.com/office/drawing/2014/main" id="{1B405CC6-A184-4BB4-9C0A-645DB2BD1897}"/>
+                <a16:creationId xmlns:a16="http://schemas.microsoft.com/office/drawing/2014/main" id="{B9E5C05B-6BC3-4413-8064-7364BF29C119}"/>
               </a:ext>
             </a:extLst>
           </p:cNvPr>
@@ -13693,7 +15556,7 @@
           <p:cNvPr id="45" name="">
             <a:extLst xmlns:a="http://schemas.openxmlformats.org/drawingml/2006/main">
               <a:ext uri="{FF2B5EF4-FFF2-40B4-BE49-F238E27FC236}">
-                <a16:creationId xmlns:a16="http://schemas.microsoft.com/office/drawing/2014/main" id="{79AB41EB-4084-44B7-AE3B-3352EBB73EB9}"/>
+                <a16:creationId xmlns:a16="http://schemas.microsoft.com/office/drawing/2014/main" id="{E0E72B31-ADCE-4D2C-8FDC-657287049C89}"/>
               </a:ext>
             </a:extLst>
           </p:cNvPr>
@@ -13750,7 +15613,7 @@
           <p:cNvPr id="46" name="">
             <a:extLst xmlns:a="http://schemas.openxmlformats.org/drawingml/2006/main">
               <a:ext uri="{FF2B5EF4-FFF2-40B4-BE49-F238E27FC236}">
-                <a16:creationId xmlns:a16="http://schemas.microsoft.com/office/drawing/2014/main" id="{A58E3F6B-0E57-4D74-8E34-EBB02F790856}"/>
+                <a16:creationId xmlns:a16="http://schemas.microsoft.com/office/drawing/2014/main" id="{CEE03F19-5AE5-43DA-84D3-4FE7F4BA3CE2}"/>
               </a:ext>
             </a:extLst>
           </p:cNvPr>
@@ -13780,7 +15643,7 @@
           <p:cNvPr id="47" name="">
             <a:extLst xmlns:a="http://schemas.openxmlformats.org/drawingml/2006/main">
               <a:ext uri="{FF2B5EF4-FFF2-40B4-BE49-F238E27FC236}">
-                <a16:creationId xmlns:a16="http://schemas.microsoft.com/office/drawing/2014/main" id="{68E206BF-61F8-46FE-9858-2E6B8C2AD917}"/>
+                <a16:creationId xmlns:a16="http://schemas.microsoft.com/office/drawing/2014/main" id="{4E6248F6-B6F0-473B-9C7D-1265BAB2EDF8}"/>
               </a:ext>
             </a:extLst>
           </p:cNvPr>
@@ -13814,7 +15677,7 @@
           <p:cNvPr id="48" name="">
             <a:extLst xmlns:a="http://schemas.openxmlformats.org/drawingml/2006/main">
               <a:ext uri="{FF2B5EF4-FFF2-40B4-BE49-F238E27FC236}">
-                <a16:creationId xmlns:a16="http://schemas.microsoft.com/office/drawing/2014/main" id="{0051D598-A4EE-4936-858E-5B396A46AF9F}"/>
+                <a16:creationId xmlns:a16="http://schemas.microsoft.com/office/drawing/2014/main" id="{6B14125A-6F3A-425F-8EA7-57349C8FFBC3}"/>
               </a:ext>
             </a:extLst>
           </p:cNvPr>
@@ -13846,7 +15709,7 @@
           <p:cNvPr id="49" name="">
             <a:extLst xmlns:a="http://schemas.openxmlformats.org/drawingml/2006/main">
               <a:ext uri="{FF2B5EF4-FFF2-40B4-BE49-F238E27FC236}">
-                <a16:creationId xmlns:a16="http://schemas.microsoft.com/office/drawing/2014/main" id="{444EFF8C-FF98-4C29-88AB-48F76BB1E085}"/>
+                <a16:creationId xmlns:a16="http://schemas.microsoft.com/office/drawing/2014/main" id="{E3BD7B36-BBCC-4A54-9CD8-07C30AF49D55}"/>
               </a:ext>
             </a:extLst>
           </p:cNvPr>
@@ -13903,7 +15766,7 @@
           <p:cNvPr id="50" name="">
             <a:extLst xmlns:a="http://schemas.openxmlformats.org/drawingml/2006/main">
               <a:ext uri="{FF2B5EF4-FFF2-40B4-BE49-F238E27FC236}">
-                <a16:creationId xmlns:a16="http://schemas.microsoft.com/office/drawing/2014/main" id="{D9E76C3A-FA73-4F6E-9499-2BC983AEB496}"/>
+                <a16:creationId xmlns:a16="http://schemas.microsoft.com/office/drawing/2014/main" id="{6F2A9A5A-32BB-4EBD-B698-EF90EA40E1B9}"/>
               </a:ext>
             </a:extLst>
           </p:cNvPr>
@@ -13960,7 +15823,7 @@
           <p:cNvPr id="51" name="">
             <a:extLst xmlns:a="http://schemas.openxmlformats.org/drawingml/2006/main">
               <a:ext uri="{FF2B5EF4-FFF2-40B4-BE49-F238E27FC236}">
-                <a16:creationId xmlns:a16="http://schemas.microsoft.com/office/drawing/2014/main" id="{B73E27BB-E8EE-4726-9C94-9E6F190C64FF}"/>
+                <a16:creationId xmlns:a16="http://schemas.microsoft.com/office/drawing/2014/main" id="{6D8A062A-BC49-4E36-8505-476446988357}"/>
               </a:ext>
             </a:extLst>
           </p:cNvPr>
@@ -14017,7 +15880,7 @@
           <p:cNvPr id="52" name="">
             <a:extLst xmlns:a="http://schemas.openxmlformats.org/drawingml/2006/main">
               <a:ext uri="{FF2B5EF4-FFF2-40B4-BE49-F238E27FC236}">
-                <a16:creationId xmlns:a16="http://schemas.microsoft.com/office/drawing/2014/main" id="{2467BA19-9714-443A-9FC4-6A96C40BA8CA}"/>
+                <a16:creationId xmlns:a16="http://schemas.microsoft.com/office/drawing/2014/main" id="{9CBE23EB-65E8-491F-A65E-A6BBCD3852D2}"/>
               </a:ext>
             </a:extLst>
           </p:cNvPr>
@@ -14051,7 +15914,7 @@
           <p:cNvPr id="53" name="">
             <a:extLst xmlns:a="http://schemas.openxmlformats.org/drawingml/2006/main">
               <a:ext uri="{FF2B5EF4-FFF2-40B4-BE49-F238E27FC236}">
-                <a16:creationId xmlns:a16="http://schemas.microsoft.com/office/drawing/2014/main" id="{42845D91-1603-407F-BBAB-D2B5D0B6C8FE}"/>
+                <a16:creationId xmlns:a16="http://schemas.microsoft.com/office/drawing/2014/main" id="{B0D33192-5F9F-4E85-8522-5E8CC2FCC108}"/>
               </a:ext>
             </a:extLst>
           </p:cNvPr>
@@ -14083,7 +15946,7 @@
           <p:cNvPr id="54" name="">
             <a:extLst xmlns:a="http://schemas.openxmlformats.org/drawingml/2006/main">
               <a:ext uri="{FF2B5EF4-FFF2-40B4-BE49-F238E27FC236}">
-                <a16:creationId xmlns:a16="http://schemas.microsoft.com/office/drawing/2014/main" id="{D2BAAD05-369B-4BD9-9043-AD834F9DAA67}"/>
+                <a16:creationId xmlns:a16="http://schemas.microsoft.com/office/drawing/2014/main" id="{4D6B43F3-9A9B-4802-AADE-A55010C74D1C}"/>
               </a:ext>
             </a:extLst>
           </p:cNvPr>
@@ -14140,7 +16003,7 @@
           <p:cNvPr id="55" name="">
             <a:extLst xmlns:a="http://schemas.openxmlformats.org/drawingml/2006/main">
               <a:ext uri="{FF2B5EF4-FFF2-40B4-BE49-F238E27FC236}">
-                <a16:creationId xmlns:a16="http://schemas.microsoft.com/office/drawing/2014/main" id="{8CBFAB0E-DCAD-491C-B1B5-CBA35123595F}"/>
+                <a16:creationId xmlns:a16="http://schemas.microsoft.com/office/drawing/2014/main" id="{91DCBB4D-7B8A-494A-A725-3825A4502F5A}"/>
               </a:ext>
             </a:extLst>
           </p:cNvPr>
@@ -14197,7 +16060,7 @@
           <p:cNvPr id="56" name="">
             <a:extLst xmlns:a="http://schemas.openxmlformats.org/drawingml/2006/main">
               <a:ext uri="{FF2B5EF4-FFF2-40B4-BE49-F238E27FC236}">
-                <a16:creationId xmlns:a16="http://schemas.microsoft.com/office/drawing/2014/main" id="{94BF993E-B449-4592-8741-9D6141DE244A}"/>
+                <a16:creationId xmlns:a16="http://schemas.microsoft.com/office/drawing/2014/main" id="{76F8FD65-3416-42A2-94A2-02BBE426F25E}"/>
               </a:ext>
             </a:extLst>
           </p:cNvPr>
@@ -14254,7 +16117,7 @@
           <p:cNvPr id="57" name="">
             <a:extLst xmlns:a="http://schemas.openxmlformats.org/drawingml/2006/main">
               <a:ext uri="{FF2B5EF4-FFF2-40B4-BE49-F238E27FC236}">
-                <a16:creationId xmlns:a16="http://schemas.microsoft.com/office/drawing/2014/main" id="{3C9D48D7-2902-4036-B3A7-AFEAC7502A69}"/>
+                <a16:creationId xmlns:a16="http://schemas.microsoft.com/office/drawing/2014/main" id="{67AAF4CB-286B-481E-BE19-910226C1F926}"/>
               </a:ext>
             </a:extLst>
           </p:cNvPr>
@@ -14288,7 +16151,7 @@
           <p:cNvPr id="58" name="">
             <a:extLst xmlns:a="http://schemas.openxmlformats.org/drawingml/2006/main">
               <a:ext uri="{FF2B5EF4-FFF2-40B4-BE49-F238E27FC236}">
-                <a16:creationId xmlns:a16="http://schemas.microsoft.com/office/drawing/2014/main" id="{EB27528C-401B-4B41-AACC-A41B774BCCEC}"/>
+                <a16:creationId xmlns:a16="http://schemas.microsoft.com/office/drawing/2014/main" id="{16E616E1-6960-4107-9762-2A241FE7E226}"/>
               </a:ext>
             </a:extLst>
           </p:cNvPr>
@@ -14320,7 +16183,7 @@
           <p:cNvPr id="59" name="">
             <a:extLst xmlns:a="http://schemas.openxmlformats.org/drawingml/2006/main">
               <a:ext uri="{FF2B5EF4-FFF2-40B4-BE49-F238E27FC236}">
-                <a16:creationId xmlns:a16="http://schemas.microsoft.com/office/drawing/2014/main" id="{ED7F0564-1F9E-4185-AB41-FB51BE345494}"/>
+                <a16:creationId xmlns:a16="http://schemas.microsoft.com/office/drawing/2014/main" id="{47D8A961-A864-46D4-AA80-B5033BB53ED7}"/>
               </a:ext>
             </a:extLst>
           </p:cNvPr>
@@ -14377,7 +16240,7 @@
           <p:cNvPr id="60" name="">
             <a:extLst xmlns:a="http://schemas.openxmlformats.org/drawingml/2006/main">
               <a:ext uri="{FF2B5EF4-FFF2-40B4-BE49-F238E27FC236}">
-                <a16:creationId xmlns:a16="http://schemas.microsoft.com/office/drawing/2014/main" id="{652191A0-600B-438B-ABAA-37D58B202E88}"/>
+                <a16:creationId xmlns:a16="http://schemas.microsoft.com/office/drawing/2014/main" id="{BF22A76C-1C10-4BFC-9494-2557B36B859A}"/>
               </a:ext>
             </a:extLst>
           </p:cNvPr>
@@ -14434,7 +16297,7 @@
           <p:cNvPr id="61" name="">
             <a:extLst xmlns:a="http://schemas.openxmlformats.org/drawingml/2006/main">
               <a:ext uri="{FF2B5EF4-FFF2-40B4-BE49-F238E27FC236}">
-                <a16:creationId xmlns:a16="http://schemas.microsoft.com/office/drawing/2014/main" id="{CBAD87C3-F7A2-4CB6-B8DA-81C209538920}"/>
+                <a16:creationId xmlns:a16="http://schemas.microsoft.com/office/drawing/2014/main" id="{4A037959-B642-488F-9250-D3935AE6C135}"/>
               </a:ext>
             </a:extLst>
           </p:cNvPr>
@@ -14491,7 +16354,7 @@
           <p:cNvPr id="62" name="">
             <a:extLst xmlns:a="http://schemas.openxmlformats.org/drawingml/2006/main">
               <a:ext uri="{FF2B5EF4-FFF2-40B4-BE49-F238E27FC236}">
-                <a16:creationId xmlns:a16="http://schemas.microsoft.com/office/drawing/2014/main" id="{A7A762F8-D4E8-48D7-9E6A-D3AF9691F208}"/>
+                <a16:creationId xmlns:a16="http://schemas.microsoft.com/office/drawing/2014/main" id="{1AC2AABA-7767-4101-984A-4F8ED33DE62A}"/>
               </a:ext>
             </a:extLst>
           </p:cNvPr>
@@ -14525,7 +16388,7 @@
           <p:cNvPr id="63" name="">
             <a:extLst xmlns:a="http://schemas.openxmlformats.org/drawingml/2006/main">
               <a:ext uri="{FF2B5EF4-FFF2-40B4-BE49-F238E27FC236}">
-                <a16:creationId xmlns:a16="http://schemas.microsoft.com/office/drawing/2014/main" id="{927F0A87-0E82-4383-9454-FBB57E986766}"/>
+                <a16:creationId xmlns:a16="http://schemas.microsoft.com/office/drawing/2014/main" id="{DC8F574E-729F-4DB2-8D4B-7D99D4BDC031}"/>
               </a:ext>
             </a:extLst>
           </p:cNvPr>
@@ -14557,7 +16420,7 @@
           <p:cNvPr id="64" name="">
             <a:extLst xmlns:a="http://schemas.openxmlformats.org/drawingml/2006/main">
               <a:ext uri="{FF2B5EF4-FFF2-40B4-BE49-F238E27FC236}">
-                <a16:creationId xmlns:a16="http://schemas.microsoft.com/office/drawing/2014/main" id="{502805AA-0E8C-4532-B760-9AE9F85BB953}"/>
+                <a16:creationId xmlns:a16="http://schemas.microsoft.com/office/drawing/2014/main" id="{DFA8C6C5-2DB1-4615-8149-01131A0B15E0}"/>
               </a:ext>
             </a:extLst>
           </p:cNvPr>
@@ -14614,7 +16477,7 @@
           <p:cNvPr id="65" name="">
             <a:extLst xmlns:a="http://schemas.openxmlformats.org/drawingml/2006/main">
               <a:ext uri="{FF2B5EF4-FFF2-40B4-BE49-F238E27FC236}">
-                <a16:creationId xmlns:a16="http://schemas.microsoft.com/office/drawing/2014/main" id="{0ACAF177-CE0B-46ED-8B30-D43E3CC6065F}"/>
+                <a16:creationId xmlns:a16="http://schemas.microsoft.com/office/drawing/2014/main" id="{2E032E2B-4E27-448A-BB3B-93A70B126D61}"/>
               </a:ext>
             </a:extLst>
           </p:cNvPr>
@@ -14671,7 +16534,7 @@
           <p:cNvPr id="66" name="">
             <a:extLst xmlns:a="http://schemas.openxmlformats.org/drawingml/2006/main">
               <a:ext uri="{FF2B5EF4-FFF2-40B4-BE49-F238E27FC236}">
-                <a16:creationId xmlns:a16="http://schemas.microsoft.com/office/drawing/2014/main" id="{9F17BA2F-0E85-43B3-94FA-AC620C667E6A}"/>
+                <a16:creationId xmlns:a16="http://schemas.microsoft.com/office/drawing/2014/main" id="{1E9DC06A-F10B-4E4D-8284-61C75EF38D19}"/>
               </a:ext>
             </a:extLst>
           </p:cNvPr>
@@ -14751,7 +16614,7 @@
           <p:cNvPr id="67" name="">
             <a:extLst xmlns:a="http://schemas.openxmlformats.org/drawingml/2006/main">
               <a:ext uri="{FF2B5EF4-FFF2-40B4-BE49-F238E27FC236}">
-                <a16:creationId xmlns:a16="http://schemas.microsoft.com/office/drawing/2014/main" id="{548959C0-5C65-4DE1-9206-28D640C6EDB9}"/>
+                <a16:creationId xmlns:a16="http://schemas.microsoft.com/office/drawing/2014/main" id="{B6B325B3-7423-4ACC-9A5E-23F1CF86F791}"/>
               </a:ext>
             </a:extLst>
           </p:cNvPr>
@@ -14783,7 +16646,7 @@
           <p:cNvPr id="68" name="">
             <a:extLst xmlns:a="http://schemas.openxmlformats.org/drawingml/2006/main">
               <a:ext uri="{FF2B5EF4-FFF2-40B4-BE49-F238E27FC236}">
-                <a16:creationId xmlns:a16="http://schemas.microsoft.com/office/drawing/2014/main" id="{D81F501C-D700-4252-8537-3D8A898B4957}"/>
+                <a16:creationId xmlns:a16="http://schemas.microsoft.com/office/drawing/2014/main" id="{BFA0A1F2-513E-409C-B6A6-4B655EFC37E1}"/>
               </a:ext>
             </a:extLst>
           </p:cNvPr>
@@ -14840,7 +16703,7 @@
           <p:cNvPr id="69" name="">
             <a:extLst xmlns:a="http://schemas.openxmlformats.org/drawingml/2006/main">
               <a:ext uri="{FF2B5EF4-FFF2-40B4-BE49-F238E27FC236}">
-                <a16:creationId xmlns:a16="http://schemas.microsoft.com/office/drawing/2014/main" id="{56A3FEBC-F45C-4F14-AF0C-95966982BE17}"/>
+                <a16:creationId xmlns:a16="http://schemas.microsoft.com/office/drawing/2014/main" id="{B4E27626-76C9-43B3-A391-358EB756212C}"/>
               </a:ext>
             </a:extLst>
           </p:cNvPr>
@@ -16219,7 +18082,7 @@
           <p:cNvPr id="27" name="">
             <a:extLst xmlns:a="http://schemas.openxmlformats.org/drawingml/2006/main">
               <a:ext uri="{FF2B5EF4-FFF2-40B4-BE49-F238E27FC236}">
-                <a16:creationId xmlns:a16="http://schemas.microsoft.com/office/drawing/2014/main" id="{1C4A4BB8-861B-4409-9CAA-0B9633BEC0F1}"/>
+                <a16:creationId xmlns:a16="http://schemas.microsoft.com/office/drawing/2014/main" id="{D8F80730-6613-48F1-AB3D-C0C9C42BC270}"/>
               </a:ext>
             </a:extLst>
           </p:cNvPr>
@@ -16249,7 +18112,7 @@
           <p:cNvPr id="28" name="">
             <a:extLst xmlns:a="http://schemas.openxmlformats.org/drawingml/2006/main">
               <a:ext uri="{FF2B5EF4-FFF2-40B4-BE49-F238E27FC236}">
-                <a16:creationId xmlns:a16="http://schemas.microsoft.com/office/drawing/2014/main" id="{C5C4A38A-CE7A-4160-8C79-86947E6456F9}"/>
+                <a16:creationId xmlns:a16="http://schemas.microsoft.com/office/drawing/2014/main" id="{AE9587B1-4457-47A2-A02B-8858A03B592B}"/>
               </a:ext>
             </a:extLst>
           </p:cNvPr>
@@ -16306,7 +18169,7 @@
           <p:cNvPr id="29" name="">
             <a:extLst xmlns:a="http://schemas.openxmlformats.org/drawingml/2006/main">
               <a:ext uri="{FF2B5EF4-FFF2-40B4-BE49-F238E27FC236}">
-                <a16:creationId xmlns:a16="http://schemas.microsoft.com/office/drawing/2014/main" id="{F3A0E616-2D8E-4D14-88AD-3635A6196BD4}"/>
+                <a16:creationId xmlns:a16="http://schemas.microsoft.com/office/drawing/2014/main" id="{1C52DDA8-F0DC-4297-B172-CF4779822E15}"/>
               </a:ext>
             </a:extLst>
           </p:cNvPr>
@@ -16363,7 +18226,7 @@
           <p:cNvPr id="30" name="">
             <a:extLst xmlns:a="http://schemas.openxmlformats.org/drawingml/2006/main">
               <a:ext uri="{FF2B5EF4-FFF2-40B4-BE49-F238E27FC236}">
-                <a16:creationId xmlns:a16="http://schemas.microsoft.com/office/drawing/2014/main" id="{A25CF144-636C-4EA1-89F0-E72FAEC82C8E}"/>
+                <a16:creationId xmlns:a16="http://schemas.microsoft.com/office/drawing/2014/main" id="{6E01A67E-9D2C-4DD7-B582-047CC583C45B}"/>
               </a:ext>
             </a:extLst>
           </p:cNvPr>
@@ -16420,7 +18283,7 @@
           <p:cNvPr id="31" name="">
             <a:extLst xmlns:a="http://schemas.openxmlformats.org/drawingml/2006/main">
               <a:ext uri="{FF2B5EF4-FFF2-40B4-BE49-F238E27FC236}">
-                <a16:creationId xmlns:a16="http://schemas.microsoft.com/office/drawing/2014/main" id="{A87D638A-6832-4674-9B52-E85A0BA7C1C8}"/>
+                <a16:creationId xmlns:a16="http://schemas.microsoft.com/office/drawing/2014/main" id="{D38E751B-8A38-4508-9811-A50C89EEFF69}"/>
               </a:ext>
             </a:extLst>
           </p:cNvPr>
@@ -16477,7 +18340,7 @@
           <p:cNvPr id="32" name="">
             <a:extLst xmlns:a="http://schemas.openxmlformats.org/drawingml/2006/main">
               <a:ext uri="{FF2B5EF4-FFF2-40B4-BE49-F238E27FC236}">
-                <a16:creationId xmlns:a16="http://schemas.microsoft.com/office/drawing/2014/main" id="{5CDD88B9-7AFD-4AFD-8F5F-5FE8695DF819}"/>
+                <a16:creationId xmlns:a16="http://schemas.microsoft.com/office/drawing/2014/main" id="{00B196DD-604E-47D2-B2F6-80EE83DA8796}"/>
               </a:ext>
             </a:extLst>
           </p:cNvPr>
@@ -16507,7 +18370,7 @@
           <p:cNvPr id="33" name="">
             <a:extLst xmlns:a="http://schemas.openxmlformats.org/drawingml/2006/main">
               <a:ext uri="{FF2B5EF4-FFF2-40B4-BE49-F238E27FC236}">
-                <a16:creationId xmlns:a16="http://schemas.microsoft.com/office/drawing/2014/main" id="{9FB2D609-A8D6-410B-99E4-C9A9ABF915D4}"/>
+                <a16:creationId xmlns:a16="http://schemas.microsoft.com/office/drawing/2014/main" id="{D5C3472D-B417-4BF7-8D04-235B978D5494}"/>
               </a:ext>
             </a:extLst>
           </p:cNvPr>
@@ -16537,7 +18400,7 @@
           <p:cNvPr id="34" name="">
             <a:extLst xmlns:a="http://schemas.openxmlformats.org/drawingml/2006/main">
               <a:ext uri="{FF2B5EF4-FFF2-40B4-BE49-F238E27FC236}">
-                <a16:creationId xmlns:a16="http://schemas.microsoft.com/office/drawing/2014/main" id="{E378DD27-799C-4708-B4D7-B97B5B6CCDFD}"/>
+                <a16:creationId xmlns:a16="http://schemas.microsoft.com/office/drawing/2014/main" id="{D9645F00-D4D3-4BF5-8980-6508F6D2137F}"/>
               </a:ext>
             </a:extLst>
           </p:cNvPr>
@@ -16567,7 +18430,7 @@
           <p:cNvPr id="35" name="">
             <a:extLst xmlns:a="http://schemas.openxmlformats.org/drawingml/2006/main">
               <a:ext uri="{FF2B5EF4-FFF2-40B4-BE49-F238E27FC236}">
-                <a16:creationId xmlns:a16="http://schemas.microsoft.com/office/drawing/2014/main" id="{C1ECDEFC-77BF-4EC8-A3A8-3FE6862C0023}"/>
+                <a16:creationId xmlns:a16="http://schemas.microsoft.com/office/drawing/2014/main" id="{A8A0BA39-7DFE-4201-B3D8-9D77403DDB01}"/>
               </a:ext>
             </a:extLst>
           </p:cNvPr>
@@ -16624,7 +18487,7 @@
           <p:cNvPr id="36" name="">
             <a:extLst xmlns:a="http://schemas.openxmlformats.org/drawingml/2006/main">
               <a:ext uri="{FF2B5EF4-FFF2-40B4-BE49-F238E27FC236}">
-                <a16:creationId xmlns:a16="http://schemas.microsoft.com/office/drawing/2014/main" id="{8844527F-CEF8-4DEC-A447-EDDE8BDA3248}"/>
+                <a16:creationId xmlns:a16="http://schemas.microsoft.com/office/drawing/2014/main" id="{2667EE31-1F93-4D06-9535-B80FCBE7E8BD}"/>
               </a:ext>
             </a:extLst>
           </p:cNvPr>
@@ -16681,7 +18544,7 @@
           <p:cNvPr id="37" name="">
             <a:extLst xmlns:a="http://schemas.openxmlformats.org/drawingml/2006/main">
               <a:ext uri="{FF2B5EF4-FFF2-40B4-BE49-F238E27FC236}">
-                <a16:creationId xmlns:a16="http://schemas.microsoft.com/office/drawing/2014/main" id="{7CF4B0A7-F18B-457D-9BED-C40DA4345EBB}"/>
+                <a16:creationId xmlns:a16="http://schemas.microsoft.com/office/drawing/2014/main" id="{02512B0E-82AC-4B18-A7FA-E14A1CCE5D45}"/>
               </a:ext>
             </a:extLst>
           </p:cNvPr>
@@ -16761,7 +18624,7 @@
           <p:cNvPr id="38" name="">
             <a:extLst xmlns:a="http://schemas.openxmlformats.org/drawingml/2006/main">
               <a:ext uri="{FF2B5EF4-FFF2-40B4-BE49-F238E27FC236}">
-                <a16:creationId xmlns:a16="http://schemas.microsoft.com/office/drawing/2014/main" id="{2B6CC462-CE8D-4867-AB28-4211484E08E9}"/>
+                <a16:creationId xmlns:a16="http://schemas.microsoft.com/office/drawing/2014/main" id="{9BEC85A1-CE7E-4A79-A082-627995F65474}"/>
               </a:ext>
             </a:extLst>
           </p:cNvPr>
@@ -16791,7 +18654,7 @@
           <p:cNvPr id="39" name="">
             <a:extLst xmlns:a="http://schemas.openxmlformats.org/drawingml/2006/main">
               <a:ext uri="{FF2B5EF4-FFF2-40B4-BE49-F238E27FC236}">
-                <a16:creationId xmlns:a16="http://schemas.microsoft.com/office/drawing/2014/main" id="{7140E700-5E17-4C08-8C3E-791EE55110B5}"/>
+                <a16:creationId xmlns:a16="http://schemas.microsoft.com/office/drawing/2014/main" id="{A4FD3B39-0F3A-4236-9BD2-0801C1B1BB9D}"/>
               </a:ext>
             </a:extLst>
           </p:cNvPr>
@@ -16821,7 +18684,7 @@
           <p:cNvPr id="40" name="">
             <a:extLst xmlns:a="http://schemas.openxmlformats.org/drawingml/2006/main">
               <a:ext uri="{FF2B5EF4-FFF2-40B4-BE49-F238E27FC236}">
-                <a16:creationId xmlns:a16="http://schemas.microsoft.com/office/drawing/2014/main" id="{0064F8CE-BD6A-466A-82A3-9E71C39A1D4F}"/>
+                <a16:creationId xmlns:a16="http://schemas.microsoft.com/office/drawing/2014/main" id="{AC7301E5-46B3-4FC0-BF30-5D427BDA3713}"/>
               </a:ext>
             </a:extLst>
           </p:cNvPr>
@@ -16878,7 +18741,7 @@
           <p:cNvPr id="41" name="">
             <a:extLst xmlns:a="http://schemas.openxmlformats.org/drawingml/2006/main">
               <a:ext uri="{FF2B5EF4-FFF2-40B4-BE49-F238E27FC236}">
-                <a16:creationId xmlns:a16="http://schemas.microsoft.com/office/drawing/2014/main" id="{7ED542A8-3C73-4065-A656-3F66D79E87AB}"/>
+                <a16:creationId xmlns:a16="http://schemas.microsoft.com/office/drawing/2014/main" id="{7F1DCCB5-6F0A-48C6-ABC7-38B0F74D280D}"/>
               </a:ext>
             </a:extLst>
           </p:cNvPr>
@@ -16935,7 +18798,7 @@
           <p:cNvPr id="42" name="">
             <a:extLst xmlns:a="http://schemas.openxmlformats.org/drawingml/2006/main">
               <a:ext uri="{FF2B5EF4-FFF2-40B4-BE49-F238E27FC236}">
-                <a16:creationId xmlns:a16="http://schemas.microsoft.com/office/drawing/2014/main" id="{2CB4B17B-4747-42DE-BC92-0300C7159EB8}"/>
+                <a16:creationId xmlns:a16="http://schemas.microsoft.com/office/drawing/2014/main" id="{8C7ABC10-CDA8-4A39-A75C-6B3C02220208}"/>
               </a:ext>
             </a:extLst>
           </p:cNvPr>
@@ -17015,7 +18878,7 @@
           <p:cNvPr id="43" name="">
             <a:extLst xmlns:a="http://schemas.openxmlformats.org/drawingml/2006/main">
               <a:ext uri="{FF2B5EF4-FFF2-40B4-BE49-F238E27FC236}">
-                <a16:creationId xmlns:a16="http://schemas.microsoft.com/office/drawing/2014/main" id="{651D1B1C-1FF1-48C4-9F98-7DCDADCAAEA4}"/>
+                <a16:creationId xmlns:a16="http://schemas.microsoft.com/office/drawing/2014/main" id="{2D29FF7E-F7D5-41D3-A01C-E609471CD147}"/>
               </a:ext>
             </a:extLst>
           </p:cNvPr>
@@ -17045,7 +18908,7 @@
           <p:cNvPr id="44" name="">
             <a:extLst xmlns:a="http://schemas.openxmlformats.org/drawingml/2006/main">
               <a:ext uri="{FF2B5EF4-FFF2-40B4-BE49-F238E27FC236}">
-                <a16:creationId xmlns:a16="http://schemas.microsoft.com/office/drawing/2014/main" id="{C357297C-BDDF-4A6F-92BE-521F97AC7A2B}"/>
+                <a16:creationId xmlns:a16="http://schemas.microsoft.com/office/drawing/2014/main" id="{44DC7F75-E629-43F3-BAC5-2AB6CEF31D46}"/>
               </a:ext>
             </a:extLst>
           </p:cNvPr>
@@ -17075,7 +18938,7 @@
           <p:cNvPr id="45" name="">
             <a:extLst xmlns:a="http://schemas.openxmlformats.org/drawingml/2006/main">
               <a:ext uri="{FF2B5EF4-FFF2-40B4-BE49-F238E27FC236}">
-                <a16:creationId xmlns:a16="http://schemas.microsoft.com/office/drawing/2014/main" id="{6EA3719B-BF71-4965-8AFC-1B07C31410A8}"/>
+                <a16:creationId xmlns:a16="http://schemas.microsoft.com/office/drawing/2014/main" id="{6DF2338E-4519-4E6D-B404-A54E7046FEBB}"/>
               </a:ext>
             </a:extLst>
           </p:cNvPr>
@@ -17132,7 +18995,7 @@
           <p:cNvPr id="46" name="">
             <a:extLst xmlns:a="http://schemas.openxmlformats.org/drawingml/2006/main">
               <a:ext uri="{FF2B5EF4-FFF2-40B4-BE49-F238E27FC236}">
-                <a16:creationId xmlns:a16="http://schemas.microsoft.com/office/drawing/2014/main" id="{6A74D5A4-B27E-4C50-AE77-CB74196B9C86}"/>
+                <a16:creationId xmlns:a16="http://schemas.microsoft.com/office/drawing/2014/main" id="{9DE12633-4838-49CA-8E54-BC72F4F94F98}"/>
               </a:ext>
             </a:extLst>
           </p:cNvPr>
@@ -17189,7 +19052,7 @@
           <p:cNvPr id="47" name="">
             <a:extLst xmlns:a="http://schemas.openxmlformats.org/drawingml/2006/main">
               <a:ext uri="{FF2B5EF4-FFF2-40B4-BE49-F238E27FC236}">
-                <a16:creationId xmlns:a16="http://schemas.microsoft.com/office/drawing/2014/main" id="{AE0DE79C-0B8A-4C71-912F-F301ED20CDE1}"/>
+                <a16:creationId xmlns:a16="http://schemas.microsoft.com/office/drawing/2014/main" id="{66FAAF04-8A93-429E-B152-8A19DCEED571}"/>
               </a:ext>
             </a:extLst>
           </p:cNvPr>
@@ -17269,7 +19132,7 @@
           <p:cNvPr id="48" name="">
             <a:extLst xmlns:a="http://schemas.openxmlformats.org/drawingml/2006/main">
               <a:ext uri="{FF2B5EF4-FFF2-40B4-BE49-F238E27FC236}">
-                <a16:creationId xmlns:a16="http://schemas.microsoft.com/office/drawing/2014/main" id="{FB5F7E99-A4BD-4D95-9A43-3A35CC0AFD52}"/>
+                <a16:creationId xmlns:a16="http://schemas.microsoft.com/office/drawing/2014/main" id="{860022DF-409A-4789-8EC5-D957A812575C}"/>
               </a:ext>
             </a:extLst>
           </p:cNvPr>
@@ -17299,7 +19162,7 @@
           <p:cNvPr id="49" name="">
             <a:extLst xmlns:a="http://schemas.openxmlformats.org/drawingml/2006/main">
               <a:ext uri="{FF2B5EF4-FFF2-40B4-BE49-F238E27FC236}">
-                <a16:creationId xmlns:a16="http://schemas.microsoft.com/office/drawing/2014/main" id="{862CFBAB-8E4A-4C07-B6C1-3433E307044E}"/>
+                <a16:creationId xmlns:a16="http://schemas.microsoft.com/office/drawing/2014/main" id="{D42CD3CF-A054-445A-B017-0CB43C255295}"/>
               </a:ext>
             </a:extLst>
           </p:cNvPr>
@@ -17329,7 +19192,7 @@
           <p:cNvPr id="50" name="">
             <a:extLst xmlns:a="http://schemas.openxmlformats.org/drawingml/2006/main">
               <a:ext uri="{FF2B5EF4-FFF2-40B4-BE49-F238E27FC236}">
-                <a16:creationId xmlns:a16="http://schemas.microsoft.com/office/drawing/2014/main" id="{D7330507-66F9-43CC-8C65-FB71DE2A1CCC}"/>
+                <a16:creationId xmlns:a16="http://schemas.microsoft.com/office/drawing/2014/main" id="{19F9BD2E-9888-4554-B752-DF6A098D7C46}"/>
               </a:ext>
             </a:extLst>
           </p:cNvPr>
@@ -17386,7 +19249,7 @@
           <p:cNvPr id="51" name="">
             <a:extLst xmlns:a="http://schemas.openxmlformats.org/drawingml/2006/main">
               <a:ext uri="{FF2B5EF4-FFF2-40B4-BE49-F238E27FC236}">
-                <a16:creationId xmlns:a16="http://schemas.microsoft.com/office/drawing/2014/main" id="{37C6955E-2F7A-47FD-8FF7-5D5BA03F00B9}"/>
+                <a16:creationId xmlns:a16="http://schemas.microsoft.com/office/drawing/2014/main" id="{E5FA0676-7079-4B92-85F0-A18A9C1B9814}"/>
               </a:ext>
             </a:extLst>
           </p:cNvPr>
@@ -17443,7 +19306,7 @@
           <p:cNvPr id="52" name="">
             <a:extLst xmlns:a="http://schemas.openxmlformats.org/drawingml/2006/main">
               <a:ext uri="{FF2B5EF4-FFF2-40B4-BE49-F238E27FC236}">
-                <a16:creationId xmlns:a16="http://schemas.microsoft.com/office/drawing/2014/main" id="{6DEFF757-9771-42CA-96AF-CFD03C356DEC}"/>
+                <a16:creationId xmlns:a16="http://schemas.microsoft.com/office/drawing/2014/main" id="{2A3C6A86-26FB-43AC-B8CA-FD0C244EE260}"/>
               </a:ext>
             </a:extLst>
           </p:cNvPr>
@@ -17523,7 +19386,7 @@
           <p:cNvPr id="53" name="">
             <a:extLst xmlns:a="http://schemas.openxmlformats.org/drawingml/2006/main">
               <a:ext uri="{FF2B5EF4-FFF2-40B4-BE49-F238E27FC236}">
-                <a16:creationId xmlns:a16="http://schemas.microsoft.com/office/drawing/2014/main" id="{BC4AB405-9B1B-4D4E-B992-F4B77336123B}"/>
+                <a16:creationId xmlns:a16="http://schemas.microsoft.com/office/drawing/2014/main" id="{432E8093-0C09-4090-8DFA-1AFBE2841B76}"/>
               </a:ext>
             </a:extLst>
           </p:cNvPr>
@@ -17553,7 +19416,7 @@
           <p:cNvPr id="54" name="">
             <a:extLst xmlns:a="http://schemas.openxmlformats.org/drawingml/2006/main">
               <a:ext uri="{FF2B5EF4-FFF2-40B4-BE49-F238E27FC236}">
-                <a16:creationId xmlns:a16="http://schemas.microsoft.com/office/drawing/2014/main" id="{FF6FC6FE-7CBF-43FB-83C8-6C793C197191}"/>
+                <a16:creationId xmlns:a16="http://schemas.microsoft.com/office/drawing/2014/main" id="{9B5DBCB2-5F3E-42E2-8475-A86D9AF25545}"/>
               </a:ext>
             </a:extLst>
           </p:cNvPr>
@@ -17583,7 +19446,7 @@
           <p:cNvPr id="55" name="">
             <a:extLst xmlns:a="http://schemas.openxmlformats.org/drawingml/2006/main">
               <a:ext uri="{FF2B5EF4-FFF2-40B4-BE49-F238E27FC236}">
-                <a16:creationId xmlns:a16="http://schemas.microsoft.com/office/drawing/2014/main" id="{6FAFECF0-3FAC-4E01-9E24-7F5F284FDBD0}"/>
+                <a16:creationId xmlns:a16="http://schemas.microsoft.com/office/drawing/2014/main" id="{1E1C1BF7-D01D-44BD-A72E-5C6073F9DD65}"/>
               </a:ext>
             </a:extLst>
           </p:cNvPr>
@@ -17640,7 +19503,7 @@
           <p:cNvPr id="56" name="">
             <a:extLst xmlns:a="http://schemas.openxmlformats.org/drawingml/2006/main">
               <a:ext uri="{FF2B5EF4-FFF2-40B4-BE49-F238E27FC236}">
-                <a16:creationId xmlns:a16="http://schemas.microsoft.com/office/drawing/2014/main" id="{01D6E164-0A02-42E5-AC7C-8F2BAB849FDE}"/>
+                <a16:creationId xmlns:a16="http://schemas.microsoft.com/office/drawing/2014/main" id="{31AA5408-4085-4BA4-976A-4FE8C44207B5}"/>
               </a:ext>
             </a:extLst>
           </p:cNvPr>
@@ -17697,7 +19560,7 @@
           <p:cNvPr id="57" name="">
             <a:extLst xmlns:a="http://schemas.openxmlformats.org/drawingml/2006/main">
               <a:ext uri="{FF2B5EF4-FFF2-40B4-BE49-F238E27FC236}">
-                <a16:creationId xmlns:a16="http://schemas.microsoft.com/office/drawing/2014/main" id="{6D2D04FE-6F10-4064-AB07-CA152104B09C}"/>
+                <a16:creationId xmlns:a16="http://schemas.microsoft.com/office/drawing/2014/main" id="{BAD7D620-A2BF-495C-9754-05C8C5A4F636}"/>
               </a:ext>
             </a:extLst>
           </p:cNvPr>
@@ -17777,7 +19640,7 @@
           <p:cNvPr id="58" name="">
             <a:extLst xmlns:a="http://schemas.openxmlformats.org/drawingml/2006/main">
               <a:ext uri="{FF2B5EF4-FFF2-40B4-BE49-F238E27FC236}">
-                <a16:creationId xmlns:a16="http://schemas.microsoft.com/office/drawing/2014/main" id="{49AD468B-2431-40C1-9C44-82C8782C4F32}"/>
+                <a16:creationId xmlns:a16="http://schemas.microsoft.com/office/drawing/2014/main" id="{00798421-854C-4AB1-BF76-ACD04EA16D03}"/>
               </a:ext>
             </a:extLst>
           </p:cNvPr>
@@ -17809,7 +19672,7 @@
           <p:cNvPr id="59" name="">
             <a:extLst xmlns:a="http://schemas.openxmlformats.org/drawingml/2006/main">
               <a:ext uri="{FF2B5EF4-FFF2-40B4-BE49-F238E27FC236}">
-                <a16:creationId xmlns:a16="http://schemas.microsoft.com/office/drawing/2014/main" id="{29CB49CD-180E-49A4-854D-502B3751A9A6}"/>
+                <a16:creationId xmlns:a16="http://schemas.microsoft.com/office/drawing/2014/main" id="{59323B60-07AC-44DB-B326-BF0FCF0E86E2}"/>
               </a:ext>
             </a:extLst>
           </p:cNvPr>
@@ -17889,7 +19752,7 @@
           <p:cNvPr id="60" name="">
             <a:extLst xmlns:a="http://schemas.openxmlformats.org/drawingml/2006/main">
               <a:ext uri="{FF2B5EF4-FFF2-40B4-BE49-F238E27FC236}">
-                <a16:creationId xmlns:a16="http://schemas.microsoft.com/office/drawing/2014/main" id="{DE3CF37B-A4E6-4B53-83AA-248A886665AC}"/>
+                <a16:creationId xmlns:a16="http://schemas.microsoft.com/office/drawing/2014/main" id="{4BFCFDF4-9601-4B78-96C9-570094CC87F0}"/>
               </a:ext>
             </a:extLst>
           </p:cNvPr>
@@ -19193,7 +21056,7 @@
           <p:cNvPr id="26" name="">
             <a:extLst xmlns:a="http://schemas.openxmlformats.org/drawingml/2006/main">
               <a:ext uri="{FF2B5EF4-FFF2-40B4-BE49-F238E27FC236}">
-                <a16:creationId xmlns:a16="http://schemas.microsoft.com/office/drawing/2014/main" id="{BA417FA7-A654-44C0-B2AA-35058A139F66}"/>
+                <a16:creationId xmlns:a16="http://schemas.microsoft.com/office/drawing/2014/main" id="{E71DD544-720A-415C-B9D9-F36C76EBB124}"/>
               </a:ext>
             </a:extLst>
           </p:cNvPr>
@@ -19223,7 +21086,7 @@
           <p:cNvPr id="27" name="">
             <a:extLst xmlns:a="http://schemas.openxmlformats.org/drawingml/2006/main">
               <a:ext uri="{FF2B5EF4-FFF2-40B4-BE49-F238E27FC236}">
-                <a16:creationId xmlns:a16="http://schemas.microsoft.com/office/drawing/2014/main" id="{105A41D7-ABE5-4259-BB60-54B5E3B15466}"/>
+                <a16:creationId xmlns:a16="http://schemas.microsoft.com/office/drawing/2014/main" id="{C9358991-9CD5-4B7E-BA2E-3E1AA1C702CE}"/>
               </a:ext>
             </a:extLst>
           </p:cNvPr>
@@ -19280,7 +21143,7 @@
           <p:cNvPr id="28" name="">
             <a:extLst xmlns:a="http://schemas.openxmlformats.org/drawingml/2006/main">
               <a:ext uri="{FF2B5EF4-FFF2-40B4-BE49-F238E27FC236}">
-                <a16:creationId xmlns:a16="http://schemas.microsoft.com/office/drawing/2014/main" id="{8AF6CD62-D77B-4941-9581-A17FDDA6B2B1}"/>
+                <a16:creationId xmlns:a16="http://schemas.microsoft.com/office/drawing/2014/main" id="{FA931439-5EE6-41A7-8863-89597E0C4963}"/>
               </a:ext>
             </a:extLst>
           </p:cNvPr>
@@ -19337,7 +21200,7 @@
           <p:cNvPr id="29" name="">
             <a:extLst xmlns:a="http://schemas.openxmlformats.org/drawingml/2006/main">
               <a:ext uri="{FF2B5EF4-FFF2-40B4-BE49-F238E27FC236}">
-                <a16:creationId xmlns:a16="http://schemas.microsoft.com/office/drawing/2014/main" id="{A2724B94-037F-4174-8DBF-B2F30AB727E6}"/>
+                <a16:creationId xmlns:a16="http://schemas.microsoft.com/office/drawing/2014/main" id="{8C191C58-E31E-4519-8333-75492D57382E}"/>
               </a:ext>
             </a:extLst>
           </p:cNvPr>
@@ -19394,7 +21257,7 @@
           <p:cNvPr id="30" name="">
             <a:extLst xmlns:a="http://schemas.openxmlformats.org/drawingml/2006/main">
               <a:ext uri="{FF2B5EF4-FFF2-40B4-BE49-F238E27FC236}">
-                <a16:creationId xmlns:a16="http://schemas.microsoft.com/office/drawing/2014/main" id="{3119DF8A-0744-4D15-B201-3EF7328C7394}"/>
+                <a16:creationId xmlns:a16="http://schemas.microsoft.com/office/drawing/2014/main" id="{5A1704F8-3075-4B28-9373-7FB9A8F0887D}"/>
               </a:ext>
             </a:extLst>
           </p:cNvPr>
@@ -19451,7 +21314,7 @@
           <p:cNvPr id="31" name="">
             <a:extLst xmlns:a="http://schemas.openxmlformats.org/drawingml/2006/main">
               <a:ext uri="{FF2B5EF4-FFF2-40B4-BE49-F238E27FC236}">
-                <a16:creationId xmlns:a16="http://schemas.microsoft.com/office/drawing/2014/main" id="{1A4CF963-ABB5-48BC-A33E-0C426462DB33}"/>
+                <a16:creationId xmlns:a16="http://schemas.microsoft.com/office/drawing/2014/main" id="{2C959646-6610-4858-87EE-9FEDE02DF322}"/>
               </a:ext>
             </a:extLst>
           </p:cNvPr>
@@ -19481,7 +21344,7 @@
           <p:cNvPr id="32" name="">
             <a:extLst xmlns:a="http://schemas.openxmlformats.org/drawingml/2006/main">
               <a:ext uri="{FF2B5EF4-FFF2-40B4-BE49-F238E27FC236}">
-                <a16:creationId xmlns:a16="http://schemas.microsoft.com/office/drawing/2014/main" id="{871E126A-F0C3-4317-9FF9-0A003857EDEC}"/>
+                <a16:creationId xmlns:a16="http://schemas.microsoft.com/office/drawing/2014/main" id="{84714960-D7AE-4387-A2A4-6166F7DE059C}"/>
               </a:ext>
             </a:extLst>
           </p:cNvPr>
@@ -19515,7 +21378,7 @@
           <p:cNvPr id="33" name="">
             <a:extLst xmlns:a="http://schemas.openxmlformats.org/drawingml/2006/main">
               <a:ext uri="{FF2B5EF4-FFF2-40B4-BE49-F238E27FC236}">
-                <a16:creationId xmlns:a16="http://schemas.microsoft.com/office/drawing/2014/main" id="{D3B8D804-7C9A-49A0-B81B-0827201BC469}"/>
+                <a16:creationId xmlns:a16="http://schemas.microsoft.com/office/drawing/2014/main" id="{C665A722-9E1F-4C26-AFA7-8EAF6D5C6B58}"/>
               </a:ext>
             </a:extLst>
           </p:cNvPr>
@@ -19549,7 +21412,7 @@
           <p:cNvPr id="34" name="">
             <a:extLst xmlns:a="http://schemas.openxmlformats.org/drawingml/2006/main">
               <a:ext uri="{FF2B5EF4-FFF2-40B4-BE49-F238E27FC236}">
-                <a16:creationId xmlns:a16="http://schemas.microsoft.com/office/drawing/2014/main" id="{2E2CE3E1-9C43-4893-8531-FBE3A01C2E69}"/>
+                <a16:creationId xmlns:a16="http://schemas.microsoft.com/office/drawing/2014/main" id="{B7FF0442-1C04-4757-8771-7E4B29E2F1FB}"/>
               </a:ext>
             </a:extLst>
           </p:cNvPr>
@@ -19606,7 +21469,7 @@
           <p:cNvPr id="35" name="">
             <a:extLst xmlns:a="http://schemas.openxmlformats.org/drawingml/2006/main">
               <a:ext uri="{FF2B5EF4-FFF2-40B4-BE49-F238E27FC236}">
-                <a16:creationId xmlns:a16="http://schemas.microsoft.com/office/drawing/2014/main" id="{86F93031-87B4-4C32-B06A-2695C4E01566}"/>
+                <a16:creationId xmlns:a16="http://schemas.microsoft.com/office/drawing/2014/main" id="{D382E1F0-0E5C-4378-B682-3A022F4BAC9C}"/>
               </a:ext>
             </a:extLst>
           </p:cNvPr>
@@ -19686,7 +21549,7 @@
           <p:cNvPr id="36" name="">
             <a:extLst xmlns:a="http://schemas.openxmlformats.org/drawingml/2006/main">
               <a:ext uri="{FF2B5EF4-FFF2-40B4-BE49-F238E27FC236}">
-                <a16:creationId xmlns:a16="http://schemas.microsoft.com/office/drawing/2014/main" id="{AAF735A2-FC03-46C6-9C66-B65FEFA24DC8}"/>
+                <a16:creationId xmlns:a16="http://schemas.microsoft.com/office/drawing/2014/main" id="{EE6CB31E-6AA6-4F00-B4C8-BF45A0B2D6A8}"/>
               </a:ext>
             </a:extLst>
           </p:cNvPr>
@@ -19743,7 +21606,7 @@
           <p:cNvPr id="37" name="">
             <a:extLst xmlns:a="http://schemas.openxmlformats.org/drawingml/2006/main">
               <a:ext uri="{FF2B5EF4-FFF2-40B4-BE49-F238E27FC236}">
-                <a16:creationId xmlns:a16="http://schemas.microsoft.com/office/drawing/2014/main" id="{5389F665-F0B5-43AE-AF16-E1FC41876CF6}"/>
+                <a16:creationId xmlns:a16="http://schemas.microsoft.com/office/drawing/2014/main" id="{CE89FADF-0B6F-440D-A5D6-88892D569D50}"/>
               </a:ext>
             </a:extLst>
           </p:cNvPr>
@@ -19775,7 +21638,7 @@
           <p:cNvPr id="38" name="">
             <a:extLst xmlns:a="http://schemas.openxmlformats.org/drawingml/2006/main">
               <a:ext uri="{FF2B5EF4-FFF2-40B4-BE49-F238E27FC236}">
-                <a16:creationId xmlns:a16="http://schemas.microsoft.com/office/drawing/2014/main" id="{0BB90253-A47E-4577-AF07-81B077DFF0CE}"/>
+                <a16:creationId xmlns:a16="http://schemas.microsoft.com/office/drawing/2014/main" id="{FCECD796-111D-46A6-A8A6-AA4CA29C9D25}"/>
               </a:ext>
             </a:extLst>
           </p:cNvPr>
@@ -19832,7 +21695,7 @@
           <p:cNvPr id="39" name="">
             <a:extLst xmlns:a="http://schemas.openxmlformats.org/drawingml/2006/main">
               <a:ext uri="{FF2B5EF4-FFF2-40B4-BE49-F238E27FC236}">
-                <a16:creationId xmlns:a16="http://schemas.microsoft.com/office/drawing/2014/main" id="{A829A19C-B25B-491F-BEA9-B9CC4F29A82B}"/>
+                <a16:creationId xmlns:a16="http://schemas.microsoft.com/office/drawing/2014/main" id="{6280B796-6727-4511-B1E0-8153F6C72180}"/>
               </a:ext>
             </a:extLst>
           </p:cNvPr>
@@ -19889,7 +21752,7 @@
           <p:cNvPr id="40" name="">
             <a:extLst xmlns:a="http://schemas.openxmlformats.org/drawingml/2006/main">
               <a:ext uri="{FF2B5EF4-FFF2-40B4-BE49-F238E27FC236}">
-                <a16:creationId xmlns:a16="http://schemas.microsoft.com/office/drawing/2014/main" id="{5A039130-2C84-4E0E-84EE-93DA62A161F1}"/>
+                <a16:creationId xmlns:a16="http://schemas.microsoft.com/office/drawing/2014/main" id="{153074DD-1822-43E4-82AD-9B54DE8DEB66}"/>
               </a:ext>
             </a:extLst>
           </p:cNvPr>
@@ -19969,7 +21832,7 @@
           <p:cNvPr id="41" name="">
             <a:extLst xmlns:a="http://schemas.openxmlformats.org/drawingml/2006/main">
               <a:ext uri="{FF2B5EF4-FFF2-40B4-BE49-F238E27FC236}">
-                <a16:creationId xmlns:a16="http://schemas.microsoft.com/office/drawing/2014/main" id="{6719D043-4ECC-4D4C-9D67-AD76EA5049D1}"/>
+                <a16:creationId xmlns:a16="http://schemas.microsoft.com/office/drawing/2014/main" id="{4958A960-D87E-4927-9BA6-77B73397F3D6}"/>
               </a:ext>
             </a:extLst>
           </p:cNvPr>
@@ -20026,7 +21889,7 @@
           <p:cNvPr id="42" name="">
             <a:extLst xmlns:a="http://schemas.openxmlformats.org/drawingml/2006/main">
               <a:ext uri="{FF2B5EF4-FFF2-40B4-BE49-F238E27FC236}">
-                <a16:creationId xmlns:a16="http://schemas.microsoft.com/office/drawing/2014/main" id="{C0F0DA31-E4F2-4729-B982-DBBDF84A715E}"/>
+                <a16:creationId xmlns:a16="http://schemas.microsoft.com/office/drawing/2014/main" id="{7F900AB7-CFA4-4D97-B31E-70A4A42798A4}"/>
               </a:ext>
             </a:extLst>
           </p:cNvPr>
@@ -20058,7 +21921,7 @@
           <p:cNvPr id="43" name="">
             <a:extLst xmlns:a="http://schemas.openxmlformats.org/drawingml/2006/main">
               <a:ext uri="{FF2B5EF4-FFF2-40B4-BE49-F238E27FC236}">
-                <a16:creationId xmlns:a16="http://schemas.microsoft.com/office/drawing/2014/main" id="{F23238D1-D308-406E-AA8A-0E18D102A8EA}"/>
+                <a16:creationId xmlns:a16="http://schemas.microsoft.com/office/drawing/2014/main" id="{3ACD40BB-60A2-4AE7-9B0C-6B944C96E76A}"/>
               </a:ext>
             </a:extLst>
           </p:cNvPr>
@@ -20115,7 +21978,7 @@
           <p:cNvPr id="44" name="">
             <a:extLst xmlns:a="http://schemas.openxmlformats.org/drawingml/2006/main">
               <a:ext uri="{FF2B5EF4-FFF2-40B4-BE49-F238E27FC236}">
-                <a16:creationId xmlns:a16="http://schemas.microsoft.com/office/drawing/2014/main" id="{0EC5F189-5759-4C2C-B4EB-566F30C7278E}"/>
+                <a16:creationId xmlns:a16="http://schemas.microsoft.com/office/drawing/2014/main" id="{95C0C1DA-B5C2-4390-AB68-792B2986CE52}"/>
               </a:ext>
             </a:extLst>
           </p:cNvPr>
@@ -20147,7 +22010,7 @@
           <p:cNvPr id="45" name="">
             <a:extLst xmlns:a="http://schemas.openxmlformats.org/drawingml/2006/main">
               <a:ext uri="{FF2B5EF4-FFF2-40B4-BE49-F238E27FC236}">
-                <a16:creationId xmlns:a16="http://schemas.microsoft.com/office/drawing/2014/main" id="{E81DB323-4DE9-4C38-8EF1-2A4112C495FA}"/>
+                <a16:creationId xmlns:a16="http://schemas.microsoft.com/office/drawing/2014/main" id="{8DFD56FF-05A1-4330-9954-C674EB06502C}"/>
               </a:ext>
             </a:extLst>
           </p:cNvPr>
@@ -20204,7 +22067,7 @@
           <p:cNvPr id="46" name="">
             <a:extLst xmlns:a="http://schemas.openxmlformats.org/drawingml/2006/main">
               <a:ext uri="{FF2B5EF4-FFF2-40B4-BE49-F238E27FC236}">
-                <a16:creationId xmlns:a16="http://schemas.microsoft.com/office/drawing/2014/main" id="{96F8B030-FB58-4BBE-95EC-65D0CF6CBB6C}"/>
+                <a16:creationId xmlns:a16="http://schemas.microsoft.com/office/drawing/2014/main" id="{8F4F230E-5061-4661-B6C9-297C59A14E27}"/>
               </a:ext>
             </a:extLst>
           </p:cNvPr>
@@ -20283,7 +22146,7 @@
           <p:cNvPr id="29" name="">
             <a:extLst xmlns:a="http://schemas.openxmlformats.org/drawingml/2006/main">
               <a:ext uri="{FF2B5EF4-FFF2-40B4-BE49-F238E27FC236}">
-                <a16:creationId xmlns:a16="http://schemas.microsoft.com/office/drawing/2014/main" id="{A2438928-3F02-4D06-BE53-128090F1EA08}"/>
+                <a16:creationId xmlns:a16="http://schemas.microsoft.com/office/drawing/2014/main" id="{89163915-E413-4F7D-BAEF-1133CECBF7B8}"/>
               </a:ext>
             </a:extLst>
           </p:cNvPr>
@@ -20313,7 +22176,7 @@
           <p:cNvPr id="2" name="">
             <a:extLst xmlns:a="http://schemas.openxmlformats.org/drawingml/2006/main">
               <a:ext uri="{FF2B5EF4-FFF2-40B4-BE49-F238E27FC236}">
-                <a16:creationId xmlns:a16="http://schemas.microsoft.com/office/drawing/2014/main" id="{3DE0EFEA-FBA3-4AB5-A080-338C9EDA87EB}"/>
+                <a16:creationId xmlns:a16="http://schemas.microsoft.com/office/drawing/2014/main" id="{BCF81911-0B08-4066-927F-CABB7503283D}"/>
               </a:ext>
             </a:extLst>
           </p:cNvPr>
@@ -20370,7 +22233,7 @@
           <p:cNvPr id="3" name="">
             <a:extLst xmlns:a="http://schemas.openxmlformats.org/drawingml/2006/main">
               <a:ext uri="{FF2B5EF4-FFF2-40B4-BE49-F238E27FC236}">
-                <a16:creationId xmlns:a16="http://schemas.microsoft.com/office/drawing/2014/main" id="{37DC9105-1538-4196-9BD5-3F5C284A9754}"/>
+                <a16:creationId xmlns:a16="http://schemas.microsoft.com/office/drawing/2014/main" id="{EF8FCB23-97D4-4D30-8E44-3B7D0F0A838D}"/>
               </a:ext>
             </a:extLst>
           </p:cNvPr>
@@ -20427,7 +22290,7 @@
           <p:cNvPr id="4" name="">
             <a:extLst xmlns:a="http://schemas.openxmlformats.org/drawingml/2006/main">
               <a:ext uri="{FF2B5EF4-FFF2-40B4-BE49-F238E27FC236}">
-                <a16:creationId xmlns:a16="http://schemas.microsoft.com/office/drawing/2014/main" id="{BAD56E5C-6F2E-47BD-9BE1-85CAFBAFBAA3}"/>
+                <a16:creationId xmlns:a16="http://schemas.microsoft.com/office/drawing/2014/main" id="{AB9DB70B-D18A-4D7B-85E1-BEB5A02DF942}"/>
               </a:ext>
             </a:extLst>
           </p:cNvPr>
@@ -20484,7 +22347,7 @@
           <p:cNvPr id="5" name="">
             <a:extLst xmlns:a="http://schemas.openxmlformats.org/drawingml/2006/main">
               <a:ext uri="{FF2B5EF4-FFF2-40B4-BE49-F238E27FC236}">
-                <a16:creationId xmlns:a16="http://schemas.microsoft.com/office/drawing/2014/main" id="{0A461159-2C99-4BB6-9841-19F831B79515}"/>
+                <a16:creationId xmlns:a16="http://schemas.microsoft.com/office/drawing/2014/main" id="{83E9DABF-7886-43AB-9568-EAA1C551CFEB}"/>
               </a:ext>
             </a:extLst>
           </p:cNvPr>
@@ -20541,7 +22404,7 @@
           <p:cNvPr id="6" name="">
             <a:extLst xmlns:a="http://schemas.openxmlformats.org/drawingml/2006/main">
               <a:ext uri="{FF2B5EF4-FFF2-40B4-BE49-F238E27FC236}">
-                <a16:creationId xmlns:a16="http://schemas.microsoft.com/office/drawing/2014/main" id="{5530ED59-25EF-4AFF-ACBC-CFB308B8AD0D}"/>
+                <a16:creationId xmlns:a16="http://schemas.microsoft.com/office/drawing/2014/main" id="{F7DFC767-171C-4044-BCFA-91F61A4B923A}"/>
               </a:ext>
             </a:extLst>
           </p:cNvPr>
@@ -20571,7 +22434,7 @@
           <p:cNvPr id="7" name="">
             <a:extLst xmlns:a="http://schemas.openxmlformats.org/drawingml/2006/main">
               <a:ext uri="{FF2B5EF4-FFF2-40B4-BE49-F238E27FC236}">
-                <a16:creationId xmlns:a16="http://schemas.microsoft.com/office/drawing/2014/main" id="{89CD9FD8-C5E6-49D7-838B-E4C7718DA17E}"/>
+                <a16:creationId xmlns:a16="http://schemas.microsoft.com/office/drawing/2014/main" id="{4CCE1B46-0520-40C1-8634-F3C7F074ABE6}"/>
               </a:ext>
             </a:extLst>
           </p:cNvPr>
@@ -20603,7 +22466,7 @@
           <p:cNvPr id="8" name="">
             <a:extLst xmlns:a="http://schemas.openxmlformats.org/drawingml/2006/main">
               <a:ext uri="{FF2B5EF4-FFF2-40B4-BE49-F238E27FC236}">
-                <a16:creationId xmlns:a16="http://schemas.microsoft.com/office/drawing/2014/main" id="{3EE2D8B6-DA6C-4E85-83E4-B49E7FC5847A}"/>
+                <a16:creationId xmlns:a16="http://schemas.microsoft.com/office/drawing/2014/main" id="{E7D816B0-33B0-47F1-B0D9-9BFA248F4D9F}"/>
               </a:ext>
             </a:extLst>
           </p:cNvPr>
@@ -20660,7 +22523,7 @@
           <p:cNvPr id="9" name="">
             <a:extLst xmlns:a="http://schemas.openxmlformats.org/drawingml/2006/main">
               <a:ext uri="{FF2B5EF4-FFF2-40B4-BE49-F238E27FC236}">
-                <a16:creationId xmlns:a16="http://schemas.microsoft.com/office/drawing/2014/main" id="{27918E59-F4DB-40C2-855F-B7D0CA659961}"/>
+                <a16:creationId xmlns:a16="http://schemas.microsoft.com/office/drawing/2014/main" id="{4446B95A-FF64-415E-8DE1-182FF4D024FF}"/>
               </a:ext>
             </a:extLst>
           </p:cNvPr>
@@ -20694,7 +22557,7 @@
           <p:cNvPr id="10" name="">
             <a:extLst xmlns:a="http://schemas.openxmlformats.org/drawingml/2006/main">
               <a:ext uri="{FF2B5EF4-FFF2-40B4-BE49-F238E27FC236}">
-                <a16:creationId xmlns:a16="http://schemas.microsoft.com/office/drawing/2014/main" id="{5DBECDE3-6457-4A38-A8CD-7C94BF1D1331}"/>
+                <a16:creationId xmlns:a16="http://schemas.microsoft.com/office/drawing/2014/main" id="{C9280428-4E3C-4ACE-9143-0482DEB1C4DD}"/>
               </a:ext>
             </a:extLst>
           </p:cNvPr>
@@ -20726,7 +22589,7 @@
           <p:cNvPr id="11" name="">
             <a:extLst xmlns:a="http://schemas.openxmlformats.org/drawingml/2006/main">
               <a:ext uri="{FF2B5EF4-FFF2-40B4-BE49-F238E27FC236}">
-                <a16:creationId xmlns:a16="http://schemas.microsoft.com/office/drawing/2014/main" id="{3DE7F3A9-7FF5-4CA5-812B-8CA809044426}"/>
+                <a16:creationId xmlns:a16="http://schemas.microsoft.com/office/drawing/2014/main" id="{11499B3D-1ADA-46F1-8C12-2DF6BAED1F09}"/>
               </a:ext>
             </a:extLst>
           </p:cNvPr>
@@ -20783,7 +22646,7 @@
           <p:cNvPr id="12" name="">
             <a:extLst xmlns:a="http://schemas.openxmlformats.org/drawingml/2006/main">
               <a:ext uri="{FF2B5EF4-FFF2-40B4-BE49-F238E27FC236}">
-                <a16:creationId xmlns:a16="http://schemas.microsoft.com/office/drawing/2014/main" id="{4AAF860E-4492-4F7A-905C-B9B8D1BFB2A4}"/>
+                <a16:creationId xmlns:a16="http://schemas.microsoft.com/office/drawing/2014/main" id="{FD62DE0A-50A7-44FF-9764-E83CF9A9D648}"/>
               </a:ext>
             </a:extLst>
           </p:cNvPr>
@@ -20863,7 +22726,7 @@
           <p:cNvPr id="13" name="">
             <a:extLst xmlns:a="http://schemas.openxmlformats.org/drawingml/2006/main">
               <a:ext uri="{FF2B5EF4-FFF2-40B4-BE49-F238E27FC236}">
-                <a16:creationId xmlns:a16="http://schemas.microsoft.com/office/drawing/2014/main" id="{7A74776E-FFA5-4037-9565-A7A4E3397444}"/>
+                <a16:creationId xmlns:a16="http://schemas.microsoft.com/office/drawing/2014/main" id="{A1F992CF-498D-442E-A9F6-4B2FEA5DA368}"/>
               </a:ext>
             </a:extLst>
           </p:cNvPr>
@@ -20943,7 +22806,7 @@
           <p:cNvPr id="14" name="">
             <a:extLst xmlns:a="http://schemas.openxmlformats.org/drawingml/2006/main">
               <a:ext uri="{FF2B5EF4-FFF2-40B4-BE49-F238E27FC236}">
-                <a16:creationId xmlns:a16="http://schemas.microsoft.com/office/drawing/2014/main" id="{3F6CD178-818C-45B9-8F6B-F823ADD2C1B4}"/>
+                <a16:creationId xmlns:a16="http://schemas.microsoft.com/office/drawing/2014/main" id="{369CDF04-183F-4545-90A5-DC27FD8C33BC}"/>
               </a:ext>
             </a:extLst>
           </p:cNvPr>
@@ -21000,7 +22863,7 @@
           <p:cNvPr id="15" name="">
             <a:extLst xmlns:a="http://schemas.openxmlformats.org/drawingml/2006/main">
               <a:ext uri="{FF2B5EF4-FFF2-40B4-BE49-F238E27FC236}">
-                <a16:creationId xmlns:a16="http://schemas.microsoft.com/office/drawing/2014/main" id="{8BB20584-2412-410D-90AD-7240D4000548}"/>
+                <a16:creationId xmlns:a16="http://schemas.microsoft.com/office/drawing/2014/main" id="{E5DED342-8BC9-44F3-A7D1-7E4B79BD7A69}"/>
               </a:ext>
             </a:extLst>
           </p:cNvPr>
@@ -21034,7 +22897,7 @@
           <p:cNvPr id="16" name="">
             <a:extLst xmlns:a="http://schemas.openxmlformats.org/drawingml/2006/main">
               <a:ext uri="{FF2B5EF4-FFF2-40B4-BE49-F238E27FC236}">
-                <a16:creationId xmlns:a16="http://schemas.microsoft.com/office/drawing/2014/main" id="{D567787D-E790-49A2-A4A8-D97935BF757E}"/>
+                <a16:creationId xmlns:a16="http://schemas.microsoft.com/office/drawing/2014/main" id="{913766C8-8BFF-463A-A09E-34C61EEAB715}"/>
               </a:ext>
             </a:extLst>
           </p:cNvPr>
@@ -21066,7 +22929,7 @@
           <p:cNvPr id="17" name="">
             <a:extLst xmlns:a="http://schemas.openxmlformats.org/drawingml/2006/main">
               <a:ext uri="{FF2B5EF4-FFF2-40B4-BE49-F238E27FC236}">
-                <a16:creationId xmlns:a16="http://schemas.microsoft.com/office/drawing/2014/main" id="{C48ABB22-679B-46B3-BACC-DB0CA171AF4A}"/>
+                <a16:creationId xmlns:a16="http://schemas.microsoft.com/office/drawing/2014/main" id="{8525D018-963A-4EDF-92FB-0C35D0A1BF8C}"/>
               </a:ext>
             </a:extLst>
           </p:cNvPr>
@@ -21123,7 +22986,7 @@
           <p:cNvPr id="18" name="">
             <a:extLst xmlns:a="http://schemas.openxmlformats.org/drawingml/2006/main">
               <a:ext uri="{FF2B5EF4-FFF2-40B4-BE49-F238E27FC236}">
-                <a16:creationId xmlns:a16="http://schemas.microsoft.com/office/drawing/2014/main" id="{C3386675-AB88-4F04-BE16-82269FF05372}"/>
+                <a16:creationId xmlns:a16="http://schemas.microsoft.com/office/drawing/2014/main" id="{EB8CA945-4699-47DB-9EB8-E0132FE76DA8}"/>
               </a:ext>
             </a:extLst>
           </p:cNvPr>
@@ -21203,7 +23066,7 @@
           <p:cNvPr id="19" name="">
             <a:extLst xmlns:a="http://schemas.openxmlformats.org/drawingml/2006/main">
               <a:ext uri="{FF2B5EF4-FFF2-40B4-BE49-F238E27FC236}">
-                <a16:creationId xmlns:a16="http://schemas.microsoft.com/office/drawing/2014/main" id="{E58FB47D-7E94-4BB4-A83E-A3F042FE209E}"/>
+                <a16:creationId xmlns:a16="http://schemas.microsoft.com/office/drawing/2014/main" id="{4DABC403-0D22-475B-A773-F02ABD8EE337}"/>
               </a:ext>
             </a:extLst>
           </p:cNvPr>
@@ -21283,7 +23146,7 @@
           <p:cNvPr id="20" name="">
             <a:extLst xmlns:a="http://schemas.openxmlformats.org/drawingml/2006/main">
               <a:ext uri="{FF2B5EF4-FFF2-40B4-BE49-F238E27FC236}">
-                <a16:creationId xmlns:a16="http://schemas.microsoft.com/office/drawing/2014/main" id="{2B51149F-AD5F-4D53-A874-F20A4C8737A0}"/>
+                <a16:creationId xmlns:a16="http://schemas.microsoft.com/office/drawing/2014/main" id="{79E2C17B-2C68-44DB-984E-6B279253646D}"/>
               </a:ext>
             </a:extLst>
           </p:cNvPr>
@@ -21317,7 +23180,7 @@
           <p:cNvPr id="21" name="">
             <a:extLst xmlns:a="http://schemas.openxmlformats.org/drawingml/2006/main">
               <a:ext uri="{FF2B5EF4-FFF2-40B4-BE49-F238E27FC236}">
-                <a16:creationId xmlns:a16="http://schemas.microsoft.com/office/drawing/2014/main" id="{50378E80-77E3-4207-BA94-E6FD8432B3DE}"/>
+                <a16:creationId xmlns:a16="http://schemas.microsoft.com/office/drawing/2014/main" id="{BA692FAF-CFBF-4EC6-A15F-2CA52441D46E}"/>
               </a:ext>
             </a:extLst>
           </p:cNvPr>
@@ -21349,7 +23212,7 @@
           <p:cNvPr id="22" name="">
             <a:extLst xmlns:a="http://schemas.openxmlformats.org/drawingml/2006/main">
               <a:ext uri="{FF2B5EF4-FFF2-40B4-BE49-F238E27FC236}">
-                <a16:creationId xmlns:a16="http://schemas.microsoft.com/office/drawing/2014/main" id="{EB96552C-1A8F-430F-BBC7-5999391107F3}"/>
+                <a16:creationId xmlns:a16="http://schemas.microsoft.com/office/drawing/2014/main" id="{40BB36D7-7CD5-44AE-87FE-21BC4DBE98FC}"/>
               </a:ext>
             </a:extLst>
           </p:cNvPr>
@@ -21406,7 +23269,7 @@
           <p:cNvPr id="23" name="">
             <a:extLst xmlns:a="http://schemas.openxmlformats.org/drawingml/2006/main">
               <a:ext uri="{FF2B5EF4-FFF2-40B4-BE49-F238E27FC236}">
-                <a16:creationId xmlns:a16="http://schemas.microsoft.com/office/drawing/2014/main" id="{63DC4E90-7FD0-495E-8C41-5EFEE4E7F031}"/>
+                <a16:creationId xmlns:a16="http://schemas.microsoft.com/office/drawing/2014/main" id="{6853A022-D3C2-4663-9D8C-A21FD589491A}"/>
               </a:ext>
             </a:extLst>
           </p:cNvPr>
@@ -21486,7 +23349,7 @@
           <p:cNvPr id="24" name="">
             <a:extLst xmlns:a="http://schemas.openxmlformats.org/drawingml/2006/main">
               <a:ext uri="{FF2B5EF4-FFF2-40B4-BE49-F238E27FC236}">
-                <a16:creationId xmlns:a16="http://schemas.microsoft.com/office/drawing/2014/main" id="{E523B7FF-50B4-4668-9E21-8D17CD9AFDE1}"/>
+                <a16:creationId xmlns:a16="http://schemas.microsoft.com/office/drawing/2014/main" id="{A39006C5-91F7-4892-A992-3FB74A11C129}"/>
               </a:ext>
             </a:extLst>
           </p:cNvPr>
@@ -21566,7 +23429,7 @@
           <p:cNvPr id="25" name="">
             <a:extLst xmlns:a="http://schemas.openxmlformats.org/drawingml/2006/main">
               <a:ext uri="{FF2B5EF4-FFF2-40B4-BE49-F238E27FC236}">
-                <a16:creationId xmlns:a16="http://schemas.microsoft.com/office/drawing/2014/main" id="{FE693997-F665-4E08-9D60-61E87D8C1AD0}"/>
+                <a16:creationId xmlns:a16="http://schemas.microsoft.com/office/drawing/2014/main" id="{E40C2E33-4CAB-426E-B0B1-7EBD431637ED}"/>
               </a:ext>
             </a:extLst>
           </p:cNvPr>
@@ -21623,7 +23486,7 @@
           <p:cNvPr id="26" name="">
             <a:extLst xmlns:a="http://schemas.openxmlformats.org/drawingml/2006/main">
               <a:ext uri="{FF2B5EF4-FFF2-40B4-BE49-F238E27FC236}">
-                <a16:creationId xmlns:a16="http://schemas.microsoft.com/office/drawing/2014/main" id="{4349BCC2-8EC3-4E49-9985-D34909A85609}"/>
+                <a16:creationId xmlns:a16="http://schemas.microsoft.com/office/drawing/2014/main" id="{93D3BAA3-7629-4ADC-B28D-B2E0A595ECBA}"/>
               </a:ext>
             </a:extLst>
           </p:cNvPr>
@@ -21655,7 +23518,7 @@
           <p:cNvPr id="27" name="">
             <a:extLst xmlns:a="http://schemas.openxmlformats.org/drawingml/2006/main">
               <a:ext uri="{FF2B5EF4-FFF2-40B4-BE49-F238E27FC236}">
-                <a16:creationId xmlns:a16="http://schemas.microsoft.com/office/drawing/2014/main" id="{2BCAA79C-42DF-423A-BFCE-E3A1C8D5A1DA}"/>
+                <a16:creationId xmlns:a16="http://schemas.microsoft.com/office/drawing/2014/main" id="{DDD1D4A2-08D2-4F95-9C2B-BCACF9B5AE5F}"/>
               </a:ext>
             </a:extLst>
           </p:cNvPr>
@@ -21712,7 +23575,7 @@
           <p:cNvPr id="28" name="">
             <a:extLst xmlns:a="http://schemas.openxmlformats.org/drawingml/2006/main">
               <a:ext uri="{FF2B5EF4-FFF2-40B4-BE49-F238E27FC236}">
-                <a16:creationId xmlns:a16="http://schemas.microsoft.com/office/drawing/2014/main" id="{38D8C6D4-CF0E-41F1-8F54-F5F6559BCD24}"/>
+                <a16:creationId xmlns:a16="http://schemas.microsoft.com/office/drawing/2014/main" id="{08425EE8-75E9-456A-8209-03E051E3C6F5}"/>
               </a:ext>
             </a:extLst>
           </p:cNvPr>
@@ -21767,7 +23630,7 @@
     </p:spTree>
     <p:extLst>
       <p:ext uri="{BB962C8B-B14F-4D97-AF65-F5344CB8AC3E}">
-        <p14:creationId xmlns:p14="http://schemas.microsoft.com/office/powerpoint/2010/main" val="413769237"/>
+        <p14:creationId xmlns:p14="http://schemas.microsoft.com/office/powerpoint/2010/main" val="444000715"/>
       </p:ext>
     </p:extLst>
   </p:cSld>
@@ -21791,7 +23654,7 @@
           <p:cNvPr id="44" name="">
             <a:extLst xmlns:a="http://schemas.openxmlformats.org/drawingml/2006/main">
               <a:ext uri="{FF2B5EF4-FFF2-40B4-BE49-F238E27FC236}">
-                <a16:creationId xmlns:a16="http://schemas.microsoft.com/office/drawing/2014/main" id="{882DDE8A-C99C-4812-BA21-834BC62CD5E0}"/>
+                <a16:creationId xmlns:a16="http://schemas.microsoft.com/office/drawing/2014/main" id="{7EE41111-1A01-457C-8BB9-372EF804B5BE}"/>
               </a:ext>
             </a:extLst>
           </p:cNvPr>
@@ -21821,7 +23684,7 @@
           <p:cNvPr id="2" name="">
             <a:extLst xmlns:a="http://schemas.openxmlformats.org/drawingml/2006/main">
               <a:ext uri="{FF2B5EF4-FFF2-40B4-BE49-F238E27FC236}">
-                <a16:creationId xmlns:a16="http://schemas.microsoft.com/office/drawing/2014/main" id="{E6A76D11-9983-4A97-8D17-4B58E2FFC0BC}"/>
+                <a16:creationId xmlns:a16="http://schemas.microsoft.com/office/drawing/2014/main" id="{BC9C4CA0-E817-49F4-ADDE-98A2596252F1}"/>
               </a:ext>
             </a:extLst>
           </p:cNvPr>
@@ -21878,7 +23741,7 @@
           <p:cNvPr id="3" name="">
             <a:extLst xmlns:a="http://schemas.openxmlformats.org/drawingml/2006/main">
               <a:ext uri="{FF2B5EF4-FFF2-40B4-BE49-F238E27FC236}">
-                <a16:creationId xmlns:a16="http://schemas.microsoft.com/office/drawing/2014/main" id="{B9ECFA36-909C-4A8E-BC3D-71534882E566}"/>
+                <a16:creationId xmlns:a16="http://schemas.microsoft.com/office/drawing/2014/main" id="{BF1E86B8-1AAD-499F-9147-4925CAD7DF45}"/>
               </a:ext>
             </a:extLst>
           </p:cNvPr>
@@ -21935,7 +23798,7 @@
           <p:cNvPr id="4" name="">
             <a:extLst xmlns:a="http://schemas.openxmlformats.org/drawingml/2006/main">
               <a:ext uri="{FF2B5EF4-FFF2-40B4-BE49-F238E27FC236}">
-                <a16:creationId xmlns:a16="http://schemas.microsoft.com/office/drawing/2014/main" id="{9DFC19DC-3274-433B-A8B5-04F46704B2F5}"/>
+                <a16:creationId xmlns:a16="http://schemas.microsoft.com/office/drawing/2014/main" id="{1CCF11C5-4164-4CB8-BBA0-96ED19EBD617}"/>
               </a:ext>
             </a:extLst>
           </p:cNvPr>
@@ -21992,7 +23855,7 @@
           <p:cNvPr id="5" name="">
             <a:extLst xmlns:a="http://schemas.openxmlformats.org/drawingml/2006/main">
               <a:ext uri="{FF2B5EF4-FFF2-40B4-BE49-F238E27FC236}">
-                <a16:creationId xmlns:a16="http://schemas.microsoft.com/office/drawing/2014/main" id="{1469FE25-B761-4BD8-B7C9-A5FD32034BF1}"/>
+                <a16:creationId xmlns:a16="http://schemas.microsoft.com/office/drawing/2014/main" id="{66C891B4-D11F-435E-89BE-204318330875}"/>
               </a:ext>
             </a:extLst>
           </p:cNvPr>
@@ -22049,7 +23912,7 @@
           <p:cNvPr id="6" name="">
             <a:extLst xmlns:a="http://schemas.openxmlformats.org/drawingml/2006/main">
               <a:ext uri="{FF2B5EF4-FFF2-40B4-BE49-F238E27FC236}">
-                <a16:creationId xmlns:a16="http://schemas.microsoft.com/office/drawing/2014/main" id="{036F095F-666B-4075-B12C-F707FC04269E}"/>
+                <a16:creationId xmlns:a16="http://schemas.microsoft.com/office/drawing/2014/main" id="{EFCAB98B-D850-4183-9C94-BC9D2C87BF4D}"/>
               </a:ext>
             </a:extLst>
           </p:cNvPr>
@@ -22079,7 +23942,7 @@
           <p:cNvPr id="7" name="">
             <a:extLst xmlns:a="http://schemas.openxmlformats.org/drawingml/2006/main">
               <a:ext uri="{FF2B5EF4-FFF2-40B4-BE49-F238E27FC236}">
-                <a16:creationId xmlns:a16="http://schemas.microsoft.com/office/drawing/2014/main" id="{072EB719-2A9C-4E2D-B7F4-8A4D3B3752D4}"/>
+                <a16:creationId xmlns:a16="http://schemas.microsoft.com/office/drawing/2014/main" id="{03D15E21-81CB-4D47-8BB5-81E98979501A}"/>
               </a:ext>
             </a:extLst>
           </p:cNvPr>
@@ -22113,7 +23976,7 @@
           <p:cNvPr id="8" name="">
             <a:extLst xmlns:a="http://schemas.openxmlformats.org/drawingml/2006/main">
               <a:ext uri="{FF2B5EF4-FFF2-40B4-BE49-F238E27FC236}">
-                <a16:creationId xmlns:a16="http://schemas.microsoft.com/office/drawing/2014/main" id="{448B9530-153C-4444-B1C5-EEFECE6270F0}"/>
+                <a16:creationId xmlns:a16="http://schemas.microsoft.com/office/drawing/2014/main" id="{CB9E1EBD-15C4-48F8-96C3-7A7ACFD9EFA3}"/>
               </a:ext>
             </a:extLst>
           </p:cNvPr>
@@ -22170,7 +24033,7 @@
           <p:cNvPr id="9" name="">
             <a:extLst xmlns:a="http://schemas.openxmlformats.org/drawingml/2006/main">
               <a:ext uri="{FF2B5EF4-FFF2-40B4-BE49-F238E27FC236}">
-                <a16:creationId xmlns:a16="http://schemas.microsoft.com/office/drawing/2014/main" id="{468171A6-7B22-472D-BAC2-18870D9C541A}"/>
+                <a16:creationId xmlns:a16="http://schemas.microsoft.com/office/drawing/2014/main" id="{1FCBA14E-3FAF-4D95-AE42-DBD85A0F55D7}"/>
               </a:ext>
             </a:extLst>
           </p:cNvPr>
@@ -22200,7 +24063,7 @@
           <p:cNvPr id="10" name="">
             <a:extLst xmlns:a="http://schemas.openxmlformats.org/drawingml/2006/main">
               <a:ext uri="{FF2B5EF4-FFF2-40B4-BE49-F238E27FC236}">
-                <a16:creationId xmlns:a16="http://schemas.microsoft.com/office/drawing/2014/main" id="{2D666024-C2A5-4F49-B7BA-EFAE2C4D1EF6}"/>
+                <a16:creationId xmlns:a16="http://schemas.microsoft.com/office/drawing/2014/main" id="{7F633CB1-E3DC-4406-BC15-2AB1F8DBEF71}"/>
               </a:ext>
             </a:extLst>
           </p:cNvPr>
@@ -22257,7 +24120,7 @@
           <p:cNvPr id="11" name="">
             <a:extLst xmlns:a="http://schemas.openxmlformats.org/drawingml/2006/main">
               <a:ext uri="{FF2B5EF4-FFF2-40B4-BE49-F238E27FC236}">
-                <a16:creationId xmlns:a16="http://schemas.microsoft.com/office/drawing/2014/main" id="{F0C8FE9B-81A8-49CC-B22F-3EF0E70D2030}"/>
+                <a16:creationId xmlns:a16="http://schemas.microsoft.com/office/drawing/2014/main" id="{7BA24D27-0247-4713-A807-1D139EA2D5ED}"/>
               </a:ext>
             </a:extLst>
           </p:cNvPr>
@@ -22314,7 +24177,7 @@
           <p:cNvPr id="12" name="">
             <a:extLst xmlns:a="http://schemas.openxmlformats.org/drawingml/2006/main">
               <a:ext uri="{FF2B5EF4-FFF2-40B4-BE49-F238E27FC236}">
-                <a16:creationId xmlns:a16="http://schemas.microsoft.com/office/drawing/2014/main" id="{135B84BC-E473-4779-B8B1-B8AA1B7EC195}"/>
+                <a16:creationId xmlns:a16="http://schemas.microsoft.com/office/drawing/2014/main" id="{6D247565-2F56-406A-96D1-6673DDAD3B08}"/>
               </a:ext>
             </a:extLst>
           </p:cNvPr>
@@ -22344,7 +24207,7 @@
           <p:cNvPr id="13" name="">
             <a:extLst xmlns:a="http://schemas.openxmlformats.org/drawingml/2006/main">
               <a:ext uri="{FF2B5EF4-FFF2-40B4-BE49-F238E27FC236}">
-                <a16:creationId xmlns:a16="http://schemas.microsoft.com/office/drawing/2014/main" id="{E7CBA965-26A6-4E6E-84AC-49B9EBAD0C64}"/>
+                <a16:creationId xmlns:a16="http://schemas.microsoft.com/office/drawing/2014/main" id="{46AC1B8F-E7AD-439D-A890-C2211A8BECDF}"/>
               </a:ext>
             </a:extLst>
           </p:cNvPr>
@@ -22401,7 +24264,7 @@
           <p:cNvPr id="14" name="">
             <a:extLst xmlns:a="http://schemas.openxmlformats.org/drawingml/2006/main">
               <a:ext uri="{FF2B5EF4-FFF2-40B4-BE49-F238E27FC236}">
-                <a16:creationId xmlns:a16="http://schemas.microsoft.com/office/drawing/2014/main" id="{37E9F60D-8EC9-4467-894B-2E8114A5367D}"/>
+                <a16:creationId xmlns:a16="http://schemas.microsoft.com/office/drawing/2014/main" id="{95519340-223A-4672-ACBF-DB1167C2A8F6}"/>
               </a:ext>
             </a:extLst>
           </p:cNvPr>
@@ -22458,7 +24321,7 @@
           <p:cNvPr id="15" name="">
             <a:extLst xmlns:a="http://schemas.openxmlformats.org/drawingml/2006/main">
               <a:ext uri="{FF2B5EF4-FFF2-40B4-BE49-F238E27FC236}">
-                <a16:creationId xmlns:a16="http://schemas.microsoft.com/office/drawing/2014/main" id="{2CDCF1E5-3929-49E8-9630-DB34A9E00A80}"/>
+                <a16:creationId xmlns:a16="http://schemas.microsoft.com/office/drawing/2014/main" id="{8FDFCCAE-8884-4738-BFAF-328AE1822EB9}"/>
               </a:ext>
             </a:extLst>
           </p:cNvPr>
@@ -22488,7 +24351,7 @@
           <p:cNvPr id="16" name="">
             <a:extLst xmlns:a="http://schemas.openxmlformats.org/drawingml/2006/main">
               <a:ext uri="{FF2B5EF4-FFF2-40B4-BE49-F238E27FC236}">
-                <a16:creationId xmlns:a16="http://schemas.microsoft.com/office/drawing/2014/main" id="{B9D9FBD7-948D-48A0-83A6-26795D1ACED1}"/>
+                <a16:creationId xmlns:a16="http://schemas.microsoft.com/office/drawing/2014/main" id="{9F2C45B3-DAE8-44F4-B73E-508C900E27C2}"/>
               </a:ext>
             </a:extLst>
           </p:cNvPr>
@@ -22545,7 +24408,7 @@
           <p:cNvPr id="17" name="">
             <a:extLst xmlns:a="http://schemas.openxmlformats.org/drawingml/2006/main">
               <a:ext uri="{FF2B5EF4-FFF2-40B4-BE49-F238E27FC236}">
-                <a16:creationId xmlns:a16="http://schemas.microsoft.com/office/drawing/2014/main" id="{5C186D54-C857-433D-80B6-EEE779B1BF4D}"/>
+                <a16:creationId xmlns:a16="http://schemas.microsoft.com/office/drawing/2014/main" id="{025C26B3-B242-4B00-B800-4469685178FF}"/>
               </a:ext>
             </a:extLst>
           </p:cNvPr>
@@ -22602,7 +24465,7 @@
           <p:cNvPr id="18" name="">
             <a:extLst xmlns:a="http://schemas.openxmlformats.org/drawingml/2006/main">
               <a:ext uri="{FF2B5EF4-FFF2-40B4-BE49-F238E27FC236}">
-                <a16:creationId xmlns:a16="http://schemas.microsoft.com/office/drawing/2014/main" id="{F9BD6193-341F-47ED-B370-63683CB3BBC3}"/>
+                <a16:creationId xmlns:a16="http://schemas.microsoft.com/office/drawing/2014/main" id="{777B5F32-F28A-4B7A-91FB-256B98B157F9}"/>
               </a:ext>
             </a:extLst>
           </p:cNvPr>
@@ -22632,7 +24495,7 @@
           <p:cNvPr id="19" name="">
             <a:extLst xmlns:a="http://schemas.openxmlformats.org/drawingml/2006/main">
               <a:ext uri="{FF2B5EF4-FFF2-40B4-BE49-F238E27FC236}">
-                <a16:creationId xmlns:a16="http://schemas.microsoft.com/office/drawing/2014/main" id="{D731D2B0-DBA1-4D16-B163-AA48555B729B}"/>
+                <a16:creationId xmlns:a16="http://schemas.microsoft.com/office/drawing/2014/main" id="{862D9B42-65BF-4FEA-A997-478C87DFAB36}"/>
               </a:ext>
             </a:extLst>
           </p:cNvPr>
@@ -22689,7 +24552,7 @@
           <p:cNvPr id="20" name="">
             <a:extLst xmlns:a="http://schemas.openxmlformats.org/drawingml/2006/main">
               <a:ext uri="{FF2B5EF4-FFF2-40B4-BE49-F238E27FC236}">
-                <a16:creationId xmlns:a16="http://schemas.microsoft.com/office/drawing/2014/main" id="{C5934D32-50CE-4BB6-86D7-B4EF935C9D47}"/>
+                <a16:creationId xmlns:a16="http://schemas.microsoft.com/office/drawing/2014/main" id="{FBFA244D-539D-4339-8A9D-CB4182C79CBE}"/>
               </a:ext>
             </a:extLst>
           </p:cNvPr>
@@ -22746,7 +24609,7 @@
           <p:cNvPr id="21" name="">
             <a:extLst xmlns:a="http://schemas.openxmlformats.org/drawingml/2006/main">
               <a:ext uri="{FF2B5EF4-FFF2-40B4-BE49-F238E27FC236}">
-                <a16:creationId xmlns:a16="http://schemas.microsoft.com/office/drawing/2014/main" id="{3A28BC33-605E-4045-8CE4-0AED76F28144}"/>
+                <a16:creationId xmlns:a16="http://schemas.microsoft.com/office/drawing/2014/main" id="{AB75E30D-ED88-4AC6-9177-49D450C762A7}"/>
               </a:ext>
             </a:extLst>
           </p:cNvPr>
@@ -22776,7 +24639,7 @@
           <p:cNvPr id="22" name="">
             <a:extLst xmlns:a="http://schemas.openxmlformats.org/drawingml/2006/main">
               <a:ext uri="{FF2B5EF4-FFF2-40B4-BE49-F238E27FC236}">
-                <a16:creationId xmlns:a16="http://schemas.microsoft.com/office/drawing/2014/main" id="{03E78971-B00E-4346-9C7E-DCEA3DC6C2AE}"/>
+                <a16:creationId xmlns:a16="http://schemas.microsoft.com/office/drawing/2014/main" id="{3DC89255-C0F8-49B2-9923-D1436BEE9515}"/>
               </a:ext>
             </a:extLst>
           </p:cNvPr>
@@ -22833,7 +24696,7 @@
           <p:cNvPr id="23" name="">
             <a:extLst xmlns:a="http://schemas.openxmlformats.org/drawingml/2006/main">
               <a:ext uri="{FF2B5EF4-FFF2-40B4-BE49-F238E27FC236}">
-                <a16:creationId xmlns:a16="http://schemas.microsoft.com/office/drawing/2014/main" id="{762E7AD5-220A-4330-9551-9E502A1D7BF6}"/>
+                <a16:creationId xmlns:a16="http://schemas.microsoft.com/office/drawing/2014/main" id="{8494D2DC-16F7-4198-905D-60081447227A}"/>
               </a:ext>
             </a:extLst>
           </p:cNvPr>
@@ -22890,7 +24753,7 @@
           <p:cNvPr id="24" name="">
             <a:extLst xmlns:a="http://schemas.openxmlformats.org/drawingml/2006/main">
               <a:ext uri="{FF2B5EF4-FFF2-40B4-BE49-F238E27FC236}">
-                <a16:creationId xmlns:a16="http://schemas.microsoft.com/office/drawing/2014/main" id="{D1FEC0D0-A0E1-4379-B886-06ECC5E6E94C}"/>
+                <a16:creationId xmlns:a16="http://schemas.microsoft.com/office/drawing/2014/main" id="{9B36D125-9F90-49EF-BC1E-E85620C817DE}"/>
               </a:ext>
             </a:extLst>
           </p:cNvPr>
@@ -22924,7 +24787,7 @@
           <p:cNvPr id="25" name="">
             <a:extLst xmlns:a="http://schemas.openxmlformats.org/drawingml/2006/main">
               <a:ext uri="{FF2B5EF4-FFF2-40B4-BE49-F238E27FC236}">
-                <a16:creationId xmlns:a16="http://schemas.microsoft.com/office/drawing/2014/main" id="{4E1821F9-3FFD-44A0-A445-C2A619C8C46C}"/>
+                <a16:creationId xmlns:a16="http://schemas.microsoft.com/office/drawing/2014/main" id="{FA2DCD7E-B3FD-4826-A99C-EF92EB26B046}"/>
               </a:ext>
             </a:extLst>
           </p:cNvPr>
@@ -22981,7 +24844,7 @@
           <p:cNvPr id="26" name="">
             <a:extLst xmlns:a="http://schemas.openxmlformats.org/drawingml/2006/main">
               <a:ext uri="{FF2B5EF4-FFF2-40B4-BE49-F238E27FC236}">
-                <a16:creationId xmlns:a16="http://schemas.microsoft.com/office/drawing/2014/main" id="{827D6F25-18CE-4BA3-A082-D1FE0F3AB073}"/>
+                <a16:creationId xmlns:a16="http://schemas.microsoft.com/office/drawing/2014/main" id="{F510C50C-DB4B-414A-AC46-E71487936FA3}"/>
               </a:ext>
             </a:extLst>
           </p:cNvPr>
@@ -23011,7 +24874,7 @@
           <p:cNvPr id="27" name="">
             <a:extLst xmlns:a="http://schemas.openxmlformats.org/drawingml/2006/main">
               <a:ext uri="{FF2B5EF4-FFF2-40B4-BE49-F238E27FC236}">
-                <a16:creationId xmlns:a16="http://schemas.microsoft.com/office/drawing/2014/main" id="{5BC924B6-C127-4A5B-AD8B-F5D8C3C4D4EE}"/>
+                <a16:creationId xmlns:a16="http://schemas.microsoft.com/office/drawing/2014/main" id="{D8EF0FA5-93C2-45AB-8399-7BE6D363C25B}"/>
               </a:ext>
             </a:extLst>
           </p:cNvPr>
@@ -23068,7 +24931,7 @@
           <p:cNvPr id="28" name="">
             <a:extLst xmlns:a="http://schemas.openxmlformats.org/drawingml/2006/main">
               <a:ext uri="{FF2B5EF4-FFF2-40B4-BE49-F238E27FC236}">
-                <a16:creationId xmlns:a16="http://schemas.microsoft.com/office/drawing/2014/main" id="{F522D6CC-F049-4618-A788-E4E37FACAE74}"/>
+                <a16:creationId xmlns:a16="http://schemas.microsoft.com/office/drawing/2014/main" id="{19924067-0B2B-45FC-937B-91285D50B335}"/>
               </a:ext>
             </a:extLst>
           </p:cNvPr>
@@ -23125,7 +24988,7 @@
           <p:cNvPr id="29" name="">
             <a:extLst xmlns:a="http://schemas.openxmlformats.org/drawingml/2006/main">
               <a:ext uri="{FF2B5EF4-FFF2-40B4-BE49-F238E27FC236}">
-                <a16:creationId xmlns:a16="http://schemas.microsoft.com/office/drawing/2014/main" id="{9A2BFD01-FF87-46C6-947F-444808B5FAE2}"/>
+                <a16:creationId xmlns:a16="http://schemas.microsoft.com/office/drawing/2014/main" id="{60DAE377-237C-4730-B3C8-528EEAE548FE}"/>
               </a:ext>
             </a:extLst>
           </p:cNvPr>
@@ -23155,7 +25018,7 @@
           <p:cNvPr id="30" name="">
             <a:extLst xmlns:a="http://schemas.openxmlformats.org/drawingml/2006/main">
               <a:ext uri="{FF2B5EF4-FFF2-40B4-BE49-F238E27FC236}">
-                <a16:creationId xmlns:a16="http://schemas.microsoft.com/office/drawing/2014/main" id="{A66ABED9-975C-42E1-BF5B-76B5290A0D0E}"/>
+                <a16:creationId xmlns:a16="http://schemas.microsoft.com/office/drawing/2014/main" id="{B3BF63A8-1090-4F5A-8E60-13F4B212B06A}"/>
               </a:ext>
             </a:extLst>
           </p:cNvPr>
@@ -23212,7 +25075,7 @@
           <p:cNvPr id="31" name="">
             <a:extLst xmlns:a="http://schemas.openxmlformats.org/drawingml/2006/main">
               <a:ext uri="{FF2B5EF4-FFF2-40B4-BE49-F238E27FC236}">
-                <a16:creationId xmlns:a16="http://schemas.microsoft.com/office/drawing/2014/main" id="{85749E1F-4B0A-4BF0-A8AF-AFA7BB902918}"/>
+                <a16:creationId xmlns:a16="http://schemas.microsoft.com/office/drawing/2014/main" id="{91681D8E-593A-4A11-9192-06984D143510}"/>
               </a:ext>
             </a:extLst>
           </p:cNvPr>
@@ -23269,7 +25132,7 @@
           <p:cNvPr id="32" name="">
             <a:extLst xmlns:a="http://schemas.openxmlformats.org/drawingml/2006/main">
               <a:ext uri="{FF2B5EF4-FFF2-40B4-BE49-F238E27FC236}">
-                <a16:creationId xmlns:a16="http://schemas.microsoft.com/office/drawing/2014/main" id="{C4ED0B47-663B-45A0-B0A1-1FB318FB50CF}"/>
+                <a16:creationId xmlns:a16="http://schemas.microsoft.com/office/drawing/2014/main" id="{39F65F0B-7C58-42E4-A939-9F28AB3B4E44}"/>
               </a:ext>
             </a:extLst>
           </p:cNvPr>
@@ -23299,7 +25162,7 @@
           <p:cNvPr id="33" name="">
             <a:extLst xmlns:a="http://schemas.openxmlformats.org/drawingml/2006/main">
               <a:ext uri="{FF2B5EF4-FFF2-40B4-BE49-F238E27FC236}">
-                <a16:creationId xmlns:a16="http://schemas.microsoft.com/office/drawing/2014/main" id="{C471BC29-EB8C-4406-8A0F-267EDD2A3A83}"/>
+                <a16:creationId xmlns:a16="http://schemas.microsoft.com/office/drawing/2014/main" id="{A689CBA0-05F7-4B62-8C98-AB48F55284A3}"/>
               </a:ext>
             </a:extLst>
           </p:cNvPr>
@@ -23356,7 +25219,7 @@
           <p:cNvPr id="34" name="">
             <a:extLst xmlns:a="http://schemas.openxmlformats.org/drawingml/2006/main">
               <a:ext uri="{FF2B5EF4-FFF2-40B4-BE49-F238E27FC236}">
-                <a16:creationId xmlns:a16="http://schemas.microsoft.com/office/drawing/2014/main" id="{38EA2722-52B2-46F2-B6CA-2E98ACD11C95}"/>
+                <a16:creationId xmlns:a16="http://schemas.microsoft.com/office/drawing/2014/main" id="{B295720D-E1A5-48ED-B794-BDCE23220A7C}"/>
               </a:ext>
             </a:extLst>
           </p:cNvPr>
@@ -23413,7 +25276,7 @@
           <p:cNvPr id="35" name="">
             <a:extLst xmlns:a="http://schemas.openxmlformats.org/drawingml/2006/main">
               <a:ext uri="{FF2B5EF4-FFF2-40B4-BE49-F238E27FC236}">
-                <a16:creationId xmlns:a16="http://schemas.microsoft.com/office/drawing/2014/main" id="{D6861D39-04CD-4DB0-A918-5B0E29BE131A}"/>
+                <a16:creationId xmlns:a16="http://schemas.microsoft.com/office/drawing/2014/main" id="{928D3B5D-B42F-49FC-ACDF-1D89E75C7000}"/>
               </a:ext>
             </a:extLst>
           </p:cNvPr>
@@ -23443,7 +25306,7 @@
           <p:cNvPr id="36" name="">
             <a:extLst xmlns:a="http://schemas.openxmlformats.org/drawingml/2006/main">
               <a:ext uri="{FF2B5EF4-FFF2-40B4-BE49-F238E27FC236}">
-                <a16:creationId xmlns:a16="http://schemas.microsoft.com/office/drawing/2014/main" id="{4952D827-FDD6-4085-B6E6-5BAC576998D1}"/>
+                <a16:creationId xmlns:a16="http://schemas.microsoft.com/office/drawing/2014/main" id="{EA16F1DD-0ABD-4AAD-A0F9-0E33589F1B03}"/>
               </a:ext>
             </a:extLst>
           </p:cNvPr>
@@ -23500,7 +25363,7 @@
           <p:cNvPr id="37" name="">
             <a:extLst xmlns:a="http://schemas.openxmlformats.org/drawingml/2006/main">
               <a:ext uri="{FF2B5EF4-FFF2-40B4-BE49-F238E27FC236}">
-                <a16:creationId xmlns:a16="http://schemas.microsoft.com/office/drawing/2014/main" id="{9927039C-5C45-4A0F-BA5D-E6E24A236934}"/>
+                <a16:creationId xmlns:a16="http://schemas.microsoft.com/office/drawing/2014/main" id="{A53A172C-C15A-464A-A8FD-A9241F83F234}"/>
               </a:ext>
             </a:extLst>
           </p:cNvPr>
@@ -23557,7 +25420,7 @@
           <p:cNvPr id="38" name="">
             <a:extLst xmlns:a="http://schemas.openxmlformats.org/drawingml/2006/main">
               <a:ext uri="{FF2B5EF4-FFF2-40B4-BE49-F238E27FC236}">
-                <a16:creationId xmlns:a16="http://schemas.microsoft.com/office/drawing/2014/main" id="{86EC0119-7488-4F3F-81F4-BB9D68EE4F09}"/>
+                <a16:creationId xmlns:a16="http://schemas.microsoft.com/office/drawing/2014/main" id="{EAD36CA5-35BC-4621-BC15-029309A35A99}"/>
               </a:ext>
             </a:extLst>
           </p:cNvPr>
@@ -23587,7 +25450,7 @@
           <p:cNvPr id="39" name="">
             <a:extLst xmlns:a="http://schemas.openxmlformats.org/drawingml/2006/main">
               <a:ext uri="{FF2B5EF4-FFF2-40B4-BE49-F238E27FC236}">
-                <a16:creationId xmlns:a16="http://schemas.microsoft.com/office/drawing/2014/main" id="{A8DFD141-4AEA-451A-8AB1-F01A8B2E2F58}"/>
+                <a16:creationId xmlns:a16="http://schemas.microsoft.com/office/drawing/2014/main" id="{BD849AC9-AC83-48C1-85C7-27A5773B5F86}"/>
               </a:ext>
             </a:extLst>
           </p:cNvPr>
@@ -23644,7 +25507,7 @@
           <p:cNvPr id="40" name="">
             <a:extLst xmlns:a="http://schemas.openxmlformats.org/drawingml/2006/main">
               <a:ext uri="{FF2B5EF4-FFF2-40B4-BE49-F238E27FC236}">
-                <a16:creationId xmlns:a16="http://schemas.microsoft.com/office/drawing/2014/main" id="{FFC4F33D-22B6-498B-8785-C1205D3C7FAF}"/>
+                <a16:creationId xmlns:a16="http://schemas.microsoft.com/office/drawing/2014/main" id="{98F65563-767D-47B9-BCAF-780221EF1CAF}"/>
               </a:ext>
             </a:extLst>
           </p:cNvPr>
@@ -23701,7 +25564,7 @@
           <p:cNvPr id="41" name="">
             <a:extLst xmlns:a="http://schemas.openxmlformats.org/drawingml/2006/main">
               <a:ext uri="{FF2B5EF4-FFF2-40B4-BE49-F238E27FC236}">
-                <a16:creationId xmlns:a16="http://schemas.microsoft.com/office/drawing/2014/main" id="{5C9EE4EE-07B3-4416-8E16-051A8716B6A1}"/>
+                <a16:creationId xmlns:a16="http://schemas.microsoft.com/office/drawing/2014/main" id="{3A132019-833E-48E3-99AF-BD0CC856FA51}"/>
               </a:ext>
             </a:extLst>
           </p:cNvPr>
@@ -23733,7 +25596,7 @@
           <p:cNvPr id="42" name="">
             <a:extLst xmlns:a="http://schemas.openxmlformats.org/drawingml/2006/main">
               <a:ext uri="{FF2B5EF4-FFF2-40B4-BE49-F238E27FC236}">
-                <a16:creationId xmlns:a16="http://schemas.microsoft.com/office/drawing/2014/main" id="{A2618466-D680-4166-9983-E966C84F012E}"/>
+                <a16:creationId xmlns:a16="http://schemas.microsoft.com/office/drawing/2014/main" id="{B6BE6284-7402-41D7-8948-064DCF5AC7FE}"/>
               </a:ext>
             </a:extLst>
           </p:cNvPr>
@@ -23790,7 +25653,7 @@
           <p:cNvPr id="43" name="">
             <a:extLst xmlns:a="http://schemas.openxmlformats.org/drawingml/2006/main">
               <a:ext uri="{FF2B5EF4-FFF2-40B4-BE49-F238E27FC236}">
-                <a16:creationId xmlns:a16="http://schemas.microsoft.com/office/drawing/2014/main" id="{6E5A1A0E-5E05-4E82-A198-D70B20D0DCD6}"/>
+                <a16:creationId xmlns:a16="http://schemas.microsoft.com/office/drawing/2014/main" id="{16F71565-B604-42C8-BDDB-0DAFEF79DFD1}"/>
               </a:ext>
             </a:extLst>
           </p:cNvPr>
@@ -23845,7 +25708,7 @@
     </p:spTree>
     <p:extLst>
       <p:ext uri="{BB962C8B-B14F-4D97-AF65-F5344CB8AC3E}">
-        <p14:creationId xmlns:p14="http://schemas.microsoft.com/office/powerpoint/2010/main" val="1852653645"/>
+        <p14:creationId xmlns:p14="http://schemas.microsoft.com/office/powerpoint/2010/main" val="1313688188"/>
       </p:ext>
     </p:extLst>
   </p:cSld>
@@ -23869,7 +25732,7 @@
           <p:cNvPr id="32" name="">
             <a:extLst xmlns:a="http://schemas.openxmlformats.org/drawingml/2006/main">
               <a:ext uri="{FF2B5EF4-FFF2-40B4-BE49-F238E27FC236}">
-                <a16:creationId xmlns:a16="http://schemas.microsoft.com/office/drawing/2014/main" id="{4709FF71-FDEB-4E9A-BC72-03881442E27E}"/>
+                <a16:creationId xmlns:a16="http://schemas.microsoft.com/office/drawing/2014/main" id="{55DDBA9E-910D-46DB-8E96-971B03EBE665}"/>
               </a:ext>
             </a:extLst>
           </p:cNvPr>
@@ -23899,7 +25762,7 @@
           <p:cNvPr id="2" name="">
             <a:extLst xmlns:a="http://schemas.openxmlformats.org/drawingml/2006/main">
               <a:ext uri="{FF2B5EF4-FFF2-40B4-BE49-F238E27FC236}">
-                <a16:creationId xmlns:a16="http://schemas.microsoft.com/office/drawing/2014/main" id="{18B0780E-F041-463A-AD05-7E5CA3809271}"/>
+                <a16:creationId xmlns:a16="http://schemas.microsoft.com/office/drawing/2014/main" id="{B102296C-1DC4-4CE2-9BED-AA2D89EA8EB0}"/>
               </a:ext>
             </a:extLst>
           </p:cNvPr>
@@ -23956,7 +25819,7 @@
           <p:cNvPr id="3" name="">
             <a:extLst xmlns:a="http://schemas.openxmlformats.org/drawingml/2006/main">
               <a:ext uri="{FF2B5EF4-FFF2-40B4-BE49-F238E27FC236}">
-                <a16:creationId xmlns:a16="http://schemas.microsoft.com/office/drawing/2014/main" id="{6279D028-CDED-48C8-9DB5-97A2FA0751FE}"/>
+                <a16:creationId xmlns:a16="http://schemas.microsoft.com/office/drawing/2014/main" id="{A81ED94E-F458-477C-A0ED-6DFD5FA1CF55}"/>
               </a:ext>
             </a:extLst>
           </p:cNvPr>
@@ -24013,7 +25876,7 @@
           <p:cNvPr id="4" name="">
             <a:extLst xmlns:a="http://schemas.openxmlformats.org/drawingml/2006/main">
               <a:ext uri="{FF2B5EF4-FFF2-40B4-BE49-F238E27FC236}">
-                <a16:creationId xmlns:a16="http://schemas.microsoft.com/office/drawing/2014/main" id="{CD219B69-4426-4F29-AC56-2007D5FDA809}"/>
+                <a16:creationId xmlns:a16="http://schemas.microsoft.com/office/drawing/2014/main" id="{73907B26-2DC6-4E6E-903F-62D5074E2DBE}"/>
               </a:ext>
             </a:extLst>
           </p:cNvPr>
@@ -24070,7 +25933,7 @@
           <p:cNvPr id="5" name="">
             <a:extLst xmlns:a="http://schemas.openxmlformats.org/drawingml/2006/main">
               <a:ext uri="{FF2B5EF4-FFF2-40B4-BE49-F238E27FC236}">
-                <a16:creationId xmlns:a16="http://schemas.microsoft.com/office/drawing/2014/main" id="{91B8CDEA-88A8-4817-99AA-7A1987A20598}"/>
+                <a16:creationId xmlns:a16="http://schemas.microsoft.com/office/drawing/2014/main" id="{C16FAAA9-AB02-4A93-8A0A-1D65588FAEB1}"/>
               </a:ext>
             </a:extLst>
           </p:cNvPr>
@@ -24127,7 +25990,7 @@
           <p:cNvPr id="6" name="">
             <a:extLst xmlns:a="http://schemas.openxmlformats.org/drawingml/2006/main">
               <a:ext uri="{FF2B5EF4-FFF2-40B4-BE49-F238E27FC236}">
-                <a16:creationId xmlns:a16="http://schemas.microsoft.com/office/drawing/2014/main" id="{215CAFA4-2FD9-440F-9BD8-DF52FE67902F}"/>
+                <a16:creationId xmlns:a16="http://schemas.microsoft.com/office/drawing/2014/main" id="{900D629A-11A3-4DF9-8AB5-440D2C6371FC}"/>
               </a:ext>
             </a:extLst>
           </p:cNvPr>
@@ -24157,7 +26020,7 @@
           <p:cNvPr id="7" name="">
             <a:extLst xmlns:a="http://schemas.openxmlformats.org/drawingml/2006/main">
               <a:ext uri="{FF2B5EF4-FFF2-40B4-BE49-F238E27FC236}">
-                <a16:creationId xmlns:a16="http://schemas.microsoft.com/office/drawing/2014/main" id="{9D4020EB-5000-4D5A-81C0-8C12630C3FA3}"/>
+                <a16:creationId xmlns:a16="http://schemas.microsoft.com/office/drawing/2014/main" id="{8A498DA5-1195-480B-B8BD-CC463F1CB1B2}"/>
               </a:ext>
             </a:extLst>
           </p:cNvPr>
@@ -24214,7 +26077,7 @@
           <p:cNvPr id="8" name="">
             <a:extLst xmlns:a="http://schemas.openxmlformats.org/drawingml/2006/main">
               <a:ext uri="{FF2B5EF4-FFF2-40B4-BE49-F238E27FC236}">
-                <a16:creationId xmlns:a16="http://schemas.microsoft.com/office/drawing/2014/main" id="{6D57DC98-2D1A-4281-A3EA-4D657A9CC992}"/>
+                <a16:creationId xmlns:a16="http://schemas.microsoft.com/office/drawing/2014/main" id="{2F6B6794-6C08-4728-90D6-B94EC9CB845A}"/>
               </a:ext>
             </a:extLst>
           </p:cNvPr>
@@ -24271,7 +26134,7 @@
           <p:cNvPr id="9" name="">
             <a:extLst xmlns:a="http://schemas.openxmlformats.org/drawingml/2006/main">
               <a:ext uri="{FF2B5EF4-FFF2-40B4-BE49-F238E27FC236}">
-                <a16:creationId xmlns:a16="http://schemas.microsoft.com/office/drawing/2014/main" id="{0930860F-CAF1-4E88-8310-8DDB047E3144}"/>
+                <a16:creationId xmlns:a16="http://schemas.microsoft.com/office/drawing/2014/main" id="{A674635C-8176-4CC9-B931-82DD2EE06FEF}"/>
               </a:ext>
             </a:extLst>
           </p:cNvPr>
@@ -24328,7 +26191,7 @@
           <p:cNvPr id="10" name="">
             <a:extLst xmlns:a="http://schemas.openxmlformats.org/drawingml/2006/main">
               <a:ext uri="{FF2B5EF4-FFF2-40B4-BE49-F238E27FC236}">
-                <a16:creationId xmlns:a16="http://schemas.microsoft.com/office/drawing/2014/main" id="{8D9D8BC7-2D8D-4634-AEAB-2C5A6748FBD2}"/>
+                <a16:creationId xmlns:a16="http://schemas.microsoft.com/office/drawing/2014/main" id="{4354514F-C7D9-4406-BC48-A6E0B2E898A1}"/>
               </a:ext>
             </a:extLst>
           </p:cNvPr>
@@ -24362,7 +26225,7 @@
           <p:cNvPr id="11" name="">
             <a:extLst xmlns:a="http://schemas.openxmlformats.org/drawingml/2006/main">
               <a:ext uri="{FF2B5EF4-FFF2-40B4-BE49-F238E27FC236}">
-                <a16:creationId xmlns:a16="http://schemas.microsoft.com/office/drawing/2014/main" id="{CB63F14C-1948-4BE5-8EFC-C1921066A3B6}"/>
+                <a16:creationId xmlns:a16="http://schemas.microsoft.com/office/drawing/2014/main" id="{06B40CF4-7828-44E3-A9D6-775F83082889}"/>
               </a:ext>
             </a:extLst>
           </p:cNvPr>
@@ -24419,7 +26282,7 @@
           <p:cNvPr id="12" name="">
             <a:extLst xmlns:a="http://schemas.openxmlformats.org/drawingml/2006/main">
               <a:ext uri="{FF2B5EF4-FFF2-40B4-BE49-F238E27FC236}">
-                <a16:creationId xmlns:a16="http://schemas.microsoft.com/office/drawing/2014/main" id="{3983A712-B3B9-4C83-B37A-4D990A1BDA77}"/>
+                <a16:creationId xmlns:a16="http://schemas.microsoft.com/office/drawing/2014/main" id="{21ABAF64-963C-42A8-B535-D80711987444}"/>
               </a:ext>
             </a:extLst>
           </p:cNvPr>
@@ -24499,7 +26362,7 @@
           <p:cNvPr id="13" name="">
             <a:extLst xmlns:a="http://schemas.openxmlformats.org/drawingml/2006/main">
               <a:ext uri="{FF2B5EF4-FFF2-40B4-BE49-F238E27FC236}">
-                <a16:creationId xmlns:a16="http://schemas.microsoft.com/office/drawing/2014/main" id="{506BDEFD-F694-49B3-9B25-7ACD42AC0597}"/>
+                <a16:creationId xmlns:a16="http://schemas.microsoft.com/office/drawing/2014/main" id="{8F9395AC-F887-4E63-BEAA-02C26564DFE6}"/>
               </a:ext>
             </a:extLst>
           </p:cNvPr>
@@ -24556,7 +26419,7 @@
           <p:cNvPr id="14" name="">
             <a:extLst xmlns:a="http://schemas.openxmlformats.org/drawingml/2006/main">
               <a:ext uri="{FF2B5EF4-FFF2-40B4-BE49-F238E27FC236}">
-                <a16:creationId xmlns:a16="http://schemas.microsoft.com/office/drawing/2014/main" id="{6554502A-B3C6-4A07-AF08-9CE138EBBD1C}"/>
+                <a16:creationId xmlns:a16="http://schemas.microsoft.com/office/drawing/2014/main" id="{7BC04F82-FEC8-468F-AAC1-A9EEBB27164D}"/>
               </a:ext>
             </a:extLst>
           </p:cNvPr>
@@ -24588,7 +26451,7 @@
           <p:cNvPr id="15" name="">
             <a:extLst xmlns:a="http://schemas.openxmlformats.org/drawingml/2006/main">
               <a:ext uri="{FF2B5EF4-FFF2-40B4-BE49-F238E27FC236}">
-                <a16:creationId xmlns:a16="http://schemas.microsoft.com/office/drawing/2014/main" id="{12BCAD4E-F344-4EF9-BA1F-77E081A552BC}"/>
+                <a16:creationId xmlns:a16="http://schemas.microsoft.com/office/drawing/2014/main" id="{249247BA-1DEA-4919-9C7D-32DEB20876B1}"/>
               </a:ext>
             </a:extLst>
           </p:cNvPr>
@@ -24668,7 +26531,7 @@
           <p:cNvPr id="16" name="">
             <a:extLst xmlns:a="http://schemas.openxmlformats.org/drawingml/2006/main">
               <a:ext uri="{FF2B5EF4-FFF2-40B4-BE49-F238E27FC236}">
-                <a16:creationId xmlns:a16="http://schemas.microsoft.com/office/drawing/2014/main" id="{C70377CD-C021-4381-A786-0EAC1C8BCCBD}"/>
+                <a16:creationId xmlns:a16="http://schemas.microsoft.com/office/drawing/2014/main" id="{6D92495F-497F-4E7C-9034-B84DB4063F87}"/>
               </a:ext>
             </a:extLst>
           </p:cNvPr>
@@ -24702,7 +26565,7 @@
           <p:cNvPr id="17" name="">
             <a:extLst xmlns:a="http://schemas.openxmlformats.org/drawingml/2006/main">
               <a:ext uri="{FF2B5EF4-FFF2-40B4-BE49-F238E27FC236}">
-                <a16:creationId xmlns:a16="http://schemas.microsoft.com/office/drawing/2014/main" id="{154314BA-38F9-4265-8794-A99E1EC1BB76}"/>
+                <a16:creationId xmlns:a16="http://schemas.microsoft.com/office/drawing/2014/main" id="{A51EF4B3-E03D-4268-B63F-1BF6E9E3A2FF}"/>
               </a:ext>
             </a:extLst>
           </p:cNvPr>
@@ -24759,7 +26622,7 @@
           <p:cNvPr id="18" name="">
             <a:extLst xmlns:a="http://schemas.openxmlformats.org/drawingml/2006/main">
               <a:ext uri="{FF2B5EF4-FFF2-40B4-BE49-F238E27FC236}">
-                <a16:creationId xmlns:a16="http://schemas.microsoft.com/office/drawing/2014/main" id="{646E08CD-31C8-4EC3-8168-7ADEDBD37B0B}"/>
+                <a16:creationId xmlns:a16="http://schemas.microsoft.com/office/drawing/2014/main" id="{65135081-F042-4314-9629-5D1C67DECAE1}"/>
               </a:ext>
             </a:extLst>
           </p:cNvPr>
@@ -24839,7 +26702,7 @@
           <p:cNvPr id="19" name="">
             <a:extLst xmlns:a="http://schemas.openxmlformats.org/drawingml/2006/main">
               <a:ext uri="{FF2B5EF4-FFF2-40B4-BE49-F238E27FC236}">
-                <a16:creationId xmlns:a16="http://schemas.microsoft.com/office/drawing/2014/main" id="{190BDAAD-B75F-4FC0-86CD-CA6CE1C6A472}"/>
+                <a16:creationId xmlns:a16="http://schemas.microsoft.com/office/drawing/2014/main" id="{E9F2BDE6-737E-48AB-8D0D-FFBDDAF099E8}"/>
               </a:ext>
             </a:extLst>
           </p:cNvPr>
@@ -24896,7 +26759,7 @@
           <p:cNvPr id="20" name="">
             <a:extLst xmlns:a="http://schemas.openxmlformats.org/drawingml/2006/main">
               <a:ext uri="{FF2B5EF4-FFF2-40B4-BE49-F238E27FC236}">
-                <a16:creationId xmlns:a16="http://schemas.microsoft.com/office/drawing/2014/main" id="{1A3788F4-EB87-40DA-99BE-4403DBC2AD02}"/>
+                <a16:creationId xmlns:a16="http://schemas.microsoft.com/office/drawing/2014/main" id="{A3855535-E3D4-4BC7-94BE-875B3F169AC5}"/>
               </a:ext>
             </a:extLst>
           </p:cNvPr>
@@ -24930,7 +26793,7 @@
           <p:cNvPr id="21" name="">
             <a:extLst xmlns:a="http://schemas.openxmlformats.org/drawingml/2006/main">
               <a:ext uri="{FF2B5EF4-FFF2-40B4-BE49-F238E27FC236}">
-                <a16:creationId xmlns:a16="http://schemas.microsoft.com/office/drawing/2014/main" id="{F89F011D-5A71-4DA3-AB95-55BC5644B4BA}"/>
+                <a16:creationId xmlns:a16="http://schemas.microsoft.com/office/drawing/2014/main" id="{D5086B73-459C-4FD8-9AE4-4F0C87AC1E8E}"/>
               </a:ext>
             </a:extLst>
           </p:cNvPr>
@@ -24987,7 +26850,7 @@
           <p:cNvPr id="22" name="">
             <a:extLst xmlns:a="http://schemas.openxmlformats.org/drawingml/2006/main">
               <a:ext uri="{FF2B5EF4-FFF2-40B4-BE49-F238E27FC236}">
-                <a16:creationId xmlns:a16="http://schemas.microsoft.com/office/drawing/2014/main" id="{768B7D63-F3E5-498F-8403-B2C7131C3C07}"/>
+                <a16:creationId xmlns:a16="http://schemas.microsoft.com/office/drawing/2014/main" id="{A33C7C45-BDBE-4439-AD4B-E356D8B6FB54}"/>
               </a:ext>
             </a:extLst>
           </p:cNvPr>
@@ -25067,7 +26930,7 @@
           <p:cNvPr id="23" name="">
             <a:extLst xmlns:a="http://schemas.openxmlformats.org/drawingml/2006/main">
               <a:ext uri="{FF2B5EF4-FFF2-40B4-BE49-F238E27FC236}">
-                <a16:creationId xmlns:a16="http://schemas.microsoft.com/office/drawing/2014/main" id="{3D194FAF-5624-4826-9DB9-77A247715A46}"/>
+                <a16:creationId xmlns:a16="http://schemas.microsoft.com/office/drawing/2014/main" id="{E0209A05-C6EC-418B-BFD8-7A6B382F2956}"/>
               </a:ext>
             </a:extLst>
           </p:cNvPr>
@@ -25124,7 +26987,7 @@
           <p:cNvPr id="24" name="">
             <a:extLst xmlns:a="http://schemas.openxmlformats.org/drawingml/2006/main">
               <a:ext uri="{FF2B5EF4-FFF2-40B4-BE49-F238E27FC236}">
-                <a16:creationId xmlns:a16="http://schemas.microsoft.com/office/drawing/2014/main" id="{DBCCA537-C198-4284-86CA-C3937C522705}"/>
+                <a16:creationId xmlns:a16="http://schemas.microsoft.com/office/drawing/2014/main" id="{30D99106-DF09-4C35-B92E-645837D1D823}"/>
               </a:ext>
             </a:extLst>
           </p:cNvPr>
@@ -25158,7 +27021,7 @@
           <p:cNvPr id="25" name="">
             <a:extLst xmlns:a="http://schemas.openxmlformats.org/drawingml/2006/main">
               <a:ext uri="{FF2B5EF4-FFF2-40B4-BE49-F238E27FC236}">
-                <a16:creationId xmlns:a16="http://schemas.microsoft.com/office/drawing/2014/main" id="{FB476849-7776-4E03-8970-7A4D46C3CAFD}"/>
+                <a16:creationId xmlns:a16="http://schemas.microsoft.com/office/drawing/2014/main" id="{073ABCAD-3057-48B7-82CA-6D5484D77A6C}"/>
               </a:ext>
             </a:extLst>
           </p:cNvPr>
@@ -25215,7 +27078,7 @@
           <p:cNvPr id="26" name="">
             <a:extLst xmlns:a="http://schemas.openxmlformats.org/drawingml/2006/main">
               <a:ext uri="{FF2B5EF4-FFF2-40B4-BE49-F238E27FC236}">
-                <a16:creationId xmlns:a16="http://schemas.microsoft.com/office/drawing/2014/main" id="{AAD732B5-20C3-4BAD-925A-D7061A1DC30D}"/>
+                <a16:creationId xmlns:a16="http://schemas.microsoft.com/office/drawing/2014/main" id="{25F9C17C-08CE-45E7-BD73-954699020761}"/>
               </a:ext>
             </a:extLst>
           </p:cNvPr>
@@ -25295,7 +27158,7 @@
           <p:cNvPr id="27" name="">
             <a:extLst xmlns:a="http://schemas.openxmlformats.org/drawingml/2006/main">
               <a:ext uri="{FF2B5EF4-FFF2-40B4-BE49-F238E27FC236}">
-                <a16:creationId xmlns:a16="http://schemas.microsoft.com/office/drawing/2014/main" id="{9ED2E529-C2C9-4AF1-AA6D-084800BBE7A5}"/>
+                <a16:creationId xmlns:a16="http://schemas.microsoft.com/office/drawing/2014/main" id="{F8C5F8D1-A331-4D93-BD42-0252AD207802}"/>
               </a:ext>
             </a:extLst>
           </p:cNvPr>
@@ -25352,7 +27215,7 @@
           <p:cNvPr id="28" name="">
             <a:extLst xmlns:a="http://schemas.openxmlformats.org/drawingml/2006/main">
               <a:ext uri="{FF2B5EF4-FFF2-40B4-BE49-F238E27FC236}">
-                <a16:creationId xmlns:a16="http://schemas.microsoft.com/office/drawing/2014/main" id="{0BB16861-1124-4C80-BF0F-508B4F63E220}"/>
+                <a16:creationId xmlns:a16="http://schemas.microsoft.com/office/drawing/2014/main" id="{BA6E891F-79E8-4F09-91F6-70DD9A5B5273}"/>
               </a:ext>
             </a:extLst>
           </p:cNvPr>
@@ -25384,7 +27247,7 @@
           <p:cNvPr id="29" name="">
             <a:extLst xmlns:a="http://schemas.openxmlformats.org/drawingml/2006/main">
               <a:ext uri="{FF2B5EF4-FFF2-40B4-BE49-F238E27FC236}">
-                <a16:creationId xmlns:a16="http://schemas.microsoft.com/office/drawing/2014/main" id="{1F050861-EE7F-4FB1-A96E-E1D468E64441}"/>
+                <a16:creationId xmlns:a16="http://schemas.microsoft.com/office/drawing/2014/main" id="{49CCCC64-CDD1-44BF-A81E-447AF9BAE11F}"/>
               </a:ext>
             </a:extLst>
           </p:cNvPr>
@@ -25441,7 +27304,7 @@
           <p:cNvPr id="30" name="">
             <a:extLst xmlns:a="http://schemas.openxmlformats.org/drawingml/2006/main">
               <a:ext uri="{FF2B5EF4-FFF2-40B4-BE49-F238E27FC236}">
-                <a16:creationId xmlns:a16="http://schemas.microsoft.com/office/drawing/2014/main" id="{FCF8CC7E-86F0-4351-A630-4C5D26BDB517}"/>
+                <a16:creationId xmlns:a16="http://schemas.microsoft.com/office/drawing/2014/main" id="{9715C5F5-681B-4D96-8F12-E7046670CF7A}"/>
               </a:ext>
             </a:extLst>
           </p:cNvPr>
@@ -25498,7 +27361,7 @@
           <p:cNvPr id="31" name="">
             <a:extLst xmlns:a="http://schemas.openxmlformats.org/drawingml/2006/main">
               <a:ext uri="{FF2B5EF4-FFF2-40B4-BE49-F238E27FC236}">
-                <a16:creationId xmlns:a16="http://schemas.microsoft.com/office/drawing/2014/main" id="{37D32062-4DD3-4C3F-9BE2-6FDD62ECAFA4}"/>
+                <a16:creationId xmlns:a16="http://schemas.microsoft.com/office/drawing/2014/main" id="{E119FD2A-1500-4797-947C-517B369D2326}"/>
               </a:ext>
             </a:extLst>
           </p:cNvPr>
@@ -25553,7 +27416,7 @@
     </p:spTree>
     <p:extLst>
       <p:ext uri="{BB962C8B-B14F-4D97-AF65-F5344CB8AC3E}">
-        <p14:creationId xmlns:p14="http://schemas.microsoft.com/office/powerpoint/2010/main" val="710782392"/>
+        <p14:creationId xmlns:p14="http://schemas.microsoft.com/office/powerpoint/2010/main" val="1521034268"/>
       </p:ext>
     </p:extLst>
   </p:cSld>

--- a/docs/presentation/NetraJyoti_AI_Capstone_Demo_Deck.pptx
+++ b/docs/presentation/NetraJyoti_AI_Capstone_Demo_Deck.pptx
@@ -2,25 +2,25 @@
 <file path=ppt/presentation.xml><?xml version="1.0" encoding="utf-8"?>
 <p:presentation xmlns:p="http://schemas.openxmlformats.org/presentationml/2006/main">
   <p:sldMasterIdLst>
-    <p:sldMasterId xmlns:r="http://schemas.openxmlformats.org/officeDocument/2006/relationships" id="2147483648" r:id="Rf75708d4ee7c40b0"/>
+    <p:sldMasterId xmlns:r="http://schemas.openxmlformats.org/officeDocument/2006/relationships" id="2147483648" r:id="Rebfff7aaa4604330"/>
   </p:sldMasterIdLst>
   <p:notesMasterIdLst>
-    <p:notesMasterId xmlns:r="http://schemas.openxmlformats.org/officeDocument/2006/relationships" r:id="R2aaa831b0ee548f1"/>
+    <p:notesMasterId xmlns:r="http://schemas.openxmlformats.org/officeDocument/2006/relationships" r:id="R17cbc4a0cb484f5f"/>
   </p:notesMasterIdLst>
   <p:sldIdLst>
-    <p:sldId xmlns:r="http://schemas.openxmlformats.org/officeDocument/2006/relationships" id="256" r:id="R1d85e9daa84f4402"/>
-    <p:sldId xmlns:r="http://schemas.openxmlformats.org/officeDocument/2006/relationships" id="257" r:id="Rfa1277a1dff34b05"/>
-    <p:sldId xmlns:r="http://schemas.openxmlformats.org/officeDocument/2006/relationships" id="258" r:id="R381cd9b12f6d45f2"/>
-    <p:sldId xmlns:r="http://schemas.openxmlformats.org/officeDocument/2006/relationships" id="259" r:id="Rb109f643c1d04018"/>
-    <p:sldId xmlns:r="http://schemas.openxmlformats.org/officeDocument/2006/relationships" id="260" r:id="R0ed5b814fd6248c1"/>
-    <p:sldId xmlns:r="http://schemas.openxmlformats.org/officeDocument/2006/relationships" id="261" r:id="R0a73cb2175884d47"/>
-    <p:sldId xmlns:r="http://schemas.openxmlformats.org/officeDocument/2006/relationships" id="262" r:id="Rb58e79eec0df43b0"/>
-    <p:sldId xmlns:r="http://schemas.openxmlformats.org/officeDocument/2006/relationships" id="263" r:id="R42c8ca5eeb2341a1"/>
-    <p:sldId xmlns:r="http://schemas.openxmlformats.org/officeDocument/2006/relationships" id="264" r:id="R2f6c2a407c6e4abb"/>
-    <p:sldId xmlns:r="http://schemas.openxmlformats.org/officeDocument/2006/relationships" id="265" r:id="Rbf5e19ddc8174c33"/>
-    <p:sldId xmlns:r="http://schemas.openxmlformats.org/officeDocument/2006/relationships" id="266" r:id="R32051bcea67b468a"/>
-    <p:sldId xmlns:r="http://schemas.openxmlformats.org/officeDocument/2006/relationships" id="267" r:id="R8b8fe513eb504769"/>
-    <p:sldId xmlns:r="http://schemas.openxmlformats.org/officeDocument/2006/relationships" id="268" r:id="R619865c3b3e748da"/>
+    <p:sldId xmlns:r="http://schemas.openxmlformats.org/officeDocument/2006/relationships" id="256" r:id="R66bc48ab8d6649c3"/>
+    <p:sldId xmlns:r="http://schemas.openxmlformats.org/officeDocument/2006/relationships" id="257" r:id="Rc1f232db6f934275"/>
+    <p:sldId xmlns:r="http://schemas.openxmlformats.org/officeDocument/2006/relationships" id="258" r:id="Rdf8eb1b232f54f96"/>
+    <p:sldId xmlns:r="http://schemas.openxmlformats.org/officeDocument/2006/relationships" id="259" r:id="R4e0ebd61a2f34b5d"/>
+    <p:sldId xmlns:r="http://schemas.openxmlformats.org/officeDocument/2006/relationships" id="260" r:id="R6fceee3e9ebb4190"/>
+    <p:sldId xmlns:r="http://schemas.openxmlformats.org/officeDocument/2006/relationships" id="261" r:id="Rb6b546378a774f89"/>
+    <p:sldId xmlns:r="http://schemas.openxmlformats.org/officeDocument/2006/relationships" id="262" r:id="R84b0536df2a84d5d"/>
+    <p:sldId xmlns:r="http://schemas.openxmlformats.org/officeDocument/2006/relationships" id="263" r:id="R8c1feadbed53458b"/>
+    <p:sldId xmlns:r="http://schemas.openxmlformats.org/officeDocument/2006/relationships" id="264" r:id="R9bdb86b3d67a492d"/>
+    <p:sldId xmlns:r="http://schemas.openxmlformats.org/officeDocument/2006/relationships" id="265" r:id="Rfb237b858c874014"/>
+    <p:sldId xmlns:r="http://schemas.openxmlformats.org/officeDocument/2006/relationships" id="266" r:id="R6cbb3c567cc24e67"/>
+    <p:sldId xmlns:r="http://schemas.openxmlformats.org/officeDocument/2006/relationships" id="267" r:id="R83273a8423014017"/>
+    <p:sldId xmlns:r="http://schemas.openxmlformats.org/officeDocument/2006/relationships" id="268" r:id="R7ec56c1f30084fba"/>
   </p:sldIdLst>
   <p:sldSz cx="12192000" cy="6858000"/>
   <p:notesSz cx="6858000" cy="9144000"/>
@@ -1334,7 +1334,7 @@
   </p:cSld>
   <p:clrMap bg1="lt1" tx1="dk1" bg2="lt2" tx2="dk2" accent1="accent1" accent2="accent2" accent3="accent3" accent4="accent4" accent5="accent5" accent6="accent6" hlink="hlink" folHlink="folHlink"/>
   <p:sldLayoutIdLst>
-    <p:sldLayoutId xmlns:r="http://schemas.openxmlformats.org/officeDocument/2006/relationships" id="2147483649" r:id="R0c1f2f9357024e49"/>
+    <p:sldLayoutId xmlns:r="http://schemas.openxmlformats.org/officeDocument/2006/relationships" id="2147483649" r:id="R71729827c22f4ef8"/>
   </p:sldLayoutIdLst>
   <p:txStyles>
     <p:titleStyle>
@@ -2437,7 +2437,7 @@
           <p:cNvPr id="12" name="">
             <a:extLst xmlns:a="http://schemas.openxmlformats.org/drawingml/2006/main">
               <a:ext uri="{FF2B5EF4-FFF2-40B4-BE49-F238E27FC236}">
-                <a16:creationId xmlns:a16="http://schemas.microsoft.com/office/drawing/2014/main" id="{3EC45FE9-929E-4369-BC72-E13F633B42F7}"/>
+                <a16:creationId xmlns:a16="http://schemas.microsoft.com/office/drawing/2014/main" id="{4111D248-69A8-4DEE-8F9A-006E0E320C72}"/>
               </a:ext>
             </a:extLst>
           </p:cNvPr>
@@ -2467,7 +2467,7 @@
           <p:cNvPr id="13" name="">
             <a:extLst xmlns:a="http://schemas.openxmlformats.org/drawingml/2006/main">
               <a:ext uri="{FF2B5EF4-FFF2-40B4-BE49-F238E27FC236}">
-                <a16:creationId xmlns:a16="http://schemas.microsoft.com/office/drawing/2014/main" id="{B733FBF3-6E07-4412-B202-6E884FD0EC64}"/>
+                <a16:creationId xmlns:a16="http://schemas.microsoft.com/office/drawing/2014/main" id="{47247C34-4A64-46F6-B47D-611BD39EA1E4}"/>
               </a:ext>
             </a:extLst>
           </p:cNvPr>
@@ -2497,7 +2497,7 @@
           <p:cNvPr id="14" name="">
             <a:extLst xmlns:a="http://schemas.openxmlformats.org/drawingml/2006/main">
               <a:ext uri="{FF2B5EF4-FFF2-40B4-BE49-F238E27FC236}">
-                <a16:creationId xmlns:a16="http://schemas.microsoft.com/office/drawing/2014/main" id="{B2DD5855-FE6D-4166-8F8A-0A5B7E4CC85E}"/>
+                <a16:creationId xmlns:a16="http://schemas.microsoft.com/office/drawing/2014/main" id="{0DCD1AE7-81D0-4CD2-8E89-0ED284E34449}"/>
               </a:ext>
             </a:extLst>
           </p:cNvPr>
@@ -2527,7 +2527,7 @@
           <p:cNvPr id="15" name="">
             <a:extLst xmlns:a="http://schemas.openxmlformats.org/drawingml/2006/main">
               <a:ext uri="{FF2B5EF4-FFF2-40B4-BE49-F238E27FC236}">
-                <a16:creationId xmlns:a16="http://schemas.microsoft.com/office/drawing/2014/main" id="{8E45BAFA-1F15-45B2-A800-3A948E5B5722}"/>
+                <a16:creationId xmlns:a16="http://schemas.microsoft.com/office/drawing/2014/main" id="{EF1A34FA-4A86-4222-9F0D-C2C5E4E4ED50}"/>
               </a:ext>
             </a:extLst>
           </p:cNvPr>
@@ -2584,7 +2584,7 @@
           <p:cNvPr id="16" name="">
             <a:extLst xmlns:a="http://schemas.openxmlformats.org/drawingml/2006/main">
               <a:ext uri="{FF2B5EF4-FFF2-40B4-BE49-F238E27FC236}">
-                <a16:creationId xmlns:a16="http://schemas.microsoft.com/office/drawing/2014/main" id="{43C2B640-615D-4B55-88EA-E64A9E0B736C}"/>
+                <a16:creationId xmlns:a16="http://schemas.microsoft.com/office/drawing/2014/main" id="{B66F25E2-F812-4D62-AF82-1CA9F8123A5F}"/>
               </a:ext>
             </a:extLst>
           </p:cNvPr>
@@ -2664,7 +2664,7 @@
           <p:cNvPr id="17" name="">
             <a:extLst xmlns:a="http://schemas.openxmlformats.org/drawingml/2006/main">
               <a:ext uri="{FF2B5EF4-FFF2-40B4-BE49-F238E27FC236}">
-                <a16:creationId xmlns:a16="http://schemas.microsoft.com/office/drawing/2014/main" id="{82A9AB05-00EB-4167-A9DD-0D01E974FA04}"/>
+                <a16:creationId xmlns:a16="http://schemas.microsoft.com/office/drawing/2014/main" id="{80274F59-3C43-42E8-AA85-A195C551F7C5}"/>
               </a:ext>
             </a:extLst>
           </p:cNvPr>
@@ -2694,7 +2694,7 @@
           <p:cNvPr id="18" name="">
             <a:extLst xmlns:a="http://schemas.openxmlformats.org/drawingml/2006/main">
               <a:ext uri="{FF2B5EF4-FFF2-40B4-BE49-F238E27FC236}">
-                <a16:creationId xmlns:a16="http://schemas.microsoft.com/office/drawing/2014/main" id="{E47D6B2A-0413-48E1-AFFB-C08918341641}"/>
+                <a16:creationId xmlns:a16="http://schemas.microsoft.com/office/drawing/2014/main" id="{1514DC4E-D581-4411-B2FE-66F67D0803B3}"/>
               </a:ext>
             </a:extLst>
           </p:cNvPr>
@@ -2706,7 +2706,7 @@
         <p:spPr>
           <a:xfrm xmlns:a="http://schemas.openxmlformats.org/drawingml/2006/main">
             <a:off x="704850" y="3352800"/>
-            <a:ext cx="2667000" cy="619125"/>
+            <a:ext cx="2952750" cy="619125"/>
           </a:xfrm>
           <a:prstGeom xmlns:a="http://schemas.openxmlformats.org/drawingml/2006/main" prst="rect">
             <a:avLst/>
@@ -2741,7 +2741,7 @@
                 <a:ea typeface="Arial"/>
                 <a:cs typeface="Arial"/>
               </a:rPr>
-              <a:t>Voice and text access</a:t>
+              <a:t>Clear Bengali guidance</a:t>
             </a:r>
           </a:p>
           <a:p xmlns:a="http://schemas.openxmlformats.org/drawingml/2006/main">
@@ -2764,7 +2764,7 @@
                 <a:ea typeface="Arial"/>
                 <a:cs typeface="Arial"/>
               </a:rPr>
-              <a:t>with a fixed safety route</a:t>
+              <a:t>for your next eye-care step</a:t>
             </a:r>
           </a:p>
         </p:txBody>
@@ -2774,7 +2774,7 @@
           <p:cNvPr id="19" name="">
             <a:extLst xmlns:a="http://schemas.openxmlformats.org/drawingml/2006/main">
               <a:ext uri="{FF2B5EF4-FFF2-40B4-BE49-F238E27FC236}">
-                <a16:creationId xmlns:a16="http://schemas.microsoft.com/office/drawing/2014/main" id="{53764A19-B9E1-4404-9E62-22AF753EE05F}"/>
+                <a16:creationId xmlns:a16="http://schemas.microsoft.com/office/drawing/2014/main" id="{79A964B3-AA9A-4177-B4FC-8EF2DD3CBD02}"/>
               </a:ext>
             </a:extLst>
           </p:cNvPr>
@@ -2786,7 +2786,7 @@
         <p:spPr>
           <a:xfrm xmlns:a="http://schemas.openxmlformats.org/drawingml/2006/main">
             <a:off x="704850" y="5715000"/>
-            <a:ext cx="2667000" cy="457200"/>
+            <a:ext cx="2857500" cy="457200"/>
           </a:xfrm>
           <a:prstGeom xmlns:a="http://schemas.openxmlformats.org/drawingml/2006/main" prst="rect">
             <a:avLst/>
@@ -2854,7 +2854,7 @@
           <p:cNvPr id="20" name="">
             <a:extLst xmlns:a="http://schemas.openxmlformats.org/drawingml/2006/main">
               <a:ext uri="{FF2B5EF4-FFF2-40B4-BE49-F238E27FC236}">
-                <a16:creationId xmlns:a16="http://schemas.microsoft.com/office/drawing/2014/main" id="{39FB8633-CFF7-41C0-AC7A-C7698BBA9F95}"/>
+                <a16:creationId xmlns:a16="http://schemas.microsoft.com/office/drawing/2014/main" id="{1A39089A-EC06-452A-BA3F-B31746CC34DE}"/>
               </a:ext>
             </a:extLst>
           </p:cNvPr>
@@ -2911,7 +2911,7 @@
           <p:cNvPr id="21" name="">
             <a:extLst xmlns:a="http://schemas.openxmlformats.org/drawingml/2006/main">
               <a:ext uri="{FF2B5EF4-FFF2-40B4-BE49-F238E27FC236}">
-                <a16:creationId xmlns:a16="http://schemas.microsoft.com/office/drawing/2014/main" id="{07A4D393-200C-486E-8BEF-6D329C3AD57D}"/>
+                <a16:creationId xmlns:a16="http://schemas.microsoft.com/office/drawing/2014/main" id="{5EE365DB-6857-4576-81CC-B173DE0DF910}"/>
               </a:ext>
             </a:extLst>
           </p:cNvPr>
@@ -2968,7 +2968,7 @@
           <p:cNvPr id="22" name="">
             <a:extLst xmlns:a="http://schemas.openxmlformats.org/drawingml/2006/main">
               <a:ext uri="{FF2B5EF4-FFF2-40B4-BE49-F238E27FC236}">
-                <a16:creationId xmlns:a16="http://schemas.microsoft.com/office/drawing/2014/main" id="{589D2D31-11F1-4568-A40B-C1AF6963E729}"/>
+                <a16:creationId xmlns:a16="http://schemas.microsoft.com/office/drawing/2014/main" id="{F1525FAB-5963-4EF7-99CE-9D8FCE2904D6}"/>
               </a:ext>
             </a:extLst>
           </p:cNvPr>
@@ -3015,7 +3015,7 @@
                 <a:ea typeface="Arial"/>
                 <a:cs typeface="Arial"/>
               </a:rPr>
-              <a:t>Bengali voice or text</a:t>
+              <a:t>Fixed Bengali selections</a:t>
             </a:r>
           </a:p>
         </p:txBody>
@@ -3025,7 +3025,7 @@
           <p:cNvPr id="23" name="">
             <a:extLst xmlns:a="http://schemas.openxmlformats.org/drawingml/2006/main">
               <a:ext uri="{FF2B5EF4-FFF2-40B4-BE49-F238E27FC236}">
-                <a16:creationId xmlns:a16="http://schemas.microsoft.com/office/drawing/2014/main" id="{CBEE1D33-BF5D-4CAA-A035-0AAEAA7C3EFA}"/>
+                <a16:creationId xmlns:a16="http://schemas.microsoft.com/office/drawing/2014/main" id="{41C791DE-9F0D-4E4A-8D4A-5F46B85FC542}"/>
               </a:ext>
             </a:extLst>
           </p:cNvPr>
@@ -3055,7 +3055,7 @@
           <p:cNvPr id="24" name="">
             <a:extLst xmlns:a="http://schemas.openxmlformats.org/drawingml/2006/main">
               <a:ext uri="{FF2B5EF4-FFF2-40B4-BE49-F238E27FC236}">
-                <a16:creationId xmlns:a16="http://schemas.microsoft.com/office/drawing/2014/main" id="{AF4D1115-108B-4A13-A4A2-644416BA2173}"/>
+                <a16:creationId xmlns:a16="http://schemas.microsoft.com/office/drawing/2014/main" id="{4095C6DC-B15A-4914-9EBD-680767F85372}"/>
               </a:ext>
             </a:extLst>
           </p:cNvPr>
@@ -3112,7 +3112,7 @@
           <p:cNvPr id="25" name="">
             <a:extLst xmlns:a="http://schemas.openxmlformats.org/drawingml/2006/main">
               <a:ext uri="{FF2B5EF4-FFF2-40B4-BE49-F238E27FC236}">
-                <a16:creationId xmlns:a16="http://schemas.microsoft.com/office/drawing/2014/main" id="{684A5E74-13C4-483E-B1A8-09E2C98BAF22}"/>
+                <a16:creationId xmlns:a16="http://schemas.microsoft.com/office/drawing/2014/main" id="{8918F76F-4A54-4968-A685-7355FFF0C594}"/>
               </a:ext>
             </a:extLst>
           </p:cNvPr>
@@ -3142,7 +3142,7 @@
           <p:cNvPr id="26" name="">
             <a:extLst xmlns:a="http://schemas.openxmlformats.org/drawingml/2006/main">
               <a:ext uri="{FF2B5EF4-FFF2-40B4-BE49-F238E27FC236}">
-                <a16:creationId xmlns:a16="http://schemas.microsoft.com/office/drawing/2014/main" id="{0C778DD6-3F2C-4CDE-BB63-7B117307920A}"/>
+                <a16:creationId xmlns:a16="http://schemas.microsoft.com/office/drawing/2014/main" id="{0CE05A5C-16C4-4697-8ACE-4CC5D5463A0C}"/>
               </a:ext>
             </a:extLst>
           </p:cNvPr>
@@ -3221,7 +3221,7 @@
           <p:cNvPr id="29" name="">
             <a:extLst xmlns:a="http://schemas.openxmlformats.org/drawingml/2006/main">
               <a:ext uri="{FF2B5EF4-FFF2-40B4-BE49-F238E27FC236}">
-                <a16:creationId xmlns:a16="http://schemas.microsoft.com/office/drawing/2014/main" id="{F5F5C9FF-8B10-4C16-B0EC-E6805985CC91}"/>
+                <a16:creationId xmlns:a16="http://schemas.microsoft.com/office/drawing/2014/main" id="{1D949BEC-D133-42F3-A7FD-B048A4506448}"/>
               </a:ext>
             </a:extLst>
           </p:cNvPr>
@@ -3251,7 +3251,7 @@
           <p:cNvPr id="2" name="">
             <a:extLst xmlns:a="http://schemas.openxmlformats.org/drawingml/2006/main">
               <a:ext uri="{FF2B5EF4-FFF2-40B4-BE49-F238E27FC236}">
-                <a16:creationId xmlns:a16="http://schemas.microsoft.com/office/drawing/2014/main" id="{C35AF737-13EC-4FB1-BD52-B3DB7D474482}"/>
+                <a16:creationId xmlns:a16="http://schemas.microsoft.com/office/drawing/2014/main" id="{8ECB2678-3816-435A-A209-FD65E0AC9B2D}"/>
               </a:ext>
             </a:extLst>
           </p:cNvPr>
@@ -3308,7 +3308,7 @@
           <p:cNvPr id="3" name="">
             <a:extLst xmlns:a="http://schemas.openxmlformats.org/drawingml/2006/main">
               <a:ext uri="{FF2B5EF4-FFF2-40B4-BE49-F238E27FC236}">
-                <a16:creationId xmlns:a16="http://schemas.microsoft.com/office/drawing/2014/main" id="{08ADA32A-B9D9-4CA3-B56C-207524321E03}"/>
+                <a16:creationId xmlns:a16="http://schemas.microsoft.com/office/drawing/2014/main" id="{7745FF17-9074-48AE-BACB-68C67DF6ABBF}"/>
               </a:ext>
             </a:extLst>
           </p:cNvPr>
@@ -3365,7 +3365,7 @@
           <p:cNvPr id="4" name="">
             <a:extLst xmlns:a="http://schemas.openxmlformats.org/drawingml/2006/main">
               <a:ext uri="{FF2B5EF4-FFF2-40B4-BE49-F238E27FC236}">
-                <a16:creationId xmlns:a16="http://schemas.microsoft.com/office/drawing/2014/main" id="{A19C072D-FFB0-4024-8714-F3F5A1F08D28}"/>
+                <a16:creationId xmlns:a16="http://schemas.microsoft.com/office/drawing/2014/main" id="{9CBD2893-DF95-4725-BA67-04EADB1506A4}"/>
               </a:ext>
             </a:extLst>
           </p:cNvPr>
@@ -3422,7 +3422,7 @@
           <p:cNvPr id="5" name="">
             <a:extLst xmlns:a="http://schemas.openxmlformats.org/drawingml/2006/main">
               <a:ext uri="{FF2B5EF4-FFF2-40B4-BE49-F238E27FC236}">
-                <a16:creationId xmlns:a16="http://schemas.microsoft.com/office/drawing/2014/main" id="{E9ED07BD-9BC1-4C8B-B704-BF5D9F3DDFA5}"/>
+                <a16:creationId xmlns:a16="http://schemas.microsoft.com/office/drawing/2014/main" id="{A0B88717-46D4-4FC6-8285-A23A286622AB}"/>
               </a:ext>
             </a:extLst>
           </p:cNvPr>
@@ -3479,7 +3479,7 @@
           <p:cNvPr id="6" name="">
             <a:extLst xmlns:a="http://schemas.openxmlformats.org/drawingml/2006/main">
               <a:ext uri="{FF2B5EF4-FFF2-40B4-BE49-F238E27FC236}">
-                <a16:creationId xmlns:a16="http://schemas.microsoft.com/office/drawing/2014/main" id="{72247874-A5A8-4E98-B9E3-4725AAF9787F}"/>
+                <a16:creationId xmlns:a16="http://schemas.microsoft.com/office/drawing/2014/main" id="{1D3F69CE-BEDE-4589-B648-E65CBD0CB15C}"/>
               </a:ext>
             </a:extLst>
           </p:cNvPr>
@@ -3509,7 +3509,7 @@
           <p:cNvPr id="7" name="">
             <a:extLst xmlns:a="http://schemas.openxmlformats.org/drawingml/2006/main">
               <a:ext uri="{FF2B5EF4-FFF2-40B4-BE49-F238E27FC236}">
-                <a16:creationId xmlns:a16="http://schemas.microsoft.com/office/drawing/2014/main" id="{2E22E02B-D2D9-496E-916F-7887477AB85D}"/>
+                <a16:creationId xmlns:a16="http://schemas.microsoft.com/office/drawing/2014/main" id="{DA923E83-98F7-49CE-AB1C-9D9C205D8C94}"/>
               </a:ext>
             </a:extLst>
           </p:cNvPr>
@@ -3543,7 +3543,7 @@
           <p:cNvPr id="8" name="">
             <a:extLst xmlns:a="http://schemas.openxmlformats.org/drawingml/2006/main">
               <a:ext uri="{FF2B5EF4-FFF2-40B4-BE49-F238E27FC236}">
-                <a16:creationId xmlns:a16="http://schemas.microsoft.com/office/drawing/2014/main" id="{58B39B4D-27D5-43DB-AB17-A838C603960D}"/>
+                <a16:creationId xmlns:a16="http://schemas.microsoft.com/office/drawing/2014/main" id="{A6939C80-A517-4142-9939-37C073BE36D3}"/>
               </a:ext>
             </a:extLst>
           </p:cNvPr>
@@ -3575,7 +3575,7 @@
           <p:cNvPr id="9" name="">
             <a:extLst xmlns:a="http://schemas.openxmlformats.org/drawingml/2006/main">
               <a:ext uri="{FF2B5EF4-FFF2-40B4-BE49-F238E27FC236}">
-                <a16:creationId xmlns:a16="http://schemas.microsoft.com/office/drawing/2014/main" id="{1A7127CF-3163-4A20-BEB7-BC6DDEBA7827}"/>
+                <a16:creationId xmlns:a16="http://schemas.microsoft.com/office/drawing/2014/main" id="{464B95B5-5C27-44E2-A365-24F018D055A2}"/>
               </a:ext>
             </a:extLst>
           </p:cNvPr>
@@ -3632,7 +3632,7 @@
           <p:cNvPr id="10" name="">
             <a:extLst xmlns:a="http://schemas.openxmlformats.org/drawingml/2006/main">
               <a:ext uri="{FF2B5EF4-FFF2-40B4-BE49-F238E27FC236}">
-                <a16:creationId xmlns:a16="http://schemas.microsoft.com/office/drawing/2014/main" id="{63E5101E-96E8-416F-A6AD-85CB0324BAF0}"/>
+                <a16:creationId xmlns:a16="http://schemas.microsoft.com/office/drawing/2014/main" id="{82B8A059-20EB-43F4-AF72-2C59BA234804}"/>
               </a:ext>
             </a:extLst>
           </p:cNvPr>
@@ -3689,7 +3689,7 @@
           <p:cNvPr id="11" name="">
             <a:extLst xmlns:a="http://schemas.openxmlformats.org/drawingml/2006/main">
               <a:ext uri="{FF2B5EF4-FFF2-40B4-BE49-F238E27FC236}">
-                <a16:creationId xmlns:a16="http://schemas.microsoft.com/office/drawing/2014/main" id="{3EFBF571-659C-47E7-AF8C-95C4A2B653F5}"/>
+                <a16:creationId xmlns:a16="http://schemas.microsoft.com/office/drawing/2014/main" id="{EA681AB9-C785-483F-8F84-F208057DF416}"/>
               </a:ext>
             </a:extLst>
           </p:cNvPr>
@@ -3746,7 +3746,7 @@
           <p:cNvPr id="12" name="">
             <a:extLst xmlns:a="http://schemas.openxmlformats.org/drawingml/2006/main">
               <a:ext uri="{FF2B5EF4-FFF2-40B4-BE49-F238E27FC236}">
-                <a16:creationId xmlns:a16="http://schemas.microsoft.com/office/drawing/2014/main" id="{B56A4123-4C31-4D45-BA77-4F56A86C2436}"/>
+                <a16:creationId xmlns:a16="http://schemas.microsoft.com/office/drawing/2014/main" id="{EEFDDBA5-80CE-4DB6-917C-A3D95514D9FD}"/>
               </a:ext>
             </a:extLst>
           </p:cNvPr>
@@ -3803,7 +3803,7 @@
           <p:cNvPr id="13" name="">
             <a:extLst xmlns:a="http://schemas.openxmlformats.org/drawingml/2006/main">
               <a:ext uri="{FF2B5EF4-FFF2-40B4-BE49-F238E27FC236}">
-                <a16:creationId xmlns:a16="http://schemas.microsoft.com/office/drawing/2014/main" id="{76BA06DD-57C7-4EF4-8362-2CA709632DEC}"/>
+                <a16:creationId xmlns:a16="http://schemas.microsoft.com/office/drawing/2014/main" id="{64B61711-21CA-41BB-9FB3-2710F476E74B}"/>
               </a:ext>
             </a:extLst>
           </p:cNvPr>
@@ -3837,7 +3837,7 @@
           <p:cNvPr id="14" name="">
             <a:extLst xmlns:a="http://schemas.openxmlformats.org/drawingml/2006/main">
               <a:ext uri="{FF2B5EF4-FFF2-40B4-BE49-F238E27FC236}">
-                <a16:creationId xmlns:a16="http://schemas.microsoft.com/office/drawing/2014/main" id="{7BF4832C-3EC7-4C63-A78A-9F96917AD0FC}"/>
+                <a16:creationId xmlns:a16="http://schemas.microsoft.com/office/drawing/2014/main" id="{1F8A9B45-7783-4C33-AEC9-1ADD8F819BBF}"/>
               </a:ext>
             </a:extLst>
           </p:cNvPr>
@@ -3869,7 +3869,7 @@
           <p:cNvPr id="15" name="">
             <a:extLst xmlns:a="http://schemas.openxmlformats.org/drawingml/2006/main">
               <a:ext uri="{FF2B5EF4-FFF2-40B4-BE49-F238E27FC236}">
-                <a16:creationId xmlns:a16="http://schemas.microsoft.com/office/drawing/2014/main" id="{ACC62658-BBC3-40F9-8F66-F23BFFD32E1C}"/>
+                <a16:creationId xmlns:a16="http://schemas.microsoft.com/office/drawing/2014/main" id="{4F26B981-F638-4896-8F53-B496A638D039}"/>
               </a:ext>
             </a:extLst>
           </p:cNvPr>
@@ -3926,7 +3926,7 @@
           <p:cNvPr id="16" name="">
             <a:extLst xmlns:a="http://schemas.openxmlformats.org/drawingml/2006/main">
               <a:ext uri="{FF2B5EF4-FFF2-40B4-BE49-F238E27FC236}">
-                <a16:creationId xmlns:a16="http://schemas.microsoft.com/office/drawing/2014/main" id="{FA48AC3A-7C4C-4DCA-9467-7758430F08D3}"/>
+                <a16:creationId xmlns:a16="http://schemas.microsoft.com/office/drawing/2014/main" id="{29374AAA-CAFC-4067-BEC3-4D6F106ECCF2}"/>
               </a:ext>
             </a:extLst>
           </p:cNvPr>
@@ -3983,7 +3983,7 @@
           <p:cNvPr id="17" name="">
             <a:extLst xmlns:a="http://schemas.openxmlformats.org/drawingml/2006/main">
               <a:ext uri="{FF2B5EF4-FFF2-40B4-BE49-F238E27FC236}">
-                <a16:creationId xmlns:a16="http://schemas.microsoft.com/office/drawing/2014/main" id="{8BBCF0BF-A7E2-48BF-86FA-270137CA492D}"/>
+                <a16:creationId xmlns:a16="http://schemas.microsoft.com/office/drawing/2014/main" id="{61AB6813-FA93-4B4F-B348-8AD6B21C23E6}"/>
               </a:ext>
             </a:extLst>
           </p:cNvPr>
@@ -4040,7 +4040,7 @@
           <p:cNvPr id="18" name="">
             <a:extLst xmlns:a="http://schemas.openxmlformats.org/drawingml/2006/main">
               <a:ext uri="{FF2B5EF4-FFF2-40B4-BE49-F238E27FC236}">
-                <a16:creationId xmlns:a16="http://schemas.microsoft.com/office/drawing/2014/main" id="{4F4130B3-2ABC-41C3-A0E5-B2DFA7C7F477}"/>
+                <a16:creationId xmlns:a16="http://schemas.microsoft.com/office/drawing/2014/main" id="{B3C4C9AE-A7F4-46DA-ABC0-A8A9093D668B}"/>
               </a:ext>
             </a:extLst>
           </p:cNvPr>
@@ -4097,7 +4097,7 @@
           <p:cNvPr id="19" name="">
             <a:extLst xmlns:a="http://schemas.openxmlformats.org/drawingml/2006/main">
               <a:ext uri="{FF2B5EF4-FFF2-40B4-BE49-F238E27FC236}">
-                <a16:creationId xmlns:a16="http://schemas.microsoft.com/office/drawing/2014/main" id="{E7B42ACA-219C-4917-9B25-6A20F83D2BC6}"/>
+                <a16:creationId xmlns:a16="http://schemas.microsoft.com/office/drawing/2014/main" id="{826000EB-EC2B-4F37-9E2E-6A1547099154}"/>
               </a:ext>
             </a:extLst>
           </p:cNvPr>
@@ -4131,7 +4131,7 @@
           <p:cNvPr id="20" name="">
             <a:extLst xmlns:a="http://schemas.openxmlformats.org/drawingml/2006/main">
               <a:ext uri="{FF2B5EF4-FFF2-40B4-BE49-F238E27FC236}">
-                <a16:creationId xmlns:a16="http://schemas.microsoft.com/office/drawing/2014/main" id="{346FC3ED-7C18-44B3-8C70-CF49328BE00B}"/>
+                <a16:creationId xmlns:a16="http://schemas.microsoft.com/office/drawing/2014/main" id="{487466EA-88A8-4A77-9444-993C9B81E437}"/>
               </a:ext>
             </a:extLst>
           </p:cNvPr>
@@ -4163,7 +4163,7 @@
           <p:cNvPr id="21" name="">
             <a:extLst xmlns:a="http://schemas.openxmlformats.org/drawingml/2006/main">
               <a:ext uri="{FF2B5EF4-FFF2-40B4-BE49-F238E27FC236}">
-                <a16:creationId xmlns:a16="http://schemas.microsoft.com/office/drawing/2014/main" id="{65D27B71-DE06-4A3E-906C-0050DB0E5869}"/>
+                <a16:creationId xmlns:a16="http://schemas.microsoft.com/office/drawing/2014/main" id="{20F43CF3-B9CB-48A5-949B-99F59FA9B738}"/>
               </a:ext>
             </a:extLst>
           </p:cNvPr>
@@ -4220,7 +4220,7 @@
           <p:cNvPr id="22" name="">
             <a:extLst xmlns:a="http://schemas.openxmlformats.org/drawingml/2006/main">
               <a:ext uri="{FF2B5EF4-FFF2-40B4-BE49-F238E27FC236}">
-                <a16:creationId xmlns:a16="http://schemas.microsoft.com/office/drawing/2014/main" id="{AD2571AD-BEEA-4DA3-A41C-484CE0ED601D}"/>
+                <a16:creationId xmlns:a16="http://schemas.microsoft.com/office/drawing/2014/main" id="{ADB259F6-3983-4CFD-9E0B-C6A99B2E7DF0}"/>
               </a:ext>
             </a:extLst>
           </p:cNvPr>
@@ -4277,7 +4277,7 @@
           <p:cNvPr id="23" name="">
             <a:extLst xmlns:a="http://schemas.openxmlformats.org/drawingml/2006/main">
               <a:ext uri="{FF2B5EF4-FFF2-40B4-BE49-F238E27FC236}">
-                <a16:creationId xmlns:a16="http://schemas.microsoft.com/office/drawing/2014/main" id="{8E35905E-1765-4EB3-8027-C8780788702B}"/>
+                <a16:creationId xmlns:a16="http://schemas.microsoft.com/office/drawing/2014/main" id="{05601F4F-F6D5-4129-8E28-5229CABD88D8}"/>
               </a:ext>
             </a:extLst>
           </p:cNvPr>
@@ -4334,7 +4334,7 @@
           <p:cNvPr id="24" name="">
             <a:extLst xmlns:a="http://schemas.openxmlformats.org/drawingml/2006/main">
               <a:ext uri="{FF2B5EF4-FFF2-40B4-BE49-F238E27FC236}">
-                <a16:creationId xmlns:a16="http://schemas.microsoft.com/office/drawing/2014/main" id="{5ED6821C-1675-45AD-88EC-7257C39459C7}"/>
+                <a16:creationId xmlns:a16="http://schemas.microsoft.com/office/drawing/2014/main" id="{AD31C90F-4031-48F3-923A-94F2DE876ECC}"/>
               </a:ext>
             </a:extLst>
           </p:cNvPr>
@@ -4391,7 +4391,7 @@
           <p:cNvPr id="25" name="">
             <a:extLst xmlns:a="http://schemas.openxmlformats.org/drawingml/2006/main">
               <a:ext uri="{FF2B5EF4-FFF2-40B4-BE49-F238E27FC236}">
-                <a16:creationId xmlns:a16="http://schemas.microsoft.com/office/drawing/2014/main" id="{32700AB2-7DD9-4C95-9F08-7E50AE09F23F}"/>
+                <a16:creationId xmlns:a16="http://schemas.microsoft.com/office/drawing/2014/main" id="{045E35C9-F222-4A56-A654-6348A32E5A8C}"/>
               </a:ext>
             </a:extLst>
           </p:cNvPr>
@@ -4423,7 +4423,7 @@
           <p:cNvPr id="26" name="">
             <a:extLst xmlns:a="http://schemas.openxmlformats.org/drawingml/2006/main">
               <a:ext uri="{FF2B5EF4-FFF2-40B4-BE49-F238E27FC236}">
-                <a16:creationId xmlns:a16="http://schemas.microsoft.com/office/drawing/2014/main" id="{082C6631-162B-406F-BF50-2519975816C1}"/>
+                <a16:creationId xmlns:a16="http://schemas.microsoft.com/office/drawing/2014/main" id="{5BC5792E-D86D-4DC3-93F1-7C038F25CAFA}"/>
               </a:ext>
             </a:extLst>
           </p:cNvPr>
@@ -4480,7 +4480,7 @@
           <p:cNvPr id="27" name="">
             <a:extLst xmlns:a="http://schemas.openxmlformats.org/drawingml/2006/main">
               <a:ext uri="{FF2B5EF4-FFF2-40B4-BE49-F238E27FC236}">
-                <a16:creationId xmlns:a16="http://schemas.microsoft.com/office/drawing/2014/main" id="{494C142E-FB2D-4127-B5B6-5F0BF17AE02C}"/>
+                <a16:creationId xmlns:a16="http://schemas.microsoft.com/office/drawing/2014/main" id="{53BD486C-65F4-4445-B764-D7A27DB9E587}"/>
               </a:ext>
             </a:extLst>
           </p:cNvPr>
@@ -4537,7 +4537,7 @@
           <p:cNvPr id="28" name="">
             <a:extLst xmlns:a="http://schemas.openxmlformats.org/drawingml/2006/main">
               <a:ext uri="{FF2B5EF4-FFF2-40B4-BE49-F238E27FC236}">
-                <a16:creationId xmlns:a16="http://schemas.microsoft.com/office/drawing/2014/main" id="{68FEBAF1-D49E-4C67-874A-5F8977FF4397}"/>
+                <a16:creationId xmlns:a16="http://schemas.microsoft.com/office/drawing/2014/main" id="{E8D36233-3083-4722-977A-44E722EA2C6E}"/>
               </a:ext>
             </a:extLst>
           </p:cNvPr>
@@ -4592,7 +4592,7 @@
     </p:spTree>
     <p:extLst>
       <p:ext uri="{BB962C8B-B14F-4D97-AF65-F5344CB8AC3E}">
-        <p14:creationId xmlns:p14="http://schemas.microsoft.com/office/powerpoint/2010/main" val="10996520"/>
+        <p14:creationId xmlns:p14="http://schemas.microsoft.com/office/powerpoint/2010/main" val="1976903896"/>
       </p:ext>
     </p:extLst>
   </p:cSld>
@@ -4616,7 +4616,7 @@
           <p:cNvPr id="23" name="">
             <a:extLst xmlns:a="http://schemas.openxmlformats.org/drawingml/2006/main">
               <a:ext uri="{FF2B5EF4-FFF2-40B4-BE49-F238E27FC236}">
-                <a16:creationId xmlns:a16="http://schemas.microsoft.com/office/drawing/2014/main" id="{CE3210AA-2902-447B-8CDE-E1FD6E0EC0A5}"/>
+                <a16:creationId xmlns:a16="http://schemas.microsoft.com/office/drawing/2014/main" id="{5E39AAC7-F047-4388-8C26-6F68C46B7B11}"/>
               </a:ext>
             </a:extLst>
           </p:cNvPr>
@@ -4646,7 +4646,7 @@
           <p:cNvPr id="2" name="">
             <a:extLst xmlns:a="http://schemas.openxmlformats.org/drawingml/2006/main">
               <a:ext uri="{FF2B5EF4-FFF2-40B4-BE49-F238E27FC236}">
-                <a16:creationId xmlns:a16="http://schemas.microsoft.com/office/drawing/2014/main" id="{10915634-A6CB-4417-B2BB-44721772C712}"/>
+                <a16:creationId xmlns:a16="http://schemas.microsoft.com/office/drawing/2014/main" id="{45639FF1-34C5-4FE9-A44F-529C7478F700}"/>
               </a:ext>
             </a:extLst>
           </p:cNvPr>
@@ -4703,7 +4703,7 @@
           <p:cNvPr id="3" name="">
             <a:extLst xmlns:a="http://schemas.openxmlformats.org/drawingml/2006/main">
               <a:ext uri="{FF2B5EF4-FFF2-40B4-BE49-F238E27FC236}">
-                <a16:creationId xmlns:a16="http://schemas.microsoft.com/office/drawing/2014/main" id="{B9DFA4FE-8155-48DE-B31C-E288815B4F0E}"/>
+                <a16:creationId xmlns:a16="http://schemas.microsoft.com/office/drawing/2014/main" id="{87ACF265-93E5-4F18-A4B5-5A257E399773}"/>
               </a:ext>
             </a:extLst>
           </p:cNvPr>
@@ -4760,7 +4760,7 @@
           <p:cNvPr id="4" name="">
             <a:extLst xmlns:a="http://schemas.openxmlformats.org/drawingml/2006/main">
               <a:ext uri="{FF2B5EF4-FFF2-40B4-BE49-F238E27FC236}">
-                <a16:creationId xmlns:a16="http://schemas.microsoft.com/office/drawing/2014/main" id="{7B499BFA-43E6-41E4-B410-E3F36769011A}"/>
+                <a16:creationId xmlns:a16="http://schemas.microsoft.com/office/drawing/2014/main" id="{6E7C7EA2-31C4-49E3-8AFE-4E84A5F05DAE}"/>
               </a:ext>
             </a:extLst>
           </p:cNvPr>
@@ -4817,7 +4817,7 @@
           <p:cNvPr id="5" name="">
             <a:extLst xmlns:a="http://schemas.openxmlformats.org/drawingml/2006/main">
               <a:ext uri="{FF2B5EF4-FFF2-40B4-BE49-F238E27FC236}">
-                <a16:creationId xmlns:a16="http://schemas.microsoft.com/office/drawing/2014/main" id="{ADD949DB-61DF-4576-A37E-35370D2F3927}"/>
+                <a16:creationId xmlns:a16="http://schemas.microsoft.com/office/drawing/2014/main" id="{091E6548-6FFC-4245-892F-F3A040CD979D}"/>
               </a:ext>
             </a:extLst>
           </p:cNvPr>
@@ -4874,7 +4874,7 @@
           <p:cNvPr id="6" name="">
             <a:extLst xmlns:a="http://schemas.openxmlformats.org/drawingml/2006/main">
               <a:ext uri="{FF2B5EF4-FFF2-40B4-BE49-F238E27FC236}">
-                <a16:creationId xmlns:a16="http://schemas.microsoft.com/office/drawing/2014/main" id="{FA102D37-BF07-4993-A3A2-66DC019CC64E}"/>
+                <a16:creationId xmlns:a16="http://schemas.microsoft.com/office/drawing/2014/main" id="{46EB2BCB-F9DF-43E3-8B6F-547C9F505C9C}"/>
               </a:ext>
             </a:extLst>
           </p:cNvPr>
@@ -4904,7 +4904,7 @@
           <p:cNvPr id="7" name="">
             <a:extLst xmlns:a="http://schemas.openxmlformats.org/drawingml/2006/main">
               <a:ext uri="{FF2B5EF4-FFF2-40B4-BE49-F238E27FC236}">
-                <a16:creationId xmlns:a16="http://schemas.microsoft.com/office/drawing/2014/main" id="{CA7A335F-EDE4-472F-9AED-DF0CB8660DEB}"/>
+                <a16:creationId xmlns:a16="http://schemas.microsoft.com/office/drawing/2014/main" id="{17EDCAEA-49EC-46EF-905B-560F794296D1}"/>
               </a:ext>
             </a:extLst>
           </p:cNvPr>
@@ -4934,7 +4934,7 @@
           <p:cNvPr id="8" name="">
             <a:extLst xmlns:a="http://schemas.openxmlformats.org/drawingml/2006/main">
               <a:ext uri="{FF2B5EF4-FFF2-40B4-BE49-F238E27FC236}">
-                <a16:creationId xmlns:a16="http://schemas.microsoft.com/office/drawing/2014/main" id="{DD778004-5755-4676-966C-F61D3719A4E9}"/>
+                <a16:creationId xmlns:a16="http://schemas.microsoft.com/office/drawing/2014/main" id="{E134A21E-0FB0-4043-9204-AE958CC8BC45}"/>
               </a:ext>
             </a:extLst>
           </p:cNvPr>
@@ -4968,7 +4968,7 @@
           <p:cNvPr id="9" name="">
             <a:extLst xmlns:a="http://schemas.openxmlformats.org/drawingml/2006/main">
               <a:ext uri="{FF2B5EF4-FFF2-40B4-BE49-F238E27FC236}">
-                <a16:creationId xmlns:a16="http://schemas.microsoft.com/office/drawing/2014/main" id="{5E0C9C77-C8E5-4501-9867-778BC6AEE359}"/>
+                <a16:creationId xmlns:a16="http://schemas.microsoft.com/office/drawing/2014/main" id="{8A767AFE-B647-4D74-A424-571BAD82DEE4}"/>
               </a:ext>
             </a:extLst>
           </p:cNvPr>
@@ -5000,7 +5000,7 @@
           <p:cNvPr id="10" name="">
             <a:extLst xmlns:a="http://schemas.openxmlformats.org/drawingml/2006/main">
               <a:ext uri="{FF2B5EF4-FFF2-40B4-BE49-F238E27FC236}">
-                <a16:creationId xmlns:a16="http://schemas.microsoft.com/office/drawing/2014/main" id="{F109EE29-2449-4050-BC3C-C0147FAB6843}"/>
+                <a16:creationId xmlns:a16="http://schemas.microsoft.com/office/drawing/2014/main" id="{E2E2D2A0-029E-4BB0-A6FD-3CB83FF1FE9D}"/>
               </a:ext>
             </a:extLst>
           </p:cNvPr>
@@ -5057,7 +5057,7 @@
           <p:cNvPr id="11" name="">
             <a:extLst xmlns:a="http://schemas.openxmlformats.org/drawingml/2006/main">
               <a:ext uri="{FF2B5EF4-FFF2-40B4-BE49-F238E27FC236}">
-                <a16:creationId xmlns:a16="http://schemas.microsoft.com/office/drawing/2014/main" id="{4FA68A43-1FA8-4586-8F3C-484E3F812EC1}"/>
+                <a16:creationId xmlns:a16="http://schemas.microsoft.com/office/drawing/2014/main" id="{E6A0F10F-D64B-46AA-9305-B4D24EC96BD1}"/>
               </a:ext>
             </a:extLst>
           </p:cNvPr>
@@ -5137,7 +5137,7 @@
           <p:cNvPr id="12" name="">
             <a:extLst xmlns:a="http://schemas.openxmlformats.org/drawingml/2006/main">
               <a:ext uri="{FF2B5EF4-FFF2-40B4-BE49-F238E27FC236}">
-                <a16:creationId xmlns:a16="http://schemas.microsoft.com/office/drawing/2014/main" id="{FC969F34-1C30-48DA-9D58-2B17569B5FA8}"/>
+                <a16:creationId xmlns:a16="http://schemas.microsoft.com/office/drawing/2014/main" id="{229F102D-94D9-4212-88C2-8C078FEC51F3}"/>
               </a:ext>
             </a:extLst>
           </p:cNvPr>
@@ -5171,7 +5171,7 @@
           <p:cNvPr id="13" name="">
             <a:extLst xmlns:a="http://schemas.openxmlformats.org/drawingml/2006/main">
               <a:ext uri="{FF2B5EF4-FFF2-40B4-BE49-F238E27FC236}">
-                <a16:creationId xmlns:a16="http://schemas.microsoft.com/office/drawing/2014/main" id="{A26F0EAA-0C8A-47EB-8206-4E0346952D9F}"/>
+                <a16:creationId xmlns:a16="http://schemas.microsoft.com/office/drawing/2014/main" id="{085ECFBE-5AB4-43E8-BEE3-2A00F8F1642C}"/>
               </a:ext>
             </a:extLst>
           </p:cNvPr>
@@ -5203,7 +5203,7 @@
           <p:cNvPr id="14" name="">
             <a:extLst xmlns:a="http://schemas.openxmlformats.org/drawingml/2006/main">
               <a:ext uri="{FF2B5EF4-FFF2-40B4-BE49-F238E27FC236}">
-                <a16:creationId xmlns:a16="http://schemas.microsoft.com/office/drawing/2014/main" id="{381D84C4-F1CE-4D1E-B341-5B10E700DDC9}"/>
+                <a16:creationId xmlns:a16="http://schemas.microsoft.com/office/drawing/2014/main" id="{615AE174-620B-4FF9-A0BB-5C36659209D2}"/>
               </a:ext>
             </a:extLst>
           </p:cNvPr>
@@ -5260,7 +5260,7 @@
           <p:cNvPr id="15" name="">
             <a:extLst xmlns:a="http://schemas.openxmlformats.org/drawingml/2006/main">
               <a:ext uri="{FF2B5EF4-FFF2-40B4-BE49-F238E27FC236}">
-                <a16:creationId xmlns:a16="http://schemas.microsoft.com/office/drawing/2014/main" id="{67DDE95F-9DAC-4577-A600-728A12ACA75E}"/>
+                <a16:creationId xmlns:a16="http://schemas.microsoft.com/office/drawing/2014/main" id="{B551F7D4-9870-48CB-A373-FDD050744CE8}"/>
               </a:ext>
             </a:extLst>
           </p:cNvPr>
@@ -5340,7 +5340,7 @@
           <p:cNvPr id="16" name="">
             <a:extLst xmlns:a="http://schemas.openxmlformats.org/drawingml/2006/main">
               <a:ext uri="{FF2B5EF4-FFF2-40B4-BE49-F238E27FC236}">
-                <a16:creationId xmlns:a16="http://schemas.microsoft.com/office/drawing/2014/main" id="{07EE7B8A-857E-4160-AC3B-583856FC85CB}"/>
+                <a16:creationId xmlns:a16="http://schemas.microsoft.com/office/drawing/2014/main" id="{628BF55E-EF4B-4186-9364-ACD81EDA4262}"/>
               </a:ext>
             </a:extLst>
           </p:cNvPr>
@@ -5374,7 +5374,7 @@
           <p:cNvPr id="17" name="">
             <a:extLst xmlns:a="http://schemas.openxmlformats.org/drawingml/2006/main">
               <a:ext uri="{FF2B5EF4-FFF2-40B4-BE49-F238E27FC236}">
-                <a16:creationId xmlns:a16="http://schemas.microsoft.com/office/drawing/2014/main" id="{96844FA9-9F61-47C8-97FF-5A0CEF64B7B9}"/>
+                <a16:creationId xmlns:a16="http://schemas.microsoft.com/office/drawing/2014/main" id="{490FDCFF-12AC-48FD-B6AB-4E447B77FF9A}"/>
               </a:ext>
             </a:extLst>
           </p:cNvPr>
@@ -5406,7 +5406,7 @@
           <p:cNvPr id="18" name="">
             <a:extLst xmlns:a="http://schemas.openxmlformats.org/drawingml/2006/main">
               <a:ext uri="{FF2B5EF4-FFF2-40B4-BE49-F238E27FC236}">
-                <a16:creationId xmlns:a16="http://schemas.microsoft.com/office/drawing/2014/main" id="{18EC2F2F-5345-4024-92F6-D26693A28630}"/>
+                <a16:creationId xmlns:a16="http://schemas.microsoft.com/office/drawing/2014/main" id="{3C0EBA94-DF60-4B14-BEFD-F054CFEB699E}"/>
               </a:ext>
             </a:extLst>
           </p:cNvPr>
@@ -5463,7 +5463,7 @@
           <p:cNvPr id="19" name="">
             <a:extLst xmlns:a="http://schemas.openxmlformats.org/drawingml/2006/main">
               <a:ext uri="{FF2B5EF4-FFF2-40B4-BE49-F238E27FC236}">
-                <a16:creationId xmlns:a16="http://schemas.microsoft.com/office/drawing/2014/main" id="{583C2BBD-8BEF-40A7-8071-5EB3AD88FEFC}"/>
+                <a16:creationId xmlns:a16="http://schemas.microsoft.com/office/drawing/2014/main" id="{7CFEF121-6440-42F0-A99B-9C7ACEDDDE7E}"/>
               </a:ext>
             </a:extLst>
           </p:cNvPr>
@@ -5543,7 +5543,7 @@
           <p:cNvPr id="20" name="">
             <a:extLst xmlns:a="http://schemas.openxmlformats.org/drawingml/2006/main">
               <a:ext uri="{FF2B5EF4-FFF2-40B4-BE49-F238E27FC236}">
-                <a16:creationId xmlns:a16="http://schemas.microsoft.com/office/drawing/2014/main" id="{54C6E585-30E4-41D0-91A1-C5806B49AD06}"/>
+                <a16:creationId xmlns:a16="http://schemas.microsoft.com/office/drawing/2014/main" id="{92CF4271-AE3F-470D-ABA3-43D297C9C16B}"/>
               </a:ext>
             </a:extLst>
           </p:cNvPr>
@@ -5600,7 +5600,7 @@
           <p:cNvPr id="21" name="">
             <a:extLst xmlns:a="http://schemas.openxmlformats.org/drawingml/2006/main">
               <a:ext uri="{FF2B5EF4-FFF2-40B4-BE49-F238E27FC236}">
-                <a16:creationId xmlns:a16="http://schemas.microsoft.com/office/drawing/2014/main" id="{3A6E89C9-F6BE-46D8-810C-2E768043555A}"/>
+                <a16:creationId xmlns:a16="http://schemas.microsoft.com/office/drawing/2014/main" id="{7BD30EB4-6E1C-4170-8D68-93B228DA100F}"/>
               </a:ext>
             </a:extLst>
           </p:cNvPr>
@@ -5657,7 +5657,7 @@
           <p:cNvPr id="22" name="">
             <a:extLst xmlns:a="http://schemas.openxmlformats.org/drawingml/2006/main">
               <a:ext uri="{FF2B5EF4-FFF2-40B4-BE49-F238E27FC236}">
-                <a16:creationId xmlns:a16="http://schemas.microsoft.com/office/drawing/2014/main" id="{BA612B66-CDAD-438C-A7E1-4FB9A1D268A5}"/>
+                <a16:creationId xmlns:a16="http://schemas.microsoft.com/office/drawing/2014/main" id="{F03B9674-9E29-4696-8BF1-A1C62589A06F}"/>
               </a:ext>
             </a:extLst>
           </p:cNvPr>
@@ -5712,7 +5712,7 @@
     </p:spTree>
     <p:extLst>
       <p:ext uri="{BB962C8B-B14F-4D97-AF65-F5344CB8AC3E}">
-        <p14:creationId xmlns:p14="http://schemas.microsoft.com/office/powerpoint/2010/main" val="1805129058"/>
+        <p14:creationId xmlns:p14="http://schemas.microsoft.com/office/powerpoint/2010/main" val="1787341300"/>
       </p:ext>
     </p:extLst>
   </p:cSld>
@@ -5736,7 +5736,7 @@
           <p:cNvPr id="26" name="">
             <a:extLst xmlns:a="http://schemas.openxmlformats.org/drawingml/2006/main">
               <a:ext uri="{FF2B5EF4-FFF2-40B4-BE49-F238E27FC236}">
-                <a16:creationId xmlns:a16="http://schemas.microsoft.com/office/drawing/2014/main" id="{4F0E697E-754C-47C4-A0E2-E627211B6A80}"/>
+                <a16:creationId xmlns:a16="http://schemas.microsoft.com/office/drawing/2014/main" id="{F2E63DC5-2CAB-40C4-958B-9BC3BC9E833B}"/>
               </a:ext>
             </a:extLst>
           </p:cNvPr>
@@ -5766,7 +5766,7 @@
           <p:cNvPr id="2" name="">
             <a:extLst xmlns:a="http://schemas.openxmlformats.org/drawingml/2006/main">
               <a:ext uri="{FF2B5EF4-FFF2-40B4-BE49-F238E27FC236}">
-                <a16:creationId xmlns:a16="http://schemas.microsoft.com/office/drawing/2014/main" id="{720EA545-27DA-4A6E-B2A2-4F3EB1AE6F9C}"/>
+                <a16:creationId xmlns:a16="http://schemas.microsoft.com/office/drawing/2014/main" id="{B3C62762-9E44-4108-AB56-D3C791F29CA1}"/>
               </a:ext>
             </a:extLst>
           </p:cNvPr>
@@ -5823,7 +5823,7 @@
           <p:cNvPr id="3" name="">
             <a:extLst xmlns:a="http://schemas.openxmlformats.org/drawingml/2006/main">
               <a:ext uri="{FF2B5EF4-FFF2-40B4-BE49-F238E27FC236}">
-                <a16:creationId xmlns:a16="http://schemas.microsoft.com/office/drawing/2014/main" id="{BC752B34-FF07-4259-8E84-21B22739D155}"/>
+                <a16:creationId xmlns:a16="http://schemas.microsoft.com/office/drawing/2014/main" id="{3300F1F6-443F-40D7-8FDB-F85041B58165}"/>
               </a:ext>
             </a:extLst>
           </p:cNvPr>
@@ -5880,7 +5880,7 @@
           <p:cNvPr id="4" name="">
             <a:extLst xmlns:a="http://schemas.openxmlformats.org/drawingml/2006/main">
               <a:ext uri="{FF2B5EF4-FFF2-40B4-BE49-F238E27FC236}">
-                <a16:creationId xmlns:a16="http://schemas.microsoft.com/office/drawing/2014/main" id="{9BEC4659-FBBA-4175-819D-AEA48668BCA1}"/>
+                <a16:creationId xmlns:a16="http://schemas.microsoft.com/office/drawing/2014/main" id="{BDB492E5-B430-4C37-B53A-D31BD734BAE6}"/>
               </a:ext>
             </a:extLst>
           </p:cNvPr>
@@ -5937,7 +5937,7 @@
           <p:cNvPr id="5" name="">
             <a:extLst xmlns:a="http://schemas.openxmlformats.org/drawingml/2006/main">
               <a:ext uri="{FF2B5EF4-FFF2-40B4-BE49-F238E27FC236}">
-                <a16:creationId xmlns:a16="http://schemas.microsoft.com/office/drawing/2014/main" id="{3A841A6A-EC76-40FC-B5AE-F09837975FB8}"/>
+                <a16:creationId xmlns:a16="http://schemas.microsoft.com/office/drawing/2014/main" id="{0EAFCEA7-FA8A-4470-9228-33D2AE8EFD40}"/>
               </a:ext>
             </a:extLst>
           </p:cNvPr>
@@ -5994,7 +5994,7 @@
           <p:cNvPr id="6" name="">
             <a:extLst xmlns:a="http://schemas.openxmlformats.org/drawingml/2006/main">
               <a:ext uri="{FF2B5EF4-FFF2-40B4-BE49-F238E27FC236}">
-                <a16:creationId xmlns:a16="http://schemas.microsoft.com/office/drawing/2014/main" id="{E33EAA7A-4905-4827-B158-36F7AE6A86FD}"/>
+                <a16:creationId xmlns:a16="http://schemas.microsoft.com/office/drawing/2014/main" id="{699B7133-D675-43F4-8C75-D02A06DCF3EC}"/>
               </a:ext>
             </a:extLst>
           </p:cNvPr>
@@ -6024,7 +6024,7 @@
           <p:cNvPr id="7" name="">
             <a:extLst xmlns:a="http://schemas.openxmlformats.org/drawingml/2006/main">
               <a:ext uri="{FF2B5EF4-FFF2-40B4-BE49-F238E27FC236}">
-                <a16:creationId xmlns:a16="http://schemas.microsoft.com/office/drawing/2014/main" id="{211EE4B8-4581-448A-A05A-F7D17713EB39}"/>
+                <a16:creationId xmlns:a16="http://schemas.microsoft.com/office/drawing/2014/main" id="{C0FFA98B-F7FD-4D48-91C6-4F13A22315F5}"/>
               </a:ext>
             </a:extLst>
           </p:cNvPr>
@@ -6081,7 +6081,7 @@
           <p:cNvPr id="8" name="">
             <a:extLst xmlns:a="http://schemas.openxmlformats.org/drawingml/2006/main">
               <a:ext uri="{FF2B5EF4-FFF2-40B4-BE49-F238E27FC236}">
-                <a16:creationId xmlns:a16="http://schemas.microsoft.com/office/drawing/2014/main" id="{00FC1634-FBA3-4C15-9B2E-3EDF9E22FFB6}"/>
+                <a16:creationId xmlns:a16="http://schemas.microsoft.com/office/drawing/2014/main" id="{6478A9E1-C3EF-467F-9794-88A0EFAFCD73}"/>
               </a:ext>
             </a:extLst>
           </p:cNvPr>
@@ -6115,7 +6115,7 @@
           <p:cNvPr id="9" name="">
             <a:extLst xmlns:a="http://schemas.openxmlformats.org/drawingml/2006/main">
               <a:ext uri="{FF2B5EF4-FFF2-40B4-BE49-F238E27FC236}">
-                <a16:creationId xmlns:a16="http://schemas.microsoft.com/office/drawing/2014/main" id="{DC6D74A0-FF8D-4EEC-8146-3E5EF6D6DE64}"/>
+                <a16:creationId xmlns:a16="http://schemas.microsoft.com/office/drawing/2014/main" id="{D754E0C4-6606-4BD1-88C0-2CEB8E3301E1}"/>
               </a:ext>
             </a:extLst>
           </p:cNvPr>
@@ -6145,7 +6145,7 @@
           <p:cNvPr id="10" name="">
             <a:extLst xmlns:a="http://schemas.openxmlformats.org/drawingml/2006/main">
               <a:ext uri="{FF2B5EF4-FFF2-40B4-BE49-F238E27FC236}">
-                <a16:creationId xmlns:a16="http://schemas.microsoft.com/office/drawing/2014/main" id="{7B3A0C1A-0ED5-4721-A0D9-A912C4380BDD}"/>
+                <a16:creationId xmlns:a16="http://schemas.microsoft.com/office/drawing/2014/main" id="{7F068363-0E47-4EE9-9C97-0F2BF06BA616}"/>
               </a:ext>
             </a:extLst>
           </p:cNvPr>
@@ -6202,7 +6202,7 @@
           <p:cNvPr id="11" name="">
             <a:extLst xmlns:a="http://schemas.openxmlformats.org/drawingml/2006/main">
               <a:ext uri="{FF2B5EF4-FFF2-40B4-BE49-F238E27FC236}">
-                <a16:creationId xmlns:a16="http://schemas.microsoft.com/office/drawing/2014/main" id="{201139BA-8712-4F70-8909-021870918B29}"/>
+                <a16:creationId xmlns:a16="http://schemas.microsoft.com/office/drawing/2014/main" id="{AFC4F48F-5633-4213-BEC1-ACA6E76C1F84}"/>
               </a:ext>
             </a:extLst>
           </p:cNvPr>
@@ -6259,7 +6259,7 @@
           <p:cNvPr id="12" name="">
             <a:extLst xmlns:a="http://schemas.openxmlformats.org/drawingml/2006/main">
               <a:ext uri="{FF2B5EF4-FFF2-40B4-BE49-F238E27FC236}">
-                <a16:creationId xmlns:a16="http://schemas.microsoft.com/office/drawing/2014/main" id="{00FD03B9-F1B5-41B6-AB95-8EBB68316011}"/>
+                <a16:creationId xmlns:a16="http://schemas.microsoft.com/office/drawing/2014/main" id="{1D9182E7-5156-4902-B5B3-0A226E297749}"/>
               </a:ext>
             </a:extLst>
           </p:cNvPr>
@@ -6306,7 +6306,7 @@
                 <a:ea typeface="Arial"/>
                 <a:cs typeface="Arial"/>
               </a:rPr>
-              <a:t>Choose voice or text input</a:t>
+              <a:t>Select Bengali options</a:t>
             </a:r>
           </a:p>
         </p:txBody>
@@ -6316,7 +6316,7 @@
           <p:cNvPr id="13" name="">
             <a:extLst xmlns:a="http://schemas.openxmlformats.org/drawingml/2006/main">
               <a:ext uri="{FF2B5EF4-FFF2-40B4-BE49-F238E27FC236}">
-                <a16:creationId xmlns:a16="http://schemas.microsoft.com/office/drawing/2014/main" id="{F1B68324-3409-4414-83D2-DB5FAFAB97DB}"/>
+                <a16:creationId xmlns:a16="http://schemas.microsoft.com/office/drawing/2014/main" id="{C7F73EE2-B3FA-4FB8-8314-76218AC2876A}"/>
               </a:ext>
             </a:extLst>
           </p:cNvPr>
@@ -6350,7 +6350,7 @@
           <p:cNvPr id="14" name="">
             <a:extLst xmlns:a="http://schemas.openxmlformats.org/drawingml/2006/main">
               <a:ext uri="{FF2B5EF4-FFF2-40B4-BE49-F238E27FC236}">
-                <a16:creationId xmlns:a16="http://schemas.microsoft.com/office/drawing/2014/main" id="{CCD1B659-2D31-4E4E-9233-A59069F53318}"/>
+                <a16:creationId xmlns:a16="http://schemas.microsoft.com/office/drawing/2014/main" id="{AF3BF458-486A-4834-99B0-C58F99055B17}"/>
               </a:ext>
             </a:extLst>
           </p:cNvPr>
@@ -6380,7 +6380,7 @@
           <p:cNvPr id="15" name="">
             <a:extLst xmlns:a="http://schemas.openxmlformats.org/drawingml/2006/main">
               <a:ext uri="{FF2B5EF4-FFF2-40B4-BE49-F238E27FC236}">
-                <a16:creationId xmlns:a16="http://schemas.microsoft.com/office/drawing/2014/main" id="{4FA4FB7A-AC2F-498B-850A-E6A27E5A4602}"/>
+                <a16:creationId xmlns:a16="http://schemas.microsoft.com/office/drawing/2014/main" id="{E0DE8259-72EB-40FF-97EC-102FF88192D2}"/>
               </a:ext>
             </a:extLst>
           </p:cNvPr>
@@ -6437,7 +6437,7 @@
           <p:cNvPr id="16" name="">
             <a:extLst xmlns:a="http://schemas.openxmlformats.org/drawingml/2006/main">
               <a:ext uri="{FF2B5EF4-FFF2-40B4-BE49-F238E27FC236}">
-                <a16:creationId xmlns:a16="http://schemas.microsoft.com/office/drawing/2014/main" id="{C5F77B76-FAB4-4340-BEB5-734999411E7F}"/>
+                <a16:creationId xmlns:a16="http://schemas.microsoft.com/office/drawing/2014/main" id="{C5C19343-0B4B-4140-8FBA-88AB9959EBB9}"/>
               </a:ext>
             </a:extLst>
           </p:cNvPr>
@@ -6484,7 +6484,7 @@
                 <a:ea typeface="Arial"/>
                 <a:cs typeface="Arial"/>
               </a:rPr>
-              <a:t>Select eye symptoms</a:t>
+              <a:t>Select symptoms</a:t>
             </a:r>
           </a:p>
         </p:txBody>
@@ -6494,7 +6494,7 @@
           <p:cNvPr id="17" name="">
             <a:extLst xmlns:a="http://schemas.openxmlformats.org/drawingml/2006/main">
               <a:ext uri="{FF2B5EF4-FFF2-40B4-BE49-F238E27FC236}">
-                <a16:creationId xmlns:a16="http://schemas.microsoft.com/office/drawing/2014/main" id="{E21567ED-89FA-4823-ABD7-EE7C54C99846}"/>
+                <a16:creationId xmlns:a16="http://schemas.microsoft.com/office/drawing/2014/main" id="{5342998F-A047-4E91-9C24-1599F9DFB046}"/>
               </a:ext>
             </a:extLst>
           </p:cNvPr>
@@ -6541,7 +6541,7 @@
                 <a:ea typeface="Arial"/>
                 <a:cs typeface="Arial"/>
               </a:rPr>
-              <a:t>Use fixed, Bengali-first options</a:t>
+              <a:t>Fixed selections determine the route</a:t>
             </a:r>
           </a:p>
         </p:txBody>
@@ -6551,7 +6551,7 @@
           <p:cNvPr id="18" name="">
             <a:extLst xmlns:a="http://schemas.openxmlformats.org/drawingml/2006/main">
               <a:ext uri="{FF2B5EF4-FFF2-40B4-BE49-F238E27FC236}">
-                <a16:creationId xmlns:a16="http://schemas.microsoft.com/office/drawing/2014/main" id="{5BD90F13-FDAD-456B-AA0E-7D7C528CCCF7}"/>
+                <a16:creationId xmlns:a16="http://schemas.microsoft.com/office/drawing/2014/main" id="{A80490DC-E19A-41BC-B011-8EEE100216D2}"/>
               </a:ext>
             </a:extLst>
           </p:cNvPr>
@@ -6585,7 +6585,7 @@
           <p:cNvPr id="19" name="">
             <a:extLst xmlns:a="http://schemas.openxmlformats.org/drawingml/2006/main">
               <a:ext uri="{FF2B5EF4-FFF2-40B4-BE49-F238E27FC236}">
-                <a16:creationId xmlns:a16="http://schemas.microsoft.com/office/drawing/2014/main" id="{0AC7620D-65EE-4405-B6E2-2294C718078E}"/>
+                <a16:creationId xmlns:a16="http://schemas.microsoft.com/office/drawing/2014/main" id="{3DF38E60-65AA-47CE-A9E8-5509F785AFFB}"/>
               </a:ext>
             </a:extLst>
           </p:cNvPr>
@@ -6615,7 +6615,7 @@
           <p:cNvPr id="20" name="">
             <a:extLst xmlns:a="http://schemas.openxmlformats.org/drawingml/2006/main">
               <a:ext uri="{FF2B5EF4-FFF2-40B4-BE49-F238E27FC236}">
-                <a16:creationId xmlns:a16="http://schemas.microsoft.com/office/drawing/2014/main" id="{0207001C-5BC3-4073-9964-2378F25A823A}"/>
+                <a16:creationId xmlns:a16="http://schemas.microsoft.com/office/drawing/2014/main" id="{B5DCFAC9-0588-485E-9B7B-646B1386E01D}"/>
               </a:ext>
             </a:extLst>
           </p:cNvPr>
@@ -6672,7 +6672,7 @@
           <p:cNvPr id="21" name="">
             <a:extLst xmlns:a="http://schemas.openxmlformats.org/drawingml/2006/main">
               <a:ext uri="{FF2B5EF4-FFF2-40B4-BE49-F238E27FC236}">
-                <a16:creationId xmlns:a16="http://schemas.microsoft.com/office/drawing/2014/main" id="{A2ADBB6B-C8AE-41C4-90CE-07104FD7FABE}"/>
+                <a16:creationId xmlns:a16="http://schemas.microsoft.com/office/drawing/2014/main" id="{40341530-DAD4-4F78-BD5D-972F66D4D50F}"/>
               </a:ext>
             </a:extLst>
           </p:cNvPr>
@@ -6729,7 +6729,7 @@
           <p:cNvPr id="22" name="">
             <a:extLst xmlns:a="http://schemas.openxmlformats.org/drawingml/2006/main">
               <a:ext uri="{FF2B5EF4-FFF2-40B4-BE49-F238E27FC236}">
-                <a16:creationId xmlns:a16="http://schemas.microsoft.com/office/drawing/2014/main" id="{E2D73620-BEDB-4B1C-8683-9B37D817A76C}"/>
+                <a16:creationId xmlns:a16="http://schemas.microsoft.com/office/drawing/2014/main" id="{7D6AE49C-59A0-47FE-88D8-CA14A25BF7E9}"/>
               </a:ext>
             </a:extLst>
           </p:cNvPr>
@@ -6786,7 +6786,7 @@
           <p:cNvPr id="23" name="">
             <a:extLst xmlns:a="http://schemas.openxmlformats.org/drawingml/2006/main">
               <a:ext uri="{FF2B5EF4-FFF2-40B4-BE49-F238E27FC236}">
-                <a16:creationId xmlns:a16="http://schemas.microsoft.com/office/drawing/2014/main" id="{C918394C-8C5B-41E9-90D1-86111E30DA6B}"/>
+                <a16:creationId xmlns:a16="http://schemas.microsoft.com/office/drawing/2014/main" id="{F158FCC9-A7FA-480A-912C-B2DBE7A35385}"/>
               </a:ext>
             </a:extLst>
           </p:cNvPr>
@@ -6818,7 +6818,7 @@
           <p:cNvPr id="24" name="">
             <a:extLst xmlns:a="http://schemas.openxmlformats.org/drawingml/2006/main">
               <a:ext uri="{FF2B5EF4-FFF2-40B4-BE49-F238E27FC236}">
-                <a16:creationId xmlns:a16="http://schemas.microsoft.com/office/drawing/2014/main" id="{1814A6B4-270F-4151-9248-6BF577B036CD}"/>
+                <a16:creationId xmlns:a16="http://schemas.microsoft.com/office/drawing/2014/main" id="{4AC8F6B4-6C3F-46E1-B510-EFFAB8706A64}"/>
               </a:ext>
             </a:extLst>
           </p:cNvPr>
@@ -6875,7 +6875,7 @@
           <p:cNvPr id="25" name="">
             <a:extLst xmlns:a="http://schemas.openxmlformats.org/drawingml/2006/main">
               <a:ext uri="{FF2B5EF4-FFF2-40B4-BE49-F238E27FC236}">
-                <a16:creationId xmlns:a16="http://schemas.microsoft.com/office/drawing/2014/main" id="{07486BA9-0D2F-4EB5-935E-96FC0272881D}"/>
+                <a16:creationId xmlns:a16="http://schemas.microsoft.com/office/drawing/2014/main" id="{9AC1E56D-B820-48E2-83AB-6C3BBBC15B3F}"/>
               </a:ext>
             </a:extLst>
           </p:cNvPr>
@@ -6930,7 +6930,7 @@
     </p:spTree>
     <p:extLst>
       <p:ext uri="{BB962C8B-B14F-4D97-AF65-F5344CB8AC3E}">
-        <p14:creationId xmlns:p14="http://schemas.microsoft.com/office/powerpoint/2010/main" val="863634096"/>
+        <p14:creationId xmlns:p14="http://schemas.microsoft.com/office/powerpoint/2010/main" val="1463066256"/>
       </p:ext>
     </p:extLst>
   </p:cSld>
@@ -6954,7 +6954,7 @@
           <p:cNvPr id="11" name="">
             <a:extLst xmlns:a="http://schemas.openxmlformats.org/drawingml/2006/main">
               <a:ext uri="{FF2B5EF4-FFF2-40B4-BE49-F238E27FC236}">
-                <a16:creationId xmlns:a16="http://schemas.microsoft.com/office/drawing/2014/main" id="{33279760-B390-488A-B7E9-D50332061FAF}"/>
+                <a16:creationId xmlns:a16="http://schemas.microsoft.com/office/drawing/2014/main" id="{5ADDA1D3-D28B-4C9A-B8D1-81127A98EEED}"/>
               </a:ext>
             </a:extLst>
           </p:cNvPr>
@@ -6984,7 +6984,7 @@
           <p:cNvPr id="2" name="">
             <a:extLst xmlns:a="http://schemas.openxmlformats.org/drawingml/2006/main">
               <a:ext uri="{FF2B5EF4-FFF2-40B4-BE49-F238E27FC236}">
-                <a16:creationId xmlns:a16="http://schemas.microsoft.com/office/drawing/2014/main" id="{76445375-8A88-4350-A90F-2B2CA10F8030}"/>
+                <a16:creationId xmlns:a16="http://schemas.microsoft.com/office/drawing/2014/main" id="{526460E9-AD2F-44EF-AD4B-472BA7D37F55}"/>
               </a:ext>
             </a:extLst>
           </p:cNvPr>
@@ -7041,7 +7041,7 @@
           <p:cNvPr id="3" name="">
             <a:extLst xmlns:a="http://schemas.openxmlformats.org/drawingml/2006/main">
               <a:ext uri="{FF2B5EF4-FFF2-40B4-BE49-F238E27FC236}">
-                <a16:creationId xmlns:a16="http://schemas.microsoft.com/office/drawing/2014/main" id="{A599CC87-C68D-41B1-9801-E4A44BFB29A3}"/>
+                <a16:creationId xmlns:a16="http://schemas.microsoft.com/office/drawing/2014/main" id="{2E2245CA-48F0-43F3-94AF-D964954B1B38}"/>
               </a:ext>
             </a:extLst>
           </p:cNvPr>
@@ -7071,7 +7071,7 @@
           <p:cNvPr id="4" name="">
             <a:extLst xmlns:a="http://schemas.openxmlformats.org/drawingml/2006/main">
               <a:ext uri="{FF2B5EF4-FFF2-40B4-BE49-F238E27FC236}">
-                <a16:creationId xmlns:a16="http://schemas.microsoft.com/office/drawing/2014/main" id="{BCBCBE3A-B580-4276-A427-E7AE623208F2}"/>
+                <a16:creationId xmlns:a16="http://schemas.microsoft.com/office/drawing/2014/main" id="{4A5CD425-9B51-49D3-8F26-0B4975F62375}"/>
               </a:ext>
             </a:extLst>
           </p:cNvPr>
@@ -7128,7 +7128,7 @@
           <p:cNvPr id="5" name="">
             <a:extLst xmlns:a="http://schemas.openxmlformats.org/drawingml/2006/main">
               <a:ext uri="{FF2B5EF4-FFF2-40B4-BE49-F238E27FC236}">
-                <a16:creationId xmlns:a16="http://schemas.microsoft.com/office/drawing/2014/main" id="{7F04372B-E69E-451A-84F0-8F21C83D5B57}"/>
+                <a16:creationId xmlns:a16="http://schemas.microsoft.com/office/drawing/2014/main" id="{3E6E1E4F-9884-41A4-899A-F977E2549AC0}"/>
               </a:ext>
             </a:extLst>
           </p:cNvPr>
@@ -7185,7 +7185,7 @@
           <p:cNvPr id="6" name="">
             <a:extLst xmlns:a="http://schemas.openxmlformats.org/drawingml/2006/main">
               <a:ext uri="{FF2B5EF4-FFF2-40B4-BE49-F238E27FC236}">
-                <a16:creationId xmlns:a16="http://schemas.microsoft.com/office/drawing/2014/main" id="{7A7215BD-1577-4A16-A1E6-C497889D3C33}"/>
+                <a16:creationId xmlns:a16="http://schemas.microsoft.com/office/drawing/2014/main" id="{229682B5-91D7-4167-9832-E5AD16597A60}"/>
               </a:ext>
             </a:extLst>
           </p:cNvPr>
@@ -7242,7 +7242,7 @@
           <p:cNvPr id="7" name="">
             <a:extLst xmlns:a="http://schemas.openxmlformats.org/drawingml/2006/main">
               <a:ext uri="{FF2B5EF4-FFF2-40B4-BE49-F238E27FC236}">
-                <a16:creationId xmlns:a16="http://schemas.microsoft.com/office/drawing/2014/main" id="{BB619EFA-9B7F-43D0-A2C2-DE42286911D6}"/>
+                <a16:creationId xmlns:a16="http://schemas.microsoft.com/office/drawing/2014/main" id="{6E2C729F-877F-4BCB-BA1A-D705E4034E20}"/>
               </a:ext>
             </a:extLst>
           </p:cNvPr>
@@ -7289,7 +7289,7 @@
                 <a:ea typeface="Arial"/>
                 <a:cs typeface="Arial"/>
               </a:rPr>
-              <a:t>Voice and text access · approved clinical content · clear next action</a:t>
+              <a:t>Fixed Bengali selections · approved clinical content · clear next action</a:t>
             </a:r>
           </a:p>
         </p:txBody>
@@ -7299,7 +7299,7 @@
           <p:cNvPr id="8" name="">
             <a:extLst xmlns:a="http://schemas.openxmlformats.org/drawingml/2006/main">
               <a:ext uri="{FF2B5EF4-FFF2-40B4-BE49-F238E27FC236}">
-                <a16:creationId xmlns:a16="http://schemas.microsoft.com/office/drawing/2014/main" id="{6FED4DD0-BFF1-40AD-B312-D5A501AA5E05}"/>
+                <a16:creationId xmlns:a16="http://schemas.microsoft.com/office/drawing/2014/main" id="{E3C76C89-C177-4713-93B6-0994C98363A6}"/>
               </a:ext>
             </a:extLst>
           </p:cNvPr>
@@ -7329,7 +7329,7 @@
           <p:cNvPr id="9" name="">
             <a:extLst xmlns:a="http://schemas.openxmlformats.org/drawingml/2006/main">
               <a:ext uri="{FF2B5EF4-FFF2-40B4-BE49-F238E27FC236}">
-                <a16:creationId xmlns:a16="http://schemas.microsoft.com/office/drawing/2014/main" id="{D5EDF10E-4D21-4CD3-B527-586A1BC6A839}"/>
+                <a16:creationId xmlns:a16="http://schemas.microsoft.com/office/drawing/2014/main" id="{2E6E03ED-DE67-4210-9AA1-E69B09A4E143}"/>
               </a:ext>
             </a:extLst>
           </p:cNvPr>
@@ -7386,7 +7386,7 @@
           <p:cNvPr id="10" name="">
             <a:extLst xmlns:a="http://schemas.openxmlformats.org/drawingml/2006/main">
               <a:ext uri="{FF2B5EF4-FFF2-40B4-BE49-F238E27FC236}">
-                <a16:creationId xmlns:a16="http://schemas.microsoft.com/office/drawing/2014/main" id="{3D8A0D5E-60A7-462B-8072-1D40BFB1F8BB}"/>
+                <a16:creationId xmlns:a16="http://schemas.microsoft.com/office/drawing/2014/main" id="{0D0D7C25-4297-4C3D-9106-55A3B3920598}"/>
               </a:ext>
             </a:extLst>
           </p:cNvPr>
@@ -7441,7 +7441,7 @@
     </p:spTree>
     <p:extLst>
       <p:ext uri="{BB962C8B-B14F-4D97-AF65-F5344CB8AC3E}">
-        <p14:creationId xmlns:p14="http://schemas.microsoft.com/office/powerpoint/2010/main" val="2139598413"/>
+        <p14:creationId xmlns:p14="http://schemas.microsoft.com/office/powerpoint/2010/main" val="1139470588"/>
       </p:ext>
     </p:extLst>
   </p:cSld>
@@ -8618,7 +8618,7 @@
           <p:cNvPr id="24" name="">
             <a:extLst xmlns:a="http://schemas.openxmlformats.org/drawingml/2006/main">
               <a:ext uri="{FF2B5EF4-FFF2-40B4-BE49-F238E27FC236}">
-                <a16:creationId xmlns:a16="http://schemas.microsoft.com/office/drawing/2014/main" id="{8D85BB84-1C1C-48DD-8AF9-6BF5FA68DE9D}"/>
+                <a16:creationId xmlns:a16="http://schemas.microsoft.com/office/drawing/2014/main" id="{3EAB6764-04B5-4122-875B-13EC11AEB76C}"/>
               </a:ext>
             </a:extLst>
           </p:cNvPr>
@@ -8648,7 +8648,7 @@
           <p:cNvPr id="25" name="">
             <a:extLst xmlns:a="http://schemas.openxmlformats.org/drawingml/2006/main">
               <a:ext uri="{FF2B5EF4-FFF2-40B4-BE49-F238E27FC236}">
-                <a16:creationId xmlns:a16="http://schemas.microsoft.com/office/drawing/2014/main" id="{A60B646C-0FB1-4E91-8443-4E023C80B1B5}"/>
+                <a16:creationId xmlns:a16="http://schemas.microsoft.com/office/drawing/2014/main" id="{9BACBC0C-E111-4211-8E00-731F8C140940}"/>
               </a:ext>
             </a:extLst>
           </p:cNvPr>
@@ -8705,7 +8705,7 @@
           <p:cNvPr id="26" name="">
             <a:extLst xmlns:a="http://schemas.openxmlformats.org/drawingml/2006/main">
               <a:ext uri="{FF2B5EF4-FFF2-40B4-BE49-F238E27FC236}">
-                <a16:creationId xmlns:a16="http://schemas.microsoft.com/office/drawing/2014/main" id="{9C03CE6D-A554-4FFD-A38F-8610CFEA3344}"/>
+                <a16:creationId xmlns:a16="http://schemas.microsoft.com/office/drawing/2014/main" id="{CEF1BA06-4FE7-4FD0-963D-812FFA99F17A}"/>
               </a:ext>
             </a:extLst>
           </p:cNvPr>
@@ -8762,7 +8762,7 @@
           <p:cNvPr id="27" name="">
             <a:extLst xmlns:a="http://schemas.openxmlformats.org/drawingml/2006/main">
               <a:ext uri="{FF2B5EF4-FFF2-40B4-BE49-F238E27FC236}">
-                <a16:creationId xmlns:a16="http://schemas.microsoft.com/office/drawing/2014/main" id="{CC08DA37-D4CB-4CD9-82DF-E51ECE7FD2C9}"/>
+                <a16:creationId xmlns:a16="http://schemas.microsoft.com/office/drawing/2014/main" id="{38A9455C-C93D-434E-9D7C-89884D61328D}"/>
               </a:ext>
             </a:extLst>
           </p:cNvPr>
@@ -8819,7 +8819,7 @@
           <p:cNvPr id="28" name="">
             <a:extLst xmlns:a="http://schemas.openxmlformats.org/drawingml/2006/main">
               <a:ext uri="{FF2B5EF4-FFF2-40B4-BE49-F238E27FC236}">
-                <a16:creationId xmlns:a16="http://schemas.microsoft.com/office/drawing/2014/main" id="{77543633-B5C5-4081-8948-9F5B1C4E725C}"/>
+                <a16:creationId xmlns:a16="http://schemas.microsoft.com/office/drawing/2014/main" id="{7B6B016A-8F1A-4956-B098-3E5D001DCF1F}"/>
               </a:ext>
             </a:extLst>
           </p:cNvPr>
@@ -8876,7 +8876,7 @@
           <p:cNvPr id="29" name="">
             <a:extLst xmlns:a="http://schemas.openxmlformats.org/drawingml/2006/main">
               <a:ext uri="{FF2B5EF4-FFF2-40B4-BE49-F238E27FC236}">
-                <a16:creationId xmlns:a16="http://schemas.microsoft.com/office/drawing/2014/main" id="{94BBEF13-56C7-45A5-AF87-0B167B50CC6B}"/>
+                <a16:creationId xmlns:a16="http://schemas.microsoft.com/office/drawing/2014/main" id="{A251AE8B-9272-441A-BDCE-506C9B680E36}"/>
               </a:ext>
             </a:extLst>
           </p:cNvPr>
@@ -8906,7 +8906,7 @@
           <p:cNvPr id="30" name="">
             <a:extLst xmlns:a="http://schemas.openxmlformats.org/drawingml/2006/main">
               <a:ext uri="{FF2B5EF4-FFF2-40B4-BE49-F238E27FC236}">
-                <a16:creationId xmlns:a16="http://schemas.microsoft.com/office/drawing/2014/main" id="{A1416715-A47E-4A18-A5BF-FEC2019F0091}"/>
+                <a16:creationId xmlns:a16="http://schemas.microsoft.com/office/drawing/2014/main" id="{C1376710-5CEA-4D98-82E8-749E6DD65A13}"/>
               </a:ext>
             </a:extLst>
           </p:cNvPr>
@@ -8963,7 +8963,7 @@
           <p:cNvPr id="31" name="">
             <a:extLst xmlns:a="http://schemas.openxmlformats.org/drawingml/2006/main">
               <a:ext uri="{FF2B5EF4-FFF2-40B4-BE49-F238E27FC236}">
-                <a16:creationId xmlns:a16="http://schemas.microsoft.com/office/drawing/2014/main" id="{DDBA980C-2F61-4993-9965-462218B14DA6}"/>
+                <a16:creationId xmlns:a16="http://schemas.microsoft.com/office/drawing/2014/main" id="{0600D846-2CEC-40DB-84A4-36B9BD442DB2}"/>
               </a:ext>
             </a:extLst>
           </p:cNvPr>
@@ -9043,7 +9043,7 @@
           <p:cNvPr id="32" name="">
             <a:extLst xmlns:a="http://schemas.openxmlformats.org/drawingml/2006/main">
               <a:ext uri="{FF2B5EF4-FFF2-40B4-BE49-F238E27FC236}">
-                <a16:creationId xmlns:a16="http://schemas.microsoft.com/office/drawing/2014/main" id="{BB48A905-AB85-40D0-95B4-1FB5EBBE37F6}"/>
+                <a16:creationId xmlns:a16="http://schemas.microsoft.com/office/drawing/2014/main" id="{599952C2-D74B-42D4-8CDB-81F53EAC6917}"/>
               </a:ext>
             </a:extLst>
           </p:cNvPr>
@@ -9100,7 +9100,7 @@
           <p:cNvPr id="33" name="">
             <a:extLst xmlns:a="http://schemas.openxmlformats.org/drawingml/2006/main">
               <a:ext uri="{FF2B5EF4-FFF2-40B4-BE49-F238E27FC236}">
-                <a16:creationId xmlns:a16="http://schemas.microsoft.com/office/drawing/2014/main" id="{171EED52-F918-4547-B3A8-328CB6272780}"/>
+                <a16:creationId xmlns:a16="http://schemas.microsoft.com/office/drawing/2014/main" id="{C10B35E9-7798-4BD8-97FD-660951865D4D}"/>
               </a:ext>
             </a:extLst>
           </p:cNvPr>
@@ -9130,7 +9130,7 @@
           <p:cNvPr id="34" name="">
             <a:extLst xmlns:a="http://schemas.openxmlformats.org/drawingml/2006/main">
               <a:ext uri="{FF2B5EF4-FFF2-40B4-BE49-F238E27FC236}">
-                <a16:creationId xmlns:a16="http://schemas.microsoft.com/office/drawing/2014/main" id="{9D91DA50-59A9-4980-A637-1796077D70B7}"/>
+                <a16:creationId xmlns:a16="http://schemas.microsoft.com/office/drawing/2014/main" id="{7D99DB74-AE95-4DE9-AF7B-31BCF55026CD}"/>
               </a:ext>
             </a:extLst>
           </p:cNvPr>
@@ -9160,7 +9160,7 @@
           <p:cNvPr id="35" name="">
             <a:extLst xmlns:a="http://schemas.openxmlformats.org/drawingml/2006/main">
               <a:ext uri="{FF2B5EF4-FFF2-40B4-BE49-F238E27FC236}">
-                <a16:creationId xmlns:a16="http://schemas.microsoft.com/office/drawing/2014/main" id="{BC50F81E-19B3-47F1-85EF-29A576F7B216}"/>
+                <a16:creationId xmlns:a16="http://schemas.microsoft.com/office/drawing/2014/main" id="{47BE0796-C284-41DA-9B0D-3C1243300A6E}"/>
               </a:ext>
             </a:extLst>
           </p:cNvPr>
@@ -9217,7 +9217,7 @@
           <p:cNvPr id="36" name="">
             <a:extLst xmlns:a="http://schemas.openxmlformats.org/drawingml/2006/main">
               <a:ext uri="{FF2B5EF4-FFF2-40B4-BE49-F238E27FC236}">
-                <a16:creationId xmlns:a16="http://schemas.microsoft.com/office/drawing/2014/main" id="{B3331B13-DCF7-42D6-8DA2-DDC3EE4AF319}"/>
+                <a16:creationId xmlns:a16="http://schemas.microsoft.com/office/drawing/2014/main" id="{E88C1010-F2BA-4C1B-B37A-0F0503EE355B}"/>
               </a:ext>
             </a:extLst>
           </p:cNvPr>
@@ -9274,7 +9274,7 @@
           <p:cNvPr id="37" name="">
             <a:extLst xmlns:a="http://schemas.openxmlformats.org/drawingml/2006/main">
               <a:ext uri="{FF2B5EF4-FFF2-40B4-BE49-F238E27FC236}">
-                <a16:creationId xmlns:a16="http://schemas.microsoft.com/office/drawing/2014/main" id="{403A5069-9CBE-4C05-AF33-47A1C2487550}"/>
+                <a16:creationId xmlns:a16="http://schemas.microsoft.com/office/drawing/2014/main" id="{6132D8CA-E88D-4B89-88C2-2191852797AD}"/>
               </a:ext>
             </a:extLst>
           </p:cNvPr>
@@ -9331,7 +9331,7 @@
           <p:cNvPr id="38" name="">
             <a:extLst xmlns:a="http://schemas.openxmlformats.org/drawingml/2006/main">
               <a:ext uri="{FF2B5EF4-FFF2-40B4-BE49-F238E27FC236}">
-                <a16:creationId xmlns:a16="http://schemas.microsoft.com/office/drawing/2014/main" id="{4D7A409B-0845-434D-8AE1-E552D528798E}"/>
+                <a16:creationId xmlns:a16="http://schemas.microsoft.com/office/drawing/2014/main" id="{94F83D33-C10D-4766-868D-270BDD7112D5}"/>
               </a:ext>
             </a:extLst>
           </p:cNvPr>
@@ -9361,7 +9361,7 @@
           <p:cNvPr id="39" name="">
             <a:extLst xmlns:a="http://schemas.openxmlformats.org/drawingml/2006/main">
               <a:ext uri="{FF2B5EF4-FFF2-40B4-BE49-F238E27FC236}">
-                <a16:creationId xmlns:a16="http://schemas.microsoft.com/office/drawing/2014/main" id="{65D0BC3B-443F-4F86-9872-0D1FB8C78752}"/>
+                <a16:creationId xmlns:a16="http://schemas.microsoft.com/office/drawing/2014/main" id="{26645ACE-4332-4794-A6BE-DA933CA11F83}"/>
               </a:ext>
             </a:extLst>
           </p:cNvPr>
@@ -9418,7 +9418,7 @@
           <p:cNvPr id="40" name="">
             <a:extLst xmlns:a="http://schemas.openxmlformats.org/drawingml/2006/main">
               <a:ext uri="{FF2B5EF4-FFF2-40B4-BE49-F238E27FC236}">
-                <a16:creationId xmlns:a16="http://schemas.microsoft.com/office/drawing/2014/main" id="{85A6EF2B-7AF2-4786-83A3-4820C80E1C07}"/>
+                <a16:creationId xmlns:a16="http://schemas.microsoft.com/office/drawing/2014/main" id="{407874D0-92E0-4B3F-A6BC-3835D7B60A4C}"/>
               </a:ext>
             </a:extLst>
           </p:cNvPr>
@@ -9475,7 +9475,7 @@
           <p:cNvPr id="41" name="">
             <a:extLst xmlns:a="http://schemas.openxmlformats.org/drawingml/2006/main">
               <a:ext uri="{FF2B5EF4-FFF2-40B4-BE49-F238E27FC236}">
-                <a16:creationId xmlns:a16="http://schemas.microsoft.com/office/drawing/2014/main" id="{2A879C0F-E071-47EF-96F8-3C111BFE54CB}"/>
+                <a16:creationId xmlns:a16="http://schemas.microsoft.com/office/drawing/2014/main" id="{FB2656AA-C234-4DFC-9821-76C912C7528D}"/>
               </a:ext>
             </a:extLst>
           </p:cNvPr>
@@ -9532,7 +9532,7 @@
           <p:cNvPr id="42" name="">
             <a:extLst xmlns:a="http://schemas.openxmlformats.org/drawingml/2006/main">
               <a:ext uri="{FF2B5EF4-FFF2-40B4-BE49-F238E27FC236}">
-                <a16:creationId xmlns:a16="http://schemas.microsoft.com/office/drawing/2014/main" id="{D031A442-CB90-46A3-89D8-265BA3AF8403}"/>
+                <a16:creationId xmlns:a16="http://schemas.microsoft.com/office/drawing/2014/main" id="{779FE83E-1AB9-4BC7-812E-D20E411EDA3A}"/>
               </a:ext>
             </a:extLst>
           </p:cNvPr>
@@ -9562,7 +9562,7 @@
           <p:cNvPr id="43" name="">
             <a:extLst xmlns:a="http://schemas.openxmlformats.org/drawingml/2006/main">
               <a:ext uri="{FF2B5EF4-FFF2-40B4-BE49-F238E27FC236}">
-                <a16:creationId xmlns:a16="http://schemas.microsoft.com/office/drawing/2014/main" id="{B9676435-6B17-45C8-AD22-CAC78FEAF51F}"/>
+                <a16:creationId xmlns:a16="http://schemas.microsoft.com/office/drawing/2014/main" id="{64928274-04A3-449B-8ADE-F1FB0C5AB920}"/>
               </a:ext>
             </a:extLst>
           </p:cNvPr>
@@ -9619,7 +9619,7 @@
           <p:cNvPr id="44" name="">
             <a:extLst xmlns:a="http://schemas.openxmlformats.org/drawingml/2006/main">
               <a:ext uri="{FF2B5EF4-FFF2-40B4-BE49-F238E27FC236}">
-                <a16:creationId xmlns:a16="http://schemas.microsoft.com/office/drawing/2014/main" id="{2AAB7ECB-F1A9-4D01-A297-D6F13A8C0BF9}"/>
+                <a16:creationId xmlns:a16="http://schemas.microsoft.com/office/drawing/2014/main" id="{167225F4-1A3E-4A15-B3A2-A7E5FB8E04C0}"/>
               </a:ext>
             </a:extLst>
           </p:cNvPr>
@@ -9676,7 +9676,7 @@
           <p:cNvPr id="45" name="">
             <a:extLst xmlns:a="http://schemas.openxmlformats.org/drawingml/2006/main">
               <a:ext uri="{FF2B5EF4-FFF2-40B4-BE49-F238E27FC236}">
-                <a16:creationId xmlns:a16="http://schemas.microsoft.com/office/drawing/2014/main" id="{3CBA472B-8D97-4A15-978E-113BBC27B06B}"/>
+                <a16:creationId xmlns:a16="http://schemas.microsoft.com/office/drawing/2014/main" id="{915B29EF-2E6B-47F1-8552-1A7E9B80CC62}"/>
               </a:ext>
             </a:extLst>
           </p:cNvPr>
@@ -9733,7 +9733,7 @@
           <p:cNvPr id="46" name="">
             <a:extLst xmlns:a="http://schemas.openxmlformats.org/drawingml/2006/main">
               <a:ext uri="{FF2B5EF4-FFF2-40B4-BE49-F238E27FC236}">
-                <a16:creationId xmlns:a16="http://schemas.microsoft.com/office/drawing/2014/main" id="{53320DA8-1EFC-406B-B6C1-F88F77F20039}"/>
+                <a16:creationId xmlns:a16="http://schemas.microsoft.com/office/drawing/2014/main" id="{66297210-DF81-4FDE-BA90-06E5BB2FDBFF}"/>
               </a:ext>
             </a:extLst>
           </p:cNvPr>
@@ -9765,7 +9765,7 @@
           <p:cNvPr id="47" name="">
             <a:extLst xmlns:a="http://schemas.openxmlformats.org/drawingml/2006/main">
               <a:ext uri="{FF2B5EF4-FFF2-40B4-BE49-F238E27FC236}">
-                <a16:creationId xmlns:a16="http://schemas.microsoft.com/office/drawing/2014/main" id="{092A23C4-D89C-48EB-93FE-4B395618E26C}"/>
+                <a16:creationId xmlns:a16="http://schemas.microsoft.com/office/drawing/2014/main" id="{F0CA141A-FF61-49AC-A48A-3B5C712CA383}"/>
               </a:ext>
             </a:extLst>
           </p:cNvPr>
@@ -9822,7 +9822,7 @@
           <p:cNvPr id="48" name="">
             <a:extLst xmlns:a="http://schemas.openxmlformats.org/drawingml/2006/main">
               <a:ext uri="{FF2B5EF4-FFF2-40B4-BE49-F238E27FC236}">
-                <a16:creationId xmlns:a16="http://schemas.microsoft.com/office/drawing/2014/main" id="{CCB46666-E96A-4D44-98DB-9E4448AC60C9}"/>
+                <a16:creationId xmlns:a16="http://schemas.microsoft.com/office/drawing/2014/main" id="{05B9DDCF-75C2-42E2-880A-9F4075CE4551}"/>
               </a:ext>
             </a:extLst>
           </p:cNvPr>
@@ -11420,7 +11420,7 @@
           <p:cNvPr id="29" name="">
             <a:extLst xmlns:a="http://schemas.openxmlformats.org/drawingml/2006/main">
               <a:ext uri="{FF2B5EF4-FFF2-40B4-BE49-F238E27FC236}">
-                <a16:creationId xmlns:a16="http://schemas.microsoft.com/office/drawing/2014/main" id="{83B1E89E-CD29-41A0-91B0-2DBE02268B6F}"/>
+                <a16:creationId xmlns:a16="http://schemas.microsoft.com/office/drawing/2014/main" id="{A14A3A0C-6D2E-4C79-8ED4-31B65EEFAC2A}"/>
               </a:ext>
             </a:extLst>
           </p:cNvPr>
@@ -11450,7 +11450,7 @@
           <p:cNvPr id="30" name="">
             <a:extLst xmlns:a="http://schemas.openxmlformats.org/drawingml/2006/main">
               <a:ext uri="{FF2B5EF4-FFF2-40B4-BE49-F238E27FC236}">
-                <a16:creationId xmlns:a16="http://schemas.microsoft.com/office/drawing/2014/main" id="{D7F704E7-CEFB-4D75-AC2E-04E67637378D}"/>
+                <a16:creationId xmlns:a16="http://schemas.microsoft.com/office/drawing/2014/main" id="{5216B448-F0A2-415B-913B-44058DAEE9A0}"/>
               </a:ext>
             </a:extLst>
           </p:cNvPr>
@@ -11507,7 +11507,7 @@
           <p:cNvPr id="31" name="">
             <a:extLst xmlns:a="http://schemas.openxmlformats.org/drawingml/2006/main">
               <a:ext uri="{FF2B5EF4-FFF2-40B4-BE49-F238E27FC236}">
-                <a16:creationId xmlns:a16="http://schemas.microsoft.com/office/drawing/2014/main" id="{6D3CEF02-D8BA-4B25-99AE-07167BC4FEAE}"/>
+                <a16:creationId xmlns:a16="http://schemas.microsoft.com/office/drawing/2014/main" id="{205A2551-5C04-46B7-8270-DB995817737E}"/>
               </a:ext>
             </a:extLst>
           </p:cNvPr>
@@ -11564,7 +11564,7 @@
           <p:cNvPr id="32" name="">
             <a:extLst xmlns:a="http://schemas.openxmlformats.org/drawingml/2006/main">
               <a:ext uri="{FF2B5EF4-FFF2-40B4-BE49-F238E27FC236}">
-                <a16:creationId xmlns:a16="http://schemas.microsoft.com/office/drawing/2014/main" id="{DED72694-6430-4840-B2B9-B262090846E1}"/>
+                <a16:creationId xmlns:a16="http://schemas.microsoft.com/office/drawing/2014/main" id="{9AB0113C-11DD-49A8-9545-E250271AECA1}"/>
               </a:ext>
             </a:extLst>
           </p:cNvPr>
@@ -11621,7 +11621,7 @@
           <p:cNvPr id="33" name="">
             <a:extLst xmlns:a="http://schemas.openxmlformats.org/drawingml/2006/main">
               <a:ext uri="{FF2B5EF4-FFF2-40B4-BE49-F238E27FC236}">
-                <a16:creationId xmlns:a16="http://schemas.microsoft.com/office/drawing/2014/main" id="{00929C0A-836A-4730-A0EE-A3435A5CB8E5}"/>
+                <a16:creationId xmlns:a16="http://schemas.microsoft.com/office/drawing/2014/main" id="{9CA4CDF0-9BF8-4A36-BFD3-CECDDA0C6F5F}"/>
               </a:ext>
             </a:extLst>
           </p:cNvPr>
@@ -11678,7 +11678,7 @@
           <p:cNvPr id="34" name="">
             <a:extLst xmlns:a="http://schemas.openxmlformats.org/drawingml/2006/main">
               <a:ext uri="{FF2B5EF4-FFF2-40B4-BE49-F238E27FC236}">
-                <a16:creationId xmlns:a16="http://schemas.microsoft.com/office/drawing/2014/main" id="{EF0210E1-0951-4854-B7D8-06A3578840D7}"/>
+                <a16:creationId xmlns:a16="http://schemas.microsoft.com/office/drawing/2014/main" id="{CD0B0DEB-C526-498A-A6D3-A4CD05E50B9B}"/>
               </a:ext>
             </a:extLst>
           </p:cNvPr>
@@ -11708,7 +11708,7 @@
           <p:cNvPr id="35" name="">
             <a:extLst xmlns:a="http://schemas.openxmlformats.org/drawingml/2006/main">
               <a:ext uri="{FF2B5EF4-FFF2-40B4-BE49-F238E27FC236}">
-                <a16:creationId xmlns:a16="http://schemas.microsoft.com/office/drawing/2014/main" id="{4092867C-328C-4B59-A9D8-CABABD4B622E}"/>
+                <a16:creationId xmlns:a16="http://schemas.microsoft.com/office/drawing/2014/main" id="{589D1668-AD2E-488B-843E-2BAD29F0ECC6}"/>
               </a:ext>
             </a:extLst>
           </p:cNvPr>
@@ -11765,7 +11765,7 @@
           <p:cNvPr id="36" name="">
             <a:extLst xmlns:a="http://schemas.openxmlformats.org/drawingml/2006/main">
               <a:ext uri="{FF2B5EF4-FFF2-40B4-BE49-F238E27FC236}">
-                <a16:creationId xmlns:a16="http://schemas.microsoft.com/office/drawing/2014/main" id="{1F91E083-3B1A-415B-9665-881AA30ACFEA}"/>
+                <a16:creationId xmlns:a16="http://schemas.microsoft.com/office/drawing/2014/main" id="{556556F1-5ADD-44E1-A82B-8A5E80482FA3}"/>
               </a:ext>
             </a:extLst>
           </p:cNvPr>
@@ -11797,7 +11797,7 @@
           <p:cNvPr id="37" name="">
             <a:extLst xmlns:a="http://schemas.openxmlformats.org/drawingml/2006/main">
               <a:ext uri="{FF2B5EF4-FFF2-40B4-BE49-F238E27FC236}">
-                <a16:creationId xmlns:a16="http://schemas.microsoft.com/office/drawing/2014/main" id="{C063A936-5116-434B-AF0E-FCE225CC2E81}"/>
+                <a16:creationId xmlns:a16="http://schemas.microsoft.com/office/drawing/2014/main" id="{DA7F8BA5-1888-4DF9-9C94-4C3CDD201DCF}"/>
               </a:ext>
             </a:extLst>
           </p:cNvPr>
@@ -11854,7 +11854,7 @@
           <p:cNvPr id="38" name="">
             <a:extLst xmlns:a="http://schemas.openxmlformats.org/drawingml/2006/main">
               <a:ext uri="{FF2B5EF4-FFF2-40B4-BE49-F238E27FC236}">
-                <a16:creationId xmlns:a16="http://schemas.microsoft.com/office/drawing/2014/main" id="{CA5EAC38-B612-405C-990C-D0C3EFFF881D}"/>
+                <a16:creationId xmlns:a16="http://schemas.microsoft.com/office/drawing/2014/main" id="{BEBFC636-EF4B-46B4-92DF-6C67BF021C63}"/>
               </a:ext>
             </a:extLst>
           </p:cNvPr>
@@ -11901,7 +11901,7 @@
                 <a:ea typeface="Arial"/>
                 <a:cs typeface="Arial"/>
               </a:rPr>
-              <a:t>Fixed voice or text input</a:t>
+              <a:t>Fixed symptom selections</a:t>
             </a:r>
           </a:p>
         </p:txBody>
@@ -11911,7 +11911,7 @@
           <p:cNvPr id="39" name="">
             <a:extLst xmlns:a="http://schemas.openxmlformats.org/drawingml/2006/main">
               <a:ext uri="{FF2B5EF4-FFF2-40B4-BE49-F238E27FC236}">
-                <a16:creationId xmlns:a16="http://schemas.microsoft.com/office/drawing/2014/main" id="{5019003D-58BD-420D-8251-B12BBA6249A5}"/>
+                <a16:creationId xmlns:a16="http://schemas.microsoft.com/office/drawing/2014/main" id="{D23B9221-E2EA-459A-B8CE-B6C65C7DBF2A}"/>
               </a:ext>
             </a:extLst>
           </p:cNvPr>
@@ -11941,7 +11941,7 @@
           <p:cNvPr id="40" name="">
             <a:extLst xmlns:a="http://schemas.openxmlformats.org/drawingml/2006/main">
               <a:ext uri="{FF2B5EF4-FFF2-40B4-BE49-F238E27FC236}">
-                <a16:creationId xmlns:a16="http://schemas.microsoft.com/office/drawing/2014/main" id="{C652051E-9238-47FD-8FAE-05E71D5D81CD}"/>
+                <a16:creationId xmlns:a16="http://schemas.microsoft.com/office/drawing/2014/main" id="{BECF3084-4730-472F-A87E-E5B387593130}"/>
               </a:ext>
             </a:extLst>
           </p:cNvPr>
@@ -11973,7 +11973,7 @@
           <p:cNvPr id="41" name="">
             <a:extLst xmlns:a="http://schemas.openxmlformats.org/drawingml/2006/main">
               <a:ext uri="{FF2B5EF4-FFF2-40B4-BE49-F238E27FC236}">
-                <a16:creationId xmlns:a16="http://schemas.microsoft.com/office/drawing/2014/main" id="{B34E1AFA-6FD2-4B88-BF18-E9EDEF5FBE34}"/>
+                <a16:creationId xmlns:a16="http://schemas.microsoft.com/office/drawing/2014/main" id="{991FD7F9-2CD2-4C07-8FD6-F406766FA41D}"/>
               </a:ext>
             </a:extLst>
           </p:cNvPr>
@@ -12053,7 +12053,7 @@
           <p:cNvPr id="42" name="">
             <a:extLst xmlns:a="http://schemas.openxmlformats.org/drawingml/2006/main">
               <a:ext uri="{FF2B5EF4-FFF2-40B4-BE49-F238E27FC236}">
-                <a16:creationId xmlns:a16="http://schemas.microsoft.com/office/drawing/2014/main" id="{3CFFDAF4-6250-4012-9219-0651A90A0308}"/>
+                <a16:creationId xmlns:a16="http://schemas.microsoft.com/office/drawing/2014/main" id="{5C492D52-C5F9-4F48-A466-8A5B67EAF3F2}"/>
               </a:ext>
             </a:extLst>
           </p:cNvPr>
@@ -12110,7 +12110,7 @@
           <p:cNvPr id="43" name="">
             <a:extLst xmlns:a="http://schemas.openxmlformats.org/drawingml/2006/main">
               <a:ext uri="{FF2B5EF4-FFF2-40B4-BE49-F238E27FC236}">
-                <a16:creationId xmlns:a16="http://schemas.microsoft.com/office/drawing/2014/main" id="{A7483D9A-F24A-4F0A-A130-7144D3F3F365}"/>
+                <a16:creationId xmlns:a16="http://schemas.microsoft.com/office/drawing/2014/main" id="{A2928540-C6AB-49EA-B548-2CA1B04277E9}"/>
               </a:ext>
             </a:extLst>
           </p:cNvPr>
@@ -12140,7 +12140,7 @@
           <p:cNvPr id="44" name="">
             <a:extLst xmlns:a="http://schemas.openxmlformats.org/drawingml/2006/main">
               <a:ext uri="{FF2B5EF4-FFF2-40B4-BE49-F238E27FC236}">
-                <a16:creationId xmlns:a16="http://schemas.microsoft.com/office/drawing/2014/main" id="{25574400-EB29-490A-8DF9-A2C7A41B216B}"/>
+                <a16:creationId xmlns:a16="http://schemas.microsoft.com/office/drawing/2014/main" id="{FFA0BFB9-2B41-4351-91A5-D5BD4D53E1BE}"/>
               </a:ext>
             </a:extLst>
           </p:cNvPr>
@@ -12172,7 +12172,7 @@
           <p:cNvPr id="45" name="">
             <a:extLst xmlns:a="http://schemas.openxmlformats.org/drawingml/2006/main">
               <a:ext uri="{FF2B5EF4-FFF2-40B4-BE49-F238E27FC236}">
-                <a16:creationId xmlns:a16="http://schemas.microsoft.com/office/drawing/2014/main" id="{1EEFD2D4-27D2-46BE-98E7-7A87FDE68246}"/>
+                <a16:creationId xmlns:a16="http://schemas.microsoft.com/office/drawing/2014/main" id="{E1DD059E-6BA8-46CC-8A96-FC64ABFC4955}"/>
               </a:ext>
             </a:extLst>
           </p:cNvPr>
@@ -12229,7 +12229,7 @@
           <p:cNvPr id="46" name="">
             <a:extLst xmlns:a="http://schemas.openxmlformats.org/drawingml/2006/main">
               <a:ext uri="{FF2B5EF4-FFF2-40B4-BE49-F238E27FC236}">
-                <a16:creationId xmlns:a16="http://schemas.microsoft.com/office/drawing/2014/main" id="{8428BCC8-85FA-4337-AFE8-F78C8C51B979}"/>
+                <a16:creationId xmlns:a16="http://schemas.microsoft.com/office/drawing/2014/main" id="{DF7A856E-73E4-4F9E-9EAC-B0D4F0EC8207}"/>
               </a:ext>
             </a:extLst>
           </p:cNvPr>
@@ -12286,7 +12286,7 @@
           <p:cNvPr id="47" name="">
             <a:extLst xmlns:a="http://schemas.openxmlformats.org/drawingml/2006/main">
               <a:ext uri="{FF2B5EF4-FFF2-40B4-BE49-F238E27FC236}">
-                <a16:creationId xmlns:a16="http://schemas.microsoft.com/office/drawing/2014/main" id="{BA670724-3D79-42AB-8620-E197B34E98DD}"/>
+                <a16:creationId xmlns:a16="http://schemas.microsoft.com/office/drawing/2014/main" id="{EB0A8314-3C7A-410D-8E10-DE5D20980EEF}"/>
               </a:ext>
             </a:extLst>
           </p:cNvPr>
@@ -12316,7 +12316,7 @@
           <p:cNvPr id="48" name="">
             <a:extLst xmlns:a="http://schemas.openxmlformats.org/drawingml/2006/main">
               <a:ext uri="{FF2B5EF4-FFF2-40B4-BE49-F238E27FC236}">
-                <a16:creationId xmlns:a16="http://schemas.microsoft.com/office/drawing/2014/main" id="{158A0721-8F7F-483B-BA4C-078FD9489AEA}"/>
+                <a16:creationId xmlns:a16="http://schemas.microsoft.com/office/drawing/2014/main" id="{03E2D8C4-D89F-4083-A6B6-807DA133D897}"/>
               </a:ext>
             </a:extLst>
           </p:cNvPr>
@@ -12348,7 +12348,7 @@
           <p:cNvPr id="49" name="">
             <a:extLst xmlns:a="http://schemas.openxmlformats.org/drawingml/2006/main">
               <a:ext uri="{FF2B5EF4-FFF2-40B4-BE49-F238E27FC236}">
-                <a16:creationId xmlns:a16="http://schemas.microsoft.com/office/drawing/2014/main" id="{61CF34A7-8AA0-4770-9401-0615D075D50C}"/>
+                <a16:creationId xmlns:a16="http://schemas.microsoft.com/office/drawing/2014/main" id="{14374A33-C257-4568-B464-EA2A48D9DE07}"/>
               </a:ext>
             </a:extLst>
           </p:cNvPr>
@@ -12405,7 +12405,7 @@
           <p:cNvPr id="50" name="">
             <a:extLst xmlns:a="http://schemas.openxmlformats.org/drawingml/2006/main">
               <a:ext uri="{FF2B5EF4-FFF2-40B4-BE49-F238E27FC236}">
-                <a16:creationId xmlns:a16="http://schemas.microsoft.com/office/drawing/2014/main" id="{17146716-4BED-47C7-87A3-6CA2F46F558D}"/>
+                <a16:creationId xmlns:a16="http://schemas.microsoft.com/office/drawing/2014/main" id="{5C0B88BC-83FA-46E1-9810-10F11DF5AE5E}"/>
               </a:ext>
             </a:extLst>
           </p:cNvPr>
@@ -12462,7 +12462,7 @@
           <p:cNvPr id="51" name="">
             <a:extLst xmlns:a="http://schemas.openxmlformats.org/drawingml/2006/main">
               <a:ext uri="{FF2B5EF4-FFF2-40B4-BE49-F238E27FC236}">
-                <a16:creationId xmlns:a16="http://schemas.microsoft.com/office/drawing/2014/main" id="{F843CD03-563D-43C2-8158-18476BA215A3}"/>
+                <a16:creationId xmlns:a16="http://schemas.microsoft.com/office/drawing/2014/main" id="{FA31637F-9DE0-4A85-A45B-257CF9D4CEF7}"/>
               </a:ext>
             </a:extLst>
           </p:cNvPr>
@@ -12494,7 +12494,7 @@
           <p:cNvPr id="52" name="">
             <a:extLst xmlns:a="http://schemas.openxmlformats.org/drawingml/2006/main">
               <a:ext uri="{FF2B5EF4-FFF2-40B4-BE49-F238E27FC236}">
-                <a16:creationId xmlns:a16="http://schemas.microsoft.com/office/drawing/2014/main" id="{37F2C559-B056-41EA-B2FD-BEEEFA19F480}"/>
+                <a16:creationId xmlns:a16="http://schemas.microsoft.com/office/drawing/2014/main" id="{3A8A35CE-0A38-48C5-8FBF-E5E9FF3B5CE2}"/>
               </a:ext>
             </a:extLst>
           </p:cNvPr>
@@ -12551,7 +12551,64 @@
           <p:cNvPr id="53" name="">
             <a:extLst xmlns:a="http://schemas.openxmlformats.org/drawingml/2006/main">
               <a:ext uri="{FF2B5EF4-FFF2-40B4-BE49-F238E27FC236}">
-                <a16:creationId xmlns:a16="http://schemas.microsoft.com/office/drawing/2014/main" id="{34EE8E1E-F950-4B0B-8121-69A60195F911}"/>
+                <a16:creationId xmlns:a16="http://schemas.microsoft.com/office/drawing/2014/main" id="{155D5982-10C9-4DC2-9748-B3F4E90CF30D}"/>
+              </a:ext>
+            </a:extLst>
+          </p:cNvPr>
+          <p:cNvSpPr>
+            <a:spLocks xmlns:a="http://schemas.openxmlformats.org/drawingml/2006/main" noGrp="1"/>
+          </p:cNvSpPr>
+          <p:nvPr/>
+        </p:nvSpPr>
+        <p:spPr>
+          <a:xfrm xmlns:a="http://schemas.openxmlformats.org/drawingml/2006/main">
+            <a:off x="1466850" y="4133850"/>
+            <a:ext cx="8572500" cy="152400"/>
+          </a:xfrm>
+          <a:prstGeom xmlns:a="http://schemas.openxmlformats.org/drawingml/2006/main" prst="rect">
+            <a:avLst/>
+          </a:prstGeom>
+          <a:noFill xmlns:a="http://schemas.openxmlformats.org/drawingml/2006/main"/>
+          <a:ln xmlns:a="http://schemas.openxmlformats.org/drawingml/2006/main" w="0">
+            <a:noFill/>
+          </a:ln>
+        </p:spPr>
+        <p:txBody>
+          <a:bodyPr xmlns:a="http://schemas.openxmlformats.org/drawingml/2006/main">
+            <a:noAutofit/>
+          </a:bodyPr>
+          <a:lstStyle xmlns:a="http://schemas.openxmlformats.org/drawingml/2006/main"/>
+          <a:p xmlns:a="http://schemas.openxmlformats.org/drawingml/2006/main">
+            <a:pPr algn="ctr">
+              <a:defRPr sz="900">
+                <a:solidFill>
+                  <a:srgbClr val="DCE4F3"/>
+                </a:solidFill>
+                <a:latin typeface="Arial"/>
+                <a:ea typeface="Arial"/>
+                <a:cs typeface="Arial"/>
+              </a:defRPr>
+            </a:pPr>
+            <a:r>
+              <a:rPr sz="900">
+                <a:solidFill>
+                  <a:srgbClr val="DCE4F3"/>
+                </a:solidFill>
+                <a:latin typeface="Arial"/>
+                <a:ea typeface="Arial"/>
+                <a:cs typeface="Arial"/>
+              </a:rPr>
+              <a:t>Optional voice and free-text notes provide context only. They do not determine the route.</a:t>
+            </a:r>
+          </a:p>
+        </p:txBody>
+      </p:sp>
+      <p:sp>
+        <p:nvSpPr>
+          <p:cNvPr id="54" name="">
+            <a:extLst xmlns:a="http://schemas.openxmlformats.org/drawingml/2006/main">
+              <a:ext uri="{FF2B5EF4-FFF2-40B4-BE49-F238E27FC236}">
+                <a16:creationId xmlns:a16="http://schemas.microsoft.com/office/drawing/2014/main" id="{4EB55AEE-5E93-4D1D-8DCA-ED21670866C4}"/>
               </a:ext>
             </a:extLst>
           </p:cNvPr>
@@ -12605,10 +12662,10 @@
       </p:sp>
       <p:sp>
         <p:nvSpPr>
-          <p:cNvPr id="54" name="">
-            <a:extLst xmlns:a="http://schemas.openxmlformats.org/drawingml/2006/main">
-              <a:ext uri="{FF2B5EF4-FFF2-40B4-BE49-F238E27FC236}">
-                <a16:creationId xmlns:a16="http://schemas.microsoft.com/office/drawing/2014/main" id="{A8B3EC93-6066-4382-9A44-32DE56F0B011}"/>
+          <p:cNvPr id="55" name="">
+            <a:extLst xmlns:a="http://schemas.openxmlformats.org/drawingml/2006/main">
+              <a:ext uri="{FF2B5EF4-FFF2-40B4-BE49-F238E27FC236}">
+                <a16:creationId xmlns:a16="http://schemas.microsoft.com/office/drawing/2014/main" id="{EE33D6EC-A0DC-4546-AF5F-F035CDCF64C4}"/>
               </a:ext>
             </a:extLst>
           </p:cNvPr>
@@ -12637,10 +12694,10 @@
       </p:sp>
       <p:sp>
         <p:nvSpPr>
-          <p:cNvPr id="55" name="">
-            <a:extLst xmlns:a="http://schemas.openxmlformats.org/drawingml/2006/main">
-              <a:ext uri="{FF2B5EF4-FFF2-40B4-BE49-F238E27FC236}">
-                <a16:creationId xmlns:a16="http://schemas.microsoft.com/office/drawing/2014/main" id="{25F76C5A-ABF3-4F2F-85FE-A677DBCF125D}"/>
+          <p:cNvPr id="56" name="">
+            <a:extLst xmlns:a="http://schemas.openxmlformats.org/drawingml/2006/main">
+              <a:ext uri="{FF2B5EF4-FFF2-40B4-BE49-F238E27FC236}">
+                <a16:creationId xmlns:a16="http://schemas.microsoft.com/office/drawing/2014/main" id="{6B339183-94A2-4323-A8EF-10A25761304D}"/>
               </a:ext>
             </a:extLst>
           </p:cNvPr>
@@ -12694,10 +12751,10 @@
       </p:sp>
       <p:sp>
         <p:nvSpPr>
-          <p:cNvPr id="56" name="">
-            <a:extLst xmlns:a="http://schemas.openxmlformats.org/drawingml/2006/main">
-              <a:ext uri="{FF2B5EF4-FFF2-40B4-BE49-F238E27FC236}">
-                <a16:creationId xmlns:a16="http://schemas.microsoft.com/office/drawing/2014/main" id="{AA75B2B0-F0B1-4EDB-8CEE-77C5D200536A}"/>
+          <p:cNvPr id="57" name="">
+            <a:extLst xmlns:a="http://schemas.openxmlformats.org/drawingml/2006/main">
+              <a:ext uri="{FF2B5EF4-FFF2-40B4-BE49-F238E27FC236}">
+                <a16:creationId xmlns:a16="http://schemas.microsoft.com/office/drawing/2014/main" id="{BFAD9299-93F1-4ED8-B35E-EE62A6F56EDF}"/>
               </a:ext>
             </a:extLst>
           </p:cNvPr>
@@ -12774,10 +12831,10 @@
       </p:sp>
       <p:sp>
         <p:nvSpPr>
-          <p:cNvPr id="57" name="">
-            <a:extLst xmlns:a="http://schemas.openxmlformats.org/drawingml/2006/main">
-              <a:ext uri="{FF2B5EF4-FFF2-40B4-BE49-F238E27FC236}">
-                <a16:creationId xmlns:a16="http://schemas.microsoft.com/office/drawing/2014/main" id="{3E33E262-109D-4097-AA24-4DC77A69299A}"/>
+          <p:cNvPr id="58" name="">
+            <a:extLst xmlns:a="http://schemas.openxmlformats.org/drawingml/2006/main">
+              <a:ext uri="{FF2B5EF4-FFF2-40B4-BE49-F238E27FC236}">
+                <a16:creationId xmlns:a16="http://schemas.microsoft.com/office/drawing/2014/main" id="{89648EDE-976B-4F1D-9536-B335CF7DD497}"/>
               </a:ext>
             </a:extLst>
           </p:cNvPr>
@@ -12804,10 +12861,10 @@
       </p:sp>
       <p:sp>
         <p:nvSpPr>
-          <p:cNvPr id="58" name="">
-            <a:extLst xmlns:a="http://schemas.openxmlformats.org/drawingml/2006/main">
-              <a:ext uri="{FF2B5EF4-FFF2-40B4-BE49-F238E27FC236}">
-                <a16:creationId xmlns:a16="http://schemas.microsoft.com/office/drawing/2014/main" id="{1455884A-04E3-48A1-83F9-9A8B74D79B92}"/>
+          <p:cNvPr id="59" name="">
+            <a:extLst xmlns:a="http://schemas.openxmlformats.org/drawingml/2006/main">
+              <a:ext uri="{FF2B5EF4-FFF2-40B4-BE49-F238E27FC236}">
+                <a16:creationId xmlns:a16="http://schemas.microsoft.com/office/drawing/2014/main" id="{E74FD7DA-4B62-45FE-97BE-E5F52C0F3FC5}"/>
               </a:ext>
             </a:extLst>
           </p:cNvPr>
@@ -12836,10 +12893,10 @@
       </p:sp>
       <p:sp>
         <p:nvSpPr>
-          <p:cNvPr id="59" name="">
-            <a:extLst xmlns:a="http://schemas.openxmlformats.org/drawingml/2006/main">
-              <a:ext uri="{FF2B5EF4-FFF2-40B4-BE49-F238E27FC236}">
-                <a16:creationId xmlns:a16="http://schemas.microsoft.com/office/drawing/2014/main" id="{D049A514-4036-4171-B7EE-E5C26C4697D3}"/>
+          <p:cNvPr id="60" name="">
+            <a:extLst xmlns:a="http://schemas.openxmlformats.org/drawingml/2006/main">
+              <a:ext uri="{FF2B5EF4-FFF2-40B4-BE49-F238E27FC236}">
+                <a16:creationId xmlns:a16="http://schemas.microsoft.com/office/drawing/2014/main" id="{418E9FBA-6456-4C29-9332-D9B521CDC59F}"/>
               </a:ext>
             </a:extLst>
           </p:cNvPr>
@@ -12893,10 +12950,10 @@
       </p:sp>
       <p:sp>
         <p:nvSpPr>
-          <p:cNvPr id="60" name="">
-            <a:extLst xmlns:a="http://schemas.openxmlformats.org/drawingml/2006/main">
-              <a:ext uri="{FF2B5EF4-FFF2-40B4-BE49-F238E27FC236}">
-                <a16:creationId xmlns:a16="http://schemas.microsoft.com/office/drawing/2014/main" id="{47C19ACC-A01F-4895-9E9A-89DF6B7455A5}"/>
+          <p:cNvPr id="61" name="">
+            <a:extLst xmlns:a="http://schemas.openxmlformats.org/drawingml/2006/main">
+              <a:ext uri="{FF2B5EF4-FFF2-40B4-BE49-F238E27FC236}">
+                <a16:creationId xmlns:a16="http://schemas.microsoft.com/office/drawing/2014/main" id="{53519254-ACBE-4594-8220-5E8BDEE9B601}"/>
               </a:ext>
             </a:extLst>
           </p:cNvPr>
@@ -12973,10 +13030,10 @@
       </p:sp>
       <p:sp>
         <p:nvSpPr>
-          <p:cNvPr id="61" name="">
-            <a:extLst xmlns:a="http://schemas.openxmlformats.org/drawingml/2006/main">
-              <a:ext uri="{FF2B5EF4-FFF2-40B4-BE49-F238E27FC236}">
-                <a16:creationId xmlns:a16="http://schemas.microsoft.com/office/drawing/2014/main" id="{2EA59DF8-75DB-43E8-92AF-5BEBB42DB3EF}"/>
+          <p:cNvPr id="62" name="">
+            <a:extLst xmlns:a="http://schemas.openxmlformats.org/drawingml/2006/main">
+              <a:ext uri="{FF2B5EF4-FFF2-40B4-BE49-F238E27FC236}">
+                <a16:creationId xmlns:a16="http://schemas.microsoft.com/office/drawing/2014/main" id="{10524C5E-FA1E-4290-B94C-939EECD7D788}"/>
               </a:ext>
             </a:extLst>
           </p:cNvPr>
@@ -13003,10 +13060,10 @@
       </p:sp>
       <p:sp>
         <p:nvSpPr>
-          <p:cNvPr id="62" name="">
-            <a:extLst xmlns:a="http://schemas.openxmlformats.org/drawingml/2006/main">
-              <a:ext uri="{FF2B5EF4-FFF2-40B4-BE49-F238E27FC236}">
-                <a16:creationId xmlns:a16="http://schemas.microsoft.com/office/drawing/2014/main" id="{95B9EA50-3F69-4847-ADD8-0ABFE322A0F6}"/>
+          <p:cNvPr id="63" name="">
+            <a:extLst xmlns:a="http://schemas.openxmlformats.org/drawingml/2006/main">
+              <a:ext uri="{FF2B5EF4-FFF2-40B4-BE49-F238E27FC236}">
+                <a16:creationId xmlns:a16="http://schemas.microsoft.com/office/drawing/2014/main" id="{94074482-00DA-431E-8AD0-C483FC69DA4A}"/>
               </a:ext>
             </a:extLst>
           </p:cNvPr>
@@ -13035,10 +13092,10 @@
       </p:sp>
       <p:sp>
         <p:nvSpPr>
-          <p:cNvPr id="63" name="">
-            <a:extLst xmlns:a="http://schemas.openxmlformats.org/drawingml/2006/main">
-              <a:ext uri="{FF2B5EF4-FFF2-40B4-BE49-F238E27FC236}">
-                <a16:creationId xmlns:a16="http://schemas.microsoft.com/office/drawing/2014/main" id="{017E0BAB-DE79-4282-A007-C0F2C41E07BB}"/>
+          <p:cNvPr id="64" name="">
+            <a:extLst xmlns:a="http://schemas.openxmlformats.org/drawingml/2006/main">
+              <a:ext uri="{FF2B5EF4-FFF2-40B4-BE49-F238E27FC236}">
+                <a16:creationId xmlns:a16="http://schemas.microsoft.com/office/drawing/2014/main" id="{A3A7D547-CE33-4E2A-9634-671165664B78}"/>
               </a:ext>
             </a:extLst>
           </p:cNvPr>
@@ -13092,10 +13149,10 @@
       </p:sp>
       <p:sp>
         <p:nvSpPr>
-          <p:cNvPr id="64" name="">
-            <a:extLst xmlns:a="http://schemas.openxmlformats.org/drawingml/2006/main">
-              <a:ext uri="{FF2B5EF4-FFF2-40B4-BE49-F238E27FC236}">
-                <a16:creationId xmlns:a16="http://schemas.microsoft.com/office/drawing/2014/main" id="{88C24DE4-7E7F-4625-A8A4-13A3A58507F5}"/>
+          <p:cNvPr id="65" name="">
+            <a:extLst xmlns:a="http://schemas.openxmlformats.org/drawingml/2006/main">
+              <a:ext uri="{FF2B5EF4-FFF2-40B4-BE49-F238E27FC236}">
+                <a16:creationId xmlns:a16="http://schemas.microsoft.com/office/drawing/2014/main" id="{4E1F98ED-8EA4-477E-85DC-CCDCA7E56518}"/>
               </a:ext>
             </a:extLst>
           </p:cNvPr>
@@ -13149,10 +13206,10 @@
       </p:sp>
       <p:sp>
         <p:nvSpPr>
-          <p:cNvPr id="65" name="">
-            <a:extLst xmlns:a="http://schemas.openxmlformats.org/drawingml/2006/main">
-              <a:ext uri="{FF2B5EF4-FFF2-40B4-BE49-F238E27FC236}">
-                <a16:creationId xmlns:a16="http://schemas.microsoft.com/office/drawing/2014/main" id="{1B8DDF0D-9929-43AE-A44D-8596A867638F}"/>
+          <p:cNvPr id="66" name="">
+            <a:extLst xmlns:a="http://schemas.openxmlformats.org/drawingml/2006/main">
+              <a:ext uri="{FF2B5EF4-FFF2-40B4-BE49-F238E27FC236}">
+                <a16:creationId xmlns:a16="http://schemas.microsoft.com/office/drawing/2014/main" id="{BAADF5DB-D52C-4541-A6CC-80A3190CA2EC}"/>
               </a:ext>
             </a:extLst>
           </p:cNvPr>
@@ -13206,10 +13263,10 @@
       </p:sp>
       <p:sp>
         <p:nvSpPr>
-          <p:cNvPr id="66" name="">
-            <a:extLst xmlns:a="http://schemas.openxmlformats.org/drawingml/2006/main">
-              <a:ext uri="{FF2B5EF4-FFF2-40B4-BE49-F238E27FC236}">
-                <a16:creationId xmlns:a16="http://schemas.microsoft.com/office/drawing/2014/main" id="{FCA94C60-BEB0-404A-B2A5-71D7244726E4}"/>
+          <p:cNvPr id="67" name="">
+            <a:extLst xmlns:a="http://schemas.openxmlformats.org/drawingml/2006/main">
+              <a:ext uri="{FF2B5EF4-FFF2-40B4-BE49-F238E27FC236}">
+                <a16:creationId xmlns:a16="http://schemas.microsoft.com/office/drawing/2014/main" id="{6792340E-FD18-4ED5-978F-2CBEC442BCB7}"/>
               </a:ext>
             </a:extLst>
           </p:cNvPr>
@@ -15355,7 +15412,7 @@
           <p:cNvPr id="41" name="">
             <a:extLst xmlns:a="http://schemas.openxmlformats.org/drawingml/2006/main">
               <a:ext uri="{FF2B5EF4-FFF2-40B4-BE49-F238E27FC236}">
-                <a16:creationId xmlns:a16="http://schemas.microsoft.com/office/drawing/2014/main" id="{E3A693FD-74AB-4CF9-8EBF-65A0DF3C969F}"/>
+                <a16:creationId xmlns:a16="http://schemas.microsoft.com/office/drawing/2014/main" id="{8CB2902A-56B9-4E2D-AA66-023EC0AA5B65}"/>
               </a:ext>
             </a:extLst>
           </p:cNvPr>
@@ -15385,7 +15442,7 @@
           <p:cNvPr id="42" name="">
             <a:extLst xmlns:a="http://schemas.openxmlformats.org/drawingml/2006/main">
               <a:ext uri="{FF2B5EF4-FFF2-40B4-BE49-F238E27FC236}">
-                <a16:creationId xmlns:a16="http://schemas.microsoft.com/office/drawing/2014/main" id="{9FC56A02-F138-4E31-92E4-D0F5A795F143}"/>
+                <a16:creationId xmlns:a16="http://schemas.microsoft.com/office/drawing/2014/main" id="{5214BDDA-5145-4BB5-B841-3FD742064BB6}"/>
               </a:ext>
             </a:extLst>
           </p:cNvPr>
@@ -15442,7 +15499,7 @@
           <p:cNvPr id="43" name="">
             <a:extLst xmlns:a="http://schemas.openxmlformats.org/drawingml/2006/main">
               <a:ext uri="{FF2B5EF4-FFF2-40B4-BE49-F238E27FC236}">
-                <a16:creationId xmlns:a16="http://schemas.microsoft.com/office/drawing/2014/main" id="{EAEF0BF3-988E-416F-B2C9-E317716FC549}"/>
+                <a16:creationId xmlns:a16="http://schemas.microsoft.com/office/drawing/2014/main" id="{6AADA492-2116-4E4C-AFE1-3555B4DEA02D}"/>
               </a:ext>
             </a:extLst>
           </p:cNvPr>
@@ -15499,7 +15556,7 @@
           <p:cNvPr id="44" name="">
             <a:extLst xmlns:a="http://schemas.openxmlformats.org/drawingml/2006/main">
               <a:ext uri="{FF2B5EF4-FFF2-40B4-BE49-F238E27FC236}">
-                <a16:creationId xmlns:a16="http://schemas.microsoft.com/office/drawing/2014/main" id="{B9E5C05B-6BC3-4413-8064-7364BF29C119}"/>
+                <a16:creationId xmlns:a16="http://schemas.microsoft.com/office/drawing/2014/main" id="{6E12C83A-979D-4640-904E-1AD4CAB0DC18}"/>
               </a:ext>
             </a:extLst>
           </p:cNvPr>
@@ -15556,7 +15613,7 @@
           <p:cNvPr id="45" name="">
             <a:extLst xmlns:a="http://schemas.openxmlformats.org/drawingml/2006/main">
               <a:ext uri="{FF2B5EF4-FFF2-40B4-BE49-F238E27FC236}">
-                <a16:creationId xmlns:a16="http://schemas.microsoft.com/office/drawing/2014/main" id="{E0E72B31-ADCE-4D2C-8FDC-657287049C89}"/>
+                <a16:creationId xmlns:a16="http://schemas.microsoft.com/office/drawing/2014/main" id="{D4059C87-37ED-4C90-BCB3-97E8E82461F8}"/>
               </a:ext>
             </a:extLst>
           </p:cNvPr>
@@ -15613,7 +15670,7 @@
           <p:cNvPr id="46" name="">
             <a:extLst xmlns:a="http://schemas.openxmlformats.org/drawingml/2006/main">
               <a:ext uri="{FF2B5EF4-FFF2-40B4-BE49-F238E27FC236}">
-                <a16:creationId xmlns:a16="http://schemas.microsoft.com/office/drawing/2014/main" id="{CEE03F19-5AE5-43DA-84D3-4FE7F4BA3CE2}"/>
+                <a16:creationId xmlns:a16="http://schemas.microsoft.com/office/drawing/2014/main" id="{636B973D-9A3A-4B6A-A125-E4F94166B5F6}"/>
               </a:ext>
             </a:extLst>
           </p:cNvPr>
@@ -15643,7 +15700,7 @@
           <p:cNvPr id="47" name="">
             <a:extLst xmlns:a="http://schemas.openxmlformats.org/drawingml/2006/main">
               <a:ext uri="{FF2B5EF4-FFF2-40B4-BE49-F238E27FC236}">
-                <a16:creationId xmlns:a16="http://schemas.microsoft.com/office/drawing/2014/main" id="{4E6248F6-B6F0-473B-9C7D-1265BAB2EDF8}"/>
+                <a16:creationId xmlns:a16="http://schemas.microsoft.com/office/drawing/2014/main" id="{A96C5F0B-2387-45A0-AB24-B1C3610CB103}"/>
               </a:ext>
             </a:extLst>
           </p:cNvPr>
@@ -15677,7 +15734,7 @@
           <p:cNvPr id="48" name="">
             <a:extLst xmlns:a="http://schemas.openxmlformats.org/drawingml/2006/main">
               <a:ext uri="{FF2B5EF4-FFF2-40B4-BE49-F238E27FC236}">
-                <a16:creationId xmlns:a16="http://schemas.microsoft.com/office/drawing/2014/main" id="{6B14125A-6F3A-425F-8EA7-57349C8FFBC3}"/>
+                <a16:creationId xmlns:a16="http://schemas.microsoft.com/office/drawing/2014/main" id="{E56C05AC-EF13-4C31-A3EF-131C84446A67}"/>
               </a:ext>
             </a:extLst>
           </p:cNvPr>
@@ -15709,7 +15766,7 @@
           <p:cNvPr id="49" name="">
             <a:extLst xmlns:a="http://schemas.openxmlformats.org/drawingml/2006/main">
               <a:ext uri="{FF2B5EF4-FFF2-40B4-BE49-F238E27FC236}">
-                <a16:creationId xmlns:a16="http://schemas.microsoft.com/office/drawing/2014/main" id="{E3BD7B36-BBCC-4A54-9CD8-07C30AF49D55}"/>
+                <a16:creationId xmlns:a16="http://schemas.microsoft.com/office/drawing/2014/main" id="{07833797-1F69-4601-AF93-65DB69791DC5}"/>
               </a:ext>
             </a:extLst>
           </p:cNvPr>
@@ -15766,7 +15823,7 @@
           <p:cNvPr id="50" name="">
             <a:extLst xmlns:a="http://schemas.openxmlformats.org/drawingml/2006/main">
               <a:ext uri="{FF2B5EF4-FFF2-40B4-BE49-F238E27FC236}">
-                <a16:creationId xmlns:a16="http://schemas.microsoft.com/office/drawing/2014/main" id="{6F2A9A5A-32BB-4EBD-B698-EF90EA40E1B9}"/>
+                <a16:creationId xmlns:a16="http://schemas.microsoft.com/office/drawing/2014/main" id="{903FEC1B-BA8E-4472-84E1-5AFB3C3CF128}"/>
               </a:ext>
             </a:extLst>
           </p:cNvPr>
@@ -15823,7 +15880,7 @@
           <p:cNvPr id="51" name="">
             <a:extLst xmlns:a="http://schemas.openxmlformats.org/drawingml/2006/main">
               <a:ext uri="{FF2B5EF4-FFF2-40B4-BE49-F238E27FC236}">
-                <a16:creationId xmlns:a16="http://schemas.microsoft.com/office/drawing/2014/main" id="{6D8A062A-BC49-4E36-8505-476446988357}"/>
+                <a16:creationId xmlns:a16="http://schemas.microsoft.com/office/drawing/2014/main" id="{8DD63BD9-43AB-474B-9FD9-C810CF28927A}"/>
               </a:ext>
             </a:extLst>
           </p:cNvPr>
@@ -15880,7 +15937,7 @@
           <p:cNvPr id="52" name="">
             <a:extLst xmlns:a="http://schemas.openxmlformats.org/drawingml/2006/main">
               <a:ext uri="{FF2B5EF4-FFF2-40B4-BE49-F238E27FC236}">
-                <a16:creationId xmlns:a16="http://schemas.microsoft.com/office/drawing/2014/main" id="{9CBE23EB-65E8-491F-A65E-A6BBCD3852D2}"/>
+                <a16:creationId xmlns:a16="http://schemas.microsoft.com/office/drawing/2014/main" id="{1189172A-7162-4D77-979D-A372CB860C6D}"/>
               </a:ext>
             </a:extLst>
           </p:cNvPr>
@@ -15914,7 +15971,7 @@
           <p:cNvPr id="53" name="">
             <a:extLst xmlns:a="http://schemas.openxmlformats.org/drawingml/2006/main">
               <a:ext uri="{FF2B5EF4-FFF2-40B4-BE49-F238E27FC236}">
-                <a16:creationId xmlns:a16="http://schemas.microsoft.com/office/drawing/2014/main" id="{B0D33192-5F9F-4E85-8522-5E8CC2FCC108}"/>
+                <a16:creationId xmlns:a16="http://schemas.microsoft.com/office/drawing/2014/main" id="{61369A2D-81CC-4A2A-8BE1-83EF241A275D}"/>
               </a:ext>
             </a:extLst>
           </p:cNvPr>
@@ -15946,7 +16003,7 @@
           <p:cNvPr id="54" name="">
             <a:extLst xmlns:a="http://schemas.openxmlformats.org/drawingml/2006/main">
               <a:ext uri="{FF2B5EF4-FFF2-40B4-BE49-F238E27FC236}">
-                <a16:creationId xmlns:a16="http://schemas.microsoft.com/office/drawing/2014/main" id="{4D6B43F3-9A9B-4802-AADE-A55010C74D1C}"/>
+                <a16:creationId xmlns:a16="http://schemas.microsoft.com/office/drawing/2014/main" id="{53A59EA9-372D-4FA7-BEFF-0F22FACA8A4D}"/>
               </a:ext>
             </a:extLst>
           </p:cNvPr>
@@ -16003,7 +16060,7 @@
           <p:cNvPr id="55" name="">
             <a:extLst xmlns:a="http://schemas.openxmlformats.org/drawingml/2006/main">
               <a:ext uri="{FF2B5EF4-FFF2-40B4-BE49-F238E27FC236}">
-                <a16:creationId xmlns:a16="http://schemas.microsoft.com/office/drawing/2014/main" id="{91DCBB4D-7B8A-494A-A725-3825A4502F5A}"/>
+                <a16:creationId xmlns:a16="http://schemas.microsoft.com/office/drawing/2014/main" id="{E7D25EB6-12DD-4B6F-8AFC-FAAA32B78D89}"/>
               </a:ext>
             </a:extLst>
           </p:cNvPr>
@@ -16060,7 +16117,7 @@
           <p:cNvPr id="56" name="">
             <a:extLst xmlns:a="http://schemas.openxmlformats.org/drawingml/2006/main">
               <a:ext uri="{FF2B5EF4-FFF2-40B4-BE49-F238E27FC236}">
-                <a16:creationId xmlns:a16="http://schemas.microsoft.com/office/drawing/2014/main" id="{76F8FD65-3416-42A2-94A2-02BBE426F25E}"/>
+                <a16:creationId xmlns:a16="http://schemas.microsoft.com/office/drawing/2014/main" id="{C691E553-AD0E-4424-81DD-087BF8EA829D}"/>
               </a:ext>
             </a:extLst>
           </p:cNvPr>
@@ -16117,7 +16174,7 @@
           <p:cNvPr id="57" name="">
             <a:extLst xmlns:a="http://schemas.openxmlformats.org/drawingml/2006/main">
               <a:ext uri="{FF2B5EF4-FFF2-40B4-BE49-F238E27FC236}">
-                <a16:creationId xmlns:a16="http://schemas.microsoft.com/office/drawing/2014/main" id="{67AAF4CB-286B-481E-BE19-910226C1F926}"/>
+                <a16:creationId xmlns:a16="http://schemas.microsoft.com/office/drawing/2014/main" id="{A268E9E4-732E-4E3F-AC4C-D03AC53DA291}"/>
               </a:ext>
             </a:extLst>
           </p:cNvPr>
@@ -16151,7 +16208,7 @@
           <p:cNvPr id="58" name="">
             <a:extLst xmlns:a="http://schemas.openxmlformats.org/drawingml/2006/main">
               <a:ext uri="{FF2B5EF4-FFF2-40B4-BE49-F238E27FC236}">
-                <a16:creationId xmlns:a16="http://schemas.microsoft.com/office/drawing/2014/main" id="{16E616E1-6960-4107-9762-2A241FE7E226}"/>
+                <a16:creationId xmlns:a16="http://schemas.microsoft.com/office/drawing/2014/main" id="{86214F27-AE83-422E-9DE7-910CB4991DEC}"/>
               </a:ext>
             </a:extLst>
           </p:cNvPr>
@@ -16183,7 +16240,7 @@
           <p:cNvPr id="59" name="">
             <a:extLst xmlns:a="http://schemas.openxmlformats.org/drawingml/2006/main">
               <a:ext uri="{FF2B5EF4-FFF2-40B4-BE49-F238E27FC236}">
-                <a16:creationId xmlns:a16="http://schemas.microsoft.com/office/drawing/2014/main" id="{47D8A961-A864-46D4-AA80-B5033BB53ED7}"/>
+                <a16:creationId xmlns:a16="http://schemas.microsoft.com/office/drawing/2014/main" id="{09A74310-F391-483C-91BE-5CB0DC75AB68}"/>
               </a:ext>
             </a:extLst>
           </p:cNvPr>
@@ -16240,7 +16297,7 @@
           <p:cNvPr id="60" name="">
             <a:extLst xmlns:a="http://schemas.openxmlformats.org/drawingml/2006/main">
               <a:ext uri="{FF2B5EF4-FFF2-40B4-BE49-F238E27FC236}">
-                <a16:creationId xmlns:a16="http://schemas.microsoft.com/office/drawing/2014/main" id="{BF22A76C-1C10-4BFC-9494-2557B36B859A}"/>
+                <a16:creationId xmlns:a16="http://schemas.microsoft.com/office/drawing/2014/main" id="{6A61B25E-1467-457C-8352-C5962BBE4305}"/>
               </a:ext>
             </a:extLst>
           </p:cNvPr>
@@ -16297,7 +16354,7 @@
           <p:cNvPr id="61" name="">
             <a:extLst xmlns:a="http://schemas.openxmlformats.org/drawingml/2006/main">
               <a:ext uri="{FF2B5EF4-FFF2-40B4-BE49-F238E27FC236}">
-                <a16:creationId xmlns:a16="http://schemas.microsoft.com/office/drawing/2014/main" id="{4A037959-B642-488F-9250-D3935AE6C135}"/>
+                <a16:creationId xmlns:a16="http://schemas.microsoft.com/office/drawing/2014/main" id="{9B6B7303-88ED-4544-AFE8-AFAB3C481F99}"/>
               </a:ext>
             </a:extLst>
           </p:cNvPr>
@@ -16354,7 +16411,7 @@
           <p:cNvPr id="62" name="">
             <a:extLst xmlns:a="http://schemas.openxmlformats.org/drawingml/2006/main">
               <a:ext uri="{FF2B5EF4-FFF2-40B4-BE49-F238E27FC236}">
-                <a16:creationId xmlns:a16="http://schemas.microsoft.com/office/drawing/2014/main" id="{1AC2AABA-7767-4101-984A-4F8ED33DE62A}"/>
+                <a16:creationId xmlns:a16="http://schemas.microsoft.com/office/drawing/2014/main" id="{85F68E95-A7C7-4845-A214-F73D5D081C8D}"/>
               </a:ext>
             </a:extLst>
           </p:cNvPr>
@@ -16388,7 +16445,7 @@
           <p:cNvPr id="63" name="">
             <a:extLst xmlns:a="http://schemas.openxmlformats.org/drawingml/2006/main">
               <a:ext uri="{FF2B5EF4-FFF2-40B4-BE49-F238E27FC236}">
-                <a16:creationId xmlns:a16="http://schemas.microsoft.com/office/drawing/2014/main" id="{DC8F574E-729F-4DB2-8D4B-7D99D4BDC031}"/>
+                <a16:creationId xmlns:a16="http://schemas.microsoft.com/office/drawing/2014/main" id="{0F549AE6-5C5A-4A9E-8EF7-7CD4C1184CE1}"/>
               </a:ext>
             </a:extLst>
           </p:cNvPr>
@@ -16420,7 +16477,7 @@
           <p:cNvPr id="64" name="">
             <a:extLst xmlns:a="http://schemas.openxmlformats.org/drawingml/2006/main">
               <a:ext uri="{FF2B5EF4-FFF2-40B4-BE49-F238E27FC236}">
-                <a16:creationId xmlns:a16="http://schemas.microsoft.com/office/drawing/2014/main" id="{DFA8C6C5-2DB1-4615-8149-01131A0B15E0}"/>
+                <a16:creationId xmlns:a16="http://schemas.microsoft.com/office/drawing/2014/main" id="{09FE5DD7-69A5-49D6-8524-25A8C236705B}"/>
               </a:ext>
             </a:extLst>
           </p:cNvPr>
@@ -16477,7 +16534,7 @@
           <p:cNvPr id="65" name="">
             <a:extLst xmlns:a="http://schemas.openxmlformats.org/drawingml/2006/main">
               <a:ext uri="{FF2B5EF4-FFF2-40B4-BE49-F238E27FC236}">
-                <a16:creationId xmlns:a16="http://schemas.microsoft.com/office/drawing/2014/main" id="{2E032E2B-4E27-448A-BB3B-93A70B126D61}"/>
+                <a16:creationId xmlns:a16="http://schemas.microsoft.com/office/drawing/2014/main" id="{9EA86D13-3986-4C2D-AF48-042741004AB6}"/>
               </a:ext>
             </a:extLst>
           </p:cNvPr>
@@ -16534,7 +16591,7 @@
           <p:cNvPr id="66" name="">
             <a:extLst xmlns:a="http://schemas.openxmlformats.org/drawingml/2006/main">
               <a:ext uri="{FF2B5EF4-FFF2-40B4-BE49-F238E27FC236}">
-                <a16:creationId xmlns:a16="http://schemas.microsoft.com/office/drawing/2014/main" id="{1E9DC06A-F10B-4E4D-8284-61C75EF38D19}"/>
+                <a16:creationId xmlns:a16="http://schemas.microsoft.com/office/drawing/2014/main" id="{ED7F14AA-6509-42A2-B35F-9B4B87A16036}"/>
               </a:ext>
             </a:extLst>
           </p:cNvPr>
@@ -16614,7 +16671,7 @@
           <p:cNvPr id="67" name="">
             <a:extLst xmlns:a="http://schemas.openxmlformats.org/drawingml/2006/main">
               <a:ext uri="{FF2B5EF4-FFF2-40B4-BE49-F238E27FC236}">
-                <a16:creationId xmlns:a16="http://schemas.microsoft.com/office/drawing/2014/main" id="{B6B325B3-7423-4ACC-9A5E-23F1CF86F791}"/>
+                <a16:creationId xmlns:a16="http://schemas.microsoft.com/office/drawing/2014/main" id="{1751E3FE-CDB7-4328-90CB-6E77BEA2F923}"/>
               </a:ext>
             </a:extLst>
           </p:cNvPr>
@@ -16646,7 +16703,7 @@
           <p:cNvPr id="68" name="">
             <a:extLst xmlns:a="http://schemas.openxmlformats.org/drawingml/2006/main">
               <a:ext uri="{FF2B5EF4-FFF2-40B4-BE49-F238E27FC236}">
-                <a16:creationId xmlns:a16="http://schemas.microsoft.com/office/drawing/2014/main" id="{BFA0A1F2-513E-409C-B6A6-4B655EFC37E1}"/>
+                <a16:creationId xmlns:a16="http://schemas.microsoft.com/office/drawing/2014/main" id="{1FC6B526-2502-4F53-BE0F-27EFE10E18FA}"/>
               </a:ext>
             </a:extLst>
           </p:cNvPr>
@@ -16703,7 +16760,7 @@
           <p:cNvPr id="69" name="">
             <a:extLst xmlns:a="http://schemas.openxmlformats.org/drawingml/2006/main">
               <a:ext uri="{FF2B5EF4-FFF2-40B4-BE49-F238E27FC236}">
-                <a16:creationId xmlns:a16="http://schemas.microsoft.com/office/drawing/2014/main" id="{B4E27626-76C9-43B3-A391-358EB756212C}"/>
+                <a16:creationId xmlns:a16="http://schemas.microsoft.com/office/drawing/2014/main" id="{63DC29E8-871A-4BC3-A7A2-235E4F75D061}"/>
               </a:ext>
             </a:extLst>
           </p:cNvPr>
@@ -18082,7 +18139,7 @@
           <p:cNvPr id="27" name="">
             <a:extLst xmlns:a="http://schemas.openxmlformats.org/drawingml/2006/main">
               <a:ext uri="{FF2B5EF4-FFF2-40B4-BE49-F238E27FC236}">
-                <a16:creationId xmlns:a16="http://schemas.microsoft.com/office/drawing/2014/main" id="{D8F80730-6613-48F1-AB3D-C0C9C42BC270}"/>
+                <a16:creationId xmlns:a16="http://schemas.microsoft.com/office/drawing/2014/main" id="{CF6B5FE1-74E7-44AD-BB3A-9595E388B49E}"/>
               </a:ext>
             </a:extLst>
           </p:cNvPr>
@@ -18112,7 +18169,7 @@
           <p:cNvPr id="28" name="">
             <a:extLst xmlns:a="http://schemas.openxmlformats.org/drawingml/2006/main">
               <a:ext uri="{FF2B5EF4-FFF2-40B4-BE49-F238E27FC236}">
-                <a16:creationId xmlns:a16="http://schemas.microsoft.com/office/drawing/2014/main" id="{AE9587B1-4457-47A2-A02B-8858A03B592B}"/>
+                <a16:creationId xmlns:a16="http://schemas.microsoft.com/office/drawing/2014/main" id="{EC8DFB18-839B-4CF8-B15C-D07331E45DCB}"/>
               </a:ext>
             </a:extLst>
           </p:cNvPr>
@@ -18169,7 +18226,7 @@
           <p:cNvPr id="29" name="">
             <a:extLst xmlns:a="http://schemas.openxmlformats.org/drawingml/2006/main">
               <a:ext uri="{FF2B5EF4-FFF2-40B4-BE49-F238E27FC236}">
-                <a16:creationId xmlns:a16="http://schemas.microsoft.com/office/drawing/2014/main" id="{1C52DDA8-F0DC-4297-B172-CF4779822E15}"/>
+                <a16:creationId xmlns:a16="http://schemas.microsoft.com/office/drawing/2014/main" id="{7F14BA99-94B4-45A6-812D-B2F72A20651D}"/>
               </a:ext>
             </a:extLst>
           </p:cNvPr>
@@ -18226,7 +18283,7 @@
           <p:cNvPr id="30" name="">
             <a:extLst xmlns:a="http://schemas.openxmlformats.org/drawingml/2006/main">
               <a:ext uri="{FF2B5EF4-FFF2-40B4-BE49-F238E27FC236}">
-                <a16:creationId xmlns:a16="http://schemas.microsoft.com/office/drawing/2014/main" id="{6E01A67E-9D2C-4DD7-B582-047CC583C45B}"/>
+                <a16:creationId xmlns:a16="http://schemas.microsoft.com/office/drawing/2014/main" id="{01798C12-3B3F-4B5B-BF5C-72A65D2F4F9E}"/>
               </a:ext>
             </a:extLst>
           </p:cNvPr>
@@ -18283,7 +18340,7 @@
           <p:cNvPr id="31" name="">
             <a:extLst xmlns:a="http://schemas.openxmlformats.org/drawingml/2006/main">
               <a:ext uri="{FF2B5EF4-FFF2-40B4-BE49-F238E27FC236}">
-                <a16:creationId xmlns:a16="http://schemas.microsoft.com/office/drawing/2014/main" id="{D38E751B-8A38-4508-9811-A50C89EEFF69}"/>
+                <a16:creationId xmlns:a16="http://schemas.microsoft.com/office/drawing/2014/main" id="{279575AA-2EE5-46D2-8553-92687C027905}"/>
               </a:ext>
             </a:extLst>
           </p:cNvPr>
@@ -18340,7 +18397,7 @@
           <p:cNvPr id="32" name="">
             <a:extLst xmlns:a="http://schemas.openxmlformats.org/drawingml/2006/main">
               <a:ext uri="{FF2B5EF4-FFF2-40B4-BE49-F238E27FC236}">
-                <a16:creationId xmlns:a16="http://schemas.microsoft.com/office/drawing/2014/main" id="{00B196DD-604E-47D2-B2F6-80EE83DA8796}"/>
+                <a16:creationId xmlns:a16="http://schemas.microsoft.com/office/drawing/2014/main" id="{A9EBF57E-7760-4F46-A9B0-F3DC8876327C}"/>
               </a:ext>
             </a:extLst>
           </p:cNvPr>
@@ -18370,7 +18427,7 @@
           <p:cNvPr id="33" name="">
             <a:extLst xmlns:a="http://schemas.openxmlformats.org/drawingml/2006/main">
               <a:ext uri="{FF2B5EF4-FFF2-40B4-BE49-F238E27FC236}">
-                <a16:creationId xmlns:a16="http://schemas.microsoft.com/office/drawing/2014/main" id="{D5C3472D-B417-4BF7-8D04-235B978D5494}"/>
+                <a16:creationId xmlns:a16="http://schemas.microsoft.com/office/drawing/2014/main" id="{B04BFB26-CDAD-490E-82ED-3716C6077E25}"/>
               </a:ext>
             </a:extLst>
           </p:cNvPr>
@@ -18400,7 +18457,7 @@
           <p:cNvPr id="34" name="">
             <a:extLst xmlns:a="http://schemas.openxmlformats.org/drawingml/2006/main">
               <a:ext uri="{FF2B5EF4-FFF2-40B4-BE49-F238E27FC236}">
-                <a16:creationId xmlns:a16="http://schemas.microsoft.com/office/drawing/2014/main" id="{D9645F00-D4D3-4BF5-8980-6508F6D2137F}"/>
+                <a16:creationId xmlns:a16="http://schemas.microsoft.com/office/drawing/2014/main" id="{DE5589C0-2873-4E35-93B6-0D035BB4D979}"/>
               </a:ext>
             </a:extLst>
           </p:cNvPr>
@@ -18430,7 +18487,7 @@
           <p:cNvPr id="35" name="">
             <a:extLst xmlns:a="http://schemas.openxmlformats.org/drawingml/2006/main">
               <a:ext uri="{FF2B5EF4-FFF2-40B4-BE49-F238E27FC236}">
-                <a16:creationId xmlns:a16="http://schemas.microsoft.com/office/drawing/2014/main" id="{A8A0BA39-7DFE-4201-B3D8-9D77403DDB01}"/>
+                <a16:creationId xmlns:a16="http://schemas.microsoft.com/office/drawing/2014/main" id="{1D3BF33D-F61E-4918-9B00-6FE07D20D5DE}"/>
               </a:ext>
             </a:extLst>
           </p:cNvPr>
@@ -18487,7 +18544,7 @@
           <p:cNvPr id="36" name="">
             <a:extLst xmlns:a="http://schemas.openxmlformats.org/drawingml/2006/main">
               <a:ext uri="{FF2B5EF4-FFF2-40B4-BE49-F238E27FC236}">
-                <a16:creationId xmlns:a16="http://schemas.microsoft.com/office/drawing/2014/main" id="{2667EE31-1F93-4D06-9535-B80FCBE7E8BD}"/>
+                <a16:creationId xmlns:a16="http://schemas.microsoft.com/office/drawing/2014/main" id="{09D5ACE1-E941-40AF-99F4-9B8B65213C20}"/>
               </a:ext>
             </a:extLst>
           </p:cNvPr>
@@ -18544,7 +18601,7 @@
           <p:cNvPr id="37" name="">
             <a:extLst xmlns:a="http://schemas.openxmlformats.org/drawingml/2006/main">
               <a:ext uri="{FF2B5EF4-FFF2-40B4-BE49-F238E27FC236}">
-                <a16:creationId xmlns:a16="http://schemas.microsoft.com/office/drawing/2014/main" id="{02512B0E-82AC-4B18-A7FA-E14A1CCE5D45}"/>
+                <a16:creationId xmlns:a16="http://schemas.microsoft.com/office/drawing/2014/main" id="{738B27AC-2F7A-4E2A-92EE-CB3697C7BE24}"/>
               </a:ext>
             </a:extLst>
           </p:cNvPr>
@@ -18624,7 +18681,7 @@
           <p:cNvPr id="38" name="">
             <a:extLst xmlns:a="http://schemas.openxmlformats.org/drawingml/2006/main">
               <a:ext uri="{FF2B5EF4-FFF2-40B4-BE49-F238E27FC236}">
-                <a16:creationId xmlns:a16="http://schemas.microsoft.com/office/drawing/2014/main" id="{9BEC85A1-CE7E-4A79-A082-627995F65474}"/>
+                <a16:creationId xmlns:a16="http://schemas.microsoft.com/office/drawing/2014/main" id="{3E619982-382F-4AC7-85E2-409E700E892A}"/>
               </a:ext>
             </a:extLst>
           </p:cNvPr>
@@ -18654,7 +18711,7 @@
           <p:cNvPr id="39" name="">
             <a:extLst xmlns:a="http://schemas.openxmlformats.org/drawingml/2006/main">
               <a:ext uri="{FF2B5EF4-FFF2-40B4-BE49-F238E27FC236}">
-                <a16:creationId xmlns:a16="http://schemas.microsoft.com/office/drawing/2014/main" id="{A4FD3B39-0F3A-4236-9BD2-0801C1B1BB9D}"/>
+                <a16:creationId xmlns:a16="http://schemas.microsoft.com/office/drawing/2014/main" id="{9798DF25-73D1-4233-9DB2-88D6782889CA}"/>
               </a:ext>
             </a:extLst>
           </p:cNvPr>
@@ -18684,7 +18741,7 @@
           <p:cNvPr id="40" name="">
             <a:extLst xmlns:a="http://schemas.openxmlformats.org/drawingml/2006/main">
               <a:ext uri="{FF2B5EF4-FFF2-40B4-BE49-F238E27FC236}">
-                <a16:creationId xmlns:a16="http://schemas.microsoft.com/office/drawing/2014/main" id="{AC7301E5-46B3-4FC0-BF30-5D427BDA3713}"/>
+                <a16:creationId xmlns:a16="http://schemas.microsoft.com/office/drawing/2014/main" id="{1AF6A539-75BB-40CA-B008-190D0B750FBD}"/>
               </a:ext>
             </a:extLst>
           </p:cNvPr>
@@ -18741,7 +18798,7 @@
           <p:cNvPr id="41" name="">
             <a:extLst xmlns:a="http://schemas.openxmlformats.org/drawingml/2006/main">
               <a:ext uri="{FF2B5EF4-FFF2-40B4-BE49-F238E27FC236}">
-                <a16:creationId xmlns:a16="http://schemas.microsoft.com/office/drawing/2014/main" id="{7F1DCCB5-6F0A-48C6-ABC7-38B0F74D280D}"/>
+                <a16:creationId xmlns:a16="http://schemas.microsoft.com/office/drawing/2014/main" id="{A4254C37-CE41-475B-877E-1996DDF73A7E}"/>
               </a:ext>
             </a:extLst>
           </p:cNvPr>
@@ -18798,7 +18855,7 @@
           <p:cNvPr id="42" name="">
             <a:extLst xmlns:a="http://schemas.openxmlformats.org/drawingml/2006/main">
               <a:ext uri="{FF2B5EF4-FFF2-40B4-BE49-F238E27FC236}">
-                <a16:creationId xmlns:a16="http://schemas.microsoft.com/office/drawing/2014/main" id="{8C7ABC10-CDA8-4A39-A75C-6B3C02220208}"/>
+                <a16:creationId xmlns:a16="http://schemas.microsoft.com/office/drawing/2014/main" id="{F1A4F89A-F698-4FE6-A19E-9DA6B538CEF4}"/>
               </a:ext>
             </a:extLst>
           </p:cNvPr>
@@ -18878,7 +18935,7 @@
           <p:cNvPr id="43" name="">
             <a:extLst xmlns:a="http://schemas.openxmlformats.org/drawingml/2006/main">
               <a:ext uri="{FF2B5EF4-FFF2-40B4-BE49-F238E27FC236}">
-                <a16:creationId xmlns:a16="http://schemas.microsoft.com/office/drawing/2014/main" id="{2D29FF7E-F7D5-41D3-A01C-E609471CD147}"/>
+                <a16:creationId xmlns:a16="http://schemas.microsoft.com/office/drawing/2014/main" id="{B19A865A-541C-4993-ABFA-1EAC0A37396A}"/>
               </a:ext>
             </a:extLst>
           </p:cNvPr>
@@ -18908,7 +18965,7 @@
           <p:cNvPr id="44" name="">
             <a:extLst xmlns:a="http://schemas.openxmlformats.org/drawingml/2006/main">
               <a:ext uri="{FF2B5EF4-FFF2-40B4-BE49-F238E27FC236}">
-                <a16:creationId xmlns:a16="http://schemas.microsoft.com/office/drawing/2014/main" id="{44DC7F75-E629-43F3-BAC5-2AB6CEF31D46}"/>
+                <a16:creationId xmlns:a16="http://schemas.microsoft.com/office/drawing/2014/main" id="{83520088-BFE2-40EB-8383-3664B5EFB891}"/>
               </a:ext>
             </a:extLst>
           </p:cNvPr>
@@ -18938,7 +18995,7 @@
           <p:cNvPr id="45" name="">
             <a:extLst xmlns:a="http://schemas.openxmlformats.org/drawingml/2006/main">
               <a:ext uri="{FF2B5EF4-FFF2-40B4-BE49-F238E27FC236}">
-                <a16:creationId xmlns:a16="http://schemas.microsoft.com/office/drawing/2014/main" id="{6DF2338E-4519-4E6D-B404-A54E7046FEBB}"/>
+                <a16:creationId xmlns:a16="http://schemas.microsoft.com/office/drawing/2014/main" id="{513437FD-F6B7-40D1-A912-BF4CE47437A6}"/>
               </a:ext>
             </a:extLst>
           </p:cNvPr>
@@ -18995,7 +19052,7 @@
           <p:cNvPr id="46" name="">
             <a:extLst xmlns:a="http://schemas.openxmlformats.org/drawingml/2006/main">
               <a:ext uri="{FF2B5EF4-FFF2-40B4-BE49-F238E27FC236}">
-                <a16:creationId xmlns:a16="http://schemas.microsoft.com/office/drawing/2014/main" id="{9DE12633-4838-49CA-8E54-BC72F4F94F98}"/>
+                <a16:creationId xmlns:a16="http://schemas.microsoft.com/office/drawing/2014/main" id="{CBAC1890-AB61-4E74-A091-58EC4BB4CEBE}"/>
               </a:ext>
             </a:extLst>
           </p:cNvPr>
@@ -19052,7 +19109,7 @@
           <p:cNvPr id="47" name="">
             <a:extLst xmlns:a="http://schemas.openxmlformats.org/drawingml/2006/main">
               <a:ext uri="{FF2B5EF4-FFF2-40B4-BE49-F238E27FC236}">
-                <a16:creationId xmlns:a16="http://schemas.microsoft.com/office/drawing/2014/main" id="{66FAAF04-8A93-429E-B152-8A19DCEED571}"/>
+                <a16:creationId xmlns:a16="http://schemas.microsoft.com/office/drawing/2014/main" id="{B1855DC1-0B1C-48AF-8B2C-C2805BCDFCCB}"/>
               </a:ext>
             </a:extLst>
           </p:cNvPr>
@@ -19132,7 +19189,7 @@
           <p:cNvPr id="48" name="">
             <a:extLst xmlns:a="http://schemas.openxmlformats.org/drawingml/2006/main">
               <a:ext uri="{FF2B5EF4-FFF2-40B4-BE49-F238E27FC236}">
-                <a16:creationId xmlns:a16="http://schemas.microsoft.com/office/drawing/2014/main" id="{860022DF-409A-4789-8EC5-D957A812575C}"/>
+                <a16:creationId xmlns:a16="http://schemas.microsoft.com/office/drawing/2014/main" id="{8AB0E81F-7F31-4732-B469-214074A0520A}"/>
               </a:ext>
             </a:extLst>
           </p:cNvPr>
@@ -19162,7 +19219,7 @@
           <p:cNvPr id="49" name="">
             <a:extLst xmlns:a="http://schemas.openxmlformats.org/drawingml/2006/main">
               <a:ext uri="{FF2B5EF4-FFF2-40B4-BE49-F238E27FC236}">
-                <a16:creationId xmlns:a16="http://schemas.microsoft.com/office/drawing/2014/main" id="{D42CD3CF-A054-445A-B017-0CB43C255295}"/>
+                <a16:creationId xmlns:a16="http://schemas.microsoft.com/office/drawing/2014/main" id="{48126197-AFC0-4CDB-81B3-B5829C2B33DC}"/>
               </a:ext>
             </a:extLst>
           </p:cNvPr>
@@ -19192,7 +19249,7 @@
           <p:cNvPr id="50" name="">
             <a:extLst xmlns:a="http://schemas.openxmlformats.org/drawingml/2006/main">
               <a:ext uri="{FF2B5EF4-FFF2-40B4-BE49-F238E27FC236}">
-                <a16:creationId xmlns:a16="http://schemas.microsoft.com/office/drawing/2014/main" id="{19F9BD2E-9888-4554-B752-DF6A098D7C46}"/>
+                <a16:creationId xmlns:a16="http://schemas.microsoft.com/office/drawing/2014/main" id="{F62738CE-4B7D-4811-B8BB-8E04702A9289}"/>
               </a:ext>
             </a:extLst>
           </p:cNvPr>
@@ -19249,7 +19306,7 @@
           <p:cNvPr id="51" name="">
             <a:extLst xmlns:a="http://schemas.openxmlformats.org/drawingml/2006/main">
               <a:ext uri="{FF2B5EF4-FFF2-40B4-BE49-F238E27FC236}">
-                <a16:creationId xmlns:a16="http://schemas.microsoft.com/office/drawing/2014/main" id="{E5FA0676-7079-4B92-85F0-A18A9C1B9814}"/>
+                <a16:creationId xmlns:a16="http://schemas.microsoft.com/office/drawing/2014/main" id="{4DCA4FC7-C3F5-4340-9B9F-77DE56629674}"/>
               </a:ext>
             </a:extLst>
           </p:cNvPr>
@@ -19306,7 +19363,7 @@
           <p:cNvPr id="52" name="">
             <a:extLst xmlns:a="http://schemas.openxmlformats.org/drawingml/2006/main">
               <a:ext uri="{FF2B5EF4-FFF2-40B4-BE49-F238E27FC236}">
-                <a16:creationId xmlns:a16="http://schemas.microsoft.com/office/drawing/2014/main" id="{2A3C6A86-26FB-43AC-B8CA-FD0C244EE260}"/>
+                <a16:creationId xmlns:a16="http://schemas.microsoft.com/office/drawing/2014/main" id="{78EA62D1-B2F7-41B8-A5FF-C2C0A9679282}"/>
               </a:ext>
             </a:extLst>
           </p:cNvPr>
@@ -19386,7 +19443,7 @@
           <p:cNvPr id="53" name="">
             <a:extLst xmlns:a="http://schemas.openxmlformats.org/drawingml/2006/main">
               <a:ext uri="{FF2B5EF4-FFF2-40B4-BE49-F238E27FC236}">
-                <a16:creationId xmlns:a16="http://schemas.microsoft.com/office/drawing/2014/main" id="{432E8093-0C09-4090-8DFA-1AFBE2841B76}"/>
+                <a16:creationId xmlns:a16="http://schemas.microsoft.com/office/drawing/2014/main" id="{5C8FC8CB-EE61-4B36-9911-9020556CB082}"/>
               </a:ext>
             </a:extLst>
           </p:cNvPr>
@@ -19416,7 +19473,7 @@
           <p:cNvPr id="54" name="">
             <a:extLst xmlns:a="http://schemas.openxmlformats.org/drawingml/2006/main">
               <a:ext uri="{FF2B5EF4-FFF2-40B4-BE49-F238E27FC236}">
-                <a16:creationId xmlns:a16="http://schemas.microsoft.com/office/drawing/2014/main" id="{9B5DBCB2-5F3E-42E2-8475-A86D9AF25545}"/>
+                <a16:creationId xmlns:a16="http://schemas.microsoft.com/office/drawing/2014/main" id="{78BC831F-C6AA-454D-ABB5-EBC61F360EA1}"/>
               </a:ext>
             </a:extLst>
           </p:cNvPr>
@@ -19446,7 +19503,7 @@
           <p:cNvPr id="55" name="">
             <a:extLst xmlns:a="http://schemas.openxmlformats.org/drawingml/2006/main">
               <a:ext uri="{FF2B5EF4-FFF2-40B4-BE49-F238E27FC236}">
-                <a16:creationId xmlns:a16="http://schemas.microsoft.com/office/drawing/2014/main" id="{1E1C1BF7-D01D-44BD-A72E-5C6073F9DD65}"/>
+                <a16:creationId xmlns:a16="http://schemas.microsoft.com/office/drawing/2014/main" id="{48CD07ED-4629-4C5A-BD4A-B3A8A909463C}"/>
               </a:ext>
             </a:extLst>
           </p:cNvPr>
@@ -19503,7 +19560,7 @@
           <p:cNvPr id="56" name="">
             <a:extLst xmlns:a="http://schemas.openxmlformats.org/drawingml/2006/main">
               <a:ext uri="{FF2B5EF4-FFF2-40B4-BE49-F238E27FC236}">
-                <a16:creationId xmlns:a16="http://schemas.microsoft.com/office/drawing/2014/main" id="{31AA5408-4085-4BA4-976A-4FE8C44207B5}"/>
+                <a16:creationId xmlns:a16="http://schemas.microsoft.com/office/drawing/2014/main" id="{456B9774-0CE8-4E99-B7AE-381372C7DD9C}"/>
               </a:ext>
             </a:extLst>
           </p:cNvPr>
@@ -19560,7 +19617,7 @@
           <p:cNvPr id="57" name="">
             <a:extLst xmlns:a="http://schemas.openxmlformats.org/drawingml/2006/main">
               <a:ext uri="{FF2B5EF4-FFF2-40B4-BE49-F238E27FC236}">
-                <a16:creationId xmlns:a16="http://schemas.microsoft.com/office/drawing/2014/main" id="{BAD7D620-A2BF-495C-9754-05C8C5A4F636}"/>
+                <a16:creationId xmlns:a16="http://schemas.microsoft.com/office/drawing/2014/main" id="{06452303-EDFC-4F2A-8704-2AF06273424B}"/>
               </a:ext>
             </a:extLst>
           </p:cNvPr>
@@ -19640,7 +19697,7 @@
           <p:cNvPr id="58" name="">
             <a:extLst xmlns:a="http://schemas.openxmlformats.org/drawingml/2006/main">
               <a:ext uri="{FF2B5EF4-FFF2-40B4-BE49-F238E27FC236}">
-                <a16:creationId xmlns:a16="http://schemas.microsoft.com/office/drawing/2014/main" id="{00798421-854C-4AB1-BF76-ACD04EA16D03}"/>
+                <a16:creationId xmlns:a16="http://schemas.microsoft.com/office/drawing/2014/main" id="{A1EA363B-8A57-4D48-B321-F7DA9FF795EB}"/>
               </a:ext>
             </a:extLst>
           </p:cNvPr>
@@ -19672,7 +19729,7 @@
           <p:cNvPr id="59" name="">
             <a:extLst xmlns:a="http://schemas.openxmlformats.org/drawingml/2006/main">
               <a:ext uri="{FF2B5EF4-FFF2-40B4-BE49-F238E27FC236}">
-                <a16:creationId xmlns:a16="http://schemas.microsoft.com/office/drawing/2014/main" id="{59323B60-07AC-44DB-B326-BF0FCF0E86E2}"/>
+                <a16:creationId xmlns:a16="http://schemas.microsoft.com/office/drawing/2014/main" id="{E0CBD234-018D-4CCA-89B8-286938FBCCEE}"/>
               </a:ext>
             </a:extLst>
           </p:cNvPr>
@@ -19752,7 +19809,7 @@
           <p:cNvPr id="60" name="">
             <a:extLst xmlns:a="http://schemas.openxmlformats.org/drawingml/2006/main">
               <a:ext uri="{FF2B5EF4-FFF2-40B4-BE49-F238E27FC236}">
-                <a16:creationId xmlns:a16="http://schemas.microsoft.com/office/drawing/2014/main" id="{4BFCFDF4-9601-4B78-96C9-570094CC87F0}"/>
+                <a16:creationId xmlns:a16="http://schemas.microsoft.com/office/drawing/2014/main" id="{57A760AE-3083-45A7-AE43-710380D28AF4}"/>
               </a:ext>
             </a:extLst>
           </p:cNvPr>
@@ -21056,7 +21113,7 @@
           <p:cNvPr id="26" name="">
             <a:extLst xmlns:a="http://schemas.openxmlformats.org/drawingml/2006/main">
               <a:ext uri="{FF2B5EF4-FFF2-40B4-BE49-F238E27FC236}">
-                <a16:creationId xmlns:a16="http://schemas.microsoft.com/office/drawing/2014/main" id="{E71DD544-720A-415C-B9D9-F36C76EBB124}"/>
+                <a16:creationId xmlns:a16="http://schemas.microsoft.com/office/drawing/2014/main" id="{D056A63D-DE41-4894-B5EF-441D483DC3BE}"/>
               </a:ext>
             </a:extLst>
           </p:cNvPr>
@@ -21086,7 +21143,7 @@
           <p:cNvPr id="27" name="">
             <a:extLst xmlns:a="http://schemas.openxmlformats.org/drawingml/2006/main">
               <a:ext uri="{FF2B5EF4-FFF2-40B4-BE49-F238E27FC236}">
-                <a16:creationId xmlns:a16="http://schemas.microsoft.com/office/drawing/2014/main" id="{C9358991-9CD5-4B7E-BA2E-3E1AA1C702CE}"/>
+                <a16:creationId xmlns:a16="http://schemas.microsoft.com/office/drawing/2014/main" id="{46308225-5FB3-45A3-9FCE-3735C84D67E5}"/>
               </a:ext>
             </a:extLst>
           </p:cNvPr>
@@ -21143,7 +21200,7 @@
           <p:cNvPr id="28" name="">
             <a:extLst xmlns:a="http://schemas.openxmlformats.org/drawingml/2006/main">
               <a:ext uri="{FF2B5EF4-FFF2-40B4-BE49-F238E27FC236}">
-                <a16:creationId xmlns:a16="http://schemas.microsoft.com/office/drawing/2014/main" id="{FA931439-5EE6-41A7-8863-89597E0C4963}"/>
+                <a16:creationId xmlns:a16="http://schemas.microsoft.com/office/drawing/2014/main" id="{E246A073-FBF4-4227-8625-F16359BF6BDC}"/>
               </a:ext>
             </a:extLst>
           </p:cNvPr>
@@ -21200,7 +21257,7 @@
           <p:cNvPr id="29" name="">
             <a:extLst xmlns:a="http://schemas.openxmlformats.org/drawingml/2006/main">
               <a:ext uri="{FF2B5EF4-FFF2-40B4-BE49-F238E27FC236}">
-                <a16:creationId xmlns:a16="http://schemas.microsoft.com/office/drawing/2014/main" id="{8C191C58-E31E-4519-8333-75492D57382E}"/>
+                <a16:creationId xmlns:a16="http://schemas.microsoft.com/office/drawing/2014/main" id="{C05B2570-CC77-4617-8CB2-0C12E51C4A74}"/>
               </a:ext>
             </a:extLst>
           </p:cNvPr>
@@ -21257,7 +21314,7 @@
           <p:cNvPr id="30" name="">
             <a:extLst xmlns:a="http://schemas.openxmlformats.org/drawingml/2006/main">
               <a:ext uri="{FF2B5EF4-FFF2-40B4-BE49-F238E27FC236}">
-                <a16:creationId xmlns:a16="http://schemas.microsoft.com/office/drawing/2014/main" id="{5A1704F8-3075-4B28-9373-7FB9A8F0887D}"/>
+                <a16:creationId xmlns:a16="http://schemas.microsoft.com/office/drawing/2014/main" id="{9241028F-EBF1-4291-AC53-59C297660795}"/>
               </a:ext>
             </a:extLst>
           </p:cNvPr>
@@ -21314,7 +21371,7 @@
           <p:cNvPr id="31" name="">
             <a:extLst xmlns:a="http://schemas.openxmlformats.org/drawingml/2006/main">
               <a:ext uri="{FF2B5EF4-FFF2-40B4-BE49-F238E27FC236}">
-                <a16:creationId xmlns:a16="http://schemas.microsoft.com/office/drawing/2014/main" id="{2C959646-6610-4858-87EE-9FEDE02DF322}"/>
+                <a16:creationId xmlns:a16="http://schemas.microsoft.com/office/drawing/2014/main" id="{F3964160-B616-4F38-A87C-042F92D7152B}"/>
               </a:ext>
             </a:extLst>
           </p:cNvPr>
@@ -21344,7 +21401,7 @@
           <p:cNvPr id="32" name="">
             <a:extLst xmlns:a="http://schemas.openxmlformats.org/drawingml/2006/main">
               <a:ext uri="{FF2B5EF4-FFF2-40B4-BE49-F238E27FC236}">
-                <a16:creationId xmlns:a16="http://schemas.microsoft.com/office/drawing/2014/main" id="{84714960-D7AE-4387-A2A4-6166F7DE059C}"/>
+                <a16:creationId xmlns:a16="http://schemas.microsoft.com/office/drawing/2014/main" id="{4A4234A7-EA0E-4889-91C3-A18843228956}"/>
               </a:ext>
             </a:extLst>
           </p:cNvPr>
@@ -21378,7 +21435,7 @@
           <p:cNvPr id="33" name="">
             <a:extLst xmlns:a="http://schemas.openxmlformats.org/drawingml/2006/main">
               <a:ext uri="{FF2B5EF4-FFF2-40B4-BE49-F238E27FC236}">
-                <a16:creationId xmlns:a16="http://schemas.microsoft.com/office/drawing/2014/main" id="{C665A722-9E1F-4C26-AFA7-8EAF6D5C6B58}"/>
+                <a16:creationId xmlns:a16="http://schemas.microsoft.com/office/drawing/2014/main" id="{1A9B9104-FDB4-465A-957D-1D0FC158754E}"/>
               </a:ext>
             </a:extLst>
           </p:cNvPr>
@@ -21412,7 +21469,7 @@
           <p:cNvPr id="34" name="">
             <a:extLst xmlns:a="http://schemas.openxmlformats.org/drawingml/2006/main">
               <a:ext uri="{FF2B5EF4-FFF2-40B4-BE49-F238E27FC236}">
-                <a16:creationId xmlns:a16="http://schemas.microsoft.com/office/drawing/2014/main" id="{B7FF0442-1C04-4757-8771-7E4B29E2F1FB}"/>
+                <a16:creationId xmlns:a16="http://schemas.microsoft.com/office/drawing/2014/main" id="{7F67F471-736A-44BD-AC09-9C66922A291D}"/>
               </a:ext>
             </a:extLst>
           </p:cNvPr>
@@ -21469,7 +21526,7 @@
           <p:cNvPr id="35" name="">
             <a:extLst xmlns:a="http://schemas.openxmlformats.org/drawingml/2006/main">
               <a:ext uri="{FF2B5EF4-FFF2-40B4-BE49-F238E27FC236}">
-                <a16:creationId xmlns:a16="http://schemas.microsoft.com/office/drawing/2014/main" id="{D382E1F0-0E5C-4378-B682-3A022F4BAC9C}"/>
+                <a16:creationId xmlns:a16="http://schemas.microsoft.com/office/drawing/2014/main" id="{A38CF3B4-2B1C-4396-99EF-5CFE8E1D98D1}"/>
               </a:ext>
             </a:extLst>
           </p:cNvPr>
@@ -21549,7 +21606,7 @@
           <p:cNvPr id="36" name="">
             <a:extLst xmlns:a="http://schemas.openxmlformats.org/drawingml/2006/main">
               <a:ext uri="{FF2B5EF4-FFF2-40B4-BE49-F238E27FC236}">
-                <a16:creationId xmlns:a16="http://schemas.microsoft.com/office/drawing/2014/main" id="{EE6CB31E-6AA6-4F00-B4C8-BF45A0B2D6A8}"/>
+                <a16:creationId xmlns:a16="http://schemas.microsoft.com/office/drawing/2014/main" id="{FA06A4DE-AA43-4F2B-B52A-91B749267FF7}"/>
               </a:ext>
             </a:extLst>
           </p:cNvPr>
@@ -21606,7 +21663,7 @@
           <p:cNvPr id="37" name="">
             <a:extLst xmlns:a="http://schemas.openxmlformats.org/drawingml/2006/main">
               <a:ext uri="{FF2B5EF4-FFF2-40B4-BE49-F238E27FC236}">
-                <a16:creationId xmlns:a16="http://schemas.microsoft.com/office/drawing/2014/main" id="{CE89FADF-0B6F-440D-A5D6-88892D569D50}"/>
+                <a16:creationId xmlns:a16="http://schemas.microsoft.com/office/drawing/2014/main" id="{7B8BD66D-78B9-46B5-9EB7-F09D530CB81E}"/>
               </a:ext>
             </a:extLst>
           </p:cNvPr>
@@ -21638,7 +21695,7 @@
           <p:cNvPr id="38" name="">
             <a:extLst xmlns:a="http://schemas.openxmlformats.org/drawingml/2006/main">
               <a:ext uri="{FF2B5EF4-FFF2-40B4-BE49-F238E27FC236}">
-                <a16:creationId xmlns:a16="http://schemas.microsoft.com/office/drawing/2014/main" id="{FCECD796-111D-46A6-A8A6-AA4CA29C9D25}"/>
+                <a16:creationId xmlns:a16="http://schemas.microsoft.com/office/drawing/2014/main" id="{88DF17A6-96C6-4101-90DF-6AF7A6A1790C}"/>
               </a:ext>
             </a:extLst>
           </p:cNvPr>
@@ -21695,7 +21752,7 @@
           <p:cNvPr id="39" name="">
             <a:extLst xmlns:a="http://schemas.openxmlformats.org/drawingml/2006/main">
               <a:ext uri="{FF2B5EF4-FFF2-40B4-BE49-F238E27FC236}">
-                <a16:creationId xmlns:a16="http://schemas.microsoft.com/office/drawing/2014/main" id="{6280B796-6727-4511-B1E0-8153F6C72180}"/>
+                <a16:creationId xmlns:a16="http://schemas.microsoft.com/office/drawing/2014/main" id="{09731691-A115-4F6B-B670-CF7591BDD142}"/>
               </a:ext>
             </a:extLst>
           </p:cNvPr>
@@ -21752,7 +21809,7 @@
           <p:cNvPr id="40" name="">
             <a:extLst xmlns:a="http://schemas.openxmlformats.org/drawingml/2006/main">
               <a:ext uri="{FF2B5EF4-FFF2-40B4-BE49-F238E27FC236}">
-                <a16:creationId xmlns:a16="http://schemas.microsoft.com/office/drawing/2014/main" id="{153074DD-1822-43E4-82AD-9B54DE8DEB66}"/>
+                <a16:creationId xmlns:a16="http://schemas.microsoft.com/office/drawing/2014/main" id="{81A4F90F-8F26-4E3A-8C9C-CA10D5B905E7}"/>
               </a:ext>
             </a:extLst>
           </p:cNvPr>
@@ -21832,7 +21889,7 @@
           <p:cNvPr id="41" name="">
             <a:extLst xmlns:a="http://schemas.openxmlformats.org/drawingml/2006/main">
               <a:ext uri="{FF2B5EF4-FFF2-40B4-BE49-F238E27FC236}">
-                <a16:creationId xmlns:a16="http://schemas.microsoft.com/office/drawing/2014/main" id="{4958A960-D87E-4927-9BA6-77B73397F3D6}"/>
+                <a16:creationId xmlns:a16="http://schemas.microsoft.com/office/drawing/2014/main" id="{77B499C7-5CA1-4D33-A2AB-80FF4E3520BF}"/>
               </a:ext>
             </a:extLst>
           </p:cNvPr>
@@ -21889,7 +21946,7 @@
           <p:cNvPr id="42" name="">
             <a:extLst xmlns:a="http://schemas.openxmlformats.org/drawingml/2006/main">
               <a:ext uri="{FF2B5EF4-FFF2-40B4-BE49-F238E27FC236}">
-                <a16:creationId xmlns:a16="http://schemas.microsoft.com/office/drawing/2014/main" id="{7F900AB7-CFA4-4D97-B31E-70A4A42798A4}"/>
+                <a16:creationId xmlns:a16="http://schemas.microsoft.com/office/drawing/2014/main" id="{92E9AD5A-BADB-4710-BFB9-B11D6FDE2B87}"/>
               </a:ext>
             </a:extLst>
           </p:cNvPr>
@@ -21921,7 +21978,7 @@
           <p:cNvPr id="43" name="">
             <a:extLst xmlns:a="http://schemas.openxmlformats.org/drawingml/2006/main">
               <a:ext uri="{FF2B5EF4-FFF2-40B4-BE49-F238E27FC236}">
-                <a16:creationId xmlns:a16="http://schemas.microsoft.com/office/drawing/2014/main" id="{3ACD40BB-60A2-4AE7-9B0C-6B944C96E76A}"/>
+                <a16:creationId xmlns:a16="http://schemas.microsoft.com/office/drawing/2014/main" id="{8DD28469-5B68-4124-9FA9-AA59677B9234}"/>
               </a:ext>
             </a:extLst>
           </p:cNvPr>
@@ -21978,7 +22035,7 @@
           <p:cNvPr id="44" name="">
             <a:extLst xmlns:a="http://schemas.openxmlformats.org/drawingml/2006/main">
               <a:ext uri="{FF2B5EF4-FFF2-40B4-BE49-F238E27FC236}">
-                <a16:creationId xmlns:a16="http://schemas.microsoft.com/office/drawing/2014/main" id="{95C0C1DA-B5C2-4390-AB68-792B2986CE52}"/>
+                <a16:creationId xmlns:a16="http://schemas.microsoft.com/office/drawing/2014/main" id="{E93FFD2A-96B1-4F52-BEEF-4530937A8A99}"/>
               </a:ext>
             </a:extLst>
           </p:cNvPr>
@@ -22010,7 +22067,7 @@
           <p:cNvPr id="45" name="">
             <a:extLst xmlns:a="http://schemas.openxmlformats.org/drawingml/2006/main">
               <a:ext uri="{FF2B5EF4-FFF2-40B4-BE49-F238E27FC236}">
-                <a16:creationId xmlns:a16="http://schemas.microsoft.com/office/drawing/2014/main" id="{8DFD56FF-05A1-4330-9954-C674EB06502C}"/>
+                <a16:creationId xmlns:a16="http://schemas.microsoft.com/office/drawing/2014/main" id="{12EF6C6F-0974-4857-B8FC-A5B5D6814990}"/>
               </a:ext>
             </a:extLst>
           </p:cNvPr>
@@ -22067,7 +22124,7 @@
           <p:cNvPr id="46" name="">
             <a:extLst xmlns:a="http://schemas.openxmlformats.org/drawingml/2006/main">
               <a:ext uri="{FF2B5EF4-FFF2-40B4-BE49-F238E27FC236}">
-                <a16:creationId xmlns:a16="http://schemas.microsoft.com/office/drawing/2014/main" id="{8F4F230E-5061-4661-B6C9-297C59A14E27}"/>
+                <a16:creationId xmlns:a16="http://schemas.microsoft.com/office/drawing/2014/main" id="{C7A6CD35-DF35-4036-B0CA-F5CE5754E840}"/>
               </a:ext>
             </a:extLst>
           </p:cNvPr>
@@ -22146,7 +22203,7 @@
           <p:cNvPr id="29" name="">
             <a:extLst xmlns:a="http://schemas.openxmlformats.org/drawingml/2006/main">
               <a:ext uri="{FF2B5EF4-FFF2-40B4-BE49-F238E27FC236}">
-                <a16:creationId xmlns:a16="http://schemas.microsoft.com/office/drawing/2014/main" id="{89163915-E413-4F7D-BAEF-1133CECBF7B8}"/>
+                <a16:creationId xmlns:a16="http://schemas.microsoft.com/office/drawing/2014/main" id="{56F5F5F5-91F5-49ED-9C3F-8E92FC7309E7}"/>
               </a:ext>
             </a:extLst>
           </p:cNvPr>
@@ -22176,7 +22233,7 @@
           <p:cNvPr id="2" name="">
             <a:extLst xmlns:a="http://schemas.openxmlformats.org/drawingml/2006/main">
               <a:ext uri="{FF2B5EF4-FFF2-40B4-BE49-F238E27FC236}">
-                <a16:creationId xmlns:a16="http://schemas.microsoft.com/office/drawing/2014/main" id="{BCF81911-0B08-4066-927F-CABB7503283D}"/>
+                <a16:creationId xmlns:a16="http://schemas.microsoft.com/office/drawing/2014/main" id="{9B5EF703-7191-4673-877A-BDC926240FB9}"/>
               </a:ext>
             </a:extLst>
           </p:cNvPr>
@@ -22233,7 +22290,7 @@
           <p:cNvPr id="3" name="">
             <a:extLst xmlns:a="http://schemas.openxmlformats.org/drawingml/2006/main">
               <a:ext uri="{FF2B5EF4-FFF2-40B4-BE49-F238E27FC236}">
-                <a16:creationId xmlns:a16="http://schemas.microsoft.com/office/drawing/2014/main" id="{EF8FCB23-97D4-4D30-8E44-3B7D0F0A838D}"/>
+                <a16:creationId xmlns:a16="http://schemas.microsoft.com/office/drawing/2014/main" id="{529B4C06-3D07-46C9-8103-232D7D0004F5}"/>
               </a:ext>
             </a:extLst>
           </p:cNvPr>
@@ -22290,7 +22347,7 @@
           <p:cNvPr id="4" name="">
             <a:extLst xmlns:a="http://schemas.openxmlformats.org/drawingml/2006/main">
               <a:ext uri="{FF2B5EF4-FFF2-40B4-BE49-F238E27FC236}">
-                <a16:creationId xmlns:a16="http://schemas.microsoft.com/office/drawing/2014/main" id="{AB9DB70B-D18A-4D7B-85E1-BEB5A02DF942}"/>
+                <a16:creationId xmlns:a16="http://schemas.microsoft.com/office/drawing/2014/main" id="{1E1826AB-96B1-4388-9987-BE4FB4B749E2}"/>
               </a:ext>
             </a:extLst>
           </p:cNvPr>
@@ -22347,7 +22404,7 @@
           <p:cNvPr id="5" name="">
             <a:extLst xmlns:a="http://schemas.openxmlformats.org/drawingml/2006/main">
               <a:ext uri="{FF2B5EF4-FFF2-40B4-BE49-F238E27FC236}">
-                <a16:creationId xmlns:a16="http://schemas.microsoft.com/office/drawing/2014/main" id="{83E9DABF-7886-43AB-9568-EAA1C551CFEB}"/>
+                <a16:creationId xmlns:a16="http://schemas.microsoft.com/office/drawing/2014/main" id="{CAD13D53-1DC4-4FF4-80CA-C3A21F2F506C}"/>
               </a:ext>
             </a:extLst>
           </p:cNvPr>
@@ -22404,7 +22461,7 @@
           <p:cNvPr id="6" name="">
             <a:extLst xmlns:a="http://schemas.openxmlformats.org/drawingml/2006/main">
               <a:ext uri="{FF2B5EF4-FFF2-40B4-BE49-F238E27FC236}">
-                <a16:creationId xmlns:a16="http://schemas.microsoft.com/office/drawing/2014/main" id="{F7DFC767-171C-4044-BCFA-91F61A4B923A}"/>
+                <a16:creationId xmlns:a16="http://schemas.microsoft.com/office/drawing/2014/main" id="{ED652E22-19BF-4DDE-B7F9-E1D317EEFBA4}"/>
               </a:ext>
             </a:extLst>
           </p:cNvPr>
@@ -22434,7 +22491,7 @@
           <p:cNvPr id="7" name="">
             <a:extLst xmlns:a="http://schemas.openxmlformats.org/drawingml/2006/main">
               <a:ext uri="{FF2B5EF4-FFF2-40B4-BE49-F238E27FC236}">
-                <a16:creationId xmlns:a16="http://schemas.microsoft.com/office/drawing/2014/main" id="{4CCE1B46-0520-40C1-8634-F3C7F074ABE6}"/>
+                <a16:creationId xmlns:a16="http://schemas.microsoft.com/office/drawing/2014/main" id="{6BA9A7E2-CC3B-4577-96F0-5CA50E9413D6}"/>
               </a:ext>
             </a:extLst>
           </p:cNvPr>
@@ -22466,7 +22523,7 @@
           <p:cNvPr id="8" name="">
             <a:extLst xmlns:a="http://schemas.openxmlformats.org/drawingml/2006/main">
               <a:ext uri="{FF2B5EF4-FFF2-40B4-BE49-F238E27FC236}">
-                <a16:creationId xmlns:a16="http://schemas.microsoft.com/office/drawing/2014/main" id="{E7D816B0-33B0-47F1-B0D9-9BFA248F4D9F}"/>
+                <a16:creationId xmlns:a16="http://schemas.microsoft.com/office/drawing/2014/main" id="{BDBA99F7-BA32-4F0D-9634-378E9AAFBAFA}"/>
               </a:ext>
             </a:extLst>
           </p:cNvPr>
@@ -22523,7 +22580,7 @@
           <p:cNvPr id="9" name="">
             <a:extLst xmlns:a="http://schemas.openxmlformats.org/drawingml/2006/main">
               <a:ext uri="{FF2B5EF4-FFF2-40B4-BE49-F238E27FC236}">
-                <a16:creationId xmlns:a16="http://schemas.microsoft.com/office/drawing/2014/main" id="{4446B95A-FF64-415E-8DE1-182FF4D024FF}"/>
+                <a16:creationId xmlns:a16="http://schemas.microsoft.com/office/drawing/2014/main" id="{53094566-1628-47A0-870C-9F7BF4C26ADF}"/>
               </a:ext>
             </a:extLst>
           </p:cNvPr>
@@ -22557,7 +22614,7 @@
           <p:cNvPr id="10" name="">
             <a:extLst xmlns:a="http://schemas.openxmlformats.org/drawingml/2006/main">
               <a:ext uri="{FF2B5EF4-FFF2-40B4-BE49-F238E27FC236}">
-                <a16:creationId xmlns:a16="http://schemas.microsoft.com/office/drawing/2014/main" id="{C9280428-4E3C-4ACE-9143-0482DEB1C4DD}"/>
+                <a16:creationId xmlns:a16="http://schemas.microsoft.com/office/drawing/2014/main" id="{DFFAB73C-048A-4E9C-B2C9-AC03924200B7}"/>
               </a:ext>
             </a:extLst>
           </p:cNvPr>
@@ -22589,7 +22646,7 @@
           <p:cNvPr id="11" name="">
             <a:extLst xmlns:a="http://schemas.openxmlformats.org/drawingml/2006/main">
               <a:ext uri="{FF2B5EF4-FFF2-40B4-BE49-F238E27FC236}">
-                <a16:creationId xmlns:a16="http://schemas.microsoft.com/office/drawing/2014/main" id="{11499B3D-1ADA-46F1-8C12-2DF6BAED1F09}"/>
+                <a16:creationId xmlns:a16="http://schemas.microsoft.com/office/drawing/2014/main" id="{B6BCAEC2-CB6A-4559-BDCF-DEF6E9C158F6}"/>
               </a:ext>
             </a:extLst>
           </p:cNvPr>
@@ -22646,7 +22703,7 @@
           <p:cNvPr id="12" name="">
             <a:extLst xmlns:a="http://schemas.openxmlformats.org/drawingml/2006/main">
               <a:ext uri="{FF2B5EF4-FFF2-40B4-BE49-F238E27FC236}">
-                <a16:creationId xmlns:a16="http://schemas.microsoft.com/office/drawing/2014/main" id="{FD62DE0A-50A7-44FF-9764-E83CF9A9D648}"/>
+                <a16:creationId xmlns:a16="http://schemas.microsoft.com/office/drawing/2014/main" id="{CBFCCB38-8978-437D-987B-8FCB5E63A30B}"/>
               </a:ext>
             </a:extLst>
           </p:cNvPr>
@@ -22726,7 +22783,7 @@
           <p:cNvPr id="13" name="">
             <a:extLst xmlns:a="http://schemas.openxmlformats.org/drawingml/2006/main">
               <a:ext uri="{FF2B5EF4-FFF2-40B4-BE49-F238E27FC236}">
-                <a16:creationId xmlns:a16="http://schemas.microsoft.com/office/drawing/2014/main" id="{A1F992CF-498D-442E-A9F6-4B2FEA5DA368}"/>
+                <a16:creationId xmlns:a16="http://schemas.microsoft.com/office/drawing/2014/main" id="{0332740A-A479-45E3-B632-E7C5A162A3E0}"/>
               </a:ext>
             </a:extLst>
           </p:cNvPr>
@@ -22806,7 +22863,7 @@
           <p:cNvPr id="14" name="">
             <a:extLst xmlns:a="http://schemas.openxmlformats.org/drawingml/2006/main">
               <a:ext uri="{FF2B5EF4-FFF2-40B4-BE49-F238E27FC236}">
-                <a16:creationId xmlns:a16="http://schemas.microsoft.com/office/drawing/2014/main" id="{369CDF04-183F-4545-90A5-DC27FD8C33BC}"/>
+                <a16:creationId xmlns:a16="http://schemas.microsoft.com/office/drawing/2014/main" id="{CCB8CEEE-75D0-47FF-8C55-AF5AEA878A1D}"/>
               </a:ext>
             </a:extLst>
           </p:cNvPr>
@@ -22863,7 +22920,7 @@
           <p:cNvPr id="15" name="">
             <a:extLst xmlns:a="http://schemas.openxmlformats.org/drawingml/2006/main">
               <a:ext uri="{FF2B5EF4-FFF2-40B4-BE49-F238E27FC236}">
-                <a16:creationId xmlns:a16="http://schemas.microsoft.com/office/drawing/2014/main" id="{E5DED342-8BC9-44F3-A7D1-7E4B79BD7A69}"/>
+                <a16:creationId xmlns:a16="http://schemas.microsoft.com/office/drawing/2014/main" id="{3B5DE31F-E0EC-46A2-A7FE-342AF868CC9C}"/>
               </a:ext>
             </a:extLst>
           </p:cNvPr>
@@ -22897,7 +22954,7 @@
           <p:cNvPr id="16" name="">
             <a:extLst xmlns:a="http://schemas.openxmlformats.org/drawingml/2006/main">
               <a:ext uri="{FF2B5EF4-FFF2-40B4-BE49-F238E27FC236}">
-                <a16:creationId xmlns:a16="http://schemas.microsoft.com/office/drawing/2014/main" id="{913766C8-8BFF-463A-A09E-34C61EEAB715}"/>
+                <a16:creationId xmlns:a16="http://schemas.microsoft.com/office/drawing/2014/main" id="{8C923536-45E7-4A85-931F-E9208E9FEE9A}"/>
               </a:ext>
             </a:extLst>
           </p:cNvPr>
@@ -22929,7 +22986,7 @@
           <p:cNvPr id="17" name="">
             <a:extLst xmlns:a="http://schemas.openxmlformats.org/drawingml/2006/main">
               <a:ext uri="{FF2B5EF4-FFF2-40B4-BE49-F238E27FC236}">
-                <a16:creationId xmlns:a16="http://schemas.microsoft.com/office/drawing/2014/main" id="{8525D018-963A-4EDF-92FB-0C35D0A1BF8C}"/>
+                <a16:creationId xmlns:a16="http://schemas.microsoft.com/office/drawing/2014/main" id="{C296FCAE-6E6F-47D2-9AF7-7EAA72091426}"/>
               </a:ext>
             </a:extLst>
           </p:cNvPr>
@@ -22986,7 +23043,7 @@
           <p:cNvPr id="18" name="">
             <a:extLst xmlns:a="http://schemas.openxmlformats.org/drawingml/2006/main">
               <a:ext uri="{FF2B5EF4-FFF2-40B4-BE49-F238E27FC236}">
-                <a16:creationId xmlns:a16="http://schemas.microsoft.com/office/drawing/2014/main" id="{EB8CA945-4699-47DB-9EB8-E0132FE76DA8}"/>
+                <a16:creationId xmlns:a16="http://schemas.microsoft.com/office/drawing/2014/main" id="{DBD321E5-22A5-4A10-A91B-7107C6FF957E}"/>
               </a:ext>
             </a:extLst>
           </p:cNvPr>
@@ -23066,7 +23123,7 @@
           <p:cNvPr id="19" name="">
             <a:extLst xmlns:a="http://schemas.openxmlformats.org/drawingml/2006/main">
               <a:ext uri="{FF2B5EF4-FFF2-40B4-BE49-F238E27FC236}">
-                <a16:creationId xmlns:a16="http://schemas.microsoft.com/office/drawing/2014/main" id="{4DABC403-0D22-475B-A773-F02ABD8EE337}"/>
+                <a16:creationId xmlns:a16="http://schemas.microsoft.com/office/drawing/2014/main" id="{61138675-F1B5-4CC1-B85A-DC2D5BA452C2}"/>
               </a:ext>
             </a:extLst>
           </p:cNvPr>
@@ -23146,7 +23203,7 @@
           <p:cNvPr id="20" name="">
             <a:extLst xmlns:a="http://schemas.openxmlformats.org/drawingml/2006/main">
               <a:ext uri="{FF2B5EF4-FFF2-40B4-BE49-F238E27FC236}">
-                <a16:creationId xmlns:a16="http://schemas.microsoft.com/office/drawing/2014/main" id="{79E2C17B-2C68-44DB-984E-6B279253646D}"/>
+                <a16:creationId xmlns:a16="http://schemas.microsoft.com/office/drawing/2014/main" id="{2F7A86F4-6BEB-4F94-8705-300EF15C9372}"/>
               </a:ext>
             </a:extLst>
           </p:cNvPr>
@@ -23180,7 +23237,7 @@
           <p:cNvPr id="21" name="">
             <a:extLst xmlns:a="http://schemas.openxmlformats.org/drawingml/2006/main">
               <a:ext uri="{FF2B5EF4-FFF2-40B4-BE49-F238E27FC236}">
-                <a16:creationId xmlns:a16="http://schemas.microsoft.com/office/drawing/2014/main" id="{BA692FAF-CFBF-4EC6-A15F-2CA52441D46E}"/>
+                <a16:creationId xmlns:a16="http://schemas.microsoft.com/office/drawing/2014/main" id="{AAA5631D-7D1F-4CB2-80E3-744968357E64}"/>
               </a:ext>
             </a:extLst>
           </p:cNvPr>
@@ -23212,7 +23269,7 @@
           <p:cNvPr id="22" name="">
             <a:extLst xmlns:a="http://schemas.openxmlformats.org/drawingml/2006/main">
               <a:ext uri="{FF2B5EF4-FFF2-40B4-BE49-F238E27FC236}">
-                <a16:creationId xmlns:a16="http://schemas.microsoft.com/office/drawing/2014/main" id="{40BB36D7-7CD5-44AE-87FE-21BC4DBE98FC}"/>
+                <a16:creationId xmlns:a16="http://schemas.microsoft.com/office/drawing/2014/main" id="{CAC00915-67BE-495A-BDB8-56825E7CDA49}"/>
               </a:ext>
             </a:extLst>
           </p:cNvPr>
@@ -23269,7 +23326,7 @@
           <p:cNvPr id="23" name="">
             <a:extLst xmlns:a="http://schemas.openxmlformats.org/drawingml/2006/main">
               <a:ext uri="{FF2B5EF4-FFF2-40B4-BE49-F238E27FC236}">
-                <a16:creationId xmlns:a16="http://schemas.microsoft.com/office/drawing/2014/main" id="{6853A022-D3C2-4663-9D8C-A21FD589491A}"/>
+                <a16:creationId xmlns:a16="http://schemas.microsoft.com/office/drawing/2014/main" id="{0CE109A0-BDE6-427C-9C58-F00438D22D67}"/>
               </a:ext>
             </a:extLst>
           </p:cNvPr>
@@ -23349,7 +23406,7 @@
           <p:cNvPr id="24" name="">
             <a:extLst xmlns:a="http://schemas.openxmlformats.org/drawingml/2006/main">
               <a:ext uri="{FF2B5EF4-FFF2-40B4-BE49-F238E27FC236}">
-                <a16:creationId xmlns:a16="http://schemas.microsoft.com/office/drawing/2014/main" id="{A39006C5-91F7-4892-A992-3FB74A11C129}"/>
+                <a16:creationId xmlns:a16="http://schemas.microsoft.com/office/drawing/2014/main" id="{E4A8EF82-771A-4738-9434-049C304312F8}"/>
               </a:ext>
             </a:extLst>
           </p:cNvPr>
@@ -23429,7 +23486,7 @@
           <p:cNvPr id="25" name="">
             <a:extLst xmlns:a="http://schemas.openxmlformats.org/drawingml/2006/main">
               <a:ext uri="{FF2B5EF4-FFF2-40B4-BE49-F238E27FC236}">
-                <a16:creationId xmlns:a16="http://schemas.microsoft.com/office/drawing/2014/main" id="{E40C2E33-4CAB-426E-B0B1-7EBD431637ED}"/>
+                <a16:creationId xmlns:a16="http://schemas.microsoft.com/office/drawing/2014/main" id="{558D5FDA-D887-4A0D-943C-01F8A71CB0B5}"/>
               </a:ext>
             </a:extLst>
           </p:cNvPr>
@@ -23486,23 +23543,23 @@
           <p:cNvPr id="26" name="">
             <a:extLst xmlns:a="http://schemas.openxmlformats.org/drawingml/2006/main">
               <a:ext uri="{FF2B5EF4-FFF2-40B4-BE49-F238E27FC236}">
-                <a16:creationId xmlns:a16="http://schemas.microsoft.com/office/drawing/2014/main" id="{93D3BAA3-7629-4ADC-B28D-B2E0A595ECBA}"/>
-              </a:ext>
-            </a:extLst>
-          </p:cNvPr>
-          <p:cNvSpPr>
-            <a:spLocks xmlns:a="http://schemas.openxmlformats.org/drawingml/2006/main" noGrp="1"/>
-          </p:cNvSpPr>
-          <p:nvPr/>
-        </p:nvSpPr>
-        <p:spPr>
-          <a:xfrm xmlns:a="http://schemas.openxmlformats.org/drawingml/2006/main">
-            <a:off x="1581150" y="5848350"/>
-            <a:ext cx="8648700" cy="419100"/>
+                <a16:creationId xmlns:a16="http://schemas.microsoft.com/office/drawing/2014/main" id="{66F4589D-5BF0-47CE-8A62-DCB430091E90}"/>
+              </a:ext>
+            </a:extLst>
+          </p:cNvPr>
+          <p:cNvSpPr>
+            <a:spLocks xmlns:a="http://schemas.openxmlformats.org/drawingml/2006/main" noGrp="1"/>
+          </p:cNvSpPr>
+          <p:nvPr/>
+        </p:nvSpPr>
+        <p:spPr>
+          <a:xfrm xmlns:a="http://schemas.openxmlformats.org/drawingml/2006/main">
+            <a:off x="1581150" y="5753100"/>
+            <a:ext cx="8648700" cy="571500"/>
           </a:xfrm>
           <a:prstGeom xmlns:a="http://schemas.openxmlformats.org/drawingml/2006/main" prst="roundRect">
             <a:avLst>
-              <a:gd name="adj" fmla="val 18182"/>
+              <a:gd name="adj" fmla="val 13333"/>
             </a:avLst>
           </a:prstGeom>
           <a:solidFill xmlns:a="http://schemas.openxmlformats.org/drawingml/2006/main">
@@ -23518,19 +23575,19 @@
           <p:cNvPr id="27" name="">
             <a:extLst xmlns:a="http://schemas.openxmlformats.org/drawingml/2006/main">
               <a:ext uri="{FF2B5EF4-FFF2-40B4-BE49-F238E27FC236}">
-                <a16:creationId xmlns:a16="http://schemas.microsoft.com/office/drawing/2014/main" id="{DDD1D4A2-08D2-4F95-9C2B-BCACF9B5AE5F}"/>
-              </a:ext>
-            </a:extLst>
-          </p:cNvPr>
-          <p:cNvSpPr>
-            <a:spLocks xmlns:a="http://schemas.openxmlformats.org/drawingml/2006/main" noGrp="1"/>
-          </p:cNvSpPr>
-          <p:nvPr/>
-        </p:nvSpPr>
-        <p:spPr>
-          <a:xfrm xmlns:a="http://schemas.openxmlformats.org/drawingml/2006/main">
-            <a:off x="1866900" y="5972175"/>
-            <a:ext cx="8077200" cy="171450"/>
+                <a16:creationId xmlns:a16="http://schemas.microsoft.com/office/drawing/2014/main" id="{7B1C3060-8B73-466E-AEFB-0F36226028F5}"/>
+              </a:ext>
+            </a:extLst>
+          </p:cNvPr>
+          <p:cNvSpPr>
+            <a:spLocks xmlns:a="http://schemas.openxmlformats.org/drawingml/2006/main" noGrp="1"/>
+          </p:cNvSpPr>
+          <p:nvPr/>
+        </p:nvSpPr>
+        <p:spPr>
+          <a:xfrm xmlns:a="http://schemas.openxmlformats.org/drawingml/2006/main">
+            <a:off x="1866900" y="5867400"/>
+            <a:ext cx="8077200" cy="361950"/>
           </a:xfrm>
           <a:prstGeom xmlns:a="http://schemas.openxmlformats.org/drawingml/2006/main" prst="rect">
             <a:avLst/>
@@ -23547,7 +23604,7 @@
           <a:lstStyle xmlns:a="http://schemas.openxmlformats.org/drawingml/2006/main"/>
           <a:p xmlns:a="http://schemas.openxmlformats.org/drawingml/2006/main">
             <a:pPr algn="ctr">
-              <a:defRPr sz="1050" b="1">
+              <a:defRPr sz="975" b="1">
                 <a:solidFill>
                   <a:srgbClr val="202A44"/>
                 </a:solidFill>
@@ -23557,7 +23614,7 @@
               </a:defRPr>
             </a:pPr>
             <a:r>
-              <a:rPr sz="1050" b="1">
+              <a:rPr sz="975" b="1">
                 <a:solidFill>
                   <a:srgbClr val="202A44"/>
                 </a:solidFill>
@@ -23565,7 +23622,30 @@
                 <a:ea typeface="Arial"/>
                 <a:cs typeface="Arial"/>
               </a:rPr>
-              <a:t>Future IVR is a non-AI telephony adapter: confirmed DTMF or speech codes go to the Java deterministic engine.</a:t>
+              <a:t>Future IVR: confirmed menu selections map to fixed codes.</a:t>
+            </a:r>
+          </a:p>
+          <a:p xmlns:a="http://schemas.openxmlformats.org/drawingml/2006/main">
+            <a:pPr algn="ctr">
+              <a:defRPr sz="975" b="1">
+                <a:solidFill>
+                  <a:srgbClr val="202A44"/>
+                </a:solidFill>
+                <a:latin typeface="Arial"/>
+                <a:ea typeface="Arial"/>
+                <a:cs typeface="Arial"/>
+              </a:defRPr>
+            </a:pPr>
+            <a:r>
+              <a:rPr sz="975" b="1">
+                <a:solidFill>
+                  <a:srgbClr val="202A44"/>
+                </a:solidFill>
+                <a:latin typeface="Arial"/>
+                <a:ea typeface="Arial"/>
+                <a:cs typeface="Arial"/>
+              </a:rPr>
+              <a:t>Future free text and medical documents: post-route context only. They cannot change the route.</a:t>
             </a:r>
           </a:p>
         </p:txBody>
@@ -23575,7 +23655,7 @@
           <p:cNvPr id="28" name="">
             <a:extLst xmlns:a="http://schemas.openxmlformats.org/drawingml/2006/main">
               <a:ext uri="{FF2B5EF4-FFF2-40B4-BE49-F238E27FC236}">
-                <a16:creationId xmlns:a16="http://schemas.microsoft.com/office/drawing/2014/main" id="{08425EE8-75E9-456A-8209-03E051E3C6F5}"/>
+                <a16:creationId xmlns:a16="http://schemas.microsoft.com/office/drawing/2014/main" id="{C0689F68-5175-4217-BAB0-19B887F43B7E}"/>
               </a:ext>
             </a:extLst>
           </p:cNvPr>
@@ -23630,7 +23710,7 @@
     </p:spTree>
     <p:extLst>
       <p:ext uri="{BB962C8B-B14F-4D97-AF65-F5344CB8AC3E}">
-        <p14:creationId xmlns:p14="http://schemas.microsoft.com/office/powerpoint/2010/main" val="444000715"/>
+        <p14:creationId xmlns:p14="http://schemas.microsoft.com/office/powerpoint/2010/main" val="112790876"/>
       </p:ext>
     </p:extLst>
   </p:cSld>
@@ -23654,7 +23734,7 @@
           <p:cNvPr id="44" name="">
             <a:extLst xmlns:a="http://schemas.openxmlformats.org/drawingml/2006/main">
               <a:ext uri="{FF2B5EF4-FFF2-40B4-BE49-F238E27FC236}">
-                <a16:creationId xmlns:a16="http://schemas.microsoft.com/office/drawing/2014/main" id="{7EE41111-1A01-457C-8BB9-372EF804B5BE}"/>
+                <a16:creationId xmlns:a16="http://schemas.microsoft.com/office/drawing/2014/main" id="{F2EBA14C-4775-42AD-ADF2-7DD7363957BF}"/>
               </a:ext>
             </a:extLst>
           </p:cNvPr>
@@ -23684,7 +23764,7 @@
           <p:cNvPr id="2" name="">
             <a:extLst xmlns:a="http://schemas.openxmlformats.org/drawingml/2006/main">
               <a:ext uri="{FF2B5EF4-FFF2-40B4-BE49-F238E27FC236}">
-                <a16:creationId xmlns:a16="http://schemas.microsoft.com/office/drawing/2014/main" id="{BC9C4CA0-E817-49F4-ADDE-98A2596252F1}"/>
+                <a16:creationId xmlns:a16="http://schemas.microsoft.com/office/drawing/2014/main" id="{9E57D1BE-2CCE-4ACC-B294-F0285CE2BC2F}"/>
               </a:ext>
             </a:extLst>
           </p:cNvPr>
@@ -23741,7 +23821,7 @@
           <p:cNvPr id="3" name="">
             <a:extLst xmlns:a="http://schemas.openxmlformats.org/drawingml/2006/main">
               <a:ext uri="{FF2B5EF4-FFF2-40B4-BE49-F238E27FC236}">
-                <a16:creationId xmlns:a16="http://schemas.microsoft.com/office/drawing/2014/main" id="{BF1E86B8-1AAD-499F-9147-4925CAD7DF45}"/>
+                <a16:creationId xmlns:a16="http://schemas.microsoft.com/office/drawing/2014/main" id="{12F4BACA-AA7E-4165-B53F-B6B8B0CAC740}"/>
               </a:ext>
             </a:extLst>
           </p:cNvPr>
@@ -23798,7 +23878,7 @@
           <p:cNvPr id="4" name="">
             <a:extLst xmlns:a="http://schemas.openxmlformats.org/drawingml/2006/main">
               <a:ext uri="{FF2B5EF4-FFF2-40B4-BE49-F238E27FC236}">
-                <a16:creationId xmlns:a16="http://schemas.microsoft.com/office/drawing/2014/main" id="{1CCF11C5-4164-4CB8-BBA0-96ED19EBD617}"/>
+                <a16:creationId xmlns:a16="http://schemas.microsoft.com/office/drawing/2014/main" id="{A96CEB0E-CA53-499C-A19E-A98772EDFB8B}"/>
               </a:ext>
             </a:extLst>
           </p:cNvPr>
@@ -23855,7 +23935,7 @@
           <p:cNvPr id="5" name="">
             <a:extLst xmlns:a="http://schemas.openxmlformats.org/drawingml/2006/main">
               <a:ext uri="{FF2B5EF4-FFF2-40B4-BE49-F238E27FC236}">
-                <a16:creationId xmlns:a16="http://schemas.microsoft.com/office/drawing/2014/main" id="{66C891B4-D11F-435E-89BE-204318330875}"/>
+                <a16:creationId xmlns:a16="http://schemas.microsoft.com/office/drawing/2014/main" id="{3A2AD247-2848-45C7-97F7-A99BD305B11F}"/>
               </a:ext>
             </a:extLst>
           </p:cNvPr>
@@ -23912,7 +23992,7 @@
           <p:cNvPr id="6" name="">
             <a:extLst xmlns:a="http://schemas.openxmlformats.org/drawingml/2006/main">
               <a:ext uri="{FF2B5EF4-FFF2-40B4-BE49-F238E27FC236}">
-                <a16:creationId xmlns:a16="http://schemas.microsoft.com/office/drawing/2014/main" id="{EFCAB98B-D850-4183-9C94-BC9D2C87BF4D}"/>
+                <a16:creationId xmlns:a16="http://schemas.microsoft.com/office/drawing/2014/main" id="{EFEA469E-3778-428F-A424-FD49C1DB23EC}"/>
               </a:ext>
             </a:extLst>
           </p:cNvPr>
@@ -23942,7 +24022,7 @@
           <p:cNvPr id="7" name="">
             <a:extLst xmlns:a="http://schemas.openxmlformats.org/drawingml/2006/main">
               <a:ext uri="{FF2B5EF4-FFF2-40B4-BE49-F238E27FC236}">
-                <a16:creationId xmlns:a16="http://schemas.microsoft.com/office/drawing/2014/main" id="{03D15E21-81CB-4D47-8BB5-81E98979501A}"/>
+                <a16:creationId xmlns:a16="http://schemas.microsoft.com/office/drawing/2014/main" id="{59A25B28-7951-45B2-A934-392FDAF434AC}"/>
               </a:ext>
             </a:extLst>
           </p:cNvPr>
@@ -23976,7 +24056,7 @@
           <p:cNvPr id="8" name="">
             <a:extLst xmlns:a="http://schemas.openxmlformats.org/drawingml/2006/main">
               <a:ext uri="{FF2B5EF4-FFF2-40B4-BE49-F238E27FC236}">
-                <a16:creationId xmlns:a16="http://schemas.microsoft.com/office/drawing/2014/main" id="{CB9E1EBD-15C4-48F8-96C3-7A7ACFD9EFA3}"/>
+                <a16:creationId xmlns:a16="http://schemas.microsoft.com/office/drawing/2014/main" id="{3BA7CCB4-E84A-4A3A-83E2-573D3A66694A}"/>
               </a:ext>
             </a:extLst>
           </p:cNvPr>
@@ -24033,7 +24113,7 @@
           <p:cNvPr id="9" name="">
             <a:extLst xmlns:a="http://schemas.openxmlformats.org/drawingml/2006/main">
               <a:ext uri="{FF2B5EF4-FFF2-40B4-BE49-F238E27FC236}">
-                <a16:creationId xmlns:a16="http://schemas.microsoft.com/office/drawing/2014/main" id="{1FCBA14E-3FAF-4D95-AE42-DBD85A0F55D7}"/>
+                <a16:creationId xmlns:a16="http://schemas.microsoft.com/office/drawing/2014/main" id="{005E1315-1497-44B2-8C74-B5365C8E19C4}"/>
               </a:ext>
             </a:extLst>
           </p:cNvPr>
@@ -24063,7 +24143,7 @@
           <p:cNvPr id="10" name="">
             <a:extLst xmlns:a="http://schemas.openxmlformats.org/drawingml/2006/main">
               <a:ext uri="{FF2B5EF4-FFF2-40B4-BE49-F238E27FC236}">
-                <a16:creationId xmlns:a16="http://schemas.microsoft.com/office/drawing/2014/main" id="{7F633CB1-E3DC-4406-BC15-2AB1F8DBEF71}"/>
+                <a16:creationId xmlns:a16="http://schemas.microsoft.com/office/drawing/2014/main" id="{A6ABE695-19DF-4487-A24B-26319A52F1BD}"/>
               </a:ext>
             </a:extLst>
           </p:cNvPr>
@@ -24120,7 +24200,7 @@
           <p:cNvPr id="11" name="">
             <a:extLst xmlns:a="http://schemas.openxmlformats.org/drawingml/2006/main">
               <a:ext uri="{FF2B5EF4-FFF2-40B4-BE49-F238E27FC236}">
-                <a16:creationId xmlns:a16="http://schemas.microsoft.com/office/drawing/2014/main" id="{7BA24D27-0247-4713-A807-1D139EA2D5ED}"/>
+                <a16:creationId xmlns:a16="http://schemas.microsoft.com/office/drawing/2014/main" id="{4BF03800-A35F-4B93-B599-F92449FD0700}"/>
               </a:ext>
             </a:extLst>
           </p:cNvPr>
@@ -24177,7 +24257,7 @@
           <p:cNvPr id="12" name="">
             <a:extLst xmlns:a="http://schemas.openxmlformats.org/drawingml/2006/main">
               <a:ext uri="{FF2B5EF4-FFF2-40B4-BE49-F238E27FC236}">
-                <a16:creationId xmlns:a16="http://schemas.microsoft.com/office/drawing/2014/main" id="{6D247565-2F56-406A-96D1-6673DDAD3B08}"/>
+                <a16:creationId xmlns:a16="http://schemas.microsoft.com/office/drawing/2014/main" id="{2DC3C296-8384-4F47-8046-52FDF72DA4C1}"/>
               </a:ext>
             </a:extLst>
           </p:cNvPr>
@@ -24207,7 +24287,7 @@
           <p:cNvPr id="13" name="">
             <a:extLst xmlns:a="http://schemas.openxmlformats.org/drawingml/2006/main">
               <a:ext uri="{FF2B5EF4-FFF2-40B4-BE49-F238E27FC236}">
-                <a16:creationId xmlns:a16="http://schemas.microsoft.com/office/drawing/2014/main" id="{46AC1B8F-E7AD-439D-A890-C2211A8BECDF}"/>
+                <a16:creationId xmlns:a16="http://schemas.microsoft.com/office/drawing/2014/main" id="{F9D96264-7ACC-4CC9-878C-5C802C75E648}"/>
               </a:ext>
             </a:extLst>
           </p:cNvPr>
@@ -24264,7 +24344,7 @@
           <p:cNvPr id="14" name="">
             <a:extLst xmlns:a="http://schemas.openxmlformats.org/drawingml/2006/main">
               <a:ext uri="{FF2B5EF4-FFF2-40B4-BE49-F238E27FC236}">
-                <a16:creationId xmlns:a16="http://schemas.microsoft.com/office/drawing/2014/main" id="{95519340-223A-4672-ACBF-DB1167C2A8F6}"/>
+                <a16:creationId xmlns:a16="http://schemas.microsoft.com/office/drawing/2014/main" id="{9FD5C5EC-3C1E-443C-B7E9-D8C84D3DA8B3}"/>
               </a:ext>
             </a:extLst>
           </p:cNvPr>
@@ -24321,7 +24401,7 @@
           <p:cNvPr id="15" name="">
             <a:extLst xmlns:a="http://schemas.openxmlformats.org/drawingml/2006/main">
               <a:ext uri="{FF2B5EF4-FFF2-40B4-BE49-F238E27FC236}">
-                <a16:creationId xmlns:a16="http://schemas.microsoft.com/office/drawing/2014/main" id="{8FDFCCAE-8884-4738-BFAF-328AE1822EB9}"/>
+                <a16:creationId xmlns:a16="http://schemas.microsoft.com/office/drawing/2014/main" id="{E1832C13-C93A-407C-9E1A-DA9F35A2391D}"/>
               </a:ext>
             </a:extLst>
           </p:cNvPr>
@@ -24351,7 +24431,7 @@
           <p:cNvPr id="16" name="">
             <a:extLst xmlns:a="http://schemas.openxmlformats.org/drawingml/2006/main">
               <a:ext uri="{FF2B5EF4-FFF2-40B4-BE49-F238E27FC236}">
-                <a16:creationId xmlns:a16="http://schemas.microsoft.com/office/drawing/2014/main" id="{9F2C45B3-DAE8-44F4-B73E-508C900E27C2}"/>
+                <a16:creationId xmlns:a16="http://schemas.microsoft.com/office/drawing/2014/main" id="{0CEB41A4-3470-422B-89CF-6CC80F6A40B6}"/>
               </a:ext>
             </a:extLst>
           </p:cNvPr>
@@ -24408,7 +24488,7 @@
           <p:cNvPr id="17" name="">
             <a:extLst xmlns:a="http://schemas.openxmlformats.org/drawingml/2006/main">
               <a:ext uri="{FF2B5EF4-FFF2-40B4-BE49-F238E27FC236}">
-                <a16:creationId xmlns:a16="http://schemas.microsoft.com/office/drawing/2014/main" id="{025C26B3-B242-4B00-B800-4469685178FF}"/>
+                <a16:creationId xmlns:a16="http://schemas.microsoft.com/office/drawing/2014/main" id="{81A03C21-4D1E-4839-802D-B6B8E5E5CA79}"/>
               </a:ext>
             </a:extLst>
           </p:cNvPr>
@@ -24465,7 +24545,7 @@
           <p:cNvPr id="18" name="">
             <a:extLst xmlns:a="http://schemas.openxmlformats.org/drawingml/2006/main">
               <a:ext uri="{FF2B5EF4-FFF2-40B4-BE49-F238E27FC236}">
-                <a16:creationId xmlns:a16="http://schemas.microsoft.com/office/drawing/2014/main" id="{777B5F32-F28A-4B7A-91FB-256B98B157F9}"/>
+                <a16:creationId xmlns:a16="http://schemas.microsoft.com/office/drawing/2014/main" id="{63A1A1D7-1C04-4598-888E-578B14386974}"/>
               </a:ext>
             </a:extLst>
           </p:cNvPr>
@@ -24495,7 +24575,7 @@
           <p:cNvPr id="19" name="">
             <a:extLst xmlns:a="http://schemas.openxmlformats.org/drawingml/2006/main">
               <a:ext uri="{FF2B5EF4-FFF2-40B4-BE49-F238E27FC236}">
-                <a16:creationId xmlns:a16="http://schemas.microsoft.com/office/drawing/2014/main" id="{862D9B42-65BF-4FEA-A997-478C87DFAB36}"/>
+                <a16:creationId xmlns:a16="http://schemas.microsoft.com/office/drawing/2014/main" id="{A80CF168-1B6E-4495-994F-1D9FBB17AF9E}"/>
               </a:ext>
             </a:extLst>
           </p:cNvPr>
@@ -24552,7 +24632,7 @@
           <p:cNvPr id="20" name="">
             <a:extLst xmlns:a="http://schemas.openxmlformats.org/drawingml/2006/main">
               <a:ext uri="{FF2B5EF4-FFF2-40B4-BE49-F238E27FC236}">
-                <a16:creationId xmlns:a16="http://schemas.microsoft.com/office/drawing/2014/main" id="{FBFA244D-539D-4339-8A9D-CB4182C79CBE}"/>
+                <a16:creationId xmlns:a16="http://schemas.microsoft.com/office/drawing/2014/main" id="{1D907B8E-ED8C-45E1-B3C9-DCCDC1B66DD8}"/>
               </a:ext>
             </a:extLst>
           </p:cNvPr>
@@ -24609,7 +24689,7 @@
           <p:cNvPr id="21" name="">
             <a:extLst xmlns:a="http://schemas.openxmlformats.org/drawingml/2006/main">
               <a:ext uri="{FF2B5EF4-FFF2-40B4-BE49-F238E27FC236}">
-                <a16:creationId xmlns:a16="http://schemas.microsoft.com/office/drawing/2014/main" id="{AB75E30D-ED88-4AC6-9177-49D450C762A7}"/>
+                <a16:creationId xmlns:a16="http://schemas.microsoft.com/office/drawing/2014/main" id="{68FE30A5-FE14-4F66-88A3-BC8A59D3EDE4}"/>
               </a:ext>
             </a:extLst>
           </p:cNvPr>
@@ -24639,7 +24719,7 @@
           <p:cNvPr id="22" name="">
             <a:extLst xmlns:a="http://schemas.openxmlformats.org/drawingml/2006/main">
               <a:ext uri="{FF2B5EF4-FFF2-40B4-BE49-F238E27FC236}">
-                <a16:creationId xmlns:a16="http://schemas.microsoft.com/office/drawing/2014/main" id="{3DC89255-C0F8-49B2-9923-D1436BEE9515}"/>
+                <a16:creationId xmlns:a16="http://schemas.microsoft.com/office/drawing/2014/main" id="{C1155BCE-ED82-4073-8455-161B2DF74ABB}"/>
               </a:ext>
             </a:extLst>
           </p:cNvPr>
@@ -24696,7 +24776,7 @@
           <p:cNvPr id="23" name="">
             <a:extLst xmlns:a="http://schemas.openxmlformats.org/drawingml/2006/main">
               <a:ext uri="{FF2B5EF4-FFF2-40B4-BE49-F238E27FC236}">
-                <a16:creationId xmlns:a16="http://schemas.microsoft.com/office/drawing/2014/main" id="{8494D2DC-16F7-4198-905D-60081447227A}"/>
+                <a16:creationId xmlns:a16="http://schemas.microsoft.com/office/drawing/2014/main" id="{2CBDBB3A-8D74-47C6-B723-A5A5E8CC31B0}"/>
               </a:ext>
             </a:extLst>
           </p:cNvPr>
@@ -24753,7 +24833,7 @@
           <p:cNvPr id="24" name="">
             <a:extLst xmlns:a="http://schemas.openxmlformats.org/drawingml/2006/main">
               <a:ext uri="{FF2B5EF4-FFF2-40B4-BE49-F238E27FC236}">
-                <a16:creationId xmlns:a16="http://schemas.microsoft.com/office/drawing/2014/main" id="{9B36D125-9F90-49EF-BC1E-E85620C817DE}"/>
+                <a16:creationId xmlns:a16="http://schemas.microsoft.com/office/drawing/2014/main" id="{A2139BE6-DC97-4CA7-A26D-E2680E40B10C}"/>
               </a:ext>
             </a:extLst>
           </p:cNvPr>
@@ -24787,7 +24867,7 @@
           <p:cNvPr id="25" name="">
             <a:extLst xmlns:a="http://schemas.openxmlformats.org/drawingml/2006/main">
               <a:ext uri="{FF2B5EF4-FFF2-40B4-BE49-F238E27FC236}">
-                <a16:creationId xmlns:a16="http://schemas.microsoft.com/office/drawing/2014/main" id="{FA2DCD7E-B3FD-4826-A99C-EF92EB26B046}"/>
+                <a16:creationId xmlns:a16="http://schemas.microsoft.com/office/drawing/2014/main" id="{BF73AC3B-7BD5-478F-9989-4188F0BFE731}"/>
               </a:ext>
             </a:extLst>
           </p:cNvPr>
@@ -24844,7 +24924,7 @@
           <p:cNvPr id="26" name="">
             <a:extLst xmlns:a="http://schemas.openxmlformats.org/drawingml/2006/main">
               <a:ext uri="{FF2B5EF4-FFF2-40B4-BE49-F238E27FC236}">
-                <a16:creationId xmlns:a16="http://schemas.microsoft.com/office/drawing/2014/main" id="{F510C50C-DB4B-414A-AC46-E71487936FA3}"/>
+                <a16:creationId xmlns:a16="http://schemas.microsoft.com/office/drawing/2014/main" id="{DC97FA03-ACAF-4E33-8480-D2AA535027DB}"/>
               </a:ext>
             </a:extLst>
           </p:cNvPr>
@@ -24874,7 +24954,7 @@
           <p:cNvPr id="27" name="">
             <a:extLst xmlns:a="http://schemas.openxmlformats.org/drawingml/2006/main">
               <a:ext uri="{FF2B5EF4-FFF2-40B4-BE49-F238E27FC236}">
-                <a16:creationId xmlns:a16="http://schemas.microsoft.com/office/drawing/2014/main" id="{D8EF0FA5-93C2-45AB-8399-7BE6D363C25B}"/>
+                <a16:creationId xmlns:a16="http://schemas.microsoft.com/office/drawing/2014/main" id="{15EC700E-9E46-4237-BCC2-EA880105984B}"/>
               </a:ext>
             </a:extLst>
           </p:cNvPr>
@@ -24931,7 +25011,7 @@
           <p:cNvPr id="28" name="">
             <a:extLst xmlns:a="http://schemas.openxmlformats.org/drawingml/2006/main">
               <a:ext uri="{FF2B5EF4-FFF2-40B4-BE49-F238E27FC236}">
-                <a16:creationId xmlns:a16="http://schemas.microsoft.com/office/drawing/2014/main" id="{19924067-0B2B-45FC-937B-91285D50B335}"/>
+                <a16:creationId xmlns:a16="http://schemas.microsoft.com/office/drawing/2014/main" id="{40500759-8C89-488A-8EC3-C84007463F6E}"/>
               </a:ext>
             </a:extLst>
           </p:cNvPr>
@@ -24988,7 +25068,7 @@
           <p:cNvPr id="29" name="">
             <a:extLst xmlns:a="http://schemas.openxmlformats.org/drawingml/2006/main">
               <a:ext uri="{FF2B5EF4-FFF2-40B4-BE49-F238E27FC236}">
-                <a16:creationId xmlns:a16="http://schemas.microsoft.com/office/drawing/2014/main" id="{60DAE377-237C-4730-B3C8-528EEAE548FE}"/>
+                <a16:creationId xmlns:a16="http://schemas.microsoft.com/office/drawing/2014/main" id="{379A0F84-FA5B-4060-9876-743F3DCEA183}"/>
               </a:ext>
             </a:extLst>
           </p:cNvPr>
@@ -25018,7 +25098,7 @@
           <p:cNvPr id="30" name="">
             <a:extLst xmlns:a="http://schemas.openxmlformats.org/drawingml/2006/main">
               <a:ext uri="{FF2B5EF4-FFF2-40B4-BE49-F238E27FC236}">
-                <a16:creationId xmlns:a16="http://schemas.microsoft.com/office/drawing/2014/main" id="{B3BF63A8-1090-4F5A-8E60-13F4B212B06A}"/>
+                <a16:creationId xmlns:a16="http://schemas.microsoft.com/office/drawing/2014/main" id="{1844EB3B-F9EA-4A95-A6E9-A259CC59992A}"/>
               </a:ext>
             </a:extLst>
           </p:cNvPr>
@@ -25075,7 +25155,7 @@
           <p:cNvPr id="31" name="">
             <a:extLst xmlns:a="http://schemas.openxmlformats.org/drawingml/2006/main">
               <a:ext uri="{FF2B5EF4-FFF2-40B4-BE49-F238E27FC236}">
-                <a16:creationId xmlns:a16="http://schemas.microsoft.com/office/drawing/2014/main" id="{91681D8E-593A-4A11-9192-06984D143510}"/>
+                <a16:creationId xmlns:a16="http://schemas.microsoft.com/office/drawing/2014/main" id="{FFB766C6-159C-4A1E-91CD-991FEB2E10AD}"/>
               </a:ext>
             </a:extLst>
           </p:cNvPr>
@@ -25132,7 +25212,7 @@
           <p:cNvPr id="32" name="">
             <a:extLst xmlns:a="http://schemas.openxmlformats.org/drawingml/2006/main">
               <a:ext uri="{FF2B5EF4-FFF2-40B4-BE49-F238E27FC236}">
-                <a16:creationId xmlns:a16="http://schemas.microsoft.com/office/drawing/2014/main" id="{39F65F0B-7C58-42E4-A939-9F28AB3B4E44}"/>
+                <a16:creationId xmlns:a16="http://schemas.microsoft.com/office/drawing/2014/main" id="{54DA3AFF-463E-4A33-92D7-5BBEAECE0D93}"/>
               </a:ext>
             </a:extLst>
           </p:cNvPr>
@@ -25162,7 +25242,7 @@
           <p:cNvPr id="33" name="">
             <a:extLst xmlns:a="http://schemas.openxmlformats.org/drawingml/2006/main">
               <a:ext uri="{FF2B5EF4-FFF2-40B4-BE49-F238E27FC236}">
-                <a16:creationId xmlns:a16="http://schemas.microsoft.com/office/drawing/2014/main" id="{A689CBA0-05F7-4B62-8C98-AB48F55284A3}"/>
+                <a16:creationId xmlns:a16="http://schemas.microsoft.com/office/drawing/2014/main" id="{177BE720-836B-4E3E-9A34-299471B94CB7}"/>
               </a:ext>
             </a:extLst>
           </p:cNvPr>
@@ -25219,7 +25299,7 @@
           <p:cNvPr id="34" name="">
             <a:extLst xmlns:a="http://schemas.openxmlformats.org/drawingml/2006/main">
               <a:ext uri="{FF2B5EF4-FFF2-40B4-BE49-F238E27FC236}">
-                <a16:creationId xmlns:a16="http://schemas.microsoft.com/office/drawing/2014/main" id="{B295720D-E1A5-48ED-B794-BDCE23220A7C}"/>
+                <a16:creationId xmlns:a16="http://schemas.microsoft.com/office/drawing/2014/main" id="{35A44CB7-D384-4AAB-9838-3FC15079F548}"/>
               </a:ext>
             </a:extLst>
           </p:cNvPr>
@@ -25276,7 +25356,7 @@
           <p:cNvPr id="35" name="">
             <a:extLst xmlns:a="http://schemas.openxmlformats.org/drawingml/2006/main">
               <a:ext uri="{FF2B5EF4-FFF2-40B4-BE49-F238E27FC236}">
-                <a16:creationId xmlns:a16="http://schemas.microsoft.com/office/drawing/2014/main" id="{928D3B5D-B42F-49FC-ACDF-1D89E75C7000}"/>
+                <a16:creationId xmlns:a16="http://schemas.microsoft.com/office/drawing/2014/main" id="{9542409A-37DE-41EC-BD87-F0E59102D6BF}"/>
               </a:ext>
             </a:extLst>
           </p:cNvPr>
@@ -25306,7 +25386,7 @@
           <p:cNvPr id="36" name="">
             <a:extLst xmlns:a="http://schemas.openxmlformats.org/drawingml/2006/main">
               <a:ext uri="{FF2B5EF4-FFF2-40B4-BE49-F238E27FC236}">
-                <a16:creationId xmlns:a16="http://schemas.microsoft.com/office/drawing/2014/main" id="{EA16F1DD-0ABD-4AAD-A0F9-0E33589F1B03}"/>
+                <a16:creationId xmlns:a16="http://schemas.microsoft.com/office/drawing/2014/main" id="{A00C6765-8EB9-4F1A-BAB8-D4AE0E4D5A7A}"/>
               </a:ext>
             </a:extLst>
           </p:cNvPr>
@@ -25363,7 +25443,7 @@
           <p:cNvPr id="37" name="">
             <a:extLst xmlns:a="http://schemas.openxmlformats.org/drawingml/2006/main">
               <a:ext uri="{FF2B5EF4-FFF2-40B4-BE49-F238E27FC236}">
-                <a16:creationId xmlns:a16="http://schemas.microsoft.com/office/drawing/2014/main" id="{A53A172C-C15A-464A-A8FD-A9241F83F234}"/>
+                <a16:creationId xmlns:a16="http://schemas.microsoft.com/office/drawing/2014/main" id="{94712A17-F294-44B8-B373-4727AB191DFC}"/>
               </a:ext>
             </a:extLst>
           </p:cNvPr>
@@ -25420,7 +25500,7 @@
           <p:cNvPr id="38" name="">
             <a:extLst xmlns:a="http://schemas.openxmlformats.org/drawingml/2006/main">
               <a:ext uri="{FF2B5EF4-FFF2-40B4-BE49-F238E27FC236}">
-                <a16:creationId xmlns:a16="http://schemas.microsoft.com/office/drawing/2014/main" id="{EAD36CA5-35BC-4621-BC15-029309A35A99}"/>
+                <a16:creationId xmlns:a16="http://schemas.microsoft.com/office/drawing/2014/main" id="{B9F1B437-CD5D-4581-BC89-749149809938}"/>
               </a:ext>
             </a:extLst>
           </p:cNvPr>
@@ -25450,7 +25530,7 @@
           <p:cNvPr id="39" name="">
             <a:extLst xmlns:a="http://schemas.openxmlformats.org/drawingml/2006/main">
               <a:ext uri="{FF2B5EF4-FFF2-40B4-BE49-F238E27FC236}">
-                <a16:creationId xmlns:a16="http://schemas.microsoft.com/office/drawing/2014/main" id="{BD849AC9-AC83-48C1-85C7-27A5773B5F86}"/>
+                <a16:creationId xmlns:a16="http://schemas.microsoft.com/office/drawing/2014/main" id="{A88AA5D6-E071-47B1-B00F-B95E49D006B1}"/>
               </a:ext>
             </a:extLst>
           </p:cNvPr>
@@ -25507,7 +25587,7 @@
           <p:cNvPr id="40" name="">
             <a:extLst xmlns:a="http://schemas.openxmlformats.org/drawingml/2006/main">
               <a:ext uri="{FF2B5EF4-FFF2-40B4-BE49-F238E27FC236}">
-                <a16:creationId xmlns:a16="http://schemas.microsoft.com/office/drawing/2014/main" id="{98F65563-767D-47B9-BCAF-780221EF1CAF}"/>
+                <a16:creationId xmlns:a16="http://schemas.microsoft.com/office/drawing/2014/main" id="{D28637A5-F5EF-49E9-8DB8-6A27F2FB303D}"/>
               </a:ext>
             </a:extLst>
           </p:cNvPr>
@@ -25564,7 +25644,7 @@
           <p:cNvPr id="41" name="">
             <a:extLst xmlns:a="http://schemas.openxmlformats.org/drawingml/2006/main">
               <a:ext uri="{FF2B5EF4-FFF2-40B4-BE49-F238E27FC236}">
-                <a16:creationId xmlns:a16="http://schemas.microsoft.com/office/drawing/2014/main" id="{3A132019-833E-48E3-99AF-BD0CC856FA51}"/>
+                <a16:creationId xmlns:a16="http://schemas.microsoft.com/office/drawing/2014/main" id="{E882141B-64A5-4B8A-9B78-BA9950F7E50D}"/>
               </a:ext>
             </a:extLst>
           </p:cNvPr>
@@ -25596,7 +25676,7 @@
           <p:cNvPr id="42" name="">
             <a:extLst xmlns:a="http://schemas.openxmlformats.org/drawingml/2006/main">
               <a:ext uri="{FF2B5EF4-FFF2-40B4-BE49-F238E27FC236}">
-                <a16:creationId xmlns:a16="http://schemas.microsoft.com/office/drawing/2014/main" id="{B6BE6284-7402-41D7-8948-064DCF5AC7FE}"/>
+                <a16:creationId xmlns:a16="http://schemas.microsoft.com/office/drawing/2014/main" id="{F22D0FC2-C6BC-47A6-9DEC-E997A4790A94}"/>
               </a:ext>
             </a:extLst>
           </p:cNvPr>
@@ -25653,7 +25733,7 @@
           <p:cNvPr id="43" name="">
             <a:extLst xmlns:a="http://schemas.openxmlformats.org/drawingml/2006/main">
               <a:ext uri="{FF2B5EF4-FFF2-40B4-BE49-F238E27FC236}">
-                <a16:creationId xmlns:a16="http://schemas.microsoft.com/office/drawing/2014/main" id="{16F71565-B604-42C8-BDDB-0DAFEF79DFD1}"/>
+                <a16:creationId xmlns:a16="http://schemas.microsoft.com/office/drawing/2014/main" id="{860D8C60-815C-4B90-A59E-EF3182899CF4}"/>
               </a:ext>
             </a:extLst>
           </p:cNvPr>
@@ -25708,7 +25788,7 @@
     </p:spTree>
     <p:extLst>
       <p:ext uri="{BB962C8B-B14F-4D97-AF65-F5344CB8AC3E}">
-        <p14:creationId xmlns:p14="http://schemas.microsoft.com/office/powerpoint/2010/main" val="1313688188"/>
+        <p14:creationId xmlns:p14="http://schemas.microsoft.com/office/powerpoint/2010/main" val="2089537136"/>
       </p:ext>
     </p:extLst>
   </p:cSld>
@@ -25732,7 +25812,7 @@
           <p:cNvPr id="32" name="">
             <a:extLst xmlns:a="http://schemas.openxmlformats.org/drawingml/2006/main">
               <a:ext uri="{FF2B5EF4-FFF2-40B4-BE49-F238E27FC236}">
-                <a16:creationId xmlns:a16="http://schemas.microsoft.com/office/drawing/2014/main" id="{55DDBA9E-910D-46DB-8E96-971B03EBE665}"/>
+                <a16:creationId xmlns:a16="http://schemas.microsoft.com/office/drawing/2014/main" id="{B8D1688F-7097-4171-90D1-323FA84B2D7A}"/>
               </a:ext>
             </a:extLst>
           </p:cNvPr>
@@ -25762,7 +25842,7 @@
           <p:cNvPr id="2" name="">
             <a:extLst xmlns:a="http://schemas.openxmlformats.org/drawingml/2006/main">
               <a:ext uri="{FF2B5EF4-FFF2-40B4-BE49-F238E27FC236}">
-                <a16:creationId xmlns:a16="http://schemas.microsoft.com/office/drawing/2014/main" id="{B102296C-1DC4-4CE2-9BED-AA2D89EA8EB0}"/>
+                <a16:creationId xmlns:a16="http://schemas.microsoft.com/office/drawing/2014/main" id="{7251B40D-A804-45ED-BDC0-7F640D8A45A6}"/>
               </a:ext>
             </a:extLst>
           </p:cNvPr>
@@ -25819,7 +25899,7 @@
           <p:cNvPr id="3" name="">
             <a:extLst xmlns:a="http://schemas.openxmlformats.org/drawingml/2006/main">
               <a:ext uri="{FF2B5EF4-FFF2-40B4-BE49-F238E27FC236}">
-                <a16:creationId xmlns:a16="http://schemas.microsoft.com/office/drawing/2014/main" id="{A81ED94E-F458-477C-A0ED-6DFD5FA1CF55}"/>
+                <a16:creationId xmlns:a16="http://schemas.microsoft.com/office/drawing/2014/main" id="{4D7A62B5-2B5B-423B-A7F6-69EF0B668B4E}"/>
               </a:ext>
             </a:extLst>
           </p:cNvPr>
@@ -25876,7 +25956,7 @@
           <p:cNvPr id="4" name="">
             <a:extLst xmlns:a="http://schemas.openxmlformats.org/drawingml/2006/main">
               <a:ext uri="{FF2B5EF4-FFF2-40B4-BE49-F238E27FC236}">
-                <a16:creationId xmlns:a16="http://schemas.microsoft.com/office/drawing/2014/main" id="{73907B26-2DC6-4E6E-903F-62D5074E2DBE}"/>
+                <a16:creationId xmlns:a16="http://schemas.microsoft.com/office/drawing/2014/main" id="{6C338EC8-A9F1-4739-AF68-48E5B8798146}"/>
               </a:ext>
             </a:extLst>
           </p:cNvPr>
@@ -25933,7 +26013,7 @@
           <p:cNvPr id="5" name="">
             <a:extLst xmlns:a="http://schemas.openxmlformats.org/drawingml/2006/main">
               <a:ext uri="{FF2B5EF4-FFF2-40B4-BE49-F238E27FC236}">
-                <a16:creationId xmlns:a16="http://schemas.microsoft.com/office/drawing/2014/main" id="{C16FAAA9-AB02-4A93-8A0A-1D65588FAEB1}"/>
+                <a16:creationId xmlns:a16="http://schemas.microsoft.com/office/drawing/2014/main" id="{CBD72ADF-B3FA-4D56-96BA-99F837FB33BA}"/>
               </a:ext>
             </a:extLst>
           </p:cNvPr>
@@ -25990,7 +26070,7 @@
           <p:cNvPr id="6" name="">
             <a:extLst xmlns:a="http://schemas.openxmlformats.org/drawingml/2006/main">
               <a:ext uri="{FF2B5EF4-FFF2-40B4-BE49-F238E27FC236}">
-                <a16:creationId xmlns:a16="http://schemas.microsoft.com/office/drawing/2014/main" id="{900D629A-11A3-4DF9-8AB5-440D2C6371FC}"/>
+                <a16:creationId xmlns:a16="http://schemas.microsoft.com/office/drawing/2014/main" id="{F9EC3BA8-702E-4F46-B375-F7B783D3C3E3}"/>
               </a:ext>
             </a:extLst>
           </p:cNvPr>
@@ -26020,7 +26100,7 @@
           <p:cNvPr id="7" name="">
             <a:extLst xmlns:a="http://schemas.openxmlformats.org/drawingml/2006/main">
               <a:ext uri="{FF2B5EF4-FFF2-40B4-BE49-F238E27FC236}">
-                <a16:creationId xmlns:a16="http://schemas.microsoft.com/office/drawing/2014/main" id="{8A498DA5-1195-480B-B8BD-CC463F1CB1B2}"/>
+                <a16:creationId xmlns:a16="http://schemas.microsoft.com/office/drawing/2014/main" id="{826F231E-5C9A-482B-854C-61EAF03A6FDE}"/>
               </a:ext>
             </a:extLst>
           </p:cNvPr>
@@ -26077,7 +26157,7 @@
           <p:cNvPr id="8" name="">
             <a:extLst xmlns:a="http://schemas.openxmlformats.org/drawingml/2006/main">
               <a:ext uri="{FF2B5EF4-FFF2-40B4-BE49-F238E27FC236}">
-                <a16:creationId xmlns:a16="http://schemas.microsoft.com/office/drawing/2014/main" id="{2F6B6794-6C08-4728-90D6-B94EC9CB845A}"/>
+                <a16:creationId xmlns:a16="http://schemas.microsoft.com/office/drawing/2014/main" id="{85246A44-A010-4235-A801-CAE5C435CEEB}"/>
               </a:ext>
             </a:extLst>
           </p:cNvPr>
@@ -26134,7 +26214,7 @@
           <p:cNvPr id="9" name="">
             <a:extLst xmlns:a="http://schemas.openxmlformats.org/drawingml/2006/main">
               <a:ext uri="{FF2B5EF4-FFF2-40B4-BE49-F238E27FC236}">
-                <a16:creationId xmlns:a16="http://schemas.microsoft.com/office/drawing/2014/main" id="{A674635C-8176-4CC9-B931-82DD2EE06FEF}"/>
+                <a16:creationId xmlns:a16="http://schemas.microsoft.com/office/drawing/2014/main" id="{21B4C31F-2F65-4811-92D2-5FC05B58FC4E}"/>
               </a:ext>
             </a:extLst>
           </p:cNvPr>
@@ -26191,7 +26271,7 @@
           <p:cNvPr id="10" name="">
             <a:extLst xmlns:a="http://schemas.openxmlformats.org/drawingml/2006/main">
               <a:ext uri="{FF2B5EF4-FFF2-40B4-BE49-F238E27FC236}">
-                <a16:creationId xmlns:a16="http://schemas.microsoft.com/office/drawing/2014/main" id="{4354514F-C7D9-4406-BC48-A6E0B2E898A1}"/>
+                <a16:creationId xmlns:a16="http://schemas.microsoft.com/office/drawing/2014/main" id="{69816E0E-E514-4AE4-B4E2-79D5016C8D72}"/>
               </a:ext>
             </a:extLst>
           </p:cNvPr>
@@ -26225,7 +26305,7 @@
           <p:cNvPr id="11" name="">
             <a:extLst xmlns:a="http://schemas.openxmlformats.org/drawingml/2006/main">
               <a:ext uri="{FF2B5EF4-FFF2-40B4-BE49-F238E27FC236}">
-                <a16:creationId xmlns:a16="http://schemas.microsoft.com/office/drawing/2014/main" id="{06B40CF4-7828-44E3-A9D6-775F83082889}"/>
+                <a16:creationId xmlns:a16="http://schemas.microsoft.com/office/drawing/2014/main" id="{070B03A6-93EF-4EA6-B0AB-F45486B95667}"/>
               </a:ext>
             </a:extLst>
           </p:cNvPr>
@@ -26282,7 +26362,7 @@
           <p:cNvPr id="12" name="">
             <a:extLst xmlns:a="http://schemas.openxmlformats.org/drawingml/2006/main">
               <a:ext uri="{FF2B5EF4-FFF2-40B4-BE49-F238E27FC236}">
-                <a16:creationId xmlns:a16="http://schemas.microsoft.com/office/drawing/2014/main" id="{21ABAF64-963C-42A8-B535-D80711987444}"/>
+                <a16:creationId xmlns:a16="http://schemas.microsoft.com/office/drawing/2014/main" id="{63D945F3-8FEF-4FA1-AD94-38000060586A}"/>
               </a:ext>
             </a:extLst>
           </p:cNvPr>
@@ -26362,7 +26442,7 @@
           <p:cNvPr id="13" name="">
             <a:extLst xmlns:a="http://schemas.openxmlformats.org/drawingml/2006/main">
               <a:ext uri="{FF2B5EF4-FFF2-40B4-BE49-F238E27FC236}">
-                <a16:creationId xmlns:a16="http://schemas.microsoft.com/office/drawing/2014/main" id="{8F9395AC-F887-4E63-BEAA-02C26564DFE6}"/>
+                <a16:creationId xmlns:a16="http://schemas.microsoft.com/office/drawing/2014/main" id="{947A668E-7968-4F80-85AB-2FCBCE183130}"/>
               </a:ext>
             </a:extLst>
           </p:cNvPr>
@@ -26419,7 +26499,7 @@
           <p:cNvPr id="14" name="">
             <a:extLst xmlns:a="http://schemas.openxmlformats.org/drawingml/2006/main">
               <a:ext uri="{FF2B5EF4-FFF2-40B4-BE49-F238E27FC236}">
-                <a16:creationId xmlns:a16="http://schemas.microsoft.com/office/drawing/2014/main" id="{7BC04F82-FEC8-468F-AAC1-A9EEBB27164D}"/>
+                <a16:creationId xmlns:a16="http://schemas.microsoft.com/office/drawing/2014/main" id="{52E65625-B7DB-4741-9BFF-62FCDD1F503D}"/>
               </a:ext>
             </a:extLst>
           </p:cNvPr>
@@ -26451,7 +26531,7 @@
           <p:cNvPr id="15" name="">
             <a:extLst xmlns:a="http://schemas.openxmlformats.org/drawingml/2006/main">
               <a:ext uri="{FF2B5EF4-FFF2-40B4-BE49-F238E27FC236}">
-                <a16:creationId xmlns:a16="http://schemas.microsoft.com/office/drawing/2014/main" id="{249247BA-1DEA-4919-9C7D-32DEB20876B1}"/>
+                <a16:creationId xmlns:a16="http://schemas.microsoft.com/office/drawing/2014/main" id="{09C06BCE-955B-4480-B62F-F5229FCEE4DA}"/>
               </a:ext>
             </a:extLst>
           </p:cNvPr>
@@ -26531,7 +26611,7 @@
           <p:cNvPr id="16" name="">
             <a:extLst xmlns:a="http://schemas.openxmlformats.org/drawingml/2006/main">
               <a:ext uri="{FF2B5EF4-FFF2-40B4-BE49-F238E27FC236}">
-                <a16:creationId xmlns:a16="http://schemas.microsoft.com/office/drawing/2014/main" id="{6D92495F-497F-4E7C-9034-B84DB4063F87}"/>
+                <a16:creationId xmlns:a16="http://schemas.microsoft.com/office/drawing/2014/main" id="{BF8E14C2-4853-4E3D-837E-9950364CB74D}"/>
               </a:ext>
             </a:extLst>
           </p:cNvPr>
@@ -26565,7 +26645,7 @@
           <p:cNvPr id="17" name="">
             <a:extLst xmlns:a="http://schemas.openxmlformats.org/drawingml/2006/main">
               <a:ext uri="{FF2B5EF4-FFF2-40B4-BE49-F238E27FC236}">
-                <a16:creationId xmlns:a16="http://schemas.microsoft.com/office/drawing/2014/main" id="{A51EF4B3-E03D-4268-B63F-1BF6E9E3A2FF}"/>
+                <a16:creationId xmlns:a16="http://schemas.microsoft.com/office/drawing/2014/main" id="{27E223D2-C06F-4CE4-8B36-9B45981833D7}"/>
               </a:ext>
             </a:extLst>
           </p:cNvPr>
@@ -26622,7 +26702,7 @@
           <p:cNvPr id="18" name="">
             <a:extLst xmlns:a="http://schemas.openxmlformats.org/drawingml/2006/main">
               <a:ext uri="{FF2B5EF4-FFF2-40B4-BE49-F238E27FC236}">
-                <a16:creationId xmlns:a16="http://schemas.microsoft.com/office/drawing/2014/main" id="{65135081-F042-4314-9629-5D1C67DECAE1}"/>
+                <a16:creationId xmlns:a16="http://schemas.microsoft.com/office/drawing/2014/main" id="{098B975B-653B-4803-B5DB-D90D7EA6A64C}"/>
               </a:ext>
             </a:extLst>
           </p:cNvPr>
@@ -26702,7 +26782,7 @@
           <p:cNvPr id="19" name="">
             <a:extLst xmlns:a="http://schemas.openxmlformats.org/drawingml/2006/main">
               <a:ext uri="{FF2B5EF4-FFF2-40B4-BE49-F238E27FC236}">
-                <a16:creationId xmlns:a16="http://schemas.microsoft.com/office/drawing/2014/main" id="{E9F2BDE6-737E-48AB-8D0D-FFBDDAF099E8}"/>
+                <a16:creationId xmlns:a16="http://schemas.microsoft.com/office/drawing/2014/main" id="{270552DF-2619-4C62-920F-A50FE30361DD}"/>
               </a:ext>
             </a:extLst>
           </p:cNvPr>
@@ -26759,7 +26839,7 @@
           <p:cNvPr id="20" name="">
             <a:extLst xmlns:a="http://schemas.openxmlformats.org/drawingml/2006/main">
               <a:ext uri="{FF2B5EF4-FFF2-40B4-BE49-F238E27FC236}">
-                <a16:creationId xmlns:a16="http://schemas.microsoft.com/office/drawing/2014/main" id="{A3855535-E3D4-4BC7-94BE-875B3F169AC5}"/>
+                <a16:creationId xmlns:a16="http://schemas.microsoft.com/office/drawing/2014/main" id="{8A2475EF-ADFA-41BC-8FD6-11F3CECBAD13}"/>
               </a:ext>
             </a:extLst>
           </p:cNvPr>
@@ -26793,7 +26873,7 @@
           <p:cNvPr id="21" name="">
             <a:extLst xmlns:a="http://schemas.openxmlformats.org/drawingml/2006/main">
               <a:ext uri="{FF2B5EF4-FFF2-40B4-BE49-F238E27FC236}">
-                <a16:creationId xmlns:a16="http://schemas.microsoft.com/office/drawing/2014/main" id="{D5086B73-459C-4FD8-9AE4-4F0C87AC1E8E}"/>
+                <a16:creationId xmlns:a16="http://schemas.microsoft.com/office/drawing/2014/main" id="{9AD7583D-F55E-42EE-B835-BEB24BF71401}"/>
               </a:ext>
             </a:extLst>
           </p:cNvPr>
@@ -26850,7 +26930,7 @@
           <p:cNvPr id="22" name="">
             <a:extLst xmlns:a="http://schemas.openxmlformats.org/drawingml/2006/main">
               <a:ext uri="{FF2B5EF4-FFF2-40B4-BE49-F238E27FC236}">
-                <a16:creationId xmlns:a16="http://schemas.microsoft.com/office/drawing/2014/main" id="{A33C7C45-BDBE-4439-AD4B-E356D8B6FB54}"/>
+                <a16:creationId xmlns:a16="http://schemas.microsoft.com/office/drawing/2014/main" id="{9FB365B6-2ACC-46CF-91A8-41F7B8096D45}"/>
               </a:ext>
             </a:extLst>
           </p:cNvPr>
@@ -26930,7 +27010,7 @@
           <p:cNvPr id="23" name="">
             <a:extLst xmlns:a="http://schemas.openxmlformats.org/drawingml/2006/main">
               <a:ext uri="{FF2B5EF4-FFF2-40B4-BE49-F238E27FC236}">
-                <a16:creationId xmlns:a16="http://schemas.microsoft.com/office/drawing/2014/main" id="{E0209A05-C6EC-418B-BFD8-7A6B382F2956}"/>
+                <a16:creationId xmlns:a16="http://schemas.microsoft.com/office/drawing/2014/main" id="{D2BD8BB3-2240-47C7-BCC7-DDC8B5F417EA}"/>
               </a:ext>
             </a:extLst>
           </p:cNvPr>
@@ -26987,7 +27067,7 @@
           <p:cNvPr id="24" name="">
             <a:extLst xmlns:a="http://schemas.openxmlformats.org/drawingml/2006/main">
               <a:ext uri="{FF2B5EF4-FFF2-40B4-BE49-F238E27FC236}">
-                <a16:creationId xmlns:a16="http://schemas.microsoft.com/office/drawing/2014/main" id="{30D99106-DF09-4C35-B92E-645837D1D823}"/>
+                <a16:creationId xmlns:a16="http://schemas.microsoft.com/office/drawing/2014/main" id="{AF5006AA-C4A2-4D52-B7BC-489377365CAE}"/>
               </a:ext>
             </a:extLst>
           </p:cNvPr>
@@ -27021,7 +27101,7 @@
           <p:cNvPr id="25" name="">
             <a:extLst xmlns:a="http://schemas.openxmlformats.org/drawingml/2006/main">
               <a:ext uri="{FF2B5EF4-FFF2-40B4-BE49-F238E27FC236}">
-                <a16:creationId xmlns:a16="http://schemas.microsoft.com/office/drawing/2014/main" id="{073ABCAD-3057-48B7-82CA-6D5484D77A6C}"/>
+                <a16:creationId xmlns:a16="http://schemas.microsoft.com/office/drawing/2014/main" id="{EE5285B9-A024-40E4-8C57-7C2E68A9AA76}"/>
               </a:ext>
             </a:extLst>
           </p:cNvPr>
@@ -27078,7 +27158,7 @@
           <p:cNvPr id="26" name="">
             <a:extLst xmlns:a="http://schemas.openxmlformats.org/drawingml/2006/main">
               <a:ext uri="{FF2B5EF4-FFF2-40B4-BE49-F238E27FC236}">
-                <a16:creationId xmlns:a16="http://schemas.microsoft.com/office/drawing/2014/main" id="{25F9C17C-08CE-45E7-BD73-954699020761}"/>
+                <a16:creationId xmlns:a16="http://schemas.microsoft.com/office/drawing/2014/main" id="{E7A3799C-B037-4C8A-98AB-A71843B0DC35}"/>
               </a:ext>
             </a:extLst>
           </p:cNvPr>
@@ -27158,7 +27238,7 @@
           <p:cNvPr id="27" name="">
             <a:extLst xmlns:a="http://schemas.openxmlformats.org/drawingml/2006/main">
               <a:ext uri="{FF2B5EF4-FFF2-40B4-BE49-F238E27FC236}">
-                <a16:creationId xmlns:a16="http://schemas.microsoft.com/office/drawing/2014/main" id="{F8C5F8D1-A331-4D93-BD42-0252AD207802}"/>
+                <a16:creationId xmlns:a16="http://schemas.microsoft.com/office/drawing/2014/main" id="{B744FA03-9BB3-444E-86B0-74D8918EC8FB}"/>
               </a:ext>
             </a:extLst>
           </p:cNvPr>
@@ -27215,7 +27295,7 @@
           <p:cNvPr id="28" name="">
             <a:extLst xmlns:a="http://schemas.openxmlformats.org/drawingml/2006/main">
               <a:ext uri="{FF2B5EF4-FFF2-40B4-BE49-F238E27FC236}">
-                <a16:creationId xmlns:a16="http://schemas.microsoft.com/office/drawing/2014/main" id="{BA6E891F-79E8-4F09-91F6-70DD9A5B5273}"/>
+                <a16:creationId xmlns:a16="http://schemas.microsoft.com/office/drawing/2014/main" id="{FF7626FE-CA4D-40CB-9C0D-C820488941B6}"/>
               </a:ext>
             </a:extLst>
           </p:cNvPr>
@@ -27247,7 +27327,7 @@
           <p:cNvPr id="29" name="">
             <a:extLst xmlns:a="http://schemas.openxmlformats.org/drawingml/2006/main">
               <a:ext uri="{FF2B5EF4-FFF2-40B4-BE49-F238E27FC236}">
-                <a16:creationId xmlns:a16="http://schemas.microsoft.com/office/drawing/2014/main" id="{49CCCC64-CDD1-44BF-A81E-447AF9BAE11F}"/>
+                <a16:creationId xmlns:a16="http://schemas.microsoft.com/office/drawing/2014/main" id="{0873250F-B678-4BFC-A1DC-46BF4D8332DC}"/>
               </a:ext>
             </a:extLst>
           </p:cNvPr>
@@ -27304,7 +27384,7 @@
           <p:cNvPr id="30" name="">
             <a:extLst xmlns:a="http://schemas.openxmlformats.org/drawingml/2006/main">
               <a:ext uri="{FF2B5EF4-FFF2-40B4-BE49-F238E27FC236}">
-                <a16:creationId xmlns:a16="http://schemas.microsoft.com/office/drawing/2014/main" id="{9715C5F5-681B-4D96-8F12-E7046670CF7A}"/>
+                <a16:creationId xmlns:a16="http://schemas.microsoft.com/office/drawing/2014/main" id="{708CB568-CA6E-4CD2-ABA1-008D65FB37D5}"/>
               </a:ext>
             </a:extLst>
           </p:cNvPr>
@@ -27361,7 +27441,7 @@
           <p:cNvPr id="31" name="">
             <a:extLst xmlns:a="http://schemas.openxmlformats.org/drawingml/2006/main">
               <a:ext uri="{FF2B5EF4-FFF2-40B4-BE49-F238E27FC236}">
-                <a16:creationId xmlns:a16="http://schemas.microsoft.com/office/drawing/2014/main" id="{E119FD2A-1500-4797-947C-517B369D2326}"/>
+                <a16:creationId xmlns:a16="http://schemas.microsoft.com/office/drawing/2014/main" id="{899F639A-04C8-423D-BE9C-E4614F8FD65E}"/>
               </a:ext>
             </a:extLst>
           </p:cNvPr>
@@ -27416,7 +27496,7 @@
     </p:spTree>
     <p:extLst>
       <p:ext uri="{BB962C8B-B14F-4D97-AF65-F5344CB8AC3E}">
-        <p14:creationId xmlns:p14="http://schemas.microsoft.com/office/powerpoint/2010/main" val="1521034268"/>
+        <p14:creationId xmlns:p14="http://schemas.microsoft.com/office/powerpoint/2010/main" val="1696823357"/>
       </p:ext>
     </p:extLst>
   </p:cSld>

--- a/docs/presentation/NetraJyoti_AI_Capstone_Demo_Deck.pptx
+++ b/docs/presentation/NetraJyoti_AI_Capstone_Demo_Deck.pptx
@@ -2,25 +2,25 @@
 <file path=ppt/presentation.xml><?xml version="1.0" encoding="utf-8"?>
 <p:presentation xmlns:p="http://schemas.openxmlformats.org/presentationml/2006/main">
   <p:sldMasterIdLst>
-    <p:sldMasterId xmlns:r="http://schemas.openxmlformats.org/officeDocument/2006/relationships" id="2147483648" r:id="Rebfff7aaa4604330"/>
+    <p:sldMasterId xmlns:r="http://schemas.openxmlformats.org/officeDocument/2006/relationships" id="2147483648" r:id="R3d72fa211ff4459a"/>
   </p:sldMasterIdLst>
   <p:notesMasterIdLst>
-    <p:notesMasterId xmlns:r="http://schemas.openxmlformats.org/officeDocument/2006/relationships" r:id="R17cbc4a0cb484f5f"/>
+    <p:notesMasterId xmlns:r="http://schemas.openxmlformats.org/officeDocument/2006/relationships" r:id="Rb8873e823cfa4104"/>
   </p:notesMasterIdLst>
   <p:sldIdLst>
-    <p:sldId xmlns:r="http://schemas.openxmlformats.org/officeDocument/2006/relationships" id="256" r:id="R66bc48ab8d6649c3"/>
-    <p:sldId xmlns:r="http://schemas.openxmlformats.org/officeDocument/2006/relationships" id="257" r:id="Rc1f232db6f934275"/>
-    <p:sldId xmlns:r="http://schemas.openxmlformats.org/officeDocument/2006/relationships" id="258" r:id="Rdf8eb1b232f54f96"/>
-    <p:sldId xmlns:r="http://schemas.openxmlformats.org/officeDocument/2006/relationships" id="259" r:id="R4e0ebd61a2f34b5d"/>
-    <p:sldId xmlns:r="http://schemas.openxmlformats.org/officeDocument/2006/relationships" id="260" r:id="R6fceee3e9ebb4190"/>
-    <p:sldId xmlns:r="http://schemas.openxmlformats.org/officeDocument/2006/relationships" id="261" r:id="Rb6b546378a774f89"/>
-    <p:sldId xmlns:r="http://schemas.openxmlformats.org/officeDocument/2006/relationships" id="262" r:id="R84b0536df2a84d5d"/>
-    <p:sldId xmlns:r="http://schemas.openxmlformats.org/officeDocument/2006/relationships" id="263" r:id="R8c1feadbed53458b"/>
-    <p:sldId xmlns:r="http://schemas.openxmlformats.org/officeDocument/2006/relationships" id="264" r:id="R9bdb86b3d67a492d"/>
-    <p:sldId xmlns:r="http://schemas.openxmlformats.org/officeDocument/2006/relationships" id="265" r:id="Rfb237b858c874014"/>
-    <p:sldId xmlns:r="http://schemas.openxmlformats.org/officeDocument/2006/relationships" id="266" r:id="R6cbb3c567cc24e67"/>
-    <p:sldId xmlns:r="http://schemas.openxmlformats.org/officeDocument/2006/relationships" id="267" r:id="R83273a8423014017"/>
-    <p:sldId xmlns:r="http://schemas.openxmlformats.org/officeDocument/2006/relationships" id="268" r:id="R7ec56c1f30084fba"/>
+    <p:sldId xmlns:r="http://schemas.openxmlformats.org/officeDocument/2006/relationships" id="256" r:id="Ra7712064c0c74910"/>
+    <p:sldId xmlns:r="http://schemas.openxmlformats.org/officeDocument/2006/relationships" id="257" r:id="R2aee996dcacd447a"/>
+    <p:sldId xmlns:r="http://schemas.openxmlformats.org/officeDocument/2006/relationships" id="258" r:id="R4fb9397173454f6b"/>
+    <p:sldId xmlns:r="http://schemas.openxmlformats.org/officeDocument/2006/relationships" id="259" r:id="Rb72b12c678774f8c"/>
+    <p:sldId xmlns:r="http://schemas.openxmlformats.org/officeDocument/2006/relationships" id="260" r:id="Reb3b50dc59e7488e"/>
+    <p:sldId xmlns:r="http://schemas.openxmlformats.org/officeDocument/2006/relationships" id="261" r:id="R0102db29f18d4393"/>
+    <p:sldId xmlns:r="http://schemas.openxmlformats.org/officeDocument/2006/relationships" id="262" r:id="R37a65a1a64734689"/>
+    <p:sldId xmlns:r="http://schemas.openxmlformats.org/officeDocument/2006/relationships" id="263" r:id="R54dda5abc5df4cc8"/>
+    <p:sldId xmlns:r="http://schemas.openxmlformats.org/officeDocument/2006/relationships" id="264" r:id="R6cea499366264eef"/>
+    <p:sldId xmlns:r="http://schemas.openxmlformats.org/officeDocument/2006/relationships" id="265" r:id="R9af760bad7ad4541"/>
+    <p:sldId xmlns:r="http://schemas.openxmlformats.org/officeDocument/2006/relationships" id="266" r:id="R027fc25f96b44428"/>
+    <p:sldId xmlns:r="http://schemas.openxmlformats.org/officeDocument/2006/relationships" id="267" r:id="Rca8525d5b3bc461f"/>
+    <p:sldId xmlns:r="http://schemas.openxmlformats.org/officeDocument/2006/relationships" id="268" r:id="R7f3814af2b074e1f"/>
   </p:sldIdLst>
   <p:sldSz cx="12192000" cy="6858000"/>
   <p:notesSz cx="6858000" cy="9144000"/>
@@ -928,7 +928,7 @@
           <a:lstStyle xmlns:a="http://schemas.openxmlformats.org/drawingml/2006/main"/>
           <a:p xmlns:a="http://schemas.openxmlformats.org/drawingml/2006/main">
             <a:r>
-              <a:t>The user moves through a short common intake: consent, symptoms, and urgent-sign checking. Java returns one route. The result pages then provide urgent care direction, routine service direction, or visible human support. Return and restart actions stay available throughout. Time: 55 seconds.</a:t>
+              <a:t>This is the implementation and evidence slide. The live stack uses React, Java, PostgreSQL, and optional local Ollama. Jira records 11 resolved linked delivery stories. The current automated evidence is deliberately limited to Java unit tests for routing and output validation; full pilot validation is still required. Time: 50 seconds.</a:t>
             </a:r>
           </a:p>
         </p:txBody>
@@ -998,7 +998,7 @@
           <a:lstStyle xmlns:a="http://schemas.openxmlformats.org/drawingml/2006/main"/>
           <a:p xmlns:a="http://schemas.openxmlformats.org/drawingml/2006/main">
             <a:r>
-              <a:t>This is the implementation and evidence slide. The live stack uses React, Java, PostgreSQL, and optional local Ollama. Jira records 11 resolved linked delivery stories. The current automated evidence is deliberately limited to Java unit tests for routing and output validation; full pilot validation is still required. Time: 50 seconds.</a:t>
+              <a:t>The user moves through a short common intake: consent, symptoms, and urgent-sign checking. Java returns one route. The result pages then provide urgent care direction, routine service direction, or visible human support. Return and restart actions stay available throughout. Time: 55 seconds.</a:t>
             </a:r>
           </a:p>
         </p:txBody>
@@ -1334,7 +1334,7 @@
   </p:cSld>
   <p:clrMap bg1="lt1" tx1="dk1" bg2="lt2" tx2="dk2" accent1="accent1" accent2="accent2" accent3="accent3" accent4="accent4" accent5="accent5" accent6="accent6" hlink="hlink" folHlink="folHlink"/>
   <p:sldLayoutIdLst>
-    <p:sldLayoutId xmlns:r="http://schemas.openxmlformats.org/officeDocument/2006/relationships" id="2147483649" r:id="R71729827c22f4ef8"/>
+    <p:sldLayoutId xmlns:r="http://schemas.openxmlformats.org/officeDocument/2006/relationships" id="2147483649" r:id="R3b8eace947394241"/>
   </p:sldLayoutIdLst>
   <p:txStyles>
     <p:titleStyle>
@@ -2556,6 +2556,7 @@
           <a:lstStyle xmlns:a="http://schemas.openxmlformats.org/drawingml/2006/main"/>
           <a:p xmlns:a="http://schemas.openxmlformats.org/drawingml/2006/main">
             <a:pPr>
+              <a:buNone/>
               <a:defRPr sz="1275" b="1">
                 <a:solidFill>
                   <a:srgbClr val="E7A048"/>
@@ -2613,6 +2614,7 @@
           <a:lstStyle xmlns:a="http://schemas.openxmlformats.org/drawingml/2006/main"/>
           <a:p xmlns:a="http://schemas.openxmlformats.org/drawingml/2006/main">
             <a:pPr>
+              <a:buNone/>
               <a:defRPr sz="2850" b="1">
                 <a:solidFill>
                   <a:srgbClr val="FFFFFF"/>
@@ -2636,6 +2638,7 @@
           </a:p>
           <a:p xmlns:a="http://schemas.openxmlformats.org/drawingml/2006/main">
             <a:pPr>
+              <a:buNone/>
               <a:defRPr sz="2850" b="1">
                 <a:solidFill>
                   <a:srgbClr val="FFFFFF"/>
@@ -2723,6 +2726,7 @@
           <a:lstStyle xmlns:a="http://schemas.openxmlformats.org/drawingml/2006/main"/>
           <a:p xmlns:a="http://schemas.openxmlformats.org/drawingml/2006/main">
             <a:pPr>
+              <a:buNone/>
               <a:defRPr sz="1575">
                 <a:solidFill>
                   <a:srgbClr val="DCE4F3"/>
@@ -2746,6 +2750,7 @@
           </a:p>
           <a:p xmlns:a="http://schemas.openxmlformats.org/drawingml/2006/main">
             <a:pPr>
+              <a:buNone/>
               <a:defRPr sz="1575">
                 <a:solidFill>
                   <a:srgbClr val="DCE4F3"/>
@@ -2803,6 +2808,7 @@
           <a:lstStyle xmlns:a="http://schemas.openxmlformats.org/drawingml/2006/main"/>
           <a:p xmlns:a="http://schemas.openxmlformats.org/drawingml/2006/main">
             <a:pPr>
+              <a:buNone/>
               <a:defRPr sz="1200">
                 <a:solidFill>
                   <a:srgbClr val="B7C4DF"/>
@@ -2826,6 +2832,7 @@
           </a:p>
           <a:p xmlns:a="http://schemas.openxmlformats.org/drawingml/2006/main">
             <a:pPr>
+              <a:buNone/>
               <a:defRPr sz="1200">
                 <a:solidFill>
                   <a:srgbClr val="B7C4DF"/>
@@ -2883,6 +2890,7 @@
           <a:lstStyle xmlns:a="http://schemas.openxmlformats.org/drawingml/2006/main"/>
           <a:p xmlns:a="http://schemas.openxmlformats.org/drawingml/2006/main">
             <a:pPr>
+              <a:buNone/>
               <a:defRPr sz="2475" b="1">
                 <a:solidFill>
                   <a:srgbClr val="202A44"/>
@@ -2940,6 +2948,7 @@
           <a:lstStyle xmlns:a="http://schemas.openxmlformats.org/drawingml/2006/main"/>
           <a:p xmlns:a="http://schemas.openxmlformats.org/drawingml/2006/main">
             <a:pPr>
+              <a:buNone/>
               <a:defRPr sz="1500">
                 <a:solidFill>
                   <a:srgbClr val="56647A"/>
@@ -2997,6 +3006,7 @@
           <a:lstStyle xmlns:a="http://schemas.openxmlformats.org/drawingml/2006/main"/>
           <a:p xmlns:a="http://schemas.openxmlformats.org/drawingml/2006/main">
             <a:pPr>
+              <a:buNone/>
               <a:defRPr sz="1275" b="1">
                 <a:solidFill>
                   <a:srgbClr val="237A7A"/>
@@ -3084,6 +3094,7 @@
           <a:lstStyle xmlns:a="http://schemas.openxmlformats.org/drawingml/2006/main"/>
           <a:p xmlns:a="http://schemas.openxmlformats.org/drawingml/2006/main">
             <a:pPr>
+              <a:buNone/>
               <a:defRPr sz="1275" b="1">
                 <a:solidFill>
                   <a:srgbClr val="4656A8"/>
@@ -3171,6 +3182,7 @@
           <a:lstStyle xmlns:a="http://schemas.openxmlformats.org/drawingml/2006/main"/>
           <a:p xmlns:a="http://schemas.openxmlformats.org/drawingml/2006/main">
             <a:pPr>
+              <a:buNone/>
               <a:defRPr sz="1275" b="1">
                 <a:solidFill>
                   <a:srgbClr val="202A44"/>
@@ -3280,6 +3292,7 @@
           <a:lstStyle xmlns:a="http://schemas.openxmlformats.org/drawingml/2006/main"/>
           <a:p xmlns:a="http://schemas.openxmlformats.org/drawingml/2006/main">
             <a:pPr>
+              <a:buNone/>
               <a:defRPr sz="1200" b="1">
                 <a:solidFill>
                   <a:srgbClr val="E7A048"/>
@@ -3337,6 +3350,7 @@
           <a:lstStyle xmlns:a="http://schemas.openxmlformats.org/drawingml/2006/main"/>
           <a:p xmlns:a="http://schemas.openxmlformats.org/drawingml/2006/main">
             <a:pPr algn="r">
+              <a:buNone/>
               <a:defRPr sz="975" b="1">
                 <a:solidFill>
                   <a:srgbClr val="4656A8"/>
@@ -3394,6 +3408,7 @@
           <a:lstStyle xmlns:a="http://schemas.openxmlformats.org/drawingml/2006/main"/>
           <a:p xmlns:a="http://schemas.openxmlformats.org/drawingml/2006/main">
             <a:pPr>
+              <a:buNone/>
               <a:defRPr sz="2550" b="1">
                 <a:solidFill>
                   <a:srgbClr val="202A44"/>
@@ -3451,6 +3466,7 @@
           <a:lstStyle xmlns:a="http://schemas.openxmlformats.org/drawingml/2006/main"/>
           <a:p xmlns:a="http://schemas.openxmlformats.org/drawingml/2006/main">
             <a:pPr>
+              <a:buNone/>
               <a:defRPr sz="1275">
                 <a:solidFill>
                   <a:srgbClr val="56647A"/>
@@ -3604,6 +3620,7 @@
           <a:lstStyle xmlns:a="http://schemas.openxmlformats.org/drawingml/2006/main"/>
           <a:p xmlns:a="http://schemas.openxmlformats.org/drawingml/2006/main">
             <a:pPr>
+              <a:buNone/>
               <a:defRPr sz="1275" b="1">
                 <a:solidFill>
                   <a:srgbClr val="237A7A"/>
@@ -3661,6 +3678,7 @@
           <a:lstStyle xmlns:a="http://schemas.openxmlformats.org/drawingml/2006/main"/>
           <a:p xmlns:a="http://schemas.openxmlformats.org/drawingml/2006/main">
             <a:pPr>
+              <a:buNone/>
               <a:defRPr sz="2550" b="1">
                 <a:solidFill>
                   <a:srgbClr val="202A44"/>
@@ -3718,6 +3736,7 @@
           <a:lstStyle xmlns:a="http://schemas.openxmlformats.org/drawingml/2006/main"/>
           <a:p xmlns:a="http://schemas.openxmlformats.org/drawingml/2006/main">
             <a:pPr>
+              <a:buNone/>
               <a:defRPr sz="1125" b="1">
                 <a:solidFill>
                   <a:srgbClr val="1E2A3B"/>
@@ -3775,6 +3794,7 @@
           <a:lstStyle xmlns:a="http://schemas.openxmlformats.org/drawingml/2006/main"/>
           <a:p xmlns:a="http://schemas.openxmlformats.org/drawingml/2006/main">
             <a:pPr>
+              <a:buNone/>
               <a:defRPr sz="900">
                 <a:solidFill>
                   <a:srgbClr val="56647A"/>
@@ -3898,6 +3918,7 @@
           <a:lstStyle xmlns:a="http://schemas.openxmlformats.org/drawingml/2006/main"/>
           <a:p xmlns:a="http://schemas.openxmlformats.org/drawingml/2006/main">
             <a:pPr>
+              <a:buNone/>
               <a:defRPr sz="1275" b="1">
                 <a:solidFill>
                   <a:srgbClr val="4656A8"/>
@@ -3955,6 +3976,7 @@
           <a:lstStyle xmlns:a="http://schemas.openxmlformats.org/drawingml/2006/main"/>
           <a:p xmlns:a="http://schemas.openxmlformats.org/drawingml/2006/main">
             <a:pPr>
+              <a:buNone/>
               <a:defRPr sz="2550" b="1">
                 <a:solidFill>
                   <a:srgbClr val="202A44"/>
@@ -4012,6 +4034,7 @@
           <a:lstStyle xmlns:a="http://schemas.openxmlformats.org/drawingml/2006/main"/>
           <a:p xmlns:a="http://schemas.openxmlformats.org/drawingml/2006/main">
             <a:pPr>
+              <a:buNone/>
               <a:defRPr sz="1125" b="1">
                 <a:solidFill>
                   <a:srgbClr val="1E2A3B"/>
@@ -4069,6 +4092,7 @@
           <a:lstStyle xmlns:a="http://schemas.openxmlformats.org/drawingml/2006/main"/>
           <a:p xmlns:a="http://schemas.openxmlformats.org/drawingml/2006/main">
             <a:pPr>
+              <a:buNone/>
               <a:defRPr sz="900">
                 <a:solidFill>
                   <a:srgbClr val="56647A"/>
@@ -4192,6 +4216,7 @@
           <a:lstStyle xmlns:a="http://schemas.openxmlformats.org/drawingml/2006/main"/>
           <a:p xmlns:a="http://schemas.openxmlformats.org/drawingml/2006/main">
             <a:pPr>
+              <a:buNone/>
               <a:defRPr sz="1275" b="1">
                 <a:solidFill>
                   <a:srgbClr val="DE664C"/>
@@ -4249,6 +4274,7 @@
           <a:lstStyle xmlns:a="http://schemas.openxmlformats.org/drawingml/2006/main"/>
           <a:p xmlns:a="http://schemas.openxmlformats.org/drawingml/2006/main">
             <a:pPr>
+              <a:buNone/>
               <a:defRPr sz="1950" b="1">
                 <a:solidFill>
                   <a:srgbClr val="202A44"/>
@@ -4306,6 +4332,7 @@
           <a:lstStyle xmlns:a="http://schemas.openxmlformats.org/drawingml/2006/main"/>
           <a:p xmlns:a="http://schemas.openxmlformats.org/drawingml/2006/main">
             <a:pPr>
+              <a:buNone/>
               <a:defRPr sz="1125" b="1">
                 <a:solidFill>
                   <a:srgbClr val="1E2A3B"/>
@@ -4363,6 +4390,7 @@
           <a:lstStyle xmlns:a="http://schemas.openxmlformats.org/drawingml/2006/main"/>
           <a:p xmlns:a="http://schemas.openxmlformats.org/drawingml/2006/main">
             <a:pPr>
+              <a:buNone/>
               <a:defRPr sz="900">
                 <a:solidFill>
                   <a:srgbClr val="56647A"/>
@@ -4452,6 +4480,7 @@
           <a:lstStyle xmlns:a="http://schemas.openxmlformats.org/drawingml/2006/main"/>
           <a:p xmlns:a="http://schemas.openxmlformats.org/drawingml/2006/main">
             <a:pPr algn="ctr">
+              <a:buNone/>
               <a:defRPr sz="1050" b="1">
                 <a:solidFill>
                   <a:srgbClr val="202A44"/>
@@ -4509,6 +4538,7 @@
           <a:lstStyle xmlns:a="http://schemas.openxmlformats.org/drawingml/2006/main"/>
           <a:p xmlns:a="http://schemas.openxmlformats.org/drawingml/2006/main">
             <a:pPr algn="ctr">
+              <a:buNone/>
               <a:defRPr sz="750">
                 <a:solidFill>
                   <a:srgbClr val="56647A"/>
@@ -4566,6 +4596,7 @@
           <a:lstStyle xmlns:a="http://schemas.openxmlformats.org/drawingml/2006/main"/>
           <a:p xmlns:a="http://schemas.openxmlformats.org/drawingml/2006/main">
             <a:pPr algn="r">
+              <a:buNone/>
               <a:defRPr sz="900">
                 <a:solidFill>
                   <a:srgbClr val="56647A"/>
@@ -4675,6 +4706,7 @@
           <a:lstStyle xmlns:a="http://schemas.openxmlformats.org/drawingml/2006/main"/>
           <a:p xmlns:a="http://schemas.openxmlformats.org/drawingml/2006/main">
             <a:pPr>
+              <a:buNone/>
               <a:defRPr sz="1200" b="1">
                 <a:solidFill>
                   <a:srgbClr val="E7A048"/>
@@ -4732,6 +4764,7 @@
           <a:lstStyle xmlns:a="http://schemas.openxmlformats.org/drawingml/2006/main"/>
           <a:p xmlns:a="http://schemas.openxmlformats.org/drawingml/2006/main">
             <a:pPr algn="r">
+              <a:buNone/>
               <a:defRPr sz="975" b="1">
                 <a:solidFill>
                   <a:srgbClr val="4656A8"/>
@@ -4789,6 +4822,7 @@
           <a:lstStyle xmlns:a="http://schemas.openxmlformats.org/drawingml/2006/main"/>
           <a:p xmlns:a="http://schemas.openxmlformats.org/drawingml/2006/main">
             <a:pPr>
+              <a:buNone/>
               <a:defRPr sz="2550" b="1">
                 <a:solidFill>
                   <a:srgbClr val="202A44"/>
@@ -4846,6 +4880,7 @@
           <a:lstStyle xmlns:a="http://schemas.openxmlformats.org/drawingml/2006/main"/>
           <a:p xmlns:a="http://schemas.openxmlformats.org/drawingml/2006/main">
             <a:pPr>
+              <a:buNone/>
               <a:defRPr sz="1275">
                 <a:solidFill>
                   <a:srgbClr val="56647A"/>
@@ -5029,6 +5064,7 @@
           <a:lstStyle xmlns:a="http://schemas.openxmlformats.org/drawingml/2006/main"/>
           <a:p xmlns:a="http://schemas.openxmlformats.org/drawingml/2006/main">
             <a:pPr>
+              <a:buNone/>
               <a:defRPr sz="1650" b="1">
                 <a:solidFill>
                   <a:srgbClr val="202A44"/>
@@ -5086,6 +5122,7 @@
           <a:lstStyle xmlns:a="http://schemas.openxmlformats.org/drawingml/2006/main"/>
           <a:p xmlns:a="http://schemas.openxmlformats.org/drawingml/2006/main">
             <a:pPr>
+              <a:buNone/>
               <a:defRPr sz="1200">
                 <a:solidFill>
                   <a:srgbClr val="56647A"/>
@@ -5109,6 +5146,7 @@
           </a:p>
           <a:p xmlns:a="http://schemas.openxmlformats.org/drawingml/2006/main">
             <a:pPr>
+              <a:buNone/>
               <a:defRPr sz="1200">
                 <a:solidFill>
                   <a:srgbClr val="56647A"/>
@@ -5232,6 +5270,7 @@
           <a:lstStyle xmlns:a="http://schemas.openxmlformats.org/drawingml/2006/main"/>
           <a:p xmlns:a="http://schemas.openxmlformats.org/drawingml/2006/main">
             <a:pPr>
+              <a:buNone/>
               <a:defRPr sz="1650" b="1">
                 <a:solidFill>
                   <a:srgbClr val="202A44"/>
@@ -5289,6 +5328,7 @@
           <a:lstStyle xmlns:a="http://schemas.openxmlformats.org/drawingml/2006/main"/>
           <a:p xmlns:a="http://schemas.openxmlformats.org/drawingml/2006/main">
             <a:pPr>
+              <a:buNone/>
               <a:defRPr sz="1200">
                 <a:solidFill>
                   <a:srgbClr val="56647A"/>
@@ -5312,6 +5352,7 @@
           </a:p>
           <a:p xmlns:a="http://schemas.openxmlformats.org/drawingml/2006/main">
             <a:pPr>
+              <a:buNone/>
               <a:defRPr sz="1200">
                 <a:solidFill>
                   <a:srgbClr val="56647A"/>
@@ -5435,6 +5476,7 @@
           <a:lstStyle xmlns:a="http://schemas.openxmlformats.org/drawingml/2006/main"/>
           <a:p xmlns:a="http://schemas.openxmlformats.org/drawingml/2006/main">
             <a:pPr>
+              <a:buNone/>
               <a:defRPr sz="1650" b="1">
                 <a:solidFill>
                   <a:srgbClr val="202A44"/>
@@ -5492,6 +5534,7 @@
           <a:lstStyle xmlns:a="http://schemas.openxmlformats.org/drawingml/2006/main"/>
           <a:p xmlns:a="http://schemas.openxmlformats.org/drawingml/2006/main">
             <a:pPr>
+              <a:buNone/>
               <a:defRPr sz="1200">
                 <a:solidFill>
                   <a:srgbClr val="56647A"/>
@@ -5515,6 +5558,7 @@
           </a:p>
           <a:p xmlns:a="http://schemas.openxmlformats.org/drawingml/2006/main">
             <a:pPr>
+              <a:buNone/>
               <a:defRPr sz="1200">
                 <a:solidFill>
                   <a:srgbClr val="56647A"/>
@@ -5572,6 +5616,7 @@
           <a:lstStyle xmlns:a="http://schemas.openxmlformats.org/drawingml/2006/main"/>
           <a:p xmlns:a="http://schemas.openxmlformats.org/drawingml/2006/main">
             <a:pPr algn="ctr">
+              <a:buNone/>
               <a:defRPr sz="1800" b="1">
                 <a:solidFill>
                   <a:srgbClr val="202A44"/>
@@ -5629,6 +5674,7 @@
           <a:lstStyle xmlns:a="http://schemas.openxmlformats.org/drawingml/2006/main"/>
           <a:p xmlns:a="http://schemas.openxmlformats.org/drawingml/2006/main">
             <a:pPr algn="ctr">
+              <a:buNone/>
               <a:defRPr sz="1275">
                 <a:solidFill>
                   <a:srgbClr val="4656A8"/>
@@ -5686,6 +5732,7 @@
           <a:lstStyle xmlns:a="http://schemas.openxmlformats.org/drawingml/2006/main"/>
           <a:p xmlns:a="http://schemas.openxmlformats.org/drawingml/2006/main">
             <a:pPr algn="r">
+              <a:buNone/>
               <a:defRPr sz="900">
                 <a:solidFill>
                   <a:srgbClr val="56647A"/>
@@ -5795,6 +5842,7 @@
           <a:lstStyle xmlns:a="http://schemas.openxmlformats.org/drawingml/2006/main"/>
           <a:p xmlns:a="http://schemas.openxmlformats.org/drawingml/2006/main">
             <a:pPr>
+              <a:buNone/>
               <a:defRPr sz="1200" b="1">
                 <a:solidFill>
                   <a:srgbClr val="E7A048"/>
@@ -5852,6 +5900,7 @@
           <a:lstStyle xmlns:a="http://schemas.openxmlformats.org/drawingml/2006/main"/>
           <a:p xmlns:a="http://schemas.openxmlformats.org/drawingml/2006/main">
             <a:pPr algn="r">
+              <a:buNone/>
               <a:defRPr sz="975" b="1">
                 <a:solidFill>
                   <a:srgbClr val="4656A8"/>
@@ -5909,6 +5958,7 @@
           <a:lstStyle xmlns:a="http://schemas.openxmlformats.org/drawingml/2006/main"/>
           <a:p xmlns:a="http://schemas.openxmlformats.org/drawingml/2006/main">
             <a:pPr>
+              <a:buNone/>
               <a:defRPr sz="2550" b="1">
                 <a:solidFill>
                   <a:srgbClr val="202A44"/>
@@ -5966,6 +6016,7 @@
           <a:lstStyle xmlns:a="http://schemas.openxmlformats.org/drawingml/2006/main"/>
           <a:p xmlns:a="http://schemas.openxmlformats.org/drawingml/2006/main">
             <a:pPr>
+              <a:buNone/>
               <a:defRPr sz="1275">
                 <a:solidFill>
                   <a:srgbClr val="56647A"/>
@@ -6053,6 +6104,7 @@
           <a:lstStyle xmlns:a="http://schemas.openxmlformats.org/drawingml/2006/main"/>
           <a:p xmlns:a="http://schemas.openxmlformats.org/drawingml/2006/main">
             <a:pPr>
+              <a:buNone/>
               <a:defRPr sz="1050" b="1">
                 <a:solidFill>
                   <a:srgbClr val="4656A8"/>
@@ -6174,6 +6226,7 @@
           <a:lstStyle xmlns:a="http://schemas.openxmlformats.org/drawingml/2006/main"/>
           <a:p xmlns:a="http://schemas.openxmlformats.org/drawingml/2006/main">
             <a:pPr algn="ctr">
+              <a:buNone/>
               <a:defRPr sz="1425" b="1">
                 <a:solidFill>
                   <a:srgbClr val="FFFFFF"/>
@@ -6231,6 +6284,7 @@
           <a:lstStyle xmlns:a="http://schemas.openxmlformats.org/drawingml/2006/main"/>
           <a:p xmlns:a="http://schemas.openxmlformats.org/drawingml/2006/main">
             <a:pPr>
+              <a:buNone/>
               <a:defRPr sz="1350" b="1">
                 <a:solidFill>
                   <a:srgbClr val="202A44"/>
@@ -6288,6 +6342,7 @@
           <a:lstStyle xmlns:a="http://schemas.openxmlformats.org/drawingml/2006/main"/>
           <a:p xmlns:a="http://schemas.openxmlformats.org/drawingml/2006/main">
             <a:pPr>
+              <a:buNone/>
               <a:defRPr sz="1050">
                 <a:solidFill>
                   <a:srgbClr val="56647A"/>
@@ -6409,6 +6464,7 @@
           <a:lstStyle xmlns:a="http://schemas.openxmlformats.org/drawingml/2006/main"/>
           <a:p xmlns:a="http://schemas.openxmlformats.org/drawingml/2006/main">
             <a:pPr algn="ctr">
+              <a:buNone/>
               <a:defRPr sz="1425" b="1">
                 <a:solidFill>
                   <a:srgbClr val="FFFFFF"/>
@@ -6466,6 +6522,7 @@
           <a:lstStyle xmlns:a="http://schemas.openxmlformats.org/drawingml/2006/main"/>
           <a:p xmlns:a="http://schemas.openxmlformats.org/drawingml/2006/main">
             <a:pPr>
+              <a:buNone/>
               <a:defRPr sz="1350" b="1">
                 <a:solidFill>
                   <a:srgbClr val="202A44"/>
@@ -6523,6 +6580,7 @@
           <a:lstStyle xmlns:a="http://schemas.openxmlformats.org/drawingml/2006/main"/>
           <a:p xmlns:a="http://schemas.openxmlformats.org/drawingml/2006/main">
             <a:pPr>
+              <a:buNone/>
               <a:defRPr sz="1050">
                 <a:solidFill>
                   <a:srgbClr val="56647A"/>
@@ -6644,6 +6702,7 @@
           <a:lstStyle xmlns:a="http://schemas.openxmlformats.org/drawingml/2006/main"/>
           <a:p xmlns:a="http://schemas.openxmlformats.org/drawingml/2006/main">
             <a:pPr algn="ctr">
+              <a:buNone/>
               <a:defRPr sz="1425" b="1">
                 <a:solidFill>
                   <a:srgbClr val="FFFFFF"/>
@@ -6701,6 +6760,7 @@
           <a:lstStyle xmlns:a="http://schemas.openxmlformats.org/drawingml/2006/main"/>
           <a:p xmlns:a="http://schemas.openxmlformats.org/drawingml/2006/main">
             <a:pPr>
+              <a:buNone/>
               <a:defRPr sz="1350" b="1">
                 <a:solidFill>
                   <a:srgbClr val="202A44"/>
@@ -6758,6 +6818,7 @@
           <a:lstStyle xmlns:a="http://schemas.openxmlformats.org/drawingml/2006/main"/>
           <a:p xmlns:a="http://schemas.openxmlformats.org/drawingml/2006/main">
             <a:pPr>
+              <a:buNone/>
               <a:defRPr sz="1050">
                 <a:solidFill>
                   <a:srgbClr val="56647A"/>
@@ -6847,6 +6908,7 @@
           <a:lstStyle xmlns:a="http://schemas.openxmlformats.org/drawingml/2006/main"/>
           <a:p xmlns:a="http://schemas.openxmlformats.org/drawingml/2006/main">
             <a:pPr algn="ctr">
+              <a:buNone/>
               <a:defRPr sz="1050" b="1">
                 <a:solidFill>
                   <a:srgbClr val="202A44"/>
@@ -6904,6 +6966,7 @@
           <a:lstStyle xmlns:a="http://schemas.openxmlformats.org/drawingml/2006/main"/>
           <a:p xmlns:a="http://schemas.openxmlformats.org/drawingml/2006/main">
             <a:pPr algn="r">
+              <a:buNone/>
               <a:defRPr sz="900">
                 <a:solidFill>
                   <a:srgbClr val="56647A"/>
@@ -7013,6 +7076,7 @@
           <a:lstStyle xmlns:a="http://schemas.openxmlformats.org/drawingml/2006/main"/>
           <a:p xmlns:a="http://schemas.openxmlformats.org/drawingml/2006/main">
             <a:pPr>
+              <a:buNone/>
               <a:defRPr sz="1200" b="1">
                 <a:solidFill>
                   <a:srgbClr val="E7A048"/>
@@ -7100,6 +7164,7 @@
           <a:lstStyle xmlns:a="http://schemas.openxmlformats.org/drawingml/2006/main"/>
           <a:p xmlns:a="http://schemas.openxmlformats.org/drawingml/2006/main">
             <a:pPr>
+              <a:buNone/>
               <a:defRPr sz="3450" b="1">
                 <a:solidFill>
                   <a:srgbClr val="FFFFFF"/>
@@ -7157,6 +7222,7 @@
           <a:lstStyle xmlns:a="http://schemas.openxmlformats.org/drawingml/2006/main"/>
           <a:p xmlns:a="http://schemas.openxmlformats.org/drawingml/2006/main">
             <a:pPr>
+              <a:buNone/>
               <a:defRPr sz="1650">
                 <a:solidFill>
                   <a:srgbClr val="DDE8F6"/>
@@ -7214,6 +7280,7 @@
           <a:lstStyle xmlns:a="http://schemas.openxmlformats.org/drawingml/2006/main"/>
           <a:p xmlns:a="http://schemas.openxmlformats.org/drawingml/2006/main">
             <a:pPr>
+              <a:buNone/>
               <a:defRPr sz="1350">
                 <a:solidFill>
                   <a:srgbClr val="FFFFFF"/>
@@ -7271,6 +7338,7 @@
           <a:lstStyle xmlns:a="http://schemas.openxmlformats.org/drawingml/2006/main"/>
           <a:p xmlns:a="http://schemas.openxmlformats.org/drawingml/2006/main">
             <a:pPr>
+              <a:buNone/>
               <a:defRPr sz="1125">
                 <a:solidFill>
                   <a:srgbClr val="DDE8F6"/>
@@ -7358,6 +7426,7 @@
           <a:lstStyle xmlns:a="http://schemas.openxmlformats.org/drawingml/2006/main"/>
           <a:p xmlns:a="http://schemas.openxmlformats.org/drawingml/2006/main">
             <a:pPr>
+              <a:buNone/>
               <a:defRPr sz="975" b="1">
                 <a:solidFill>
                   <a:srgbClr val="E7A048"/>
@@ -7415,6 +7484,7 @@
           <a:lstStyle xmlns:a="http://schemas.openxmlformats.org/drawingml/2006/main"/>
           <a:p xmlns:a="http://schemas.openxmlformats.org/drawingml/2006/main">
             <a:pPr algn="r">
+              <a:buNone/>
               <a:defRPr sz="900">
                 <a:solidFill>
                   <a:srgbClr val="56647A"/>
@@ -8677,6 +8747,7 @@
           <a:lstStyle xmlns:a="http://schemas.openxmlformats.org/drawingml/2006/main"/>
           <a:p xmlns:a="http://schemas.openxmlformats.org/drawingml/2006/main">
             <a:pPr>
+              <a:buNone/>
               <a:defRPr sz="1200" b="1">
                 <a:solidFill>
                   <a:srgbClr val="E7A048"/>
@@ -8734,6 +8805,7 @@
           <a:lstStyle xmlns:a="http://schemas.openxmlformats.org/drawingml/2006/main"/>
           <a:p xmlns:a="http://schemas.openxmlformats.org/drawingml/2006/main">
             <a:pPr algn="r">
+              <a:buNone/>
               <a:defRPr sz="975" b="1">
                 <a:solidFill>
                   <a:srgbClr val="4656A8"/>
@@ -8791,6 +8863,7 @@
           <a:lstStyle xmlns:a="http://schemas.openxmlformats.org/drawingml/2006/main"/>
           <a:p xmlns:a="http://schemas.openxmlformats.org/drawingml/2006/main">
             <a:pPr>
+              <a:buNone/>
               <a:defRPr sz="2550" b="1">
                 <a:solidFill>
                   <a:srgbClr val="202A44"/>
@@ -8848,6 +8921,7 @@
           <a:lstStyle xmlns:a="http://schemas.openxmlformats.org/drawingml/2006/main"/>
           <a:p xmlns:a="http://schemas.openxmlformats.org/drawingml/2006/main">
             <a:pPr>
+              <a:buNone/>
               <a:defRPr sz="1275">
                 <a:solidFill>
                   <a:srgbClr val="56647A"/>
@@ -8935,6 +9009,7 @@
           <a:lstStyle xmlns:a="http://schemas.openxmlformats.org/drawingml/2006/main"/>
           <a:p xmlns:a="http://schemas.openxmlformats.org/drawingml/2006/main">
             <a:pPr>
+              <a:buNone/>
               <a:defRPr sz="1050" b="1">
                 <a:solidFill>
                   <a:srgbClr val="DE664C"/>
@@ -8992,6 +9067,7 @@
           <a:lstStyle xmlns:a="http://schemas.openxmlformats.org/drawingml/2006/main"/>
           <a:p xmlns:a="http://schemas.openxmlformats.org/drawingml/2006/main">
             <a:pPr>
+              <a:buNone/>
               <a:defRPr sz="2100" b="1">
                 <a:solidFill>
                   <a:srgbClr val="202A44"/>
@@ -9015,6 +9091,7 @@
           </a:p>
           <a:p xmlns:a="http://schemas.openxmlformats.org/drawingml/2006/main">
             <a:pPr>
+              <a:buNone/>
               <a:defRPr sz="2100" b="1">
                 <a:solidFill>
                   <a:srgbClr val="202A44"/>
@@ -9072,6 +9149,7 @@
           <a:lstStyle xmlns:a="http://schemas.openxmlformats.org/drawingml/2006/main"/>
           <a:p xmlns:a="http://schemas.openxmlformats.org/drawingml/2006/main">
             <a:pPr>
+              <a:buNone/>
               <a:defRPr sz="1425">
                 <a:solidFill>
                   <a:srgbClr val="56647A"/>
@@ -9189,6 +9267,7 @@
           <a:lstStyle xmlns:a="http://schemas.openxmlformats.org/drawingml/2006/main"/>
           <a:p xmlns:a="http://schemas.openxmlformats.org/drawingml/2006/main">
             <a:pPr algn="ctr">
+              <a:buNone/>
               <a:defRPr sz="1425" b="1">
                 <a:solidFill>
                   <a:srgbClr val="FFFFFF"/>
@@ -9246,6 +9325,7 @@
           <a:lstStyle xmlns:a="http://schemas.openxmlformats.org/drawingml/2006/main"/>
           <a:p xmlns:a="http://schemas.openxmlformats.org/drawingml/2006/main">
             <a:pPr>
+              <a:buNone/>
               <a:defRPr sz="1650" b="1">
                 <a:solidFill>
                   <a:srgbClr val="202A44"/>
@@ -9303,6 +9383,7 @@
           <a:lstStyle xmlns:a="http://schemas.openxmlformats.org/drawingml/2006/main"/>
           <a:p xmlns:a="http://schemas.openxmlformats.org/drawingml/2006/main">
             <a:pPr>
+              <a:buNone/>
               <a:defRPr sz="1200">
                 <a:solidFill>
                   <a:srgbClr val="56647A"/>
@@ -9390,6 +9471,7 @@
           <a:lstStyle xmlns:a="http://schemas.openxmlformats.org/drawingml/2006/main"/>
           <a:p xmlns:a="http://schemas.openxmlformats.org/drawingml/2006/main">
             <a:pPr algn="ctr">
+              <a:buNone/>
               <a:defRPr sz="1425" b="1">
                 <a:solidFill>
                   <a:srgbClr val="FFFFFF"/>
@@ -9447,6 +9529,7 @@
           <a:lstStyle xmlns:a="http://schemas.openxmlformats.org/drawingml/2006/main"/>
           <a:p xmlns:a="http://schemas.openxmlformats.org/drawingml/2006/main">
             <a:pPr>
+              <a:buNone/>
               <a:defRPr sz="1650" b="1">
                 <a:solidFill>
                   <a:srgbClr val="202A44"/>
@@ -9504,6 +9587,7 @@
           <a:lstStyle xmlns:a="http://schemas.openxmlformats.org/drawingml/2006/main"/>
           <a:p xmlns:a="http://schemas.openxmlformats.org/drawingml/2006/main">
             <a:pPr>
+              <a:buNone/>
               <a:defRPr sz="1200">
                 <a:solidFill>
                   <a:srgbClr val="56647A"/>
@@ -9591,6 +9675,7 @@
           <a:lstStyle xmlns:a="http://schemas.openxmlformats.org/drawingml/2006/main"/>
           <a:p xmlns:a="http://schemas.openxmlformats.org/drawingml/2006/main">
             <a:pPr algn="ctr">
+              <a:buNone/>
               <a:defRPr sz="1425" b="1">
                 <a:solidFill>
                   <a:srgbClr val="FFFFFF"/>
@@ -9648,6 +9733,7 @@
           <a:lstStyle xmlns:a="http://schemas.openxmlformats.org/drawingml/2006/main"/>
           <a:p xmlns:a="http://schemas.openxmlformats.org/drawingml/2006/main">
             <a:pPr>
+              <a:buNone/>
               <a:defRPr sz="1650" b="1">
                 <a:solidFill>
                   <a:srgbClr val="202A44"/>
@@ -9705,6 +9791,7 @@
           <a:lstStyle xmlns:a="http://schemas.openxmlformats.org/drawingml/2006/main"/>
           <a:p xmlns:a="http://schemas.openxmlformats.org/drawingml/2006/main">
             <a:pPr>
+              <a:buNone/>
               <a:defRPr sz="1200">
                 <a:solidFill>
                   <a:srgbClr val="56647A"/>
@@ -9794,6 +9881,7 @@
           <a:lstStyle xmlns:a="http://schemas.openxmlformats.org/drawingml/2006/main"/>
           <a:p xmlns:a="http://schemas.openxmlformats.org/drawingml/2006/main">
             <a:pPr algn="ctr">
+              <a:buNone/>
               <a:defRPr sz="1425" b="1">
                 <a:solidFill>
                   <a:srgbClr val="202A44"/>
@@ -9812,7 +9900,7 @@
                 <a:ea typeface="Arial"/>
                 <a:cs typeface="Arial"/>
               </a:rPr>
-              <a:t>Design response: offer Bengali voice or text, then present a safe next step through a controlled route.</a:t>
+              <a:t>Design response: provide a Bengali-first guided selection journey, then present a safe next step through a controlled route.</a:t>
             </a:r>
           </a:p>
         </p:txBody>
@@ -9851,6 +9939,7 @@
           <a:lstStyle xmlns:a="http://schemas.openxmlformats.org/drawingml/2006/main"/>
           <a:p xmlns:a="http://schemas.openxmlformats.org/drawingml/2006/main">
             <a:pPr algn="r">
+              <a:buNone/>
               <a:defRPr sz="900">
                 <a:solidFill>
                   <a:srgbClr val="56647A"/>
@@ -11479,6 +11568,7 @@
           <a:lstStyle xmlns:a="http://schemas.openxmlformats.org/drawingml/2006/main"/>
           <a:p xmlns:a="http://schemas.openxmlformats.org/drawingml/2006/main">
             <a:pPr>
+              <a:buNone/>
               <a:defRPr sz="1200" b="1">
                 <a:solidFill>
                   <a:srgbClr val="E7A048"/>
@@ -11536,6 +11626,7 @@
           <a:lstStyle xmlns:a="http://schemas.openxmlformats.org/drawingml/2006/main"/>
           <a:p xmlns:a="http://schemas.openxmlformats.org/drawingml/2006/main">
             <a:pPr algn="r">
+              <a:buNone/>
               <a:defRPr sz="975" b="1">
                 <a:solidFill>
                   <a:srgbClr val="E7A048"/>
@@ -11593,6 +11684,7 @@
           <a:lstStyle xmlns:a="http://schemas.openxmlformats.org/drawingml/2006/main"/>
           <a:p xmlns:a="http://schemas.openxmlformats.org/drawingml/2006/main">
             <a:pPr>
+              <a:buNone/>
               <a:defRPr sz="2550" b="1">
                 <a:solidFill>
                   <a:srgbClr val="FFFFFF"/>
@@ -11650,6 +11742,7 @@
           <a:lstStyle xmlns:a="http://schemas.openxmlformats.org/drawingml/2006/main"/>
           <a:p xmlns:a="http://schemas.openxmlformats.org/drawingml/2006/main">
             <a:pPr>
+              <a:buNone/>
               <a:defRPr sz="1275">
                 <a:solidFill>
                   <a:srgbClr val="C8D4EE"/>
@@ -11737,6 +11830,7 @@
           <a:lstStyle xmlns:a="http://schemas.openxmlformats.org/drawingml/2006/main"/>
           <a:p xmlns:a="http://schemas.openxmlformats.org/drawingml/2006/main">
             <a:pPr>
+              <a:buNone/>
               <a:defRPr sz="1050" b="1">
                 <a:solidFill>
                   <a:srgbClr val="E7A048"/>
@@ -11826,6 +11920,7 @@
           <a:lstStyle xmlns:a="http://schemas.openxmlformats.org/drawingml/2006/main"/>
           <a:p xmlns:a="http://schemas.openxmlformats.org/drawingml/2006/main">
             <a:pPr algn="ctr">
+              <a:buNone/>
               <a:defRPr sz="1500" b="1">
                 <a:solidFill>
                   <a:srgbClr val="FFFFFF"/>
@@ -11883,6 +11978,7 @@
           <a:lstStyle xmlns:a="http://schemas.openxmlformats.org/drawingml/2006/main"/>
           <a:p xmlns:a="http://schemas.openxmlformats.org/drawingml/2006/main">
             <a:pPr algn="ctr">
+              <a:buNone/>
               <a:defRPr sz="1050">
                 <a:solidFill>
                   <a:srgbClr val="FFFFFF"/>
@@ -12002,6 +12098,7 @@
           <a:lstStyle xmlns:a="http://schemas.openxmlformats.org/drawingml/2006/main"/>
           <a:p xmlns:a="http://schemas.openxmlformats.org/drawingml/2006/main">
             <a:pPr algn="ctr">
+              <a:buNone/>
               <a:defRPr sz="1275" b="1">
                 <a:solidFill>
                   <a:srgbClr val="FFFFFF"/>
@@ -12025,6 +12122,7 @@
           </a:p>
           <a:p xmlns:a="http://schemas.openxmlformats.org/drawingml/2006/main">
             <a:pPr algn="ctr">
+              <a:buNone/>
               <a:defRPr sz="1275" b="1">
                 <a:solidFill>
                   <a:srgbClr val="FFFFFF"/>
@@ -12082,6 +12180,7 @@
           <a:lstStyle xmlns:a="http://schemas.openxmlformats.org/drawingml/2006/main"/>
           <a:p xmlns:a="http://schemas.openxmlformats.org/drawingml/2006/main">
             <a:pPr algn="ctr">
+              <a:buNone/>
               <a:defRPr sz="1050">
                 <a:solidFill>
                   <a:srgbClr val="FFFFFF"/>
@@ -12201,6 +12300,7 @@
           <a:lstStyle xmlns:a="http://schemas.openxmlformats.org/drawingml/2006/main"/>
           <a:p xmlns:a="http://schemas.openxmlformats.org/drawingml/2006/main">
             <a:pPr algn="ctr">
+              <a:buNone/>
               <a:defRPr sz="1500" b="1">
                 <a:solidFill>
                   <a:srgbClr val="FFFFFF"/>
@@ -12258,6 +12358,7 @@
           <a:lstStyle xmlns:a="http://schemas.openxmlformats.org/drawingml/2006/main"/>
           <a:p xmlns:a="http://schemas.openxmlformats.org/drawingml/2006/main">
             <a:pPr algn="ctr">
+              <a:buNone/>
               <a:defRPr sz="1050">
                 <a:solidFill>
                   <a:srgbClr val="FFFFFF"/>
@@ -12377,6 +12478,7 @@
           <a:lstStyle xmlns:a="http://schemas.openxmlformats.org/drawingml/2006/main"/>
           <a:p xmlns:a="http://schemas.openxmlformats.org/drawingml/2006/main">
             <a:pPr algn="ctr">
+              <a:buNone/>
               <a:defRPr sz="1500" b="1">
                 <a:solidFill>
                   <a:srgbClr val="FFFFFF"/>
@@ -12434,6 +12536,7 @@
           <a:lstStyle xmlns:a="http://schemas.openxmlformats.org/drawingml/2006/main"/>
           <a:p xmlns:a="http://schemas.openxmlformats.org/drawingml/2006/main">
             <a:pPr algn="ctr">
+              <a:buNone/>
               <a:defRPr sz="1050">
                 <a:solidFill>
                   <a:srgbClr val="FFFFFF"/>
@@ -12523,6 +12626,7 @@
           <a:lstStyle xmlns:a="http://schemas.openxmlformats.org/drawingml/2006/main"/>
           <a:p xmlns:a="http://schemas.openxmlformats.org/drawingml/2006/main">
             <a:pPr algn="ctr">
+              <a:buNone/>
               <a:defRPr sz="1125" b="1">
                 <a:solidFill>
                   <a:srgbClr val="DE664C"/>
@@ -12580,6 +12684,7 @@
           <a:lstStyle xmlns:a="http://schemas.openxmlformats.org/drawingml/2006/main"/>
           <a:p xmlns:a="http://schemas.openxmlformats.org/drawingml/2006/main">
             <a:pPr algn="ctr">
+              <a:buNone/>
               <a:defRPr sz="900">
                 <a:solidFill>
                   <a:srgbClr val="DCE4F3"/>
@@ -12637,6 +12742,7 @@
           <a:lstStyle xmlns:a="http://schemas.openxmlformats.org/drawingml/2006/main"/>
           <a:p xmlns:a="http://schemas.openxmlformats.org/drawingml/2006/main">
             <a:pPr>
+              <a:buNone/>
               <a:defRPr sz="1050" b="1">
                 <a:solidFill>
                   <a:srgbClr val="E7A048"/>
@@ -12726,6 +12832,7 @@
           <a:lstStyle xmlns:a="http://schemas.openxmlformats.org/drawingml/2006/main"/>
           <a:p xmlns:a="http://schemas.openxmlformats.org/drawingml/2006/main">
             <a:pPr algn="ctr">
+              <a:buNone/>
               <a:defRPr sz="1500" b="1">
                 <a:solidFill>
                   <a:srgbClr val="FFFFFF"/>
@@ -12783,6 +12890,7 @@
           <a:lstStyle xmlns:a="http://schemas.openxmlformats.org/drawingml/2006/main"/>
           <a:p xmlns:a="http://schemas.openxmlformats.org/drawingml/2006/main">
             <a:pPr algn="ctr">
+              <a:buNone/>
               <a:defRPr sz="1125">
                 <a:solidFill>
                   <a:srgbClr val="FFFFFF"/>
@@ -12806,6 +12914,7 @@
           </a:p>
           <a:p xmlns:a="http://schemas.openxmlformats.org/drawingml/2006/main">
             <a:pPr algn="ctr">
+              <a:buNone/>
               <a:defRPr sz="1125">
                 <a:solidFill>
                   <a:srgbClr val="FFFFFF"/>
@@ -12925,6 +13034,7 @@
           <a:lstStyle xmlns:a="http://schemas.openxmlformats.org/drawingml/2006/main"/>
           <a:p xmlns:a="http://schemas.openxmlformats.org/drawingml/2006/main">
             <a:pPr algn="ctr">
+              <a:buNone/>
               <a:defRPr sz="1500" b="1">
                 <a:solidFill>
                   <a:srgbClr val="FFFFFF"/>
@@ -12982,6 +13092,7 @@
           <a:lstStyle xmlns:a="http://schemas.openxmlformats.org/drawingml/2006/main"/>
           <a:p xmlns:a="http://schemas.openxmlformats.org/drawingml/2006/main">
             <a:pPr algn="ctr">
+              <a:buNone/>
               <a:defRPr sz="1125">
                 <a:solidFill>
                   <a:srgbClr val="FFFFFF"/>
@@ -13005,6 +13116,7 @@
           </a:p>
           <a:p xmlns:a="http://schemas.openxmlformats.org/drawingml/2006/main">
             <a:pPr algn="ctr">
+              <a:buNone/>
               <a:defRPr sz="1125">
                 <a:solidFill>
                   <a:srgbClr val="FFFFFF"/>
@@ -13124,6 +13236,7 @@
           <a:lstStyle xmlns:a="http://schemas.openxmlformats.org/drawingml/2006/main"/>
           <a:p xmlns:a="http://schemas.openxmlformats.org/drawingml/2006/main">
             <a:pPr algn="ctr">
+              <a:buNone/>
               <a:defRPr sz="1500" b="1">
                 <a:solidFill>
                   <a:srgbClr val="FFFFFF"/>
@@ -13181,6 +13294,7 @@
           <a:lstStyle xmlns:a="http://schemas.openxmlformats.org/drawingml/2006/main"/>
           <a:p xmlns:a="http://schemas.openxmlformats.org/drawingml/2006/main">
             <a:pPr algn="ctr">
+              <a:buNone/>
               <a:defRPr sz="1125">
                 <a:solidFill>
                   <a:srgbClr val="FFFFFF"/>
@@ -13238,6 +13352,7 @@
           <a:lstStyle xmlns:a="http://schemas.openxmlformats.org/drawingml/2006/main"/>
           <a:p xmlns:a="http://schemas.openxmlformats.org/drawingml/2006/main">
             <a:pPr algn="ctr">
+              <a:buNone/>
               <a:defRPr sz="1350" b="1">
                 <a:solidFill>
                   <a:srgbClr val="DCE4F3"/>
@@ -13295,6 +13410,7 @@
           <a:lstStyle xmlns:a="http://schemas.openxmlformats.org/drawingml/2006/main"/>
           <a:p xmlns:a="http://schemas.openxmlformats.org/drawingml/2006/main">
             <a:pPr algn="r">
+              <a:buNone/>
               <a:defRPr sz="900">
                 <a:solidFill>
                   <a:srgbClr val="C8D4EE"/>
@@ -13329,6 +13445,3082 @@
 </file>
 
 <file path=ppt/slides/slide4.xml><?xml version="1.0" encoding="utf-8"?>
+<p:sld xmlns:p="http://schemas.openxmlformats.org/presentationml/2006/main">
+  <p:cSld>
+    <p:bg>
+      <p:bgPr>
+        <a:solidFill xmlns:a="http://schemas.openxmlformats.org/drawingml/2006/main">
+          <a:srgbClr val="062B39"/>
+        </a:solidFill>
+      </p:bgPr>
+    </p:bg>
+    <p:spTree>
+      <p:nvGrpSpPr>
+        <p:cNvPr id="1" name=""/>
+        <p:cNvGrpSpPr/>
+        <p:nvPr/>
+      </p:nvGrpSpPr>
+      <p:grpSpPr>
+        <a:xfrm xmlns:a="http://schemas.openxmlformats.org/drawingml/2006/main"/>
+      </p:grpSpPr>
+      <p:sp>
+        <p:nvSpPr>
+          <p:cNvPr id="26" name="">
+            <a:extLst xmlns:a="http://schemas.openxmlformats.org/drawingml/2006/main">
+              <a:ext uri="{FF2B5EF4-FFF2-40B4-BE49-F238E27FC236}">
+                <a16:creationId xmlns:a16="http://schemas.microsoft.com/office/drawing/2014/main" id="{69BC3DC9-1539-4646-9C90-E2F69F9266A9}"/>
+              </a:ext>
+            </a:extLst>
+          </p:cNvPr>
+          <p:cNvSpPr>
+            <a:spLocks xmlns:a="http://schemas.openxmlformats.org/drawingml/2006/main" noGrp="1"/>
+          </p:cNvSpPr>
+          <p:nvPr/>
+        </p:nvSpPr>
+        <p:spPr>
+          <a:xfrm xmlns:a="http://schemas.openxmlformats.org/drawingml/2006/main">
+            <a:off x="704850" y="485775"/>
+            <a:ext cx="428625" cy="190500"/>
+          </a:xfrm>
+          <a:prstGeom xmlns:a="http://schemas.openxmlformats.org/drawingml/2006/main" prst="rect">
+            <a:avLst/>
+          </a:prstGeom>
+          <a:noFill xmlns:a="http://schemas.openxmlformats.org/drawingml/2006/main"/>
+          <a:ln xmlns:a="http://schemas.openxmlformats.org/drawingml/2006/main" w="0">
+            <a:noFill/>
+          </a:ln>
+        </p:spPr>
+        <p:txBody>
+          <a:bodyPr xmlns:a="http://schemas.openxmlformats.org/drawingml/2006/main">
+            <a:normAutofit fontScale="72222"/>
+          </a:bodyPr>
+          <a:lstStyle xmlns:a="http://schemas.openxmlformats.org/drawingml/2006/main"/>
+          <a:p xmlns:a="http://schemas.openxmlformats.org/drawingml/2006/main">
+            <a:pPr>
+              <a:buNone/>
+              <a:defRPr sz="900" b="1">
+                <a:solidFill>
+                  <a:srgbClr val="00A28F"/>
+                </a:solidFill>
+                <a:latin typeface="Arial"/>
+                <a:ea typeface="Arial"/>
+                <a:cs typeface="Arial"/>
+              </a:defRPr>
+            </a:pPr>
+            <a:r>
+              <a:rPr sz="900" b="1">
+                <a:solidFill>
+                  <a:srgbClr val="00A28F"/>
+                </a:solidFill>
+                <a:latin typeface="Arial"/>
+                <a:ea typeface="Arial"/>
+                <a:cs typeface="Arial"/>
+              </a:rPr>
+              <a:t>05</a:t>
+            </a:r>
+          </a:p>
+        </p:txBody>
+      </p:sp>
+      <p:sp>
+        <p:nvSpPr>
+          <p:cNvPr id="2" name="">
+            <a:extLst xmlns:a="http://schemas.openxmlformats.org/drawingml/2006/main">
+              <a:ext uri="{FF2B5EF4-FFF2-40B4-BE49-F238E27FC236}">
+                <a16:creationId xmlns:a16="http://schemas.microsoft.com/office/drawing/2014/main" id="{F8A62CD9-2B05-41C9-A2F5-FBB9DB33404B}"/>
+              </a:ext>
+            </a:extLst>
+          </p:cNvPr>
+          <p:cNvSpPr>
+            <a:spLocks xmlns:a="http://schemas.openxmlformats.org/drawingml/2006/main" noGrp="1"/>
+          </p:cNvSpPr>
+          <p:nvPr/>
+        </p:nvSpPr>
+        <p:spPr>
+          <a:xfrm xmlns:a="http://schemas.openxmlformats.org/drawingml/2006/main">
+            <a:off x="704850" y="781050"/>
+            <a:ext cx="6191250" cy="438150"/>
+          </a:xfrm>
+          <a:prstGeom xmlns:a="http://schemas.openxmlformats.org/drawingml/2006/main" prst="rect">
+            <a:avLst/>
+          </a:prstGeom>
+          <a:noFill xmlns:a="http://schemas.openxmlformats.org/drawingml/2006/main"/>
+          <a:ln xmlns:a="http://schemas.openxmlformats.org/drawingml/2006/main" w="0">
+            <a:noFill/>
+          </a:ln>
+        </p:spPr>
+        <p:txBody>
+          <a:bodyPr xmlns:a="http://schemas.openxmlformats.org/drawingml/2006/main">
+            <a:normAutofit fontScale="89216"/>
+          </a:bodyPr>
+          <a:lstStyle xmlns:a="http://schemas.openxmlformats.org/drawingml/2006/main"/>
+          <a:p xmlns:a="http://schemas.openxmlformats.org/drawingml/2006/main">
+            <a:pPr>
+              <a:buNone/>
+              <a:defRPr sz="2550" b="1">
+                <a:solidFill>
+                  <a:srgbClr val="FFFFFF"/>
+                </a:solidFill>
+                <a:latin typeface="Arial"/>
+                <a:ea typeface="Arial"/>
+                <a:cs typeface="Arial"/>
+              </a:defRPr>
+            </a:pPr>
+            <a:r>
+              <a:rPr sz="2550" b="1">
+                <a:solidFill>
+                  <a:srgbClr val="FFFFFF"/>
+                </a:solidFill>
+                <a:latin typeface="Arial"/>
+                <a:ea typeface="Arial"/>
+                <a:cs typeface="Arial"/>
+              </a:rPr>
+              <a:t>Current implementation</a:t>
+            </a:r>
+          </a:p>
+        </p:txBody>
+      </p:sp>
+      <p:sp>
+        <p:nvSpPr>
+          <p:cNvPr id="3" name="">
+            <a:extLst xmlns:a="http://schemas.openxmlformats.org/drawingml/2006/main">
+              <a:ext uri="{FF2B5EF4-FFF2-40B4-BE49-F238E27FC236}">
+                <a16:creationId xmlns:a16="http://schemas.microsoft.com/office/drawing/2014/main" id="{B9EDFAFE-9CA0-42D2-B4FF-FEB5E59C2191}"/>
+              </a:ext>
+            </a:extLst>
+          </p:cNvPr>
+          <p:cNvSpPr>
+            <a:spLocks xmlns:a="http://schemas.openxmlformats.org/drawingml/2006/main" noGrp="1"/>
+          </p:cNvSpPr>
+          <p:nvPr/>
+        </p:nvSpPr>
+        <p:spPr>
+          <a:xfrm xmlns:a="http://schemas.openxmlformats.org/drawingml/2006/main">
+            <a:off x="723900" y="1323975"/>
+            <a:ext cx="8096250" cy="238125"/>
+          </a:xfrm>
+          <a:prstGeom xmlns:a="http://schemas.openxmlformats.org/drawingml/2006/main" prst="rect">
+            <a:avLst/>
+          </a:prstGeom>
+          <a:noFill xmlns:a="http://schemas.openxmlformats.org/drawingml/2006/main"/>
+          <a:ln xmlns:a="http://schemas.openxmlformats.org/drawingml/2006/main" w="0">
+            <a:noFill/>
+          </a:ln>
+        </p:spPr>
+        <p:txBody>
+          <a:bodyPr xmlns:a="http://schemas.openxmlformats.org/drawingml/2006/main">
+            <a:normAutofit fontScale="80208"/>
+          </a:bodyPr>
+          <a:lstStyle xmlns:a="http://schemas.openxmlformats.org/drawingml/2006/main"/>
+          <a:p xmlns:a="http://schemas.openxmlformats.org/drawingml/2006/main">
+            <a:pPr>
+              <a:buNone/>
+              <a:defRPr sz="1200" b="0">
+                <a:solidFill>
+                  <a:srgbClr val="BFD8D5"/>
+                </a:solidFill>
+                <a:latin typeface="Arial"/>
+                <a:ea typeface="Arial"/>
+                <a:cs typeface="Arial"/>
+              </a:defRPr>
+            </a:pPr>
+            <a:r>
+              <a:rPr sz="1200" b="0">
+                <a:solidFill>
+                  <a:srgbClr val="BFD8D5"/>
+                </a:solidFill>
+                <a:latin typeface="Arial"/>
+                <a:ea typeface="Arial"/>
+                <a:cs typeface="Arial"/>
+              </a:rPr>
+              <a:t>The capstone demonstrates a working local MVP with explicit safety limits</a:t>
+            </a:r>
+          </a:p>
+        </p:txBody>
+      </p:sp>
+      <p:sp>
+        <p:nvSpPr>
+          <p:cNvPr id="4" name="">
+            <a:extLst xmlns:a="http://schemas.openxmlformats.org/drawingml/2006/main">
+              <a:ext uri="{FF2B5EF4-FFF2-40B4-BE49-F238E27FC236}">
+                <a16:creationId xmlns:a16="http://schemas.microsoft.com/office/drawing/2014/main" id="{69F39D90-4A72-441C-8601-5B4F9B66A69F}"/>
+              </a:ext>
+            </a:extLst>
+          </p:cNvPr>
+          <p:cNvSpPr>
+            <a:spLocks xmlns:a="http://schemas.openxmlformats.org/drawingml/2006/main" noGrp="1"/>
+          </p:cNvSpPr>
+          <p:nvPr/>
+        </p:nvSpPr>
+        <p:spPr>
+          <a:xfrm xmlns:a="http://schemas.openxmlformats.org/drawingml/2006/main">
+            <a:off x="704850" y="1752600"/>
+            <a:ext cx="1066800" cy="47625"/>
+          </a:xfrm>
+          <a:prstGeom xmlns:a="http://schemas.openxmlformats.org/drawingml/2006/main" prst="rect">
+            <a:avLst/>
+          </a:prstGeom>
+          <a:solidFill xmlns:a="http://schemas.openxmlformats.org/drawingml/2006/main">
+            <a:srgbClr val="00A28F"/>
+          </a:solidFill>
+          <a:ln xmlns:a="http://schemas.openxmlformats.org/drawingml/2006/main" w="9525">
+            <a:solidFill>
+              <a:srgbClr val="00A28F"/>
+            </a:solidFill>
+          </a:ln>
+        </p:spPr>
+      </p:sp>
+      <p:sp>
+        <p:nvSpPr>
+          <p:cNvPr id="5" name="">
+            <a:extLst xmlns:a="http://schemas.openxmlformats.org/drawingml/2006/main">
+              <a:ext uri="{FF2B5EF4-FFF2-40B4-BE49-F238E27FC236}">
+                <a16:creationId xmlns:a16="http://schemas.microsoft.com/office/drawing/2014/main" id="{3BD68114-626D-4F88-A9F1-749329E17234}"/>
+              </a:ext>
+            </a:extLst>
+          </p:cNvPr>
+          <p:cNvSpPr>
+            <a:spLocks xmlns:a="http://schemas.openxmlformats.org/drawingml/2006/main" noGrp="1"/>
+          </p:cNvSpPr>
+          <p:nvPr/>
+        </p:nvSpPr>
+        <p:spPr>
+          <a:xfrm xmlns:a="http://schemas.openxmlformats.org/drawingml/2006/main">
+            <a:off x="723900" y="2286000"/>
+            <a:ext cx="1428750" cy="171450"/>
+          </a:xfrm>
+          <a:prstGeom xmlns:a="http://schemas.openxmlformats.org/drawingml/2006/main" prst="rect">
+            <a:avLst/>
+          </a:prstGeom>
+          <a:noFill xmlns:a="http://schemas.openxmlformats.org/drawingml/2006/main"/>
+          <a:ln xmlns:a="http://schemas.openxmlformats.org/drawingml/2006/main" w="0">
+            <a:noFill/>
+          </a:ln>
+        </p:spPr>
+        <p:txBody>
+          <a:bodyPr xmlns:a="http://schemas.openxmlformats.org/drawingml/2006/main">
+            <a:normAutofit fontScale="63636"/>
+          </a:bodyPr>
+          <a:lstStyle xmlns:a="http://schemas.openxmlformats.org/drawingml/2006/main"/>
+          <a:p xmlns:a="http://schemas.openxmlformats.org/drawingml/2006/main">
+            <a:pPr>
+              <a:buNone/>
+              <a:defRPr sz="825" b="1">
+                <a:solidFill>
+                  <a:srgbClr val="00A28F"/>
+                </a:solidFill>
+                <a:latin typeface="Arial"/>
+                <a:ea typeface="Arial"/>
+                <a:cs typeface="Arial"/>
+              </a:defRPr>
+            </a:pPr>
+            <a:r>
+              <a:rPr sz="825" b="1">
+                <a:solidFill>
+                  <a:srgbClr val="00A28F"/>
+                </a:solidFill>
+                <a:latin typeface="Arial"/>
+                <a:ea typeface="Arial"/>
+                <a:cs typeface="Arial"/>
+              </a:rPr>
+              <a:t>LIVE STACK</a:t>
+            </a:r>
+          </a:p>
+        </p:txBody>
+      </p:sp>
+      <p:sp>
+        <p:nvSpPr>
+          <p:cNvPr id="6" name="">
+            <a:extLst xmlns:a="http://schemas.openxmlformats.org/drawingml/2006/main">
+              <a:ext uri="{FF2B5EF4-FFF2-40B4-BE49-F238E27FC236}">
+                <a16:creationId xmlns:a16="http://schemas.microsoft.com/office/drawing/2014/main" id="{6686B162-C3FB-4F6A-AB23-2AB69A126C55}"/>
+              </a:ext>
+            </a:extLst>
+          </p:cNvPr>
+          <p:cNvSpPr>
+            <a:spLocks xmlns:a="http://schemas.openxmlformats.org/drawingml/2006/main" noGrp="1"/>
+          </p:cNvSpPr>
+          <p:nvPr/>
+        </p:nvSpPr>
+        <p:spPr>
+          <a:xfrm xmlns:a="http://schemas.openxmlformats.org/drawingml/2006/main">
+            <a:off x="742950" y="2733675"/>
+            <a:ext cx="123825" cy="123825"/>
+          </a:xfrm>
+          <a:prstGeom xmlns:a="http://schemas.openxmlformats.org/drawingml/2006/main" prst="roundRect">
+            <a:avLst>
+              <a:gd name="adj" fmla="val 50000"/>
+            </a:avLst>
+          </a:prstGeom>
+          <a:solidFill xmlns:a="http://schemas.openxmlformats.org/drawingml/2006/main">
+            <a:srgbClr val="92C8C1"/>
+          </a:solidFill>
+          <a:ln xmlns:a="http://schemas.openxmlformats.org/drawingml/2006/main" w="9525">
+            <a:solidFill>
+              <a:srgbClr val="92C8C1"/>
+            </a:solidFill>
+          </a:ln>
+        </p:spPr>
+      </p:sp>
+      <p:sp>
+        <p:nvSpPr>
+          <p:cNvPr id="7" name="">
+            <a:extLst xmlns:a="http://schemas.openxmlformats.org/drawingml/2006/main">
+              <a:ext uri="{FF2B5EF4-FFF2-40B4-BE49-F238E27FC236}">
+                <a16:creationId xmlns:a16="http://schemas.microsoft.com/office/drawing/2014/main" id="{2F654787-8541-4310-BD08-350326DEE809}"/>
+              </a:ext>
+            </a:extLst>
+          </p:cNvPr>
+          <p:cNvSpPr>
+            <a:spLocks xmlns:a="http://schemas.openxmlformats.org/drawingml/2006/main" noGrp="1"/>
+          </p:cNvSpPr>
+          <p:nvPr/>
+        </p:nvSpPr>
+        <p:spPr>
+          <a:xfrm xmlns:a="http://schemas.openxmlformats.org/drawingml/2006/main">
+            <a:off x="1066800" y="2667000"/>
+            <a:ext cx="2857500" cy="228600"/>
+          </a:xfrm>
+          <a:prstGeom xmlns:a="http://schemas.openxmlformats.org/drawingml/2006/main" prst="rect">
+            <a:avLst/>
+          </a:prstGeom>
+          <a:noFill xmlns:a="http://schemas.openxmlformats.org/drawingml/2006/main"/>
+          <a:ln xmlns:a="http://schemas.openxmlformats.org/drawingml/2006/main" w="0">
+            <a:noFill/>
+          </a:ln>
+        </p:spPr>
+        <p:txBody>
+          <a:bodyPr xmlns:a="http://schemas.openxmlformats.org/drawingml/2006/main">
+            <a:normAutofit fontScale="66667"/>
+          </a:bodyPr>
+          <a:lstStyle xmlns:a="http://schemas.openxmlformats.org/drawingml/2006/main"/>
+          <a:p xmlns:a="http://schemas.openxmlformats.org/drawingml/2006/main">
+            <a:pPr>
+              <a:buNone/>
+              <a:defRPr sz="1350" b="1">
+                <a:solidFill>
+                  <a:srgbClr val="FFFFFF"/>
+                </a:solidFill>
+                <a:latin typeface="Arial"/>
+                <a:ea typeface="Arial"/>
+                <a:cs typeface="Arial"/>
+              </a:defRPr>
+            </a:pPr>
+            <a:r>
+              <a:rPr sz="1350" b="1">
+                <a:solidFill>
+                  <a:srgbClr val="FFFFFF"/>
+                </a:solidFill>
+                <a:latin typeface="Arial"/>
+                <a:ea typeface="Arial"/>
+                <a:cs typeface="Arial"/>
+              </a:rPr>
+              <a:t>React / TypeScript</a:t>
+            </a:r>
+          </a:p>
+        </p:txBody>
+      </p:sp>
+      <p:sp>
+        <p:nvSpPr>
+          <p:cNvPr id="8" name="">
+            <a:extLst xmlns:a="http://schemas.openxmlformats.org/drawingml/2006/main">
+              <a:ext uri="{FF2B5EF4-FFF2-40B4-BE49-F238E27FC236}">
+                <a16:creationId xmlns:a16="http://schemas.microsoft.com/office/drawing/2014/main" id="{BC868C80-CEE3-4FA1-9252-17B0053946BC}"/>
+              </a:ext>
+            </a:extLst>
+          </p:cNvPr>
+          <p:cNvSpPr>
+            <a:spLocks xmlns:a="http://schemas.openxmlformats.org/drawingml/2006/main" noGrp="1"/>
+          </p:cNvSpPr>
+          <p:nvPr/>
+        </p:nvSpPr>
+        <p:spPr>
+          <a:xfrm xmlns:a="http://schemas.openxmlformats.org/drawingml/2006/main">
+            <a:off x="1066800" y="2933700"/>
+            <a:ext cx="4333875" cy="190500"/>
+          </a:xfrm>
+          <a:prstGeom xmlns:a="http://schemas.openxmlformats.org/drawingml/2006/main" prst="rect">
+            <a:avLst/>
+          </a:prstGeom>
+          <a:noFill xmlns:a="http://schemas.openxmlformats.org/drawingml/2006/main"/>
+          <a:ln xmlns:a="http://schemas.openxmlformats.org/drawingml/2006/main" w="0">
+            <a:noFill/>
+          </a:ln>
+        </p:spPr>
+        <p:txBody>
+          <a:bodyPr xmlns:a="http://schemas.openxmlformats.org/drawingml/2006/main">
+            <a:normAutofit fontScale="61905"/>
+          </a:bodyPr>
+          <a:lstStyle xmlns:a="http://schemas.openxmlformats.org/drawingml/2006/main"/>
+          <a:p xmlns:a="http://schemas.openxmlformats.org/drawingml/2006/main">
+            <a:pPr>
+              <a:buNone/>
+              <a:defRPr sz="1050" b="0">
+                <a:solidFill>
+                  <a:srgbClr val="BFD8D5"/>
+                </a:solidFill>
+                <a:latin typeface="Arial"/>
+                <a:ea typeface="Arial"/>
+                <a:cs typeface="Arial"/>
+              </a:defRPr>
+            </a:pPr>
+            <a:r>
+              <a:rPr sz="1050" b="0">
+                <a:solidFill>
+                  <a:srgbClr val="BFD8D5"/>
+                </a:solidFill>
+                <a:latin typeface="Arial"/>
+                <a:ea typeface="Arial"/>
+                <a:cs typeface="Arial"/>
+              </a:rPr>
+              <a:t>Bengali-first frontend and optional browser speech input</a:t>
+            </a:r>
+          </a:p>
+        </p:txBody>
+      </p:sp>
+      <p:sp>
+        <p:nvSpPr>
+          <p:cNvPr id="9" name="">
+            <a:extLst xmlns:a="http://schemas.openxmlformats.org/drawingml/2006/main">
+              <a:ext uri="{FF2B5EF4-FFF2-40B4-BE49-F238E27FC236}">
+                <a16:creationId xmlns:a16="http://schemas.microsoft.com/office/drawing/2014/main" id="{3284A156-CA81-4736-BB24-1C0341F89B50}"/>
+              </a:ext>
+            </a:extLst>
+          </p:cNvPr>
+          <p:cNvSpPr>
+            <a:spLocks xmlns:a="http://schemas.openxmlformats.org/drawingml/2006/main" noGrp="1"/>
+          </p:cNvSpPr>
+          <p:nvPr/>
+        </p:nvSpPr>
+        <p:spPr>
+          <a:xfrm xmlns:a="http://schemas.openxmlformats.org/drawingml/2006/main">
+            <a:off x="742950" y="3419475"/>
+            <a:ext cx="123825" cy="123825"/>
+          </a:xfrm>
+          <a:prstGeom xmlns:a="http://schemas.openxmlformats.org/drawingml/2006/main" prst="roundRect">
+            <a:avLst>
+              <a:gd name="adj" fmla="val 50000"/>
+            </a:avLst>
+          </a:prstGeom>
+          <a:solidFill xmlns:a="http://schemas.openxmlformats.org/drawingml/2006/main">
+            <a:srgbClr val="00A28F"/>
+          </a:solidFill>
+          <a:ln xmlns:a="http://schemas.openxmlformats.org/drawingml/2006/main" w="9525">
+            <a:solidFill>
+              <a:srgbClr val="00A28F"/>
+            </a:solidFill>
+          </a:ln>
+        </p:spPr>
+      </p:sp>
+      <p:sp>
+        <p:nvSpPr>
+          <p:cNvPr id="10" name="">
+            <a:extLst xmlns:a="http://schemas.openxmlformats.org/drawingml/2006/main">
+              <a:ext uri="{FF2B5EF4-FFF2-40B4-BE49-F238E27FC236}">
+                <a16:creationId xmlns:a16="http://schemas.microsoft.com/office/drawing/2014/main" id="{79965C15-9A99-47BB-84BB-E77199D1FE24}"/>
+              </a:ext>
+            </a:extLst>
+          </p:cNvPr>
+          <p:cNvSpPr>
+            <a:spLocks xmlns:a="http://schemas.openxmlformats.org/drawingml/2006/main" noGrp="1"/>
+          </p:cNvSpPr>
+          <p:nvPr/>
+        </p:nvSpPr>
+        <p:spPr>
+          <a:xfrm xmlns:a="http://schemas.openxmlformats.org/drawingml/2006/main">
+            <a:off x="1066800" y="3352800"/>
+            <a:ext cx="2857500" cy="228600"/>
+          </a:xfrm>
+          <a:prstGeom xmlns:a="http://schemas.openxmlformats.org/drawingml/2006/main" prst="rect">
+            <a:avLst/>
+          </a:prstGeom>
+          <a:noFill xmlns:a="http://schemas.openxmlformats.org/drawingml/2006/main"/>
+          <a:ln xmlns:a="http://schemas.openxmlformats.org/drawingml/2006/main" w="0">
+            <a:noFill/>
+          </a:ln>
+        </p:spPr>
+        <p:txBody>
+          <a:bodyPr xmlns:a="http://schemas.openxmlformats.org/drawingml/2006/main">
+            <a:normAutofit fontScale="66667"/>
+          </a:bodyPr>
+          <a:lstStyle xmlns:a="http://schemas.openxmlformats.org/drawingml/2006/main"/>
+          <a:p xmlns:a="http://schemas.openxmlformats.org/drawingml/2006/main">
+            <a:pPr>
+              <a:buNone/>
+              <a:defRPr sz="1350" b="1">
+                <a:solidFill>
+                  <a:srgbClr val="FFFFFF"/>
+                </a:solidFill>
+                <a:latin typeface="Arial"/>
+                <a:ea typeface="Arial"/>
+                <a:cs typeface="Arial"/>
+              </a:defRPr>
+            </a:pPr>
+            <a:r>
+              <a:rPr sz="1350" b="1">
+                <a:solidFill>
+                  <a:srgbClr val="FFFFFF"/>
+                </a:solidFill>
+                <a:latin typeface="Arial"/>
+                <a:ea typeface="Arial"/>
+                <a:cs typeface="Arial"/>
+              </a:rPr>
+              <a:t>Java 21 / Spring Boot</a:t>
+            </a:r>
+          </a:p>
+        </p:txBody>
+      </p:sp>
+      <p:sp>
+        <p:nvSpPr>
+          <p:cNvPr id="11" name="">
+            <a:extLst xmlns:a="http://schemas.openxmlformats.org/drawingml/2006/main">
+              <a:ext uri="{FF2B5EF4-FFF2-40B4-BE49-F238E27FC236}">
+                <a16:creationId xmlns:a16="http://schemas.microsoft.com/office/drawing/2014/main" id="{30F33F65-CADA-4DE8-8186-924801D9B14B}"/>
+              </a:ext>
+            </a:extLst>
+          </p:cNvPr>
+          <p:cNvSpPr>
+            <a:spLocks xmlns:a="http://schemas.openxmlformats.org/drawingml/2006/main" noGrp="1"/>
+          </p:cNvSpPr>
+          <p:nvPr/>
+        </p:nvSpPr>
+        <p:spPr>
+          <a:xfrm xmlns:a="http://schemas.openxmlformats.org/drawingml/2006/main">
+            <a:off x="1066800" y="3619500"/>
+            <a:ext cx="4333875" cy="190500"/>
+          </a:xfrm>
+          <a:prstGeom xmlns:a="http://schemas.openxmlformats.org/drawingml/2006/main" prst="rect">
+            <a:avLst/>
+          </a:prstGeom>
+          <a:noFill xmlns:a="http://schemas.openxmlformats.org/drawingml/2006/main"/>
+          <a:ln xmlns:a="http://schemas.openxmlformats.org/drawingml/2006/main" w="0">
+            <a:noFill/>
+          </a:ln>
+        </p:spPr>
+        <p:txBody>
+          <a:bodyPr xmlns:a="http://schemas.openxmlformats.org/drawingml/2006/main">
+            <a:normAutofit fontScale="61905"/>
+          </a:bodyPr>
+          <a:lstStyle xmlns:a="http://schemas.openxmlformats.org/drawingml/2006/main"/>
+          <a:p xmlns:a="http://schemas.openxmlformats.org/drawingml/2006/main">
+            <a:pPr>
+              <a:buNone/>
+              <a:defRPr sz="1050" b="0">
+                <a:solidFill>
+                  <a:srgbClr val="BFD8D5"/>
+                </a:solidFill>
+                <a:latin typeface="Arial"/>
+                <a:ea typeface="Arial"/>
+                <a:cs typeface="Arial"/>
+              </a:defRPr>
+            </a:pPr>
+            <a:r>
+              <a:rPr sz="1050" b="0">
+                <a:solidFill>
+                  <a:srgbClr val="BFD8D5"/>
+                </a:solidFill>
+                <a:latin typeface="Arial"/>
+                <a:ea typeface="Arial"/>
+                <a:cs typeface="Arial"/>
+              </a:rPr>
+              <a:t>Deterministic routing and safety fallback</a:t>
+            </a:r>
+          </a:p>
+        </p:txBody>
+      </p:sp>
+      <p:sp>
+        <p:nvSpPr>
+          <p:cNvPr id="12" name="">
+            <a:extLst xmlns:a="http://schemas.openxmlformats.org/drawingml/2006/main">
+              <a:ext uri="{FF2B5EF4-FFF2-40B4-BE49-F238E27FC236}">
+                <a16:creationId xmlns:a16="http://schemas.microsoft.com/office/drawing/2014/main" id="{02F83386-323E-4729-816D-27E9764215AA}"/>
+              </a:ext>
+            </a:extLst>
+          </p:cNvPr>
+          <p:cNvSpPr>
+            <a:spLocks xmlns:a="http://schemas.openxmlformats.org/drawingml/2006/main" noGrp="1"/>
+          </p:cNvSpPr>
+          <p:nvPr/>
+        </p:nvSpPr>
+        <p:spPr>
+          <a:xfrm xmlns:a="http://schemas.openxmlformats.org/drawingml/2006/main">
+            <a:off x="742950" y="4105275"/>
+            <a:ext cx="123825" cy="123825"/>
+          </a:xfrm>
+          <a:prstGeom xmlns:a="http://schemas.openxmlformats.org/drawingml/2006/main" prst="roundRect">
+            <a:avLst>
+              <a:gd name="adj" fmla="val 50000"/>
+            </a:avLst>
+          </a:prstGeom>
+          <a:solidFill xmlns:a="http://schemas.openxmlformats.org/drawingml/2006/main">
+            <a:srgbClr val="92C8C1"/>
+          </a:solidFill>
+          <a:ln xmlns:a="http://schemas.openxmlformats.org/drawingml/2006/main" w="9525">
+            <a:solidFill>
+              <a:srgbClr val="92C8C1"/>
+            </a:solidFill>
+          </a:ln>
+        </p:spPr>
+      </p:sp>
+      <p:sp>
+        <p:nvSpPr>
+          <p:cNvPr id="13" name="">
+            <a:extLst xmlns:a="http://schemas.openxmlformats.org/drawingml/2006/main">
+              <a:ext uri="{FF2B5EF4-FFF2-40B4-BE49-F238E27FC236}">
+                <a16:creationId xmlns:a16="http://schemas.microsoft.com/office/drawing/2014/main" id="{30AE21C8-E495-4A91-A499-1DAFCF61CACE}"/>
+              </a:ext>
+            </a:extLst>
+          </p:cNvPr>
+          <p:cNvSpPr>
+            <a:spLocks xmlns:a="http://schemas.openxmlformats.org/drawingml/2006/main" noGrp="1"/>
+          </p:cNvSpPr>
+          <p:nvPr/>
+        </p:nvSpPr>
+        <p:spPr>
+          <a:xfrm xmlns:a="http://schemas.openxmlformats.org/drawingml/2006/main">
+            <a:off x="1066800" y="4038600"/>
+            <a:ext cx="2857500" cy="228600"/>
+          </a:xfrm>
+          <a:prstGeom xmlns:a="http://schemas.openxmlformats.org/drawingml/2006/main" prst="rect">
+            <a:avLst/>
+          </a:prstGeom>
+          <a:noFill xmlns:a="http://schemas.openxmlformats.org/drawingml/2006/main"/>
+          <a:ln xmlns:a="http://schemas.openxmlformats.org/drawingml/2006/main" w="0">
+            <a:noFill/>
+          </a:ln>
+        </p:spPr>
+        <p:txBody>
+          <a:bodyPr xmlns:a="http://schemas.openxmlformats.org/drawingml/2006/main">
+            <a:normAutofit fontScale="66667"/>
+          </a:bodyPr>
+          <a:lstStyle xmlns:a="http://schemas.openxmlformats.org/drawingml/2006/main"/>
+          <a:p xmlns:a="http://schemas.openxmlformats.org/drawingml/2006/main">
+            <a:pPr>
+              <a:buNone/>
+              <a:defRPr sz="1350" b="1">
+                <a:solidFill>
+                  <a:srgbClr val="FFFFFF"/>
+                </a:solidFill>
+                <a:latin typeface="Arial"/>
+                <a:ea typeface="Arial"/>
+                <a:cs typeface="Arial"/>
+              </a:defRPr>
+            </a:pPr>
+            <a:r>
+              <a:rPr sz="1350" b="1">
+                <a:solidFill>
+                  <a:srgbClr val="FFFFFF"/>
+                </a:solidFill>
+                <a:latin typeface="Arial"/>
+                <a:ea typeface="Arial"/>
+                <a:cs typeface="Arial"/>
+              </a:rPr>
+              <a:t>PostgreSQL</a:t>
+            </a:r>
+          </a:p>
+        </p:txBody>
+      </p:sp>
+      <p:sp>
+        <p:nvSpPr>
+          <p:cNvPr id="14" name="">
+            <a:extLst xmlns:a="http://schemas.openxmlformats.org/drawingml/2006/main">
+              <a:ext uri="{FF2B5EF4-FFF2-40B4-BE49-F238E27FC236}">
+                <a16:creationId xmlns:a16="http://schemas.microsoft.com/office/drawing/2014/main" id="{74793B44-070F-48AD-98A3-02EB6DD6D01A}"/>
+              </a:ext>
+            </a:extLst>
+          </p:cNvPr>
+          <p:cNvSpPr>
+            <a:spLocks xmlns:a="http://schemas.openxmlformats.org/drawingml/2006/main" noGrp="1"/>
+          </p:cNvSpPr>
+          <p:nvPr/>
+        </p:nvSpPr>
+        <p:spPr>
+          <a:xfrm xmlns:a="http://schemas.openxmlformats.org/drawingml/2006/main">
+            <a:off x="1066800" y="4305300"/>
+            <a:ext cx="4333875" cy="190500"/>
+          </a:xfrm>
+          <a:prstGeom xmlns:a="http://schemas.openxmlformats.org/drawingml/2006/main" prst="rect">
+            <a:avLst/>
+          </a:prstGeom>
+          <a:noFill xmlns:a="http://schemas.openxmlformats.org/drawingml/2006/main"/>
+          <a:ln xmlns:a="http://schemas.openxmlformats.org/drawingml/2006/main" w="0">
+            <a:noFill/>
+          </a:ln>
+        </p:spPr>
+        <p:txBody>
+          <a:bodyPr xmlns:a="http://schemas.openxmlformats.org/drawingml/2006/main">
+            <a:normAutofit fontScale="61905"/>
+          </a:bodyPr>
+          <a:lstStyle xmlns:a="http://schemas.openxmlformats.org/drawingml/2006/main"/>
+          <a:p xmlns:a="http://schemas.openxmlformats.org/drawingml/2006/main">
+            <a:pPr>
+              <a:buNone/>
+              <a:defRPr sz="1050" b="0">
+                <a:solidFill>
+                  <a:srgbClr val="BFD8D5"/>
+                </a:solidFill>
+                <a:latin typeface="Arial"/>
+                <a:ea typeface="Arial"/>
+                <a:cs typeface="Arial"/>
+              </a:defRPr>
+            </a:pPr>
+            <a:r>
+              <a:rPr sz="1050" b="0">
+                <a:solidFill>
+                  <a:srgbClr val="BFD8D5"/>
+                </a:solidFill>
+                <a:latin typeface="Arial"/>
+                <a:ea typeface="Arial"/>
+                <a:cs typeface="Arial"/>
+              </a:rPr>
+              <a:t>Demo criteria plus route-specific guidance</a:t>
+            </a:r>
+          </a:p>
+        </p:txBody>
+      </p:sp>
+      <p:sp>
+        <p:nvSpPr>
+          <p:cNvPr id="15" name="">
+            <a:extLst xmlns:a="http://schemas.openxmlformats.org/drawingml/2006/main">
+              <a:ext uri="{FF2B5EF4-FFF2-40B4-BE49-F238E27FC236}">
+                <a16:creationId xmlns:a16="http://schemas.microsoft.com/office/drawing/2014/main" id="{9D347835-93EF-48BE-8F15-41B938788526}"/>
+              </a:ext>
+            </a:extLst>
+          </p:cNvPr>
+          <p:cNvSpPr>
+            <a:spLocks xmlns:a="http://schemas.openxmlformats.org/drawingml/2006/main" noGrp="1"/>
+          </p:cNvSpPr>
+          <p:nvPr/>
+        </p:nvSpPr>
+        <p:spPr>
+          <a:xfrm xmlns:a="http://schemas.openxmlformats.org/drawingml/2006/main">
+            <a:off x="742950" y="4791075"/>
+            <a:ext cx="123825" cy="123825"/>
+          </a:xfrm>
+          <a:prstGeom xmlns:a="http://schemas.openxmlformats.org/drawingml/2006/main" prst="roundRect">
+            <a:avLst>
+              <a:gd name="adj" fmla="val 50000"/>
+            </a:avLst>
+          </a:prstGeom>
+          <a:solidFill xmlns:a="http://schemas.openxmlformats.org/drawingml/2006/main">
+            <a:srgbClr val="92C8C1"/>
+          </a:solidFill>
+          <a:ln xmlns:a="http://schemas.openxmlformats.org/drawingml/2006/main" w="9525">
+            <a:solidFill>
+              <a:srgbClr val="92C8C1"/>
+            </a:solidFill>
+          </a:ln>
+        </p:spPr>
+      </p:sp>
+      <p:sp>
+        <p:nvSpPr>
+          <p:cNvPr id="16" name="">
+            <a:extLst xmlns:a="http://schemas.openxmlformats.org/drawingml/2006/main">
+              <a:ext uri="{FF2B5EF4-FFF2-40B4-BE49-F238E27FC236}">
+                <a16:creationId xmlns:a16="http://schemas.microsoft.com/office/drawing/2014/main" id="{321C489E-24FE-4581-BFAF-C3610823C419}"/>
+              </a:ext>
+            </a:extLst>
+          </p:cNvPr>
+          <p:cNvSpPr>
+            <a:spLocks xmlns:a="http://schemas.openxmlformats.org/drawingml/2006/main" noGrp="1"/>
+          </p:cNvSpPr>
+          <p:nvPr/>
+        </p:nvSpPr>
+        <p:spPr>
+          <a:xfrm xmlns:a="http://schemas.openxmlformats.org/drawingml/2006/main">
+            <a:off x="1066800" y="4724400"/>
+            <a:ext cx="2857500" cy="228600"/>
+          </a:xfrm>
+          <a:prstGeom xmlns:a="http://schemas.openxmlformats.org/drawingml/2006/main" prst="rect">
+            <a:avLst/>
+          </a:prstGeom>
+          <a:noFill xmlns:a="http://schemas.openxmlformats.org/drawingml/2006/main"/>
+          <a:ln xmlns:a="http://schemas.openxmlformats.org/drawingml/2006/main" w="0">
+            <a:noFill/>
+          </a:ln>
+        </p:spPr>
+        <p:txBody>
+          <a:bodyPr xmlns:a="http://schemas.openxmlformats.org/drawingml/2006/main">
+            <a:normAutofit fontScale="66667"/>
+          </a:bodyPr>
+          <a:lstStyle xmlns:a="http://schemas.openxmlformats.org/drawingml/2006/main"/>
+          <a:p xmlns:a="http://schemas.openxmlformats.org/drawingml/2006/main">
+            <a:pPr>
+              <a:buNone/>
+              <a:defRPr sz="1350" b="1">
+                <a:solidFill>
+                  <a:srgbClr val="FFFFFF"/>
+                </a:solidFill>
+                <a:latin typeface="Arial"/>
+                <a:ea typeface="Arial"/>
+                <a:cs typeface="Arial"/>
+              </a:defRPr>
+            </a:pPr>
+            <a:r>
+              <a:rPr sz="1350" b="1">
+                <a:solidFill>
+                  <a:srgbClr val="FFFFFF"/>
+                </a:solidFill>
+                <a:latin typeface="Arial"/>
+                <a:ea typeface="Arial"/>
+                <a:cs typeface="Arial"/>
+              </a:rPr>
+              <a:t>Local Ollama</a:t>
+            </a:r>
+          </a:p>
+        </p:txBody>
+      </p:sp>
+      <p:sp>
+        <p:nvSpPr>
+          <p:cNvPr id="17" name="">
+            <a:extLst xmlns:a="http://schemas.openxmlformats.org/drawingml/2006/main">
+              <a:ext uri="{FF2B5EF4-FFF2-40B4-BE49-F238E27FC236}">
+                <a16:creationId xmlns:a16="http://schemas.microsoft.com/office/drawing/2014/main" id="{EB11A43E-CF26-4237-BB92-C48BF846E263}"/>
+              </a:ext>
+            </a:extLst>
+          </p:cNvPr>
+          <p:cNvSpPr>
+            <a:spLocks xmlns:a="http://schemas.openxmlformats.org/drawingml/2006/main" noGrp="1"/>
+          </p:cNvSpPr>
+          <p:nvPr/>
+        </p:nvSpPr>
+        <p:spPr>
+          <a:xfrm xmlns:a="http://schemas.openxmlformats.org/drawingml/2006/main">
+            <a:off x="1066800" y="4991100"/>
+            <a:ext cx="4333875" cy="190500"/>
+          </a:xfrm>
+          <a:prstGeom xmlns:a="http://schemas.openxmlformats.org/drawingml/2006/main" prst="rect">
+            <a:avLst/>
+          </a:prstGeom>
+          <a:noFill xmlns:a="http://schemas.openxmlformats.org/drawingml/2006/main"/>
+          <a:ln xmlns:a="http://schemas.openxmlformats.org/drawingml/2006/main" w="0">
+            <a:noFill/>
+          </a:ln>
+        </p:spPr>
+        <p:txBody>
+          <a:bodyPr xmlns:a="http://schemas.openxmlformats.org/drawingml/2006/main">
+            <a:normAutofit fontScale="61905"/>
+          </a:bodyPr>
+          <a:lstStyle xmlns:a="http://schemas.openxmlformats.org/drawingml/2006/main"/>
+          <a:p xmlns:a="http://schemas.openxmlformats.org/drawingml/2006/main">
+            <a:pPr>
+              <a:buNone/>
+              <a:defRPr sz="1050" b="0">
+                <a:solidFill>
+                  <a:srgbClr val="BFD8D5"/>
+                </a:solidFill>
+                <a:latin typeface="Arial"/>
+                <a:ea typeface="Arial"/>
+                <a:cs typeface="Arial"/>
+              </a:defRPr>
+            </a:pPr>
+            <a:r>
+              <a:rPr sz="1050" b="0">
+                <a:solidFill>
+                  <a:srgbClr val="BFD8D5"/>
+                </a:solidFill>
+                <a:latin typeface="Arial"/>
+                <a:ea typeface="Arial"/>
+                <a:cs typeface="Arial"/>
+              </a:rPr>
+              <a:t>Optional explanation after Java locks the route</a:t>
+            </a:r>
+          </a:p>
+        </p:txBody>
+      </p:sp>
+      <p:sp>
+        <p:nvSpPr>
+          <p:cNvPr id="18" name="">
+            <a:extLst xmlns:a="http://schemas.openxmlformats.org/drawingml/2006/main">
+              <a:ext uri="{FF2B5EF4-FFF2-40B4-BE49-F238E27FC236}">
+                <a16:creationId xmlns:a16="http://schemas.microsoft.com/office/drawing/2014/main" id="{716ADE15-FF2A-4592-A9F7-6353A4208059}"/>
+              </a:ext>
+            </a:extLst>
+          </p:cNvPr>
+          <p:cNvSpPr>
+            <a:spLocks xmlns:a="http://schemas.openxmlformats.org/drawingml/2006/main" noGrp="1"/>
+          </p:cNvSpPr>
+          <p:nvPr/>
+        </p:nvSpPr>
+        <p:spPr>
+          <a:xfrm xmlns:a="http://schemas.openxmlformats.org/drawingml/2006/main">
+            <a:off x="6334125" y="2314575"/>
+            <a:ext cx="9525" cy="0"/>
+          </a:xfrm>
+          <a:prstGeom xmlns:a="http://schemas.openxmlformats.org/drawingml/2006/main" prst="rect">
+            <a:avLst/>
+          </a:prstGeom>
+          <a:ln xmlns:a="http://schemas.openxmlformats.org/drawingml/2006/main" w="9525"/>
+        </p:spPr>
+      </p:sp>
+      <p:sp>
+        <p:nvSpPr>
+          <p:cNvPr id="19" name="">
+            <a:extLst xmlns:a="http://schemas.openxmlformats.org/drawingml/2006/main">
+              <a:ext uri="{FF2B5EF4-FFF2-40B4-BE49-F238E27FC236}">
+                <a16:creationId xmlns:a16="http://schemas.microsoft.com/office/drawing/2014/main" id="{A63DE9B7-D9FC-4E9B-A21B-5482B8D7BBC0}"/>
+              </a:ext>
+            </a:extLst>
+          </p:cNvPr>
+          <p:cNvSpPr>
+            <a:spLocks xmlns:a="http://schemas.openxmlformats.org/drawingml/2006/main" noGrp="1"/>
+          </p:cNvSpPr>
+          <p:nvPr/>
+        </p:nvSpPr>
+        <p:spPr>
+          <a:xfrm xmlns:a="http://schemas.openxmlformats.org/drawingml/2006/main">
+            <a:off x="6848475" y="2286000"/>
+            <a:ext cx="2381250" cy="171450"/>
+          </a:xfrm>
+          <a:prstGeom xmlns:a="http://schemas.openxmlformats.org/drawingml/2006/main" prst="rect">
+            <a:avLst/>
+          </a:prstGeom>
+          <a:noFill xmlns:a="http://schemas.openxmlformats.org/drawingml/2006/main"/>
+          <a:ln xmlns:a="http://schemas.openxmlformats.org/drawingml/2006/main" w="0">
+            <a:noFill/>
+          </a:ln>
+        </p:spPr>
+        <p:txBody>
+          <a:bodyPr xmlns:a="http://schemas.openxmlformats.org/drawingml/2006/main">
+            <a:normAutofit fontScale="63636"/>
+          </a:bodyPr>
+          <a:lstStyle xmlns:a="http://schemas.openxmlformats.org/drawingml/2006/main"/>
+          <a:p xmlns:a="http://schemas.openxmlformats.org/drawingml/2006/main">
+            <a:pPr>
+              <a:buNone/>
+              <a:defRPr sz="825" b="1">
+                <a:solidFill>
+                  <a:srgbClr val="00A28F"/>
+                </a:solidFill>
+                <a:latin typeface="Arial"/>
+                <a:ea typeface="Arial"/>
+                <a:cs typeface="Arial"/>
+              </a:defRPr>
+            </a:pPr>
+            <a:r>
+              <a:rPr sz="825" b="1">
+                <a:solidFill>
+                  <a:srgbClr val="00A28F"/>
+                </a:solidFill>
+                <a:latin typeface="Arial"/>
+                <a:ea typeface="Arial"/>
+                <a:cs typeface="Arial"/>
+              </a:rPr>
+              <a:t>DELIVERY EVIDENCE</a:t>
+            </a:r>
+          </a:p>
+        </p:txBody>
+      </p:sp>
+      <p:sp>
+        <p:nvSpPr>
+          <p:cNvPr id="20" name="">
+            <a:extLst xmlns:a="http://schemas.openxmlformats.org/drawingml/2006/main">
+              <a:ext uri="{FF2B5EF4-FFF2-40B4-BE49-F238E27FC236}">
+                <a16:creationId xmlns:a16="http://schemas.microsoft.com/office/drawing/2014/main" id="{2714BD0C-2F04-4B33-85F7-89BBC203DD4F}"/>
+              </a:ext>
+            </a:extLst>
+          </p:cNvPr>
+          <p:cNvSpPr>
+            <a:spLocks xmlns:a="http://schemas.openxmlformats.org/drawingml/2006/main" noGrp="1"/>
+          </p:cNvSpPr>
+          <p:nvPr/>
+        </p:nvSpPr>
+        <p:spPr>
+          <a:xfrm xmlns:a="http://schemas.openxmlformats.org/drawingml/2006/main">
+            <a:off x="6848475" y="2705100"/>
+            <a:ext cx="1200150" cy="685800"/>
+          </a:xfrm>
+          <a:prstGeom xmlns:a="http://schemas.openxmlformats.org/drawingml/2006/main" prst="rect">
+            <a:avLst/>
+          </a:prstGeom>
+          <a:noFill xmlns:a="http://schemas.openxmlformats.org/drawingml/2006/main"/>
+          <a:ln xmlns:a="http://schemas.openxmlformats.org/drawingml/2006/main" w="0">
+            <a:noFill/>
+          </a:ln>
+        </p:spPr>
+        <p:txBody>
+          <a:bodyPr xmlns:a="http://schemas.openxmlformats.org/drawingml/2006/main">
+            <a:normAutofit fontScale="92857"/>
+          </a:bodyPr>
+          <a:lstStyle xmlns:a="http://schemas.openxmlformats.org/drawingml/2006/main"/>
+          <a:p xmlns:a="http://schemas.openxmlformats.org/drawingml/2006/main">
+            <a:pPr>
+              <a:buNone/>
+              <a:defRPr sz="4200" b="1">
+                <a:solidFill>
+                  <a:srgbClr val="FFFFFF"/>
+                </a:solidFill>
+                <a:latin typeface="Arial"/>
+                <a:ea typeface="Arial"/>
+                <a:cs typeface="Arial"/>
+              </a:defRPr>
+            </a:pPr>
+            <a:r>
+              <a:rPr sz="4200" b="1">
+                <a:solidFill>
+                  <a:srgbClr val="FFFFFF"/>
+                </a:solidFill>
+                <a:latin typeface="Arial"/>
+                <a:ea typeface="Arial"/>
+                <a:cs typeface="Arial"/>
+              </a:rPr>
+              <a:t>11</a:t>
+            </a:r>
+          </a:p>
+        </p:txBody>
+      </p:sp>
+      <p:sp>
+        <p:nvSpPr>
+          <p:cNvPr id="21" name="">
+            <a:extLst xmlns:a="http://schemas.openxmlformats.org/drawingml/2006/main">
+              <a:ext uri="{FF2B5EF4-FFF2-40B4-BE49-F238E27FC236}">
+                <a16:creationId xmlns:a16="http://schemas.microsoft.com/office/drawing/2014/main" id="{E8B4FCF6-1201-4698-9F1C-F2A5F0FB8C24}"/>
+              </a:ext>
+            </a:extLst>
+          </p:cNvPr>
+          <p:cNvSpPr>
+            <a:spLocks xmlns:a="http://schemas.openxmlformats.org/drawingml/2006/main" noGrp="1"/>
+          </p:cNvSpPr>
+          <p:nvPr/>
+        </p:nvSpPr>
+        <p:spPr>
+          <a:xfrm xmlns:a="http://schemas.openxmlformats.org/drawingml/2006/main">
+            <a:off x="8248650" y="2847975"/>
+            <a:ext cx="2524125" cy="514350"/>
+          </a:xfrm>
+          <a:prstGeom xmlns:a="http://schemas.openxmlformats.org/drawingml/2006/main" prst="rect">
+            <a:avLst/>
+          </a:prstGeom>
+          <a:noFill xmlns:a="http://schemas.openxmlformats.org/drawingml/2006/main"/>
+          <a:ln xmlns:a="http://schemas.openxmlformats.org/drawingml/2006/main" w="0">
+            <a:noFill/>
+          </a:ln>
+        </p:spPr>
+        <p:txBody>
+          <a:bodyPr xmlns:a="http://schemas.openxmlformats.org/drawingml/2006/main">
+            <a:normAutofit fontScale="88095"/>
+          </a:bodyPr>
+          <a:lstStyle xmlns:a="http://schemas.openxmlformats.org/drawingml/2006/main"/>
+          <a:p xmlns:a="http://schemas.openxmlformats.org/drawingml/2006/main">
+            <a:pPr>
+              <a:buNone/>
+              <a:defRPr sz="1575" b="0">
+                <a:solidFill>
+                  <a:srgbClr val="D5EBE8"/>
+                </a:solidFill>
+                <a:latin typeface="Arial"/>
+                <a:ea typeface="Arial"/>
+                <a:cs typeface="Arial"/>
+              </a:defRPr>
+            </a:pPr>
+            <a:r>
+              <a:rPr sz="1575" b="0">
+                <a:solidFill>
+                  <a:srgbClr val="D5EBE8"/>
+                </a:solidFill>
+                <a:latin typeface="Arial"/>
+                <a:ea typeface="Arial"/>
+                <a:cs typeface="Arial"/>
+              </a:rPr>
+              <a:t>linked Jira delivery stories</a:t>
+            </a:r>
+          </a:p>
+          <a:p xmlns:a="http://schemas.openxmlformats.org/drawingml/2006/main">
+            <a:pPr>
+              <a:buNone/>
+              <a:defRPr sz="1575" b="0">
+                <a:solidFill>
+                  <a:srgbClr val="D5EBE8"/>
+                </a:solidFill>
+                <a:latin typeface="Arial"/>
+                <a:ea typeface="Arial"/>
+                <a:cs typeface="Arial"/>
+              </a:defRPr>
+            </a:pPr>
+            <a:r>
+              <a:rPr sz="1575" b="0">
+                <a:solidFill>
+                  <a:srgbClr val="D5EBE8"/>
+                </a:solidFill>
+                <a:latin typeface="Arial"/>
+                <a:ea typeface="Arial"/>
+                <a:cs typeface="Arial"/>
+              </a:rPr>
+              <a:t>resolved</a:t>
+            </a:r>
+          </a:p>
+        </p:txBody>
+      </p:sp>
+      <p:sp>
+        <p:nvSpPr>
+          <p:cNvPr id="22" name="">
+            <a:extLst xmlns:a="http://schemas.openxmlformats.org/drawingml/2006/main">
+              <a:ext uri="{FF2B5EF4-FFF2-40B4-BE49-F238E27FC236}">
+                <a16:creationId xmlns:a16="http://schemas.microsoft.com/office/drawing/2014/main" id="{876F3826-4576-4822-A781-C4BE01F02315}"/>
+              </a:ext>
+            </a:extLst>
+          </p:cNvPr>
+          <p:cNvSpPr>
+            <a:spLocks xmlns:a="http://schemas.openxmlformats.org/drawingml/2006/main" noGrp="1"/>
+          </p:cNvSpPr>
+          <p:nvPr/>
+        </p:nvSpPr>
+        <p:spPr>
+          <a:xfrm xmlns:a="http://schemas.openxmlformats.org/drawingml/2006/main">
+            <a:off x="6848475" y="3733800"/>
+            <a:ext cx="3524250" cy="19050"/>
+          </a:xfrm>
+          <a:prstGeom xmlns:a="http://schemas.openxmlformats.org/drawingml/2006/main" prst="rect">
+            <a:avLst/>
+          </a:prstGeom>
+          <a:solidFill xmlns:a="http://schemas.openxmlformats.org/drawingml/2006/main">
+            <a:srgbClr val="00A28F"/>
+          </a:solidFill>
+          <a:ln xmlns:a="http://schemas.openxmlformats.org/drawingml/2006/main" w="9525">
+            <a:solidFill>
+              <a:srgbClr val="00A28F"/>
+            </a:solidFill>
+          </a:ln>
+        </p:spPr>
+      </p:sp>
+      <p:sp>
+        <p:nvSpPr>
+          <p:cNvPr id="23" name="">
+            <a:extLst xmlns:a="http://schemas.openxmlformats.org/drawingml/2006/main">
+              <a:ext uri="{FF2B5EF4-FFF2-40B4-BE49-F238E27FC236}">
+                <a16:creationId xmlns:a16="http://schemas.microsoft.com/office/drawing/2014/main" id="{6A9931D8-E4BA-4B19-8B07-BED3594FA3F7}"/>
+              </a:ext>
+            </a:extLst>
+          </p:cNvPr>
+          <p:cNvSpPr>
+            <a:spLocks xmlns:a="http://schemas.openxmlformats.org/drawingml/2006/main" noGrp="1"/>
+          </p:cNvSpPr>
+          <p:nvPr/>
+        </p:nvSpPr>
+        <p:spPr>
+          <a:xfrm xmlns:a="http://schemas.openxmlformats.org/drawingml/2006/main">
+            <a:off x="6848475" y="4076700"/>
+            <a:ext cx="2381250" cy="209550"/>
+          </a:xfrm>
+          <a:prstGeom xmlns:a="http://schemas.openxmlformats.org/drawingml/2006/main" prst="rect">
+            <a:avLst/>
+          </a:prstGeom>
+          <a:noFill xmlns:a="http://schemas.openxmlformats.org/drawingml/2006/main"/>
+          <a:ln xmlns:a="http://schemas.openxmlformats.org/drawingml/2006/main" w="0">
+            <a:noFill/>
+          </a:ln>
+        </p:spPr>
+        <p:txBody>
+          <a:bodyPr xmlns:a="http://schemas.openxmlformats.org/drawingml/2006/main">
+            <a:normAutofit fontScale="64583"/>
+          </a:bodyPr>
+          <a:lstStyle xmlns:a="http://schemas.openxmlformats.org/drawingml/2006/main"/>
+          <a:p xmlns:a="http://schemas.openxmlformats.org/drawingml/2006/main">
+            <a:pPr>
+              <a:buNone/>
+              <a:defRPr sz="1200" b="1">
+                <a:solidFill>
+                  <a:srgbClr val="FFFFFF"/>
+                </a:solidFill>
+                <a:latin typeface="Arial"/>
+                <a:ea typeface="Arial"/>
+                <a:cs typeface="Arial"/>
+              </a:defRPr>
+            </a:pPr>
+            <a:r>
+              <a:rPr sz="1200" b="1">
+                <a:solidFill>
+                  <a:srgbClr val="FFFFFF"/>
+                </a:solidFill>
+                <a:latin typeface="Arial"/>
+                <a:ea typeface="Arial"/>
+                <a:cs typeface="Arial"/>
+              </a:rPr>
+              <a:t>Current automated evidence</a:t>
+            </a:r>
+          </a:p>
+        </p:txBody>
+      </p:sp>
+      <p:sp>
+        <p:nvSpPr>
+          <p:cNvPr id="24" name="">
+            <a:extLst xmlns:a="http://schemas.openxmlformats.org/drawingml/2006/main">
+              <a:ext uri="{FF2B5EF4-FFF2-40B4-BE49-F238E27FC236}">
+                <a16:creationId xmlns:a16="http://schemas.microsoft.com/office/drawing/2014/main" id="{0EFDAB26-57D1-45A1-9B86-A62298016CCB}"/>
+              </a:ext>
+            </a:extLst>
+          </p:cNvPr>
+          <p:cNvSpPr>
+            <a:spLocks xmlns:a="http://schemas.openxmlformats.org/drawingml/2006/main" noGrp="1"/>
+          </p:cNvSpPr>
+          <p:nvPr/>
+        </p:nvSpPr>
+        <p:spPr>
+          <a:xfrm xmlns:a="http://schemas.openxmlformats.org/drawingml/2006/main">
+            <a:off x="6848475" y="4419600"/>
+            <a:ext cx="3619500" cy="819150"/>
+          </a:xfrm>
+          <a:prstGeom xmlns:a="http://schemas.openxmlformats.org/drawingml/2006/main" prst="rect">
+            <a:avLst/>
+          </a:prstGeom>
+          <a:noFill xmlns:a="http://schemas.openxmlformats.org/drawingml/2006/main"/>
+          <a:ln xmlns:a="http://schemas.openxmlformats.org/drawingml/2006/main" w="0">
+            <a:noFill/>
+          </a:ln>
+        </p:spPr>
+        <p:txBody>
+          <a:bodyPr xmlns:a="http://schemas.openxmlformats.org/drawingml/2006/main">
+            <a:normAutofit fontScale="99479"/>
+          </a:bodyPr>
+          <a:lstStyle xmlns:a="http://schemas.openxmlformats.org/drawingml/2006/main"/>
+          <a:p xmlns:a="http://schemas.openxmlformats.org/drawingml/2006/main">
+            <a:pPr>
+              <a:buNone/>
+              <a:defRPr sz="1200" b="0">
+                <a:solidFill>
+                  <a:srgbClr val="BFD8D5"/>
+                </a:solidFill>
+                <a:latin typeface="Arial"/>
+                <a:ea typeface="Arial"/>
+                <a:cs typeface="Arial"/>
+              </a:defRPr>
+            </a:pPr>
+            <a:r>
+              <a:rPr sz="1200" b="0">
+                <a:solidFill>
+                  <a:srgbClr val="BFD8D5"/>
+                </a:solidFill>
+                <a:latin typeface="Arial"/>
+                <a:ea typeface="Arial"/>
+                <a:cs typeface="Arial"/>
+              </a:rPr>
+              <a:t>Java unit tests cover the routing policy and output validation. Wider integration, end-to-end, accessibility, usability, and clinical validation remain pilot gates.</a:t>
+            </a:r>
+          </a:p>
+        </p:txBody>
+      </p:sp>
+      <p:sp>
+        <p:nvSpPr>
+          <p:cNvPr id="25" name="">
+            <a:extLst xmlns:a="http://schemas.openxmlformats.org/drawingml/2006/main">
+              <a:ext uri="{FF2B5EF4-FFF2-40B4-BE49-F238E27FC236}">
+                <a16:creationId xmlns:a16="http://schemas.microsoft.com/office/drawing/2014/main" id="{B79FF007-F90B-431D-9BE2-B5CAABF9CC9A}"/>
+              </a:ext>
+            </a:extLst>
+          </p:cNvPr>
+          <p:cNvSpPr>
+            <a:spLocks xmlns:a="http://schemas.openxmlformats.org/drawingml/2006/main" noGrp="1"/>
+          </p:cNvSpPr>
+          <p:nvPr/>
+        </p:nvSpPr>
+        <p:spPr>
+          <a:xfrm xmlns:a="http://schemas.openxmlformats.org/drawingml/2006/main">
+            <a:off x="723900" y="6181725"/>
+            <a:ext cx="5524500" cy="152400"/>
+          </a:xfrm>
+          <a:prstGeom xmlns:a="http://schemas.openxmlformats.org/drawingml/2006/main" prst="rect">
+            <a:avLst/>
+          </a:prstGeom>
+          <a:noFill xmlns:a="http://schemas.openxmlformats.org/drawingml/2006/main"/>
+          <a:ln xmlns:a="http://schemas.openxmlformats.org/drawingml/2006/main" w="0">
+            <a:noFill/>
+          </a:ln>
+        </p:spPr>
+        <p:txBody>
+          <a:bodyPr xmlns:a="http://schemas.openxmlformats.org/drawingml/2006/main">
+            <a:normAutofit fontScale="53333"/>
+          </a:bodyPr>
+          <a:lstStyle xmlns:a="http://schemas.openxmlformats.org/drawingml/2006/main"/>
+          <a:p xmlns:a="http://schemas.openxmlformats.org/drawingml/2006/main">
+            <a:pPr>
+              <a:buNone/>
+              <a:defRPr sz="750" b="0">
+                <a:solidFill>
+                  <a:srgbClr val="8AB6B0"/>
+                </a:solidFill>
+                <a:latin typeface="Arial"/>
+                <a:ea typeface="Arial"/>
+                <a:cs typeface="Arial"/>
+              </a:defRPr>
+            </a:pPr>
+            <a:r>
+              <a:rPr sz="750" b="0">
+                <a:solidFill>
+                  <a:srgbClr val="8AB6B0"/>
+                </a:solidFill>
+                <a:latin typeface="Arial"/>
+                <a:ea typeface="Arial"/>
+                <a:cs typeface="Arial"/>
+              </a:rPr>
+              <a:t>Source: Jira Dashboard 10001 and repository test suite</a:t>
+            </a:r>
+          </a:p>
+        </p:txBody>
+      </p:sp>
+      <p:sp>
+        <p:nvSpPr>
+          <p:cNvPr id="27" name="">
+            <a:extLst xmlns:a="http://schemas.openxmlformats.org/drawingml/2006/main">
+              <a:ext uri="{FF2B5EF4-FFF2-40B4-BE49-F238E27FC236}">
+                <a16:creationId xmlns:a16="http://schemas.microsoft.com/office/drawing/2014/main" id="{CF6B5FE1-74E7-44AD-BB3A-9595E388B49E}"/>
+              </a:ext>
+            </a:extLst>
+          </p:cNvPr>
+          <p:cNvSpPr>
+            <a:spLocks xmlns:a="http://schemas.openxmlformats.org/drawingml/2006/main" noGrp="1"/>
+          </p:cNvSpPr>
+          <p:nvPr/>
+        </p:nvSpPr>
+        <p:spPr>
+          <a:xfrm xmlns:a="http://schemas.openxmlformats.org/drawingml/2006/main">
+            <a:off x="0" y="0"/>
+            <a:ext cx="12192000" cy="6858000"/>
+          </a:xfrm>
+          <a:prstGeom xmlns:a="http://schemas.openxmlformats.org/drawingml/2006/main" prst="rect">
+            <a:avLst/>
+          </a:prstGeom>
+          <a:solidFill xmlns:a="http://schemas.openxmlformats.org/drawingml/2006/main">
+            <a:srgbClr val="E9E7F5"/>
+          </a:solidFill>
+          <a:ln xmlns:a="http://schemas.openxmlformats.org/drawingml/2006/main" w="0">
+            <a:noFill/>
+          </a:ln>
+        </p:spPr>
+      </p:sp>
+      <p:sp>
+        <p:nvSpPr>
+          <p:cNvPr id="28" name="">
+            <a:extLst xmlns:a="http://schemas.openxmlformats.org/drawingml/2006/main">
+              <a:ext uri="{FF2B5EF4-FFF2-40B4-BE49-F238E27FC236}">
+                <a16:creationId xmlns:a16="http://schemas.microsoft.com/office/drawing/2014/main" id="{EC8DFB18-839B-4CF8-B15C-D07331E45DCB}"/>
+              </a:ext>
+            </a:extLst>
+          </p:cNvPr>
+          <p:cNvSpPr>
+            <a:spLocks xmlns:a="http://schemas.openxmlformats.org/drawingml/2006/main" noGrp="1"/>
+          </p:cNvSpPr>
+          <p:nvPr/>
+        </p:nvSpPr>
+        <p:spPr>
+          <a:xfrm xmlns:a="http://schemas.openxmlformats.org/drawingml/2006/main">
+            <a:off x="685800" y="419100"/>
+            <a:ext cx="666750" cy="209550"/>
+          </a:xfrm>
+          <a:prstGeom xmlns:a="http://schemas.openxmlformats.org/drawingml/2006/main" prst="rect">
+            <a:avLst/>
+          </a:prstGeom>
+          <a:noFill xmlns:a="http://schemas.openxmlformats.org/drawingml/2006/main"/>
+          <a:ln xmlns:a="http://schemas.openxmlformats.org/drawingml/2006/main" w="0">
+            <a:noFill/>
+          </a:ln>
+        </p:spPr>
+        <p:txBody>
+          <a:bodyPr xmlns:a="http://schemas.openxmlformats.org/drawingml/2006/main">
+            <a:noAutofit/>
+          </a:bodyPr>
+          <a:lstStyle xmlns:a="http://schemas.openxmlformats.org/drawingml/2006/main"/>
+          <a:p xmlns:a="http://schemas.openxmlformats.org/drawingml/2006/main">
+            <a:pPr>
+              <a:buNone/>
+              <a:defRPr sz="1200" b="1">
+                <a:solidFill>
+                  <a:srgbClr val="E7A048"/>
+                </a:solidFill>
+                <a:latin typeface="Arial"/>
+                <a:ea typeface="Arial"/>
+                <a:cs typeface="Arial"/>
+              </a:defRPr>
+            </a:pPr>
+            <a:r>
+              <a:rPr sz="1200" b="1">
+                <a:solidFill>
+                  <a:srgbClr val="E7A048"/>
+                </a:solidFill>
+                <a:latin typeface="Arial"/>
+                <a:ea typeface="Arial"/>
+                <a:cs typeface="Arial"/>
+              </a:rPr>
+              <a:t>05</a:t>
+            </a:r>
+          </a:p>
+        </p:txBody>
+      </p:sp>
+      <p:sp>
+        <p:nvSpPr>
+          <p:cNvPr id="29" name="">
+            <a:extLst xmlns:a="http://schemas.openxmlformats.org/drawingml/2006/main">
+              <a:ext uri="{FF2B5EF4-FFF2-40B4-BE49-F238E27FC236}">
+                <a16:creationId xmlns:a16="http://schemas.microsoft.com/office/drawing/2014/main" id="{7F14BA99-94B4-45A6-812D-B2F72A20651D}"/>
+              </a:ext>
+            </a:extLst>
+          </p:cNvPr>
+          <p:cNvSpPr>
+            <a:spLocks xmlns:a="http://schemas.openxmlformats.org/drawingml/2006/main" noGrp="1"/>
+          </p:cNvSpPr>
+          <p:nvPr/>
+        </p:nvSpPr>
+        <p:spPr>
+          <a:xfrm xmlns:a="http://schemas.openxmlformats.org/drawingml/2006/main">
+            <a:off x="9810750" y="428625"/>
+            <a:ext cx="1695450" cy="190500"/>
+          </a:xfrm>
+          <a:prstGeom xmlns:a="http://schemas.openxmlformats.org/drawingml/2006/main" prst="rect">
+            <a:avLst/>
+          </a:prstGeom>
+          <a:noFill xmlns:a="http://schemas.openxmlformats.org/drawingml/2006/main"/>
+          <a:ln xmlns:a="http://schemas.openxmlformats.org/drawingml/2006/main" w="0">
+            <a:noFill/>
+          </a:ln>
+        </p:spPr>
+        <p:txBody>
+          <a:bodyPr xmlns:a="http://schemas.openxmlformats.org/drawingml/2006/main">
+            <a:noAutofit/>
+          </a:bodyPr>
+          <a:lstStyle xmlns:a="http://schemas.openxmlformats.org/drawingml/2006/main"/>
+          <a:p xmlns:a="http://schemas.openxmlformats.org/drawingml/2006/main">
+            <a:pPr algn="r">
+              <a:buNone/>
+              <a:defRPr sz="975" b="1">
+                <a:solidFill>
+                  <a:srgbClr val="4656A8"/>
+                </a:solidFill>
+                <a:latin typeface="Arial"/>
+                <a:ea typeface="Arial"/>
+                <a:cs typeface="Arial"/>
+              </a:defRPr>
+            </a:pPr>
+            <a:r>
+              <a:rPr sz="975" b="1">
+                <a:solidFill>
+                  <a:srgbClr val="4656A8"/>
+                </a:solidFill>
+                <a:latin typeface="Arial"/>
+                <a:ea typeface="Arial"/>
+                <a:cs typeface="Arial"/>
+              </a:rPr>
+              <a:t>NETRAJYOTI AI</a:t>
+            </a:r>
+          </a:p>
+        </p:txBody>
+      </p:sp>
+      <p:sp>
+        <p:nvSpPr>
+          <p:cNvPr id="30" name="">
+            <a:extLst xmlns:a="http://schemas.openxmlformats.org/drawingml/2006/main">
+              <a:ext uri="{FF2B5EF4-FFF2-40B4-BE49-F238E27FC236}">
+                <a16:creationId xmlns:a16="http://schemas.microsoft.com/office/drawing/2014/main" id="{01798C12-3B3F-4B5B-BF5C-72A65D2F4F9E}"/>
+              </a:ext>
+            </a:extLst>
+          </p:cNvPr>
+          <p:cNvSpPr>
+            <a:spLocks xmlns:a="http://schemas.openxmlformats.org/drawingml/2006/main" noGrp="1"/>
+          </p:cNvSpPr>
+          <p:nvPr/>
+        </p:nvSpPr>
+        <p:spPr>
+          <a:xfrm xmlns:a="http://schemas.openxmlformats.org/drawingml/2006/main">
+            <a:off x="685800" y="762000"/>
+            <a:ext cx="10287000" cy="457200"/>
+          </a:xfrm>
+          <a:prstGeom xmlns:a="http://schemas.openxmlformats.org/drawingml/2006/main" prst="rect">
+            <a:avLst/>
+          </a:prstGeom>
+          <a:noFill xmlns:a="http://schemas.openxmlformats.org/drawingml/2006/main"/>
+          <a:ln xmlns:a="http://schemas.openxmlformats.org/drawingml/2006/main" w="0">
+            <a:noFill/>
+          </a:ln>
+        </p:spPr>
+        <p:txBody>
+          <a:bodyPr xmlns:a="http://schemas.openxmlformats.org/drawingml/2006/main">
+            <a:noAutofit/>
+          </a:bodyPr>
+          <a:lstStyle xmlns:a="http://schemas.openxmlformats.org/drawingml/2006/main"/>
+          <a:p xmlns:a="http://schemas.openxmlformats.org/drawingml/2006/main">
+            <a:pPr>
+              <a:buNone/>
+              <a:defRPr sz="2550" b="1">
+                <a:solidFill>
+                  <a:srgbClr val="202A44"/>
+                </a:solidFill>
+                <a:latin typeface="Arial"/>
+                <a:ea typeface="Arial"/>
+                <a:cs typeface="Arial"/>
+              </a:defRPr>
+            </a:pPr>
+            <a:r>
+              <a:rPr sz="2550" b="1">
+                <a:solidFill>
+                  <a:srgbClr val="202A44"/>
+                </a:solidFill>
+                <a:latin typeface="Arial"/>
+                <a:ea typeface="Arial"/>
+                <a:cs typeface="Arial"/>
+              </a:rPr>
+              <a:t>User journey</a:t>
+            </a:r>
+          </a:p>
+        </p:txBody>
+      </p:sp>
+      <p:sp>
+        <p:nvSpPr>
+          <p:cNvPr id="31" name="">
+            <a:extLst xmlns:a="http://schemas.openxmlformats.org/drawingml/2006/main">
+              <a:ext uri="{FF2B5EF4-FFF2-40B4-BE49-F238E27FC236}">
+                <a16:creationId xmlns:a16="http://schemas.microsoft.com/office/drawing/2014/main" id="{279575AA-2EE5-46D2-8553-92687C027905}"/>
+              </a:ext>
+            </a:extLst>
+          </p:cNvPr>
+          <p:cNvSpPr>
+            <a:spLocks xmlns:a="http://schemas.openxmlformats.org/drawingml/2006/main" noGrp="1"/>
+          </p:cNvSpPr>
+          <p:nvPr/>
+        </p:nvSpPr>
+        <p:spPr>
+          <a:xfrm xmlns:a="http://schemas.openxmlformats.org/drawingml/2006/main">
+            <a:off x="704850" y="1343025"/>
+            <a:ext cx="10287000" cy="266700"/>
+          </a:xfrm>
+          <a:prstGeom xmlns:a="http://schemas.openxmlformats.org/drawingml/2006/main" prst="rect">
+            <a:avLst/>
+          </a:prstGeom>
+          <a:noFill xmlns:a="http://schemas.openxmlformats.org/drawingml/2006/main"/>
+          <a:ln xmlns:a="http://schemas.openxmlformats.org/drawingml/2006/main" w="0">
+            <a:noFill/>
+          </a:ln>
+        </p:spPr>
+        <p:txBody>
+          <a:bodyPr xmlns:a="http://schemas.openxmlformats.org/drawingml/2006/main">
+            <a:noAutofit/>
+          </a:bodyPr>
+          <a:lstStyle xmlns:a="http://schemas.openxmlformats.org/drawingml/2006/main"/>
+          <a:p xmlns:a="http://schemas.openxmlformats.org/drawingml/2006/main">
+            <a:pPr>
+              <a:buNone/>
+              <a:defRPr sz="1275">
+                <a:solidFill>
+                  <a:srgbClr val="56647A"/>
+                </a:solidFill>
+                <a:latin typeface="Arial"/>
+                <a:ea typeface="Arial"/>
+                <a:cs typeface="Arial"/>
+              </a:defRPr>
+            </a:pPr>
+            <a:r>
+              <a:rPr sz="1275">
+                <a:solidFill>
+                  <a:srgbClr val="56647A"/>
+                </a:solidFill>
+                <a:latin typeface="Arial"/>
+                <a:ea typeface="Arial"/>
+                <a:cs typeface="Arial"/>
+              </a:rPr>
+              <a:t>A single Bengali-first flow moves the user from consent to a clear next action</a:t>
+            </a:r>
+          </a:p>
+        </p:txBody>
+      </p:sp>
+      <p:sp>
+        <p:nvSpPr>
+          <p:cNvPr id="32" name="">
+            <a:extLst xmlns:a="http://schemas.openxmlformats.org/drawingml/2006/main">
+              <a:ext uri="{FF2B5EF4-FFF2-40B4-BE49-F238E27FC236}">
+                <a16:creationId xmlns:a16="http://schemas.microsoft.com/office/drawing/2014/main" id="{A9EBF57E-7760-4F46-A9B0-F3DC8876327C}"/>
+              </a:ext>
+            </a:extLst>
+          </p:cNvPr>
+          <p:cNvSpPr>
+            <a:spLocks xmlns:a="http://schemas.openxmlformats.org/drawingml/2006/main" noGrp="1"/>
+          </p:cNvSpPr>
+          <p:nvPr/>
+        </p:nvSpPr>
+        <p:spPr>
+          <a:xfrm xmlns:a="http://schemas.openxmlformats.org/drawingml/2006/main">
+            <a:off x="685800" y="1752600"/>
+            <a:ext cx="10820400" cy="19050"/>
+          </a:xfrm>
+          <a:prstGeom xmlns:a="http://schemas.openxmlformats.org/drawingml/2006/main" prst="rect">
+            <a:avLst/>
+          </a:prstGeom>
+          <a:solidFill xmlns:a="http://schemas.openxmlformats.org/drawingml/2006/main">
+            <a:srgbClr val="D7D0C7"/>
+          </a:solidFill>
+          <a:ln xmlns:a="http://schemas.openxmlformats.org/drawingml/2006/main" w="0">
+            <a:noFill/>
+          </a:ln>
+        </p:spPr>
+      </p:sp>
+      <p:sp>
+        <p:nvSpPr>
+          <p:cNvPr id="33" name="">
+            <a:extLst xmlns:a="http://schemas.openxmlformats.org/drawingml/2006/main">
+              <a:ext uri="{FF2B5EF4-FFF2-40B4-BE49-F238E27FC236}">
+                <a16:creationId xmlns:a16="http://schemas.microsoft.com/office/drawing/2014/main" id="{B04BFB26-CDAD-490E-82ED-3716C6077E25}"/>
+              </a:ext>
+            </a:extLst>
+          </p:cNvPr>
+          <p:cNvSpPr>
+            <a:spLocks xmlns:a="http://schemas.openxmlformats.org/drawingml/2006/main" noGrp="1"/>
+          </p:cNvSpPr>
+          <p:nvPr/>
+        </p:nvSpPr>
+        <p:spPr>
+          <a:xfrm xmlns:a="http://schemas.openxmlformats.org/drawingml/2006/main">
+            <a:off x="1095375" y="3486150"/>
+            <a:ext cx="9620250" cy="38100"/>
+          </a:xfrm>
+          <a:prstGeom xmlns:a="http://schemas.openxmlformats.org/drawingml/2006/main" prst="rect">
+            <a:avLst/>
+          </a:prstGeom>
+          <a:solidFill xmlns:a="http://schemas.openxmlformats.org/drawingml/2006/main">
+            <a:srgbClr val="4656A8"/>
+          </a:solidFill>
+          <a:ln xmlns:a="http://schemas.openxmlformats.org/drawingml/2006/main" w="0">
+            <a:noFill/>
+          </a:ln>
+        </p:spPr>
+      </p:sp>
+      <p:sp>
+        <p:nvSpPr>
+          <p:cNvPr id="34" name="">
+            <a:extLst xmlns:a="http://schemas.openxmlformats.org/drawingml/2006/main">
+              <a:ext uri="{FF2B5EF4-FFF2-40B4-BE49-F238E27FC236}">
+                <a16:creationId xmlns:a16="http://schemas.microsoft.com/office/drawing/2014/main" id="{DE5589C0-2873-4E35-93B6-0D035BB4D979}"/>
+              </a:ext>
+            </a:extLst>
+          </p:cNvPr>
+          <p:cNvSpPr>
+            <a:spLocks xmlns:a="http://schemas.openxmlformats.org/drawingml/2006/main" noGrp="1"/>
+          </p:cNvSpPr>
+          <p:nvPr/>
+        </p:nvSpPr>
+        <p:spPr>
+          <a:xfrm xmlns:a="http://schemas.openxmlformats.org/drawingml/2006/main">
+            <a:off x="1047750" y="3238500"/>
+            <a:ext cx="495300" cy="495300"/>
+          </a:xfrm>
+          <a:prstGeom xmlns:a="http://schemas.openxmlformats.org/drawingml/2006/main" prst="ellipse">
+            <a:avLst/>
+          </a:prstGeom>
+          <a:solidFill xmlns:a="http://schemas.openxmlformats.org/drawingml/2006/main">
+            <a:srgbClr val="237A7A"/>
+          </a:solidFill>
+          <a:ln xmlns:a="http://schemas.openxmlformats.org/drawingml/2006/main" w="0">
+            <a:noFill/>
+          </a:ln>
+        </p:spPr>
+      </p:sp>
+      <p:sp>
+        <p:nvSpPr>
+          <p:cNvPr id="35" name="">
+            <a:extLst xmlns:a="http://schemas.openxmlformats.org/drawingml/2006/main">
+              <a:ext uri="{FF2B5EF4-FFF2-40B4-BE49-F238E27FC236}">
+                <a16:creationId xmlns:a16="http://schemas.microsoft.com/office/drawing/2014/main" id="{1D3BF33D-F61E-4918-9B00-6FE07D20D5DE}"/>
+              </a:ext>
+            </a:extLst>
+          </p:cNvPr>
+          <p:cNvSpPr>
+            <a:spLocks xmlns:a="http://schemas.openxmlformats.org/drawingml/2006/main" noGrp="1"/>
+          </p:cNvSpPr>
+          <p:nvPr/>
+        </p:nvSpPr>
+        <p:spPr>
+          <a:xfrm xmlns:a="http://schemas.openxmlformats.org/drawingml/2006/main">
+            <a:off x="1047750" y="3362325"/>
+            <a:ext cx="495300" cy="190500"/>
+          </a:xfrm>
+          <a:prstGeom xmlns:a="http://schemas.openxmlformats.org/drawingml/2006/main" prst="rect">
+            <a:avLst/>
+          </a:prstGeom>
+          <a:noFill xmlns:a="http://schemas.openxmlformats.org/drawingml/2006/main"/>
+          <a:ln xmlns:a="http://schemas.openxmlformats.org/drawingml/2006/main" w="0">
+            <a:noFill/>
+          </a:ln>
+        </p:spPr>
+        <p:txBody>
+          <a:bodyPr xmlns:a="http://schemas.openxmlformats.org/drawingml/2006/main">
+            <a:noAutofit/>
+          </a:bodyPr>
+          <a:lstStyle xmlns:a="http://schemas.openxmlformats.org/drawingml/2006/main"/>
+          <a:p xmlns:a="http://schemas.openxmlformats.org/drawingml/2006/main">
+            <a:pPr algn="ctr">
+              <a:buNone/>
+              <a:defRPr sz="1425" b="1">
+                <a:solidFill>
+                  <a:srgbClr val="FFFFFF"/>
+                </a:solidFill>
+                <a:latin typeface="Arial"/>
+                <a:ea typeface="Arial"/>
+                <a:cs typeface="Arial"/>
+              </a:defRPr>
+            </a:pPr>
+            <a:r>
+              <a:rPr sz="1425" b="1">
+                <a:solidFill>
+                  <a:srgbClr val="FFFFFF"/>
+                </a:solidFill>
+                <a:latin typeface="Arial"/>
+                <a:ea typeface="Arial"/>
+                <a:cs typeface="Arial"/>
+              </a:rPr>
+              <a:t>1</a:t>
+            </a:r>
+          </a:p>
+        </p:txBody>
+      </p:sp>
+      <p:sp>
+        <p:nvSpPr>
+          <p:cNvPr id="36" name="">
+            <a:extLst xmlns:a="http://schemas.openxmlformats.org/drawingml/2006/main">
+              <a:ext uri="{FF2B5EF4-FFF2-40B4-BE49-F238E27FC236}">
+                <a16:creationId xmlns:a16="http://schemas.microsoft.com/office/drawing/2014/main" id="{09D5ACE1-E941-40AF-99F4-9B8B65213C20}"/>
+              </a:ext>
+            </a:extLst>
+          </p:cNvPr>
+          <p:cNvSpPr>
+            <a:spLocks xmlns:a="http://schemas.openxmlformats.org/drawingml/2006/main" noGrp="1"/>
+          </p:cNvSpPr>
+          <p:nvPr/>
+        </p:nvSpPr>
+        <p:spPr>
+          <a:xfrm xmlns:a="http://schemas.openxmlformats.org/drawingml/2006/main">
+            <a:off x="590550" y="4133850"/>
+            <a:ext cx="1409700" cy="247650"/>
+          </a:xfrm>
+          <a:prstGeom xmlns:a="http://schemas.openxmlformats.org/drawingml/2006/main" prst="rect">
+            <a:avLst/>
+          </a:prstGeom>
+          <a:noFill xmlns:a="http://schemas.openxmlformats.org/drawingml/2006/main"/>
+          <a:ln xmlns:a="http://schemas.openxmlformats.org/drawingml/2006/main" w="0">
+            <a:noFill/>
+          </a:ln>
+        </p:spPr>
+        <p:txBody>
+          <a:bodyPr xmlns:a="http://schemas.openxmlformats.org/drawingml/2006/main">
+            <a:noAutofit/>
+          </a:bodyPr>
+          <a:lstStyle xmlns:a="http://schemas.openxmlformats.org/drawingml/2006/main"/>
+          <a:p xmlns:a="http://schemas.openxmlformats.org/drawingml/2006/main">
+            <a:pPr algn="ctr">
+              <a:buNone/>
+              <a:defRPr sz="1350" b="1">
+                <a:solidFill>
+                  <a:srgbClr val="202A44"/>
+                </a:solidFill>
+                <a:latin typeface="Arial"/>
+                <a:ea typeface="Arial"/>
+                <a:cs typeface="Arial"/>
+              </a:defRPr>
+            </a:pPr>
+            <a:r>
+              <a:rPr sz="1350" b="1">
+                <a:solidFill>
+                  <a:srgbClr val="202A44"/>
+                </a:solidFill>
+                <a:latin typeface="Arial"/>
+                <a:ea typeface="Arial"/>
+                <a:cs typeface="Arial"/>
+              </a:rPr>
+              <a:t>Consent</a:t>
+            </a:r>
+          </a:p>
+        </p:txBody>
+      </p:sp>
+      <p:sp>
+        <p:nvSpPr>
+          <p:cNvPr id="37" name="">
+            <a:extLst xmlns:a="http://schemas.openxmlformats.org/drawingml/2006/main">
+              <a:ext uri="{FF2B5EF4-FFF2-40B4-BE49-F238E27FC236}">
+                <a16:creationId xmlns:a16="http://schemas.microsoft.com/office/drawing/2014/main" id="{738B27AC-2F7A-4E2A-92EE-CB3697C7BE24}"/>
+              </a:ext>
+            </a:extLst>
+          </p:cNvPr>
+          <p:cNvSpPr>
+            <a:spLocks xmlns:a="http://schemas.openxmlformats.org/drawingml/2006/main" noGrp="1"/>
+          </p:cNvSpPr>
+          <p:nvPr/>
+        </p:nvSpPr>
+        <p:spPr>
+          <a:xfrm xmlns:a="http://schemas.openxmlformats.org/drawingml/2006/main">
+            <a:off x="533400" y="4495800"/>
+            <a:ext cx="1524000" cy="419100"/>
+          </a:xfrm>
+          <a:prstGeom xmlns:a="http://schemas.openxmlformats.org/drawingml/2006/main" prst="rect">
+            <a:avLst/>
+          </a:prstGeom>
+          <a:noFill xmlns:a="http://schemas.openxmlformats.org/drawingml/2006/main"/>
+          <a:ln xmlns:a="http://schemas.openxmlformats.org/drawingml/2006/main" w="0">
+            <a:noFill/>
+          </a:ln>
+        </p:spPr>
+        <p:txBody>
+          <a:bodyPr xmlns:a="http://schemas.openxmlformats.org/drawingml/2006/main">
+            <a:noAutofit/>
+          </a:bodyPr>
+          <a:lstStyle xmlns:a="http://schemas.openxmlformats.org/drawingml/2006/main"/>
+          <a:p xmlns:a="http://schemas.openxmlformats.org/drawingml/2006/main">
+            <a:pPr algn="ctr">
+              <a:buNone/>
+              <a:defRPr sz="1050">
+                <a:solidFill>
+                  <a:srgbClr val="56647A"/>
+                </a:solidFill>
+                <a:latin typeface="Arial"/>
+                <a:ea typeface="Arial"/>
+                <a:cs typeface="Arial"/>
+              </a:defRPr>
+            </a:pPr>
+            <a:r>
+              <a:rPr sz="1050">
+                <a:solidFill>
+                  <a:srgbClr val="56647A"/>
+                </a:solidFill>
+                <a:latin typeface="Arial"/>
+                <a:ea typeface="Arial"/>
+                <a:cs typeface="Arial"/>
+              </a:rPr>
+              <a:t>Clear purpose</a:t>
+            </a:r>
+          </a:p>
+          <a:p xmlns:a="http://schemas.openxmlformats.org/drawingml/2006/main">
+            <a:pPr algn="ctr">
+              <a:buNone/>
+              <a:defRPr sz="1050">
+                <a:solidFill>
+                  <a:srgbClr val="56647A"/>
+                </a:solidFill>
+                <a:latin typeface="Arial"/>
+                <a:ea typeface="Arial"/>
+                <a:cs typeface="Arial"/>
+              </a:defRPr>
+            </a:pPr>
+            <a:r>
+              <a:rPr sz="1050">
+                <a:solidFill>
+                  <a:srgbClr val="56647A"/>
+                </a:solidFill>
+                <a:latin typeface="Arial"/>
+                <a:ea typeface="Arial"/>
+                <a:cs typeface="Arial"/>
+              </a:rPr>
+              <a:t>and data choice</a:t>
+            </a:r>
+          </a:p>
+        </p:txBody>
+      </p:sp>
+      <p:sp>
+        <p:nvSpPr>
+          <p:cNvPr id="38" name="">
+            <a:extLst xmlns:a="http://schemas.openxmlformats.org/drawingml/2006/main">
+              <a:ext uri="{FF2B5EF4-FFF2-40B4-BE49-F238E27FC236}">
+                <a16:creationId xmlns:a16="http://schemas.microsoft.com/office/drawing/2014/main" id="{3E619982-382F-4AC7-85E2-409E700E892A}"/>
+              </a:ext>
+            </a:extLst>
+          </p:cNvPr>
+          <p:cNvSpPr>
+            <a:spLocks xmlns:a="http://schemas.openxmlformats.org/drawingml/2006/main" noGrp="1"/>
+          </p:cNvSpPr>
+          <p:nvPr/>
+        </p:nvSpPr>
+        <p:spPr>
+          <a:xfrm xmlns:a="http://schemas.openxmlformats.org/drawingml/2006/main">
+            <a:off x="2019300" y="3400425"/>
+            <a:ext cx="361950" cy="171450"/>
+          </a:xfrm>
+          <a:prstGeom xmlns:a="http://schemas.openxmlformats.org/drawingml/2006/main" prst="rightArrow">
+            <a:avLst/>
+          </a:prstGeom>
+          <a:solidFill xmlns:a="http://schemas.openxmlformats.org/drawingml/2006/main">
+            <a:srgbClr val="4656A8"/>
+          </a:solidFill>
+          <a:ln xmlns:a="http://schemas.openxmlformats.org/drawingml/2006/main" w="0">
+            <a:noFill/>
+          </a:ln>
+        </p:spPr>
+      </p:sp>
+      <p:sp>
+        <p:nvSpPr>
+          <p:cNvPr id="39" name="">
+            <a:extLst xmlns:a="http://schemas.openxmlformats.org/drawingml/2006/main">
+              <a:ext uri="{FF2B5EF4-FFF2-40B4-BE49-F238E27FC236}">
+                <a16:creationId xmlns:a16="http://schemas.microsoft.com/office/drawing/2014/main" id="{9798DF25-73D1-4233-9DB2-88D6782889CA}"/>
+              </a:ext>
+            </a:extLst>
+          </p:cNvPr>
+          <p:cNvSpPr>
+            <a:spLocks xmlns:a="http://schemas.openxmlformats.org/drawingml/2006/main" noGrp="1"/>
+          </p:cNvSpPr>
+          <p:nvPr/>
+        </p:nvSpPr>
+        <p:spPr>
+          <a:xfrm xmlns:a="http://schemas.openxmlformats.org/drawingml/2006/main">
+            <a:off x="3095625" y="3238500"/>
+            <a:ext cx="495300" cy="495300"/>
+          </a:xfrm>
+          <a:prstGeom xmlns:a="http://schemas.openxmlformats.org/drawingml/2006/main" prst="ellipse">
+            <a:avLst/>
+          </a:prstGeom>
+          <a:solidFill xmlns:a="http://schemas.openxmlformats.org/drawingml/2006/main">
+            <a:srgbClr val="4656A8"/>
+          </a:solidFill>
+          <a:ln xmlns:a="http://schemas.openxmlformats.org/drawingml/2006/main" w="0">
+            <a:noFill/>
+          </a:ln>
+        </p:spPr>
+      </p:sp>
+      <p:sp>
+        <p:nvSpPr>
+          <p:cNvPr id="40" name="">
+            <a:extLst xmlns:a="http://schemas.openxmlformats.org/drawingml/2006/main">
+              <a:ext uri="{FF2B5EF4-FFF2-40B4-BE49-F238E27FC236}">
+                <a16:creationId xmlns:a16="http://schemas.microsoft.com/office/drawing/2014/main" id="{1AF6A539-75BB-40CA-B008-190D0B750FBD}"/>
+              </a:ext>
+            </a:extLst>
+          </p:cNvPr>
+          <p:cNvSpPr>
+            <a:spLocks xmlns:a="http://schemas.openxmlformats.org/drawingml/2006/main" noGrp="1"/>
+          </p:cNvSpPr>
+          <p:nvPr/>
+        </p:nvSpPr>
+        <p:spPr>
+          <a:xfrm xmlns:a="http://schemas.openxmlformats.org/drawingml/2006/main">
+            <a:off x="3095625" y="3362325"/>
+            <a:ext cx="495300" cy="190500"/>
+          </a:xfrm>
+          <a:prstGeom xmlns:a="http://schemas.openxmlformats.org/drawingml/2006/main" prst="rect">
+            <a:avLst/>
+          </a:prstGeom>
+          <a:noFill xmlns:a="http://schemas.openxmlformats.org/drawingml/2006/main"/>
+          <a:ln xmlns:a="http://schemas.openxmlformats.org/drawingml/2006/main" w="0">
+            <a:noFill/>
+          </a:ln>
+        </p:spPr>
+        <p:txBody>
+          <a:bodyPr xmlns:a="http://schemas.openxmlformats.org/drawingml/2006/main">
+            <a:noAutofit/>
+          </a:bodyPr>
+          <a:lstStyle xmlns:a="http://schemas.openxmlformats.org/drawingml/2006/main"/>
+          <a:p xmlns:a="http://schemas.openxmlformats.org/drawingml/2006/main">
+            <a:pPr algn="ctr">
+              <a:buNone/>
+              <a:defRPr sz="1425" b="1">
+                <a:solidFill>
+                  <a:srgbClr val="FFFFFF"/>
+                </a:solidFill>
+                <a:latin typeface="Arial"/>
+                <a:ea typeface="Arial"/>
+                <a:cs typeface="Arial"/>
+              </a:defRPr>
+            </a:pPr>
+            <a:r>
+              <a:rPr sz="1425" b="1">
+                <a:solidFill>
+                  <a:srgbClr val="FFFFFF"/>
+                </a:solidFill>
+                <a:latin typeface="Arial"/>
+                <a:ea typeface="Arial"/>
+                <a:cs typeface="Arial"/>
+              </a:rPr>
+              <a:t>2</a:t>
+            </a:r>
+          </a:p>
+        </p:txBody>
+      </p:sp>
+      <p:sp>
+        <p:nvSpPr>
+          <p:cNvPr id="41" name="">
+            <a:extLst xmlns:a="http://schemas.openxmlformats.org/drawingml/2006/main">
+              <a:ext uri="{FF2B5EF4-FFF2-40B4-BE49-F238E27FC236}">
+                <a16:creationId xmlns:a16="http://schemas.microsoft.com/office/drawing/2014/main" id="{A4254C37-CE41-475B-877E-1996DDF73A7E}"/>
+              </a:ext>
+            </a:extLst>
+          </p:cNvPr>
+          <p:cNvSpPr>
+            <a:spLocks xmlns:a="http://schemas.openxmlformats.org/drawingml/2006/main" noGrp="1"/>
+          </p:cNvSpPr>
+          <p:nvPr/>
+        </p:nvSpPr>
+        <p:spPr>
+          <a:xfrm xmlns:a="http://schemas.openxmlformats.org/drawingml/2006/main">
+            <a:off x="2638425" y="4133850"/>
+            <a:ext cx="1409700" cy="247650"/>
+          </a:xfrm>
+          <a:prstGeom xmlns:a="http://schemas.openxmlformats.org/drawingml/2006/main" prst="rect">
+            <a:avLst/>
+          </a:prstGeom>
+          <a:noFill xmlns:a="http://schemas.openxmlformats.org/drawingml/2006/main"/>
+          <a:ln xmlns:a="http://schemas.openxmlformats.org/drawingml/2006/main" w="0">
+            <a:noFill/>
+          </a:ln>
+        </p:spPr>
+        <p:txBody>
+          <a:bodyPr xmlns:a="http://schemas.openxmlformats.org/drawingml/2006/main">
+            <a:noAutofit/>
+          </a:bodyPr>
+          <a:lstStyle xmlns:a="http://schemas.openxmlformats.org/drawingml/2006/main"/>
+          <a:p xmlns:a="http://schemas.openxmlformats.org/drawingml/2006/main">
+            <a:pPr algn="ctr">
+              <a:buNone/>
+              <a:defRPr sz="1350" b="1">
+                <a:solidFill>
+                  <a:srgbClr val="202A44"/>
+                </a:solidFill>
+                <a:latin typeface="Arial"/>
+                <a:ea typeface="Arial"/>
+                <a:cs typeface="Arial"/>
+              </a:defRPr>
+            </a:pPr>
+            <a:r>
+              <a:rPr sz="1350" b="1">
+                <a:solidFill>
+                  <a:srgbClr val="202A44"/>
+                </a:solidFill>
+                <a:latin typeface="Arial"/>
+                <a:ea typeface="Arial"/>
+                <a:cs typeface="Arial"/>
+              </a:rPr>
+              <a:t>Symptoms</a:t>
+            </a:r>
+          </a:p>
+        </p:txBody>
+      </p:sp>
+      <p:sp>
+        <p:nvSpPr>
+          <p:cNvPr id="42" name="">
+            <a:extLst xmlns:a="http://schemas.openxmlformats.org/drawingml/2006/main">
+              <a:ext uri="{FF2B5EF4-FFF2-40B4-BE49-F238E27FC236}">
+                <a16:creationId xmlns:a16="http://schemas.microsoft.com/office/drawing/2014/main" id="{F1A4F89A-F698-4FE6-A19E-9DA6B538CEF4}"/>
+              </a:ext>
+            </a:extLst>
+          </p:cNvPr>
+          <p:cNvSpPr>
+            <a:spLocks xmlns:a="http://schemas.openxmlformats.org/drawingml/2006/main" noGrp="1"/>
+          </p:cNvSpPr>
+          <p:nvPr/>
+        </p:nvSpPr>
+        <p:spPr>
+          <a:xfrm xmlns:a="http://schemas.openxmlformats.org/drawingml/2006/main">
+            <a:off x="2581275" y="4495800"/>
+            <a:ext cx="1524000" cy="419100"/>
+          </a:xfrm>
+          <a:prstGeom xmlns:a="http://schemas.openxmlformats.org/drawingml/2006/main" prst="rect">
+            <a:avLst/>
+          </a:prstGeom>
+          <a:noFill xmlns:a="http://schemas.openxmlformats.org/drawingml/2006/main"/>
+          <a:ln xmlns:a="http://schemas.openxmlformats.org/drawingml/2006/main" w="0">
+            <a:noFill/>
+          </a:ln>
+        </p:spPr>
+        <p:txBody>
+          <a:bodyPr xmlns:a="http://schemas.openxmlformats.org/drawingml/2006/main">
+            <a:noAutofit/>
+          </a:bodyPr>
+          <a:lstStyle xmlns:a="http://schemas.openxmlformats.org/drawingml/2006/main"/>
+          <a:p xmlns:a="http://schemas.openxmlformats.org/drawingml/2006/main">
+            <a:pPr algn="ctr">
+              <a:buNone/>
+              <a:defRPr sz="1050">
+                <a:solidFill>
+                  <a:srgbClr val="56647A"/>
+                </a:solidFill>
+                <a:latin typeface="Arial"/>
+                <a:ea typeface="Arial"/>
+                <a:cs typeface="Arial"/>
+              </a:defRPr>
+            </a:pPr>
+            <a:r>
+              <a:rPr sz="1050">
+                <a:solidFill>
+                  <a:srgbClr val="56647A"/>
+                </a:solidFill>
+                <a:latin typeface="Arial"/>
+                <a:ea typeface="Arial"/>
+                <a:cs typeface="Arial"/>
+              </a:rPr>
+              <a:t>Fixed Bengali options</a:t>
+            </a:r>
+          </a:p>
+          <a:p xmlns:a="http://schemas.openxmlformats.org/drawingml/2006/main">
+            <a:pPr algn="ctr">
+              <a:buNone/>
+              <a:defRPr sz="1050">
+                <a:solidFill>
+                  <a:srgbClr val="56647A"/>
+                </a:solidFill>
+                <a:latin typeface="Arial"/>
+                <a:ea typeface="Arial"/>
+                <a:cs typeface="Arial"/>
+              </a:defRPr>
+            </a:pPr>
+            <a:r>
+              <a:rPr sz="1050">
+                <a:solidFill>
+                  <a:srgbClr val="56647A"/>
+                </a:solidFill>
+                <a:latin typeface="Arial"/>
+                <a:ea typeface="Arial"/>
+                <a:cs typeface="Arial"/>
+              </a:rPr>
+              <a:t>or voice input</a:t>
+            </a:r>
+          </a:p>
+        </p:txBody>
+      </p:sp>
+      <p:sp>
+        <p:nvSpPr>
+          <p:cNvPr id="43" name="">
+            <a:extLst xmlns:a="http://schemas.openxmlformats.org/drawingml/2006/main">
+              <a:ext uri="{FF2B5EF4-FFF2-40B4-BE49-F238E27FC236}">
+                <a16:creationId xmlns:a16="http://schemas.microsoft.com/office/drawing/2014/main" id="{B19A865A-541C-4993-ABFA-1EAC0A37396A}"/>
+              </a:ext>
+            </a:extLst>
+          </p:cNvPr>
+          <p:cNvSpPr>
+            <a:spLocks xmlns:a="http://schemas.openxmlformats.org/drawingml/2006/main" noGrp="1"/>
+          </p:cNvSpPr>
+          <p:nvPr/>
+        </p:nvSpPr>
+        <p:spPr>
+          <a:xfrm xmlns:a="http://schemas.openxmlformats.org/drawingml/2006/main">
+            <a:off x="4067175" y="3400425"/>
+            <a:ext cx="361950" cy="171450"/>
+          </a:xfrm>
+          <a:prstGeom xmlns:a="http://schemas.openxmlformats.org/drawingml/2006/main" prst="rightArrow">
+            <a:avLst/>
+          </a:prstGeom>
+          <a:solidFill xmlns:a="http://schemas.openxmlformats.org/drawingml/2006/main">
+            <a:srgbClr val="4656A8"/>
+          </a:solidFill>
+          <a:ln xmlns:a="http://schemas.openxmlformats.org/drawingml/2006/main" w="0">
+            <a:noFill/>
+          </a:ln>
+        </p:spPr>
+      </p:sp>
+      <p:sp>
+        <p:nvSpPr>
+          <p:cNvPr id="44" name="">
+            <a:extLst xmlns:a="http://schemas.openxmlformats.org/drawingml/2006/main">
+              <a:ext uri="{FF2B5EF4-FFF2-40B4-BE49-F238E27FC236}">
+                <a16:creationId xmlns:a16="http://schemas.microsoft.com/office/drawing/2014/main" id="{83520088-BFE2-40EB-8383-3664B5EFB891}"/>
+              </a:ext>
+            </a:extLst>
+          </p:cNvPr>
+          <p:cNvSpPr>
+            <a:spLocks xmlns:a="http://schemas.openxmlformats.org/drawingml/2006/main" noGrp="1"/>
+          </p:cNvSpPr>
+          <p:nvPr/>
+        </p:nvSpPr>
+        <p:spPr>
+          <a:xfrm xmlns:a="http://schemas.openxmlformats.org/drawingml/2006/main">
+            <a:off x="5143500" y="3238500"/>
+            <a:ext cx="495300" cy="495300"/>
+          </a:xfrm>
+          <a:prstGeom xmlns:a="http://schemas.openxmlformats.org/drawingml/2006/main" prst="ellipse">
+            <a:avLst/>
+          </a:prstGeom>
+          <a:solidFill xmlns:a="http://schemas.openxmlformats.org/drawingml/2006/main">
+            <a:srgbClr val="DE664C"/>
+          </a:solidFill>
+          <a:ln xmlns:a="http://schemas.openxmlformats.org/drawingml/2006/main" w="0">
+            <a:noFill/>
+          </a:ln>
+        </p:spPr>
+      </p:sp>
+      <p:sp>
+        <p:nvSpPr>
+          <p:cNvPr id="45" name="">
+            <a:extLst xmlns:a="http://schemas.openxmlformats.org/drawingml/2006/main">
+              <a:ext uri="{FF2B5EF4-FFF2-40B4-BE49-F238E27FC236}">
+                <a16:creationId xmlns:a16="http://schemas.microsoft.com/office/drawing/2014/main" id="{513437FD-F6B7-40D1-A912-BF4CE47437A6}"/>
+              </a:ext>
+            </a:extLst>
+          </p:cNvPr>
+          <p:cNvSpPr>
+            <a:spLocks xmlns:a="http://schemas.openxmlformats.org/drawingml/2006/main" noGrp="1"/>
+          </p:cNvSpPr>
+          <p:nvPr/>
+        </p:nvSpPr>
+        <p:spPr>
+          <a:xfrm xmlns:a="http://schemas.openxmlformats.org/drawingml/2006/main">
+            <a:off x="5143500" y="3362325"/>
+            <a:ext cx="495300" cy="190500"/>
+          </a:xfrm>
+          <a:prstGeom xmlns:a="http://schemas.openxmlformats.org/drawingml/2006/main" prst="rect">
+            <a:avLst/>
+          </a:prstGeom>
+          <a:noFill xmlns:a="http://schemas.openxmlformats.org/drawingml/2006/main"/>
+          <a:ln xmlns:a="http://schemas.openxmlformats.org/drawingml/2006/main" w="0">
+            <a:noFill/>
+          </a:ln>
+        </p:spPr>
+        <p:txBody>
+          <a:bodyPr xmlns:a="http://schemas.openxmlformats.org/drawingml/2006/main">
+            <a:noAutofit/>
+          </a:bodyPr>
+          <a:lstStyle xmlns:a="http://schemas.openxmlformats.org/drawingml/2006/main"/>
+          <a:p xmlns:a="http://schemas.openxmlformats.org/drawingml/2006/main">
+            <a:pPr algn="ctr">
+              <a:buNone/>
+              <a:defRPr sz="1425" b="1">
+                <a:solidFill>
+                  <a:srgbClr val="FFFFFF"/>
+                </a:solidFill>
+                <a:latin typeface="Arial"/>
+                <a:ea typeface="Arial"/>
+                <a:cs typeface="Arial"/>
+              </a:defRPr>
+            </a:pPr>
+            <a:r>
+              <a:rPr sz="1425" b="1">
+                <a:solidFill>
+                  <a:srgbClr val="FFFFFF"/>
+                </a:solidFill>
+                <a:latin typeface="Arial"/>
+                <a:ea typeface="Arial"/>
+                <a:cs typeface="Arial"/>
+              </a:rPr>
+              <a:t>3</a:t>
+            </a:r>
+          </a:p>
+        </p:txBody>
+      </p:sp>
+      <p:sp>
+        <p:nvSpPr>
+          <p:cNvPr id="46" name="">
+            <a:extLst xmlns:a="http://schemas.openxmlformats.org/drawingml/2006/main">
+              <a:ext uri="{FF2B5EF4-FFF2-40B4-BE49-F238E27FC236}">
+                <a16:creationId xmlns:a16="http://schemas.microsoft.com/office/drawing/2014/main" id="{CBAC1890-AB61-4E74-A091-58EC4BB4CEBE}"/>
+              </a:ext>
+            </a:extLst>
+          </p:cNvPr>
+          <p:cNvSpPr>
+            <a:spLocks xmlns:a="http://schemas.openxmlformats.org/drawingml/2006/main" noGrp="1"/>
+          </p:cNvSpPr>
+          <p:nvPr/>
+        </p:nvSpPr>
+        <p:spPr>
+          <a:xfrm xmlns:a="http://schemas.openxmlformats.org/drawingml/2006/main">
+            <a:off x="4686300" y="4133850"/>
+            <a:ext cx="1409700" cy="247650"/>
+          </a:xfrm>
+          <a:prstGeom xmlns:a="http://schemas.openxmlformats.org/drawingml/2006/main" prst="rect">
+            <a:avLst/>
+          </a:prstGeom>
+          <a:noFill xmlns:a="http://schemas.openxmlformats.org/drawingml/2006/main"/>
+          <a:ln xmlns:a="http://schemas.openxmlformats.org/drawingml/2006/main" w="0">
+            <a:noFill/>
+          </a:ln>
+        </p:spPr>
+        <p:txBody>
+          <a:bodyPr xmlns:a="http://schemas.openxmlformats.org/drawingml/2006/main">
+            <a:noAutofit/>
+          </a:bodyPr>
+          <a:lstStyle xmlns:a="http://schemas.openxmlformats.org/drawingml/2006/main"/>
+          <a:p xmlns:a="http://schemas.openxmlformats.org/drawingml/2006/main">
+            <a:pPr algn="ctr">
+              <a:buNone/>
+              <a:defRPr sz="1350" b="1">
+                <a:solidFill>
+                  <a:srgbClr val="202A44"/>
+                </a:solidFill>
+                <a:latin typeface="Arial"/>
+                <a:ea typeface="Arial"/>
+                <a:cs typeface="Arial"/>
+              </a:defRPr>
+            </a:pPr>
+            <a:r>
+              <a:rPr sz="1350" b="1">
+                <a:solidFill>
+                  <a:srgbClr val="202A44"/>
+                </a:solidFill>
+                <a:latin typeface="Arial"/>
+                <a:ea typeface="Arial"/>
+                <a:cs typeface="Arial"/>
+              </a:rPr>
+              <a:t>Safety check</a:t>
+            </a:r>
+          </a:p>
+        </p:txBody>
+      </p:sp>
+      <p:sp>
+        <p:nvSpPr>
+          <p:cNvPr id="47" name="">
+            <a:extLst xmlns:a="http://schemas.openxmlformats.org/drawingml/2006/main">
+              <a:ext uri="{FF2B5EF4-FFF2-40B4-BE49-F238E27FC236}">
+                <a16:creationId xmlns:a16="http://schemas.microsoft.com/office/drawing/2014/main" id="{B1855DC1-0B1C-48AF-8B2C-C2805BCDFCCB}"/>
+              </a:ext>
+            </a:extLst>
+          </p:cNvPr>
+          <p:cNvSpPr>
+            <a:spLocks xmlns:a="http://schemas.openxmlformats.org/drawingml/2006/main" noGrp="1"/>
+          </p:cNvSpPr>
+          <p:nvPr/>
+        </p:nvSpPr>
+        <p:spPr>
+          <a:xfrm xmlns:a="http://schemas.openxmlformats.org/drawingml/2006/main">
+            <a:off x="4629150" y="4495800"/>
+            <a:ext cx="1524000" cy="419100"/>
+          </a:xfrm>
+          <a:prstGeom xmlns:a="http://schemas.openxmlformats.org/drawingml/2006/main" prst="rect">
+            <a:avLst/>
+          </a:prstGeom>
+          <a:noFill xmlns:a="http://schemas.openxmlformats.org/drawingml/2006/main"/>
+          <a:ln xmlns:a="http://schemas.openxmlformats.org/drawingml/2006/main" w="0">
+            <a:noFill/>
+          </a:ln>
+        </p:spPr>
+        <p:txBody>
+          <a:bodyPr xmlns:a="http://schemas.openxmlformats.org/drawingml/2006/main">
+            <a:noAutofit/>
+          </a:bodyPr>
+          <a:lstStyle xmlns:a="http://schemas.openxmlformats.org/drawingml/2006/main"/>
+          <a:p xmlns:a="http://schemas.openxmlformats.org/drawingml/2006/main">
+            <a:pPr algn="ctr">
+              <a:buNone/>
+              <a:defRPr sz="1050">
+                <a:solidFill>
+                  <a:srgbClr val="56647A"/>
+                </a:solidFill>
+                <a:latin typeface="Arial"/>
+                <a:ea typeface="Arial"/>
+                <a:cs typeface="Arial"/>
+              </a:defRPr>
+            </a:pPr>
+            <a:r>
+              <a:rPr sz="1050">
+                <a:solidFill>
+                  <a:srgbClr val="56647A"/>
+                </a:solidFill>
+                <a:latin typeface="Arial"/>
+                <a:ea typeface="Arial"/>
+                <a:cs typeface="Arial"/>
+              </a:rPr>
+              <a:t>Urgent signs</a:t>
+            </a:r>
+          </a:p>
+          <a:p xmlns:a="http://schemas.openxmlformats.org/drawingml/2006/main">
+            <a:pPr algn="ctr">
+              <a:buNone/>
+              <a:defRPr sz="1050">
+                <a:solidFill>
+                  <a:srgbClr val="56647A"/>
+                </a:solidFill>
+                <a:latin typeface="Arial"/>
+                <a:ea typeface="Arial"/>
+                <a:cs typeface="Arial"/>
+              </a:defRPr>
+            </a:pPr>
+            <a:r>
+              <a:rPr sz="1050">
+                <a:solidFill>
+                  <a:srgbClr val="56647A"/>
+                </a:solidFill>
+                <a:latin typeface="Arial"/>
+                <a:ea typeface="Arial"/>
+                <a:cs typeface="Arial"/>
+              </a:rPr>
+              <a:t>checked first</a:t>
+            </a:r>
+          </a:p>
+        </p:txBody>
+      </p:sp>
+      <p:sp>
+        <p:nvSpPr>
+          <p:cNvPr id="48" name="">
+            <a:extLst xmlns:a="http://schemas.openxmlformats.org/drawingml/2006/main">
+              <a:ext uri="{FF2B5EF4-FFF2-40B4-BE49-F238E27FC236}">
+                <a16:creationId xmlns:a16="http://schemas.microsoft.com/office/drawing/2014/main" id="{8AB0E81F-7F31-4732-B469-214074A0520A}"/>
+              </a:ext>
+            </a:extLst>
+          </p:cNvPr>
+          <p:cNvSpPr>
+            <a:spLocks xmlns:a="http://schemas.openxmlformats.org/drawingml/2006/main" noGrp="1"/>
+          </p:cNvSpPr>
+          <p:nvPr/>
+        </p:nvSpPr>
+        <p:spPr>
+          <a:xfrm xmlns:a="http://schemas.openxmlformats.org/drawingml/2006/main">
+            <a:off x="6115050" y="3400425"/>
+            <a:ext cx="361950" cy="171450"/>
+          </a:xfrm>
+          <a:prstGeom xmlns:a="http://schemas.openxmlformats.org/drawingml/2006/main" prst="rightArrow">
+            <a:avLst/>
+          </a:prstGeom>
+          <a:solidFill xmlns:a="http://schemas.openxmlformats.org/drawingml/2006/main">
+            <a:srgbClr val="4656A8"/>
+          </a:solidFill>
+          <a:ln xmlns:a="http://schemas.openxmlformats.org/drawingml/2006/main" w="0">
+            <a:noFill/>
+          </a:ln>
+        </p:spPr>
+      </p:sp>
+      <p:sp>
+        <p:nvSpPr>
+          <p:cNvPr id="49" name="">
+            <a:extLst xmlns:a="http://schemas.openxmlformats.org/drawingml/2006/main">
+              <a:ext uri="{FF2B5EF4-FFF2-40B4-BE49-F238E27FC236}">
+                <a16:creationId xmlns:a16="http://schemas.microsoft.com/office/drawing/2014/main" id="{48126197-AFC0-4CDB-81B3-B5829C2B33DC}"/>
+              </a:ext>
+            </a:extLst>
+          </p:cNvPr>
+          <p:cNvSpPr>
+            <a:spLocks xmlns:a="http://schemas.openxmlformats.org/drawingml/2006/main" noGrp="1"/>
+          </p:cNvSpPr>
+          <p:nvPr/>
+        </p:nvSpPr>
+        <p:spPr>
+          <a:xfrm xmlns:a="http://schemas.openxmlformats.org/drawingml/2006/main">
+            <a:off x="7191375" y="3238500"/>
+            <a:ext cx="495300" cy="495300"/>
+          </a:xfrm>
+          <a:prstGeom xmlns:a="http://schemas.openxmlformats.org/drawingml/2006/main" prst="ellipse">
+            <a:avLst/>
+          </a:prstGeom>
+          <a:solidFill xmlns:a="http://schemas.openxmlformats.org/drawingml/2006/main">
+            <a:srgbClr val="E7A048"/>
+          </a:solidFill>
+          <a:ln xmlns:a="http://schemas.openxmlformats.org/drawingml/2006/main" w="0">
+            <a:noFill/>
+          </a:ln>
+        </p:spPr>
+      </p:sp>
+      <p:sp>
+        <p:nvSpPr>
+          <p:cNvPr id="50" name="">
+            <a:extLst xmlns:a="http://schemas.openxmlformats.org/drawingml/2006/main">
+              <a:ext uri="{FF2B5EF4-FFF2-40B4-BE49-F238E27FC236}">
+                <a16:creationId xmlns:a16="http://schemas.microsoft.com/office/drawing/2014/main" id="{F62738CE-4B7D-4811-B8BB-8E04702A9289}"/>
+              </a:ext>
+            </a:extLst>
+          </p:cNvPr>
+          <p:cNvSpPr>
+            <a:spLocks xmlns:a="http://schemas.openxmlformats.org/drawingml/2006/main" noGrp="1"/>
+          </p:cNvSpPr>
+          <p:nvPr/>
+        </p:nvSpPr>
+        <p:spPr>
+          <a:xfrm xmlns:a="http://schemas.openxmlformats.org/drawingml/2006/main">
+            <a:off x="7191375" y="3362325"/>
+            <a:ext cx="495300" cy="190500"/>
+          </a:xfrm>
+          <a:prstGeom xmlns:a="http://schemas.openxmlformats.org/drawingml/2006/main" prst="rect">
+            <a:avLst/>
+          </a:prstGeom>
+          <a:noFill xmlns:a="http://schemas.openxmlformats.org/drawingml/2006/main"/>
+          <a:ln xmlns:a="http://schemas.openxmlformats.org/drawingml/2006/main" w="0">
+            <a:noFill/>
+          </a:ln>
+        </p:spPr>
+        <p:txBody>
+          <a:bodyPr xmlns:a="http://schemas.openxmlformats.org/drawingml/2006/main">
+            <a:noAutofit/>
+          </a:bodyPr>
+          <a:lstStyle xmlns:a="http://schemas.openxmlformats.org/drawingml/2006/main"/>
+          <a:p xmlns:a="http://schemas.openxmlformats.org/drawingml/2006/main">
+            <a:pPr algn="ctr">
+              <a:buNone/>
+              <a:defRPr sz="1425" b="1">
+                <a:solidFill>
+                  <a:srgbClr val="FFFFFF"/>
+                </a:solidFill>
+                <a:latin typeface="Arial"/>
+                <a:ea typeface="Arial"/>
+                <a:cs typeface="Arial"/>
+              </a:defRPr>
+            </a:pPr>
+            <a:r>
+              <a:rPr sz="1425" b="1">
+                <a:solidFill>
+                  <a:srgbClr val="FFFFFF"/>
+                </a:solidFill>
+                <a:latin typeface="Arial"/>
+                <a:ea typeface="Arial"/>
+                <a:cs typeface="Arial"/>
+              </a:rPr>
+              <a:t>4</a:t>
+            </a:r>
+          </a:p>
+        </p:txBody>
+      </p:sp>
+      <p:sp>
+        <p:nvSpPr>
+          <p:cNvPr id="51" name="">
+            <a:extLst xmlns:a="http://schemas.openxmlformats.org/drawingml/2006/main">
+              <a:ext uri="{FF2B5EF4-FFF2-40B4-BE49-F238E27FC236}">
+                <a16:creationId xmlns:a16="http://schemas.microsoft.com/office/drawing/2014/main" id="{4DCA4FC7-C3F5-4340-9B9F-77DE56629674}"/>
+              </a:ext>
+            </a:extLst>
+          </p:cNvPr>
+          <p:cNvSpPr>
+            <a:spLocks xmlns:a="http://schemas.openxmlformats.org/drawingml/2006/main" noGrp="1"/>
+          </p:cNvSpPr>
+          <p:nvPr/>
+        </p:nvSpPr>
+        <p:spPr>
+          <a:xfrm xmlns:a="http://schemas.openxmlformats.org/drawingml/2006/main">
+            <a:off x="6734175" y="4133850"/>
+            <a:ext cx="1409700" cy="247650"/>
+          </a:xfrm>
+          <a:prstGeom xmlns:a="http://schemas.openxmlformats.org/drawingml/2006/main" prst="rect">
+            <a:avLst/>
+          </a:prstGeom>
+          <a:noFill xmlns:a="http://schemas.openxmlformats.org/drawingml/2006/main"/>
+          <a:ln xmlns:a="http://schemas.openxmlformats.org/drawingml/2006/main" w="0">
+            <a:noFill/>
+          </a:ln>
+        </p:spPr>
+        <p:txBody>
+          <a:bodyPr xmlns:a="http://schemas.openxmlformats.org/drawingml/2006/main">
+            <a:noAutofit/>
+          </a:bodyPr>
+          <a:lstStyle xmlns:a="http://schemas.openxmlformats.org/drawingml/2006/main"/>
+          <a:p xmlns:a="http://schemas.openxmlformats.org/drawingml/2006/main">
+            <a:pPr algn="ctr">
+              <a:buNone/>
+              <a:defRPr sz="1350" b="1">
+                <a:solidFill>
+                  <a:srgbClr val="202A44"/>
+                </a:solidFill>
+                <a:latin typeface="Arial"/>
+                <a:ea typeface="Arial"/>
+                <a:cs typeface="Arial"/>
+              </a:defRPr>
+            </a:pPr>
+            <a:r>
+              <a:rPr sz="1350" b="1">
+                <a:solidFill>
+                  <a:srgbClr val="202A44"/>
+                </a:solidFill>
+                <a:latin typeface="Arial"/>
+                <a:ea typeface="Arial"/>
+                <a:cs typeface="Arial"/>
+              </a:rPr>
+              <a:t>Safe route</a:t>
+            </a:r>
+          </a:p>
+        </p:txBody>
+      </p:sp>
+      <p:sp>
+        <p:nvSpPr>
+          <p:cNvPr id="52" name="">
+            <a:extLst xmlns:a="http://schemas.openxmlformats.org/drawingml/2006/main">
+              <a:ext uri="{FF2B5EF4-FFF2-40B4-BE49-F238E27FC236}">
+                <a16:creationId xmlns:a16="http://schemas.microsoft.com/office/drawing/2014/main" id="{78EA62D1-B2F7-41B8-A5FF-C2C0A9679282}"/>
+              </a:ext>
+            </a:extLst>
+          </p:cNvPr>
+          <p:cNvSpPr>
+            <a:spLocks xmlns:a="http://schemas.openxmlformats.org/drawingml/2006/main" noGrp="1"/>
+          </p:cNvSpPr>
+          <p:nvPr/>
+        </p:nvSpPr>
+        <p:spPr>
+          <a:xfrm xmlns:a="http://schemas.openxmlformats.org/drawingml/2006/main">
+            <a:off x="6677025" y="4495800"/>
+            <a:ext cx="1524000" cy="419100"/>
+          </a:xfrm>
+          <a:prstGeom xmlns:a="http://schemas.openxmlformats.org/drawingml/2006/main" prst="rect">
+            <a:avLst/>
+          </a:prstGeom>
+          <a:noFill xmlns:a="http://schemas.openxmlformats.org/drawingml/2006/main"/>
+          <a:ln xmlns:a="http://schemas.openxmlformats.org/drawingml/2006/main" w="0">
+            <a:noFill/>
+          </a:ln>
+        </p:spPr>
+        <p:txBody>
+          <a:bodyPr xmlns:a="http://schemas.openxmlformats.org/drawingml/2006/main">
+            <a:noAutofit/>
+          </a:bodyPr>
+          <a:lstStyle xmlns:a="http://schemas.openxmlformats.org/drawingml/2006/main"/>
+          <a:p xmlns:a="http://schemas.openxmlformats.org/drawingml/2006/main">
+            <a:pPr algn="ctr">
+              <a:buNone/>
+              <a:defRPr sz="1050">
+                <a:solidFill>
+                  <a:srgbClr val="56647A"/>
+                </a:solidFill>
+                <a:latin typeface="Arial"/>
+                <a:ea typeface="Arial"/>
+                <a:cs typeface="Arial"/>
+              </a:defRPr>
+            </a:pPr>
+            <a:r>
+              <a:rPr sz="1050">
+                <a:solidFill>
+                  <a:srgbClr val="56647A"/>
+                </a:solidFill>
+                <a:latin typeface="Arial"/>
+                <a:ea typeface="Arial"/>
+                <a:cs typeface="Arial"/>
+              </a:rPr>
+              <a:t>Urgent, routine, or</a:t>
+            </a:r>
+          </a:p>
+          <a:p xmlns:a="http://schemas.openxmlformats.org/drawingml/2006/main">
+            <a:pPr algn="ctr">
+              <a:buNone/>
+              <a:defRPr sz="1050">
+                <a:solidFill>
+                  <a:srgbClr val="56647A"/>
+                </a:solidFill>
+                <a:latin typeface="Arial"/>
+                <a:ea typeface="Arial"/>
+                <a:cs typeface="Arial"/>
+              </a:defRPr>
+            </a:pPr>
+            <a:r>
+              <a:rPr sz="1050">
+                <a:solidFill>
+                  <a:srgbClr val="56647A"/>
+                </a:solidFill>
+                <a:latin typeface="Arial"/>
+                <a:ea typeface="Arial"/>
+                <a:cs typeface="Arial"/>
+              </a:rPr>
+              <a:t>human support</a:t>
+            </a:r>
+          </a:p>
+        </p:txBody>
+      </p:sp>
+      <p:sp>
+        <p:nvSpPr>
+          <p:cNvPr id="53" name="">
+            <a:extLst xmlns:a="http://schemas.openxmlformats.org/drawingml/2006/main">
+              <a:ext uri="{FF2B5EF4-FFF2-40B4-BE49-F238E27FC236}">
+                <a16:creationId xmlns:a16="http://schemas.microsoft.com/office/drawing/2014/main" id="{5C8FC8CB-EE61-4B36-9911-9020556CB082}"/>
+              </a:ext>
+            </a:extLst>
+          </p:cNvPr>
+          <p:cNvSpPr>
+            <a:spLocks xmlns:a="http://schemas.openxmlformats.org/drawingml/2006/main" noGrp="1"/>
+          </p:cNvSpPr>
+          <p:nvPr/>
+        </p:nvSpPr>
+        <p:spPr>
+          <a:xfrm xmlns:a="http://schemas.openxmlformats.org/drawingml/2006/main">
+            <a:off x="8162925" y="3400425"/>
+            <a:ext cx="361950" cy="171450"/>
+          </a:xfrm>
+          <a:prstGeom xmlns:a="http://schemas.openxmlformats.org/drawingml/2006/main" prst="rightArrow">
+            <a:avLst/>
+          </a:prstGeom>
+          <a:solidFill xmlns:a="http://schemas.openxmlformats.org/drawingml/2006/main">
+            <a:srgbClr val="4656A8"/>
+          </a:solidFill>
+          <a:ln xmlns:a="http://schemas.openxmlformats.org/drawingml/2006/main" w="0">
+            <a:noFill/>
+          </a:ln>
+        </p:spPr>
+      </p:sp>
+      <p:sp>
+        <p:nvSpPr>
+          <p:cNvPr id="54" name="">
+            <a:extLst xmlns:a="http://schemas.openxmlformats.org/drawingml/2006/main">
+              <a:ext uri="{FF2B5EF4-FFF2-40B4-BE49-F238E27FC236}">
+                <a16:creationId xmlns:a16="http://schemas.microsoft.com/office/drawing/2014/main" id="{78BC831F-C6AA-454D-ABB5-EBC61F360EA1}"/>
+              </a:ext>
+            </a:extLst>
+          </p:cNvPr>
+          <p:cNvSpPr>
+            <a:spLocks xmlns:a="http://schemas.openxmlformats.org/drawingml/2006/main" noGrp="1"/>
+          </p:cNvSpPr>
+          <p:nvPr/>
+        </p:nvSpPr>
+        <p:spPr>
+          <a:xfrm xmlns:a="http://schemas.openxmlformats.org/drawingml/2006/main">
+            <a:off x="9239250" y="3238500"/>
+            <a:ext cx="495300" cy="495300"/>
+          </a:xfrm>
+          <a:prstGeom xmlns:a="http://schemas.openxmlformats.org/drawingml/2006/main" prst="ellipse">
+            <a:avLst/>
+          </a:prstGeom>
+          <a:solidFill xmlns:a="http://schemas.openxmlformats.org/drawingml/2006/main">
+            <a:srgbClr val="237A7A"/>
+          </a:solidFill>
+          <a:ln xmlns:a="http://schemas.openxmlformats.org/drawingml/2006/main" w="0">
+            <a:noFill/>
+          </a:ln>
+        </p:spPr>
+      </p:sp>
+      <p:sp>
+        <p:nvSpPr>
+          <p:cNvPr id="55" name="">
+            <a:extLst xmlns:a="http://schemas.openxmlformats.org/drawingml/2006/main">
+              <a:ext uri="{FF2B5EF4-FFF2-40B4-BE49-F238E27FC236}">
+                <a16:creationId xmlns:a16="http://schemas.microsoft.com/office/drawing/2014/main" id="{48CD07ED-4629-4C5A-BD4A-B3A8A909463C}"/>
+              </a:ext>
+            </a:extLst>
+          </p:cNvPr>
+          <p:cNvSpPr>
+            <a:spLocks xmlns:a="http://schemas.openxmlformats.org/drawingml/2006/main" noGrp="1"/>
+          </p:cNvSpPr>
+          <p:nvPr/>
+        </p:nvSpPr>
+        <p:spPr>
+          <a:xfrm xmlns:a="http://schemas.openxmlformats.org/drawingml/2006/main">
+            <a:off x="9239250" y="3362325"/>
+            <a:ext cx="495300" cy="190500"/>
+          </a:xfrm>
+          <a:prstGeom xmlns:a="http://schemas.openxmlformats.org/drawingml/2006/main" prst="rect">
+            <a:avLst/>
+          </a:prstGeom>
+          <a:noFill xmlns:a="http://schemas.openxmlformats.org/drawingml/2006/main"/>
+          <a:ln xmlns:a="http://schemas.openxmlformats.org/drawingml/2006/main" w="0">
+            <a:noFill/>
+          </a:ln>
+        </p:spPr>
+        <p:txBody>
+          <a:bodyPr xmlns:a="http://schemas.openxmlformats.org/drawingml/2006/main">
+            <a:noAutofit/>
+          </a:bodyPr>
+          <a:lstStyle xmlns:a="http://schemas.openxmlformats.org/drawingml/2006/main"/>
+          <a:p xmlns:a="http://schemas.openxmlformats.org/drawingml/2006/main">
+            <a:pPr algn="ctr">
+              <a:buNone/>
+              <a:defRPr sz="1425" b="1">
+                <a:solidFill>
+                  <a:srgbClr val="FFFFFF"/>
+                </a:solidFill>
+                <a:latin typeface="Arial"/>
+                <a:ea typeface="Arial"/>
+                <a:cs typeface="Arial"/>
+              </a:defRPr>
+            </a:pPr>
+            <a:r>
+              <a:rPr sz="1425" b="1">
+                <a:solidFill>
+                  <a:srgbClr val="FFFFFF"/>
+                </a:solidFill>
+                <a:latin typeface="Arial"/>
+                <a:ea typeface="Arial"/>
+                <a:cs typeface="Arial"/>
+              </a:rPr>
+              <a:t>5</a:t>
+            </a:r>
+          </a:p>
+        </p:txBody>
+      </p:sp>
+      <p:sp>
+        <p:nvSpPr>
+          <p:cNvPr id="56" name="">
+            <a:extLst xmlns:a="http://schemas.openxmlformats.org/drawingml/2006/main">
+              <a:ext uri="{FF2B5EF4-FFF2-40B4-BE49-F238E27FC236}">
+                <a16:creationId xmlns:a16="http://schemas.microsoft.com/office/drawing/2014/main" id="{456B9774-0CE8-4E99-B7AE-381372C7DD9C}"/>
+              </a:ext>
+            </a:extLst>
+          </p:cNvPr>
+          <p:cNvSpPr>
+            <a:spLocks xmlns:a="http://schemas.openxmlformats.org/drawingml/2006/main" noGrp="1"/>
+          </p:cNvSpPr>
+          <p:nvPr/>
+        </p:nvSpPr>
+        <p:spPr>
+          <a:xfrm xmlns:a="http://schemas.openxmlformats.org/drawingml/2006/main">
+            <a:off x="8782050" y="4133850"/>
+            <a:ext cx="1409700" cy="247650"/>
+          </a:xfrm>
+          <a:prstGeom xmlns:a="http://schemas.openxmlformats.org/drawingml/2006/main" prst="rect">
+            <a:avLst/>
+          </a:prstGeom>
+          <a:noFill xmlns:a="http://schemas.openxmlformats.org/drawingml/2006/main"/>
+          <a:ln xmlns:a="http://schemas.openxmlformats.org/drawingml/2006/main" w="0">
+            <a:noFill/>
+          </a:ln>
+        </p:spPr>
+        <p:txBody>
+          <a:bodyPr xmlns:a="http://schemas.openxmlformats.org/drawingml/2006/main">
+            <a:noAutofit/>
+          </a:bodyPr>
+          <a:lstStyle xmlns:a="http://schemas.openxmlformats.org/drawingml/2006/main"/>
+          <a:p xmlns:a="http://schemas.openxmlformats.org/drawingml/2006/main">
+            <a:pPr algn="ctr">
+              <a:buNone/>
+              <a:defRPr sz="1350" b="1">
+                <a:solidFill>
+                  <a:srgbClr val="202A44"/>
+                </a:solidFill>
+                <a:latin typeface="Arial"/>
+                <a:ea typeface="Arial"/>
+                <a:cs typeface="Arial"/>
+              </a:defRPr>
+            </a:pPr>
+            <a:r>
+              <a:rPr sz="1350" b="1">
+                <a:solidFill>
+                  <a:srgbClr val="202A44"/>
+                </a:solidFill>
+                <a:latin typeface="Arial"/>
+                <a:ea typeface="Arial"/>
+                <a:cs typeface="Arial"/>
+              </a:rPr>
+              <a:t>Next action</a:t>
+            </a:r>
+          </a:p>
+        </p:txBody>
+      </p:sp>
+      <p:sp>
+        <p:nvSpPr>
+          <p:cNvPr id="57" name="">
+            <a:extLst xmlns:a="http://schemas.openxmlformats.org/drawingml/2006/main">
+              <a:ext uri="{FF2B5EF4-FFF2-40B4-BE49-F238E27FC236}">
+                <a16:creationId xmlns:a16="http://schemas.microsoft.com/office/drawing/2014/main" id="{06452303-EDFC-4F2A-8704-2AF06273424B}"/>
+              </a:ext>
+            </a:extLst>
+          </p:cNvPr>
+          <p:cNvSpPr>
+            <a:spLocks xmlns:a="http://schemas.openxmlformats.org/drawingml/2006/main" noGrp="1"/>
+          </p:cNvSpPr>
+          <p:nvPr/>
+        </p:nvSpPr>
+        <p:spPr>
+          <a:xfrm xmlns:a="http://schemas.openxmlformats.org/drawingml/2006/main">
+            <a:off x="8724900" y="4495800"/>
+            <a:ext cx="1524000" cy="419100"/>
+          </a:xfrm>
+          <a:prstGeom xmlns:a="http://schemas.openxmlformats.org/drawingml/2006/main" prst="rect">
+            <a:avLst/>
+          </a:prstGeom>
+          <a:noFill xmlns:a="http://schemas.openxmlformats.org/drawingml/2006/main"/>
+          <a:ln xmlns:a="http://schemas.openxmlformats.org/drawingml/2006/main" w="0">
+            <a:noFill/>
+          </a:ln>
+        </p:spPr>
+        <p:txBody>
+          <a:bodyPr xmlns:a="http://schemas.openxmlformats.org/drawingml/2006/main">
+            <a:noAutofit/>
+          </a:bodyPr>
+          <a:lstStyle xmlns:a="http://schemas.openxmlformats.org/drawingml/2006/main"/>
+          <a:p xmlns:a="http://schemas.openxmlformats.org/drawingml/2006/main">
+            <a:pPr algn="ctr">
+              <a:buNone/>
+              <a:defRPr sz="1050">
+                <a:solidFill>
+                  <a:srgbClr val="56647A"/>
+                </a:solidFill>
+                <a:latin typeface="Arial"/>
+                <a:ea typeface="Arial"/>
+                <a:cs typeface="Arial"/>
+              </a:defRPr>
+            </a:pPr>
+            <a:r>
+              <a:rPr sz="1050">
+                <a:solidFill>
+                  <a:srgbClr val="56647A"/>
+                </a:solidFill>
+                <a:latin typeface="Arial"/>
+                <a:ea typeface="Arial"/>
+                <a:cs typeface="Arial"/>
+              </a:rPr>
+              <a:t>Guidance, service</a:t>
+            </a:r>
+          </a:p>
+          <a:p xmlns:a="http://schemas.openxmlformats.org/drawingml/2006/main">
+            <a:pPr algn="ctr">
+              <a:buNone/>
+              <a:defRPr sz="1050">
+                <a:solidFill>
+                  <a:srgbClr val="56647A"/>
+                </a:solidFill>
+                <a:latin typeface="Arial"/>
+                <a:ea typeface="Arial"/>
+                <a:cs typeface="Arial"/>
+              </a:defRPr>
+            </a:pPr>
+            <a:r>
+              <a:rPr sz="1050">
+                <a:solidFill>
+                  <a:srgbClr val="56647A"/>
+                </a:solidFill>
+                <a:latin typeface="Arial"/>
+                <a:ea typeface="Arial"/>
+                <a:cs typeface="Arial"/>
+              </a:rPr>
+              <a:t>direction, sharing</a:t>
+            </a:r>
+          </a:p>
+        </p:txBody>
+      </p:sp>
+      <p:sp>
+        <p:nvSpPr>
+          <p:cNvPr id="58" name="">
+            <a:extLst xmlns:a="http://schemas.openxmlformats.org/drawingml/2006/main">
+              <a:ext uri="{FF2B5EF4-FFF2-40B4-BE49-F238E27FC236}">
+                <a16:creationId xmlns:a16="http://schemas.microsoft.com/office/drawing/2014/main" id="{A1EA363B-8A57-4D48-B321-F7DA9FF795EB}"/>
+              </a:ext>
+            </a:extLst>
+          </p:cNvPr>
+          <p:cNvSpPr>
+            <a:spLocks xmlns:a="http://schemas.openxmlformats.org/drawingml/2006/main" noGrp="1"/>
+          </p:cNvSpPr>
+          <p:nvPr/>
+        </p:nvSpPr>
+        <p:spPr>
+          <a:xfrm xmlns:a="http://schemas.openxmlformats.org/drawingml/2006/main">
+            <a:off x="1714500" y="5391150"/>
+            <a:ext cx="8382000" cy="742950"/>
+          </a:xfrm>
+          <a:prstGeom xmlns:a="http://schemas.openxmlformats.org/drawingml/2006/main" prst="roundRect">
+            <a:avLst>
+              <a:gd name="adj" fmla="val 10256"/>
+            </a:avLst>
+          </a:prstGeom>
+          <a:solidFill xmlns:a="http://schemas.openxmlformats.org/drawingml/2006/main">
+            <a:srgbClr val="FFFFFF"/>
+          </a:solidFill>
+          <a:ln xmlns:a="http://schemas.openxmlformats.org/drawingml/2006/main" w="0">
+            <a:noFill/>
+          </a:ln>
+        </p:spPr>
+      </p:sp>
+      <p:sp>
+        <p:nvSpPr>
+          <p:cNvPr id="59" name="">
+            <a:extLst xmlns:a="http://schemas.openxmlformats.org/drawingml/2006/main">
+              <a:ext uri="{FF2B5EF4-FFF2-40B4-BE49-F238E27FC236}">
+                <a16:creationId xmlns:a16="http://schemas.microsoft.com/office/drawing/2014/main" id="{E0CBD234-018D-4CCA-89B8-286938FBCCEE}"/>
+              </a:ext>
+            </a:extLst>
+          </p:cNvPr>
+          <p:cNvSpPr>
+            <a:spLocks xmlns:a="http://schemas.openxmlformats.org/drawingml/2006/main" noGrp="1"/>
+          </p:cNvSpPr>
+          <p:nvPr/>
+        </p:nvSpPr>
+        <p:spPr>
+          <a:xfrm xmlns:a="http://schemas.openxmlformats.org/drawingml/2006/main">
+            <a:off x="2000250" y="5572125"/>
+            <a:ext cx="7810500" cy="400050"/>
+          </a:xfrm>
+          <a:prstGeom xmlns:a="http://schemas.openxmlformats.org/drawingml/2006/main" prst="rect">
+            <a:avLst/>
+          </a:prstGeom>
+          <a:noFill xmlns:a="http://schemas.openxmlformats.org/drawingml/2006/main"/>
+          <a:ln xmlns:a="http://schemas.openxmlformats.org/drawingml/2006/main" w="0">
+            <a:noFill/>
+          </a:ln>
+        </p:spPr>
+        <p:txBody>
+          <a:bodyPr xmlns:a="http://schemas.openxmlformats.org/drawingml/2006/main">
+            <a:noAutofit/>
+          </a:bodyPr>
+          <a:lstStyle xmlns:a="http://schemas.openxmlformats.org/drawingml/2006/main"/>
+          <a:p xmlns:a="http://schemas.openxmlformats.org/drawingml/2006/main">
+            <a:pPr algn="ctr">
+              <a:buNone/>
+              <a:defRPr sz="1275" b="1">
+                <a:solidFill>
+                  <a:srgbClr val="202A44"/>
+                </a:solidFill>
+                <a:latin typeface="Arial"/>
+                <a:ea typeface="Arial"/>
+                <a:cs typeface="Arial"/>
+              </a:defRPr>
+            </a:pPr>
+            <a:r>
+              <a:rPr sz="1275" b="1">
+                <a:solidFill>
+                  <a:srgbClr val="202A44"/>
+                </a:solidFill>
+                <a:latin typeface="Arial"/>
+                <a:ea typeface="Arial"/>
+                <a:cs typeface="Arial"/>
+              </a:rPr>
+              <a:t>Every result offers a Back or Start again option so people can revisit choices</a:t>
+            </a:r>
+          </a:p>
+          <a:p xmlns:a="http://schemas.openxmlformats.org/drawingml/2006/main">
+            <a:pPr algn="ctr">
+              <a:buNone/>
+              <a:defRPr sz="1275" b="1">
+                <a:solidFill>
+                  <a:srgbClr val="202A44"/>
+                </a:solidFill>
+                <a:latin typeface="Arial"/>
+                <a:ea typeface="Arial"/>
+                <a:cs typeface="Arial"/>
+              </a:defRPr>
+            </a:pPr>
+            <a:r>
+              <a:rPr sz="1275" b="1">
+                <a:solidFill>
+                  <a:srgbClr val="202A44"/>
+                </a:solidFill>
+                <a:latin typeface="Arial"/>
+                <a:ea typeface="Arial"/>
+                <a:cs typeface="Arial"/>
+              </a:rPr>
+              <a:t>without losing the journey.</a:t>
+            </a:r>
+          </a:p>
+        </p:txBody>
+      </p:sp>
+      <p:sp>
+        <p:nvSpPr>
+          <p:cNvPr id="60" name="">
+            <a:extLst xmlns:a="http://schemas.openxmlformats.org/drawingml/2006/main">
+              <a:ext uri="{FF2B5EF4-FFF2-40B4-BE49-F238E27FC236}">
+                <a16:creationId xmlns:a16="http://schemas.microsoft.com/office/drawing/2014/main" id="{57A760AE-3083-45A7-AE43-710380D28AF4}"/>
+              </a:ext>
+            </a:extLst>
+          </p:cNvPr>
+          <p:cNvSpPr>
+            <a:spLocks xmlns:a="http://schemas.openxmlformats.org/drawingml/2006/main" noGrp="1"/>
+          </p:cNvSpPr>
+          <p:nvPr/>
+        </p:nvSpPr>
+        <p:spPr>
+          <a:xfrm xmlns:a="http://schemas.openxmlformats.org/drawingml/2006/main">
+            <a:off x="11049000" y="6438900"/>
+            <a:ext cx="457200" cy="171450"/>
+          </a:xfrm>
+          <a:prstGeom xmlns:a="http://schemas.openxmlformats.org/drawingml/2006/main" prst="rect">
+            <a:avLst/>
+          </a:prstGeom>
+          <a:noFill xmlns:a="http://schemas.openxmlformats.org/drawingml/2006/main"/>
+          <a:ln xmlns:a="http://schemas.openxmlformats.org/drawingml/2006/main" w="0">
+            <a:noFill/>
+          </a:ln>
+        </p:spPr>
+        <p:txBody>
+          <a:bodyPr xmlns:a="http://schemas.openxmlformats.org/drawingml/2006/main">
+            <a:noAutofit/>
+          </a:bodyPr>
+          <a:lstStyle xmlns:a="http://schemas.openxmlformats.org/drawingml/2006/main"/>
+          <a:p xmlns:a="http://schemas.openxmlformats.org/drawingml/2006/main">
+            <a:pPr algn="r">
+              <a:buNone/>
+              <a:defRPr sz="900">
+                <a:solidFill>
+                  <a:srgbClr val="56647A"/>
+                </a:solidFill>
+                <a:latin typeface="Arial"/>
+                <a:ea typeface="Arial"/>
+                <a:cs typeface="Arial"/>
+              </a:defRPr>
+            </a:pPr>
+            <a:r>
+              <a:rPr sz="900">
+                <a:solidFill>
+                  <a:srgbClr val="56647A"/>
+                </a:solidFill>
+                <a:latin typeface="Arial"/>
+                <a:ea typeface="Arial"/>
+                <a:cs typeface="Arial"/>
+              </a:rPr>
+              <a:t>5</a:t>
+            </a:r>
+          </a:p>
+        </p:txBody>
+      </p:sp>
+    </p:spTree>
+    <p:extLst>
+      <p:ext uri="{BB962C8B-B14F-4D97-AF65-F5344CB8AC3E}">
+        <p14:creationId xmlns:p14="http://schemas.microsoft.com/office/powerpoint/2010/main" val="378439946"/>
+      </p:ext>
+    </p:extLst>
+  </p:cSld>
+</p:sld>
+</file>
+
+<file path=ppt/slides/slide5.xml><?xml version="1.0" encoding="utf-8"?>
 <p:sld xmlns:p="http://schemas.openxmlformats.org/presentationml/2006/main">
   <p:cSld>
     <p:bg>
@@ -15471,6 +18663,7 @@
           <a:lstStyle xmlns:a="http://schemas.openxmlformats.org/drawingml/2006/main"/>
           <a:p xmlns:a="http://schemas.openxmlformats.org/drawingml/2006/main">
             <a:pPr>
+              <a:buNone/>
               <a:defRPr sz="1200" b="1">
                 <a:solidFill>
                   <a:srgbClr val="E7A048"/>
@@ -15528,6 +18721,7 @@
           <a:lstStyle xmlns:a="http://schemas.openxmlformats.org/drawingml/2006/main"/>
           <a:p xmlns:a="http://schemas.openxmlformats.org/drawingml/2006/main">
             <a:pPr algn="r">
+              <a:buNone/>
               <a:defRPr sz="975" b="1">
                 <a:solidFill>
                   <a:srgbClr val="4656A8"/>
@@ -15585,6 +18779,7 @@
           <a:lstStyle xmlns:a="http://schemas.openxmlformats.org/drawingml/2006/main"/>
           <a:p xmlns:a="http://schemas.openxmlformats.org/drawingml/2006/main">
             <a:pPr>
+              <a:buNone/>
               <a:defRPr sz="2550" b="1">
                 <a:solidFill>
                   <a:srgbClr val="202A44"/>
@@ -15642,6 +18837,7 @@
           <a:lstStyle xmlns:a="http://schemas.openxmlformats.org/drawingml/2006/main"/>
           <a:p xmlns:a="http://schemas.openxmlformats.org/drawingml/2006/main">
             <a:pPr>
+              <a:buNone/>
               <a:defRPr sz="1275">
                 <a:solidFill>
                   <a:srgbClr val="56647A"/>
@@ -15795,6 +18991,7 @@
           <a:lstStyle xmlns:a="http://schemas.openxmlformats.org/drawingml/2006/main"/>
           <a:p xmlns:a="http://schemas.openxmlformats.org/drawingml/2006/main">
             <a:pPr>
+              <a:buNone/>
               <a:defRPr sz="1050" b="1">
                 <a:solidFill>
                   <a:srgbClr val="4656A8"/>
@@ -15852,6 +19049,7 @@
           <a:lstStyle xmlns:a="http://schemas.openxmlformats.org/drawingml/2006/main"/>
           <a:p xmlns:a="http://schemas.openxmlformats.org/drawingml/2006/main">
             <a:pPr>
+              <a:buNone/>
               <a:defRPr sz="1650" b="1">
                 <a:solidFill>
                   <a:srgbClr val="202A44"/>
@@ -15909,6 +19107,7 @@
           <a:lstStyle xmlns:a="http://schemas.openxmlformats.org/drawingml/2006/main"/>
           <a:p xmlns:a="http://schemas.openxmlformats.org/drawingml/2006/main">
             <a:pPr>
+              <a:buNone/>
               <a:defRPr sz="1125">
                 <a:solidFill>
                   <a:srgbClr val="56647A"/>
@@ -16032,6 +19231,7 @@
           <a:lstStyle xmlns:a="http://schemas.openxmlformats.org/drawingml/2006/main"/>
           <a:p xmlns:a="http://schemas.openxmlformats.org/drawingml/2006/main">
             <a:pPr>
+              <a:buNone/>
               <a:defRPr sz="1050" b="1">
                 <a:solidFill>
                   <a:srgbClr val="4656A8"/>
@@ -16089,6 +19289,7 @@
           <a:lstStyle xmlns:a="http://schemas.openxmlformats.org/drawingml/2006/main"/>
           <a:p xmlns:a="http://schemas.openxmlformats.org/drawingml/2006/main">
             <a:pPr>
+              <a:buNone/>
               <a:defRPr sz="1650" b="1">
                 <a:solidFill>
                   <a:srgbClr val="202A44"/>
@@ -16146,6 +19347,7 @@
           <a:lstStyle xmlns:a="http://schemas.openxmlformats.org/drawingml/2006/main"/>
           <a:p xmlns:a="http://schemas.openxmlformats.org/drawingml/2006/main">
             <a:pPr>
+              <a:buNone/>
               <a:defRPr sz="1125">
                 <a:solidFill>
                   <a:srgbClr val="56647A"/>
@@ -16269,6 +19471,7 @@
           <a:lstStyle xmlns:a="http://schemas.openxmlformats.org/drawingml/2006/main"/>
           <a:p xmlns:a="http://schemas.openxmlformats.org/drawingml/2006/main">
             <a:pPr>
+              <a:buNone/>
               <a:defRPr sz="1050" b="1">
                 <a:solidFill>
                   <a:srgbClr val="4656A8"/>
@@ -16326,6 +19529,7 @@
           <a:lstStyle xmlns:a="http://schemas.openxmlformats.org/drawingml/2006/main"/>
           <a:p xmlns:a="http://schemas.openxmlformats.org/drawingml/2006/main">
             <a:pPr>
+              <a:buNone/>
               <a:defRPr sz="1650" b="1">
                 <a:solidFill>
                   <a:srgbClr val="202A44"/>
@@ -16383,6 +19587,7 @@
           <a:lstStyle xmlns:a="http://schemas.openxmlformats.org/drawingml/2006/main"/>
           <a:p xmlns:a="http://schemas.openxmlformats.org/drawingml/2006/main">
             <a:pPr>
+              <a:buNone/>
               <a:defRPr sz="1125">
                 <a:solidFill>
                   <a:srgbClr val="56647A"/>
@@ -16506,6 +19711,7 @@
           <a:lstStyle xmlns:a="http://schemas.openxmlformats.org/drawingml/2006/main"/>
           <a:p xmlns:a="http://schemas.openxmlformats.org/drawingml/2006/main">
             <a:pPr>
+              <a:buNone/>
               <a:defRPr sz="1050" b="1">
                 <a:solidFill>
                   <a:srgbClr val="4656A8"/>
@@ -16563,6 +19769,7 @@
           <a:lstStyle xmlns:a="http://schemas.openxmlformats.org/drawingml/2006/main"/>
           <a:p xmlns:a="http://schemas.openxmlformats.org/drawingml/2006/main">
             <a:pPr>
+              <a:buNone/>
               <a:defRPr sz="1650" b="1">
                 <a:solidFill>
                   <a:srgbClr val="202A44"/>
@@ -16620,6 +19827,7 @@
           <a:lstStyle xmlns:a="http://schemas.openxmlformats.org/drawingml/2006/main"/>
           <a:p xmlns:a="http://schemas.openxmlformats.org/drawingml/2006/main">
             <a:pPr>
+              <a:buNone/>
               <a:defRPr sz="1125">
                 <a:solidFill>
                   <a:srgbClr val="56647A"/>
@@ -16643,6 +19851,7 @@
           </a:p>
           <a:p xmlns:a="http://schemas.openxmlformats.org/drawingml/2006/main">
             <a:pPr>
+              <a:buNone/>
               <a:defRPr sz="1125">
                 <a:solidFill>
                   <a:srgbClr val="56647A"/>
@@ -16732,6 +19941,7 @@
           <a:lstStyle xmlns:a="http://schemas.openxmlformats.org/drawingml/2006/main"/>
           <a:p xmlns:a="http://schemas.openxmlformats.org/drawingml/2006/main">
             <a:pPr algn="ctr">
+              <a:buNone/>
               <a:defRPr sz="1125" b="1">
                 <a:solidFill>
                   <a:srgbClr val="202A44"/>
@@ -16789,6 +19999,7 @@
           <a:lstStyle xmlns:a="http://schemas.openxmlformats.org/drawingml/2006/main"/>
           <a:p xmlns:a="http://schemas.openxmlformats.org/drawingml/2006/main">
             <a:pPr algn="r">
+              <a:buNone/>
               <a:defRPr sz="900">
                 <a:solidFill>
                   <a:srgbClr val="56647A"/>
@@ -16816,3055 +20027,6 @@
     <p:extLst>
       <p:ext uri="{BB962C8B-B14F-4D97-AF65-F5344CB8AC3E}">
         <p14:creationId xmlns:p14="http://schemas.microsoft.com/office/powerpoint/2010/main" val="416671752"/>
-      </p:ext>
-    </p:extLst>
-  </p:cSld>
-</p:sld>
-</file>
-
-<file path=ppt/slides/slide5.xml><?xml version="1.0" encoding="utf-8"?>
-<p:sld xmlns:p="http://schemas.openxmlformats.org/presentationml/2006/main">
-  <p:cSld>
-    <p:bg>
-      <p:bgPr>
-        <a:solidFill xmlns:a="http://schemas.openxmlformats.org/drawingml/2006/main">
-          <a:srgbClr val="062B39"/>
-        </a:solidFill>
-      </p:bgPr>
-    </p:bg>
-    <p:spTree>
-      <p:nvGrpSpPr>
-        <p:cNvPr id="1" name=""/>
-        <p:cNvGrpSpPr/>
-        <p:nvPr/>
-      </p:nvGrpSpPr>
-      <p:grpSpPr>
-        <a:xfrm xmlns:a="http://schemas.openxmlformats.org/drawingml/2006/main"/>
-      </p:grpSpPr>
-      <p:sp>
-        <p:nvSpPr>
-          <p:cNvPr id="26" name="">
-            <a:extLst xmlns:a="http://schemas.openxmlformats.org/drawingml/2006/main">
-              <a:ext uri="{FF2B5EF4-FFF2-40B4-BE49-F238E27FC236}">
-                <a16:creationId xmlns:a16="http://schemas.microsoft.com/office/drawing/2014/main" id="{69BC3DC9-1539-4646-9C90-E2F69F9266A9}"/>
-              </a:ext>
-            </a:extLst>
-          </p:cNvPr>
-          <p:cNvSpPr>
-            <a:spLocks xmlns:a="http://schemas.openxmlformats.org/drawingml/2006/main" noGrp="1"/>
-          </p:cNvSpPr>
-          <p:nvPr/>
-        </p:nvSpPr>
-        <p:spPr>
-          <a:xfrm xmlns:a="http://schemas.openxmlformats.org/drawingml/2006/main">
-            <a:off x="704850" y="485775"/>
-            <a:ext cx="428625" cy="190500"/>
-          </a:xfrm>
-          <a:prstGeom xmlns:a="http://schemas.openxmlformats.org/drawingml/2006/main" prst="rect">
-            <a:avLst/>
-          </a:prstGeom>
-          <a:noFill xmlns:a="http://schemas.openxmlformats.org/drawingml/2006/main"/>
-          <a:ln xmlns:a="http://schemas.openxmlformats.org/drawingml/2006/main" w="0">
-            <a:noFill/>
-          </a:ln>
-        </p:spPr>
-        <p:txBody>
-          <a:bodyPr xmlns:a="http://schemas.openxmlformats.org/drawingml/2006/main">
-            <a:normAutofit fontScale="72222"/>
-          </a:bodyPr>
-          <a:lstStyle xmlns:a="http://schemas.openxmlformats.org/drawingml/2006/main"/>
-          <a:p xmlns:a="http://schemas.openxmlformats.org/drawingml/2006/main">
-            <a:pPr>
-              <a:buNone/>
-              <a:defRPr sz="900" b="1">
-                <a:solidFill>
-                  <a:srgbClr val="00A28F"/>
-                </a:solidFill>
-                <a:latin typeface="Arial"/>
-                <a:ea typeface="Arial"/>
-                <a:cs typeface="Arial"/>
-              </a:defRPr>
-            </a:pPr>
-            <a:r>
-              <a:rPr sz="900" b="1">
-                <a:solidFill>
-                  <a:srgbClr val="00A28F"/>
-                </a:solidFill>
-                <a:latin typeface="Arial"/>
-                <a:ea typeface="Arial"/>
-                <a:cs typeface="Arial"/>
-              </a:rPr>
-              <a:t>05</a:t>
-            </a:r>
-          </a:p>
-        </p:txBody>
-      </p:sp>
-      <p:sp>
-        <p:nvSpPr>
-          <p:cNvPr id="2" name="">
-            <a:extLst xmlns:a="http://schemas.openxmlformats.org/drawingml/2006/main">
-              <a:ext uri="{FF2B5EF4-FFF2-40B4-BE49-F238E27FC236}">
-                <a16:creationId xmlns:a16="http://schemas.microsoft.com/office/drawing/2014/main" id="{F8A62CD9-2B05-41C9-A2F5-FBB9DB33404B}"/>
-              </a:ext>
-            </a:extLst>
-          </p:cNvPr>
-          <p:cNvSpPr>
-            <a:spLocks xmlns:a="http://schemas.openxmlformats.org/drawingml/2006/main" noGrp="1"/>
-          </p:cNvSpPr>
-          <p:nvPr/>
-        </p:nvSpPr>
-        <p:spPr>
-          <a:xfrm xmlns:a="http://schemas.openxmlformats.org/drawingml/2006/main">
-            <a:off x="704850" y="781050"/>
-            <a:ext cx="6191250" cy="438150"/>
-          </a:xfrm>
-          <a:prstGeom xmlns:a="http://schemas.openxmlformats.org/drawingml/2006/main" prst="rect">
-            <a:avLst/>
-          </a:prstGeom>
-          <a:noFill xmlns:a="http://schemas.openxmlformats.org/drawingml/2006/main"/>
-          <a:ln xmlns:a="http://schemas.openxmlformats.org/drawingml/2006/main" w="0">
-            <a:noFill/>
-          </a:ln>
-        </p:spPr>
-        <p:txBody>
-          <a:bodyPr xmlns:a="http://schemas.openxmlformats.org/drawingml/2006/main">
-            <a:normAutofit fontScale="89216"/>
-          </a:bodyPr>
-          <a:lstStyle xmlns:a="http://schemas.openxmlformats.org/drawingml/2006/main"/>
-          <a:p xmlns:a="http://schemas.openxmlformats.org/drawingml/2006/main">
-            <a:pPr>
-              <a:buNone/>
-              <a:defRPr sz="2550" b="1">
-                <a:solidFill>
-                  <a:srgbClr val="FFFFFF"/>
-                </a:solidFill>
-                <a:latin typeface="Arial"/>
-                <a:ea typeface="Arial"/>
-                <a:cs typeface="Arial"/>
-              </a:defRPr>
-            </a:pPr>
-            <a:r>
-              <a:rPr sz="2550" b="1">
-                <a:solidFill>
-                  <a:srgbClr val="FFFFFF"/>
-                </a:solidFill>
-                <a:latin typeface="Arial"/>
-                <a:ea typeface="Arial"/>
-                <a:cs typeface="Arial"/>
-              </a:rPr>
-              <a:t>Current implementation</a:t>
-            </a:r>
-          </a:p>
-        </p:txBody>
-      </p:sp>
-      <p:sp>
-        <p:nvSpPr>
-          <p:cNvPr id="3" name="">
-            <a:extLst xmlns:a="http://schemas.openxmlformats.org/drawingml/2006/main">
-              <a:ext uri="{FF2B5EF4-FFF2-40B4-BE49-F238E27FC236}">
-                <a16:creationId xmlns:a16="http://schemas.microsoft.com/office/drawing/2014/main" id="{B9EDFAFE-9CA0-42D2-B4FF-FEB5E59C2191}"/>
-              </a:ext>
-            </a:extLst>
-          </p:cNvPr>
-          <p:cNvSpPr>
-            <a:spLocks xmlns:a="http://schemas.openxmlformats.org/drawingml/2006/main" noGrp="1"/>
-          </p:cNvSpPr>
-          <p:nvPr/>
-        </p:nvSpPr>
-        <p:spPr>
-          <a:xfrm xmlns:a="http://schemas.openxmlformats.org/drawingml/2006/main">
-            <a:off x="723900" y="1323975"/>
-            <a:ext cx="8096250" cy="238125"/>
-          </a:xfrm>
-          <a:prstGeom xmlns:a="http://schemas.openxmlformats.org/drawingml/2006/main" prst="rect">
-            <a:avLst/>
-          </a:prstGeom>
-          <a:noFill xmlns:a="http://schemas.openxmlformats.org/drawingml/2006/main"/>
-          <a:ln xmlns:a="http://schemas.openxmlformats.org/drawingml/2006/main" w="0">
-            <a:noFill/>
-          </a:ln>
-        </p:spPr>
-        <p:txBody>
-          <a:bodyPr xmlns:a="http://schemas.openxmlformats.org/drawingml/2006/main">
-            <a:normAutofit fontScale="80208"/>
-          </a:bodyPr>
-          <a:lstStyle xmlns:a="http://schemas.openxmlformats.org/drawingml/2006/main"/>
-          <a:p xmlns:a="http://schemas.openxmlformats.org/drawingml/2006/main">
-            <a:pPr>
-              <a:buNone/>
-              <a:defRPr sz="1200" b="0">
-                <a:solidFill>
-                  <a:srgbClr val="BFD8D5"/>
-                </a:solidFill>
-                <a:latin typeface="Arial"/>
-                <a:ea typeface="Arial"/>
-                <a:cs typeface="Arial"/>
-              </a:defRPr>
-            </a:pPr>
-            <a:r>
-              <a:rPr sz="1200" b="0">
-                <a:solidFill>
-                  <a:srgbClr val="BFD8D5"/>
-                </a:solidFill>
-                <a:latin typeface="Arial"/>
-                <a:ea typeface="Arial"/>
-                <a:cs typeface="Arial"/>
-              </a:rPr>
-              <a:t>The capstone demonstrates a working local MVP with explicit safety limits</a:t>
-            </a:r>
-          </a:p>
-        </p:txBody>
-      </p:sp>
-      <p:sp>
-        <p:nvSpPr>
-          <p:cNvPr id="4" name="">
-            <a:extLst xmlns:a="http://schemas.openxmlformats.org/drawingml/2006/main">
-              <a:ext uri="{FF2B5EF4-FFF2-40B4-BE49-F238E27FC236}">
-                <a16:creationId xmlns:a16="http://schemas.microsoft.com/office/drawing/2014/main" id="{69F39D90-4A72-441C-8601-5B4F9B66A69F}"/>
-              </a:ext>
-            </a:extLst>
-          </p:cNvPr>
-          <p:cNvSpPr>
-            <a:spLocks xmlns:a="http://schemas.openxmlformats.org/drawingml/2006/main" noGrp="1"/>
-          </p:cNvSpPr>
-          <p:nvPr/>
-        </p:nvSpPr>
-        <p:spPr>
-          <a:xfrm xmlns:a="http://schemas.openxmlformats.org/drawingml/2006/main">
-            <a:off x="704850" y="1752600"/>
-            <a:ext cx="1066800" cy="47625"/>
-          </a:xfrm>
-          <a:prstGeom xmlns:a="http://schemas.openxmlformats.org/drawingml/2006/main" prst="rect">
-            <a:avLst/>
-          </a:prstGeom>
-          <a:solidFill xmlns:a="http://schemas.openxmlformats.org/drawingml/2006/main">
-            <a:srgbClr val="00A28F"/>
-          </a:solidFill>
-          <a:ln xmlns:a="http://schemas.openxmlformats.org/drawingml/2006/main" w="9525">
-            <a:solidFill>
-              <a:srgbClr val="00A28F"/>
-            </a:solidFill>
-          </a:ln>
-        </p:spPr>
-      </p:sp>
-      <p:sp>
-        <p:nvSpPr>
-          <p:cNvPr id="5" name="">
-            <a:extLst xmlns:a="http://schemas.openxmlformats.org/drawingml/2006/main">
-              <a:ext uri="{FF2B5EF4-FFF2-40B4-BE49-F238E27FC236}">
-                <a16:creationId xmlns:a16="http://schemas.microsoft.com/office/drawing/2014/main" id="{3BD68114-626D-4F88-A9F1-749329E17234}"/>
-              </a:ext>
-            </a:extLst>
-          </p:cNvPr>
-          <p:cNvSpPr>
-            <a:spLocks xmlns:a="http://schemas.openxmlformats.org/drawingml/2006/main" noGrp="1"/>
-          </p:cNvSpPr>
-          <p:nvPr/>
-        </p:nvSpPr>
-        <p:spPr>
-          <a:xfrm xmlns:a="http://schemas.openxmlformats.org/drawingml/2006/main">
-            <a:off x="723900" y="2286000"/>
-            <a:ext cx="1428750" cy="171450"/>
-          </a:xfrm>
-          <a:prstGeom xmlns:a="http://schemas.openxmlformats.org/drawingml/2006/main" prst="rect">
-            <a:avLst/>
-          </a:prstGeom>
-          <a:noFill xmlns:a="http://schemas.openxmlformats.org/drawingml/2006/main"/>
-          <a:ln xmlns:a="http://schemas.openxmlformats.org/drawingml/2006/main" w="0">
-            <a:noFill/>
-          </a:ln>
-        </p:spPr>
-        <p:txBody>
-          <a:bodyPr xmlns:a="http://schemas.openxmlformats.org/drawingml/2006/main">
-            <a:normAutofit fontScale="63636"/>
-          </a:bodyPr>
-          <a:lstStyle xmlns:a="http://schemas.openxmlformats.org/drawingml/2006/main"/>
-          <a:p xmlns:a="http://schemas.openxmlformats.org/drawingml/2006/main">
-            <a:pPr>
-              <a:buNone/>
-              <a:defRPr sz="825" b="1">
-                <a:solidFill>
-                  <a:srgbClr val="00A28F"/>
-                </a:solidFill>
-                <a:latin typeface="Arial"/>
-                <a:ea typeface="Arial"/>
-                <a:cs typeface="Arial"/>
-              </a:defRPr>
-            </a:pPr>
-            <a:r>
-              <a:rPr sz="825" b="1">
-                <a:solidFill>
-                  <a:srgbClr val="00A28F"/>
-                </a:solidFill>
-                <a:latin typeface="Arial"/>
-                <a:ea typeface="Arial"/>
-                <a:cs typeface="Arial"/>
-              </a:rPr>
-              <a:t>LIVE STACK</a:t>
-            </a:r>
-          </a:p>
-        </p:txBody>
-      </p:sp>
-      <p:sp>
-        <p:nvSpPr>
-          <p:cNvPr id="6" name="">
-            <a:extLst xmlns:a="http://schemas.openxmlformats.org/drawingml/2006/main">
-              <a:ext uri="{FF2B5EF4-FFF2-40B4-BE49-F238E27FC236}">
-                <a16:creationId xmlns:a16="http://schemas.microsoft.com/office/drawing/2014/main" id="{6686B162-C3FB-4F6A-AB23-2AB69A126C55}"/>
-              </a:ext>
-            </a:extLst>
-          </p:cNvPr>
-          <p:cNvSpPr>
-            <a:spLocks xmlns:a="http://schemas.openxmlformats.org/drawingml/2006/main" noGrp="1"/>
-          </p:cNvSpPr>
-          <p:nvPr/>
-        </p:nvSpPr>
-        <p:spPr>
-          <a:xfrm xmlns:a="http://schemas.openxmlformats.org/drawingml/2006/main">
-            <a:off x="742950" y="2733675"/>
-            <a:ext cx="123825" cy="123825"/>
-          </a:xfrm>
-          <a:prstGeom xmlns:a="http://schemas.openxmlformats.org/drawingml/2006/main" prst="roundRect">
-            <a:avLst>
-              <a:gd name="adj" fmla="val 50000"/>
-            </a:avLst>
-          </a:prstGeom>
-          <a:solidFill xmlns:a="http://schemas.openxmlformats.org/drawingml/2006/main">
-            <a:srgbClr val="92C8C1"/>
-          </a:solidFill>
-          <a:ln xmlns:a="http://schemas.openxmlformats.org/drawingml/2006/main" w="9525">
-            <a:solidFill>
-              <a:srgbClr val="92C8C1"/>
-            </a:solidFill>
-          </a:ln>
-        </p:spPr>
-      </p:sp>
-      <p:sp>
-        <p:nvSpPr>
-          <p:cNvPr id="7" name="">
-            <a:extLst xmlns:a="http://schemas.openxmlformats.org/drawingml/2006/main">
-              <a:ext uri="{FF2B5EF4-FFF2-40B4-BE49-F238E27FC236}">
-                <a16:creationId xmlns:a16="http://schemas.microsoft.com/office/drawing/2014/main" id="{2F654787-8541-4310-BD08-350326DEE809}"/>
-              </a:ext>
-            </a:extLst>
-          </p:cNvPr>
-          <p:cNvSpPr>
-            <a:spLocks xmlns:a="http://schemas.openxmlformats.org/drawingml/2006/main" noGrp="1"/>
-          </p:cNvSpPr>
-          <p:nvPr/>
-        </p:nvSpPr>
-        <p:spPr>
-          <a:xfrm xmlns:a="http://schemas.openxmlformats.org/drawingml/2006/main">
-            <a:off x="1066800" y="2667000"/>
-            <a:ext cx="2857500" cy="228600"/>
-          </a:xfrm>
-          <a:prstGeom xmlns:a="http://schemas.openxmlformats.org/drawingml/2006/main" prst="rect">
-            <a:avLst/>
-          </a:prstGeom>
-          <a:noFill xmlns:a="http://schemas.openxmlformats.org/drawingml/2006/main"/>
-          <a:ln xmlns:a="http://schemas.openxmlformats.org/drawingml/2006/main" w="0">
-            <a:noFill/>
-          </a:ln>
-        </p:spPr>
-        <p:txBody>
-          <a:bodyPr xmlns:a="http://schemas.openxmlformats.org/drawingml/2006/main">
-            <a:normAutofit fontScale="66667"/>
-          </a:bodyPr>
-          <a:lstStyle xmlns:a="http://schemas.openxmlformats.org/drawingml/2006/main"/>
-          <a:p xmlns:a="http://schemas.openxmlformats.org/drawingml/2006/main">
-            <a:pPr>
-              <a:buNone/>
-              <a:defRPr sz="1350" b="1">
-                <a:solidFill>
-                  <a:srgbClr val="FFFFFF"/>
-                </a:solidFill>
-                <a:latin typeface="Arial"/>
-                <a:ea typeface="Arial"/>
-                <a:cs typeface="Arial"/>
-              </a:defRPr>
-            </a:pPr>
-            <a:r>
-              <a:rPr sz="1350" b="1">
-                <a:solidFill>
-                  <a:srgbClr val="FFFFFF"/>
-                </a:solidFill>
-                <a:latin typeface="Arial"/>
-                <a:ea typeface="Arial"/>
-                <a:cs typeface="Arial"/>
-              </a:rPr>
-              <a:t>React / TypeScript</a:t>
-            </a:r>
-          </a:p>
-        </p:txBody>
-      </p:sp>
-      <p:sp>
-        <p:nvSpPr>
-          <p:cNvPr id="8" name="">
-            <a:extLst xmlns:a="http://schemas.openxmlformats.org/drawingml/2006/main">
-              <a:ext uri="{FF2B5EF4-FFF2-40B4-BE49-F238E27FC236}">
-                <a16:creationId xmlns:a16="http://schemas.microsoft.com/office/drawing/2014/main" id="{BC868C80-CEE3-4FA1-9252-17B0053946BC}"/>
-              </a:ext>
-            </a:extLst>
-          </p:cNvPr>
-          <p:cNvSpPr>
-            <a:spLocks xmlns:a="http://schemas.openxmlformats.org/drawingml/2006/main" noGrp="1"/>
-          </p:cNvSpPr>
-          <p:nvPr/>
-        </p:nvSpPr>
-        <p:spPr>
-          <a:xfrm xmlns:a="http://schemas.openxmlformats.org/drawingml/2006/main">
-            <a:off x="1066800" y="2933700"/>
-            <a:ext cx="4333875" cy="190500"/>
-          </a:xfrm>
-          <a:prstGeom xmlns:a="http://schemas.openxmlformats.org/drawingml/2006/main" prst="rect">
-            <a:avLst/>
-          </a:prstGeom>
-          <a:noFill xmlns:a="http://schemas.openxmlformats.org/drawingml/2006/main"/>
-          <a:ln xmlns:a="http://schemas.openxmlformats.org/drawingml/2006/main" w="0">
-            <a:noFill/>
-          </a:ln>
-        </p:spPr>
-        <p:txBody>
-          <a:bodyPr xmlns:a="http://schemas.openxmlformats.org/drawingml/2006/main">
-            <a:normAutofit fontScale="61905"/>
-          </a:bodyPr>
-          <a:lstStyle xmlns:a="http://schemas.openxmlformats.org/drawingml/2006/main"/>
-          <a:p xmlns:a="http://schemas.openxmlformats.org/drawingml/2006/main">
-            <a:pPr>
-              <a:buNone/>
-              <a:defRPr sz="1050" b="0">
-                <a:solidFill>
-                  <a:srgbClr val="BFD8D5"/>
-                </a:solidFill>
-                <a:latin typeface="Arial"/>
-                <a:ea typeface="Arial"/>
-                <a:cs typeface="Arial"/>
-              </a:defRPr>
-            </a:pPr>
-            <a:r>
-              <a:rPr sz="1050" b="0">
-                <a:solidFill>
-                  <a:srgbClr val="BFD8D5"/>
-                </a:solidFill>
-                <a:latin typeface="Arial"/>
-                <a:ea typeface="Arial"/>
-                <a:cs typeface="Arial"/>
-              </a:rPr>
-              <a:t>Bengali-first frontend and optional browser speech input</a:t>
-            </a:r>
-          </a:p>
-        </p:txBody>
-      </p:sp>
-      <p:sp>
-        <p:nvSpPr>
-          <p:cNvPr id="9" name="">
-            <a:extLst xmlns:a="http://schemas.openxmlformats.org/drawingml/2006/main">
-              <a:ext uri="{FF2B5EF4-FFF2-40B4-BE49-F238E27FC236}">
-                <a16:creationId xmlns:a16="http://schemas.microsoft.com/office/drawing/2014/main" id="{3284A156-CA81-4736-BB24-1C0341F89B50}"/>
-              </a:ext>
-            </a:extLst>
-          </p:cNvPr>
-          <p:cNvSpPr>
-            <a:spLocks xmlns:a="http://schemas.openxmlformats.org/drawingml/2006/main" noGrp="1"/>
-          </p:cNvSpPr>
-          <p:nvPr/>
-        </p:nvSpPr>
-        <p:spPr>
-          <a:xfrm xmlns:a="http://schemas.openxmlformats.org/drawingml/2006/main">
-            <a:off x="742950" y="3419475"/>
-            <a:ext cx="123825" cy="123825"/>
-          </a:xfrm>
-          <a:prstGeom xmlns:a="http://schemas.openxmlformats.org/drawingml/2006/main" prst="roundRect">
-            <a:avLst>
-              <a:gd name="adj" fmla="val 50000"/>
-            </a:avLst>
-          </a:prstGeom>
-          <a:solidFill xmlns:a="http://schemas.openxmlformats.org/drawingml/2006/main">
-            <a:srgbClr val="00A28F"/>
-          </a:solidFill>
-          <a:ln xmlns:a="http://schemas.openxmlformats.org/drawingml/2006/main" w="9525">
-            <a:solidFill>
-              <a:srgbClr val="00A28F"/>
-            </a:solidFill>
-          </a:ln>
-        </p:spPr>
-      </p:sp>
-      <p:sp>
-        <p:nvSpPr>
-          <p:cNvPr id="10" name="">
-            <a:extLst xmlns:a="http://schemas.openxmlformats.org/drawingml/2006/main">
-              <a:ext uri="{FF2B5EF4-FFF2-40B4-BE49-F238E27FC236}">
-                <a16:creationId xmlns:a16="http://schemas.microsoft.com/office/drawing/2014/main" id="{79965C15-9A99-47BB-84BB-E77199D1FE24}"/>
-              </a:ext>
-            </a:extLst>
-          </p:cNvPr>
-          <p:cNvSpPr>
-            <a:spLocks xmlns:a="http://schemas.openxmlformats.org/drawingml/2006/main" noGrp="1"/>
-          </p:cNvSpPr>
-          <p:nvPr/>
-        </p:nvSpPr>
-        <p:spPr>
-          <a:xfrm xmlns:a="http://schemas.openxmlformats.org/drawingml/2006/main">
-            <a:off x="1066800" y="3352800"/>
-            <a:ext cx="2857500" cy="228600"/>
-          </a:xfrm>
-          <a:prstGeom xmlns:a="http://schemas.openxmlformats.org/drawingml/2006/main" prst="rect">
-            <a:avLst/>
-          </a:prstGeom>
-          <a:noFill xmlns:a="http://schemas.openxmlformats.org/drawingml/2006/main"/>
-          <a:ln xmlns:a="http://schemas.openxmlformats.org/drawingml/2006/main" w="0">
-            <a:noFill/>
-          </a:ln>
-        </p:spPr>
-        <p:txBody>
-          <a:bodyPr xmlns:a="http://schemas.openxmlformats.org/drawingml/2006/main">
-            <a:normAutofit fontScale="66667"/>
-          </a:bodyPr>
-          <a:lstStyle xmlns:a="http://schemas.openxmlformats.org/drawingml/2006/main"/>
-          <a:p xmlns:a="http://schemas.openxmlformats.org/drawingml/2006/main">
-            <a:pPr>
-              <a:buNone/>
-              <a:defRPr sz="1350" b="1">
-                <a:solidFill>
-                  <a:srgbClr val="FFFFFF"/>
-                </a:solidFill>
-                <a:latin typeface="Arial"/>
-                <a:ea typeface="Arial"/>
-                <a:cs typeface="Arial"/>
-              </a:defRPr>
-            </a:pPr>
-            <a:r>
-              <a:rPr sz="1350" b="1">
-                <a:solidFill>
-                  <a:srgbClr val="FFFFFF"/>
-                </a:solidFill>
-                <a:latin typeface="Arial"/>
-                <a:ea typeface="Arial"/>
-                <a:cs typeface="Arial"/>
-              </a:rPr>
-              <a:t>Java 21 / Spring Boot</a:t>
-            </a:r>
-          </a:p>
-        </p:txBody>
-      </p:sp>
-      <p:sp>
-        <p:nvSpPr>
-          <p:cNvPr id="11" name="">
-            <a:extLst xmlns:a="http://schemas.openxmlformats.org/drawingml/2006/main">
-              <a:ext uri="{FF2B5EF4-FFF2-40B4-BE49-F238E27FC236}">
-                <a16:creationId xmlns:a16="http://schemas.microsoft.com/office/drawing/2014/main" id="{30F33F65-CADA-4DE8-8186-924801D9B14B}"/>
-              </a:ext>
-            </a:extLst>
-          </p:cNvPr>
-          <p:cNvSpPr>
-            <a:spLocks xmlns:a="http://schemas.openxmlformats.org/drawingml/2006/main" noGrp="1"/>
-          </p:cNvSpPr>
-          <p:nvPr/>
-        </p:nvSpPr>
-        <p:spPr>
-          <a:xfrm xmlns:a="http://schemas.openxmlformats.org/drawingml/2006/main">
-            <a:off x="1066800" y="3619500"/>
-            <a:ext cx="4333875" cy="190500"/>
-          </a:xfrm>
-          <a:prstGeom xmlns:a="http://schemas.openxmlformats.org/drawingml/2006/main" prst="rect">
-            <a:avLst/>
-          </a:prstGeom>
-          <a:noFill xmlns:a="http://schemas.openxmlformats.org/drawingml/2006/main"/>
-          <a:ln xmlns:a="http://schemas.openxmlformats.org/drawingml/2006/main" w="0">
-            <a:noFill/>
-          </a:ln>
-        </p:spPr>
-        <p:txBody>
-          <a:bodyPr xmlns:a="http://schemas.openxmlformats.org/drawingml/2006/main">
-            <a:normAutofit fontScale="61905"/>
-          </a:bodyPr>
-          <a:lstStyle xmlns:a="http://schemas.openxmlformats.org/drawingml/2006/main"/>
-          <a:p xmlns:a="http://schemas.openxmlformats.org/drawingml/2006/main">
-            <a:pPr>
-              <a:buNone/>
-              <a:defRPr sz="1050" b="0">
-                <a:solidFill>
-                  <a:srgbClr val="BFD8D5"/>
-                </a:solidFill>
-                <a:latin typeface="Arial"/>
-                <a:ea typeface="Arial"/>
-                <a:cs typeface="Arial"/>
-              </a:defRPr>
-            </a:pPr>
-            <a:r>
-              <a:rPr sz="1050" b="0">
-                <a:solidFill>
-                  <a:srgbClr val="BFD8D5"/>
-                </a:solidFill>
-                <a:latin typeface="Arial"/>
-                <a:ea typeface="Arial"/>
-                <a:cs typeface="Arial"/>
-              </a:rPr>
-              <a:t>Deterministic routing and safety fallback</a:t>
-            </a:r>
-          </a:p>
-        </p:txBody>
-      </p:sp>
-      <p:sp>
-        <p:nvSpPr>
-          <p:cNvPr id="12" name="">
-            <a:extLst xmlns:a="http://schemas.openxmlformats.org/drawingml/2006/main">
-              <a:ext uri="{FF2B5EF4-FFF2-40B4-BE49-F238E27FC236}">
-                <a16:creationId xmlns:a16="http://schemas.microsoft.com/office/drawing/2014/main" id="{02F83386-323E-4729-816D-27E9764215AA}"/>
-              </a:ext>
-            </a:extLst>
-          </p:cNvPr>
-          <p:cNvSpPr>
-            <a:spLocks xmlns:a="http://schemas.openxmlformats.org/drawingml/2006/main" noGrp="1"/>
-          </p:cNvSpPr>
-          <p:nvPr/>
-        </p:nvSpPr>
-        <p:spPr>
-          <a:xfrm xmlns:a="http://schemas.openxmlformats.org/drawingml/2006/main">
-            <a:off x="742950" y="4105275"/>
-            <a:ext cx="123825" cy="123825"/>
-          </a:xfrm>
-          <a:prstGeom xmlns:a="http://schemas.openxmlformats.org/drawingml/2006/main" prst="roundRect">
-            <a:avLst>
-              <a:gd name="adj" fmla="val 50000"/>
-            </a:avLst>
-          </a:prstGeom>
-          <a:solidFill xmlns:a="http://schemas.openxmlformats.org/drawingml/2006/main">
-            <a:srgbClr val="92C8C1"/>
-          </a:solidFill>
-          <a:ln xmlns:a="http://schemas.openxmlformats.org/drawingml/2006/main" w="9525">
-            <a:solidFill>
-              <a:srgbClr val="92C8C1"/>
-            </a:solidFill>
-          </a:ln>
-        </p:spPr>
-      </p:sp>
-      <p:sp>
-        <p:nvSpPr>
-          <p:cNvPr id="13" name="">
-            <a:extLst xmlns:a="http://schemas.openxmlformats.org/drawingml/2006/main">
-              <a:ext uri="{FF2B5EF4-FFF2-40B4-BE49-F238E27FC236}">
-                <a16:creationId xmlns:a16="http://schemas.microsoft.com/office/drawing/2014/main" id="{30AE21C8-E495-4A91-A499-1DAFCF61CACE}"/>
-              </a:ext>
-            </a:extLst>
-          </p:cNvPr>
-          <p:cNvSpPr>
-            <a:spLocks xmlns:a="http://schemas.openxmlformats.org/drawingml/2006/main" noGrp="1"/>
-          </p:cNvSpPr>
-          <p:nvPr/>
-        </p:nvSpPr>
-        <p:spPr>
-          <a:xfrm xmlns:a="http://schemas.openxmlformats.org/drawingml/2006/main">
-            <a:off x="1066800" y="4038600"/>
-            <a:ext cx="2857500" cy="228600"/>
-          </a:xfrm>
-          <a:prstGeom xmlns:a="http://schemas.openxmlformats.org/drawingml/2006/main" prst="rect">
-            <a:avLst/>
-          </a:prstGeom>
-          <a:noFill xmlns:a="http://schemas.openxmlformats.org/drawingml/2006/main"/>
-          <a:ln xmlns:a="http://schemas.openxmlformats.org/drawingml/2006/main" w="0">
-            <a:noFill/>
-          </a:ln>
-        </p:spPr>
-        <p:txBody>
-          <a:bodyPr xmlns:a="http://schemas.openxmlformats.org/drawingml/2006/main">
-            <a:normAutofit fontScale="66667"/>
-          </a:bodyPr>
-          <a:lstStyle xmlns:a="http://schemas.openxmlformats.org/drawingml/2006/main"/>
-          <a:p xmlns:a="http://schemas.openxmlformats.org/drawingml/2006/main">
-            <a:pPr>
-              <a:buNone/>
-              <a:defRPr sz="1350" b="1">
-                <a:solidFill>
-                  <a:srgbClr val="FFFFFF"/>
-                </a:solidFill>
-                <a:latin typeface="Arial"/>
-                <a:ea typeface="Arial"/>
-                <a:cs typeface="Arial"/>
-              </a:defRPr>
-            </a:pPr>
-            <a:r>
-              <a:rPr sz="1350" b="1">
-                <a:solidFill>
-                  <a:srgbClr val="FFFFFF"/>
-                </a:solidFill>
-                <a:latin typeface="Arial"/>
-                <a:ea typeface="Arial"/>
-                <a:cs typeface="Arial"/>
-              </a:rPr>
-              <a:t>PostgreSQL</a:t>
-            </a:r>
-          </a:p>
-        </p:txBody>
-      </p:sp>
-      <p:sp>
-        <p:nvSpPr>
-          <p:cNvPr id="14" name="">
-            <a:extLst xmlns:a="http://schemas.openxmlformats.org/drawingml/2006/main">
-              <a:ext uri="{FF2B5EF4-FFF2-40B4-BE49-F238E27FC236}">
-                <a16:creationId xmlns:a16="http://schemas.microsoft.com/office/drawing/2014/main" id="{74793B44-070F-48AD-98A3-02EB6DD6D01A}"/>
-              </a:ext>
-            </a:extLst>
-          </p:cNvPr>
-          <p:cNvSpPr>
-            <a:spLocks xmlns:a="http://schemas.openxmlformats.org/drawingml/2006/main" noGrp="1"/>
-          </p:cNvSpPr>
-          <p:nvPr/>
-        </p:nvSpPr>
-        <p:spPr>
-          <a:xfrm xmlns:a="http://schemas.openxmlformats.org/drawingml/2006/main">
-            <a:off x="1066800" y="4305300"/>
-            <a:ext cx="4333875" cy="190500"/>
-          </a:xfrm>
-          <a:prstGeom xmlns:a="http://schemas.openxmlformats.org/drawingml/2006/main" prst="rect">
-            <a:avLst/>
-          </a:prstGeom>
-          <a:noFill xmlns:a="http://schemas.openxmlformats.org/drawingml/2006/main"/>
-          <a:ln xmlns:a="http://schemas.openxmlformats.org/drawingml/2006/main" w="0">
-            <a:noFill/>
-          </a:ln>
-        </p:spPr>
-        <p:txBody>
-          <a:bodyPr xmlns:a="http://schemas.openxmlformats.org/drawingml/2006/main">
-            <a:normAutofit fontScale="61905"/>
-          </a:bodyPr>
-          <a:lstStyle xmlns:a="http://schemas.openxmlformats.org/drawingml/2006/main"/>
-          <a:p xmlns:a="http://schemas.openxmlformats.org/drawingml/2006/main">
-            <a:pPr>
-              <a:buNone/>
-              <a:defRPr sz="1050" b="0">
-                <a:solidFill>
-                  <a:srgbClr val="BFD8D5"/>
-                </a:solidFill>
-                <a:latin typeface="Arial"/>
-                <a:ea typeface="Arial"/>
-                <a:cs typeface="Arial"/>
-              </a:defRPr>
-            </a:pPr>
-            <a:r>
-              <a:rPr sz="1050" b="0">
-                <a:solidFill>
-                  <a:srgbClr val="BFD8D5"/>
-                </a:solidFill>
-                <a:latin typeface="Arial"/>
-                <a:ea typeface="Arial"/>
-                <a:cs typeface="Arial"/>
-              </a:rPr>
-              <a:t>Demo criteria plus route-specific guidance</a:t>
-            </a:r>
-          </a:p>
-        </p:txBody>
-      </p:sp>
-      <p:sp>
-        <p:nvSpPr>
-          <p:cNvPr id="15" name="">
-            <a:extLst xmlns:a="http://schemas.openxmlformats.org/drawingml/2006/main">
-              <a:ext uri="{FF2B5EF4-FFF2-40B4-BE49-F238E27FC236}">
-                <a16:creationId xmlns:a16="http://schemas.microsoft.com/office/drawing/2014/main" id="{9D347835-93EF-48BE-8F15-41B938788526}"/>
-              </a:ext>
-            </a:extLst>
-          </p:cNvPr>
-          <p:cNvSpPr>
-            <a:spLocks xmlns:a="http://schemas.openxmlformats.org/drawingml/2006/main" noGrp="1"/>
-          </p:cNvSpPr>
-          <p:nvPr/>
-        </p:nvSpPr>
-        <p:spPr>
-          <a:xfrm xmlns:a="http://schemas.openxmlformats.org/drawingml/2006/main">
-            <a:off x="742950" y="4791075"/>
-            <a:ext cx="123825" cy="123825"/>
-          </a:xfrm>
-          <a:prstGeom xmlns:a="http://schemas.openxmlformats.org/drawingml/2006/main" prst="roundRect">
-            <a:avLst>
-              <a:gd name="adj" fmla="val 50000"/>
-            </a:avLst>
-          </a:prstGeom>
-          <a:solidFill xmlns:a="http://schemas.openxmlformats.org/drawingml/2006/main">
-            <a:srgbClr val="92C8C1"/>
-          </a:solidFill>
-          <a:ln xmlns:a="http://schemas.openxmlformats.org/drawingml/2006/main" w="9525">
-            <a:solidFill>
-              <a:srgbClr val="92C8C1"/>
-            </a:solidFill>
-          </a:ln>
-        </p:spPr>
-      </p:sp>
-      <p:sp>
-        <p:nvSpPr>
-          <p:cNvPr id="16" name="">
-            <a:extLst xmlns:a="http://schemas.openxmlformats.org/drawingml/2006/main">
-              <a:ext uri="{FF2B5EF4-FFF2-40B4-BE49-F238E27FC236}">
-                <a16:creationId xmlns:a16="http://schemas.microsoft.com/office/drawing/2014/main" id="{321C489E-24FE-4581-BFAF-C3610823C419}"/>
-              </a:ext>
-            </a:extLst>
-          </p:cNvPr>
-          <p:cNvSpPr>
-            <a:spLocks xmlns:a="http://schemas.openxmlformats.org/drawingml/2006/main" noGrp="1"/>
-          </p:cNvSpPr>
-          <p:nvPr/>
-        </p:nvSpPr>
-        <p:spPr>
-          <a:xfrm xmlns:a="http://schemas.openxmlformats.org/drawingml/2006/main">
-            <a:off x="1066800" y="4724400"/>
-            <a:ext cx="2857500" cy="228600"/>
-          </a:xfrm>
-          <a:prstGeom xmlns:a="http://schemas.openxmlformats.org/drawingml/2006/main" prst="rect">
-            <a:avLst/>
-          </a:prstGeom>
-          <a:noFill xmlns:a="http://schemas.openxmlformats.org/drawingml/2006/main"/>
-          <a:ln xmlns:a="http://schemas.openxmlformats.org/drawingml/2006/main" w="0">
-            <a:noFill/>
-          </a:ln>
-        </p:spPr>
-        <p:txBody>
-          <a:bodyPr xmlns:a="http://schemas.openxmlformats.org/drawingml/2006/main">
-            <a:normAutofit fontScale="66667"/>
-          </a:bodyPr>
-          <a:lstStyle xmlns:a="http://schemas.openxmlformats.org/drawingml/2006/main"/>
-          <a:p xmlns:a="http://schemas.openxmlformats.org/drawingml/2006/main">
-            <a:pPr>
-              <a:buNone/>
-              <a:defRPr sz="1350" b="1">
-                <a:solidFill>
-                  <a:srgbClr val="FFFFFF"/>
-                </a:solidFill>
-                <a:latin typeface="Arial"/>
-                <a:ea typeface="Arial"/>
-                <a:cs typeface="Arial"/>
-              </a:defRPr>
-            </a:pPr>
-            <a:r>
-              <a:rPr sz="1350" b="1">
-                <a:solidFill>
-                  <a:srgbClr val="FFFFFF"/>
-                </a:solidFill>
-                <a:latin typeface="Arial"/>
-                <a:ea typeface="Arial"/>
-                <a:cs typeface="Arial"/>
-              </a:rPr>
-              <a:t>Local Ollama</a:t>
-            </a:r>
-          </a:p>
-        </p:txBody>
-      </p:sp>
-      <p:sp>
-        <p:nvSpPr>
-          <p:cNvPr id="17" name="">
-            <a:extLst xmlns:a="http://schemas.openxmlformats.org/drawingml/2006/main">
-              <a:ext uri="{FF2B5EF4-FFF2-40B4-BE49-F238E27FC236}">
-                <a16:creationId xmlns:a16="http://schemas.microsoft.com/office/drawing/2014/main" id="{EB11A43E-CF26-4237-BB92-C48BF846E263}"/>
-              </a:ext>
-            </a:extLst>
-          </p:cNvPr>
-          <p:cNvSpPr>
-            <a:spLocks xmlns:a="http://schemas.openxmlformats.org/drawingml/2006/main" noGrp="1"/>
-          </p:cNvSpPr>
-          <p:nvPr/>
-        </p:nvSpPr>
-        <p:spPr>
-          <a:xfrm xmlns:a="http://schemas.openxmlformats.org/drawingml/2006/main">
-            <a:off x="1066800" y="4991100"/>
-            <a:ext cx="4333875" cy="190500"/>
-          </a:xfrm>
-          <a:prstGeom xmlns:a="http://schemas.openxmlformats.org/drawingml/2006/main" prst="rect">
-            <a:avLst/>
-          </a:prstGeom>
-          <a:noFill xmlns:a="http://schemas.openxmlformats.org/drawingml/2006/main"/>
-          <a:ln xmlns:a="http://schemas.openxmlformats.org/drawingml/2006/main" w="0">
-            <a:noFill/>
-          </a:ln>
-        </p:spPr>
-        <p:txBody>
-          <a:bodyPr xmlns:a="http://schemas.openxmlformats.org/drawingml/2006/main">
-            <a:normAutofit fontScale="61905"/>
-          </a:bodyPr>
-          <a:lstStyle xmlns:a="http://schemas.openxmlformats.org/drawingml/2006/main"/>
-          <a:p xmlns:a="http://schemas.openxmlformats.org/drawingml/2006/main">
-            <a:pPr>
-              <a:buNone/>
-              <a:defRPr sz="1050" b="0">
-                <a:solidFill>
-                  <a:srgbClr val="BFD8D5"/>
-                </a:solidFill>
-                <a:latin typeface="Arial"/>
-                <a:ea typeface="Arial"/>
-                <a:cs typeface="Arial"/>
-              </a:defRPr>
-            </a:pPr>
-            <a:r>
-              <a:rPr sz="1050" b="0">
-                <a:solidFill>
-                  <a:srgbClr val="BFD8D5"/>
-                </a:solidFill>
-                <a:latin typeface="Arial"/>
-                <a:ea typeface="Arial"/>
-                <a:cs typeface="Arial"/>
-              </a:rPr>
-              <a:t>Optional explanation after Java locks the route</a:t>
-            </a:r>
-          </a:p>
-        </p:txBody>
-      </p:sp>
-      <p:sp>
-        <p:nvSpPr>
-          <p:cNvPr id="18" name="">
-            <a:extLst xmlns:a="http://schemas.openxmlformats.org/drawingml/2006/main">
-              <a:ext uri="{FF2B5EF4-FFF2-40B4-BE49-F238E27FC236}">
-                <a16:creationId xmlns:a16="http://schemas.microsoft.com/office/drawing/2014/main" id="{716ADE15-FF2A-4592-A9F7-6353A4208059}"/>
-              </a:ext>
-            </a:extLst>
-          </p:cNvPr>
-          <p:cNvSpPr>
-            <a:spLocks xmlns:a="http://schemas.openxmlformats.org/drawingml/2006/main" noGrp="1"/>
-          </p:cNvSpPr>
-          <p:nvPr/>
-        </p:nvSpPr>
-        <p:spPr>
-          <a:xfrm xmlns:a="http://schemas.openxmlformats.org/drawingml/2006/main">
-            <a:off x="6334125" y="2314575"/>
-            <a:ext cx="9525" cy="0"/>
-          </a:xfrm>
-          <a:prstGeom xmlns:a="http://schemas.openxmlformats.org/drawingml/2006/main" prst="rect">
-            <a:avLst/>
-          </a:prstGeom>
-          <a:ln xmlns:a="http://schemas.openxmlformats.org/drawingml/2006/main" w="9525"/>
-        </p:spPr>
-      </p:sp>
-      <p:sp>
-        <p:nvSpPr>
-          <p:cNvPr id="19" name="">
-            <a:extLst xmlns:a="http://schemas.openxmlformats.org/drawingml/2006/main">
-              <a:ext uri="{FF2B5EF4-FFF2-40B4-BE49-F238E27FC236}">
-                <a16:creationId xmlns:a16="http://schemas.microsoft.com/office/drawing/2014/main" id="{A63DE9B7-D9FC-4E9B-A21B-5482B8D7BBC0}"/>
-              </a:ext>
-            </a:extLst>
-          </p:cNvPr>
-          <p:cNvSpPr>
-            <a:spLocks xmlns:a="http://schemas.openxmlformats.org/drawingml/2006/main" noGrp="1"/>
-          </p:cNvSpPr>
-          <p:nvPr/>
-        </p:nvSpPr>
-        <p:spPr>
-          <a:xfrm xmlns:a="http://schemas.openxmlformats.org/drawingml/2006/main">
-            <a:off x="6848475" y="2286000"/>
-            <a:ext cx="2381250" cy="171450"/>
-          </a:xfrm>
-          <a:prstGeom xmlns:a="http://schemas.openxmlformats.org/drawingml/2006/main" prst="rect">
-            <a:avLst/>
-          </a:prstGeom>
-          <a:noFill xmlns:a="http://schemas.openxmlformats.org/drawingml/2006/main"/>
-          <a:ln xmlns:a="http://schemas.openxmlformats.org/drawingml/2006/main" w="0">
-            <a:noFill/>
-          </a:ln>
-        </p:spPr>
-        <p:txBody>
-          <a:bodyPr xmlns:a="http://schemas.openxmlformats.org/drawingml/2006/main">
-            <a:normAutofit fontScale="63636"/>
-          </a:bodyPr>
-          <a:lstStyle xmlns:a="http://schemas.openxmlformats.org/drawingml/2006/main"/>
-          <a:p xmlns:a="http://schemas.openxmlformats.org/drawingml/2006/main">
-            <a:pPr>
-              <a:buNone/>
-              <a:defRPr sz="825" b="1">
-                <a:solidFill>
-                  <a:srgbClr val="00A28F"/>
-                </a:solidFill>
-                <a:latin typeface="Arial"/>
-                <a:ea typeface="Arial"/>
-                <a:cs typeface="Arial"/>
-              </a:defRPr>
-            </a:pPr>
-            <a:r>
-              <a:rPr sz="825" b="1">
-                <a:solidFill>
-                  <a:srgbClr val="00A28F"/>
-                </a:solidFill>
-                <a:latin typeface="Arial"/>
-                <a:ea typeface="Arial"/>
-                <a:cs typeface="Arial"/>
-              </a:rPr>
-              <a:t>DELIVERY EVIDENCE</a:t>
-            </a:r>
-          </a:p>
-        </p:txBody>
-      </p:sp>
-      <p:sp>
-        <p:nvSpPr>
-          <p:cNvPr id="20" name="">
-            <a:extLst xmlns:a="http://schemas.openxmlformats.org/drawingml/2006/main">
-              <a:ext uri="{FF2B5EF4-FFF2-40B4-BE49-F238E27FC236}">
-                <a16:creationId xmlns:a16="http://schemas.microsoft.com/office/drawing/2014/main" id="{2714BD0C-2F04-4B33-85F7-89BBC203DD4F}"/>
-              </a:ext>
-            </a:extLst>
-          </p:cNvPr>
-          <p:cNvSpPr>
-            <a:spLocks xmlns:a="http://schemas.openxmlformats.org/drawingml/2006/main" noGrp="1"/>
-          </p:cNvSpPr>
-          <p:nvPr/>
-        </p:nvSpPr>
-        <p:spPr>
-          <a:xfrm xmlns:a="http://schemas.openxmlformats.org/drawingml/2006/main">
-            <a:off x="6848475" y="2705100"/>
-            <a:ext cx="1200150" cy="685800"/>
-          </a:xfrm>
-          <a:prstGeom xmlns:a="http://schemas.openxmlformats.org/drawingml/2006/main" prst="rect">
-            <a:avLst/>
-          </a:prstGeom>
-          <a:noFill xmlns:a="http://schemas.openxmlformats.org/drawingml/2006/main"/>
-          <a:ln xmlns:a="http://schemas.openxmlformats.org/drawingml/2006/main" w="0">
-            <a:noFill/>
-          </a:ln>
-        </p:spPr>
-        <p:txBody>
-          <a:bodyPr xmlns:a="http://schemas.openxmlformats.org/drawingml/2006/main">
-            <a:normAutofit fontScale="92857"/>
-          </a:bodyPr>
-          <a:lstStyle xmlns:a="http://schemas.openxmlformats.org/drawingml/2006/main"/>
-          <a:p xmlns:a="http://schemas.openxmlformats.org/drawingml/2006/main">
-            <a:pPr>
-              <a:buNone/>
-              <a:defRPr sz="4200" b="1">
-                <a:solidFill>
-                  <a:srgbClr val="FFFFFF"/>
-                </a:solidFill>
-                <a:latin typeface="Arial"/>
-                <a:ea typeface="Arial"/>
-                <a:cs typeface="Arial"/>
-              </a:defRPr>
-            </a:pPr>
-            <a:r>
-              <a:rPr sz="4200" b="1">
-                <a:solidFill>
-                  <a:srgbClr val="FFFFFF"/>
-                </a:solidFill>
-                <a:latin typeface="Arial"/>
-                <a:ea typeface="Arial"/>
-                <a:cs typeface="Arial"/>
-              </a:rPr>
-              <a:t>11</a:t>
-            </a:r>
-          </a:p>
-        </p:txBody>
-      </p:sp>
-      <p:sp>
-        <p:nvSpPr>
-          <p:cNvPr id="21" name="">
-            <a:extLst xmlns:a="http://schemas.openxmlformats.org/drawingml/2006/main">
-              <a:ext uri="{FF2B5EF4-FFF2-40B4-BE49-F238E27FC236}">
-                <a16:creationId xmlns:a16="http://schemas.microsoft.com/office/drawing/2014/main" id="{E8B4FCF6-1201-4698-9F1C-F2A5F0FB8C24}"/>
-              </a:ext>
-            </a:extLst>
-          </p:cNvPr>
-          <p:cNvSpPr>
-            <a:spLocks xmlns:a="http://schemas.openxmlformats.org/drawingml/2006/main" noGrp="1"/>
-          </p:cNvSpPr>
-          <p:nvPr/>
-        </p:nvSpPr>
-        <p:spPr>
-          <a:xfrm xmlns:a="http://schemas.openxmlformats.org/drawingml/2006/main">
-            <a:off x="8248650" y="2847975"/>
-            <a:ext cx="2524125" cy="514350"/>
-          </a:xfrm>
-          <a:prstGeom xmlns:a="http://schemas.openxmlformats.org/drawingml/2006/main" prst="rect">
-            <a:avLst/>
-          </a:prstGeom>
-          <a:noFill xmlns:a="http://schemas.openxmlformats.org/drawingml/2006/main"/>
-          <a:ln xmlns:a="http://schemas.openxmlformats.org/drawingml/2006/main" w="0">
-            <a:noFill/>
-          </a:ln>
-        </p:spPr>
-        <p:txBody>
-          <a:bodyPr xmlns:a="http://schemas.openxmlformats.org/drawingml/2006/main">
-            <a:normAutofit fontScale="88095"/>
-          </a:bodyPr>
-          <a:lstStyle xmlns:a="http://schemas.openxmlformats.org/drawingml/2006/main"/>
-          <a:p xmlns:a="http://schemas.openxmlformats.org/drawingml/2006/main">
-            <a:pPr>
-              <a:buNone/>
-              <a:defRPr sz="1575" b="0">
-                <a:solidFill>
-                  <a:srgbClr val="D5EBE8"/>
-                </a:solidFill>
-                <a:latin typeface="Arial"/>
-                <a:ea typeface="Arial"/>
-                <a:cs typeface="Arial"/>
-              </a:defRPr>
-            </a:pPr>
-            <a:r>
-              <a:rPr sz="1575" b="0">
-                <a:solidFill>
-                  <a:srgbClr val="D5EBE8"/>
-                </a:solidFill>
-                <a:latin typeface="Arial"/>
-                <a:ea typeface="Arial"/>
-                <a:cs typeface="Arial"/>
-              </a:rPr>
-              <a:t>linked Jira delivery stories</a:t>
-            </a:r>
-          </a:p>
-          <a:p xmlns:a="http://schemas.openxmlformats.org/drawingml/2006/main">
-            <a:pPr>
-              <a:buNone/>
-              <a:defRPr sz="1575" b="0">
-                <a:solidFill>
-                  <a:srgbClr val="D5EBE8"/>
-                </a:solidFill>
-                <a:latin typeface="Arial"/>
-                <a:ea typeface="Arial"/>
-                <a:cs typeface="Arial"/>
-              </a:defRPr>
-            </a:pPr>
-            <a:r>
-              <a:rPr sz="1575" b="0">
-                <a:solidFill>
-                  <a:srgbClr val="D5EBE8"/>
-                </a:solidFill>
-                <a:latin typeface="Arial"/>
-                <a:ea typeface="Arial"/>
-                <a:cs typeface="Arial"/>
-              </a:rPr>
-              <a:t>resolved</a:t>
-            </a:r>
-          </a:p>
-        </p:txBody>
-      </p:sp>
-      <p:sp>
-        <p:nvSpPr>
-          <p:cNvPr id="22" name="">
-            <a:extLst xmlns:a="http://schemas.openxmlformats.org/drawingml/2006/main">
-              <a:ext uri="{FF2B5EF4-FFF2-40B4-BE49-F238E27FC236}">
-                <a16:creationId xmlns:a16="http://schemas.microsoft.com/office/drawing/2014/main" id="{876F3826-4576-4822-A781-C4BE01F02315}"/>
-              </a:ext>
-            </a:extLst>
-          </p:cNvPr>
-          <p:cNvSpPr>
-            <a:spLocks xmlns:a="http://schemas.openxmlformats.org/drawingml/2006/main" noGrp="1"/>
-          </p:cNvSpPr>
-          <p:nvPr/>
-        </p:nvSpPr>
-        <p:spPr>
-          <a:xfrm xmlns:a="http://schemas.openxmlformats.org/drawingml/2006/main">
-            <a:off x="6848475" y="3733800"/>
-            <a:ext cx="3524250" cy="19050"/>
-          </a:xfrm>
-          <a:prstGeom xmlns:a="http://schemas.openxmlformats.org/drawingml/2006/main" prst="rect">
-            <a:avLst/>
-          </a:prstGeom>
-          <a:solidFill xmlns:a="http://schemas.openxmlformats.org/drawingml/2006/main">
-            <a:srgbClr val="00A28F"/>
-          </a:solidFill>
-          <a:ln xmlns:a="http://schemas.openxmlformats.org/drawingml/2006/main" w="9525">
-            <a:solidFill>
-              <a:srgbClr val="00A28F"/>
-            </a:solidFill>
-          </a:ln>
-        </p:spPr>
-      </p:sp>
-      <p:sp>
-        <p:nvSpPr>
-          <p:cNvPr id="23" name="">
-            <a:extLst xmlns:a="http://schemas.openxmlformats.org/drawingml/2006/main">
-              <a:ext uri="{FF2B5EF4-FFF2-40B4-BE49-F238E27FC236}">
-                <a16:creationId xmlns:a16="http://schemas.microsoft.com/office/drawing/2014/main" id="{6A9931D8-E4BA-4B19-8B07-BED3594FA3F7}"/>
-              </a:ext>
-            </a:extLst>
-          </p:cNvPr>
-          <p:cNvSpPr>
-            <a:spLocks xmlns:a="http://schemas.openxmlformats.org/drawingml/2006/main" noGrp="1"/>
-          </p:cNvSpPr>
-          <p:nvPr/>
-        </p:nvSpPr>
-        <p:spPr>
-          <a:xfrm xmlns:a="http://schemas.openxmlformats.org/drawingml/2006/main">
-            <a:off x="6848475" y="4076700"/>
-            <a:ext cx="2381250" cy="209550"/>
-          </a:xfrm>
-          <a:prstGeom xmlns:a="http://schemas.openxmlformats.org/drawingml/2006/main" prst="rect">
-            <a:avLst/>
-          </a:prstGeom>
-          <a:noFill xmlns:a="http://schemas.openxmlformats.org/drawingml/2006/main"/>
-          <a:ln xmlns:a="http://schemas.openxmlformats.org/drawingml/2006/main" w="0">
-            <a:noFill/>
-          </a:ln>
-        </p:spPr>
-        <p:txBody>
-          <a:bodyPr xmlns:a="http://schemas.openxmlformats.org/drawingml/2006/main">
-            <a:normAutofit fontScale="64583"/>
-          </a:bodyPr>
-          <a:lstStyle xmlns:a="http://schemas.openxmlformats.org/drawingml/2006/main"/>
-          <a:p xmlns:a="http://schemas.openxmlformats.org/drawingml/2006/main">
-            <a:pPr>
-              <a:buNone/>
-              <a:defRPr sz="1200" b="1">
-                <a:solidFill>
-                  <a:srgbClr val="FFFFFF"/>
-                </a:solidFill>
-                <a:latin typeface="Arial"/>
-                <a:ea typeface="Arial"/>
-                <a:cs typeface="Arial"/>
-              </a:defRPr>
-            </a:pPr>
-            <a:r>
-              <a:rPr sz="1200" b="1">
-                <a:solidFill>
-                  <a:srgbClr val="FFFFFF"/>
-                </a:solidFill>
-                <a:latin typeface="Arial"/>
-                <a:ea typeface="Arial"/>
-                <a:cs typeface="Arial"/>
-              </a:rPr>
-              <a:t>Current automated evidence</a:t>
-            </a:r>
-          </a:p>
-        </p:txBody>
-      </p:sp>
-      <p:sp>
-        <p:nvSpPr>
-          <p:cNvPr id="24" name="">
-            <a:extLst xmlns:a="http://schemas.openxmlformats.org/drawingml/2006/main">
-              <a:ext uri="{FF2B5EF4-FFF2-40B4-BE49-F238E27FC236}">
-                <a16:creationId xmlns:a16="http://schemas.microsoft.com/office/drawing/2014/main" id="{0EFDAB26-57D1-45A1-9B86-A62298016CCB}"/>
-              </a:ext>
-            </a:extLst>
-          </p:cNvPr>
-          <p:cNvSpPr>
-            <a:spLocks xmlns:a="http://schemas.openxmlformats.org/drawingml/2006/main" noGrp="1"/>
-          </p:cNvSpPr>
-          <p:nvPr/>
-        </p:nvSpPr>
-        <p:spPr>
-          <a:xfrm xmlns:a="http://schemas.openxmlformats.org/drawingml/2006/main">
-            <a:off x="6848475" y="4419600"/>
-            <a:ext cx="3619500" cy="819150"/>
-          </a:xfrm>
-          <a:prstGeom xmlns:a="http://schemas.openxmlformats.org/drawingml/2006/main" prst="rect">
-            <a:avLst/>
-          </a:prstGeom>
-          <a:noFill xmlns:a="http://schemas.openxmlformats.org/drawingml/2006/main"/>
-          <a:ln xmlns:a="http://schemas.openxmlformats.org/drawingml/2006/main" w="0">
-            <a:noFill/>
-          </a:ln>
-        </p:spPr>
-        <p:txBody>
-          <a:bodyPr xmlns:a="http://schemas.openxmlformats.org/drawingml/2006/main">
-            <a:normAutofit fontScale="99479"/>
-          </a:bodyPr>
-          <a:lstStyle xmlns:a="http://schemas.openxmlformats.org/drawingml/2006/main"/>
-          <a:p xmlns:a="http://schemas.openxmlformats.org/drawingml/2006/main">
-            <a:pPr>
-              <a:buNone/>
-              <a:defRPr sz="1200" b="0">
-                <a:solidFill>
-                  <a:srgbClr val="BFD8D5"/>
-                </a:solidFill>
-                <a:latin typeface="Arial"/>
-                <a:ea typeface="Arial"/>
-                <a:cs typeface="Arial"/>
-              </a:defRPr>
-            </a:pPr>
-            <a:r>
-              <a:rPr sz="1200" b="0">
-                <a:solidFill>
-                  <a:srgbClr val="BFD8D5"/>
-                </a:solidFill>
-                <a:latin typeface="Arial"/>
-                <a:ea typeface="Arial"/>
-                <a:cs typeface="Arial"/>
-              </a:rPr>
-              <a:t>Java unit tests cover the routing policy and output validation. Wider integration, end-to-end, accessibility, usability, and clinical validation remain pilot gates.</a:t>
-            </a:r>
-          </a:p>
-        </p:txBody>
-      </p:sp>
-      <p:sp>
-        <p:nvSpPr>
-          <p:cNvPr id="25" name="">
-            <a:extLst xmlns:a="http://schemas.openxmlformats.org/drawingml/2006/main">
-              <a:ext uri="{FF2B5EF4-FFF2-40B4-BE49-F238E27FC236}">
-                <a16:creationId xmlns:a16="http://schemas.microsoft.com/office/drawing/2014/main" id="{B79FF007-F90B-431D-9BE2-B5CAABF9CC9A}"/>
-              </a:ext>
-            </a:extLst>
-          </p:cNvPr>
-          <p:cNvSpPr>
-            <a:spLocks xmlns:a="http://schemas.openxmlformats.org/drawingml/2006/main" noGrp="1"/>
-          </p:cNvSpPr>
-          <p:nvPr/>
-        </p:nvSpPr>
-        <p:spPr>
-          <a:xfrm xmlns:a="http://schemas.openxmlformats.org/drawingml/2006/main">
-            <a:off x="723900" y="6181725"/>
-            <a:ext cx="5524500" cy="152400"/>
-          </a:xfrm>
-          <a:prstGeom xmlns:a="http://schemas.openxmlformats.org/drawingml/2006/main" prst="rect">
-            <a:avLst/>
-          </a:prstGeom>
-          <a:noFill xmlns:a="http://schemas.openxmlformats.org/drawingml/2006/main"/>
-          <a:ln xmlns:a="http://schemas.openxmlformats.org/drawingml/2006/main" w="0">
-            <a:noFill/>
-          </a:ln>
-        </p:spPr>
-        <p:txBody>
-          <a:bodyPr xmlns:a="http://schemas.openxmlformats.org/drawingml/2006/main">
-            <a:normAutofit fontScale="53333"/>
-          </a:bodyPr>
-          <a:lstStyle xmlns:a="http://schemas.openxmlformats.org/drawingml/2006/main"/>
-          <a:p xmlns:a="http://schemas.openxmlformats.org/drawingml/2006/main">
-            <a:pPr>
-              <a:buNone/>
-              <a:defRPr sz="750" b="0">
-                <a:solidFill>
-                  <a:srgbClr val="8AB6B0"/>
-                </a:solidFill>
-                <a:latin typeface="Arial"/>
-                <a:ea typeface="Arial"/>
-                <a:cs typeface="Arial"/>
-              </a:defRPr>
-            </a:pPr>
-            <a:r>
-              <a:rPr sz="750" b="0">
-                <a:solidFill>
-                  <a:srgbClr val="8AB6B0"/>
-                </a:solidFill>
-                <a:latin typeface="Arial"/>
-                <a:ea typeface="Arial"/>
-                <a:cs typeface="Arial"/>
-              </a:rPr>
-              <a:t>Source: Jira Dashboard 10001 and repository test suite</a:t>
-            </a:r>
-          </a:p>
-        </p:txBody>
-      </p:sp>
-      <p:sp>
-        <p:nvSpPr>
-          <p:cNvPr id="27" name="">
-            <a:extLst xmlns:a="http://schemas.openxmlformats.org/drawingml/2006/main">
-              <a:ext uri="{FF2B5EF4-FFF2-40B4-BE49-F238E27FC236}">
-                <a16:creationId xmlns:a16="http://schemas.microsoft.com/office/drawing/2014/main" id="{CF6B5FE1-74E7-44AD-BB3A-9595E388B49E}"/>
-              </a:ext>
-            </a:extLst>
-          </p:cNvPr>
-          <p:cNvSpPr>
-            <a:spLocks xmlns:a="http://schemas.openxmlformats.org/drawingml/2006/main" noGrp="1"/>
-          </p:cNvSpPr>
-          <p:nvPr/>
-        </p:nvSpPr>
-        <p:spPr>
-          <a:xfrm xmlns:a="http://schemas.openxmlformats.org/drawingml/2006/main">
-            <a:off x="0" y="0"/>
-            <a:ext cx="12192000" cy="6858000"/>
-          </a:xfrm>
-          <a:prstGeom xmlns:a="http://schemas.openxmlformats.org/drawingml/2006/main" prst="rect">
-            <a:avLst/>
-          </a:prstGeom>
-          <a:solidFill xmlns:a="http://schemas.openxmlformats.org/drawingml/2006/main">
-            <a:srgbClr val="E9E7F5"/>
-          </a:solidFill>
-          <a:ln xmlns:a="http://schemas.openxmlformats.org/drawingml/2006/main" w="0">
-            <a:noFill/>
-          </a:ln>
-        </p:spPr>
-      </p:sp>
-      <p:sp>
-        <p:nvSpPr>
-          <p:cNvPr id="28" name="">
-            <a:extLst xmlns:a="http://schemas.openxmlformats.org/drawingml/2006/main">
-              <a:ext uri="{FF2B5EF4-FFF2-40B4-BE49-F238E27FC236}">
-                <a16:creationId xmlns:a16="http://schemas.microsoft.com/office/drawing/2014/main" id="{EC8DFB18-839B-4CF8-B15C-D07331E45DCB}"/>
-              </a:ext>
-            </a:extLst>
-          </p:cNvPr>
-          <p:cNvSpPr>
-            <a:spLocks xmlns:a="http://schemas.openxmlformats.org/drawingml/2006/main" noGrp="1"/>
-          </p:cNvSpPr>
-          <p:nvPr/>
-        </p:nvSpPr>
-        <p:spPr>
-          <a:xfrm xmlns:a="http://schemas.openxmlformats.org/drawingml/2006/main">
-            <a:off x="685800" y="419100"/>
-            <a:ext cx="666750" cy="209550"/>
-          </a:xfrm>
-          <a:prstGeom xmlns:a="http://schemas.openxmlformats.org/drawingml/2006/main" prst="rect">
-            <a:avLst/>
-          </a:prstGeom>
-          <a:noFill xmlns:a="http://schemas.openxmlformats.org/drawingml/2006/main"/>
-          <a:ln xmlns:a="http://schemas.openxmlformats.org/drawingml/2006/main" w="0">
-            <a:noFill/>
-          </a:ln>
-        </p:spPr>
-        <p:txBody>
-          <a:bodyPr xmlns:a="http://schemas.openxmlformats.org/drawingml/2006/main">
-            <a:noAutofit/>
-          </a:bodyPr>
-          <a:lstStyle xmlns:a="http://schemas.openxmlformats.org/drawingml/2006/main"/>
-          <a:p xmlns:a="http://schemas.openxmlformats.org/drawingml/2006/main">
-            <a:pPr>
-              <a:defRPr sz="1200" b="1">
-                <a:solidFill>
-                  <a:srgbClr val="E7A048"/>
-                </a:solidFill>
-                <a:latin typeface="Arial"/>
-                <a:ea typeface="Arial"/>
-                <a:cs typeface="Arial"/>
-              </a:defRPr>
-            </a:pPr>
-            <a:r>
-              <a:rPr sz="1200" b="1">
-                <a:solidFill>
-                  <a:srgbClr val="E7A048"/>
-                </a:solidFill>
-                <a:latin typeface="Arial"/>
-                <a:ea typeface="Arial"/>
-                <a:cs typeface="Arial"/>
-              </a:rPr>
-              <a:t>05</a:t>
-            </a:r>
-          </a:p>
-        </p:txBody>
-      </p:sp>
-      <p:sp>
-        <p:nvSpPr>
-          <p:cNvPr id="29" name="">
-            <a:extLst xmlns:a="http://schemas.openxmlformats.org/drawingml/2006/main">
-              <a:ext uri="{FF2B5EF4-FFF2-40B4-BE49-F238E27FC236}">
-                <a16:creationId xmlns:a16="http://schemas.microsoft.com/office/drawing/2014/main" id="{7F14BA99-94B4-45A6-812D-B2F72A20651D}"/>
-              </a:ext>
-            </a:extLst>
-          </p:cNvPr>
-          <p:cNvSpPr>
-            <a:spLocks xmlns:a="http://schemas.openxmlformats.org/drawingml/2006/main" noGrp="1"/>
-          </p:cNvSpPr>
-          <p:nvPr/>
-        </p:nvSpPr>
-        <p:spPr>
-          <a:xfrm xmlns:a="http://schemas.openxmlformats.org/drawingml/2006/main">
-            <a:off x="9810750" y="428625"/>
-            <a:ext cx="1695450" cy="190500"/>
-          </a:xfrm>
-          <a:prstGeom xmlns:a="http://schemas.openxmlformats.org/drawingml/2006/main" prst="rect">
-            <a:avLst/>
-          </a:prstGeom>
-          <a:noFill xmlns:a="http://schemas.openxmlformats.org/drawingml/2006/main"/>
-          <a:ln xmlns:a="http://schemas.openxmlformats.org/drawingml/2006/main" w="0">
-            <a:noFill/>
-          </a:ln>
-        </p:spPr>
-        <p:txBody>
-          <a:bodyPr xmlns:a="http://schemas.openxmlformats.org/drawingml/2006/main">
-            <a:noAutofit/>
-          </a:bodyPr>
-          <a:lstStyle xmlns:a="http://schemas.openxmlformats.org/drawingml/2006/main"/>
-          <a:p xmlns:a="http://schemas.openxmlformats.org/drawingml/2006/main">
-            <a:pPr algn="r">
-              <a:defRPr sz="975" b="1">
-                <a:solidFill>
-                  <a:srgbClr val="4656A8"/>
-                </a:solidFill>
-                <a:latin typeface="Arial"/>
-                <a:ea typeface="Arial"/>
-                <a:cs typeface="Arial"/>
-              </a:defRPr>
-            </a:pPr>
-            <a:r>
-              <a:rPr sz="975" b="1">
-                <a:solidFill>
-                  <a:srgbClr val="4656A8"/>
-                </a:solidFill>
-                <a:latin typeface="Arial"/>
-                <a:ea typeface="Arial"/>
-                <a:cs typeface="Arial"/>
-              </a:rPr>
-              <a:t>NETRAJYOTI AI</a:t>
-            </a:r>
-          </a:p>
-        </p:txBody>
-      </p:sp>
-      <p:sp>
-        <p:nvSpPr>
-          <p:cNvPr id="30" name="">
-            <a:extLst xmlns:a="http://schemas.openxmlformats.org/drawingml/2006/main">
-              <a:ext uri="{FF2B5EF4-FFF2-40B4-BE49-F238E27FC236}">
-                <a16:creationId xmlns:a16="http://schemas.microsoft.com/office/drawing/2014/main" id="{01798C12-3B3F-4B5B-BF5C-72A65D2F4F9E}"/>
-              </a:ext>
-            </a:extLst>
-          </p:cNvPr>
-          <p:cNvSpPr>
-            <a:spLocks xmlns:a="http://schemas.openxmlformats.org/drawingml/2006/main" noGrp="1"/>
-          </p:cNvSpPr>
-          <p:nvPr/>
-        </p:nvSpPr>
-        <p:spPr>
-          <a:xfrm xmlns:a="http://schemas.openxmlformats.org/drawingml/2006/main">
-            <a:off x="685800" y="762000"/>
-            <a:ext cx="10287000" cy="457200"/>
-          </a:xfrm>
-          <a:prstGeom xmlns:a="http://schemas.openxmlformats.org/drawingml/2006/main" prst="rect">
-            <a:avLst/>
-          </a:prstGeom>
-          <a:noFill xmlns:a="http://schemas.openxmlformats.org/drawingml/2006/main"/>
-          <a:ln xmlns:a="http://schemas.openxmlformats.org/drawingml/2006/main" w="0">
-            <a:noFill/>
-          </a:ln>
-        </p:spPr>
-        <p:txBody>
-          <a:bodyPr xmlns:a="http://schemas.openxmlformats.org/drawingml/2006/main">
-            <a:noAutofit/>
-          </a:bodyPr>
-          <a:lstStyle xmlns:a="http://schemas.openxmlformats.org/drawingml/2006/main"/>
-          <a:p xmlns:a="http://schemas.openxmlformats.org/drawingml/2006/main">
-            <a:pPr>
-              <a:defRPr sz="2550" b="1">
-                <a:solidFill>
-                  <a:srgbClr val="202A44"/>
-                </a:solidFill>
-                <a:latin typeface="Arial"/>
-                <a:ea typeface="Arial"/>
-                <a:cs typeface="Arial"/>
-              </a:defRPr>
-            </a:pPr>
-            <a:r>
-              <a:rPr sz="2550" b="1">
-                <a:solidFill>
-                  <a:srgbClr val="202A44"/>
-                </a:solidFill>
-                <a:latin typeface="Arial"/>
-                <a:ea typeface="Arial"/>
-                <a:cs typeface="Arial"/>
-              </a:rPr>
-              <a:t>User journey</a:t>
-            </a:r>
-          </a:p>
-        </p:txBody>
-      </p:sp>
-      <p:sp>
-        <p:nvSpPr>
-          <p:cNvPr id="31" name="">
-            <a:extLst xmlns:a="http://schemas.openxmlformats.org/drawingml/2006/main">
-              <a:ext uri="{FF2B5EF4-FFF2-40B4-BE49-F238E27FC236}">
-                <a16:creationId xmlns:a16="http://schemas.microsoft.com/office/drawing/2014/main" id="{279575AA-2EE5-46D2-8553-92687C027905}"/>
-              </a:ext>
-            </a:extLst>
-          </p:cNvPr>
-          <p:cNvSpPr>
-            <a:spLocks xmlns:a="http://schemas.openxmlformats.org/drawingml/2006/main" noGrp="1"/>
-          </p:cNvSpPr>
-          <p:nvPr/>
-        </p:nvSpPr>
-        <p:spPr>
-          <a:xfrm xmlns:a="http://schemas.openxmlformats.org/drawingml/2006/main">
-            <a:off x="704850" y="1343025"/>
-            <a:ext cx="10287000" cy="266700"/>
-          </a:xfrm>
-          <a:prstGeom xmlns:a="http://schemas.openxmlformats.org/drawingml/2006/main" prst="rect">
-            <a:avLst/>
-          </a:prstGeom>
-          <a:noFill xmlns:a="http://schemas.openxmlformats.org/drawingml/2006/main"/>
-          <a:ln xmlns:a="http://schemas.openxmlformats.org/drawingml/2006/main" w="0">
-            <a:noFill/>
-          </a:ln>
-        </p:spPr>
-        <p:txBody>
-          <a:bodyPr xmlns:a="http://schemas.openxmlformats.org/drawingml/2006/main">
-            <a:noAutofit/>
-          </a:bodyPr>
-          <a:lstStyle xmlns:a="http://schemas.openxmlformats.org/drawingml/2006/main"/>
-          <a:p xmlns:a="http://schemas.openxmlformats.org/drawingml/2006/main">
-            <a:pPr>
-              <a:defRPr sz="1275">
-                <a:solidFill>
-                  <a:srgbClr val="56647A"/>
-                </a:solidFill>
-                <a:latin typeface="Arial"/>
-                <a:ea typeface="Arial"/>
-                <a:cs typeface="Arial"/>
-              </a:defRPr>
-            </a:pPr>
-            <a:r>
-              <a:rPr sz="1275">
-                <a:solidFill>
-                  <a:srgbClr val="56647A"/>
-                </a:solidFill>
-                <a:latin typeface="Arial"/>
-                <a:ea typeface="Arial"/>
-                <a:cs typeface="Arial"/>
-              </a:rPr>
-              <a:t>A single Bengali-first flow moves the user from consent to a clear next action</a:t>
-            </a:r>
-          </a:p>
-        </p:txBody>
-      </p:sp>
-      <p:sp>
-        <p:nvSpPr>
-          <p:cNvPr id="32" name="">
-            <a:extLst xmlns:a="http://schemas.openxmlformats.org/drawingml/2006/main">
-              <a:ext uri="{FF2B5EF4-FFF2-40B4-BE49-F238E27FC236}">
-                <a16:creationId xmlns:a16="http://schemas.microsoft.com/office/drawing/2014/main" id="{A9EBF57E-7760-4F46-A9B0-F3DC8876327C}"/>
-              </a:ext>
-            </a:extLst>
-          </p:cNvPr>
-          <p:cNvSpPr>
-            <a:spLocks xmlns:a="http://schemas.openxmlformats.org/drawingml/2006/main" noGrp="1"/>
-          </p:cNvSpPr>
-          <p:nvPr/>
-        </p:nvSpPr>
-        <p:spPr>
-          <a:xfrm xmlns:a="http://schemas.openxmlformats.org/drawingml/2006/main">
-            <a:off x="685800" y="1752600"/>
-            <a:ext cx="10820400" cy="19050"/>
-          </a:xfrm>
-          <a:prstGeom xmlns:a="http://schemas.openxmlformats.org/drawingml/2006/main" prst="rect">
-            <a:avLst/>
-          </a:prstGeom>
-          <a:solidFill xmlns:a="http://schemas.openxmlformats.org/drawingml/2006/main">
-            <a:srgbClr val="D7D0C7"/>
-          </a:solidFill>
-          <a:ln xmlns:a="http://schemas.openxmlformats.org/drawingml/2006/main" w="0">
-            <a:noFill/>
-          </a:ln>
-        </p:spPr>
-      </p:sp>
-      <p:sp>
-        <p:nvSpPr>
-          <p:cNvPr id="33" name="">
-            <a:extLst xmlns:a="http://schemas.openxmlformats.org/drawingml/2006/main">
-              <a:ext uri="{FF2B5EF4-FFF2-40B4-BE49-F238E27FC236}">
-                <a16:creationId xmlns:a16="http://schemas.microsoft.com/office/drawing/2014/main" id="{B04BFB26-CDAD-490E-82ED-3716C6077E25}"/>
-              </a:ext>
-            </a:extLst>
-          </p:cNvPr>
-          <p:cNvSpPr>
-            <a:spLocks xmlns:a="http://schemas.openxmlformats.org/drawingml/2006/main" noGrp="1"/>
-          </p:cNvSpPr>
-          <p:nvPr/>
-        </p:nvSpPr>
-        <p:spPr>
-          <a:xfrm xmlns:a="http://schemas.openxmlformats.org/drawingml/2006/main">
-            <a:off x="1095375" y="3486150"/>
-            <a:ext cx="9620250" cy="38100"/>
-          </a:xfrm>
-          <a:prstGeom xmlns:a="http://schemas.openxmlformats.org/drawingml/2006/main" prst="rect">
-            <a:avLst/>
-          </a:prstGeom>
-          <a:solidFill xmlns:a="http://schemas.openxmlformats.org/drawingml/2006/main">
-            <a:srgbClr val="4656A8"/>
-          </a:solidFill>
-          <a:ln xmlns:a="http://schemas.openxmlformats.org/drawingml/2006/main" w="0">
-            <a:noFill/>
-          </a:ln>
-        </p:spPr>
-      </p:sp>
-      <p:sp>
-        <p:nvSpPr>
-          <p:cNvPr id="34" name="">
-            <a:extLst xmlns:a="http://schemas.openxmlformats.org/drawingml/2006/main">
-              <a:ext uri="{FF2B5EF4-FFF2-40B4-BE49-F238E27FC236}">
-                <a16:creationId xmlns:a16="http://schemas.microsoft.com/office/drawing/2014/main" id="{DE5589C0-2873-4E35-93B6-0D035BB4D979}"/>
-              </a:ext>
-            </a:extLst>
-          </p:cNvPr>
-          <p:cNvSpPr>
-            <a:spLocks xmlns:a="http://schemas.openxmlformats.org/drawingml/2006/main" noGrp="1"/>
-          </p:cNvSpPr>
-          <p:nvPr/>
-        </p:nvSpPr>
-        <p:spPr>
-          <a:xfrm xmlns:a="http://schemas.openxmlformats.org/drawingml/2006/main">
-            <a:off x="1047750" y="3238500"/>
-            <a:ext cx="495300" cy="495300"/>
-          </a:xfrm>
-          <a:prstGeom xmlns:a="http://schemas.openxmlformats.org/drawingml/2006/main" prst="ellipse">
-            <a:avLst/>
-          </a:prstGeom>
-          <a:solidFill xmlns:a="http://schemas.openxmlformats.org/drawingml/2006/main">
-            <a:srgbClr val="237A7A"/>
-          </a:solidFill>
-          <a:ln xmlns:a="http://schemas.openxmlformats.org/drawingml/2006/main" w="0">
-            <a:noFill/>
-          </a:ln>
-        </p:spPr>
-      </p:sp>
-      <p:sp>
-        <p:nvSpPr>
-          <p:cNvPr id="35" name="">
-            <a:extLst xmlns:a="http://schemas.openxmlformats.org/drawingml/2006/main">
-              <a:ext uri="{FF2B5EF4-FFF2-40B4-BE49-F238E27FC236}">
-                <a16:creationId xmlns:a16="http://schemas.microsoft.com/office/drawing/2014/main" id="{1D3BF33D-F61E-4918-9B00-6FE07D20D5DE}"/>
-              </a:ext>
-            </a:extLst>
-          </p:cNvPr>
-          <p:cNvSpPr>
-            <a:spLocks xmlns:a="http://schemas.openxmlformats.org/drawingml/2006/main" noGrp="1"/>
-          </p:cNvSpPr>
-          <p:nvPr/>
-        </p:nvSpPr>
-        <p:spPr>
-          <a:xfrm xmlns:a="http://schemas.openxmlformats.org/drawingml/2006/main">
-            <a:off x="1047750" y="3362325"/>
-            <a:ext cx="495300" cy="190500"/>
-          </a:xfrm>
-          <a:prstGeom xmlns:a="http://schemas.openxmlformats.org/drawingml/2006/main" prst="rect">
-            <a:avLst/>
-          </a:prstGeom>
-          <a:noFill xmlns:a="http://schemas.openxmlformats.org/drawingml/2006/main"/>
-          <a:ln xmlns:a="http://schemas.openxmlformats.org/drawingml/2006/main" w="0">
-            <a:noFill/>
-          </a:ln>
-        </p:spPr>
-        <p:txBody>
-          <a:bodyPr xmlns:a="http://schemas.openxmlformats.org/drawingml/2006/main">
-            <a:noAutofit/>
-          </a:bodyPr>
-          <a:lstStyle xmlns:a="http://schemas.openxmlformats.org/drawingml/2006/main"/>
-          <a:p xmlns:a="http://schemas.openxmlformats.org/drawingml/2006/main">
-            <a:pPr algn="ctr">
-              <a:defRPr sz="1425" b="1">
-                <a:solidFill>
-                  <a:srgbClr val="FFFFFF"/>
-                </a:solidFill>
-                <a:latin typeface="Arial"/>
-                <a:ea typeface="Arial"/>
-                <a:cs typeface="Arial"/>
-              </a:defRPr>
-            </a:pPr>
-            <a:r>
-              <a:rPr sz="1425" b="1">
-                <a:solidFill>
-                  <a:srgbClr val="FFFFFF"/>
-                </a:solidFill>
-                <a:latin typeface="Arial"/>
-                <a:ea typeface="Arial"/>
-                <a:cs typeface="Arial"/>
-              </a:rPr>
-              <a:t>1</a:t>
-            </a:r>
-          </a:p>
-        </p:txBody>
-      </p:sp>
-      <p:sp>
-        <p:nvSpPr>
-          <p:cNvPr id="36" name="">
-            <a:extLst xmlns:a="http://schemas.openxmlformats.org/drawingml/2006/main">
-              <a:ext uri="{FF2B5EF4-FFF2-40B4-BE49-F238E27FC236}">
-                <a16:creationId xmlns:a16="http://schemas.microsoft.com/office/drawing/2014/main" id="{09D5ACE1-E941-40AF-99F4-9B8B65213C20}"/>
-              </a:ext>
-            </a:extLst>
-          </p:cNvPr>
-          <p:cNvSpPr>
-            <a:spLocks xmlns:a="http://schemas.openxmlformats.org/drawingml/2006/main" noGrp="1"/>
-          </p:cNvSpPr>
-          <p:nvPr/>
-        </p:nvSpPr>
-        <p:spPr>
-          <a:xfrm xmlns:a="http://schemas.openxmlformats.org/drawingml/2006/main">
-            <a:off x="590550" y="4133850"/>
-            <a:ext cx="1409700" cy="247650"/>
-          </a:xfrm>
-          <a:prstGeom xmlns:a="http://schemas.openxmlformats.org/drawingml/2006/main" prst="rect">
-            <a:avLst/>
-          </a:prstGeom>
-          <a:noFill xmlns:a="http://schemas.openxmlformats.org/drawingml/2006/main"/>
-          <a:ln xmlns:a="http://schemas.openxmlformats.org/drawingml/2006/main" w="0">
-            <a:noFill/>
-          </a:ln>
-        </p:spPr>
-        <p:txBody>
-          <a:bodyPr xmlns:a="http://schemas.openxmlformats.org/drawingml/2006/main">
-            <a:noAutofit/>
-          </a:bodyPr>
-          <a:lstStyle xmlns:a="http://schemas.openxmlformats.org/drawingml/2006/main"/>
-          <a:p xmlns:a="http://schemas.openxmlformats.org/drawingml/2006/main">
-            <a:pPr algn="ctr">
-              <a:defRPr sz="1350" b="1">
-                <a:solidFill>
-                  <a:srgbClr val="202A44"/>
-                </a:solidFill>
-                <a:latin typeface="Arial"/>
-                <a:ea typeface="Arial"/>
-                <a:cs typeface="Arial"/>
-              </a:defRPr>
-            </a:pPr>
-            <a:r>
-              <a:rPr sz="1350" b="1">
-                <a:solidFill>
-                  <a:srgbClr val="202A44"/>
-                </a:solidFill>
-                <a:latin typeface="Arial"/>
-                <a:ea typeface="Arial"/>
-                <a:cs typeface="Arial"/>
-              </a:rPr>
-              <a:t>Consent</a:t>
-            </a:r>
-          </a:p>
-        </p:txBody>
-      </p:sp>
-      <p:sp>
-        <p:nvSpPr>
-          <p:cNvPr id="37" name="">
-            <a:extLst xmlns:a="http://schemas.openxmlformats.org/drawingml/2006/main">
-              <a:ext uri="{FF2B5EF4-FFF2-40B4-BE49-F238E27FC236}">
-                <a16:creationId xmlns:a16="http://schemas.microsoft.com/office/drawing/2014/main" id="{738B27AC-2F7A-4E2A-92EE-CB3697C7BE24}"/>
-              </a:ext>
-            </a:extLst>
-          </p:cNvPr>
-          <p:cNvSpPr>
-            <a:spLocks xmlns:a="http://schemas.openxmlformats.org/drawingml/2006/main" noGrp="1"/>
-          </p:cNvSpPr>
-          <p:nvPr/>
-        </p:nvSpPr>
-        <p:spPr>
-          <a:xfrm xmlns:a="http://schemas.openxmlformats.org/drawingml/2006/main">
-            <a:off x="533400" y="4495800"/>
-            <a:ext cx="1524000" cy="419100"/>
-          </a:xfrm>
-          <a:prstGeom xmlns:a="http://schemas.openxmlformats.org/drawingml/2006/main" prst="rect">
-            <a:avLst/>
-          </a:prstGeom>
-          <a:noFill xmlns:a="http://schemas.openxmlformats.org/drawingml/2006/main"/>
-          <a:ln xmlns:a="http://schemas.openxmlformats.org/drawingml/2006/main" w="0">
-            <a:noFill/>
-          </a:ln>
-        </p:spPr>
-        <p:txBody>
-          <a:bodyPr xmlns:a="http://schemas.openxmlformats.org/drawingml/2006/main">
-            <a:noAutofit/>
-          </a:bodyPr>
-          <a:lstStyle xmlns:a="http://schemas.openxmlformats.org/drawingml/2006/main"/>
-          <a:p xmlns:a="http://schemas.openxmlformats.org/drawingml/2006/main">
-            <a:pPr algn="ctr">
-              <a:defRPr sz="1050">
-                <a:solidFill>
-                  <a:srgbClr val="56647A"/>
-                </a:solidFill>
-                <a:latin typeface="Arial"/>
-                <a:ea typeface="Arial"/>
-                <a:cs typeface="Arial"/>
-              </a:defRPr>
-            </a:pPr>
-            <a:r>
-              <a:rPr sz="1050">
-                <a:solidFill>
-                  <a:srgbClr val="56647A"/>
-                </a:solidFill>
-                <a:latin typeface="Arial"/>
-                <a:ea typeface="Arial"/>
-                <a:cs typeface="Arial"/>
-              </a:rPr>
-              <a:t>Clear purpose</a:t>
-            </a:r>
-          </a:p>
-          <a:p xmlns:a="http://schemas.openxmlformats.org/drawingml/2006/main">
-            <a:pPr algn="ctr">
-              <a:defRPr sz="1050">
-                <a:solidFill>
-                  <a:srgbClr val="56647A"/>
-                </a:solidFill>
-                <a:latin typeface="Arial"/>
-                <a:ea typeface="Arial"/>
-                <a:cs typeface="Arial"/>
-              </a:defRPr>
-            </a:pPr>
-            <a:r>
-              <a:rPr sz="1050">
-                <a:solidFill>
-                  <a:srgbClr val="56647A"/>
-                </a:solidFill>
-                <a:latin typeface="Arial"/>
-                <a:ea typeface="Arial"/>
-                <a:cs typeface="Arial"/>
-              </a:rPr>
-              <a:t>and data choice</a:t>
-            </a:r>
-          </a:p>
-        </p:txBody>
-      </p:sp>
-      <p:sp>
-        <p:nvSpPr>
-          <p:cNvPr id="38" name="">
-            <a:extLst xmlns:a="http://schemas.openxmlformats.org/drawingml/2006/main">
-              <a:ext uri="{FF2B5EF4-FFF2-40B4-BE49-F238E27FC236}">
-                <a16:creationId xmlns:a16="http://schemas.microsoft.com/office/drawing/2014/main" id="{3E619982-382F-4AC7-85E2-409E700E892A}"/>
-              </a:ext>
-            </a:extLst>
-          </p:cNvPr>
-          <p:cNvSpPr>
-            <a:spLocks xmlns:a="http://schemas.openxmlformats.org/drawingml/2006/main" noGrp="1"/>
-          </p:cNvSpPr>
-          <p:nvPr/>
-        </p:nvSpPr>
-        <p:spPr>
-          <a:xfrm xmlns:a="http://schemas.openxmlformats.org/drawingml/2006/main">
-            <a:off x="2019300" y="3400425"/>
-            <a:ext cx="361950" cy="171450"/>
-          </a:xfrm>
-          <a:prstGeom xmlns:a="http://schemas.openxmlformats.org/drawingml/2006/main" prst="rightArrow">
-            <a:avLst/>
-          </a:prstGeom>
-          <a:solidFill xmlns:a="http://schemas.openxmlformats.org/drawingml/2006/main">
-            <a:srgbClr val="4656A8"/>
-          </a:solidFill>
-          <a:ln xmlns:a="http://schemas.openxmlformats.org/drawingml/2006/main" w="0">
-            <a:noFill/>
-          </a:ln>
-        </p:spPr>
-      </p:sp>
-      <p:sp>
-        <p:nvSpPr>
-          <p:cNvPr id="39" name="">
-            <a:extLst xmlns:a="http://schemas.openxmlformats.org/drawingml/2006/main">
-              <a:ext uri="{FF2B5EF4-FFF2-40B4-BE49-F238E27FC236}">
-                <a16:creationId xmlns:a16="http://schemas.microsoft.com/office/drawing/2014/main" id="{9798DF25-73D1-4233-9DB2-88D6782889CA}"/>
-              </a:ext>
-            </a:extLst>
-          </p:cNvPr>
-          <p:cNvSpPr>
-            <a:spLocks xmlns:a="http://schemas.openxmlformats.org/drawingml/2006/main" noGrp="1"/>
-          </p:cNvSpPr>
-          <p:nvPr/>
-        </p:nvSpPr>
-        <p:spPr>
-          <a:xfrm xmlns:a="http://schemas.openxmlformats.org/drawingml/2006/main">
-            <a:off x="3095625" y="3238500"/>
-            <a:ext cx="495300" cy="495300"/>
-          </a:xfrm>
-          <a:prstGeom xmlns:a="http://schemas.openxmlformats.org/drawingml/2006/main" prst="ellipse">
-            <a:avLst/>
-          </a:prstGeom>
-          <a:solidFill xmlns:a="http://schemas.openxmlformats.org/drawingml/2006/main">
-            <a:srgbClr val="4656A8"/>
-          </a:solidFill>
-          <a:ln xmlns:a="http://schemas.openxmlformats.org/drawingml/2006/main" w="0">
-            <a:noFill/>
-          </a:ln>
-        </p:spPr>
-      </p:sp>
-      <p:sp>
-        <p:nvSpPr>
-          <p:cNvPr id="40" name="">
-            <a:extLst xmlns:a="http://schemas.openxmlformats.org/drawingml/2006/main">
-              <a:ext uri="{FF2B5EF4-FFF2-40B4-BE49-F238E27FC236}">
-                <a16:creationId xmlns:a16="http://schemas.microsoft.com/office/drawing/2014/main" id="{1AF6A539-75BB-40CA-B008-190D0B750FBD}"/>
-              </a:ext>
-            </a:extLst>
-          </p:cNvPr>
-          <p:cNvSpPr>
-            <a:spLocks xmlns:a="http://schemas.openxmlformats.org/drawingml/2006/main" noGrp="1"/>
-          </p:cNvSpPr>
-          <p:nvPr/>
-        </p:nvSpPr>
-        <p:spPr>
-          <a:xfrm xmlns:a="http://schemas.openxmlformats.org/drawingml/2006/main">
-            <a:off x="3095625" y="3362325"/>
-            <a:ext cx="495300" cy="190500"/>
-          </a:xfrm>
-          <a:prstGeom xmlns:a="http://schemas.openxmlformats.org/drawingml/2006/main" prst="rect">
-            <a:avLst/>
-          </a:prstGeom>
-          <a:noFill xmlns:a="http://schemas.openxmlformats.org/drawingml/2006/main"/>
-          <a:ln xmlns:a="http://schemas.openxmlformats.org/drawingml/2006/main" w="0">
-            <a:noFill/>
-          </a:ln>
-        </p:spPr>
-        <p:txBody>
-          <a:bodyPr xmlns:a="http://schemas.openxmlformats.org/drawingml/2006/main">
-            <a:noAutofit/>
-          </a:bodyPr>
-          <a:lstStyle xmlns:a="http://schemas.openxmlformats.org/drawingml/2006/main"/>
-          <a:p xmlns:a="http://schemas.openxmlformats.org/drawingml/2006/main">
-            <a:pPr algn="ctr">
-              <a:defRPr sz="1425" b="1">
-                <a:solidFill>
-                  <a:srgbClr val="FFFFFF"/>
-                </a:solidFill>
-                <a:latin typeface="Arial"/>
-                <a:ea typeface="Arial"/>
-                <a:cs typeface="Arial"/>
-              </a:defRPr>
-            </a:pPr>
-            <a:r>
-              <a:rPr sz="1425" b="1">
-                <a:solidFill>
-                  <a:srgbClr val="FFFFFF"/>
-                </a:solidFill>
-                <a:latin typeface="Arial"/>
-                <a:ea typeface="Arial"/>
-                <a:cs typeface="Arial"/>
-              </a:rPr>
-              <a:t>2</a:t>
-            </a:r>
-          </a:p>
-        </p:txBody>
-      </p:sp>
-      <p:sp>
-        <p:nvSpPr>
-          <p:cNvPr id="41" name="">
-            <a:extLst xmlns:a="http://schemas.openxmlformats.org/drawingml/2006/main">
-              <a:ext uri="{FF2B5EF4-FFF2-40B4-BE49-F238E27FC236}">
-                <a16:creationId xmlns:a16="http://schemas.microsoft.com/office/drawing/2014/main" id="{A4254C37-CE41-475B-877E-1996DDF73A7E}"/>
-              </a:ext>
-            </a:extLst>
-          </p:cNvPr>
-          <p:cNvSpPr>
-            <a:spLocks xmlns:a="http://schemas.openxmlformats.org/drawingml/2006/main" noGrp="1"/>
-          </p:cNvSpPr>
-          <p:nvPr/>
-        </p:nvSpPr>
-        <p:spPr>
-          <a:xfrm xmlns:a="http://schemas.openxmlformats.org/drawingml/2006/main">
-            <a:off x="2638425" y="4133850"/>
-            <a:ext cx="1409700" cy="247650"/>
-          </a:xfrm>
-          <a:prstGeom xmlns:a="http://schemas.openxmlformats.org/drawingml/2006/main" prst="rect">
-            <a:avLst/>
-          </a:prstGeom>
-          <a:noFill xmlns:a="http://schemas.openxmlformats.org/drawingml/2006/main"/>
-          <a:ln xmlns:a="http://schemas.openxmlformats.org/drawingml/2006/main" w="0">
-            <a:noFill/>
-          </a:ln>
-        </p:spPr>
-        <p:txBody>
-          <a:bodyPr xmlns:a="http://schemas.openxmlformats.org/drawingml/2006/main">
-            <a:noAutofit/>
-          </a:bodyPr>
-          <a:lstStyle xmlns:a="http://schemas.openxmlformats.org/drawingml/2006/main"/>
-          <a:p xmlns:a="http://schemas.openxmlformats.org/drawingml/2006/main">
-            <a:pPr algn="ctr">
-              <a:defRPr sz="1350" b="1">
-                <a:solidFill>
-                  <a:srgbClr val="202A44"/>
-                </a:solidFill>
-                <a:latin typeface="Arial"/>
-                <a:ea typeface="Arial"/>
-                <a:cs typeface="Arial"/>
-              </a:defRPr>
-            </a:pPr>
-            <a:r>
-              <a:rPr sz="1350" b="1">
-                <a:solidFill>
-                  <a:srgbClr val="202A44"/>
-                </a:solidFill>
-                <a:latin typeface="Arial"/>
-                <a:ea typeface="Arial"/>
-                <a:cs typeface="Arial"/>
-              </a:rPr>
-              <a:t>Symptoms</a:t>
-            </a:r>
-          </a:p>
-        </p:txBody>
-      </p:sp>
-      <p:sp>
-        <p:nvSpPr>
-          <p:cNvPr id="42" name="">
-            <a:extLst xmlns:a="http://schemas.openxmlformats.org/drawingml/2006/main">
-              <a:ext uri="{FF2B5EF4-FFF2-40B4-BE49-F238E27FC236}">
-                <a16:creationId xmlns:a16="http://schemas.microsoft.com/office/drawing/2014/main" id="{F1A4F89A-F698-4FE6-A19E-9DA6B538CEF4}"/>
-              </a:ext>
-            </a:extLst>
-          </p:cNvPr>
-          <p:cNvSpPr>
-            <a:spLocks xmlns:a="http://schemas.openxmlformats.org/drawingml/2006/main" noGrp="1"/>
-          </p:cNvSpPr>
-          <p:nvPr/>
-        </p:nvSpPr>
-        <p:spPr>
-          <a:xfrm xmlns:a="http://schemas.openxmlformats.org/drawingml/2006/main">
-            <a:off x="2581275" y="4495800"/>
-            <a:ext cx="1524000" cy="419100"/>
-          </a:xfrm>
-          <a:prstGeom xmlns:a="http://schemas.openxmlformats.org/drawingml/2006/main" prst="rect">
-            <a:avLst/>
-          </a:prstGeom>
-          <a:noFill xmlns:a="http://schemas.openxmlformats.org/drawingml/2006/main"/>
-          <a:ln xmlns:a="http://schemas.openxmlformats.org/drawingml/2006/main" w="0">
-            <a:noFill/>
-          </a:ln>
-        </p:spPr>
-        <p:txBody>
-          <a:bodyPr xmlns:a="http://schemas.openxmlformats.org/drawingml/2006/main">
-            <a:noAutofit/>
-          </a:bodyPr>
-          <a:lstStyle xmlns:a="http://schemas.openxmlformats.org/drawingml/2006/main"/>
-          <a:p xmlns:a="http://schemas.openxmlformats.org/drawingml/2006/main">
-            <a:pPr algn="ctr">
-              <a:defRPr sz="1050">
-                <a:solidFill>
-                  <a:srgbClr val="56647A"/>
-                </a:solidFill>
-                <a:latin typeface="Arial"/>
-                <a:ea typeface="Arial"/>
-                <a:cs typeface="Arial"/>
-              </a:defRPr>
-            </a:pPr>
-            <a:r>
-              <a:rPr sz="1050">
-                <a:solidFill>
-                  <a:srgbClr val="56647A"/>
-                </a:solidFill>
-                <a:latin typeface="Arial"/>
-                <a:ea typeface="Arial"/>
-                <a:cs typeface="Arial"/>
-              </a:rPr>
-              <a:t>Fixed Bengali options</a:t>
-            </a:r>
-          </a:p>
-          <a:p xmlns:a="http://schemas.openxmlformats.org/drawingml/2006/main">
-            <a:pPr algn="ctr">
-              <a:defRPr sz="1050">
-                <a:solidFill>
-                  <a:srgbClr val="56647A"/>
-                </a:solidFill>
-                <a:latin typeface="Arial"/>
-                <a:ea typeface="Arial"/>
-                <a:cs typeface="Arial"/>
-              </a:defRPr>
-            </a:pPr>
-            <a:r>
-              <a:rPr sz="1050">
-                <a:solidFill>
-                  <a:srgbClr val="56647A"/>
-                </a:solidFill>
-                <a:latin typeface="Arial"/>
-                <a:ea typeface="Arial"/>
-                <a:cs typeface="Arial"/>
-              </a:rPr>
-              <a:t>or voice input</a:t>
-            </a:r>
-          </a:p>
-        </p:txBody>
-      </p:sp>
-      <p:sp>
-        <p:nvSpPr>
-          <p:cNvPr id="43" name="">
-            <a:extLst xmlns:a="http://schemas.openxmlformats.org/drawingml/2006/main">
-              <a:ext uri="{FF2B5EF4-FFF2-40B4-BE49-F238E27FC236}">
-                <a16:creationId xmlns:a16="http://schemas.microsoft.com/office/drawing/2014/main" id="{B19A865A-541C-4993-ABFA-1EAC0A37396A}"/>
-              </a:ext>
-            </a:extLst>
-          </p:cNvPr>
-          <p:cNvSpPr>
-            <a:spLocks xmlns:a="http://schemas.openxmlformats.org/drawingml/2006/main" noGrp="1"/>
-          </p:cNvSpPr>
-          <p:nvPr/>
-        </p:nvSpPr>
-        <p:spPr>
-          <a:xfrm xmlns:a="http://schemas.openxmlformats.org/drawingml/2006/main">
-            <a:off x="4067175" y="3400425"/>
-            <a:ext cx="361950" cy="171450"/>
-          </a:xfrm>
-          <a:prstGeom xmlns:a="http://schemas.openxmlformats.org/drawingml/2006/main" prst="rightArrow">
-            <a:avLst/>
-          </a:prstGeom>
-          <a:solidFill xmlns:a="http://schemas.openxmlformats.org/drawingml/2006/main">
-            <a:srgbClr val="4656A8"/>
-          </a:solidFill>
-          <a:ln xmlns:a="http://schemas.openxmlformats.org/drawingml/2006/main" w="0">
-            <a:noFill/>
-          </a:ln>
-        </p:spPr>
-      </p:sp>
-      <p:sp>
-        <p:nvSpPr>
-          <p:cNvPr id="44" name="">
-            <a:extLst xmlns:a="http://schemas.openxmlformats.org/drawingml/2006/main">
-              <a:ext uri="{FF2B5EF4-FFF2-40B4-BE49-F238E27FC236}">
-                <a16:creationId xmlns:a16="http://schemas.microsoft.com/office/drawing/2014/main" id="{83520088-BFE2-40EB-8383-3664B5EFB891}"/>
-              </a:ext>
-            </a:extLst>
-          </p:cNvPr>
-          <p:cNvSpPr>
-            <a:spLocks xmlns:a="http://schemas.openxmlformats.org/drawingml/2006/main" noGrp="1"/>
-          </p:cNvSpPr>
-          <p:nvPr/>
-        </p:nvSpPr>
-        <p:spPr>
-          <a:xfrm xmlns:a="http://schemas.openxmlformats.org/drawingml/2006/main">
-            <a:off x="5143500" y="3238500"/>
-            <a:ext cx="495300" cy="495300"/>
-          </a:xfrm>
-          <a:prstGeom xmlns:a="http://schemas.openxmlformats.org/drawingml/2006/main" prst="ellipse">
-            <a:avLst/>
-          </a:prstGeom>
-          <a:solidFill xmlns:a="http://schemas.openxmlformats.org/drawingml/2006/main">
-            <a:srgbClr val="DE664C"/>
-          </a:solidFill>
-          <a:ln xmlns:a="http://schemas.openxmlformats.org/drawingml/2006/main" w="0">
-            <a:noFill/>
-          </a:ln>
-        </p:spPr>
-      </p:sp>
-      <p:sp>
-        <p:nvSpPr>
-          <p:cNvPr id="45" name="">
-            <a:extLst xmlns:a="http://schemas.openxmlformats.org/drawingml/2006/main">
-              <a:ext uri="{FF2B5EF4-FFF2-40B4-BE49-F238E27FC236}">
-                <a16:creationId xmlns:a16="http://schemas.microsoft.com/office/drawing/2014/main" id="{513437FD-F6B7-40D1-A912-BF4CE47437A6}"/>
-              </a:ext>
-            </a:extLst>
-          </p:cNvPr>
-          <p:cNvSpPr>
-            <a:spLocks xmlns:a="http://schemas.openxmlformats.org/drawingml/2006/main" noGrp="1"/>
-          </p:cNvSpPr>
-          <p:nvPr/>
-        </p:nvSpPr>
-        <p:spPr>
-          <a:xfrm xmlns:a="http://schemas.openxmlformats.org/drawingml/2006/main">
-            <a:off x="5143500" y="3362325"/>
-            <a:ext cx="495300" cy="190500"/>
-          </a:xfrm>
-          <a:prstGeom xmlns:a="http://schemas.openxmlformats.org/drawingml/2006/main" prst="rect">
-            <a:avLst/>
-          </a:prstGeom>
-          <a:noFill xmlns:a="http://schemas.openxmlformats.org/drawingml/2006/main"/>
-          <a:ln xmlns:a="http://schemas.openxmlformats.org/drawingml/2006/main" w="0">
-            <a:noFill/>
-          </a:ln>
-        </p:spPr>
-        <p:txBody>
-          <a:bodyPr xmlns:a="http://schemas.openxmlformats.org/drawingml/2006/main">
-            <a:noAutofit/>
-          </a:bodyPr>
-          <a:lstStyle xmlns:a="http://schemas.openxmlformats.org/drawingml/2006/main"/>
-          <a:p xmlns:a="http://schemas.openxmlformats.org/drawingml/2006/main">
-            <a:pPr algn="ctr">
-              <a:defRPr sz="1425" b="1">
-                <a:solidFill>
-                  <a:srgbClr val="FFFFFF"/>
-                </a:solidFill>
-                <a:latin typeface="Arial"/>
-                <a:ea typeface="Arial"/>
-                <a:cs typeface="Arial"/>
-              </a:defRPr>
-            </a:pPr>
-            <a:r>
-              <a:rPr sz="1425" b="1">
-                <a:solidFill>
-                  <a:srgbClr val="FFFFFF"/>
-                </a:solidFill>
-                <a:latin typeface="Arial"/>
-                <a:ea typeface="Arial"/>
-                <a:cs typeface="Arial"/>
-              </a:rPr>
-              <a:t>3</a:t>
-            </a:r>
-          </a:p>
-        </p:txBody>
-      </p:sp>
-      <p:sp>
-        <p:nvSpPr>
-          <p:cNvPr id="46" name="">
-            <a:extLst xmlns:a="http://schemas.openxmlformats.org/drawingml/2006/main">
-              <a:ext uri="{FF2B5EF4-FFF2-40B4-BE49-F238E27FC236}">
-                <a16:creationId xmlns:a16="http://schemas.microsoft.com/office/drawing/2014/main" id="{CBAC1890-AB61-4E74-A091-58EC4BB4CEBE}"/>
-              </a:ext>
-            </a:extLst>
-          </p:cNvPr>
-          <p:cNvSpPr>
-            <a:spLocks xmlns:a="http://schemas.openxmlformats.org/drawingml/2006/main" noGrp="1"/>
-          </p:cNvSpPr>
-          <p:nvPr/>
-        </p:nvSpPr>
-        <p:spPr>
-          <a:xfrm xmlns:a="http://schemas.openxmlformats.org/drawingml/2006/main">
-            <a:off x="4686300" y="4133850"/>
-            <a:ext cx="1409700" cy="247650"/>
-          </a:xfrm>
-          <a:prstGeom xmlns:a="http://schemas.openxmlformats.org/drawingml/2006/main" prst="rect">
-            <a:avLst/>
-          </a:prstGeom>
-          <a:noFill xmlns:a="http://schemas.openxmlformats.org/drawingml/2006/main"/>
-          <a:ln xmlns:a="http://schemas.openxmlformats.org/drawingml/2006/main" w="0">
-            <a:noFill/>
-          </a:ln>
-        </p:spPr>
-        <p:txBody>
-          <a:bodyPr xmlns:a="http://schemas.openxmlformats.org/drawingml/2006/main">
-            <a:noAutofit/>
-          </a:bodyPr>
-          <a:lstStyle xmlns:a="http://schemas.openxmlformats.org/drawingml/2006/main"/>
-          <a:p xmlns:a="http://schemas.openxmlformats.org/drawingml/2006/main">
-            <a:pPr algn="ctr">
-              <a:defRPr sz="1350" b="1">
-                <a:solidFill>
-                  <a:srgbClr val="202A44"/>
-                </a:solidFill>
-                <a:latin typeface="Arial"/>
-                <a:ea typeface="Arial"/>
-                <a:cs typeface="Arial"/>
-              </a:defRPr>
-            </a:pPr>
-            <a:r>
-              <a:rPr sz="1350" b="1">
-                <a:solidFill>
-                  <a:srgbClr val="202A44"/>
-                </a:solidFill>
-                <a:latin typeface="Arial"/>
-                <a:ea typeface="Arial"/>
-                <a:cs typeface="Arial"/>
-              </a:rPr>
-              <a:t>Safety check</a:t>
-            </a:r>
-          </a:p>
-        </p:txBody>
-      </p:sp>
-      <p:sp>
-        <p:nvSpPr>
-          <p:cNvPr id="47" name="">
-            <a:extLst xmlns:a="http://schemas.openxmlformats.org/drawingml/2006/main">
-              <a:ext uri="{FF2B5EF4-FFF2-40B4-BE49-F238E27FC236}">
-                <a16:creationId xmlns:a16="http://schemas.microsoft.com/office/drawing/2014/main" id="{B1855DC1-0B1C-48AF-8B2C-C2805BCDFCCB}"/>
-              </a:ext>
-            </a:extLst>
-          </p:cNvPr>
-          <p:cNvSpPr>
-            <a:spLocks xmlns:a="http://schemas.openxmlformats.org/drawingml/2006/main" noGrp="1"/>
-          </p:cNvSpPr>
-          <p:nvPr/>
-        </p:nvSpPr>
-        <p:spPr>
-          <a:xfrm xmlns:a="http://schemas.openxmlformats.org/drawingml/2006/main">
-            <a:off x="4629150" y="4495800"/>
-            <a:ext cx="1524000" cy="419100"/>
-          </a:xfrm>
-          <a:prstGeom xmlns:a="http://schemas.openxmlformats.org/drawingml/2006/main" prst="rect">
-            <a:avLst/>
-          </a:prstGeom>
-          <a:noFill xmlns:a="http://schemas.openxmlformats.org/drawingml/2006/main"/>
-          <a:ln xmlns:a="http://schemas.openxmlformats.org/drawingml/2006/main" w="0">
-            <a:noFill/>
-          </a:ln>
-        </p:spPr>
-        <p:txBody>
-          <a:bodyPr xmlns:a="http://schemas.openxmlformats.org/drawingml/2006/main">
-            <a:noAutofit/>
-          </a:bodyPr>
-          <a:lstStyle xmlns:a="http://schemas.openxmlformats.org/drawingml/2006/main"/>
-          <a:p xmlns:a="http://schemas.openxmlformats.org/drawingml/2006/main">
-            <a:pPr algn="ctr">
-              <a:defRPr sz="1050">
-                <a:solidFill>
-                  <a:srgbClr val="56647A"/>
-                </a:solidFill>
-                <a:latin typeface="Arial"/>
-                <a:ea typeface="Arial"/>
-                <a:cs typeface="Arial"/>
-              </a:defRPr>
-            </a:pPr>
-            <a:r>
-              <a:rPr sz="1050">
-                <a:solidFill>
-                  <a:srgbClr val="56647A"/>
-                </a:solidFill>
-                <a:latin typeface="Arial"/>
-                <a:ea typeface="Arial"/>
-                <a:cs typeface="Arial"/>
-              </a:rPr>
-              <a:t>Urgent signs</a:t>
-            </a:r>
-          </a:p>
-          <a:p xmlns:a="http://schemas.openxmlformats.org/drawingml/2006/main">
-            <a:pPr algn="ctr">
-              <a:defRPr sz="1050">
-                <a:solidFill>
-                  <a:srgbClr val="56647A"/>
-                </a:solidFill>
-                <a:latin typeface="Arial"/>
-                <a:ea typeface="Arial"/>
-                <a:cs typeface="Arial"/>
-              </a:defRPr>
-            </a:pPr>
-            <a:r>
-              <a:rPr sz="1050">
-                <a:solidFill>
-                  <a:srgbClr val="56647A"/>
-                </a:solidFill>
-                <a:latin typeface="Arial"/>
-                <a:ea typeface="Arial"/>
-                <a:cs typeface="Arial"/>
-              </a:rPr>
-              <a:t>checked first</a:t>
-            </a:r>
-          </a:p>
-        </p:txBody>
-      </p:sp>
-      <p:sp>
-        <p:nvSpPr>
-          <p:cNvPr id="48" name="">
-            <a:extLst xmlns:a="http://schemas.openxmlformats.org/drawingml/2006/main">
-              <a:ext uri="{FF2B5EF4-FFF2-40B4-BE49-F238E27FC236}">
-                <a16:creationId xmlns:a16="http://schemas.microsoft.com/office/drawing/2014/main" id="{8AB0E81F-7F31-4732-B469-214074A0520A}"/>
-              </a:ext>
-            </a:extLst>
-          </p:cNvPr>
-          <p:cNvSpPr>
-            <a:spLocks xmlns:a="http://schemas.openxmlformats.org/drawingml/2006/main" noGrp="1"/>
-          </p:cNvSpPr>
-          <p:nvPr/>
-        </p:nvSpPr>
-        <p:spPr>
-          <a:xfrm xmlns:a="http://schemas.openxmlformats.org/drawingml/2006/main">
-            <a:off x="6115050" y="3400425"/>
-            <a:ext cx="361950" cy="171450"/>
-          </a:xfrm>
-          <a:prstGeom xmlns:a="http://schemas.openxmlformats.org/drawingml/2006/main" prst="rightArrow">
-            <a:avLst/>
-          </a:prstGeom>
-          <a:solidFill xmlns:a="http://schemas.openxmlformats.org/drawingml/2006/main">
-            <a:srgbClr val="4656A8"/>
-          </a:solidFill>
-          <a:ln xmlns:a="http://schemas.openxmlformats.org/drawingml/2006/main" w="0">
-            <a:noFill/>
-          </a:ln>
-        </p:spPr>
-      </p:sp>
-      <p:sp>
-        <p:nvSpPr>
-          <p:cNvPr id="49" name="">
-            <a:extLst xmlns:a="http://schemas.openxmlformats.org/drawingml/2006/main">
-              <a:ext uri="{FF2B5EF4-FFF2-40B4-BE49-F238E27FC236}">
-                <a16:creationId xmlns:a16="http://schemas.microsoft.com/office/drawing/2014/main" id="{48126197-AFC0-4CDB-81B3-B5829C2B33DC}"/>
-              </a:ext>
-            </a:extLst>
-          </p:cNvPr>
-          <p:cNvSpPr>
-            <a:spLocks xmlns:a="http://schemas.openxmlformats.org/drawingml/2006/main" noGrp="1"/>
-          </p:cNvSpPr>
-          <p:nvPr/>
-        </p:nvSpPr>
-        <p:spPr>
-          <a:xfrm xmlns:a="http://schemas.openxmlformats.org/drawingml/2006/main">
-            <a:off x="7191375" y="3238500"/>
-            <a:ext cx="495300" cy="495300"/>
-          </a:xfrm>
-          <a:prstGeom xmlns:a="http://schemas.openxmlformats.org/drawingml/2006/main" prst="ellipse">
-            <a:avLst/>
-          </a:prstGeom>
-          <a:solidFill xmlns:a="http://schemas.openxmlformats.org/drawingml/2006/main">
-            <a:srgbClr val="E7A048"/>
-          </a:solidFill>
-          <a:ln xmlns:a="http://schemas.openxmlformats.org/drawingml/2006/main" w="0">
-            <a:noFill/>
-          </a:ln>
-        </p:spPr>
-      </p:sp>
-      <p:sp>
-        <p:nvSpPr>
-          <p:cNvPr id="50" name="">
-            <a:extLst xmlns:a="http://schemas.openxmlformats.org/drawingml/2006/main">
-              <a:ext uri="{FF2B5EF4-FFF2-40B4-BE49-F238E27FC236}">
-                <a16:creationId xmlns:a16="http://schemas.microsoft.com/office/drawing/2014/main" id="{F62738CE-4B7D-4811-B8BB-8E04702A9289}"/>
-              </a:ext>
-            </a:extLst>
-          </p:cNvPr>
-          <p:cNvSpPr>
-            <a:spLocks xmlns:a="http://schemas.openxmlformats.org/drawingml/2006/main" noGrp="1"/>
-          </p:cNvSpPr>
-          <p:nvPr/>
-        </p:nvSpPr>
-        <p:spPr>
-          <a:xfrm xmlns:a="http://schemas.openxmlformats.org/drawingml/2006/main">
-            <a:off x="7191375" y="3362325"/>
-            <a:ext cx="495300" cy="190500"/>
-          </a:xfrm>
-          <a:prstGeom xmlns:a="http://schemas.openxmlformats.org/drawingml/2006/main" prst="rect">
-            <a:avLst/>
-          </a:prstGeom>
-          <a:noFill xmlns:a="http://schemas.openxmlformats.org/drawingml/2006/main"/>
-          <a:ln xmlns:a="http://schemas.openxmlformats.org/drawingml/2006/main" w="0">
-            <a:noFill/>
-          </a:ln>
-        </p:spPr>
-        <p:txBody>
-          <a:bodyPr xmlns:a="http://schemas.openxmlformats.org/drawingml/2006/main">
-            <a:noAutofit/>
-          </a:bodyPr>
-          <a:lstStyle xmlns:a="http://schemas.openxmlformats.org/drawingml/2006/main"/>
-          <a:p xmlns:a="http://schemas.openxmlformats.org/drawingml/2006/main">
-            <a:pPr algn="ctr">
-              <a:defRPr sz="1425" b="1">
-                <a:solidFill>
-                  <a:srgbClr val="FFFFFF"/>
-                </a:solidFill>
-                <a:latin typeface="Arial"/>
-                <a:ea typeface="Arial"/>
-                <a:cs typeface="Arial"/>
-              </a:defRPr>
-            </a:pPr>
-            <a:r>
-              <a:rPr sz="1425" b="1">
-                <a:solidFill>
-                  <a:srgbClr val="FFFFFF"/>
-                </a:solidFill>
-                <a:latin typeface="Arial"/>
-                <a:ea typeface="Arial"/>
-                <a:cs typeface="Arial"/>
-              </a:rPr>
-              <a:t>4</a:t>
-            </a:r>
-          </a:p>
-        </p:txBody>
-      </p:sp>
-      <p:sp>
-        <p:nvSpPr>
-          <p:cNvPr id="51" name="">
-            <a:extLst xmlns:a="http://schemas.openxmlformats.org/drawingml/2006/main">
-              <a:ext uri="{FF2B5EF4-FFF2-40B4-BE49-F238E27FC236}">
-                <a16:creationId xmlns:a16="http://schemas.microsoft.com/office/drawing/2014/main" id="{4DCA4FC7-C3F5-4340-9B9F-77DE56629674}"/>
-              </a:ext>
-            </a:extLst>
-          </p:cNvPr>
-          <p:cNvSpPr>
-            <a:spLocks xmlns:a="http://schemas.openxmlformats.org/drawingml/2006/main" noGrp="1"/>
-          </p:cNvSpPr>
-          <p:nvPr/>
-        </p:nvSpPr>
-        <p:spPr>
-          <a:xfrm xmlns:a="http://schemas.openxmlformats.org/drawingml/2006/main">
-            <a:off x="6734175" y="4133850"/>
-            <a:ext cx="1409700" cy="247650"/>
-          </a:xfrm>
-          <a:prstGeom xmlns:a="http://schemas.openxmlformats.org/drawingml/2006/main" prst="rect">
-            <a:avLst/>
-          </a:prstGeom>
-          <a:noFill xmlns:a="http://schemas.openxmlformats.org/drawingml/2006/main"/>
-          <a:ln xmlns:a="http://schemas.openxmlformats.org/drawingml/2006/main" w="0">
-            <a:noFill/>
-          </a:ln>
-        </p:spPr>
-        <p:txBody>
-          <a:bodyPr xmlns:a="http://schemas.openxmlformats.org/drawingml/2006/main">
-            <a:noAutofit/>
-          </a:bodyPr>
-          <a:lstStyle xmlns:a="http://schemas.openxmlformats.org/drawingml/2006/main"/>
-          <a:p xmlns:a="http://schemas.openxmlformats.org/drawingml/2006/main">
-            <a:pPr algn="ctr">
-              <a:defRPr sz="1350" b="1">
-                <a:solidFill>
-                  <a:srgbClr val="202A44"/>
-                </a:solidFill>
-                <a:latin typeface="Arial"/>
-                <a:ea typeface="Arial"/>
-                <a:cs typeface="Arial"/>
-              </a:defRPr>
-            </a:pPr>
-            <a:r>
-              <a:rPr sz="1350" b="1">
-                <a:solidFill>
-                  <a:srgbClr val="202A44"/>
-                </a:solidFill>
-                <a:latin typeface="Arial"/>
-                <a:ea typeface="Arial"/>
-                <a:cs typeface="Arial"/>
-              </a:rPr>
-              <a:t>Safe route</a:t>
-            </a:r>
-          </a:p>
-        </p:txBody>
-      </p:sp>
-      <p:sp>
-        <p:nvSpPr>
-          <p:cNvPr id="52" name="">
-            <a:extLst xmlns:a="http://schemas.openxmlformats.org/drawingml/2006/main">
-              <a:ext uri="{FF2B5EF4-FFF2-40B4-BE49-F238E27FC236}">
-                <a16:creationId xmlns:a16="http://schemas.microsoft.com/office/drawing/2014/main" id="{78EA62D1-B2F7-41B8-A5FF-C2C0A9679282}"/>
-              </a:ext>
-            </a:extLst>
-          </p:cNvPr>
-          <p:cNvSpPr>
-            <a:spLocks xmlns:a="http://schemas.openxmlformats.org/drawingml/2006/main" noGrp="1"/>
-          </p:cNvSpPr>
-          <p:nvPr/>
-        </p:nvSpPr>
-        <p:spPr>
-          <a:xfrm xmlns:a="http://schemas.openxmlformats.org/drawingml/2006/main">
-            <a:off x="6677025" y="4495800"/>
-            <a:ext cx="1524000" cy="419100"/>
-          </a:xfrm>
-          <a:prstGeom xmlns:a="http://schemas.openxmlformats.org/drawingml/2006/main" prst="rect">
-            <a:avLst/>
-          </a:prstGeom>
-          <a:noFill xmlns:a="http://schemas.openxmlformats.org/drawingml/2006/main"/>
-          <a:ln xmlns:a="http://schemas.openxmlformats.org/drawingml/2006/main" w="0">
-            <a:noFill/>
-          </a:ln>
-        </p:spPr>
-        <p:txBody>
-          <a:bodyPr xmlns:a="http://schemas.openxmlformats.org/drawingml/2006/main">
-            <a:noAutofit/>
-          </a:bodyPr>
-          <a:lstStyle xmlns:a="http://schemas.openxmlformats.org/drawingml/2006/main"/>
-          <a:p xmlns:a="http://schemas.openxmlformats.org/drawingml/2006/main">
-            <a:pPr algn="ctr">
-              <a:defRPr sz="1050">
-                <a:solidFill>
-                  <a:srgbClr val="56647A"/>
-                </a:solidFill>
-                <a:latin typeface="Arial"/>
-                <a:ea typeface="Arial"/>
-                <a:cs typeface="Arial"/>
-              </a:defRPr>
-            </a:pPr>
-            <a:r>
-              <a:rPr sz="1050">
-                <a:solidFill>
-                  <a:srgbClr val="56647A"/>
-                </a:solidFill>
-                <a:latin typeface="Arial"/>
-                <a:ea typeface="Arial"/>
-                <a:cs typeface="Arial"/>
-              </a:rPr>
-              <a:t>Urgent, routine, or</a:t>
-            </a:r>
-          </a:p>
-          <a:p xmlns:a="http://schemas.openxmlformats.org/drawingml/2006/main">
-            <a:pPr algn="ctr">
-              <a:defRPr sz="1050">
-                <a:solidFill>
-                  <a:srgbClr val="56647A"/>
-                </a:solidFill>
-                <a:latin typeface="Arial"/>
-                <a:ea typeface="Arial"/>
-                <a:cs typeface="Arial"/>
-              </a:defRPr>
-            </a:pPr>
-            <a:r>
-              <a:rPr sz="1050">
-                <a:solidFill>
-                  <a:srgbClr val="56647A"/>
-                </a:solidFill>
-                <a:latin typeface="Arial"/>
-                <a:ea typeface="Arial"/>
-                <a:cs typeface="Arial"/>
-              </a:rPr>
-              <a:t>human support</a:t>
-            </a:r>
-          </a:p>
-        </p:txBody>
-      </p:sp>
-      <p:sp>
-        <p:nvSpPr>
-          <p:cNvPr id="53" name="">
-            <a:extLst xmlns:a="http://schemas.openxmlformats.org/drawingml/2006/main">
-              <a:ext uri="{FF2B5EF4-FFF2-40B4-BE49-F238E27FC236}">
-                <a16:creationId xmlns:a16="http://schemas.microsoft.com/office/drawing/2014/main" id="{5C8FC8CB-EE61-4B36-9911-9020556CB082}"/>
-              </a:ext>
-            </a:extLst>
-          </p:cNvPr>
-          <p:cNvSpPr>
-            <a:spLocks xmlns:a="http://schemas.openxmlformats.org/drawingml/2006/main" noGrp="1"/>
-          </p:cNvSpPr>
-          <p:nvPr/>
-        </p:nvSpPr>
-        <p:spPr>
-          <a:xfrm xmlns:a="http://schemas.openxmlformats.org/drawingml/2006/main">
-            <a:off x="8162925" y="3400425"/>
-            <a:ext cx="361950" cy="171450"/>
-          </a:xfrm>
-          <a:prstGeom xmlns:a="http://schemas.openxmlformats.org/drawingml/2006/main" prst="rightArrow">
-            <a:avLst/>
-          </a:prstGeom>
-          <a:solidFill xmlns:a="http://schemas.openxmlformats.org/drawingml/2006/main">
-            <a:srgbClr val="4656A8"/>
-          </a:solidFill>
-          <a:ln xmlns:a="http://schemas.openxmlformats.org/drawingml/2006/main" w="0">
-            <a:noFill/>
-          </a:ln>
-        </p:spPr>
-      </p:sp>
-      <p:sp>
-        <p:nvSpPr>
-          <p:cNvPr id="54" name="">
-            <a:extLst xmlns:a="http://schemas.openxmlformats.org/drawingml/2006/main">
-              <a:ext uri="{FF2B5EF4-FFF2-40B4-BE49-F238E27FC236}">
-                <a16:creationId xmlns:a16="http://schemas.microsoft.com/office/drawing/2014/main" id="{78BC831F-C6AA-454D-ABB5-EBC61F360EA1}"/>
-              </a:ext>
-            </a:extLst>
-          </p:cNvPr>
-          <p:cNvSpPr>
-            <a:spLocks xmlns:a="http://schemas.openxmlformats.org/drawingml/2006/main" noGrp="1"/>
-          </p:cNvSpPr>
-          <p:nvPr/>
-        </p:nvSpPr>
-        <p:spPr>
-          <a:xfrm xmlns:a="http://schemas.openxmlformats.org/drawingml/2006/main">
-            <a:off x="9239250" y="3238500"/>
-            <a:ext cx="495300" cy="495300"/>
-          </a:xfrm>
-          <a:prstGeom xmlns:a="http://schemas.openxmlformats.org/drawingml/2006/main" prst="ellipse">
-            <a:avLst/>
-          </a:prstGeom>
-          <a:solidFill xmlns:a="http://schemas.openxmlformats.org/drawingml/2006/main">
-            <a:srgbClr val="237A7A"/>
-          </a:solidFill>
-          <a:ln xmlns:a="http://schemas.openxmlformats.org/drawingml/2006/main" w="0">
-            <a:noFill/>
-          </a:ln>
-        </p:spPr>
-      </p:sp>
-      <p:sp>
-        <p:nvSpPr>
-          <p:cNvPr id="55" name="">
-            <a:extLst xmlns:a="http://schemas.openxmlformats.org/drawingml/2006/main">
-              <a:ext uri="{FF2B5EF4-FFF2-40B4-BE49-F238E27FC236}">
-                <a16:creationId xmlns:a16="http://schemas.microsoft.com/office/drawing/2014/main" id="{48CD07ED-4629-4C5A-BD4A-B3A8A909463C}"/>
-              </a:ext>
-            </a:extLst>
-          </p:cNvPr>
-          <p:cNvSpPr>
-            <a:spLocks xmlns:a="http://schemas.openxmlformats.org/drawingml/2006/main" noGrp="1"/>
-          </p:cNvSpPr>
-          <p:nvPr/>
-        </p:nvSpPr>
-        <p:spPr>
-          <a:xfrm xmlns:a="http://schemas.openxmlformats.org/drawingml/2006/main">
-            <a:off x="9239250" y="3362325"/>
-            <a:ext cx="495300" cy="190500"/>
-          </a:xfrm>
-          <a:prstGeom xmlns:a="http://schemas.openxmlformats.org/drawingml/2006/main" prst="rect">
-            <a:avLst/>
-          </a:prstGeom>
-          <a:noFill xmlns:a="http://schemas.openxmlformats.org/drawingml/2006/main"/>
-          <a:ln xmlns:a="http://schemas.openxmlformats.org/drawingml/2006/main" w="0">
-            <a:noFill/>
-          </a:ln>
-        </p:spPr>
-        <p:txBody>
-          <a:bodyPr xmlns:a="http://schemas.openxmlformats.org/drawingml/2006/main">
-            <a:noAutofit/>
-          </a:bodyPr>
-          <a:lstStyle xmlns:a="http://schemas.openxmlformats.org/drawingml/2006/main"/>
-          <a:p xmlns:a="http://schemas.openxmlformats.org/drawingml/2006/main">
-            <a:pPr algn="ctr">
-              <a:defRPr sz="1425" b="1">
-                <a:solidFill>
-                  <a:srgbClr val="FFFFFF"/>
-                </a:solidFill>
-                <a:latin typeface="Arial"/>
-                <a:ea typeface="Arial"/>
-                <a:cs typeface="Arial"/>
-              </a:defRPr>
-            </a:pPr>
-            <a:r>
-              <a:rPr sz="1425" b="1">
-                <a:solidFill>
-                  <a:srgbClr val="FFFFFF"/>
-                </a:solidFill>
-                <a:latin typeface="Arial"/>
-                <a:ea typeface="Arial"/>
-                <a:cs typeface="Arial"/>
-              </a:rPr>
-              <a:t>5</a:t>
-            </a:r>
-          </a:p>
-        </p:txBody>
-      </p:sp>
-      <p:sp>
-        <p:nvSpPr>
-          <p:cNvPr id="56" name="">
-            <a:extLst xmlns:a="http://schemas.openxmlformats.org/drawingml/2006/main">
-              <a:ext uri="{FF2B5EF4-FFF2-40B4-BE49-F238E27FC236}">
-                <a16:creationId xmlns:a16="http://schemas.microsoft.com/office/drawing/2014/main" id="{456B9774-0CE8-4E99-B7AE-381372C7DD9C}"/>
-              </a:ext>
-            </a:extLst>
-          </p:cNvPr>
-          <p:cNvSpPr>
-            <a:spLocks xmlns:a="http://schemas.openxmlformats.org/drawingml/2006/main" noGrp="1"/>
-          </p:cNvSpPr>
-          <p:nvPr/>
-        </p:nvSpPr>
-        <p:spPr>
-          <a:xfrm xmlns:a="http://schemas.openxmlformats.org/drawingml/2006/main">
-            <a:off x="8782050" y="4133850"/>
-            <a:ext cx="1409700" cy="247650"/>
-          </a:xfrm>
-          <a:prstGeom xmlns:a="http://schemas.openxmlformats.org/drawingml/2006/main" prst="rect">
-            <a:avLst/>
-          </a:prstGeom>
-          <a:noFill xmlns:a="http://schemas.openxmlformats.org/drawingml/2006/main"/>
-          <a:ln xmlns:a="http://schemas.openxmlformats.org/drawingml/2006/main" w="0">
-            <a:noFill/>
-          </a:ln>
-        </p:spPr>
-        <p:txBody>
-          <a:bodyPr xmlns:a="http://schemas.openxmlformats.org/drawingml/2006/main">
-            <a:noAutofit/>
-          </a:bodyPr>
-          <a:lstStyle xmlns:a="http://schemas.openxmlformats.org/drawingml/2006/main"/>
-          <a:p xmlns:a="http://schemas.openxmlformats.org/drawingml/2006/main">
-            <a:pPr algn="ctr">
-              <a:defRPr sz="1350" b="1">
-                <a:solidFill>
-                  <a:srgbClr val="202A44"/>
-                </a:solidFill>
-                <a:latin typeface="Arial"/>
-                <a:ea typeface="Arial"/>
-                <a:cs typeface="Arial"/>
-              </a:defRPr>
-            </a:pPr>
-            <a:r>
-              <a:rPr sz="1350" b="1">
-                <a:solidFill>
-                  <a:srgbClr val="202A44"/>
-                </a:solidFill>
-                <a:latin typeface="Arial"/>
-                <a:ea typeface="Arial"/>
-                <a:cs typeface="Arial"/>
-              </a:rPr>
-              <a:t>Next action</a:t>
-            </a:r>
-          </a:p>
-        </p:txBody>
-      </p:sp>
-      <p:sp>
-        <p:nvSpPr>
-          <p:cNvPr id="57" name="">
-            <a:extLst xmlns:a="http://schemas.openxmlformats.org/drawingml/2006/main">
-              <a:ext uri="{FF2B5EF4-FFF2-40B4-BE49-F238E27FC236}">
-                <a16:creationId xmlns:a16="http://schemas.microsoft.com/office/drawing/2014/main" id="{06452303-EDFC-4F2A-8704-2AF06273424B}"/>
-              </a:ext>
-            </a:extLst>
-          </p:cNvPr>
-          <p:cNvSpPr>
-            <a:spLocks xmlns:a="http://schemas.openxmlformats.org/drawingml/2006/main" noGrp="1"/>
-          </p:cNvSpPr>
-          <p:nvPr/>
-        </p:nvSpPr>
-        <p:spPr>
-          <a:xfrm xmlns:a="http://schemas.openxmlformats.org/drawingml/2006/main">
-            <a:off x="8724900" y="4495800"/>
-            <a:ext cx="1524000" cy="419100"/>
-          </a:xfrm>
-          <a:prstGeom xmlns:a="http://schemas.openxmlformats.org/drawingml/2006/main" prst="rect">
-            <a:avLst/>
-          </a:prstGeom>
-          <a:noFill xmlns:a="http://schemas.openxmlformats.org/drawingml/2006/main"/>
-          <a:ln xmlns:a="http://schemas.openxmlformats.org/drawingml/2006/main" w="0">
-            <a:noFill/>
-          </a:ln>
-        </p:spPr>
-        <p:txBody>
-          <a:bodyPr xmlns:a="http://schemas.openxmlformats.org/drawingml/2006/main">
-            <a:noAutofit/>
-          </a:bodyPr>
-          <a:lstStyle xmlns:a="http://schemas.openxmlformats.org/drawingml/2006/main"/>
-          <a:p xmlns:a="http://schemas.openxmlformats.org/drawingml/2006/main">
-            <a:pPr algn="ctr">
-              <a:defRPr sz="1050">
-                <a:solidFill>
-                  <a:srgbClr val="56647A"/>
-                </a:solidFill>
-                <a:latin typeface="Arial"/>
-                <a:ea typeface="Arial"/>
-                <a:cs typeface="Arial"/>
-              </a:defRPr>
-            </a:pPr>
-            <a:r>
-              <a:rPr sz="1050">
-                <a:solidFill>
-                  <a:srgbClr val="56647A"/>
-                </a:solidFill>
-                <a:latin typeface="Arial"/>
-                <a:ea typeface="Arial"/>
-                <a:cs typeface="Arial"/>
-              </a:rPr>
-              <a:t>Guidance, service</a:t>
-            </a:r>
-          </a:p>
-          <a:p xmlns:a="http://schemas.openxmlformats.org/drawingml/2006/main">
-            <a:pPr algn="ctr">
-              <a:defRPr sz="1050">
-                <a:solidFill>
-                  <a:srgbClr val="56647A"/>
-                </a:solidFill>
-                <a:latin typeface="Arial"/>
-                <a:ea typeface="Arial"/>
-                <a:cs typeface="Arial"/>
-              </a:defRPr>
-            </a:pPr>
-            <a:r>
-              <a:rPr sz="1050">
-                <a:solidFill>
-                  <a:srgbClr val="56647A"/>
-                </a:solidFill>
-                <a:latin typeface="Arial"/>
-                <a:ea typeface="Arial"/>
-                <a:cs typeface="Arial"/>
-              </a:rPr>
-              <a:t>direction, sharing</a:t>
-            </a:r>
-          </a:p>
-        </p:txBody>
-      </p:sp>
-      <p:sp>
-        <p:nvSpPr>
-          <p:cNvPr id="58" name="">
-            <a:extLst xmlns:a="http://schemas.openxmlformats.org/drawingml/2006/main">
-              <a:ext uri="{FF2B5EF4-FFF2-40B4-BE49-F238E27FC236}">
-                <a16:creationId xmlns:a16="http://schemas.microsoft.com/office/drawing/2014/main" id="{A1EA363B-8A57-4D48-B321-F7DA9FF795EB}"/>
-              </a:ext>
-            </a:extLst>
-          </p:cNvPr>
-          <p:cNvSpPr>
-            <a:spLocks xmlns:a="http://schemas.openxmlformats.org/drawingml/2006/main" noGrp="1"/>
-          </p:cNvSpPr>
-          <p:nvPr/>
-        </p:nvSpPr>
-        <p:spPr>
-          <a:xfrm xmlns:a="http://schemas.openxmlformats.org/drawingml/2006/main">
-            <a:off x="1714500" y="5391150"/>
-            <a:ext cx="8382000" cy="742950"/>
-          </a:xfrm>
-          <a:prstGeom xmlns:a="http://schemas.openxmlformats.org/drawingml/2006/main" prst="roundRect">
-            <a:avLst>
-              <a:gd name="adj" fmla="val 10256"/>
-            </a:avLst>
-          </a:prstGeom>
-          <a:solidFill xmlns:a="http://schemas.openxmlformats.org/drawingml/2006/main">
-            <a:srgbClr val="FFFFFF"/>
-          </a:solidFill>
-          <a:ln xmlns:a="http://schemas.openxmlformats.org/drawingml/2006/main" w="0">
-            <a:noFill/>
-          </a:ln>
-        </p:spPr>
-      </p:sp>
-      <p:sp>
-        <p:nvSpPr>
-          <p:cNvPr id="59" name="">
-            <a:extLst xmlns:a="http://schemas.openxmlformats.org/drawingml/2006/main">
-              <a:ext uri="{FF2B5EF4-FFF2-40B4-BE49-F238E27FC236}">
-                <a16:creationId xmlns:a16="http://schemas.microsoft.com/office/drawing/2014/main" id="{E0CBD234-018D-4CCA-89B8-286938FBCCEE}"/>
-              </a:ext>
-            </a:extLst>
-          </p:cNvPr>
-          <p:cNvSpPr>
-            <a:spLocks xmlns:a="http://schemas.openxmlformats.org/drawingml/2006/main" noGrp="1"/>
-          </p:cNvSpPr>
-          <p:nvPr/>
-        </p:nvSpPr>
-        <p:spPr>
-          <a:xfrm xmlns:a="http://schemas.openxmlformats.org/drawingml/2006/main">
-            <a:off x="2000250" y="5572125"/>
-            <a:ext cx="7810500" cy="400050"/>
-          </a:xfrm>
-          <a:prstGeom xmlns:a="http://schemas.openxmlformats.org/drawingml/2006/main" prst="rect">
-            <a:avLst/>
-          </a:prstGeom>
-          <a:noFill xmlns:a="http://schemas.openxmlformats.org/drawingml/2006/main"/>
-          <a:ln xmlns:a="http://schemas.openxmlformats.org/drawingml/2006/main" w="0">
-            <a:noFill/>
-          </a:ln>
-        </p:spPr>
-        <p:txBody>
-          <a:bodyPr xmlns:a="http://schemas.openxmlformats.org/drawingml/2006/main">
-            <a:noAutofit/>
-          </a:bodyPr>
-          <a:lstStyle xmlns:a="http://schemas.openxmlformats.org/drawingml/2006/main"/>
-          <a:p xmlns:a="http://schemas.openxmlformats.org/drawingml/2006/main">
-            <a:pPr algn="ctr">
-              <a:defRPr sz="1275" b="1">
-                <a:solidFill>
-                  <a:srgbClr val="202A44"/>
-                </a:solidFill>
-                <a:latin typeface="Arial"/>
-                <a:ea typeface="Arial"/>
-                <a:cs typeface="Arial"/>
-              </a:defRPr>
-            </a:pPr>
-            <a:r>
-              <a:rPr sz="1275" b="1">
-                <a:solidFill>
-                  <a:srgbClr val="202A44"/>
-                </a:solidFill>
-                <a:latin typeface="Arial"/>
-                <a:ea typeface="Arial"/>
-                <a:cs typeface="Arial"/>
-              </a:rPr>
-              <a:t>Every result offers a Back or Start again option so people can revisit choices</a:t>
-            </a:r>
-          </a:p>
-          <a:p xmlns:a="http://schemas.openxmlformats.org/drawingml/2006/main">
-            <a:pPr algn="ctr">
-              <a:defRPr sz="1275" b="1">
-                <a:solidFill>
-                  <a:srgbClr val="202A44"/>
-                </a:solidFill>
-                <a:latin typeface="Arial"/>
-                <a:ea typeface="Arial"/>
-                <a:cs typeface="Arial"/>
-              </a:defRPr>
-            </a:pPr>
-            <a:r>
-              <a:rPr sz="1275" b="1">
-                <a:solidFill>
-                  <a:srgbClr val="202A44"/>
-                </a:solidFill>
-                <a:latin typeface="Arial"/>
-                <a:ea typeface="Arial"/>
-                <a:cs typeface="Arial"/>
-              </a:rPr>
-              <a:t>without losing the journey.</a:t>
-            </a:r>
-          </a:p>
-        </p:txBody>
-      </p:sp>
-      <p:sp>
-        <p:nvSpPr>
-          <p:cNvPr id="60" name="">
-            <a:extLst xmlns:a="http://schemas.openxmlformats.org/drawingml/2006/main">
-              <a:ext uri="{FF2B5EF4-FFF2-40B4-BE49-F238E27FC236}">
-                <a16:creationId xmlns:a16="http://schemas.microsoft.com/office/drawing/2014/main" id="{57A760AE-3083-45A7-AE43-710380D28AF4}"/>
-              </a:ext>
-            </a:extLst>
-          </p:cNvPr>
-          <p:cNvSpPr>
-            <a:spLocks xmlns:a="http://schemas.openxmlformats.org/drawingml/2006/main" noGrp="1"/>
-          </p:cNvSpPr>
-          <p:nvPr/>
-        </p:nvSpPr>
-        <p:spPr>
-          <a:xfrm xmlns:a="http://schemas.openxmlformats.org/drawingml/2006/main">
-            <a:off x="11049000" y="6438900"/>
-            <a:ext cx="457200" cy="171450"/>
-          </a:xfrm>
-          <a:prstGeom xmlns:a="http://schemas.openxmlformats.org/drawingml/2006/main" prst="rect">
-            <a:avLst/>
-          </a:prstGeom>
-          <a:noFill xmlns:a="http://schemas.openxmlformats.org/drawingml/2006/main"/>
-          <a:ln xmlns:a="http://schemas.openxmlformats.org/drawingml/2006/main" w="0">
-            <a:noFill/>
-          </a:ln>
-        </p:spPr>
-        <p:txBody>
-          <a:bodyPr xmlns:a="http://schemas.openxmlformats.org/drawingml/2006/main">
-            <a:noAutofit/>
-          </a:bodyPr>
-          <a:lstStyle xmlns:a="http://schemas.openxmlformats.org/drawingml/2006/main"/>
-          <a:p xmlns:a="http://schemas.openxmlformats.org/drawingml/2006/main">
-            <a:pPr algn="r">
-              <a:defRPr sz="900">
-                <a:solidFill>
-                  <a:srgbClr val="56647A"/>
-                </a:solidFill>
-                <a:latin typeface="Arial"/>
-                <a:ea typeface="Arial"/>
-                <a:cs typeface="Arial"/>
-              </a:defRPr>
-            </a:pPr>
-            <a:r>
-              <a:rPr sz="900">
-                <a:solidFill>
-                  <a:srgbClr val="56647A"/>
-                </a:solidFill>
-                <a:latin typeface="Arial"/>
-                <a:ea typeface="Arial"/>
-                <a:cs typeface="Arial"/>
-              </a:rPr>
-              <a:t>5</a:t>
-            </a:r>
-          </a:p>
-        </p:txBody>
-      </p:sp>
-    </p:spTree>
-    <p:extLst>
-      <p:ext uri="{BB962C8B-B14F-4D97-AF65-F5344CB8AC3E}">
-        <p14:creationId xmlns:p14="http://schemas.microsoft.com/office/powerpoint/2010/main" val="378439946"/>
       </p:ext>
     </p:extLst>
   </p:cSld>
@@ -21172,6 +21334,7 @@
           <a:lstStyle xmlns:a="http://schemas.openxmlformats.org/drawingml/2006/main"/>
           <a:p xmlns:a="http://schemas.openxmlformats.org/drawingml/2006/main">
             <a:pPr>
+              <a:buNone/>
               <a:defRPr sz="1200" b="1">
                 <a:solidFill>
                   <a:srgbClr val="E7A048"/>
@@ -21229,6 +21392,7 @@
           <a:lstStyle xmlns:a="http://schemas.openxmlformats.org/drawingml/2006/main"/>
           <a:p xmlns:a="http://schemas.openxmlformats.org/drawingml/2006/main">
             <a:pPr algn="r">
+              <a:buNone/>
               <a:defRPr sz="975" b="1">
                 <a:solidFill>
                   <a:srgbClr val="E7A048"/>
@@ -21286,6 +21450,7 @@
           <a:lstStyle xmlns:a="http://schemas.openxmlformats.org/drawingml/2006/main"/>
           <a:p xmlns:a="http://schemas.openxmlformats.org/drawingml/2006/main">
             <a:pPr>
+              <a:buNone/>
               <a:defRPr sz="2550" b="1">
                 <a:solidFill>
                   <a:srgbClr val="FFFFFF"/>
@@ -21343,6 +21508,7 @@
           <a:lstStyle xmlns:a="http://schemas.openxmlformats.org/drawingml/2006/main"/>
           <a:p xmlns:a="http://schemas.openxmlformats.org/drawingml/2006/main">
             <a:pPr>
+              <a:buNone/>
               <a:defRPr sz="1275">
                 <a:solidFill>
                   <a:srgbClr val="C8D4EE"/>
@@ -21498,6 +21664,7 @@
           <a:lstStyle xmlns:a="http://schemas.openxmlformats.org/drawingml/2006/main"/>
           <a:p xmlns:a="http://schemas.openxmlformats.org/drawingml/2006/main">
             <a:pPr>
+              <a:buNone/>
               <a:defRPr sz="1125" b="1">
                 <a:solidFill>
                   <a:srgbClr val="E7A048"/>
@@ -21555,6 +21722,7 @@
           <a:lstStyle xmlns:a="http://schemas.openxmlformats.org/drawingml/2006/main"/>
           <a:p xmlns:a="http://schemas.openxmlformats.org/drawingml/2006/main">
             <a:pPr>
+              <a:buNone/>
               <a:defRPr sz="1725" b="1">
                 <a:solidFill>
                   <a:srgbClr val="FFFFFF"/>
@@ -21578,6 +21746,7 @@
           </a:p>
           <a:p xmlns:a="http://schemas.openxmlformats.org/drawingml/2006/main">
             <a:pPr>
+              <a:buNone/>
               <a:defRPr sz="1725" b="1">
                 <a:solidFill>
                   <a:srgbClr val="FFFFFF"/>
@@ -21635,6 +21804,7 @@
           <a:lstStyle xmlns:a="http://schemas.openxmlformats.org/drawingml/2006/main"/>
           <a:p xmlns:a="http://schemas.openxmlformats.org/drawingml/2006/main">
             <a:pPr>
+              <a:buNone/>
               <a:defRPr sz="1350">
                 <a:solidFill>
                   <a:srgbClr val="DCE4F3"/>
@@ -21724,6 +21894,7 @@
           <a:lstStyle xmlns:a="http://schemas.openxmlformats.org/drawingml/2006/main"/>
           <a:p xmlns:a="http://schemas.openxmlformats.org/drawingml/2006/main">
             <a:pPr algn="ctr">
+              <a:buNone/>
               <a:defRPr sz="1050" b="1">
                 <a:solidFill>
                   <a:srgbClr val="DE664C"/>
@@ -21781,6 +21952,7 @@
           <a:lstStyle xmlns:a="http://schemas.openxmlformats.org/drawingml/2006/main"/>
           <a:p xmlns:a="http://schemas.openxmlformats.org/drawingml/2006/main">
             <a:pPr>
+              <a:buNone/>
               <a:defRPr sz="1125" b="1">
                 <a:solidFill>
                   <a:srgbClr val="E7A048"/>
@@ -21838,6 +22010,7 @@
           <a:lstStyle xmlns:a="http://schemas.openxmlformats.org/drawingml/2006/main"/>
           <a:p xmlns:a="http://schemas.openxmlformats.org/drawingml/2006/main">
             <a:pPr>
+              <a:buNone/>
               <a:defRPr sz="1725" b="1">
                 <a:solidFill>
                   <a:srgbClr val="FFFFFF"/>
@@ -21861,6 +22034,7 @@
           </a:p>
           <a:p xmlns:a="http://schemas.openxmlformats.org/drawingml/2006/main">
             <a:pPr>
+              <a:buNone/>
               <a:defRPr sz="1725" b="1">
                 <a:solidFill>
                   <a:srgbClr val="FFFFFF"/>
@@ -21918,6 +22092,7 @@
           <a:lstStyle xmlns:a="http://schemas.openxmlformats.org/drawingml/2006/main"/>
           <a:p xmlns:a="http://schemas.openxmlformats.org/drawingml/2006/main">
             <a:pPr>
+              <a:buNone/>
               <a:defRPr sz="1050">
                 <a:solidFill>
                   <a:srgbClr val="DCE4F3"/>
@@ -22007,6 +22182,7 @@
           <a:lstStyle xmlns:a="http://schemas.openxmlformats.org/drawingml/2006/main"/>
           <a:p xmlns:a="http://schemas.openxmlformats.org/drawingml/2006/main">
             <a:pPr algn="ctr">
+              <a:buNone/>
               <a:defRPr sz="1050" b="1">
                 <a:solidFill>
                   <a:srgbClr val="237A7A"/>
@@ -22096,6 +22272,7 @@
           <a:lstStyle xmlns:a="http://schemas.openxmlformats.org/drawingml/2006/main"/>
           <a:p xmlns:a="http://schemas.openxmlformats.org/drawingml/2006/main">
             <a:pPr algn="ctr">
+              <a:buNone/>
               <a:defRPr sz="1200" b="1">
                 <a:solidFill>
                   <a:srgbClr val="202A44"/>
@@ -22153,6 +22330,7 @@
           <a:lstStyle xmlns:a="http://schemas.openxmlformats.org/drawingml/2006/main"/>
           <a:p xmlns:a="http://schemas.openxmlformats.org/drawingml/2006/main">
             <a:pPr algn="r">
+              <a:buNone/>
               <a:defRPr sz="900">
                 <a:solidFill>
                   <a:srgbClr val="C8D4EE"/>
@@ -22262,6 +22440,7 @@
           <a:lstStyle xmlns:a="http://schemas.openxmlformats.org/drawingml/2006/main"/>
           <a:p xmlns:a="http://schemas.openxmlformats.org/drawingml/2006/main">
             <a:pPr>
+              <a:buNone/>
               <a:defRPr sz="1200" b="1">
                 <a:solidFill>
                   <a:srgbClr val="E7A048"/>
@@ -22319,6 +22498,7 @@
           <a:lstStyle xmlns:a="http://schemas.openxmlformats.org/drawingml/2006/main"/>
           <a:p xmlns:a="http://schemas.openxmlformats.org/drawingml/2006/main">
             <a:pPr algn="r">
+              <a:buNone/>
               <a:defRPr sz="975" b="1">
                 <a:solidFill>
                   <a:srgbClr val="4656A8"/>
@@ -22376,6 +22556,7 @@
           <a:lstStyle xmlns:a="http://schemas.openxmlformats.org/drawingml/2006/main"/>
           <a:p xmlns:a="http://schemas.openxmlformats.org/drawingml/2006/main">
             <a:pPr>
+              <a:buNone/>
               <a:defRPr sz="2550" b="1">
                 <a:solidFill>
                   <a:srgbClr val="202A44"/>
@@ -22433,6 +22614,7 @@
           <a:lstStyle xmlns:a="http://schemas.openxmlformats.org/drawingml/2006/main"/>
           <a:p xmlns:a="http://schemas.openxmlformats.org/drawingml/2006/main">
             <a:pPr>
+              <a:buNone/>
               <a:defRPr sz="1275">
                 <a:solidFill>
                   <a:srgbClr val="56647A"/>
@@ -22552,6 +22734,7 @@
           <a:lstStyle xmlns:a="http://schemas.openxmlformats.org/drawingml/2006/main"/>
           <a:p xmlns:a="http://schemas.openxmlformats.org/drawingml/2006/main">
             <a:pPr algn="ctr">
+              <a:buNone/>
               <a:defRPr sz="1125" b="1">
                 <a:solidFill>
                   <a:srgbClr val="DE664C"/>
@@ -22675,6 +22858,7 @@
           <a:lstStyle xmlns:a="http://schemas.openxmlformats.org/drawingml/2006/main"/>
           <a:p xmlns:a="http://schemas.openxmlformats.org/drawingml/2006/main">
             <a:pPr>
+              <a:buNone/>
               <a:defRPr sz="1575" b="1">
                 <a:solidFill>
                   <a:srgbClr val="202A44"/>
@@ -22732,6 +22916,7 @@
           <a:lstStyle xmlns:a="http://schemas.openxmlformats.org/drawingml/2006/main"/>
           <a:p xmlns:a="http://schemas.openxmlformats.org/drawingml/2006/main">
             <a:pPr>
+              <a:buNone/>
               <a:defRPr sz="1050">
                 <a:solidFill>
                   <a:srgbClr val="56647A"/>
@@ -22755,6 +22940,7 @@
           </a:p>
           <a:p xmlns:a="http://schemas.openxmlformats.org/drawingml/2006/main">
             <a:pPr>
+              <a:buNone/>
               <a:defRPr sz="1050">
                 <a:solidFill>
                   <a:srgbClr val="56647A"/>
@@ -22812,6 +22998,7 @@
           <a:lstStyle xmlns:a="http://schemas.openxmlformats.org/drawingml/2006/main"/>
           <a:p xmlns:a="http://schemas.openxmlformats.org/drawingml/2006/main">
             <a:pPr>
+              <a:buNone/>
               <a:defRPr sz="975" b="1">
                 <a:solidFill>
                   <a:srgbClr val="237A7A"/>
@@ -22835,6 +23022,7 @@
           </a:p>
           <a:p xmlns:a="http://schemas.openxmlformats.org/drawingml/2006/main">
             <a:pPr>
+              <a:buNone/>
               <a:defRPr sz="975" b="1">
                 <a:solidFill>
                   <a:srgbClr val="237A7A"/>
@@ -22892,6 +23080,7 @@
           <a:lstStyle xmlns:a="http://schemas.openxmlformats.org/drawingml/2006/main"/>
           <a:p xmlns:a="http://schemas.openxmlformats.org/drawingml/2006/main">
             <a:pPr>
+              <a:buNone/>
               <a:defRPr sz="900" b="1">
                 <a:solidFill>
                   <a:srgbClr val="202A44"/>
@@ -23015,6 +23204,7 @@
           <a:lstStyle xmlns:a="http://schemas.openxmlformats.org/drawingml/2006/main"/>
           <a:p xmlns:a="http://schemas.openxmlformats.org/drawingml/2006/main">
             <a:pPr>
+              <a:buNone/>
               <a:defRPr sz="1575" b="1">
                 <a:solidFill>
                   <a:srgbClr val="202A44"/>
@@ -23072,6 +23262,7 @@
           <a:lstStyle xmlns:a="http://schemas.openxmlformats.org/drawingml/2006/main"/>
           <a:p xmlns:a="http://schemas.openxmlformats.org/drawingml/2006/main">
             <a:pPr>
+              <a:buNone/>
               <a:defRPr sz="1050">
                 <a:solidFill>
                   <a:srgbClr val="56647A"/>
@@ -23095,6 +23286,7 @@
           </a:p>
           <a:p xmlns:a="http://schemas.openxmlformats.org/drawingml/2006/main">
             <a:pPr>
+              <a:buNone/>
               <a:defRPr sz="1050">
                 <a:solidFill>
                   <a:srgbClr val="56647A"/>
@@ -23152,6 +23344,7 @@
           <a:lstStyle xmlns:a="http://schemas.openxmlformats.org/drawingml/2006/main"/>
           <a:p xmlns:a="http://schemas.openxmlformats.org/drawingml/2006/main">
             <a:pPr>
+              <a:buNone/>
               <a:defRPr sz="975" b="1">
                 <a:solidFill>
                   <a:srgbClr val="4656A8"/>
@@ -23175,6 +23368,7 @@
           </a:p>
           <a:p xmlns:a="http://schemas.openxmlformats.org/drawingml/2006/main">
             <a:pPr>
+              <a:buNone/>
               <a:defRPr sz="975" b="1">
                 <a:solidFill>
                   <a:srgbClr val="4656A8"/>
@@ -23298,6 +23492,7 @@
           <a:lstStyle xmlns:a="http://schemas.openxmlformats.org/drawingml/2006/main"/>
           <a:p xmlns:a="http://schemas.openxmlformats.org/drawingml/2006/main">
             <a:pPr>
+              <a:buNone/>
               <a:defRPr sz="1575" b="1">
                 <a:solidFill>
                   <a:srgbClr val="202A44"/>
@@ -23355,6 +23550,7 @@
           <a:lstStyle xmlns:a="http://schemas.openxmlformats.org/drawingml/2006/main"/>
           <a:p xmlns:a="http://schemas.openxmlformats.org/drawingml/2006/main">
             <a:pPr>
+              <a:buNone/>
               <a:defRPr sz="1050">
                 <a:solidFill>
                   <a:srgbClr val="56647A"/>
@@ -23378,6 +23574,7 @@
           </a:p>
           <a:p xmlns:a="http://schemas.openxmlformats.org/drawingml/2006/main">
             <a:pPr>
+              <a:buNone/>
               <a:defRPr sz="1050">
                 <a:solidFill>
                   <a:srgbClr val="56647A"/>
@@ -23435,6 +23632,7 @@
           <a:lstStyle xmlns:a="http://schemas.openxmlformats.org/drawingml/2006/main"/>
           <a:p xmlns:a="http://schemas.openxmlformats.org/drawingml/2006/main">
             <a:pPr>
+              <a:buNone/>
               <a:defRPr sz="975" b="1">
                 <a:solidFill>
                   <a:srgbClr val="E7A048"/>
@@ -23458,6 +23656,7 @@
           </a:p>
           <a:p xmlns:a="http://schemas.openxmlformats.org/drawingml/2006/main">
             <a:pPr>
+              <a:buNone/>
               <a:defRPr sz="975" b="1">
                 <a:solidFill>
                   <a:srgbClr val="E7A048"/>
@@ -23515,6 +23714,7 @@
           <a:lstStyle xmlns:a="http://schemas.openxmlformats.org/drawingml/2006/main"/>
           <a:p xmlns:a="http://schemas.openxmlformats.org/drawingml/2006/main">
             <a:pPr algn="ctr">
+              <a:buNone/>
               <a:defRPr sz="900">
                 <a:solidFill>
                   <a:srgbClr val="56647A"/>
@@ -23604,6 +23804,7 @@
           <a:lstStyle xmlns:a="http://schemas.openxmlformats.org/drawingml/2006/main"/>
           <a:p xmlns:a="http://schemas.openxmlformats.org/drawingml/2006/main">
             <a:pPr algn="ctr">
+              <a:buNone/>
               <a:defRPr sz="975" b="1">
                 <a:solidFill>
                   <a:srgbClr val="202A44"/>
@@ -23627,6 +23828,7 @@
           </a:p>
           <a:p xmlns:a="http://schemas.openxmlformats.org/drawingml/2006/main">
             <a:pPr algn="ctr">
+              <a:buNone/>
               <a:defRPr sz="975" b="1">
                 <a:solidFill>
                   <a:srgbClr val="202A44"/>
@@ -23684,6 +23886,7 @@
           <a:lstStyle xmlns:a="http://schemas.openxmlformats.org/drawingml/2006/main"/>
           <a:p xmlns:a="http://schemas.openxmlformats.org/drawingml/2006/main">
             <a:pPr algn="r">
+              <a:buNone/>
               <a:defRPr sz="900">
                 <a:solidFill>
                   <a:srgbClr val="56647A"/>
@@ -23793,6 +23996,7 @@
           <a:lstStyle xmlns:a="http://schemas.openxmlformats.org/drawingml/2006/main"/>
           <a:p xmlns:a="http://schemas.openxmlformats.org/drawingml/2006/main">
             <a:pPr>
+              <a:buNone/>
               <a:defRPr sz="1200" b="1">
                 <a:solidFill>
                   <a:srgbClr val="E7A048"/>
@@ -23850,6 +24054,7 @@
           <a:lstStyle xmlns:a="http://schemas.openxmlformats.org/drawingml/2006/main"/>
           <a:p xmlns:a="http://schemas.openxmlformats.org/drawingml/2006/main">
             <a:pPr algn="r">
+              <a:buNone/>
               <a:defRPr sz="975" b="1">
                 <a:solidFill>
                   <a:srgbClr val="4656A8"/>
@@ -23907,6 +24112,7 @@
           <a:lstStyle xmlns:a="http://schemas.openxmlformats.org/drawingml/2006/main"/>
           <a:p xmlns:a="http://schemas.openxmlformats.org/drawingml/2006/main">
             <a:pPr>
+              <a:buNone/>
               <a:defRPr sz="2550" b="1">
                 <a:solidFill>
                   <a:srgbClr val="202A44"/>
@@ -23964,6 +24170,7 @@
           <a:lstStyle xmlns:a="http://schemas.openxmlformats.org/drawingml/2006/main"/>
           <a:p xmlns:a="http://schemas.openxmlformats.org/drawingml/2006/main">
             <a:pPr>
+              <a:buNone/>
               <a:defRPr sz="1275">
                 <a:solidFill>
                   <a:srgbClr val="56647A"/>
@@ -24085,6 +24292,7 @@
           <a:lstStyle xmlns:a="http://schemas.openxmlformats.org/drawingml/2006/main"/>
           <a:p xmlns:a="http://schemas.openxmlformats.org/drawingml/2006/main">
             <a:pPr>
+              <a:buNone/>
               <a:defRPr sz="1050" b="1">
                 <a:solidFill>
                   <a:srgbClr val="4656A8"/>
@@ -24172,6 +24380,7 @@
           <a:lstStyle xmlns:a="http://schemas.openxmlformats.org/drawingml/2006/main"/>
           <a:p xmlns:a="http://schemas.openxmlformats.org/drawingml/2006/main">
             <a:pPr>
+              <a:buNone/>
               <a:defRPr sz="1200" b="1">
                 <a:solidFill>
                   <a:srgbClr val="202A44"/>
@@ -24229,6 +24438,7 @@
           <a:lstStyle xmlns:a="http://schemas.openxmlformats.org/drawingml/2006/main"/>
           <a:p xmlns:a="http://schemas.openxmlformats.org/drawingml/2006/main">
             <a:pPr>
+              <a:buNone/>
               <a:defRPr sz="975">
                 <a:solidFill>
                   <a:srgbClr val="56647A"/>
@@ -24316,6 +24526,7 @@
           <a:lstStyle xmlns:a="http://schemas.openxmlformats.org/drawingml/2006/main"/>
           <a:p xmlns:a="http://schemas.openxmlformats.org/drawingml/2006/main">
             <a:pPr>
+              <a:buNone/>
               <a:defRPr sz="1200" b="1">
                 <a:solidFill>
                   <a:srgbClr val="202A44"/>
@@ -24373,6 +24584,7 @@
           <a:lstStyle xmlns:a="http://schemas.openxmlformats.org/drawingml/2006/main"/>
           <a:p xmlns:a="http://schemas.openxmlformats.org/drawingml/2006/main">
             <a:pPr>
+              <a:buNone/>
               <a:defRPr sz="975">
                 <a:solidFill>
                   <a:srgbClr val="56647A"/>
@@ -24460,6 +24672,7 @@
           <a:lstStyle xmlns:a="http://schemas.openxmlformats.org/drawingml/2006/main"/>
           <a:p xmlns:a="http://schemas.openxmlformats.org/drawingml/2006/main">
             <a:pPr>
+              <a:buNone/>
               <a:defRPr sz="1200" b="1">
                 <a:solidFill>
                   <a:srgbClr val="202A44"/>
@@ -24517,6 +24730,7 @@
           <a:lstStyle xmlns:a="http://schemas.openxmlformats.org/drawingml/2006/main"/>
           <a:p xmlns:a="http://schemas.openxmlformats.org/drawingml/2006/main">
             <a:pPr>
+              <a:buNone/>
               <a:defRPr sz="975">
                 <a:solidFill>
                   <a:srgbClr val="56647A"/>
@@ -24604,6 +24818,7 @@
           <a:lstStyle xmlns:a="http://schemas.openxmlformats.org/drawingml/2006/main"/>
           <a:p xmlns:a="http://schemas.openxmlformats.org/drawingml/2006/main">
             <a:pPr>
+              <a:buNone/>
               <a:defRPr sz="1200" b="1">
                 <a:solidFill>
                   <a:srgbClr val="202A44"/>
@@ -24661,6 +24876,7 @@
           <a:lstStyle xmlns:a="http://schemas.openxmlformats.org/drawingml/2006/main"/>
           <a:p xmlns:a="http://schemas.openxmlformats.org/drawingml/2006/main">
             <a:pPr>
+              <a:buNone/>
               <a:defRPr sz="975">
                 <a:solidFill>
                   <a:srgbClr val="56647A"/>
@@ -24748,6 +24964,7 @@
           <a:lstStyle xmlns:a="http://schemas.openxmlformats.org/drawingml/2006/main"/>
           <a:p xmlns:a="http://schemas.openxmlformats.org/drawingml/2006/main">
             <a:pPr>
+              <a:buNone/>
               <a:defRPr sz="1200" b="1">
                 <a:solidFill>
                   <a:srgbClr val="202A44"/>
@@ -24805,6 +25022,7 @@
           <a:lstStyle xmlns:a="http://schemas.openxmlformats.org/drawingml/2006/main"/>
           <a:p xmlns:a="http://schemas.openxmlformats.org/drawingml/2006/main">
             <a:pPr>
+              <a:buNone/>
               <a:defRPr sz="975">
                 <a:solidFill>
                   <a:srgbClr val="56647A"/>
@@ -24896,6 +25114,7 @@
           <a:lstStyle xmlns:a="http://schemas.openxmlformats.org/drawingml/2006/main"/>
           <a:p xmlns:a="http://schemas.openxmlformats.org/drawingml/2006/main">
             <a:pPr>
+              <a:buNone/>
               <a:defRPr sz="1050" b="1">
                 <a:solidFill>
                   <a:srgbClr val="4656A8"/>
@@ -24983,6 +25202,7 @@
           <a:lstStyle xmlns:a="http://schemas.openxmlformats.org/drawingml/2006/main"/>
           <a:p xmlns:a="http://schemas.openxmlformats.org/drawingml/2006/main">
             <a:pPr>
+              <a:buNone/>
               <a:defRPr sz="1200" b="1">
                 <a:solidFill>
                   <a:srgbClr val="202A44"/>
@@ -25040,6 +25260,7 @@
           <a:lstStyle xmlns:a="http://schemas.openxmlformats.org/drawingml/2006/main"/>
           <a:p xmlns:a="http://schemas.openxmlformats.org/drawingml/2006/main">
             <a:pPr>
+              <a:buNone/>
               <a:defRPr sz="975">
                 <a:solidFill>
                   <a:srgbClr val="56647A"/>
@@ -25127,6 +25348,7 @@
           <a:lstStyle xmlns:a="http://schemas.openxmlformats.org/drawingml/2006/main"/>
           <a:p xmlns:a="http://schemas.openxmlformats.org/drawingml/2006/main">
             <a:pPr>
+              <a:buNone/>
               <a:defRPr sz="1200" b="1">
                 <a:solidFill>
                   <a:srgbClr val="202A44"/>
@@ -25184,6 +25406,7 @@
           <a:lstStyle xmlns:a="http://schemas.openxmlformats.org/drawingml/2006/main"/>
           <a:p xmlns:a="http://schemas.openxmlformats.org/drawingml/2006/main">
             <a:pPr>
+              <a:buNone/>
               <a:defRPr sz="975">
                 <a:solidFill>
                   <a:srgbClr val="56647A"/>
@@ -25271,6 +25494,7 @@
           <a:lstStyle xmlns:a="http://schemas.openxmlformats.org/drawingml/2006/main"/>
           <a:p xmlns:a="http://schemas.openxmlformats.org/drawingml/2006/main">
             <a:pPr>
+              <a:buNone/>
               <a:defRPr sz="1200" b="1">
                 <a:solidFill>
                   <a:srgbClr val="202A44"/>
@@ -25328,6 +25552,7 @@
           <a:lstStyle xmlns:a="http://schemas.openxmlformats.org/drawingml/2006/main"/>
           <a:p xmlns:a="http://schemas.openxmlformats.org/drawingml/2006/main">
             <a:pPr>
+              <a:buNone/>
               <a:defRPr sz="975">
                 <a:solidFill>
                   <a:srgbClr val="56647A"/>
@@ -25415,6 +25640,7 @@
           <a:lstStyle xmlns:a="http://schemas.openxmlformats.org/drawingml/2006/main"/>
           <a:p xmlns:a="http://schemas.openxmlformats.org/drawingml/2006/main">
             <a:pPr>
+              <a:buNone/>
               <a:defRPr sz="1200" b="1">
                 <a:solidFill>
                   <a:srgbClr val="202A44"/>
@@ -25472,6 +25698,7 @@
           <a:lstStyle xmlns:a="http://schemas.openxmlformats.org/drawingml/2006/main"/>
           <a:p xmlns:a="http://schemas.openxmlformats.org/drawingml/2006/main">
             <a:pPr>
+              <a:buNone/>
               <a:defRPr sz="975">
                 <a:solidFill>
                   <a:srgbClr val="56647A"/>
@@ -25559,6 +25786,7 @@
           <a:lstStyle xmlns:a="http://schemas.openxmlformats.org/drawingml/2006/main"/>
           <a:p xmlns:a="http://schemas.openxmlformats.org/drawingml/2006/main">
             <a:pPr>
+              <a:buNone/>
               <a:defRPr sz="1200" b="1">
                 <a:solidFill>
                   <a:srgbClr val="202A44"/>
@@ -25616,6 +25844,7 @@
           <a:lstStyle xmlns:a="http://schemas.openxmlformats.org/drawingml/2006/main"/>
           <a:p xmlns:a="http://schemas.openxmlformats.org/drawingml/2006/main">
             <a:pPr>
+              <a:buNone/>
               <a:defRPr sz="975">
                 <a:solidFill>
                   <a:srgbClr val="56647A"/>
@@ -25705,6 +25934,7 @@
           <a:lstStyle xmlns:a="http://schemas.openxmlformats.org/drawingml/2006/main"/>
           <a:p xmlns:a="http://schemas.openxmlformats.org/drawingml/2006/main">
             <a:pPr algn="ctr">
+              <a:buNone/>
               <a:defRPr sz="975" b="1">
                 <a:solidFill>
                   <a:srgbClr val="202A44"/>
@@ -25762,6 +25992,7 @@
           <a:lstStyle xmlns:a="http://schemas.openxmlformats.org/drawingml/2006/main"/>
           <a:p xmlns:a="http://schemas.openxmlformats.org/drawingml/2006/main">
             <a:pPr algn="r">
+              <a:buNone/>
               <a:defRPr sz="900">
                 <a:solidFill>
                   <a:srgbClr val="56647A"/>
@@ -25871,6 +26102,7 @@
           <a:lstStyle xmlns:a="http://schemas.openxmlformats.org/drawingml/2006/main"/>
           <a:p xmlns:a="http://schemas.openxmlformats.org/drawingml/2006/main">
             <a:pPr>
+              <a:buNone/>
               <a:defRPr sz="1200" b="1">
                 <a:solidFill>
                   <a:srgbClr val="E7A048"/>
@@ -25928,6 +26160,7 @@
           <a:lstStyle xmlns:a="http://schemas.openxmlformats.org/drawingml/2006/main"/>
           <a:p xmlns:a="http://schemas.openxmlformats.org/drawingml/2006/main">
             <a:pPr algn="r">
+              <a:buNone/>
               <a:defRPr sz="975" b="1">
                 <a:solidFill>
                   <a:srgbClr val="4656A8"/>
@@ -25985,6 +26218,7 @@
           <a:lstStyle xmlns:a="http://schemas.openxmlformats.org/drawingml/2006/main"/>
           <a:p xmlns:a="http://schemas.openxmlformats.org/drawingml/2006/main">
             <a:pPr>
+              <a:buNone/>
               <a:defRPr sz="2550" b="1">
                 <a:solidFill>
                   <a:srgbClr val="202A44"/>
@@ -26042,6 +26276,7 @@
           <a:lstStyle xmlns:a="http://schemas.openxmlformats.org/drawingml/2006/main"/>
           <a:p xmlns:a="http://schemas.openxmlformats.org/drawingml/2006/main">
             <a:pPr>
+              <a:buNone/>
               <a:defRPr sz="1275">
                 <a:solidFill>
                   <a:srgbClr val="56647A"/>
@@ -26129,6 +26364,7 @@
           <a:lstStyle xmlns:a="http://schemas.openxmlformats.org/drawingml/2006/main"/>
           <a:p xmlns:a="http://schemas.openxmlformats.org/drawingml/2006/main">
             <a:pPr>
+              <a:buNone/>
               <a:defRPr sz="975" b="1">
                 <a:solidFill>
                   <a:srgbClr val="4656A8"/>
@@ -26186,6 +26422,7 @@
           <a:lstStyle xmlns:a="http://schemas.openxmlformats.org/drawingml/2006/main"/>
           <a:p xmlns:a="http://schemas.openxmlformats.org/drawingml/2006/main">
             <a:pPr>
+              <a:buNone/>
               <a:defRPr sz="975" b="1">
                 <a:solidFill>
                   <a:srgbClr val="4656A8"/>
@@ -26243,6 +26480,7 @@
           <a:lstStyle xmlns:a="http://schemas.openxmlformats.org/drawingml/2006/main"/>
           <a:p xmlns:a="http://schemas.openxmlformats.org/drawingml/2006/main">
             <a:pPr>
+              <a:buNone/>
               <a:defRPr sz="975" b="1">
                 <a:solidFill>
                   <a:srgbClr val="4656A8"/>
@@ -26334,6 +26572,7 @@
           <a:lstStyle xmlns:a="http://schemas.openxmlformats.org/drawingml/2006/main"/>
           <a:p xmlns:a="http://schemas.openxmlformats.org/drawingml/2006/main">
             <a:pPr>
+              <a:buNone/>
               <a:defRPr sz="1125" b="1">
                 <a:solidFill>
                   <a:srgbClr val="202A44"/>
@@ -26391,6 +26630,7 @@
           <a:lstStyle xmlns:a="http://schemas.openxmlformats.org/drawingml/2006/main"/>
           <a:p xmlns:a="http://schemas.openxmlformats.org/drawingml/2006/main">
             <a:pPr>
+              <a:buNone/>
               <a:defRPr sz="975">
                 <a:solidFill>
                   <a:srgbClr val="56647A"/>
@@ -26414,6 +26654,7 @@
           </a:p>
           <a:p xmlns:a="http://schemas.openxmlformats.org/drawingml/2006/main">
             <a:pPr>
+              <a:buNone/>
               <a:defRPr sz="975">
                 <a:solidFill>
                   <a:srgbClr val="56647A"/>
@@ -26471,6 +26712,7 @@
           <a:lstStyle xmlns:a="http://schemas.openxmlformats.org/drawingml/2006/main"/>
           <a:p xmlns:a="http://schemas.openxmlformats.org/drawingml/2006/main">
             <a:pPr>
+              <a:buNone/>
               <a:defRPr sz="900">
                 <a:solidFill>
                   <a:srgbClr val="56647A"/>
@@ -26560,6 +26802,7 @@
           <a:lstStyle xmlns:a="http://schemas.openxmlformats.org/drawingml/2006/main"/>
           <a:p xmlns:a="http://schemas.openxmlformats.org/drawingml/2006/main">
             <a:pPr algn="ctr">
+              <a:buNone/>
               <a:defRPr sz="713" b="1">
                 <a:solidFill>
                   <a:srgbClr val="4656A8"/>
@@ -26583,6 +26826,7 @@
           </a:p>
           <a:p xmlns:a="http://schemas.openxmlformats.org/drawingml/2006/main">
             <a:pPr algn="ctr">
+              <a:buNone/>
               <a:defRPr sz="713" b="1">
                 <a:solidFill>
                   <a:srgbClr val="4656A8"/>
@@ -26674,6 +26918,7 @@
           <a:lstStyle xmlns:a="http://schemas.openxmlformats.org/drawingml/2006/main"/>
           <a:p xmlns:a="http://schemas.openxmlformats.org/drawingml/2006/main">
             <a:pPr>
+              <a:buNone/>
               <a:defRPr sz="1125" b="1">
                 <a:solidFill>
                   <a:srgbClr val="202A44"/>
@@ -26731,6 +26976,7 @@
           <a:lstStyle xmlns:a="http://schemas.openxmlformats.org/drawingml/2006/main"/>
           <a:p xmlns:a="http://schemas.openxmlformats.org/drawingml/2006/main">
             <a:pPr>
+              <a:buNone/>
               <a:defRPr sz="975">
                 <a:solidFill>
                   <a:srgbClr val="56647A"/>
@@ -26754,6 +27000,7 @@
           </a:p>
           <a:p xmlns:a="http://schemas.openxmlformats.org/drawingml/2006/main">
             <a:pPr>
+              <a:buNone/>
               <a:defRPr sz="975">
                 <a:solidFill>
                   <a:srgbClr val="56647A"/>
@@ -26811,6 +27058,7 @@
           <a:lstStyle xmlns:a="http://schemas.openxmlformats.org/drawingml/2006/main"/>
           <a:p xmlns:a="http://schemas.openxmlformats.org/drawingml/2006/main">
             <a:pPr>
+              <a:buNone/>
               <a:defRPr sz="900">
                 <a:solidFill>
                   <a:srgbClr val="56647A"/>
@@ -26902,6 +27150,7 @@
           <a:lstStyle xmlns:a="http://schemas.openxmlformats.org/drawingml/2006/main"/>
           <a:p xmlns:a="http://schemas.openxmlformats.org/drawingml/2006/main">
             <a:pPr>
+              <a:buNone/>
               <a:defRPr sz="1125" b="1">
                 <a:solidFill>
                   <a:srgbClr val="202A44"/>
@@ -26959,6 +27208,7 @@
           <a:lstStyle xmlns:a="http://schemas.openxmlformats.org/drawingml/2006/main"/>
           <a:p xmlns:a="http://schemas.openxmlformats.org/drawingml/2006/main">
             <a:pPr>
+              <a:buNone/>
               <a:defRPr sz="975">
                 <a:solidFill>
                   <a:srgbClr val="56647A"/>
@@ -26982,6 +27232,7 @@
           </a:p>
           <a:p xmlns:a="http://schemas.openxmlformats.org/drawingml/2006/main">
             <a:pPr>
+              <a:buNone/>
               <a:defRPr sz="975">
                 <a:solidFill>
                   <a:srgbClr val="56647A"/>
@@ -27039,6 +27290,7 @@
           <a:lstStyle xmlns:a="http://schemas.openxmlformats.org/drawingml/2006/main"/>
           <a:p xmlns:a="http://schemas.openxmlformats.org/drawingml/2006/main">
             <a:pPr>
+              <a:buNone/>
               <a:defRPr sz="900">
                 <a:solidFill>
                   <a:srgbClr val="56647A"/>
@@ -27130,6 +27382,7 @@
           <a:lstStyle xmlns:a="http://schemas.openxmlformats.org/drawingml/2006/main"/>
           <a:p xmlns:a="http://schemas.openxmlformats.org/drawingml/2006/main">
             <a:pPr>
+              <a:buNone/>
               <a:defRPr sz="1125" b="1">
                 <a:solidFill>
                   <a:srgbClr val="202A44"/>
@@ -27187,6 +27440,7 @@
           <a:lstStyle xmlns:a="http://schemas.openxmlformats.org/drawingml/2006/main"/>
           <a:p xmlns:a="http://schemas.openxmlformats.org/drawingml/2006/main">
             <a:pPr>
+              <a:buNone/>
               <a:defRPr sz="975">
                 <a:solidFill>
                   <a:srgbClr val="56647A"/>
@@ -27210,6 +27464,7 @@
           </a:p>
           <a:p xmlns:a="http://schemas.openxmlformats.org/drawingml/2006/main">
             <a:pPr>
+              <a:buNone/>
               <a:defRPr sz="975">
                 <a:solidFill>
                   <a:srgbClr val="56647A"/>
@@ -27267,6 +27522,7 @@
           <a:lstStyle xmlns:a="http://schemas.openxmlformats.org/drawingml/2006/main"/>
           <a:p xmlns:a="http://schemas.openxmlformats.org/drawingml/2006/main">
             <a:pPr>
+              <a:buNone/>
               <a:defRPr sz="900">
                 <a:solidFill>
                   <a:srgbClr val="56647A"/>
@@ -27356,6 +27612,7 @@
           <a:lstStyle xmlns:a="http://schemas.openxmlformats.org/drawingml/2006/main"/>
           <a:p xmlns:a="http://schemas.openxmlformats.org/drawingml/2006/main">
             <a:pPr algn="ctr">
+              <a:buNone/>
               <a:defRPr sz="975" b="1">
                 <a:solidFill>
                   <a:srgbClr val="202A44"/>
@@ -27413,6 +27670,7 @@
           <a:lstStyle xmlns:a="http://schemas.openxmlformats.org/drawingml/2006/main"/>
           <a:p xmlns:a="http://schemas.openxmlformats.org/drawingml/2006/main">
             <a:pPr algn="ctr">
+              <a:buNone/>
               <a:defRPr sz="900">
                 <a:solidFill>
                   <a:srgbClr val="56647A"/>
@@ -27470,6 +27728,7 @@
           <a:lstStyle xmlns:a="http://schemas.openxmlformats.org/drawingml/2006/main"/>
           <a:p xmlns:a="http://schemas.openxmlformats.org/drawingml/2006/main">
             <a:pPr algn="r">
+              <a:buNone/>
               <a:defRPr sz="900">
                 <a:solidFill>
                   <a:srgbClr val="56647A"/>
